--- a/机器学习/课件/ML-复习2026.pptx
+++ b/机器学习/课件/ML-复习2026.pptx
@@ -1,36 +1,36 @@
 
 <file path=ppt/presentation.xml><?xml version="1.0" encoding="utf-8"?>
-<p:presentation xmlns:a="http://schemas.openxmlformats.org/drawingml/2006/main" xmlns:r="http://schemas.openxmlformats.org/officeDocument/2006/relationships" xmlns:p="http://schemas.openxmlformats.org/presentationml/2006/main" saveSubsetFonts="1">
+<p:presentation xmlns:a="http://schemas.openxmlformats.org/drawingml/2006/main" xmlns:r="http://schemas.openxmlformats.org/officeDocument/2006/relationships" xmlns:p="http://schemas.openxmlformats.org/presentationml/2006/main">
   <p:sldMasterIdLst>
     <p:sldMasterId id="2147483648" r:id="rId1"/>
   </p:sldMasterIdLst>
   <p:notesMasterIdLst>
-    <p:notesMasterId r:id="rId22"/>
+    <p:notesMasterId r:id="rId4"/>
   </p:notesMasterIdLst>
   <p:handoutMasterIdLst>
-    <p:handoutMasterId r:id="rId23"/>
+    <p:handoutMasterId r:id="rId24"/>
   </p:handoutMasterIdLst>
   <p:sldIdLst>
-    <p:sldId id="257" r:id="rId2"/>
-    <p:sldId id="440" r:id="rId3"/>
-    <p:sldId id="441" r:id="rId4"/>
-    <p:sldId id="442" r:id="rId5"/>
-    <p:sldId id="338" r:id="rId6"/>
-    <p:sldId id="456" r:id="rId7"/>
-    <p:sldId id="443" r:id="rId8"/>
-    <p:sldId id="444" r:id="rId9"/>
-    <p:sldId id="453" r:id="rId10"/>
-    <p:sldId id="445" r:id="rId11"/>
-    <p:sldId id="452" r:id="rId12"/>
-    <p:sldId id="446" r:id="rId13"/>
-    <p:sldId id="447" r:id="rId14"/>
-    <p:sldId id="455" r:id="rId15"/>
-    <p:sldId id="457" r:id="rId16"/>
-    <p:sldId id="448" r:id="rId17"/>
-    <p:sldId id="458" r:id="rId18"/>
-    <p:sldId id="449" r:id="rId19"/>
-    <p:sldId id="454" r:id="rId20"/>
-    <p:sldId id="459" r:id="rId21"/>
+    <p:sldId id="257" r:id="rId3"/>
+    <p:sldId id="440" r:id="rId5"/>
+    <p:sldId id="441" r:id="rId6"/>
+    <p:sldId id="442" r:id="rId7"/>
+    <p:sldId id="338" r:id="rId8"/>
+    <p:sldId id="456" r:id="rId9"/>
+    <p:sldId id="443" r:id="rId10"/>
+    <p:sldId id="444" r:id="rId11"/>
+    <p:sldId id="453" r:id="rId12"/>
+    <p:sldId id="445" r:id="rId13"/>
+    <p:sldId id="452" r:id="rId14"/>
+    <p:sldId id="446" r:id="rId15"/>
+    <p:sldId id="447" r:id="rId16"/>
+    <p:sldId id="455" r:id="rId17"/>
+    <p:sldId id="457" r:id="rId18"/>
+    <p:sldId id="448" r:id="rId19"/>
+    <p:sldId id="458" r:id="rId20"/>
+    <p:sldId id="449" r:id="rId21"/>
+    <p:sldId id="454" r:id="rId22"/>
+    <p:sldId id="459" r:id="rId23"/>
   </p:sldIdLst>
   <p:sldSz cx="9144000" cy="6858000" type="screen4x3"/>
   <p:notesSz cx="9144000" cy="6858000"/>
@@ -162,31 +162,17 @@
   <p:extLst>
     <p:ext uri="{EFAFB233-063F-42B5-8137-9DF3F51BA10A}">
       <p15:sldGuideLst xmlns:p15="http://schemas.microsoft.com/office/powerpoint/2012/main">
-        <p15:guide id="1" orient="horz" pos="2160">
+        <p15:guide id="1" orient="horz" pos="2160" userDrawn="1">
           <p15:clr>
             <a:srgbClr val="A4A3A4"/>
           </p15:clr>
         </p15:guide>
-        <p15:guide id="2" pos="2880">
+        <p15:guide id="2" pos="2857" userDrawn="1">
           <p15:clr>
             <a:srgbClr val="A4A3A4"/>
           </p15:clr>
         </p15:guide>
       </p15:sldGuideLst>
-    </p:ext>
-    <p:ext uri="{2D200454-40CA-4A62-9FC3-DE9A4176ACB9}">
-      <p15:notesGuideLst xmlns:p15="http://schemas.microsoft.com/office/powerpoint/2012/main">
-        <p15:guide id="1" orient="horz" pos="2160">
-          <p15:clr>
-            <a:srgbClr val="A4A3A4"/>
-          </p15:clr>
-        </p15:guide>
-        <p15:guide id="2" pos="2880">
-          <p15:clr>
-            <a:srgbClr val="A4A3A4"/>
-          </p15:clr>
-        </p15:guide>
-      </p15:notesGuideLst>
     </p:ext>
   </p:extLst>
 </p:presentation>
@@ -219,13 +205,7 @@
       </p:grpSpPr>
       <p:sp>
         <p:nvSpPr>
-          <p:cNvPr id="2" name="页眉占位符 1">
-            <a:extLst>
-              <a:ext uri="{FF2B5EF4-FFF2-40B4-BE49-F238E27FC236}">
-                <a16:creationId xmlns:a16="http://schemas.microsoft.com/office/drawing/2014/main" id="{16F1F154-D08B-4637-BD6B-EE69DBEDFA29}"/>
-              </a:ext>
-            </a:extLst>
-          </p:cNvPr>
+          <p:cNvPr id="2" name="页眉占位符 1"/>
           <p:cNvSpPr>
             <a:spLocks noGrp="1"/>
           </p:cNvSpPr>
@@ -268,13 +248,7 @@
       </p:sp>
       <p:sp>
         <p:nvSpPr>
-          <p:cNvPr id="3" name="日期占位符 2">
-            <a:extLst>
-              <a:ext uri="{FF2B5EF4-FFF2-40B4-BE49-F238E27FC236}">
-                <a16:creationId xmlns:a16="http://schemas.microsoft.com/office/drawing/2014/main" id="{73F24782-B8CC-4BB5-84E6-002BAC732084}"/>
-              </a:ext>
-            </a:extLst>
-          </p:cNvPr>
+          <p:cNvPr id="3" name="日期占位符 2"/>
           <p:cNvSpPr>
             <a:spLocks noGrp="1"/>
           </p:cNvSpPr>
@@ -313,10 +287,6 @@
             </a:pPr>
             <a:fld id="{081DFCA3-140D-47A9-812B-EF4671D077DA}" type="datetimeFigureOut">
               <a:rPr lang="zh-CN" altLang="en-US"/>
-              <a:pPr>
-                <a:defRPr/>
-              </a:pPr>
-              <a:t>2026/6/2</a:t>
             </a:fld>
             <a:endParaRPr lang="zh-CN" altLang="en-US"/>
           </a:p>
@@ -324,13 +294,7 @@
       </p:sp>
       <p:sp>
         <p:nvSpPr>
-          <p:cNvPr id="4" name="页脚占位符 3">
-            <a:extLst>
-              <a:ext uri="{FF2B5EF4-FFF2-40B4-BE49-F238E27FC236}">
-                <a16:creationId xmlns:a16="http://schemas.microsoft.com/office/drawing/2014/main" id="{DB747B93-988F-4543-BD9C-1C7CB3B58114}"/>
-              </a:ext>
-            </a:extLst>
-          </p:cNvPr>
+          <p:cNvPr id="4" name="页脚占位符 3"/>
           <p:cNvSpPr>
             <a:spLocks noGrp="1"/>
           </p:cNvSpPr>
@@ -373,13 +337,7 @@
       </p:sp>
       <p:sp>
         <p:nvSpPr>
-          <p:cNvPr id="5" name="灯片编号占位符 4">
-            <a:extLst>
-              <a:ext uri="{FF2B5EF4-FFF2-40B4-BE49-F238E27FC236}">
-                <a16:creationId xmlns:a16="http://schemas.microsoft.com/office/drawing/2014/main" id="{BD722FE9-DBFB-41DB-83A5-159F33A862E4}"/>
-              </a:ext>
-            </a:extLst>
-          </p:cNvPr>
+          <p:cNvPr id="5" name="灯片编号占位符 4"/>
           <p:cNvSpPr>
             <a:spLocks noGrp="1"/>
           </p:cNvSpPr>
@@ -397,11 +355,7 @@
           </a:prstGeom>
         </p:spPr>
         <p:txBody>
-          <a:bodyPr vert="horz" wrap="square" lIns="91440" tIns="45720" rIns="91440" bIns="45720" numCol="1" anchor="b" anchorCtr="0" compatLnSpc="1">
-            <a:prstTxWarp prst="textNoShape">
-              <a:avLst/>
-            </a:prstTxWarp>
-          </a:bodyPr>
+          <a:bodyPr vert="horz" wrap="square" lIns="91440" tIns="45720" rIns="91440" bIns="45720" numCol="1" anchor="b" anchorCtr="0" compatLnSpc="1"/>
           <a:lstStyle>
             <a:lvl1pPr algn="r" eaLnBrk="1" hangingPunct="1">
               <a:defRPr sz="1200"/>
@@ -413,21 +367,12 @@
             </a:pPr>
             <a:fld id="{274AB649-9B77-47B4-86AE-79A195B7BF2A}" type="slidenum">
               <a:rPr lang="zh-CN" altLang="en-US"/>
-              <a:pPr>
-                <a:defRPr/>
-              </a:pPr>
-              <a:t>‹#›</a:t>
             </a:fld>
             <a:endParaRPr lang="zh-CN" altLang="en-US"/>
           </a:p>
         </p:txBody>
       </p:sp>
     </p:spTree>
-    <p:extLst>
-      <p:ext uri="{BB962C8B-B14F-4D97-AF65-F5344CB8AC3E}">
-        <p14:creationId xmlns:p14="http://schemas.microsoft.com/office/powerpoint/2010/main" val="1"/>
-      </p:ext>
-    </p:extLst>
   </p:cSld>
   <p:clrMap bg1="lt1" tx1="dk1" bg2="lt2" tx2="dk2" accent1="accent1" accent2="accent2" accent3="accent3" accent4="accent4" accent5="accent5" accent6="accent6" hlink="hlink" folHlink="folHlink"/>
 </p:handoutMaster>
@@ -460,13 +405,7 @@
       </p:grpSpPr>
       <p:sp>
         <p:nvSpPr>
-          <p:cNvPr id="2" name="页眉占位符 1">
-            <a:extLst>
-              <a:ext uri="{FF2B5EF4-FFF2-40B4-BE49-F238E27FC236}">
-                <a16:creationId xmlns:a16="http://schemas.microsoft.com/office/drawing/2014/main" id="{BDCBF277-B712-400F-957F-39A8A840EED6}"/>
-              </a:ext>
-            </a:extLst>
-          </p:cNvPr>
+          <p:cNvPr id="2" name="页眉占位符 1"/>
           <p:cNvSpPr>
             <a:spLocks noGrp="1"/>
           </p:cNvSpPr>
@@ -509,13 +448,7 @@
       </p:sp>
       <p:sp>
         <p:nvSpPr>
-          <p:cNvPr id="3" name="日期占位符 2">
-            <a:extLst>
-              <a:ext uri="{FF2B5EF4-FFF2-40B4-BE49-F238E27FC236}">
-                <a16:creationId xmlns:a16="http://schemas.microsoft.com/office/drawing/2014/main" id="{D931A883-E5D4-4659-8BCA-E5DCFAE454B1}"/>
-              </a:ext>
-            </a:extLst>
-          </p:cNvPr>
+          <p:cNvPr id="3" name="日期占位符 2"/>
           <p:cNvSpPr>
             <a:spLocks noGrp="1"/>
           </p:cNvSpPr>
@@ -554,10 +487,6 @@
             </a:pPr>
             <a:fld id="{822AF62D-6F31-46D6-B269-0F8F56C4162E}" type="datetimeFigureOut">
               <a:rPr lang="zh-CN" altLang="en-US"/>
-              <a:pPr>
-                <a:defRPr/>
-              </a:pPr>
-              <a:t>2026/6/2</a:t>
             </a:fld>
             <a:endParaRPr lang="zh-CN" altLang="en-US"/>
           </a:p>
@@ -565,13 +494,7 @@
       </p:sp>
       <p:sp>
         <p:nvSpPr>
-          <p:cNvPr id="4" name="幻灯片图像占位符 3">
-            <a:extLst>
-              <a:ext uri="{FF2B5EF4-FFF2-40B4-BE49-F238E27FC236}">
-                <a16:creationId xmlns:a16="http://schemas.microsoft.com/office/drawing/2014/main" id="{5F41D5C3-29C3-4D18-A73E-68E70946BD1C}"/>
-              </a:ext>
-            </a:extLst>
-          </p:cNvPr>
+          <p:cNvPr id="4" name="幻灯片图像占位符 3"/>
           <p:cNvSpPr>
             <a:spLocks noGrp="1" noRot="1" noChangeAspect="1"/>
           </p:cNvSpPr>
@@ -605,13 +528,7 @@
       </p:sp>
       <p:sp>
         <p:nvSpPr>
-          <p:cNvPr id="5" name="备注占位符 4">
-            <a:extLst>
-              <a:ext uri="{FF2B5EF4-FFF2-40B4-BE49-F238E27FC236}">
-                <a16:creationId xmlns:a16="http://schemas.microsoft.com/office/drawing/2014/main" id="{4E8581BB-C447-4235-AF25-DF5DD22191EA}"/>
-              </a:ext>
-            </a:extLst>
-          </p:cNvPr>
+          <p:cNvPr id="5" name="备注占位符 4"/>
           <p:cNvSpPr>
             <a:spLocks noGrp="1"/>
           </p:cNvSpPr>
@@ -637,6 +554,7 @@
               <a:rPr lang="zh-CN" altLang="en-US" noProof="0"/>
               <a:t>单击此处编辑母版文本样式</a:t>
             </a:r>
+            <a:endParaRPr lang="zh-CN" altLang="en-US" noProof="0"/>
           </a:p>
           <a:p>
             <a:pPr lvl="1"/>
@@ -644,6 +562,7 @@
               <a:rPr lang="zh-CN" altLang="en-US" noProof="0"/>
               <a:t>第二级</a:t>
             </a:r>
+            <a:endParaRPr lang="zh-CN" altLang="en-US" noProof="0"/>
           </a:p>
           <a:p>
             <a:pPr lvl="2"/>
@@ -651,6 +570,7 @@
               <a:rPr lang="zh-CN" altLang="en-US" noProof="0"/>
               <a:t>第三级</a:t>
             </a:r>
+            <a:endParaRPr lang="zh-CN" altLang="en-US" noProof="0"/>
           </a:p>
           <a:p>
             <a:pPr lvl="3"/>
@@ -658,6 +578,7 @@
               <a:rPr lang="zh-CN" altLang="en-US" noProof="0"/>
               <a:t>第四级</a:t>
             </a:r>
+            <a:endParaRPr lang="zh-CN" altLang="en-US" noProof="0"/>
           </a:p>
           <a:p>
             <a:pPr lvl="4"/>
@@ -665,18 +586,13 @@
               <a:rPr lang="zh-CN" altLang="en-US" noProof="0"/>
               <a:t>第五级</a:t>
             </a:r>
+            <a:endParaRPr lang="zh-CN" altLang="en-US" noProof="0"/>
           </a:p>
         </p:txBody>
       </p:sp>
       <p:sp>
         <p:nvSpPr>
-          <p:cNvPr id="6" name="页脚占位符 5">
-            <a:extLst>
-              <a:ext uri="{FF2B5EF4-FFF2-40B4-BE49-F238E27FC236}">
-                <a16:creationId xmlns:a16="http://schemas.microsoft.com/office/drawing/2014/main" id="{BC2BF2D4-077B-491A-A12A-DA192A4FE69B}"/>
-              </a:ext>
-            </a:extLst>
-          </p:cNvPr>
+          <p:cNvPr id="6" name="页脚占位符 5"/>
           <p:cNvSpPr>
             <a:spLocks noGrp="1"/>
           </p:cNvSpPr>
@@ -719,13 +635,7 @@
       </p:sp>
       <p:sp>
         <p:nvSpPr>
-          <p:cNvPr id="7" name="灯片编号占位符 6">
-            <a:extLst>
-              <a:ext uri="{FF2B5EF4-FFF2-40B4-BE49-F238E27FC236}">
-                <a16:creationId xmlns:a16="http://schemas.microsoft.com/office/drawing/2014/main" id="{8E56B28C-60B8-44BD-9F27-BF4F6458E97E}"/>
-              </a:ext>
-            </a:extLst>
-          </p:cNvPr>
+          <p:cNvPr id="7" name="灯片编号占位符 6"/>
           <p:cNvSpPr>
             <a:spLocks noGrp="1"/>
           </p:cNvSpPr>
@@ -743,11 +653,7 @@
           </a:prstGeom>
         </p:spPr>
         <p:txBody>
-          <a:bodyPr vert="horz" wrap="square" lIns="91440" tIns="45720" rIns="91440" bIns="45720" numCol="1" anchor="b" anchorCtr="0" compatLnSpc="1">
-            <a:prstTxWarp prst="textNoShape">
-              <a:avLst/>
-            </a:prstTxWarp>
-          </a:bodyPr>
+          <a:bodyPr vert="horz" wrap="square" lIns="91440" tIns="45720" rIns="91440" bIns="45720" numCol="1" anchor="b" anchorCtr="0" compatLnSpc="1"/>
           <a:lstStyle>
             <a:lvl1pPr algn="r" eaLnBrk="1" hangingPunct="1">
               <a:defRPr sz="1200"/>
@@ -759,10 +665,6 @@
             </a:pPr>
             <a:fld id="{E942E71B-E9B3-4820-B67A-F8BCFD290363}" type="slidenum">
               <a:rPr lang="zh-CN" altLang="en-US"/>
-              <a:pPr>
-                <a:defRPr/>
-              </a:pPr>
-              <a:t>‹#›</a:t>
             </a:fld>
             <a:endParaRPr lang="zh-CN" altLang="en-US"/>
           </a:p>
@@ -915,13 +817,7 @@
       </p:grpSpPr>
       <p:sp>
         <p:nvSpPr>
-          <p:cNvPr id="6146" name="Rectangle 2">
-            <a:extLst>
-              <a:ext uri="{FF2B5EF4-FFF2-40B4-BE49-F238E27FC236}">
-                <a16:creationId xmlns:a16="http://schemas.microsoft.com/office/drawing/2014/main" id="{4D01A8CA-9D3D-4C4D-8CDD-E6DF20BF1131}"/>
-              </a:ext>
-            </a:extLst>
-          </p:cNvPr>
+          <p:cNvPr id="6146" name="Rectangle 2"/>
           <p:cNvSpPr>
             <a:spLocks noGrp="1" noChangeArrowheads="1"/>
           </p:cNvSpPr>
@@ -952,13 +848,9 @@
           </a:extLst>
         </p:spPr>
         <p:txBody>
-          <a:bodyPr wrap="square" numCol="1" anchor="t" anchorCtr="0" compatLnSpc="1">
-            <a:prstTxWarp prst="textNoShape">
-              <a:avLst/>
-            </a:prstTxWarp>
-          </a:bodyPr>
+          <a:bodyPr wrap="square" numCol="1" anchor="t" anchorCtr="0" compatLnSpc="1"/>
           <a:lstStyle>
-            <a:lvl1pPr defTabSz="973138">
+            <a:lvl1pPr defTabSz="973455">
               <a:spcBef>
                 <a:spcPct val="30000"/>
               </a:spcBef>
@@ -970,7 +862,7 @@
                 <a:ea typeface="宋体" panose="02010600030101010101" pitchFamily="2" charset="-122"/>
               </a:defRPr>
             </a:lvl1pPr>
-            <a:lvl2pPr marL="742950" indent="-285750" defTabSz="973138">
+            <a:lvl2pPr marL="742950" indent="-285750" defTabSz="973455">
               <a:spcBef>
                 <a:spcPct val="30000"/>
               </a:spcBef>
@@ -982,7 +874,7 @@
                 <a:ea typeface="宋体" panose="02010600030101010101" pitchFamily="2" charset="-122"/>
               </a:defRPr>
             </a:lvl2pPr>
-            <a:lvl3pPr marL="1143000" indent="-228600" defTabSz="973138">
+            <a:lvl3pPr marL="1143000" indent="-228600" defTabSz="973455">
               <a:spcBef>
                 <a:spcPct val="30000"/>
               </a:spcBef>
@@ -994,7 +886,7 @@
                 <a:ea typeface="宋体" panose="02010600030101010101" pitchFamily="2" charset="-122"/>
               </a:defRPr>
             </a:lvl3pPr>
-            <a:lvl4pPr marL="1600200" indent="-228600" defTabSz="973138">
+            <a:lvl4pPr marL="1600200" indent="-228600" defTabSz="973455">
               <a:spcBef>
                 <a:spcPct val="30000"/>
               </a:spcBef>
@@ -1006,7 +898,7 @@
                 <a:ea typeface="宋体" panose="02010600030101010101" pitchFamily="2" charset="-122"/>
               </a:defRPr>
             </a:lvl4pPr>
-            <a:lvl5pPr marL="2057400" indent="-228600" defTabSz="973138">
+            <a:lvl5pPr marL="2057400" indent="-228600" defTabSz="973455">
               <a:spcBef>
                 <a:spcPct val="30000"/>
               </a:spcBef>
@@ -1018,7 +910,7 @@
                 <a:ea typeface="宋体" panose="02010600030101010101" pitchFamily="2" charset="-122"/>
               </a:defRPr>
             </a:lvl5pPr>
-            <a:lvl6pPr marL="2514600" indent="-228600" defTabSz="973138" eaLnBrk="0" fontAlgn="base" hangingPunct="0">
+            <a:lvl6pPr marL="2514600" indent="-228600" defTabSz="973455" eaLnBrk="0" fontAlgn="base" hangingPunct="0">
               <a:spcBef>
                 <a:spcPct val="30000"/>
               </a:spcBef>
@@ -1033,7 +925,7 @@
                 <a:ea typeface="宋体" panose="02010600030101010101" pitchFamily="2" charset="-122"/>
               </a:defRPr>
             </a:lvl6pPr>
-            <a:lvl7pPr marL="2971800" indent="-228600" defTabSz="973138" eaLnBrk="0" fontAlgn="base" hangingPunct="0">
+            <a:lvl7pPr marL="2971800" indent="-228600" defTabSz="973455" eaLnBrk="0" fontAlgn="base" hangingPunct="0">
               <a:spcBef>
                 <a:spcPct val="30000"/>
               </a:spcBef>
@@ -1048,7 +940,7 @@
                 <a:ea typeface="宋体" panose="02010600030101010101" pitchFamily="2" charset="-122"/>
               </a:defRPr>
             </a:lvl7pPr>
-            <a:lvl8pPr marL="3429000" indent="-228600" defTabSz="973138" eaLnBrk="0" fontAlgn="base" hangingPunct="0">
+            <a:lvl8pPr marL="3429000" indent="-228600" defTabSz="973455" eaLnBrk="0" fontAlgn="base" hangingPunct="0">
               <a:spcBef>
                 <a:spcPct val="30000"/>
               </a:spcBef>
@@ -1063,7 +955,7 @@
                 <a:ea typeface="宋体" panose="02010600030101010101" pitchFamily="2" charset="-122"/>
               </a:defRPr>
             </a:lvl8pPr>
-            <a:lvl9pPr marL="3886200" indent="-228600" defTabSz="973138" eaLnBrk="0" fontAlgn="base" hangingPunct="0">
+            <a:lvl9pPr marL="3886200" indent="-228600" defTabSz="973455" eaLnBrk="0" fontAlgn="base" hangingPunct="0">
               <a:spcBef>
                 <a:spcPct val="30000"/>
               </a:spcBef>
@@ -1094,18 +986,15 @@
               </a:rPr>
               <a:t>高等代数</a:t>
             </a:r>
+            <a:endParaRPr kumimoji="1" lang="en-US" altLang="zh-CN" sz="1300">
+              <a:latin typeface="Times New Roman" panose="02020603050405020304" pitchFamily="18" charset="0"/>
+            </a:endParaRPr>
           </a:p>
         </p:txBody>
       </p:sp>
       <p:sp>
         <p:nvSpPr>
-          <p:cNvPr id="6147" name="Rectangle 3">
-            <a:extLst>
-              <a:ext uri="{FF2B5EF4-FFF2-40B4-BE49-F238E27FC236}">
-                <a16:creationId xmlns:a16="http://schemas.microsoft.com/office/drawing/2014/main" id="{9908787A-D443-429F-A574-148DE50B38AD}"/>
-              </a:ext>
-            </a:extLst>
-          </p:cNvPr>
+          <p:cNvPr id="6147" name="Rectangle 3"/>
           <p:cNvSpPr>
             <a:spLocks noGrp="1" noChangeArrowheads="1"/>
           </p:cNvSpPr>
@@ -1136,13 +1025,9 @@
           </a:extLst>
         </p:spPr>
         <p:txBody>
-          <a:bodyPr wrap="square" numCol="1" anchor="t" anchorCtr="0" compatLnSpc="1">
-            <a:prstTxWarp prst="textNoShape">
-              <a:avLst/>
-            </a:prstTxWarp>
-          </a:bodyPr>
+          <a:bodyPr wrap="square" numCol="1" anchor="t" anchorCtr="0" compatLnSpc="1"/>
           <a:lstStyle>
-            <a:lvl1pPr defTabSz="973138">
+            <a:lvl1pPr defTabSz="973455">
               <a:spcBef>
                 <a:spcPct val="30000"/>
               </a:spcBef>
@@ -1154,7 +1039,7 @@
                 <a:ea typeface="宋体" panose="02010600030101010101" pitchFamily="2" charset="-122"/>
               </a:defRPr>
             </a:lvl1pPr>
-            <a:lvl2pPr marL="742950" indent="-285750" defTabSz="973138">
+            <a:lvl2pPr marL="742950" indent="-285750" defTabSz="973455">
               <a:spcBef>
                 <a:spcPct val="30000"/>
               </a:spcBef>
@@ -1166,7 +1051,7 @@
                 <a:ea typeface="宋体" panose="02010600030101010101" pitchFamily="2" charset="-122"/>
               </a:defRPr>
             </a:lvl2pPr>
-            <a:lvl3pPr marL="1143000" indent="-228600" defTabSz="973138">
+            <a:lvl3pPr marL="1143000" indent="-228600" defTabSz="973455">
               <a:spcBef>
                 <a:spcPct val="30000"/>
               </a:spcBef>
@@ -1178,7 +1063,7 @@
                 <a:ea typeface="宋体" panose="02010600030101010101" pitchFamily="2" charset="-122"/>
               </a:defRPr>
             </a:lvl3pPr>
-            <a:lvl4pPr marL="1600200" indent="-228600" defTabSz="973138">
+            <a:lvl4pPr marL="1600200" indent="-228600" defTabSz="973455">
               <a:spcBef>
                 <a:spcPct val="30000"/>
               </a:spcBef>
@@ -1190,7 +1075,7 @@
                 <a:ea typeface="宋体" panose="02010600030101010101" pitchFamily="2" charset="-122"/>
               </a:defRPr>
             </a:lvl4pPr>
-            <a:lvl5pPr marL="2057400" indent="-228600" defTabSz="973138">
+            <a:lvl5pPr marL="2057400" indent="-228600" defTabSz="973455">
               <a:spcBef>
                 <a:spcPct val="30000"/>
               </a:spcBef>
@@ -1202,7 +1087,7 @@
                 <a:ea typeface="宋体" panose="02010600030101010101" pitchFamily="2" charset="-122"/>
               </a:defRPr>
             </a:lvl5pPr>
-            <a:lvl6pPr marL="2514600" indent="-228600" defTabSz="973138" eaLnBrk="0" fontAlgn="base" hangingPunct="0">
+            <a:lvl6pPr marL="2514600" indent="-228600" defTabSz="973455" eaLnBrk="0" fontAlgn="base" hangingPunct="0">
               <a:spcBef>
                 <a:spcPct val="30000"/>
               </a:spcBef>
@@ -1217,7 +1102,7 @@
                 <a:ea typeface="宋体" panose="02010600030101010101" pitchFamily="2" charset="-122"/>
               </a:defRPr>
             </a:lvl6pPr>
-            <a:lvl7pPr marL="2971800" indent="-228600" defTabSz="973138" eaLnBrk="0" fontAlgn="base" hangingPunct="0">
+            <a:lvl7pPr marL="2971800" indent="-228600" defTabSz="973455" eaLnBrk="0" fontAlgn="base" hangingPunct="0">
               <a:spcBef>
                 <a:spcPct val="30000"/>
               </a:spcBef>
@@ -1232,7 +1117,7 @@
                 <a:ea typeface="宋体" panose="02010600030101010101" pitchFamily="2" charset="-122"/>
               </a:defRPr>
             </a:lvl7pPr>
-            <a:lvl8pPr marL="3429000" indent="-228600" defTabSz="973138" eaLnBrk="0" fontAlgn="base" hangingPunct="0">
+            <a:lvl8pPr marL="3429000" indent="-228600" defTabSz="973455" eaLnBrk="0" fontAlgn="base" hangingPunct="0">
               <a:spcBef>
                 <a:spcPct val="30000"/>
               </a:spcBef>
@@ -1247,7 +1132,7 @@
                 <a:ea typeface="宋体" panose="02010600030101010101" pitchFamily="2" charset="-122"/>
               </a:defRPr>
             </a:lvl8pPr>
-            <a:lvl9pPr marL="3886200" indent="-228600" defTabSz="973138" eaLnBrk="0" fontAlgn="base" hangingPunct="0">
+            <a:lvl9pPr marL="3886200" indent="-228600" defTabSz="973455" eaLnBrk="0" fontAlgn="base" hangingPunct="0">
               <a:spcBef>
                 <a:spcPct val="30000"/>
               </a:spcBef>
@@ -1276,15 +1161,6 @@
               <a:rPr kumimoji="1" lang="zh-CN" altLang="en-US" sz="1300" smtClean="0">
                 <a:latin typeface="Times New Roman" panose="02020603050405020304" pitchFamily="18" charset="0"/>
               </a:rPr>
-              <a:pPr fontAlgn="base">
-                <a:spcBef>
-                  <a:spcPct val="0"/>
-                </a:spcBef>
-                <a:spcAft>
-                  <a:spcPct val="0"/>
-                </a:spcAft>
-              </a:pPr>
-              <a:t>2026/6/2</a:t>
             </a:fld>
             <a:endParaRPr kumimoji="1" lang="en-US" altLang="zh-CN" sz="1300">
               <a:latin typeface="Times New Roman" panose="02020603050405020304" pitchFamily="18" charset="0"/>
@@ -1294,13 +1170,7 @@
       </p:sp>
       <p:sp>
         <p:nvSpPr>
-          <p:cNvPr id="6148" name="Rectangle 7">
-            <a:extLst>
-              <a:ext uri="{FF2B5EF4-FFF2-40B4-BE49-F238E27FC236}">
-                <a16:creationId xmlns:a16="http://schemas.microsoft.com/office/drawing/2014/main" id="{B8131C3E-0544-4AEA-AB54-2E5CF4AE25D3}"/>
-              </a:ext>
-            </a:extLst>
-          </p:cNvPr>
+          <p:cNvPr id="6148" name="Rectangle 7"/>
           <p:cNvSpPr>
             <a:spLocks noGrp="1" noChangeArrowheads="1"/>
           </p:cNvSpPr>
@@ -1333,7 +1203,7 @@
         <p:txBody>
           <a:bodyPr/>
           <a:lstStyle>
-            <a:lvl1pPr defTabSz="973138">
+            <a:lvl1pPr defTabSz="973455">
               <a:spcBef>
                 <a:spcPct val="30000"/>
               </a:spcBef>
@@ -1345,7 +1215,7 @@
                 <a:ea typeface="宋体" panose="02010600030101010101" pitchFamily="2" charset="-122"/>
               </a:defRPr>
             </a:lvl1pPr>
-            <a:lvl2pPr marL="742950" indent="-285750" defTabSz="973138">
+            <a:lvl2pPr marL="742950" indent="-285750" defTabSz="973455">
               <a:spcBef>
                 <a:spcPct val="30000"/>
               </a:spcBef>
@@ -1357,7 +1227,7 @@
                 <a:ea typeface="宋体" panose="02010600030101010101" pitchFamily="2" charset="-122"/>
               </a:defRPr>
             </a:lvl2pPr>
-            <a:lvl3pPr marL="1143000" indent="-228600" defTabSz="973138">
+            <a:lvl3pPr marL="1143000" indent="-228600" defTabSz="973455">
               <a:spcBef>
                 <a:spcPct val="30000"/>
               </a:spcBef>
@@ -1369,7 +1239,7 @@
                 <a:ea typeface="宋体" panose="02010600030101010101" pitchFamily="2" charset="-122"/>
               </a:defRPr>
             </a:lvl3pPr>
-            <a:lvl4pPr marL="1600200" indent="-228600" defTabSz="973138">
+            <a:lvl4pPr marL="1600200" indent="-228600" defTabSz="973455">
               <a:spcBef>
                 <a:spcPct val="30000"/>
               </a:spcBef>
@@ -1381,7 +1251,7 @@
                 <a:ea typeface="宋体" panose="02010600030101010101" pitchFamily="2" charset="-122"/>
               </a:defRPr>
             </a:lvl4pPr>
-            <a:lvl5pPr marL="2057400" indent="-228600" defTabSz="973138">
+            <a:lvl5pPr marL="2057400" indent="-228600" defTabSz="973455">
               <a:spcBef>
                 <a:spcPct val="30000"/>
               </a:spcBef>
@@ -1393,7 +1263,7 @@
                 <a:ea typeface="宋体" panose="02010600030101010101" pitchFamily="2" charset="-122"/>
               </a:defRPr>
             </a:lvl5pPr>
-            <a:lvl6pPr marL="2514600" indent="-228600" defTabSz="973138" eaLnBrk="0" fontAlgn="base" hangingPunct="0">
+            <a:lvl6pPr marL="2514600" indent="-228600" defTabSz="973455" eaLnBrk="0" fontAlgn="base" hangingPunct="0">
               <a:spcBef>
                 <a:spcPct val="30000"/>
               </a:spcBef>
@@ -1408,7 +1278,7 @@
                 <a:ea typeface="宋体" panose="02010600030101010101" pitchFamily="2" charset="-122"/>
               </a:defRPr>
             </a:lvl6pPr>
-            <a:lvl7pPr marL="2971800" indent="-228600" defTabSz="973138" eaLnBrk="0" fontAlgn="base" hangingPunct="0">
+            <a:lvl7pPr marL="2971800" indent="-228600" defTabSz="973455" eaLnBrk="0" fontAlgn="base" hangingPunct="0">
               <a:spcBef>
                 <a:spcPct val="30000"/>
               </a:spcBef>
@@ -1423,7 +1293,7 @@
                 <a:ea typeface="宋体" panose="02010600030101010101" pitchFamily="2" charset="-122"/>
               </a:defRPr>
             </a:lvl7pPr>
-            <a:lvl8pPr marL="3429000" indent="-228600" defTabSz="973138" eaLnBrk="0" fontAlgn="base" hangingPunct="0">
+            <a:lvl8pPr marL="3429000" indent="-228600" defTabSz="973455" eaLnBrk="0" fontAlgn="base" hangingPunct="0">
               <a:spcBef>
                 <a:spcPct val="30000"/>
               </a:spcBef>
@@ -1438,7 +1308,7 @@
                 <a:ea typeface="宋体" panose="02010600030101010101" pitchFamily="2" charset="-122"/>
               </a:defRPr>
             </a:lvl8pPr>
-            <a:lvl9pPr marL="3886200" indent="-228600" defTabSz="973138" eaLnBrk="0" fontAlgn="base" hangingPunct="0">
+            <a:lvl9pPr marL="3886200" indent="-228600" defTabSz="973455" eaLnBrk="0" fontAlgn="base" hangingPunct="0">
               <a:spcBef>
                 <a:spcPct val="30000"/>
               </a:spcBef>
@@ -1464,12 +1334,6 @@
               <a:rPr kumimoji="1" lang="en-US" altLang="zh-CN" sz="1300" smtClean="0">
                 <a:latin typeface="Times New Roman" panose="02020603050405020304" pitchFamily="18" charset="0"/>
               </a:rPr>
-              <a:pPr>
-                <a:spcBef>
-                  <a:spcPct val="0"/>
-                </a:spcBef>
-              </a:pPr>
-              <a:t>1</a:t>
             </a:fld>
             <a:endParaRPr kumimoji="1" lang="en-US" altLang="zh-CN" sz="1300">
               <a:latin typeface="Times New Roman" panose="02020603050405020304" pitchFamily="18" charset="0"/>
@@ -1479,13 +1343,7 @@
       </p:sp>
       <p:sp>
         <p:nvSpPr>
-          <p:cNvPr id="6149" name="Rectangle 2">
-            <a:extLst>
-              <a:ext uri="{FF2B5EF4-FFF2-40B4-BE49-F238E27FC236}">
-                <a16:creationId xmlns:a16="http://schemas.microsoft.com/office/drawing/2014/main" id="{4E4FE87F-CDE4-460E-881D-9ED4C3D8116E}"/>
-              </a:ext>
-            </a:extLst>
-          </p:cNvPr>
+          <p:cNvPr id="6149" name="Rectangle 2"/>
           <p:cNvSpPr>
             <a:spLocks noGrp="1" noRot="1" noChangeAspect="1" noChangeArrowheads="1" noTextEdit="1"/>
           </p:cNvSpPr>
@@ -1502,20 +1360,12 @@
               <a:srgbClr val="000000"/>
             </a:solidFill>
             <a:miter lim="800000"/>
-            <a:headEnd/>
-            <a:tailEnd/>
           </a:ln>
         </p:spPr>
       </p:sp>
       <p:sp>
         <p:nvSpPr>
-          <p:cNvPr id="6150" name="Rectangle 3">
-            <a:extLst>
-              <a:ext uri="{FF2B5EF4-FFF2-40B4-BE49-F238E27FC236}">
-                <a16:creationId xmlns:a16="http://schemas.microsoft.com/office/drawing/2014/main" id="{3E528532-329A-4864-9D0A-64808B13A79B}"/>
-              </a:ext>
-            </a:extLst>
-          </p:cNvPr>
+          <p:cNvPr id="6150" name="Rectangle 3"/>
           <p:cNvSpPr>
             <a:spLocks noGrp="1" noChangeArrowheads="1"/>
           </p:cNvSpPr>
@@ -1532,16 +1382,10 @@
               <a:srgbClr val="000000"/>
             </a:solidFill>
             <a:miter lim="800000"/>
-            <a:headEnd/>
-            <a:tailEnd/>
           </a:ln>
         </p:spPr>
         <p:txBody>
-          <a:bodyPr wrap="square" numCol="1" anchor="t" anchorCtr="0" compatLnSpc="1">
-            <a:prstTxWarp prst="textNoShape">
-              <a:avLst/>
-            </a:prstTxWarp>
-          </a:bodyPr>
+          <a:bodyPr wrap="square" numCol="1" anchor="t" anchorCtr="0" compatLnSpc="1"/>
           <a:lstStyle/>
           <a:p>
             <a:pPr eaLnBrk="1" hangingPunct="1">
@@ -1553,6 +1397,7 @@
               <a:rPr lang="zh-CN" altLang="en-US"/>
               <a:t>重庆大学</a:t>
             </a:r>
+            <a:endParaRPr lang="zh-CN" altLang="en-US"/>
           </a:p>
         </p:txBody>
       </p:sp>
@@ -1583,13 +1428,7 @@
       </p:grpSpPr>
       <p:sp>
         <p:nvSpPr>
-          <p:cNvPr id="12290" name="Rectangle 2">
-            <a:extLst>
-              <a:ext uri="{FF2B5EF4-FFF2-40B4-BE49-F238E27FC236}">
-                <a16:creationId xmlns:a16="http://schemas.microsoft.com/office/drawing/2014/main" id="{DDD982A9-5E02-48A1-96E2-36AE38A9E7D5}"/>
-              </a:ext>
-            </a:extLst>
-          </p:cNvPr>
+          <p:cNvPr id="12290" name="Rectangle 2"/>
           <p:cNvSpPr>
             <a:spLocks noGrp="1" noChangeArrowheads="1"/>
           </p:cNvSpPr>
@@ -1620,13 +1459,9 @@
           </a:extLst>
         </p:spPr>
         <p:txBody>
-          <a:bodyPr wrap="square" numCol="1" anchor="t" anchorCtr="0" compatLnSpc="1">
-            <a:prstTxWarp prst="textNoShape">
-              <a:avLst/>
-            </a:prstTxWarp>
-          </a:bodyPr>
+          <a:bodyPr wrap="square" numCol="1" anchor="t" anchorCtr="0" compatLnSpc="1"/>
           <a:lstStyle>
-            <a:lvl1pPr defTabSz="973138">
+            <a:lvl1pPr defTabSz="973455">
               <a:spcBef>
                 <a:spcPct val="30000"/>
               </a:spcBef>
@@ -1638,7 +1473,7 @@
                 <a:ea typeface="宋体" panose="02010600030101010101" pitchFamily="2" charset="-122"/>
               </a:defRPr>
             </a:lvl1pPr>
-            <a:lvl2pPr marL="742950" indent="-285750" defTabSz="973138">
+            <a:lvl2pPr marL="742950" indent="-285750" defTabSz="973455">
               <a:spcBef>
                 <a:spcPct val="30000"/>
               </a:spcBef>
@@ -1650,7 +1485,7 @@
                 <a:ea typeface="宋体" panose="02010600030101010101" pitchFamily="2" charset="-122"/>
               </a:defRPr>
             </a:lvl2pPr>
-            <a:lvl3pPr marL="1143000" indent="-228600" defTabSz="973138">
+            <a:lvl3pPr marL="1143000" indent="-228600" defTabSz="973455">
               <a:spcBef>
                 <a:spcPct val="30000"/>
               </a:spcBef>
@@ -1662,7 +1497,7 @@
                 <a:ea typeface="宋体" panose="02010600030101010101" pitchFamily="2" charset="-122"/>
               </a:defRPr>
             </a:lvl3pPr>
-            <a:lvl4pPr marL="1600200" indent="-228600" defTabSz="973138">
+            <a:lvl4pPr marL="1600200" indent="-228600" defTabSz="973455">
               <a:spcBef>
                 <a:spcPct val="30000"/>
               </a:spcBef>
@@ -1674,7 +1509,7 @@
                 <a:ea typeface="宋体" panose="02010600030101010101" pitchFamily="2" charset="-122"/>
               </a:defRPr>
             </a:lvl4pPr>
-            <a:lvl5pPr marL="2057400" indent="-228600" defTabSz="973138">
+            <a:lvl5pPr marL="2057400" indent="-228600" defTabSz="973455">
               <a:spcBef>
                 <a:spcPct val="30000"/>
               </a:spcBef>
@@ -1686,7 +1521,7 @@
                 <a:ea typeface="宋体" panose="02010600030101010101" pitchFamily="2" charset="-122"/>
               </a:defRPr>
             </a:lvl5pPr>
-            <a:lvl6pPr marL="2514600" indent="-228600" defTabSz="973138" eaLnBrk="0" fontAlgn="base" hangingPunct="0">
+            <a:lvl6pPr marL="2514600" indent="-228600" defTabSz="973455" eaLnBrk="0" fontAlgn="base" hangingPunct="0">
               <a:spcBef>
                 <a:spcPct val="30000"/>
               </a:spcBef>
@@ -1701,7 +1536,7 @@
                 <a:ea typeface="宋体" panose="02010600030101010101" pitchFamily="2" charset="-122"/>
               </a:defRPr>
             </a:lvl6pPr>
-            <a:lvl7pPr marL="2971800" indent="-228600" defTabSz="973138" eaLnBrk="0" fontAlgn="base" hangingPunct="0">
+            <a:lvl7pPr marL="2971800" indent="-228600" defTabSz="973455" eaLnBrk="0" fontAlgn="base" hangingPunct="0">
               <a:spcBef>
                 <a:spcPct val="30000"/>
               </a:spcBef>
@@ -1716,7 +1551,7 @@
                 <a:ea typeface="宋体" panose="02010600030101010101" pitchFamily="2" charset="-122"/>
               </a:defRPr>
             </a:lvl7pPr>
-            <a:lvl8pPr marL="3429000" indent="-228600" defTabSz="973138" eaLnBrk="0" fontAlgn="base" hangingPunct="0">
+            <a:lvl8pPr marL="3429000" indent="-228600" defTabSz="973455" eaLnBrk="0" fontAlgn="base" hangingPunct="0">
               <a:spcBef>
                 <a:spcPct val="30000"/>
               </a:spcBef>
@@ -1731,7 +1566,7 @@
                 <a:ea typeface="宋体" panose="02010600030101010101" pitchFamily="2" charset="-122"/>
               </a:defRPr>
             </a:lvl8pPr>
-            <a:lvl9pPr marL="3886200" indent="-228600" defTabSz="973138" eaLnBrk="0" fontAlgn="base" hangingPunct="0">
+            <a:lvl9pPr marL="3886200" indent="-228600" defTabSz="973455" eaLnBrk="0" fontAlgn="base" hangingPunct="0">
               <a:spcBef>
                 <a:spcPct val="30000"/>
               </a:spcBef>
@@ -1762,18 +1597,15 @@
               </a:rPr>
               <a:t>高等代数</a:t>
             </a:r>
+            <a:endParaRPr kumimoji="1" lang="en-US" altLang="zh-CN" sz="1300">
+              <a:latin typeface="Times New Roman" panose="02020603050405020304" pitchFamily="18" charset="0"/>
+            </a:endParaRPr>
           </a:p>
         </p:txBody>
       </p:sp>
       <p:sp>
         <p:nvSpPr>
-          <p:cNvPr id="12291" name="Rectangle 3">
-            <a:extLst>
-              <a:ext uri="{FF2B5EF4-FFF2-40B4-BE49-F238E27FC236}">
-                <a16:creationId xmlns:a16="http://schemas.microsoft.com/office/drawing/2014/main" id="{BB2D036D-A015-497D-A941-6AA03F0068FE}"/>
-              </a:ext>
-            </a:extLst>
-          </p:cNvPr>
+          <p:cNvPr id="12291" name="Rectangle 3"/>
           <p:cNvSpPr>
             <a:spLocks noGrp="1" noChangeArrowheads="1"/>
           </p:cNvSpPr>
@@ -1804,13 +1636,9 @@
           </a:extLst>
         </p:spPr>
         <p:txBody>
-          <a:bodyPr wrap="square" numCol="1" anchor="t" anchorCtr="0" compatLnSpc="1">
-            <a:prstTxWarp prst="textNoShape">
-              <a:avLst/>
-            </a:prstTxWarp>
-          </a:bodyPr>
+          <a:bodyPr wrap="square" numCol="1" anchor="t" anchorCtr="0" compatLnSpc="1"/>
           <a:lstStyle>
-            <a:lvl1pPr defTabSz="973138">
+            <a:lvl1pPr defTabSz="973455">
               <a:spcBef>
                 <a:spcPct val="30000"/>
               </a:spcBef>
@@ -1822,7 +1650,7 @@
                 <a:ea typeface="宋体" panose="02010600030101010101" pitchFamily="2" charset="-122"/>
               </a:defRPr>
             </a:lvl1pPr>
-            <a:lvl2pPr marL="742950" indent="-285750" defTabSz="973138">
+            <a:lvl2pPr marL="742950" indent="-285750" defTabSz="973455">
               <a:spcBef>
                 <a:spcPct val="30000"/>
               </a:spcBef>
@@ -1834,7 +1662,7 @@
                 <a:ea typeface="宋体" panose="02010600030101010101" pitchFamily="2" charset="-122"/>
               </a:defRPr>
             </a:lvl2pPr>
-            <a:lvl3pPr marL="1143000" indent="-228600" defTabSz="973138">
+            <a:lvl3pPr marL="1143000" indent="-228600" defTabSz="973455">
               <a:spcBef>
                 <a:spcPct val="30000"/>
               </a:spcBef>
@@ -1846,7 +1674,7 @@
                 <a:ea typeface="宋体" panose="02010600030101010101" pitchFamily="2" charset="-122"/>
               </a:defRPr>
             </a:lvl3pPr>
-            <a:lvl4pPr marL="1600200" indent="-228600" defTabSz="973138">
+            <a:lvl4pPr marL="1600200" indent="-228600" defTabSz="973455">
               <a:spcBef>
                 <a:spcPct val="30000"/>
               </a:spcBef>
@@ -1858,7 +1686,7 @@
                 <a:ea typeface="宋体" panose="02010600030101010101" pitchFamily="2" charset="-122"/>
               </a:defRPr>
             </a:lvl4pPr>
-            <a:lvl5pPr marL="2057400" indent="-228600" defTabSz="973138">
+            <a:lvl5pPr marL="2057400" indent="-228600" defTabSz="973455">
               <a:spcBef>
                 <a:spcPct val="30000"/>
               </a:spcBef>
@@ -1870,7 +1698,7 @@
                 <a:ea typeface="宋体" panose="02010600030101010101" pitchFamily="2" charset="-122"/>
               </a:defRPr>
             </a:lvl5pPr>
-            <a:lvl6pPr marL="2514600" indent="-228600" defTabSz="973138" eaLnBrk="0" fontAlgn="base" hangingPunct="0">
+            <a:lvl6pPr marL="2514600" indent="-228600" defTabSz="973455" eaLnBrk="0" fontAlgn="base" hangingPunct="0">
               <a:spcBef>
                 <a:spcPct val="30000"/>
               </a:spcBef>
@@ -1885,7 +1713,7 @@
                 <a:ea typeface="宋体" panose="02010600030101010101" pitchFamily="2" charset="-122"/>
               </a:defRPr>
             </a:lvl6pPr>
-            <a:lvl7pPr marL="2971800" indent="-228600" defTabSz="973138" eaLnBrk="0" fontAlgn="base" hangingPunct="0">
+            <a:lvl7pPr marL="2971800" indent="-228600" defTabSz="973455" eaLnBrk="0" fontAlgn="base" hangingPunct="0">
               <a:spcBef>
                 <a:spcPct val="30000"/>
               </a:spcBef>
@@ -1900,7 +1728,7 @@
                 <a:ea typeface="宋体" panose="02010600030101010101" pitchFamily="2" charset="-122"/>
               </a:defRPr>
             </a:lvl7pPr>
-            <a:lvl8pPr marL="3429000" indent="-228600" defTabSz="973138" eaLnBrk="0" fontAlgn="base" hangingPunct="0">
+            <a:lvl8pPr marL="3429000" indent="-228600" defTabSz="973455" eaLnBrk="0" fontAlgn="base" hangingPunct="0">
               <a:spcBef>
                 <a:spcPct val="30000"/>
               </a:spcBef>
@@ -1915,7 +1743,7 @@
                 <a:ea typeface="宋体" panose="02010600030101010101" pitchFamily="2" charset="-122"/>
               </a:defRPr>
             </a:lvl8pPr>
-            <a:lvl9pPr marL="3886200" indent="-228600" defTabSz="973138" eaLnBrk="0" fontAlgn="base" hangingPunct="0">
+            <a:lvl9pPr marL="3886200" indent="-228600" defTabSz="973455" eaLnBrk="0" fontAlgn="base" hangingPunct="0">
               <a:spcBef>
                 <a:spcPct val="30000"/>
               </a:spcBef>
@@ -1944,15 +1772,6 @@
               <a:rPr kumimoji="1" lang="zh-CN" altLang="en-US" sz="1300" smtClean="0">
                 <a:latin typeface="Times New Roman" panose="02020603050405020304" pitchFamily="18" charset="0"/>
               </a:rPr>
-              <a:pPr fontAlgn="base">
-                <a:spcBef>
-                  <a:spcPct val="0"/>
-                </a:spcBef>
-                <a:spcAft>
-                  <a:spcPct val="0"/>
-                </a:spcAft>
-              </a:pPr>
-              <a:t>2026/6/2</a:t>
             </a:fld>
             <a:endParaRPr kumimoji="1" lang="en-US" altLang="zh-CN" sz="1300">
               <a:latin typeface="Times New Roman" panose="02020603050405020304" pitchFamily="18" charset="0"/>
@@ -1962,13 +1781,7 @@
       </p:sp>
       <p:sp>
         <p:nvSpPr>
-          <p:cNvPr id="12292" name="Rectangle 7">
-            <a:extLst>
-              <a:ext uri="{FF2B5EF4-FFF2-40B4-BE49-F238E27FC236}">
-                <a16:creationId xmlns:a16="http://schemas.microsoft.com/office/drawing/2014/main" id="{1F5A9F09-0D46-442C-B44C-6AFEEB24347F}"/>
-              </a:ext>
-            </a:extLst>
-          </p:cNvPr>
+          <p:cNvPr id="12292" name="Rectangle 7"/>
           <p:cNvSpPr>
             <a:spLocks noGrp="1" noChangeArrowheads="1"/>
           </p:cNvSpPr>
@@ -2001,7 +1814,7 @@
         <p:txBody>
           <a:bodyPr/>
           <a:lstStyle>
-            <a:lvl1pPr defTabSz="973138">
+            <a:lvl1pPr defTabSz="973455">
               <a:spcBef>
                 <a:spcPct val="30000"/>
               </a:spcBef>
@@ -2013,7 +1826,7 @@
                 <a:ea typeface="宋体" panose="02010600030101010101" pitchFamily="2" charset="-122"/>
               </a:defRPr>
             </a:lvl1pPr>
-            <a:lvl2pPr marL="742950" indent="-285750" defTabSz="973138">
+            <a:lvl2pPr marL="742950" indent="-285750" defTabSz="973455">
               <a:spcBef>
                 <a:spcPct val="30000"/>
               </a:spcBef>
@@ -2025,7 +1838,7 @@
                 <a:ea typeface="宋体" panose="02010600030101010101" pitchFamily="2" charset="-122"/>
               </a:defRPr>
             </a:lvl2pPr>
-            <a:lvl3pPr marL="1143000" indent="-228600" defTabSz="973138">
+            <a:lvl3pPr marL="1143000" indent="-228600" defTabSz="973455">
               <a:spcBef>
                 <a:spcPct val="30000"/>
               </a:spcBef>
@@ -2037,7 +1850,7 @@
                 <a:ea typeface="宋体" panose="02010600030101010101" pitchFamily="2" charset="-122"/>
               </a:defRPr>
             </a:lvl3pPr>
-            <a:lvl4pPr marL="1600200" indent="-228600" defTabSz="973138">
+            <a:lvl4pPr marL="1600200" indent="-228600" defTabSz="973455">
               <a:spcBef>
                 <a:spcPct val="30000"/>
               </a:spcBef>
@@ -2049,7 +1862,7 @@
                 <a:ea typeface="宋体" panose="02010600030101010101" pitchFamily="2" charset="-122"/>
               </a:defRPr>
             </a:lvl4pPr>
-            <a:lvl5pPr marL="2057400" indent="-228600" defTabSz="973138">
+            <a:lvl5pPr marL="2057400" indent="-228600" defTabSz="973455">
               <a:spcBef>
                 <a:spcPct val="30000"/>
               </a:spcBef>
@@ -2061,7 +1874,7 @@
                 <a:ea typeface="宋体" panose="02010600030101010101" pitchFamily="2" charset="-122"/>
               </a:defRPr>
             </a:lvl5pPr>
-            <a:lvl6pPr marL="2514600" indent="-228600" defTabSz="973138" eaLnBrk="0" fontAlgn="base" hangingPunct="0">
+            <a:lvl6pPr marL="2514600" indent="-228600" defTabSz="973455" eaLnBrk="0" fontAlgn="base" hangingPunct="0">
               <a:spcBef>
                 <a:spcPct val="30000"/>
               </a:spcBef>
@@ -2076,7 +1889,7 @@
                 <a:ea typeface="宋体" panose="02010600030101010101" pitchFamily="2" charset="-122"/>
               </a:defRPr>
             </a:lvl6pPr>
-            <a:lvl7pPr marL="2971800" indent="-228600" defTabSz="973138" eaLnBrk="0" fontAlgn="base" hangingPunct="0">
+            <a:lvl7pPr marL="2971800" indent="-228600" defTabSz="973455" eaLnBrk="0" fontAlgn="base" hangingPunct="0">
               <a:spcBef>
                 <a:spcPct val="30000"/>
               </a:spcBef>
@@ -2091,7 +1904,7 @@
                 <a:ea typeface="宋体" panose="02010600030101010101" pitchFamily="2" charset="-122"/>
               </a:defRPr>
             </a:lvl7pPr>
-            <a:lvl8pPr marL="3429000" indent="-228600" defTabSz="973138" eaLnBrk="0" fontAlgn="base" hangingPunct="0">
+            <a:lvl8pPr marL="3429000" indent="-228600" defTabSz="973455" eaLnBrk="0" fontAlgn="base" hangingPunct="0">
               <a:spcBef>
                 <a:spcPct val="30000"/>
               </a:spcBef>
@@ -2106,7 +1919,7 @@
                 <a:ea typeface="宋体" panose="02010600030101010101" pitchFamily="2" charset="-122"/>
               </a:defRPr>
             </a:lvl8pPr>
-            <a:lvl9pPr marL="3886200" indent="-228600" defTabSz="973138" eaLnBrk="0" fontAlgn="base" hangingPunct="0">
+            <a:lvl9pPr marL="3886200" indent="-228600" defTabSz="973455" eaLnBrk="0" fontAlgn="base" hangingPunct="0">
               <a:spcBef>
                 <a:spcPct val="30000"/>
               </a:spcBef>
@@ -2132,12 +1945,6 @@
               <a:rPr kumimoji="1" lang="en-US" altLang="zh-CN" sz="1300" smtClean="0">
                 <a:latin typeface="Times New Roman" panose="02020603050405020304" pitchFamily="18" charset="0"/>
               </a:rPr>
-              <a:pPr>
-                <a:spcBef>
-                  <a:spcPct val="0"/>
-                </a:spcBef>
-              </a:pPr>
-              <a:t>2</a:t>
             </a:fld>
             <a:endParaRPr kumimoji="1" lang="en-US" altLang="zh-CN" sz="1300">
               <a:latin typeface="Times New Roman" panose="02020603050405020304" pitchFamily="18" charset="0"/>
@@ -2147,13 +1954,7 @@
       </p:sp>
       <p:sp>
         <p:nvSpPr>
-          <p:cNvPr id="12293" name="Rectangle 2">
-            <a:extLst>
-              <a:ext uri="{FF2B5EF4-FFF2-40B4-BE49-F238E27FC236}">
-                <a16:creationId xmlns:a16="http://schemas.microsoft.com/office/drawing/2014/main" id="{7BD8AAAD-5528-4021-AC18-5931D989EBBD}"/>
-              </a:ext>
-            </a:extLst>
-          </p:cNvPr>
+          <p:cNvPr id="12293" name="Rectangle 2"/>
           <p:cNvSpPr>
             <a:spLocks noGrp="1" noRot="1" noChangeAspect="1" noChangeArrowheads="1" noTextEdit="1"/>
           </p:cNvSpPr>
@@ -2168,8 +1969,6 @@
               <a:srgbClr val="000000"/>
             </a:solidFill>
             <a:miter lim="800000"/>
-            <a:headEnd/>
-            <a:tailEnd/>
           </a:ln>
           <a:extLst>
             <a:ext uri="{909E8E84-426E-40DD-AFC4-6F175D3DCCD1}">
@@ -2184,13 +1983,7 @@
       </p:sp>
       <p:sp>
         <p:nvSpPr>
-          <p:cNvPr id="12294" name="Rectangle 3">
-            <a:extLst>
-              <a:ext uri="{FF2B5EF4-FFF2-40B4-BE49-F238E27FC236}">
-                <a16:creationId xmlns:a16="http://schemas.microsoft.com/office/drawing/2014/main" id="{790700FD-795C-4BC0-B86D-95C8F9544CA6}"/>
-              </a:ext>
-            </a:extLst>
-          </p:cNvPr>
+          <p:cNvPr id="12294" name="Rectangle 3"/>
           <p:cNvSpPr>
             <a:spLocks noGrp="1" noChangeArrowheads="1"/>
           </p:cNvSpPr>
@@ -2221,11 +2014,7 @@
           </a:extLst>
         </p:spPr>
         <p:txBody>
-          <a:bodyPr wrap="square" numCol="1" anchor="t" anchorCtr="0" compatLnSpc="1">
-            <a:prstTxWarp prst="textNoShape">
-              <a:avLst/>
-            </a:prstTxWarp>
-          </a:bodyPr>
+          <a:bodyPr wrap="square" numCol="1" anchor="t" anchorCtr="0" compatLnSpc="1"/>
           <a:lstStyle/>
           <a:p>
             <a:pPr eaLnBrk="1" hangingPunct="1">
@@ -2313,21 +2102,12 @@
             </a:pPr>
             <a:fld id="{E942E71B-E9B3-4820-B67A-F8BCFD290363}" type="slidenum">
               <a:rPr lang="zh-CN" altLang="en-US" smtClean="0"/>
-              <a:pPr>
-                <a:defRPr/>
-              </a:pPr>
-              <a:t>7</a:t>
             </a:fld>
             <a:endParaRPr lang="zh-CN" altLang="en-US"/>
           </a:p>
         </p:txBody>
       </p:sp>
     </p:spTree>
-    <p:extLst>
-      <p:ext uri="{BB962C8B-B14F-4D97-AF65-F5344CB8AC3E}">
-        <p14:creationId xmlns:p14="http://schemas.microsoft.com/office/powerpoint/2010/main" val="1294584971"/>
-      </p:ext>
-    </p:extLst>
   </p:cSld>
   <p:clrMapOvr>
     <a:masterClrMapping/>
@@ -2403,21 +2183,12 @@
             </a:pPr>
             <a:fld id="{E942E71B-E9B3-4820-B67A-F8BCFD290363}" type="slidenum">
               <a:rPr lang="zh-CN" altLang="en-US" smtClean="0"/>
-              <a:pPr>
-                <a:defRPr/>
-              </a:pPr>
-              <a:t>10</a:t>
             </a:fld>
             <a:endParaRPr lang="zh-CN" altLang="en-US"/>
           </a:p>
         </p:txBody>
       </p:sp>
     </p:spTree>
-    <p:extLst>
-      <p:ext uri="{BB962C8B-B14F-4D97-AF65-F5344CB8AC3E}">
-        <p14:creationId xmlns:p14="http://schemas.microsoft.com/office/powerpoint/2010/main" val="4292069539"/>
-      </p:ext>
-    </p:extLst>
   </p:cSld>
   <p:clrMapOvr>
     <a:masterClrMapping/>
@@ -2493,21 +2264,12 @@
             </a:pPr>
             <a:fld id="{E942E71B-E9B3-4820-B67A-F8BCFD290363}" type="slidenum">
               <a:rPr lang="zh-CN" altLang="en-US" smtClean="0"/>
-              <a:pPr>
-                <a:defRPr/>
-              </a:pPr>
-              <a:t>16</a:t>
             </a:fld>
             <a:endParaRPr lang="zh-CN" altLang="en-US"/>
           </a:p>
         </p:txBody>
       </p:sp>
     </p:spTree>
-    <p:extLst>
-      <p:ext uri="{BB962C8B-B14F-4D97-AF65-F5344CB8AC3E}">
-        <p14:creationId xmlns:p14="http://schemas.microsoft.com/office/powerpoint/2010/main" val="3651586397"/>
-      </p:ext>
-    </p:extLst>
   </p:cSld>
   <p:clrMapOvr>
     <a:masterClrMapping/>
@@ -2556,6 +2318,7 @@
               <a:rPr lang="zh-CN" altLang="en-US"/>
               <a:t>单击此处编辑母版标题样式</a:t>
             </a:r>
+            <a:endParaRPr lang="zh-CN" altLang="en-US"/>
           </a:p>
         </p:txBody>
       </p:sp>
@@ -2674,18 +2437,13 @@
               <a:rPr lang="zh-CN" altLang="en-US"/>
               <a:t>单击此处编辑母版副标题样式</a:t>
             </a:r>
+            <a:endParaRPr lang="zh-CN" altLang="en-US"/>
           </a:p>
         </p:txBody>
       </p:sp>
       <p:sp>
         <p:nvSpPr>
-          <p:cNvPr id="4" name="日期占位符 3">
-            <a:extLst>
-              <a:ext uri="{FF2B5EF4-FFF2-40B4-BE49-F238E27FC236}">
-                <a16:creationId xmlns:a16="http://schemas.microsoft.com/office/drawing/2014/main" id="{BA0259C8-C7EE-4156-9DC0-3109D38887C8}"/>
-              </a:ext>
-            </a:extLst>
-          </p:cNvPr>
+          <p:cNvPr id="4" name="日期占位符 3"/>
           <p:cNvSpPr>
             <a:spLocks noGrp="1"/>
           </p:cNvSpPr>
@@ -2707,10 +2465,6 @@
             </a:pPr>
             <a:fld id="{053C517D-F1EF-450D-A68B-03ED621FDC53}" type="datetimeFigureOut">
               <a:rPr lang="zh-CN" altLang="en-US"/>
-              <a:pPr>
-                <a:defRPr/>
-              </a:pPr>
-              <a:t>2026/6/2</a:t>
             </a:fld>
             <a:endParaRPr lang="zh-CN" altLang="en-US"/>
           </a:p>
@@ -2718,13 +2472,7 @@
       </p:sp>
       <p:sp>
         <p:nvSpPr>
-          <p:cNvPr id="5" name="页脚占位符 4">
-            <a:extLst>
-              <a:ext uri="{FF2B5EF4-FFF2-40B4-BE49-F238E27FC236}">
-                <a16:creationId xmlns:a16="http://schemas.microsoft.com/office/drawing/2014/main" id="{3C562696-FBBC-4EB8-9EBD-19EE2BB47515}"/>
-              </a:ext>
-            </a:extLst>
-          </p:cNvPr>
+          <p:cNvPr id="5" name="页脚占位符 4"/>
           <p:cNvSpPr>
             <a:spLocks noGrp="1"/>
           </p:cNvSpPr>
@@ -2750,13 +2498,7 @@
       </p:sp>
       <p:sp>
         <p:nvSpPr>
-          <p:cNvPr id="6" name="灯片编号占位符 5">
-            <a:extLst>
-              <a:ext uri="{FF2B5EF4-FFF2-40B4-BE49-F238E27FC236}">
-                <a16:creationId xmlns:a16="http://schemas.microsoft.com/office/drawing/2014/main" id="{5C0E1A01-6584-4619-AB08-FD6FEFF096AF}"/>
-              </a:ext>
-            </a:extLst>
-          </p:cNvPr>
+          <p:cNvPr id="6" name="灯片编号占位符 5"/>
           <p:cNvSpPr>
             <a:spLocks noGrp="1"/>
           </p:cNvSpPr>
@@ -2778,21 +2520,12 @@
             </a:pPr>
             <a:fld id="{F4094204-A637-4043-9CC7-987AF444C4F4}" type="slidenum">
               <a:rPr lang="zh-CN" altLang="en-US"/>
-              <a:pPr>
-                <a:defRPr/>
-              </a:pPr>
-              <a:t>‹#›</a:t>
             </a:fld>
             <a:endParaRPr lang="zh-CN" altLang="en-US"/>
           </a:p>
         </p:txBody>
       </p:sp>
     </p:spTree>
-    <p:extLst>
-      <p:ext uri="{BB962C8B-B14F-4D97-AF65-F5344CB8AC3E}">
-        <p14:creationId xmlns:p14="http://schemas.microsoft.com/office/powerpoint/2010/main" val="819006490"/>
-      </p:ext>
-    </p:extLst>
   </p:cSld>
   <p:clrMapOvr>
     <a:masterClrMapping/>
@@ -2836,6 +2569,7 @@
               <a:rPr lang="zh-CN" altLang="en-US"/>
               <a:t>单击此处编辑母版标题样式</a:t>
             </a:r>
+            <a:endParaRPr lang="zh-CN" altLang="en-US"/>
           </a:p>
         </p:txBody>
       </p:sp>
@@ -2859,6 +2593,7 @@
               <a:rPr lang="zh-CN" altLang="en-US"/>
               <a:t>单击此处编辑母版文本样式</a:t>
             </a:r>
+            <a:endParaRPr lang="zh-CN" altLang="en-US"/>
           </a:p>
           <a:p>
             <a:pPr lvl="1"/>
@@ -2866,6 +2601,7 @@
               <a:rPr lang="zh-CN" altLang="en-US"/>
               <a:t>第二级</a:t>
             </a:r>
+            <a:endParaRPr lang="zh-CN" altLang="en-US"/>
           </a:p>
           <a:p>
             <a:pPr lvl="2"/>
@@ -2873,6 +2609,7 @@
               <a:rPr lang="zh-CN" altLang="en-US"/>
               <a:t>第三级</a:t>
             </a:r>
+            <a:endParaRPr lang="zh-CN" altLang="en-US"/>
           </a:p>
           <a:p>
             <a:pPr lvl="3"/>
@@ -2880,6 +2617,7 @@
               <a:rPr lang="zh-CN" altLang="en-US"/>
               <a:t>第四级</a:t>
             </a:r>
+            <a:endParaRPr lang="zh-CN" altLang="en-US"/>
           </a:p>
           <a:p>
             <a:pPr lvl="4"/>
@@ -2887,18 +2625,13 @@
               <a:rPr lang="zh-CN" altLang="en-US"/>
               <a:t>第五级</a:t>
             </a:r>
+            <a:endParaRPr lang="zh-CN" altLang="en-US"/>
           </a:p>
         </p:txBody>
       </p:sp>
       <p:sp>
         <p:nvSpPr>
-          <p:cNvPr id="4" name="日期占位符 3">
-            <a:extLst>
-              <a:ext uri="{FF2B5EF4-FFF2-40B4-BE49-F238E27FC236}">
-                <a16:creationId xmlns:a16="http://schemas.microsoft.com/office/drawing/2014/main" id="{7AD7936C-15CE-4AAB-848B-6D270D7375DD}"/>
-              </a:ext>
-            </a:extLst>
-          </p:cNvPr>
+          <p:cNvPr id="4" name="日期占位符 3"/>
           <p:cNvSpPr>
             <a:spLocks noGrp="1"/>
           </p:cNvSpPr>
@@ -2920,10 +2653,6 @@
             </a:pPr>
             <a:fld id="{B5AC7AC8-BDAF-459E-A39D-6ECCEBA31388}" type="datetimeFigureOut">
               <a:rPr lang="zh-CN" altLang="en-US"/>
-              <a:pPr>
-                <a:defRPr/>
-              </a:pPr>
-              <a:t>2026/6/2</a:t>
             </a:fld>
             <a:endParaRPr lang="zh-CN" altLang="en-US"/>
           </a:p>
@@ -2931,13 +2660,7 @@
       </p:sp>
       <p:sp>
         <p:nvSpPr>
-          <p:cNvPr id="5" name="页脚占位符 4">
-            <a:extLst>
-              <a:ext uri="{FF2B5EF4-FFF2-40B4-BE49-F238E27FC236}">
-                <a16:creationId xmlns:a16="http://schemas.microsoft.com/office/drawing/2014/main" id="{EED9C6D5-B12F-401F-97BA-2B556388BCCF}"/>
-              </a:ext>
-            </a:extLst>
-          </p:cNvPr>
+          <p:cNvPr id="5" name="页脚占位符 4"/>
           <p:cNvSpPr>
             <a:spLocks noGrp="1"/>
           </p:cNvSpPr>
@@ -2963,13 +2686,7 @@
       </p:sp>
       <p:sp>
         <p:nvSpPr>
-          <p:cNvPr id="6" name="灯片编号占位符 5">
-            <a:extLst>
-              <a:ext uri="{FF2B5EF4-FFF2-40B4-BE49-F238E27FC236}">
-                <a16:creationId xmlns:a16="http://schemas.microsoft.com/office/drawing/2014/main" id="{22483FAA-5398-41B1-AE28-EE41BB0F15C3}"/>
-              </a:ext>
-            </a:extLst>
-          </p:cNvPr>
+          <p:cNvPr id="6" name="灯片编号占位符 5"/>
           <p:cNvSpPr>
             <a:spLocks noGrp="1"/>
           </p:cNvSpPr>
@@ -2991,21 +2708,12 @@
             </a:pPr>
             <a:fld id="{AA73592C-DF7F-4F25-95AD-A0D5EFEFC057}" type="slidenum">
               <a:rPr lang="zh-CN" altLang="en-US"/>
-              <a:pPr>
-                <a:defRPr/>
-              </a:pPr>
-              <a:t>‹#›</a:t>
             </a:fld>
             <a:endParaRPr lang="zh-CN" altLang="en-US"/>
           </a:p>
         </p:txBody>
       </p:sp>
     </p:spTree>
-    <p:extLst>
-      <p:ext uri="{BB962C8B-B14F-4D97-AF65-F5344CB8AC3E}">
-        <p14:creationId xmlns:p14="http://schemas.microsoft.com/office/powerpoint/2010/main" val="579073889"/>
-      </p:ext>
-    </p:extLst>
   </p:cSld>
   <p:clrMapOvr>
     <a:masterClrMapping/>
@@ -3054,6 +2762,7 @@
               <a:rPr lang="zh-CN" altLang="en-US"/>
               <a:t>单击此处编辑母版标题样式</a:t>
             </a:r>
+            <a:endParaRPr lang="zh-CN" altLang="en-US"/>
           </a:p>
         </p:txBody>
       </p:sp>
@@ -3082,6 +2791,7 @@
               <a:rPr lang="zh-CN" altLang="en-US"/>
               <a:t>单击此处编辑母版文本样式</a:t>
             </a:r>
+            <a:endParaRPr lang="zh-CN" altLang="en-US"/>
           </a:p>
           <a:p>
             <a:pPr lvl="1"/>
@@ -3089,6 +2799,7 @@
               <a:rPr lang="zh-CN" altLang="en-US"/>
               <a:t>第二级</a:t>
             </a:r>
+            <a:endParaRPr lang="zh-CN" altLang="en-US"/>
           </a:p>
           <a:p>
             <a:pPr lvl="2"/>
@@ -3096,6 +2807,7 @@
               <a:rPr lang="zh-CN" altLang="en-US"/>
               <a:t>第三级</a:t>
             </a:r>
+            <a:endParaRPr lang="zh-CN" altLang="en-US"/>
           </a:p>
           <a:p>
             <a:pPr lvl="3"/>
@@ -3103,6 +2815,7 @@
               <a:rPr lang="zh-CN" altLang="en-US"/>
               <a:t>第四级</a:t>
             </a:r>
+            <a:endParaRPr lang="zh-CN" altLang="en-US"/>
           </a:p>
           <a:p>
             <a:pPr lvl="4"/>
@@ -3110,18 +2823,13 @@
               <a:rPr lang="zh-CN" altLang="en-US"/>
               <a:t>第五级</a:t>
             </a:r>
+            <a:endParaRPr lang="zh-CN" altLang="en-US"/>
           </a:p>
         </p:txBody>
       </p:sp>
       <p:sp>
         <p:nvSpPr>
-          <p:cNvPr id="4" name="日期占位符 3">
-            <a:extLst>
-              <a:ext uri="{FF2B5EF4-FFF2-40B4-BE49-F238E27FC236}">
-                <a16:creationId xmlns:a16="http://schemas.microsoft.com/office/drawing/2014/main" id="{1894C623-0ADE-484A-BE33-E702B35822D4}"/>
-              </a:ext>
-            </a:extLst>
-          </p:cNvPr>
+          <p:cNvPr id="4" name="日期占位符 3"/>
           <p:cNvSpPr>
             <a:spLocks noGrp="1"/>
           </p:cNvSpPr>
@@ -3143,10 +2851,6 @@
             </a:pPr>
             <a:fld id="{57DA897F-8DA0-4D46-8DD8-2287ABC8EEC1}" type="datetimeFigureOut">
               <a:rPr lang="zh-CN" altLang="en-US"/>
-              <a:pPr>
-                <a:defRPr/>
-              </a:pPr>
-              <a:t>2026/6/2</a:t>
             </a:fld>
             <a:endParaRPr lang="zh-CN" altLang="en-US"/>
           </a:p>
@@ -3154,13 +2858,7 @@
       </p:sp>
       <p:sp>
         <p:nvSpPr>
-          <p:cNvPr id="5" name="页脚占位符 4">
-            <a:extLst>
-              <a:ext uri="{FF2B5EF4-FFF2-40B4-BE49-F238E27FC236}">
-                <a16:creationId xmlns:a16="http://schemas.microsoft.com/office/drawing/2014/main" id="{40C84BD7-9901-416C-95BF-36949573D301}"/>
-              </a:ext>
-            </a:extLst>
-          </p:cNvPr>
+          <p:cNvPr id="5" name="页脚占位符 4"/>
           <p:cNvSpPr>
             <a:spLocks noGrp="1"/>
           </p:cNvSpPr>
@@ -3186,13 +2884,7 @@
       </p:sp>
       <p:sp>
         <p:nvSpPr>
-          <p:cNvPr id="6" name="灯片编号占位符 5">
-            <a:extLst>
-              <a:ext uri="{FF2B5EF4-FFF2-40B4-BE49-F238E27FC236}">
-                <a16:creationId xmlns:a16="http://schemas.microsoft.com/office/drawing/2014/main" id="{FF5E8AF4-C2BC-4E32-9DB3-E8FB1A1C9C6C}"/>
-              </a:ext>
-            </a:extLst>
-          </p:cNvPr>
+          <p:cNvPr id="6" name="灯片编号占位符 5"/>
           <p:cNvSpPr>
             <a:spLocks noGrp="1"/>
           </p:cNvSpPr>
@@ -3214,21 +2906,12 @@
             </a:pPr>
             <a:fld id="{76D54C32-A54F-443A-900C-0AC299C29E82}" type="slidenum">
               <a:rPr lang="zh-CN" altLang="en-US"/>
-              <a:pPr>
-                <a:defRPr/>
-              </a:pPr>
-              <a:t>‹#›</a:t>
             </a:fld>
             <a:endParaRPr lang="zh-CN" altLang="en-US"/>
           </a:p>
         </p:txBody>
       </p:sp>
     </p:spTree>
-    <p:extLst>
-      <p:ext uri="{BB962C8B-B14F-4D97-AF65-F5344CB8AC3E}">
-        <p14:creationId xmlns:p14="http://schemas.microsoft.com/office/powerpoint/2010/main" val="4182868265"/>
-      </p:ext>
-    </p:extLst>
   </p:cSld>
   <p:clrMapOvr>
     <a:masterClrMapping/>
@@ -3278,6 +2961,7 @@
               <a:rPr lang="zh-CN" altLang="en-US"/>
               <a:t>单击此处编辑母版文本样式</a:t>
             </a:r>
+            <a:endParaRPr lang="zh-CN" altLang="en-US"/>
           </a:p>
           <a:p>
             <a:pPr lvl="1"/>
@@ -3285,6 +2969,7 @@
               <a:rPr lang="zh-CN" altLang="en-US"/>
               <a:t>第二级</a:t>
             </a:r>
+            <a:endParaRPr lang="zh-CN" altLang="en-US"/>
           </a:p>
           <a:p>
             <a:pPr lvl="2"/>
@@ -3292,6 +2977,7 @@
               <a:rPr lang="zh-CN" altLang="en-US"/>
               <a:t>第三级</a:t>
             </a:r>
+            <a:endParaRPr lang="zh-CN" altLang="en-US"/>
           </a:p>
           <a:p>
             <a:pPr lvl="3"/>
@@ -3299,6 +2985,7 @@
               <a:rPr lang="zh-CN" altLang="en-US"/>
               <a:t>第四级</a:t>
             </a:r>
+            <a:endParaRPr lang="zh-CN" altLang="en-US"/>
           </a:p>
           <a:p>
             <a:pPr lvl="4"/>
@@ -3306,18 +2993,13 @@
               <a:rPr lang="zh-CN" altLang="en-US"/>
               <a:t>第五级</a:t>
             </a:r>
+            <a:endParaRPr lang="zh-CN" altLang="en-US"/>
           </a:p>
         </p:txBody>
       </p:sp>
       <p:sp>
         <p:nvSpPr>
-          <p:cNvPr id="3" name="Rectangle 4">
-            <a:extLst>
-              <a:ext uri="{FF2B5EF4-FFF2-40B4-BE49-F238E27FC236}">
-                <a16:creationId xmlns:a16="http://schemas.microsoft.com/office/drawing/2014/main" id="{A4E221A7-0730-4633-B4BD-24B39355CC5D}"/>
-              </a:ext>
-            </a:extLst>
-          </p:cNvPr>
+          <p:cNvPr id="3" name="Rectangle 4"/>
           <p:cNvSpPr>
             <a:spLocks noGrp="1" noChangeArrowheads="1"/>
           </p:cNvSpPr>
@@ -3343,13 +3025,7 @@
       </p:sp>
       <p:sp>
         <p:nvSpPr>
-          <p:cNvPr id="4" name="Rectangle 5">
-            <a:extLst>
-              <a:ext uri="{FF2B5EF4-FFF2-40B4-BE49-F238E27FC236}">
-                <a16:creationId xmlns:a16="http://schemas.microsoft.com/office/drawing/2014/main" id="{78DCF6A7-B355-459E-B60A-77FF55BDCAAC}"/>
-              </a:ext>
-            </a:extLst>
-          </p:cNvPr>
+          <p:cNvPr id="4" name="Rectangle 5"/>
           <p:cNvSpPr>
             <a:spLocks noGrp="1" noChangeArrowheads="1"/>
           </p:cNvSpPr>
@@ -3375,13 +3051,7 @@
       </p:sp>
       <p:sp>
         <p:nvSpPr>
-          <p:cNvPr id="5" name="Rectangle 6">
-            <a:extLst>
-              <a:ext uri="{FF2B5EF4-FFF2-40B4-BE49-F238E27FC236}">
-                <a16:creationId xmlns:a16="http://schemas.microsoft.com/office/drawing/2014/main" id="{483CACA6-08B1-457A-9623-D84272E7D764}"/>
-              </a:ext>
-            </a:extLst>
-          </p:cNvPr>
+          <p:cNvPr id="5" name="Rectangle 6"/>
           <p:cNvSpPr>
             <a:spLocks noGrp="1" noChangeArrowheads="1"/>
           </p:cNvSpPr>
@@ -3403,21 +3073,12 @@
             </a:pPr>
             <a:fld id="{97C3CAD6-A1E2-4004-850D-629E47C74569}" type="slidenum">
               <a:rPr lang="en-US" altLang="zh-CN"/>
-              <a:pPr>
-                <a:defRPr/>
-              </a:pPr>
-              <a:t>‹#›</a:t>
             </a:fld>
             <a:endParaRPr lang="en-US" altLang="zh-CN"/>
           </a:p>
         </p:txBody>
       </p:sp>
     </p:spTree>
-    <p:extLst>
-      <p:ext uri="{BB962C8B-B14F-4D97-AF65-F5344CB8AC3E}">
-        <p14:creationId xmlns:p14="http://schemas.microsoft.com/office/powerpoint/2010/main" val="1648139582"/>
-      </p:ext>
-    </p:extLst>
   </p:cSld>
   <p:clrMapOvr>
     <a:masterClrMapping/>
@@ -3461,6 +3122,7 @@
               <a:rPr lang="zh-CN" altLang="en-US"/>
               <a:t>单击此处编辑母版标题样式</a:t>
             </a:r>
+            <a:endParaRPr lang="zh-CN" altLang="en-US"/>
           </a:p>
         </p:txBody>
       </p:sp>
@@ -3484,6 +3146,7 @@
               <a:rPr lang="zh-CN" altLang="en-US" dirty="0"/>
               <a:t>单击此处编辑母版文本样式</a:t>
             </a:r>
+            <a:endParaRPr lang="zh-CN" altLang="en-US" dirty="0"/>
           </a:p>
           <a:p>
             <a:pPr lvl="1"/>
@@ -3491,6 +3154,7 @@
               <a:rPr lang="zh-CN" altLang="en-US" dirty="0"/>
               <a:t>第二级</a:t>
             </a:r>
+            <a:endParaRPr lang="zh-CN" altLang="en-US" dirty="0"/>
           </a:p>
           <a:p>
             <a:pPr lvl="2"/>
@@ -3498,6 +3162,7 @@
               <a:rPr lang="zh-CN" altLang="en-US" dirty="0"/>
               <a:t>第三级</a:t>
             </a:r>
+            <a:endParaRPr lang="zh-CN" altLang="en-US" dirty="0"/>
           </a:p>
           <a:p>
             <a:pPr lvl="3"/>
@@ -3505,6 +3170,7 @@
               <a:rPr lang="zh-CN" altLang="en-US" dirty="0"/>
               <a:t>第四级</a:t>
             </a:r>
+            <a:endParaRPr lang="zh-CN" altLang="en-US" dirty="0"/>
           </a:p>
           <a:p>
             <a:pPr lvl="4"/>
@@ -3512,18 +3178,13 @@
               <a:rPr lang="zh-CN" altLang="en-US" dirty="0"/>
               <a:t>第五级</a:t>
             </a:r>
+            <a:endParaRPr lang="zh-CN" altLang="en-US" dirty="0"/>
           </a:p>
         </p:txBody>
       </p:sp>
       <p:sp>
         <p:nvSpPr>
-          <p:cNvPr id="4" name="日期占位符 3">
-            <a:extLst>
-              <a:ext uri="{FF2B5EF4-FFF2-40B4-BE49-F238E27FC236}">
-                <a16:creationId xmlns:a16="http://schemas.microsoft.com/office/drawing/2014/main" id="{64ECD5CD-4A9C-42BE-9B3F-0ABDA58F33AB}"/>
-              </a:ext>
-            </a:extLst>
-          </p:cNvPr>
+          <p:cNvPr id="4" name="日期占位符 3"/>
           <p:cNvSpPr>
             <a:spLocks noGrp="1"/>
           </p:cNvSpPr>
@@ -3545,10 +3206,6 @@
             </a:pPr>
             <a:fld id="{0C08AD0D-2896-4BF3-923E-FFF8221B046F}" type="datetimeFigureOut">
               <a:rPr lang="zh-CN" altLang="en-US"/>
-              <a:pPr>
-                <a:defRPr/>
-              </a:pPr>
-              <a:t>2026/6/2</a:t>
             </a:fld>
             <a:endParaRPr lang="zh-CN" altLang="en-US"/>
           </a:p>
@@ -3556,13 +3213,7 @@
       </p:sp>
       <p:sp>
         <p:nvSpPr>
-          <p:cNvPr id="5" name="页脚占位符 4">
-            <a:extLst>
-              <a:ext uri="{FF2B5EF4-FFF2-40B4-BE49-F238E27FC236}">
-                <a16:creationId xmlns:a16="http://schemas.microsoft.com/office/drawing/2014/main" id="{A3BE9E60-15CC-4A0A-B209-61423A3C2F39}"/>
-              </a:ext>
-            </a:extLst>
-          </p:cNvPr>
+          <p:cNvPr id="5" name="页脚占位符 4"/>
           <p:cNvSpPr>
             <a:spLocks noGrp="1"/>
           </p:cNvSpPr>
@@ -3588,13 +3239,7 @@
       </p:sp>
       <p:sp>
         <p:nvSpPr>
-          <p:cNvPr id="6" name="灯片编号占位符 5">
-            <a:extLst>
-              <a:ext uri="{FF2B5EF4-FFF2-40B4-BE49-F238E27FC236}">
-                <a16:creationId xmlns:a16="http://schemas.microsoft.com/office/drawing/2014/main" id="{1944ABA8-1820-4B9B-8398-8FE5EBFF2F45}"/>
-              </a:ext>
-            </a:extLst>
-          </p:cNvPr>
+          <p:cNvPr id="6" name="灯片编号占位符 5"/>
           <p:cNvSpPr>
             <a:spLocks noGrp="1"/>
           </p:cNvSpPr>
@@ -3616,21 +3261,12 @@
             </a:pPr>
             <a:fld id="{5C03C437-6D35-4DF2-9DDF-16D33DE3BB70}" type="slidenum">
               <a:rPr lang="zh-CN" altLang="en-US"/>
-              <a:pPr>
-                <a:defRPr/>
-              </a:pPr>
-              <a:t>‹#›</a:t>
             </a:fld>
             <a:endParaRPr lang="zh-CN" altLang="en-US"/>
           </a:p>
         </p:txBody>
       </p:sp>
     </p:spTree>
-    <p:extLst>
-      <p:ext uri="{BB962C8B-B14F-4D97-AF65-F5344CB8AC3E}">
-        <p14:creationId xmlns:p14="http://schemas.microsoft.com/office/powerpoint/2010/main" val="2487465138"/>
-      </p:ext>
-    </p:extLst>
   </p:cSld>
   <p:clrMapOvr>
     <a:masterClrMapping/>
@@ -3683,6 +3319,7 @@
               <a:rPr lang="zh-CN" altLang="en-US"/>
               <a:t>单击此处编辑母版标题样式</a:t>
             </a:r>
+            <a:endParaRPr lang="zh-CN" altLang="en-US"/>
           </a:p>
         </p:txBody>
       </p:sp>
@@ -3802,18 +3439,13 @@
               <a:rPr lang="zh-CN" altLang="en-US"/>
               <a:t>单击此处编辑母版文本样式</a:t>
             </a:r>
+            <a:endParaRPr lang="zh-CN" altLang="en-US"/>
           </a:p>
         </p:txBody>
       </p:sp>
       <p:sp>
         <p:nvSpPr>
-          <p:cNvPr id="4" name="日期占位符 3">
-            <a:extLst>
-              <a:ext uri="{FF2B5EF4-FFF2-40B4-BE49-F238E27FC236}">
-                <a16:creationId xmlns:a16="http://schemas.microsoft.com/office/drawing/2014/main" id="{3B513924-75A6-4FB4-87F0-175FBDEB6CD1}"/>
-              </a:ext>
-            </a:extLst>
-          </p:cNvPr>
+          <p:cNvPr id="4" name="日期占位符 3"/>
           <p:cNvSpPr>
             <a:spLocks noGrp="1"/>
           </p:cNvSpPr>
@@ -3835,10 +3467,6 @@
             </a:pPr>
             <a:fld id="{413F5F9B-25E3-46A1-98D1-D8DF1644CD11}" type="datetimeFigureOut">
               <a:rPr lang="zh-CN" altLang="en-US"/>
-              <a:pPr>
-                <a:defRPr/>
-              </a:pPr>
-              <a:t>2026/6/2</a:t>
             </a:fld>
             <a:endParaRPr lang="zh-CN" altLang="en-US"/>
           </a:p>
@@ -3846,13 +3474,7 @@
       </p:sp>
       <p:sp>
         <p:nvSpPr>
-          <p:cNvPr id="5" name="页脚占位符 4">
-            <a:extLst>
-              <a:ext uri="{FF2B5EF4-FFF2-40B4-BE49-F238E27FC236}">
-                <a16:creationId xmlns:a16="http://schemas.microsoft.com/office/drawing/2014/main" id="{A62A2985-7505-4F1A-88BD-AC95D4F9C358}"/>
-              </a:ext>
-            </a:extLst>
-          </p:cNvPr>
+          <p:cNvPr id="5" name="页脚占位符 4"/>
           <p:cNvSpPr>
             <a:spLocks noGrp="1"/>
           </p:cNvSpPr>
@@ -3878,13 +3500,7 @@
       </p:sp>
       <p:sp>
         <p:nvSpPr>
-          <p:cNvPr id="6" name="灯片编号占位符 5">
-            <a:extLst>
-              <a:ext uri="{FF2B5EF4-FFF2-40B4-BE49-F238E27FC236}">
-                <a16:creationId xmlns:a16="http://schemas.microsoft.com/office/drawing/2014/main" id="{2394F377-6737-4278-BE4F-1C7BE8311EE3}"/>
-              </a:ext>
-            </a:extLst>
-          </p:cNvPr>
+          <p:cNvPr id="6" name="灯片编号占位符 5"/>
           <p:cNvSpPr>
             <a:spLocks noGrp="1"/>
           </p:cNvSpPr>
@@ -3906,21 +3522,12 @@
             </a:pPr>
             <a:fld id="{6BCEA479-BF3B-473D-BBE0-F05445F3474A}" type="slidenum">
               <a:rPr lang="zh-CN" altLang="en-US"/>
-              <a:pPr>
-                <a:defRPr/>
-              </a:pPr>
-              <a:t>‹#›</a:t>
             </a:fld>
             <a:endParaRPr lang="zh-CN" altLang="en-US"/>
           </a:p>
         </p:txBody>
       </p:sp>
     </p:spTree>
-    <p:extLst>
-      <p:ext uri="{BB962C8B-B14F-4D97-AF65-F5344CB8AC3E}">
-        <p14:creationId xmlns:p14="http://schemas.microsoft.com/office/powerpoint/2010/main" val="2867425211"/>
-      </p:ext>
-    </p:extLst>
   </p:cSld>
   <p:clrMapOvr>
     <a:masterClrMapping/>
@@ -3964,6 +3571,7 @@
               <a:rPr lang="zh-CN" altLang="en-US"/>
               <a:t>单击此处编辑母版标题样式</a:t>
             </a:r>
+            <a:endParaRPr lang="zh-CN" altLang="en-US"/>
           </a:p>
         </p:txBody>
       </p:sp>
@@ -4020,6 +3628,7 @@
               <a:rPr lang="zh-CN" altLang="en-US"/>
               <a:t>单击此处编辑母版文本样式</a:t>
             </a:r>
+            <a:endParaRPr lang="zh-CN" altLang="en-US"/>
           </a:p>
           <a:p>
             <a:pPr lvl="1"/>
@@ -4027,6 +3636,7 @@
               <a:rPr lang="zh-CN" altLang="en-US"/>
               <a:t>第二级</a:t>
             </a:r>
+            <a:endParaRPr lang="zh-CN" altLang="en-US"/>
           </a:p>
           <a:p>
             <a:pPr lvl="2"/>
@@ -4034,6 +3644,7 @@
               <a:rPr lang="zh-CN" altLang="en-US"/>
               <a:t>第三级</a:t>
             </a:r>
+            <a:endParaRPr lang="zh-CN" altLang="en-US"/>
           </a:p>
           <a:p>
             <a:pPr lvl="3"/>
@@ -4041,6 +3652,7 @@
               <a:rPr lang="zh-CN" altLang="en-US"/>
               <a:t>第四级</a:t>
             </a:r>
+            <a:endParaRPr lang="zh-CN" altLang="en-US"/>
           </a:p>
           <a:p>
             <a:pPr lvl="4"/>
@@ -4048,6 +3660,7 @@
               <a:rPr lang="zh-CN" altLang="en-US"/>
               <a:t>第五级</a:t>
             </a:r>
+            <a:endParaRPr lang="zh-CN" altLang="en-US"/>
           </a:p>
         </p:txBody>
       </p:sp>
@@ -4104,6 +3717,7 @@
               <a:rPr lang="zh-CN" altLang="en-US"/>
               <a:t>单击此处编辑母版文本样式</a:t>
             </a:r>
+            <a:endParaRPr lang="zh-CN" altLang="en-US"/>
           </a:p>
           <a:p>
             <a:pPr lvl="1"/>
@@ -4111,6 +3725,7 @@
               <a:rPr lang="zh-CN" altLang="en-US"/>
               <a:t>第二级</a:t>
             </a:r>
+            <a:endParaRPr lang="zh-CN" altLang="en-US"/>
           </a:p>
           <a:p>
             <a:pPr lvl="2"/>
@@ -4118,6 +3733,7 @@
               <a:rPr lang="zh-CN" altLang="en-US"/>
               <a:t>第三级</a:t>
             </a:r>
+            <a:endParaRPr lang="zh-CN" altLang="en-US"/>
           </a:p>
           <a:p>
             <a:pPr lvl="3"/>
@@ -4125,6 +3741,7 @@
               <a:rPr lang="zh-CN" altLang="en-US"/>
               <a:t>第四级</a:t>
             </a:r>
+            <a:endParaRPr lang="zh-CN" altLang="en-US"/>
           </a:p>
           <a:p>
             <a:pPr lvl="4"/>
@@ -4132,18 +3749,13 @@
               <a:rPr lang="zh-CN" altLang="en-US"/>
               <a:t>第五级</a:t>
             </a:r>
+            <a:endParaRPr lang="zh-CN" altLang="en-US"/>
           </a:p>
         </p:txBody>
       </p:sp>
       <p:sp>
         <p:nvSpPr>
-          <p:cNvPr id="5" name="日期占位符 3">
-            <a:extLst>
-              <a:ext uri="{FF2B5EF4-FFF2-40B4-BE49-F238E27FC236}">
-                <a16:creationId xmlns:a16="http://schemas.microsoft.com/office/drawing/2014/main" id="{20880CC9-7971-4098-B87F-8480BDBD0DFD}"/>
-              </a:ext>
-            </a:extLst>
-          </p:cNvPr>
+          <p:cNvPr id="5" name="日期占位符 3"/>
           <p:cNvSpPr>
             <a:spLocks noGrp="1"/>
           </p:cNvSpPr>
@@ -4165,10 +3777,6 @@
             </a:pPr>
             <a:fld id="{B2CBB680-830C-4A88-AF9D-51D5BB13C0CE}" type="datetimeFigureOut">
               <a:rPr lang="zh-CN" altLang="en-US"/>
-              <a:pPr>
-                <a:defRPr/>
-              </a:pPr>
-              <a:t>2026/6/2</a:t>
             </a:fld>
             <a:endParaRPr lang="zh-CN" altLang="en-US"/>
           </a:p>
@@ -4176,13 +3784,7 @@
       </p:sp>
       <p:sp>
         <p:nvSpPr>
-          <p:cNvPr id="6" name="页脚占位符 4">
-            <a:extLst>
-              <a:ext uri="{FF2B5EF4-FFF2-40B4-BE49-F238E27FC236}">
-                <a16:creationId xmlns:a16="http://schemas.microsoft.com/office/drawing/2014/main" id="{2AE3D943-B121-407E-916D-9FAD9F38AE58}"/>
-              </a:ext>
-            </a:extLst>
-          </p:cNvPr>
+          <p:cNvPr id="6" name="页脚占位符 4"/>
           <p:cNvSpPr>
             <a:spLocks noGrp="1"/>
           </p:cNvSpPr>
@@ -4208,13 +3810,7 @@
       </p:sp>
       <p:sp>
         <p:nvSpPr>
-          <p:cNvPr id="7" name="灯片编号占位符 5">
-            <a:extLst>
-              <a:ext uri="{FF2B5EF4-FFF2-40B4-BE49-F238E27FC236}">
-                <a16:creationId xmlns:a16="http://schemas.microsoft.com/office/drawing/2014/main" id="{22CF24BB-C6B9-4C32-9E47-C86D43E7CCD0}"/>
-              </a:ext>
-            </a:extLst>
-          </p:cNvPr>
+          <p:cNvPr id="7" name="灯片编号占位符 5"/>
           <p:cNvSpPr>
             <a:spLocks noGrp="1"/>
           </p:cNvSpPr>
@@ -4236,21 +3832,12 @@
             </a:pPr>
             <a:fld id="{91F71099-1BE1-4EC4-99FA-0E8A4EF43A17}" type="slidenum">
               <a:rPr lang="zh-CN" altLang="en-US"/>
-              <a:pPr>
-                <a:defRPr/>
-              </a:pPr>
-              <a:t>‹#›</a:t>
             </a:fld>
             <a:endParaRPr lang="zh-CN" altLang="en-US"/>
           </a:p>
         </p:txBody>
       </p:sp>
     </p:spTree>
-    <p:extLst>
-      <p:ext uri="{BB962C8B-B14F-4D97-AF65-F5344CB8AC3E}">
-        <p14:creationId xmlns:p14="http://schemas.microsoft.com/office/powerpoint/2010/main" val="3343344951"/>
-      </p:ext>
-    </p:extLst>
   </p:cSld>
   <p:clrMapOvr>
     <a:masterClrMapping/>
@@ -4298,6 +3885,7 @@
               <a:rPr lang="zh-CN" altLang="en-US"/>
               <a:t>单击此处编辑母版标题样式</a:t>
             </a:r>
+            <a:endParaRPr lang="zh-CN" altLang="en-US"/>
           </a:p>
         </p:txBody>
       </p:sp>
@@ -4363,6 +3951,7 @@
               <a:rPr lang="zh-CN" altLang="en-US"/>
               <a:t>单击此处编辑母版文本样式</a:t>
             </a:r>
+            <a:endParaRPr lang="zh-CN" altLang="en-US"/>
           </a:p>
         </p:txBody>
       </p:sp>
@@ -4419,6 +4008,7 @@
               <a:rPr lang="zh-CN" altLang="en-US"/>
               <a:t>单击此处编辑母版文本样式</a:t>
             </a:r>
+            <a:endParaRPr lang="zh-CN" altLang="en-US"/>
           </a:p>
           <a:p>
             <a:pPr lvl="1"/>
@@ -4426,6 +4016,7 @@
               <a:rPr lang="zh-CN" altLang="en-US"/>
               <a:t>第二级</a:t>
             </a:r>
+            <a:endParaRPr lang="zh-CN" altLang="en-US"/>
           </a:p>
           <a:p>
             <a:pPr lvl="2"/>
@@ -4433,6 +4024,7 @@
               <a:rPr lang="zh-CN" altLang="en-US"/>
               <a:t>第三级</a:t>
             </a:r>
+            <a:endParaRPr lang="zh-CN" altLang="en-US"/>
           </a:p>
           <a:p>
             <a:pPr lvl="3"/>
@@ -4440,6 +4032,7 @@
               <a:rPr lang="zh-CN" altLang="en-US"/>
               <a:t>第四级</a:t>
             </a:r>
+            <a:endParaRPr lang="zh-CN" altLang="en-US"/>
           </a:p>
           <a:p>
             <a:pPr lvl="4"/>
@@ -4447,6 +4040,7 @@
               <a:rPr lang="zh-CN" altLang="en-US"/>
               <a:t>第五级</a:t>
             </a:r>
+            <a:endParaRPr lang="zh-CN" altLang="en-US"/>
           </a:p>
         </p:txBody>
       </p:sp>
@@ -4512,6 +4106,7 @@
               <a:rPr lang="zh-CN" altLang="en-US"/>
               <a:t>单击此处编辑母版文本样式</a:t>
             </a:r>
+            <a:endParaRPr lang="zh-CN" altLang="en-US"/>
           </a:p>
         </p:txBody>
       </p:sp>
@@ -4568,6 +4163,7 @@
               <a:rPr lang="zh-CN" altLang="en-US"/>
               <a:t>单击此处编辑母版文本样式</a:t>
             </a:r>
+            <a:endParaRPr lang="zh-CN" altLang="en-US"/>
           </a:p>
           <a:p>
             <a:pPr lvl="1"/>
@@ -4575,6 +4171,7 @@
               <a:rPr lang="zh-CN" altLang="en-US"/>
               <a:t>第二级</a:t>
             </a:r>
+            <a:endParaRPr lang="zh-CN" altLang="en-US"/>
           </a:p>
           <a:p>
             <a:pPr lvl="2"/>
@@ -4582,6 +4179,7 @@
               <a:rPr lang="zh-CN" altLang="en-US"/>
               <a:t>第三级</a:t>
             </a:r>
+            <a:endParaRPr lang="zh-CN" altLang="en-US"/>
           </a:p>
           <a:p>
             <a:pPr lvl="3"/>
@@ -4589,6 +4187,7 @@
               <a:rPr lang="zh-CN" altLang="en-US"/>
               <a:t>第四级</a:t>
             </a:r>
+            <a:endParaRPr lang="zh-CN" altLang="en-US"/>
           </a:p>
           <a:p>
             <a:pPr lvl="4"/>
@@ -4596,18 +4195,13 @@
               <a:rPr lang="zh-CN" altLang="en-US"/>
               <a:t>第五级</a:t>
             </a:r>
+            <a:endParaRPr lang="zh-CN" altLang="en-US"/>
           </a:p>
         </p:txBody>
       </p:sp>
       <p:sp>
         <p:nvSpPr>
-          <p:cNvPr id="7" name="日期占位符 3">
-            <a:extLst>
-              <a:ext uri="{FF2B5EF4-FFF2-40B4-BE49-F238E27FC236}">
-                <a16:creationId xmlns:a16="http://schemas.microsoft.com/office/drawing/2014/main" id="{8CE374B4-C9E2-4251-B199-E4EB7F5E42B1}"/>
-              </a:ext>
-            </a:extLst>
-          </p:cNvPr>
+          <p:cNvPr id="7" name="日期占位符 3"/>
           <p:cNvSpPr>
             <a:spLocks noGrp="1"/>
           </p:cNvSpPr>
@@ -4629,10 +4223,6 @@
             </a:pPr>
             <a:fld id="{0D29C6AF-5792-4C28-AF80-D5340AE435B0}" type="datetimeFigureOut">
               <a:rPr lang="zh-CN" altLang="en-US"/>
-              <a:pPr>
-                <a:defRPr/>
-              </a:pPr>
-              <a:t>2026/6/2</a:t>
             </a:fld>
             <a:endParaRPr lang="zh-CN" altLang="en-US"/>
           </a:p>
@@ -4640,13 +4230,7 @@
       </p:sp>
       <p:sp>
         <p:nvSpPr>
-          <p:cNvPr id="8" name="页脚占位符 4">
-            <a:extLst>
-              <a:ext uri="{FF2B5EF4-FFF2-40B4-BE49-F238E27FC236}">
-                <a16:creationId xmlns:a16="http://schemas.microsoft.com/office/drawing/2014/main" id="{E9B58D44-811D-4457-B664-5138E3841E88}"/>
-              </a:ext>
-            </a:extLst>
-          </p:cNvPr>
+          <p:cNvPr id="8" name="页脚占位符 4"/>
           <p:cNvSpPr>
             <a:spLocks noGrp="1"/>
           </p:cNvSpPr>
@@ -4672,13 +4256,7 @@
       </p:sp>
       <p:sp>
         <p:nvSpPr>
-          <p:cNvPr id="9" name="灯片编号占位符 5">
-            <a:extLst>
-              <a:ext uri="{FF2B5EF4-FFF2-40B4-BE49-F238E27FC236}">
-                <a16:creationId xmlns:a16="http://schemas.microsoft.com/office/drawing/2014/main" id="{0A1AC865-3AD2-427E-AFE6-3583B2CEC9B6}"/>
-              </a:ext>
-            </a:extLst>
-          </p:cNvPr>
+          <p:cNvPr id="9" name="灯片编号占位符 5"/>
           <p:cNvSpPr>
             <a:spLocks noGrp="1"/>
           </p:cNvSpPr>
@@ -4700,21 +4278,12 @@
             </a:pPr>
             <a:fld id="{DE48EC19-AA48-483B-9C69-7C29A53F1D62}" type="slidenum">
               <a:rPr lang="zh-CN" altLang="en-US"/>
-              <a:pPr>
-                <a:defRPr/>
-              </a:pPr>
-              <a:t>‹#›</a:t>
             </a:fld>
             <a:endParaRPr lang="zh-CN" altLang="en-US"/>
           </a:p>
         </p:txBody>
       </p:sp>
     </p:spTree>
-    <p:extLst>
-      <p:ext uri="{BB962C8B-B14F-4D97-AF65-F5344CB8AC3E}">
-        <p14:creationId xmlns:p14="http://schemas.microsoft.com/office/powerpoint/2010/main" val="3549895189"/>
-      </p:ext>
-    </p:extLst>
   </p:cSld>
   <p:clrMapOvr>
     <a:masterClrMapping/>
@@ -4758,18 +4327,13 @@
               <a:rPr lang="zh-CN" altLang="en-US"/>
               <a:t>单击此处编辑母版标题样式</a:t>
             </a:r>
+            <a:endParaRPr lang="zh-CN" altLang="en-US"/>
           </a:p>
         </p:txBody>
       </p:sp>
       <p:sp>
         <p:nvSpPr>
-          <p:cNvPr id="3" name="日期占位符 3">
-            <a:extLst>
-              <a:ext uri="{FF2B5EF4-FFF2-40B4-BE49-F238E27FC236}">
-                <a16:creationId xmlns:a16="http://schemas.microsoft.com/office/drawing/2014/main" id="{D4571941-D6AA-47A6-B45C-08C11357B850}"/>
-              </a:ext>
-            </a:extLst>
-          </p:cNvPr>
+          <p:cNvPr id="3" name="日期占位符 3"/>
           <p:cNvSpPr>
             <a:spLocks noGrp="1"/>
           </p:cNvSpPr>
@@ -4791,10 +4355,6 @@
             </a:pPr>
             <a:fld id="{38ACEB95-638D-4867-89C1-C84FCA55FD02}" type="datetimeFigureOut">
               <a:rPr lang="zh-CN" altLang="en-US"/>
-              <a:pPr>
-                <a:defRPr/>
-              </a:pPr>
-              <a:t>2026/6/2</a:t>
             </a:fld>
             <a:endParaRPr lang="zh-CN" altLang="en-US"/>
           </a:p>
@@ -4802,13 +4362,7 @@
       </p:sp>
       <p:sp>
         <p:nvSpPr>
-          <p:cNvPr id="4" name="页脚占位符 4">
-            <a:extLst>
-              <a:ext uri="{FF2B5EF4-FFF2-40B4-BE49-F238E27FC236}">
-                <a16:creationId xmlns:a16="http://schemas.microsoft.com/office/drawing/2014/main" id="{BE81DE41-E008-427E-A0EB-9D01D03BFCDB}"/>
-              </a:ext>
-            </a:extLst>
-          </p:cNvPr>
+          <p:cNvPr id="4" name="页脚占位符 4"/>
           <p:cNvSpPr>
             <a:spLocks noGrp="1"/>
           </p:cNvSpPr>
@@ -4834,13 +4388,7 @@
       </p:sp>
       <p:sp>
         <p:nvSpPr>
-          <p:cNvPr id="5" name="灯片编号占位符 5">
-            <a:extLst>
-              <a:ext uri="{FF2B5EF4-FFF2-40B4-BE49-F238E27FC236}">
-                <a16:creationId xmlns:a16="http://schemas.microsoft.com/office/drawing/2014/main" id="{894AE7B3-31F8-4E8C-BB75-7A3F0EC815D9}"/>
-              </a:ext>
-            </a:extLst>
-          </p:cNvPr>
+          <p:cNvPr id="5" name="灯片编号占位符 5"/>
           <p:cNvSpPr>
             <a:spLocks noGrp="1"/>
           </p:cNvSpPr>
@@ -4862,21 +4410,12 @@
             </a:pPr>
             <a:fld id="{3BD03AD1-CBA7-43A5-BDAB-D2A6671AEF2A}" type="slidenum">
               <a:rPr lang="zh-CN" altLang="en-US"/>
-              <a:pPr>
-                <a:defRPr/>
-              </a:pPr>
-              <a:t>‹#›</a:t>
             </a:fld>
             <a:endParaRPr lang="zh-CN" altLang="en-US"/>
           </a:p>
         </p:txBody>
       </p:sp>
     </p:spTree>
-    <p:extLst>
-      <p:ext uri="{BB962C8B-B14F-4D97-AF65-F5344CB8AC3E}">
-        <p14:creationId xmlns:p14="http://schemas.microsoft.com/office/powerpoint/2010/main" val="2816883384"/>
-      </p:ext>
-    </p:extLst>
   </p:cSld>
   <p:clrMapOvr>
     <a:masterClrMapping/>
@@ -4903,13 +4442,7 @@
       </p:grpSpPr>
       <p:sp>
         <p:nvSpPr>
-          <p:cNvPr id="2" name="日期占位符 3">
-            <a:extLst>
-              <a:ext uri="{FF2B5EF4-FFF2-40B4-BE49-F238E27FC236}">
-                <a16:creationId xmlns:a16="http://schemas.microsoft.com/office/drawing/2014/main" id="{0182AB05-0F02-4448-AA3F-1E48E8443E8A}"/>
-              </a:ext>
-            </a:extLst>
-          </p:cNvPr>
+          <p:cNvPr id="2" name="日期占位符 3"/>
           <p:cNvSpPr>
             <a:spLocks noGrp="1"/>
           </p:cNvSpPr>
@@ -4931,10 +4464,6 @@
             </a:pPr>
             <a:fld id="{B883964D-015F-45A6-BBB8-525A43BB96E4}" type="datetimeFigureOut">
               <a:rPr lang="zh-CN" altLang="en-US"/>
-              <a:pPr>
-                <a:defRPr/>
-              </a:pPr>
-              <a:t>2026/6/2</a:t>
             </a:fld>
             <a:endParaRPr lang="zh-CN" altLang="en-US"/>
           </a:p>
@@ -4942,13 +4471,7 @@
       </p:sp>
       <p:sp>
         <p:nvSpPr>
-          <p:cNvPr id="3" name="页脚占位符 4">
-            <a:extLst>
-              <a:ext uri="{FF2B5EF4-FFF2-40B4-BE49-F238E27FC236}">
-                <a16:creationId xmlns:a16="http://schemas.microsoft.com/office/drawing/2014/main" id="{CDEBB7F7-48E2-4D51-996D-99CFA564FDC1}"/>
-              </a:ext>
-            </a:extLst>
-          </p:cNvPr>
+          <p:cNvPr id="3" name="页脚占位符 4"/>
           <p:cNvSpPr>
             <a:spLocks noGrp="1"/>
           </p:cNvSpPr>
@@ -4974,13 +4497,7 @@
       </p:sp>
       <p:sp>
         <p:nvSpPr>
-          <p:cNvPr id="4" name="灯片编号占位符 5">
-            <a:extLst>
-              <a:ext uri="{FF2B5EF4-FFF2-40B4-BE49-F238E27FC236}">
-                <a16:creationId xmlns:a16="http://schemas.microsoft.com/office/drawing/2014/main" id="{4A9F14A0-6B8E-4251-9D5B-A21946D8CD22}"/>
-              </a:ext>
-            </a:extLst>
-          </p:cNvPr>
+          <p:cNvPr id="4" name="灯片编号占位符 5"/>
           <p:cNvSpPr>
             <a:spLocks noGrp="1"/>
           </p:cNvSpPr>
@@ -5002,21 +4519,12 @@
             </a:pPr>
             <a:fld id="{DDDA8CA2-A1CB-4473-A6CD-72E4CDDC229B}" type="slidenum">
               <a:rPr lang="zh-CN" altLang="en-US"/>
-              <a:pPr>
-                <a:defRPr/>
-              </a:pPr>
-              <a:t>‹#›</a:t>
             </a:fld>
             <a:endParaRPr lang="zh-CN" altLang="en-US"/>
           </a:p>
         </p:txBody>
       </p:sp>
     </p:spTree>
-    <p:extLst>
-      <p:ext uri="{BB962C8B-B14F-4D97-AF65-F5344CB8AC3E}">
-        <p14:creationId xmlns:p14="http://schemas.microsoft.com/office/powerpoint/2010/main" val="3325645518"/>
-      </p:ext>
-    </p:extLst>
   </p:cSld>
   <p:clrMapOvr>
     <a:masterClrMapping/>
@@ -5069,6 +4577,7 @@
               <a:rPr lang="zh-CN" altLang="en-US"/>
               <a:t>单击此处编辑母版标题样式</a:t>
             </a:r>
+            <a:endParaRPr lang="zh-CN" altLang="en-US"/>
           </a:p>
         </p:txBody>
       </p:sp>
@@ -5125,6 +4634,7 @@
               <a:rPr lang="zh-CN" altLang="en-US"/>
               <a:t>单击此处编辑母版文本样式</a:t>
             </a:r>
+            <a:endParaRPr lang="zh-CN" altLang="en-US"/>
           </a:p>
           <a:p>
             <a:pPr lvl="1"/>
@@ -5132,6 +4642,7 @@
               <a:rPr lang="zh-CN" altLang="en-US"/>
               <a:t>第二级</a:t>
             </a:r>
+            <a:endParaRPr lang="zh-CN" altLang="en-US"/>
           </a:p>
           <a:p>
             <a:pPr lvl="2"/>
@@ -5139,6 +4650,7 @@
               <a:rPr lang="zh-CN" altLang="en-US"/>
               <a:t>第三级</a:t>
             </a:r>
+            <a:endParaRPr lang="zh-CN" altLang="en-US"/>
           </a:p>
           <a:p>
             <a:pPr lvl="3"/>
@@ -5146,6 +4658,7 @@
               <a:rPr lang="zh-CN" altLang="en-US"/>
               <a:t>第四级</a:t>
             </a:r>
+            <a:endParaRPr lang="zh-CN" altLang="en-US"/>
           </a:p>
           <a:p>
             <a:pPr lvl="4"/>
@@ -5153,6 +4666,7 @@
               <a:rPr lang="zh-CN" altLang="en-US"/>
               <a:t>第五级</a:t>
             </a:r>
+            <a:endParaRPr lang="zh-CN" altLang="en-US"/>
           </a:p>
         </p:txBody>
       </p:sp>
@@ -5218,18 +4732,13 @@
               <a:rPr lang="zh-CN" altLang="en-US"/>
               <a:t>单击此处编辑母版文本样式</a:t>
             </a:r>
+            <a:endParaRPr lang="zh-CN" altLang="en-US"/>
           </a:p>
         </p:txBody>
       </p:sp>
       <p:sp>
         <p:nvSpPr>
-          <p:cNvPr id="5" name="日期占位符 3">
-            <a:extLst>
-              <a:ext uri="{FF2B5EF4-FFF2-40B4-BE49-F238E27FC236}">
-                <a16:creationId xmlns:a16="http://schemas.microsoft.com/office/drawing/2014/main" id="{87165CD9-A9F8-4E14-B869-E12DC6348616}"/>
-              </a:ext>
-            </a:extLst>
-          </p:cNvPr>
+          <p:cNvPr id="5" name="日期占位符 3"/>
           <p:cNvSpPr>
             <a:spLocks noGrp="1"/>
           </p:cNvSpPr>
@@ -5251,10 +4760,6 @@
             </a:pPr>
             <a:fld id="{B9E1E904-1879-477D-A111-3DA566B9A543}" type="datetimeFigureOut">
               <a:rPr lang="zh-CN" altLang="en-US"/>
-              <a:pPr>
-                <a:defRPr/>
-              </a:pPr>
-              <a:t>2026/6/2</a:t>
             </a:fld>
             <a:endParaRPr lang="zh-CN" altLang="en-US"/>
           </a:p>
@@ -5262,13 +4767,7 @@
       </p:sp>
       <p:sp>
         <p:nvSpPr>
-          <p:cNvPr id="6" name="页脚占位符 4">
-            <a:extLst>
-              <a:ext uri="{FF2B5EF4-FFF2-40B4-BE49-F238E27FC236}">
-                <a16:creationId xmlns:a16="http://schemas.microsoft.com/office/drawing/2014/main" id="{6FEB713F-8388-465C-A6A3-E3AF8B630C3F}"/>
-              </a:ext>
-            </a:extLst>
-          </p:cNvPr>
+          <p:cNvPr id="6" name="页脚占位符 4"/>
           <p:cNvSpPr>
             <a:spLocks noGrp="1"/>
           </p:cNvSpPr>
@@ -5294,13 +4793,7 @@
       </p:sp>
       <p:sp>
         <p:nvSpPr>
-          <p:cNvPr id="7" name="灯片编号占位符 5">
-            <a:extLst>
-              <a:ext uri="{FF2B5EF4-FFF2-40B4-BE49-F238E27FC236}">
-                <a16:creationId xmlns:a16="http://schemas.microsoft.com/office/drawing/2014/main" id="{BB7237E4-351C-408F-B400-C4ACC19C0794}"/>
-              </a:ext>
-            </a:extLst>
-          </p:cNvPr>
+          <p:cNvPr id="7" name="灯片编号占位符 5"/>
           <p:cNvSpPr>
             <a:spLocks noGrp="1"/>
           </p:cNvSpPr>
@@ -5322,21 +4815,12 @@
             </a:pPr>
             <a:fld id="{99DE49F4-97E0-4BE7-BD10-8E3DF8F88B7B}" type="slidenum">
               <a:rPr lang="zh-CN" altLang="en-US"/>
-              <a:pPr>
-                <a:defRPr/>
-              </a:pPr>
-              <a:t>‹#›</a:t>
             </a:fld>
             <a:endParaRPr lang="zh-CN" altLang="en-US"/>
           </a:p>
         </p:txBody>
       </p:sp>
     </p:spTree>
-    <p:extLst>
-      <p:ext uri="{BB962C8B-B14F-4D97-AF65-F5344CB8AC3E}">
-        <p14:creationId xmlns:p14="http://schemas.microsoft.com/office/powerpoint/2010/main" val="1179324734"/>
-      </p:ext>
-    </p:extLst>
   </p:cSld>
   <p:clrMapOvr>
     <a:masterClrMapping/>
@@ -5389,6 +4873,7 @@
               <a:rPr lang="zh-CN" altLang="en-US"/>
               <a:t>单击此处编辑母版标题样式</a:t>
             </a:r>
+            <a:endParaRPr lang="zh-CN" altLang="en-US"/>
           </a:p>
         </p:txBody>
       </p:sp>
@@ -5518,18 +5003,13 @@
               <a:rPr lang="zh-CN" altLang="en-US"/>
               <a:t>单击此处编辑母版文本样式</a:t>
             </a:r>
+            <a:endParaRPr lang="zh-CN" altLang="en-US"/>
           </a:p>
         </p:txBody>
       </p:sp>
       <p:sp>
         <p:nvSpPr>
-          <p:cNvPr id="5" name="日期占位符 3">
-            <a:extLst>
-              <a:ext uri="{FF2B5EF4-FFF2-40B4-BE49-F238E27FC236}">
-                <a16:creationId xmlns:a16="http://schemas.microsoft.com/office/drawing/2014/main" id="{ECA3C3AB-5D7A-472A-91E7-79B6F6C2D109}"/>
-              </a:ext>
-            </a:extLst>
-          </p:cNvPr>
+          <p:cNvPr id="5" name="日期占位符 3"/>
           <p:cNvSpPr>
             <a:spLocks noGrp="1"/>
           </p:cNvSpPr>
@@ -5551,10 +5031,6 @@
             </a:pPr>
             <a:fld id="{E2F26D2F-F923-4410-AEB6-AD53FFFD4FFF}" type="datetimeFigureOut">
               <a:rPr lang="zh-CN" altLang="en-US"/>
-              <a:pPr>
-                <a:defRPr/>
-              </a:pPr>
-              <a:t>2026/6/2</a:t>
             </a:fld>
             <a:endParaRPr lang="zh-CN" altLang="en-US"/>
           </a:p>
@@ -5562,13 +5038,7 @@
       </p:sp>
       <p:sp>
         <p:nvSpPr>
-          <p:cNvPr id="6" name="页脚占位符 4">
-            <a:extLst>
-              <a:ext uri="{FF2B5EF4-FFF2-40B4-BE49-F238E27FC236}">
-                <a16:creationId xmlns:a16="http://schemas.microsoft.com/office/drawing/2014/main" id="{5FABE7F1-1CC2-408E-B868-6C222099C0BD}"/>
-              </a:ext>
-            </a:extLst>
-          </p:cNvPr>
+          <p:cNvPr id="6" name="页脚占位符 4"/>
           <p:cNvSpPr>
             <a:spLocks noGrp="1"/>
           </p:cNvSpPr>
@@ -5594,13 +5064,7 @@
       </p:sp>
       <p:sp>
         <p:nvSpPr>
-          <p:cNvPr id="7" name="灯片编号占位符 5">
-            <a:extLst>
-              <a:ext uri="{FF2B5EF4-FFF2-40B4-BE49-F238E27FC236}">
-                <a16:creationId xmlns:a16="http://schemas.microsoft.com/office/drawing/2014/main" id="{E7347EC8-EAD4-4D9F-B832-88008A8D5C8D}"/>
-              </a:ext>
-            </a:extLst>
-          </p:cNvPr>
+          <p:cNvPr id="7" name="灯片编号占位符 5"/>
           <p:cNvSpPr>
             <a:spLocks noGrp="1"/>
           </p:cNvSpPr>
@@ -5622,21 +5086,12 @@
             </a:pPr>
             <a:fld id="{9C997849-179C-4BF5-8A5B-F91223F744E8}" type="slidenum">
               <a:rPr lang="zh-CN" altLang="en-US"/>
-              <a:pPr>
-                <a:defRPr/>
-              </a:pPr>
-              <a:t>‹#›</a:t>
             </a:fld>
             <a:endParaRPr lang="zh-CN" altLang="en-US"/>
           </a:p>
         </p:txBody>
       </p:sp>
     </p:spTree>
-    <p:extLst>
-      <p:ext uri="{BB962C8B-B14F-4D97-AF65-F5344CB8AC3E}">
-        <p14:creationId xmlns:p14="http://schemas.microsoft.com/office/powerpoint/2010/main" val="3757372752"/>
-      </p:ext>
-    </p:extLst>
   </p:cSld>
   <p:clrMapOvr>
     <a:masterClrMapping/>
@@ -5671,20 +5126,14 @@
       </p:grpSpPr>
       <p:pic>
         <p:nvPicPr>
-          <p:cNvPr id="1026" name="图片 6">
-            <a:extLst>
-              <a:ext uri="{FF2B5EF4-FFF2-40B4-BE49-F238E27FC236}">
-                <a16:creationId xmlns:a16="http://schemas.microsoft.com/office/drawing/2014/main" id="{C7E279F9-4D1D-41C2-B594-847DFD60A4AC}"/>
-              </a:ext>
-            </a:extLst>
-          </p:cNvPr>
+          <p:cNvPr id="1026" name="图片 6"/>
           <p:cNvPicPr>
             <a:picLocks noChangeAspect="1"/>
           </p:cNvPicPr>
           <p:nvPr userDrawn="1"/>
         </p:nvPicPr>
         <p:blipFill>
-          <a:blip r:embed="rId14">
+          <a:blip r:embed="rId13">
             <a:extLst>
               <a:ext uri="{28A0092B-C50C-407E-A947-70E740481C1C}">
                 <a14:useLocalDpi xmlns:a14="http://schemas.microsoft.com/office/drawing/2010/main" val="0"/>
@@ -5731,13 +5180,7 @@
       </p:pic>
       <p:sp>
         <p:nvSpPr>
-          <p:cNvPr id="1027" name="标题占位符 1">
-            <a:extLst>
-              <a:ext uri="{FF2B5EF4-FFF2-40B4-BE49-F238E27FC236}">
-                <a16:creationId xmlns:a16="http://schemas.microsoft.com/office/drawing/2014/main" id="{764418EE-8BFB-4E4C-AAF1-C4099A235923}"/>
-              </a:ext>
-            </a:extLst>
-          </p:cNvPr>
+          <p:cNvPr id="1027" name="标题占位符 1"/>
           <p:cNvSpPr>
             <a:spLocks noGrp="1"/>
           </p:cNvSpPr>
@@ -5778,11 +5221,7 @@
           </a:extLst>
         </p:spPr>
         <p:txBody>
-          <a:bodyPr vert="horz" wrap="square" lIns="91440" tIns="45720" rIns="91440" bIns="45720" numCol="1" anchor="ctr" anchorCtr="0" compatLnSpc="1">
-            <a:prstTxWarp prst="textNoShape">
-              <a:avLst/>
-            </a:prstTxWarp>
-          </a:bodyPr>
+          <a:bodyPr vert="horz" wrap="square" lIns="91440" tIns="45720" rIns="91440" bIns="45720" numCol="1" anchor="ctr" anchorCtr="0" compatLnSpc="1"/>
           <a:lstStyle/>
           <a:p>
             <a:pPr lvl="0"/>
@@ -5790,18 +5229,13 @@
               <a:rPr lang="zh-CN" altLang="en-US"/>
               <a:t>单击此处编辑母版标题样式</a:t>
             </a:r>
+            <a:endParaRPr lang="zh-CN" altLang="en-US"/>
           </a:p>
         </p:txBody>
       </p:sp>
       <p:sp>
         <p:nvSpPr>
-          <p:cNvPr id="1028" name="文本占位符 2">
-            <a:extLst>
-              <a:ext uri="{FF2B5EF4-FFF2-40B4-BE49-F238E27FC236}">
-                <a16:creationId xmlns:a16="http://schemas.microsoft.com/office/drawing/2014/main" id="{829A604F-10BF-4619-82BD-2A4750A6231C}"/>
-              </a:ext>
-            </a:extLst>
-          </p:cNvPr>
+          <p:cNvPr id="1028" name="文本占位符 2"/>
           <p:cNvSpPr>
             <a:spLocks noGrp="1"/>
           </p:cNvSpPr>
@@ -5842,11 +5276,7 @@
           </a:extLst>
         </p:spPr>
         <p:txBody>
-          <a:bodyPr vert="horz" wrap="square" lIns="91440" tIns="45720" rIns="91440" bIns="45720" numCol="1" anchor="t" anchorCtr="0" compatLnSpc="1">
-            <a:prstTxWarp prst="textNoShape">
-              <a:avLst/>
-            </a:prstTxWarp>
-          </a:bodyPr>
+          <a:bodyPr vert="horz" wrap="square" lIns="91440" tIns="45720" rIns="91440" bIns="45720" numCol="1" anchor="t" anchorCtr="0" compatLnSpc="1"/>
           <a:lstStyle/>
           <a:p>
             <a:pPr lvl="0"/>
@@ -5854,6 +5284,7 @@
               <a:rPr lang="zh-CN" altLang="en-US"/>
               <a:t>单击此处编辑母版文本样式</a:t>
             </a:r>
+            <a:endParaRPr lang="zh-CN" altLang="en-US"/>
           </a:p>
           <a:p>
             <a:pPr lvl="1"/>
@@ -5861,6 +5292,7 @@
               <a:rPr lang="zh-CN" altLang="en-US"/>
               <a:t>第二级</a:t>
             </a:r>
+            <a:endParaRPr lang="zh-CN" altLang="en-US"/>
           </a:p>
           <a:p>
             <a:pPr lvl="2"/>
@@ -5868,6 +5300,7 @@
               <a:rPr lang="zh-CN" altLang="en-US"/>
               <a:t>第三级</a:t>
             </a:r>
+            <a:endParaRPr lang="zh-CN" altLang="en-US"/>
           </a:p>
           <a:p>
             <a:pPr lvl="3"/>
@@ -5875,6 +5308,7 @@
               <a:rPr lang="zh-CN" altLang="en-US"/>
               <a:t>第四级</a:t>
             </a:r>
+            <a:endParaRPr lang="zh-CN" altLang="en-US"/>
           </a:p>
           <a:p>
             <a:pPr lvl="4"/>
@@ -5882,18 +5316,13 @@
               <a:rPr lang="zh-CN" altLang="en-US"/>
               <a:t>第五级</a:t>
             </a:r>
+            <a:endParaRPr lang="zh-CN" altLang="en-US"/>
           </a:p>
         </p:txBody>
       </p:sp>
       <p:sp>
         <p:nvSpPr>
-          <p:cNvPr id="4" name="日期占位符 3">
-            <a:extLst>
-              <a:ext uri="{FF2B5EF4-FFF2-40B4-BE49-F238E27FC236}">
-                <a16:creationId xmlns:a16="http://schemas.microsoft.com/office/drawing/2014/main" id="{5D1BEE02-6019-452C-A6F6-3A0A8D13C996}"/>
-              </a:ext>
-            </a:extLst>
-          </p:cNvPr>
+          <p:cNvPr id="4" name="日期占位符 3"/>
           <p:cNvSpPr>
             <a:spLocks noGrp="1"/>
           </p:cNvSpPr>
@@ -5937,10 +5366,6 @@
             </a:pPr>
             <a:fld id="{3B7BE501-E7B6-47ED-A922-6C02EB619C18}" type="datetimeFigureOut">
               <a:rPr lang="zh-CN" altLang="en-US"/>
-              <a:pPr>
-                <a:defRPr/>
-              </a:pPr>
-              <a:t>2026/6/2</a:t>
             </a:fld>
             <a:endParaRPr lang="zh-CN" altLang="en-US"/>
           </a:p>
@@ -5948,13 +5373,7 @@
       </p:sp>
       <p:sp>
         <p:nvSpPr>
-          <p:cNvPr id="5" name="页脚占位符 4">
-            <a:extLst>
-              <a:ext uri="{FF2B5EF4-FFF2-40B4-BE49-F238E27FC236}">
-                <a16:creationId xmlns:a16="http://schemas.microsoft.com/office/drawing/2014/main" id="{F7F54BB4-FEDF-41F9-BBFC-5687461F6767}"/>
-              </a:ext>
-            </a:extLst>
-          </p:cNvPr>
+          <p:cNvPr id="5" name="页脚占位符 4"/>
           <p:cNvSpPr>
             <a:spLocks noGrp="1"/>
           </p:cNvSpPr>
@@ -6002,13 +5421,7 @@
       </p:sp>
       <p:sp>
         <p:nvSpPr>
-          <p:cNvPr id="6" name="灯片编号占位符 5">
-            <a:extLst>
-              <a:ext uri="{FF2B5EF4-FFF2-40B4-BE49-F238E27FC236}">
-                <a16:creationId xmlns:a16="http://schemas.microsoft.com/office/drawing/2014/main" id="{A4F037EF-6145-49C6-93ED-FCFAE075395B}"/>
-              </a:ext>
-            </a:extLst>
-          </p:cNvPr>
+          <p:cNvPr id="6" name="灯片编号占位符 5"/>
           <p:cNvSpPr>
             <a:spLocks noGrp="1"/>
           </p:cNvSpPr>
@@ -6026,11 +5439,7 @@
           </a:prstGeom>
         </p:spPr>
         <p:txBody>
-          <a:bodyPr vert="horz" wrap="square" lIns="91440" tIns="45720" rIns="91440" bIns="45720" numCol="1" anchor="ctr" anchorCtr="0" compatLnSpc="1">
-            <a:prstTxWarp prst="textNoShape">
-              <a:avLst/>
-            </a:prstTxWarp>
-          </a:bodyPr>
+          <a:bodyPr vert="horz" wrap="square" lIns="91440" tIns="45720" rIns="91440" bIns="45720" numCol="1" anchor="ctr" anchorCtr="0" compatLnSpc="1"/>
           <a:lstStyle>
             <a:lvl1pPr algn="r" eaLnBrk="1" hangingPunct="1">
               <a:defRPr sz="1200">
@@ -6046,10 +5455,6 @@
             </a:pPr>
             <a:fld id="{5F1DB772-2744-4267-A0B6-7B9C40C910D0}" type="slidenum">
               <a:rPr lang="zh-CN" altLang="en-US"/>
-              <a:pPr>
-                <a:defRPr/>
-              </a:pPr>
-              <a:t>‹#›</a:t>
             </a:fld>
             <a:endParaRPr lang="zh-CN" altLang="en-US"/>
           </a:p>
@@ -6057,20 +5462,14 @@
       </p:sp>
       <p:pic>
         <p:nvPicPr>
-          <p:cNvPr id="1032" name="图片 7">
-            <a:extLst>
-              <a:ext uri="{FF2B5EF4-FFF2-40B4-BE49-F238E27FC236}">
-                <a16:creationId xmlns:a16="http://schemas.microsoft.com/office/drawing/2014/main" id="{C1A97169-7106-41F3-916B-B51B6D3967A5}"/>
-              </a:ext>
-            </a:extLst>
-          </p:cNvPr>
+          <p:cNvPr id="1032" name="图片 7"/>
           <p:cNvPicPr>
             <a:picLocks noChangeAspect="1"/>
           </p:cNvPicPr>
           <p:nvPr userDrawn="1"/>
         </p:nvPicPr>
         <p:blipFill>
-          <a:blip r:embed="rId15">
+          <a:blip r:embed="rId14">
             <a:extLst>
               <a:ext uri="{28A0092B-C50C-407E-A947-70E740481C1C}">
                 <a14:useLocalDpi xmlns:a14="http://schemas.microsoft.com/office/drawing/2010/main" val="0"/>
@@ -6119,18 +5518,18 @@
   </p:cSld>
   <p:clrMap bg1="lt1" tx1="dk1" bg2="lt2" tx2="dk2" accent1="accent1" accent2="accent2" accent3="accent3" accent4="accent4" accent5="accent5" accent6="accent6" hlink="hlink" folHlink="folHlink"/>
   <p:sldLayoutIdLst>
-    <p:sldLayoutId id="2147483936" r:id="rId1"/>
-    <p:sldLayoutId id="2147483937" r:id="rId2"/>
-    <p:sldLayoutId id="2147483938" r:id="rId3"/>
-    <p:sldLayoutId id="2147483939" r:id="rId4"/>
-    <p:sldLayoutId id="2147483940" r:id="rId5"/>
-    <p:sldLayoutId id="2147483941" r:id="rId6"/>
-    <p:sldLayoutId id="2147483942" r:id="rId7"/>
-    <p:sldLayoutId id="2147483943" r:id="rId8"/>
-    <p:sldLayoutId id="2147483944" r:id="rId9"/>
-    <p:sldLayoutId id="2147483945" r:id="rId10"/>
-    <p:sldLayoutId id="2147483946" r:id="rId11"/>
-    <p:sldLayoutId id="2147483947" r:id="rId12"/>
+    <p:sldLayoutId id="2147483649" r:id="rId1"/>
+    <p:sldLayoutId id="2147483650" r:id="rId2"/>
+    <p:sldLayoutId id="2147483651" r:id="rId3"/>
+    <p:sldLayoutId id="2147483652" r:id="rId4"/>
+    <p:sldLayoutId id="2147483653" r:id="rId5"/>
+    <p:sldLayoutId id="2147483654" r:id="rId6"/>
+    <p:sldLayoutId id="2147483655" r:id="rId7"/>
+    <p:sldLayoutId id="2147483656" r:id="rId8"/>
+    <p:sldLayoutId id="2147483657" r:id="rId9"/>
+    <p:sldLayoutId id="2147483658" r:id="rId10"/>
+    <p:sldLayoutId id="2147483659" r:id="rId11"/>
+    <p:sldLayoutId id="2147483660" r:id="rId12"/>
   </p:sldLayoutIdLst>
   <p:txStyles>
     <p:titleStyle>
@@ -6161,8 +5560,8 @@
           <a:solidFill>
             <a:schemeClr val="tx1"/>
           </a:solidFill>
-          <a:latin typeface="Calibri" pitchFamily="34" charset="0"/>
-          <a:ea typeface="宋体" pitchFamily="2" charset="-122"/>
+          <a:latin typeface="Calibri" panose="020F0502020204030204" pitchFamily="34" charset="0"/>
+          <a:ea typeface="宋体" panose="02010600030101010101" pitchFamily="2" charset="-122"/>
         </a:defRPr>
       </a:lvl2pPr>
       <a:lvl3pPr algn="ctr" rtl="0" eaLnBrk="0" fontAlgn="base" hangingPunct="0">
@@ -6176,8 +5575,8 @@
           <a:solidFill>
             <a:schemeClr val="tx1"/>
           </a:solidFill>
-          <a:latin typeface="Calibri" pitchFamily="34" charset="0"/>
-          <a:ea typeface="宋体" pitchFamily="2" charset="-122"/>
+          <a:latin typeface="Calibri" panose="020F0502020204030204" pitchFamily="34" charset="0"/>
+          <a:ea typeface="宋体" panose="02010600030101010101" pitchFamily="2" charset="-122"/>
         </a:defRPr>
       </a:lvl3pPr>
       <a:lvl4pPr algn="ctr" rtl="0" eaLnBrk="0" fontAlgn="base" hangingPunct="0">
@@ -6191,8 +5590,8 @@
           <a:solidFill>
             <a:schemeClr val="tx1"/>
           </a:solidFill>
-          <a:latin typeface="Calibri" pitchFamily="34" charset="0"/>
-          <a:ea typeface="宋体" pitchFamily="2" charset="-122"/>
+          <a:latin typeface="Calibri" panose="020F0502020204030204" pitchFamily="34" charset="0"/>
+          <a:ea typeface="宋体" panose="02010600030101010101" pitchFamily="2" charset="-122"/>
         </a:defRPr>
       </a:lvl4pPr>
       <a:lvl5pPr algn="ctr" rtl="0" eaLnBrk="0" fontAlgn="base" hangingPunct="0">
@@ -6206,8 +5605,8 @@
           <a:solidFill>
             <a:schemeClr val="tx1"/>
           </a:solidFill>
-          <a:latin typeface="Calibri" pitchFamily="34" charset="0"/>
-          <a:ea typeface="宋体" pitchFamily="2" charset="-122"/>
+          <a:latin typeface="Calibri" panose="020F0502020204030204" pitchFamily="34" charset="0"/>
+          <a:ea typeface="宋体" panose="02010600030101010101" pitchFamily="2" charset="-122"/>
         </a:defRPr>
       </a:lvl5pPr>
       <a:lvl6pPr marL="457200" algn="ctr" rtl="0" fontAlgn="base">
@@ -6221,8 +5620,8 @@
           <a:solidFill>
             <a:schemeClr val="tx1"/>
           </a:solidFill>
-          <a:latin typeface="Calibri" pitchFamily="34" charset="0"/>
-          <a:ea typeface="宋体" pitchFamily="2" charset="-122"/>
+          <a:latin typeface="Calibri" panose="020F0502020204030204" pitchFamily="34" charset="0"/>
+          <a:ea typeface="宋体" panose="02010600030101010101" pitchFamily="2" charset="-122"/>
         </a:defRPr>
       </a:lvl6pPr>
       <a:lvl7pPr marL="914400" algn="ctr" rtl="0" fontAlgn="base">
@@ -6236,8 +5635,8 @@
           <a:solidFill>
             <a:schemeClr val="tx1"/>
           </a:solidFill>
-          <a:latin typeface="Calibri" pitchFamily="34" charset="0"/>
-          <a:ea typeface="宋体" pitchFamily="2" charset="-122"/>
+          <a:latin typeface="Calibri" panose="020F0502020204030204" pitchFamily="34" charset="0"/>
+          <a:ea typeface="宋体" panose="02010600030101010101" pitchFamily="2" charset="-122"/>
         </a:defRPr>
       </a:lvl7pPr>
       <a:lvl8pPr marL="1371600" algn="ctr" rtl="0" fontAlgn="base">
@@ -6251,8 +5650,8 @@
           <a:solidFill>
             <a:schemeClr val="tx1"/>
           </a:solidFill>
-          <a:latin typeface="Calibri" pitchFamily="34" charset="0"/>
-          <a:ea typeface="宋体" pitchFamily="2" charset="-122"/>
+          <a:latin typeface="Calibri" panose="020F0502020204030204" pitchFamily="34" charset="0"/>
+          <a:ea typeface="宋体" panose="02010600030101010101" pitchFamily="2" charset="-122"/>
         </a:defRPr>
       </a:lvl8pPr>
       <a:lvl9pPr marL="1828800" algn="ctr" rtl="0" fontAlgn="base">
@@ -6266,8 +5665,8 @@
           <a:solidFill>
             <a:schemeClr val="tx1"/>
           </a:solidFill>
-          <a:latin typeface="Calibri" pitchFamily="34" charset="0"/>
-          <a:ea typeface="宋体" pitchFamily="2" charset="-122"/>
+          <a:latin typeface="Calibri" panose="020F0502020204030204" pitchFamily="34" charset="0"/>
+          <a:ea typeface="宋体" panose="02010600030101010101" pitchFamily="2" charset="-122"/>
         </a:defRPr>
       </a:lvl9pPr>
     </p:titleStyle>
@@ -6366,7 +5765,7 @@
         <a:spcBef>
           <a:spcPct val="20000"/>
         </a:spcBef>
-        <a:buFont typeface="Arial" pitchFamily="34" charset="0"/>
+        <a:buFont typeface="Arial" panose="020B0604020202020204" pitchFamily="34" charset="0"/>
         <a:buChar char="•"/>
         <a:defRPr sz="2000" kern="1200">
           <a:solidFill>
@@ -6381,7 +5780,7 @@
         <a:spcBef>
           <a:spcPct val="20000"/>
         </a:spcBef>
-        <a:buFont typeface="Arial" pitchFamily="34" charset="0"/>
+        <a:buFont typeface="Arial" panose="020B0604020202020204" pitchFamily="34" charset="0"/>
         <a:buChar char="•"/>
         <a:defRPr sz="2000" kern="1200">
           <a:solidFill>
@@ -6396,7 +5795,7 @@
         <a:spcBef>
           <a:spcPct val="20000"/>
         </a:spcBef>
-        <a:buFont typeface="Arial" pitchFamily="34" charset="0"/>
+        <a:buFont typeface="Arial" panose="020B0604020202020204" pitchFamily="34" charset="0"/>
         <a:buChar char="•"/>
         <a:defRPr sz="2000" kern="1200">
           <a:solidFill>
@@ -6411,7 +5810,7 @@
         <a:spcBef>
           <a:spcPct val="20000"/>
         </a:spcBef>
-        <a:buFont typeface="Arial" pitchFamily="34" charset="0"/>
+        <a:buFont typeface="Arial" panose="020B0604020202020204" pitchFamily="34" charset="0"/>
         <a:buChar char="•"/>
         <a:defRPr sz="2000" kern="1200">
           <a:solidFill>
@@ -6541,13 +5940,7 @@
       </p:grpSpPr>
       <p:sp>
         <p:nvSpPr>
-          <p:cNvPr id="5122" name="灯片编号占位符 3">
-            <a:extLst>
-              <a:ext uri="{FF2B5EF4-FFF2-40B4-BE49-F238E27FC236}">
-                <a16:creationId xmlns:a16="http://schemas.microsoft.com/office/drawing/2014/main" id="{010FA458-7200-4009-A108-DFB16957AE27}"/>
-              </a:ext>
-            </a:extLst>
-          </p:cNvPr>
+          <p:cNvPr id="5122" name="灯片编号占位符 3"/>
           <p:cNvSpPr>
             <a:spLocks noGrp="1"/>
           </p:cNvSpPr>
@@ -6735,14 +6128,6 @@
               <a:rPr kumimoji="1" lang="en-US" altLang="zh-CN" sz="1400" smtClean="0">
                 <a:latin typeface="Times New Roman" panose="02020603050405020304" pitchFamily="18" charset="0"/>
               </a:rPr>
-              <a:pPr>
-                <a:spcBef>
-                  <a:spcPct val="0"/>
-                </a:spcBef>
-                <a:buFontTx/>
-                <a:buNone/>
-              </a:pPr>
-              <a:t>1</a:t>
             </a:fld>
             <a:endParaRPr kumimoji="1" lang="en-US" altLang="zh-CN" sz="1400">
               <a:latin typeface="Times New Roman" panose="02020603050405020304" pitchFamily="18" charset="0"/>
@@ -6752,13 +6137,7 @@
       </p:sp>
       <p:sp>
         <p:nvSpPr>
-          <p:cNvPr id="94211" name="Text Box 3">
-            <a:extLst>
-              <a:ext uri="{FF2B5EF4-FFF2-40B4-BE49-F238E27FC236}">
-                <a16:creationId xmlns:a16="http://schemas.microsoft.com/office/drawing/2014/main" id="{1180118F-0F9B-44F4-8C1A-78D508EB7A89}"/>
-              </a:ext>
-            </a:extLst>
-          </p:cNvPr>
+          <p:cNvPr id="94211" name="Text Box 3"/>
           <p:cNvSpPr txBox="1">
             <a:spLocks noChangeArrowheads="1"/>
           </p:cNvSpPr>
@@ -6964,13 +6343,7 @@
       </p:sp>
       <p:sp>
         <p:nvSpPr>
-          <p:cNvPr id="5124" name="Text Box 4">
-            <a:extLst>
-              <a:ext uri="{FF2B5EF4-FFF2-40B4-BE49-F238E27FC236}">
-                <a16:creationId xmlns:a16="http://schemas.microsoft.com/office/drawing/2014/main" id="{84260868-6AAC-43C8-A32C-83B235E5F9F0}"/>
-              </a:ext>
-            </a:extLst>
-          </p:cNvPr>
+          <p:cNvPr id="5124" name="Text Box 4"/>
           <p:cNvSpPr txBox="1">
             <a:spLocks noChangeArrowheads="1"/>
           </p:cNvSpPr>
@@ -7189,18 +6562,15 @@
               </a:rPr>
               <a:t>Foundations of Machine Learning</a:t>
             </a:r>
+            <a:endParaRPr kumimoji="1" lang="en-US" altLang="zh-CN" sz="4400" b="1">
+              <a:latin typeface="Monotype Corsiva" panose="03010101010201010101" pitchFamily="66" charset="0"/>
+            </a:endParaRPr>
           </a:p>
         </p:txBody>
       </p:sp>
       <p:sp>
         <p:nvSpPr>
-          <p:cNvPr id="5125" name="Text Box 18">
-            <a:extLst>
-              <a:ext uri="{FF2B5EF4-FFF2-40B4-BE49-F238E27FC236}">
-                <a16:creationId xmlns:a16="http://schemas.microsoft.com/office/drawing/2014/main" id="{D2CB22B5-00BE-49EC-93A1-107A76F4713F}"/>
-              </a:ext>
-            </a:extLst>
-          </p:cNvPr>
+          <p:cNvPr id="5125" name="Text Box 18"/>
           <p:cNvSpPr txBox="1">
             <a:spLocks noChangeArrowheads="1"/>
           </p:cNvSpPr>
@@ -7420,13 +6790,13 @@
               <p:cTn id="2" dur="indefinite" nodeType="mainSeq">
                 <p:childTnLst>
                   <p:par>
-                    <p:cTn id="3" fill="hold" nodeType="clickPar">
+                    <p:cTn id="3" fill="hold">
                       <p:stCondLst>
                         <p:cond delay="indefinite"/>
                       </p:stCondLst>
                       <p:childTnLst>
                         <p:par>
-                          <p:cTn id="4" fill="hold" nodeType="withGroup">
+                          <p:cTn id="4" fill="hold">
                             <p:stCondLst>
                               <p:cond delay="0"/>
                             </p:stCondLst>
@@ -7519,13 +6889,7 @@
       </p:grpSpPr>
       <p:sp>
         <p:nvSpPr>
-          <p:cNvPr id="18434" name="灯片编号占位符 5">
-            <a:extLst>
-              <a:ext uri="{FF2B5EF4-FFF2-40B4-BE49-F238E27FC236}">
-                <a16:creationId xmlns:a16="http://schemas.microsoft.com/office/drawing/2014/main" id="{CBBD9809-2CC4-42C3-B564-FAC6896E7580}"/>
-              </a:ext>
-            </a:extLst>
-          </p:cNvPr>
+          <p:cNvPr id="18434" name="灯片编号占位符 5"/>
           <p:cNvSpPr>
             <a:spLocks noGrp="1"/>
           </p:cNvSpPr>
@@ -7709,14 +7073,6 @@
               <a:rPr kumimoji="1" lang="en-US" altLang="zh-CN" sz="1400" smtClean="0">
                 <a:latin typeface="Times New Roman" panose="02020603050405020304" pitchFamily="18" charset="0"/>
               </a:rPr>
-              <a:pPr>
-                <a:spcBef>
-                  <a:spcPct val="0"/>
-                </a:spcBef>
-                <a:buFontTx/>
-                <a:buNone/>
-              </a:pPr>
-              <a:t>10</a:t>
             </a:fld>
             <a:endParaRPr kumimoji="1" lang="en-US" altLang="zh-CN" sz="1400">
               <a:latin typeface="Times New Roman" panose="02020603050405020304" pitchFamily="18" charset="0"/>
@@ -7726,13 +7082,7 @@
       </p:sp>
       <p:sp>
         <p:nvSpPr>
-          <p:cNvPr id="887811" name="Rectangle 3">
-            <a:extLst>
-              <a:ext uri="{FF2B5EF4-FFF2-40B4-BE49-F238E27FC236}">
-                <a16:creationId xmlns:a16="http://schemas.microsoft.com/office/drawing/2014/main" id="{E67925BF-BD9D-4849-975B-B00461AA9122}"/>
-              </a:ext>
-            </a:extLst>
-          </p:cNvPr>
+          <p:cNvPr id="887811" name="Rectangle 3"/>
           <p:cNvSpPr>
             <a:spLocks noGrp="1"/>
           </p:cNvSpPr>
@@ -7795,6 +7145,11 @@
               </a:rPr>
               <a:t>多层前馈神经网络</a:t>
             </a:r>
+            <a:endParaRPr lang="zh-CN" altLang="en-US" sz="2800" b="1" dirty="0">
+              <a:latin typeface="Times New Roman" panose="02020603050405020304" pitchFamily="18" charset="0"/>
+              <a:ea typeface="楷体" panose="02010609060101010101" pitchFamily="49" charset="-122"/>
+              <a:cs typeface="Times New Roman" panose="02020603050405020304" pitchFamily="18" charset="0"/>
+            </a:endParaRPr>
           </a:p>
           <a:p>
             <a:pPr eaLnBrk="1" hangingPunct="1">
@@ -7856,6 +7211,11 @@
               </a:rPr>
               <a:t>BP</a:t>
             </a:r>
+            <a:endParaRPr lang="en-US" altLang="zh-CN" sz="2800" b="1" dirty="0">
+              <a:latin typeface="Times New Roman" panose="02020603050405020304" pitchFamily="18" charset="0"/>
+              <a:ea typeface="楷体" panose="02010609060101010101" pitchFamily="49" charset="-122"/>
+              <a:cs typeface="Times New Roman" panose="02020603050405020304" pitchFamily="18" charset="0"/>
+            </a:endParaRPr>
           </a:p>
           <a:p>
             <a:pPr eaLnBrk="1" hangingPunct="1">
@@ -8179,13 +7539,7 @@
       </p:sp>
       <p:sp>
         <p:nvSpPr>
-          <p:cNvPr id="18436" name="Text Box 4">
-            <a:extLst>
-              <a:ext uri="{FF2B5EF4-FFF2-40B4-BE49-F238E27FC236}">
-                <a16:creationId xmlns:a16="http://schemas.microsoft.com/office/drawing/2014/main" id="{EB81EA09-BA58-4C02-A7E1-E64004DF3351}"/>
-              </a:ext>
-            </a:extLst>
-          </p:cNvPr>
+          <p:cNvPr id="18436" name="Text Box 4"/>
           <p:cNvSpPr txBox="1">
             <a:spLocks noChangeArrowheads="1"/>
           </p:cNvSpPr>
@@ -8409,6 +7763,11 @@
               </a:rPr>
               <a:t>章：神经网络</a:t>
             </a:r>
+            <a:endParaRPr kumimoji="1" lang="zh-CN" altLang="en-US" b="1" dirty="0">
+              <a:latin typeface="黑体" panose="02010609060101010101" pitchFamily="49" charset="-122"/>
+              <a:ea typeface="黑体" panose="02010609060101010101" pitchFamily="49" charset="-122"/>
+              <a:cs typeface="楷体_GB2312"/>
+            </a:endParaRPr>
           </a:p>
         </p:txBody>
       </p:sp>
@@ -8418,13 +7777,7 @@
           <p:cNvGraphicFramePr>
             <a:graphicFrameLocks noChangeAspect="1"/>
           </p:cNvGraphicFramePr>
-          <p:nvPr>
-            <p:extLst>
-              <p:ext uri="{D42A27DB-BD31-4B8C-83A1-F6EECF244321}">
-                <p14:modId xmlns:p14="http://schemas.microsoft.com/office/powerpoint/2010/main" val="773565080"/>
-              </p:ext>
-            </p:extLst>
-          </p:nvPr>
+          <p:nvPr/>
         </p:nvGraphicFramePr>
         <p:xfrm>
           <a:off x="6300192" y="5995987"/>
@@ -8434,21 +7787,21 @@
           <a:graphicData uri="http://schemas.openxmlformats.org/presentationml/2006/ole">
             <mc:AlternateContent xmlns:mc="http://schemas.openxmlformats.org/markup-compatibility/2006">
               <mc:Choice xmlns:v="urn:schemas-microsoft-com:vml" Requires="v">
-                <p:oleObj name="Formula" r:id="rId3" imgW="1098720" imgH="176760" progId="Equation.Ribbit">
+                <p:oleObj spid="_x0000_s27941" name="Formula" r:id="rId1" imgW="8239125" imgH="1323975" progId="Equation.Ribbit">
                   <p:embed/>
                 </p:oleObj>
               </mc:Choice>
               <mc:Fallback>
-                <p:oleObj name="Formula" r:id="rId3" imgW="1098720" imgH="176760" progId="Equation.Ribbit">
+                <p:oleObj name="Formula" r:id="rId1" imgW="8239125" imgH="1323975" progId="Equation.Ribbit">
                   <p:embed/>
                   <p:pic>
                     <p:nvPicPr>
-                      <p:cNvPr id="5" name="对象 4"/>
+                      <p:cNvPr id="0" name="对象 4"/>
                       <p:cNvPicPr/>
                       <p:nvPr/>
                     </p:nvPicPr>
                     <p:blipFill>
-                      <a:blip r:embed="rId4"/>
+                      <a:blip r:embed="rId2"/>
                       <a:stretch>
                         <a:fillRect/>
                       </a:stretch>
@@ -8470,11 +7823,6 @@
         </a:graphic>
       </p:graphicFrame>
     </p:spTree>
-    <p:extLst>
-      <p:ext uri="{BB962C8B-B14F-4D97-AF65-F5344CB8AC3E}">
-        <p14:creationId xmlns:p14="http://schemas.microsoft.com/office/powerpoint/2010/main" val="3578388625"/>
-      </p:ext>
-    </p:extLst>
   </p:cSld>
   <p:clrMapOvr>
     <a:masterClrMapping/>
@@ -8733,13 +8081,13 @@
                     </p:cTn>
                   </p:par>
                   <p:par>
-                    <p:cTn id="23" fill="hold" nodeType="clickPar">
+                    <p:cTn id="23" fill="hold">
                       <p:stCondLst>
                         <p:cond delay="indefinite"/>
                       </p:stCondLst>
                       <p:childTnLst>
                         <p:par>
-                          <p:cTn id="24" fill="hold" nodeType="withGroup">
+                          <p:cTn id="24" fill="hold">
                             <p:stCondLst>
                               <p:cond delay="0"/>
                             </p:stCondLst>
@@ -9081,13 +8429,7 @@
       </p:grpSpPr>
       <p:sp>
         <p:nvSpPr>
-          <p:cNvPr id="5" name="文本框 4">
-            <a:extLst>
-              <a:ext uri="{FF2B5EF4-FFF2-40B4-BE49-F238E27FC236}">
-                <a16:creationId xmlns:a16="http://schemas.microsoft.com/office/drawing/2014/main" id="{A1E984C5-FC8E-4733-9E4F-3AA81FAE2DE6}"/>
-              </a:ext>
-            </a:extLst>
-          </p:cNvPr>
+          <p:cNvPr id="5" name="文本框 4"/>
           <p:cNvSpPr txBox="1"/>
           <p:nvPr/>
         </p:nvSpPr>
@@ -9120,6 +8462,10 @@
               </a:rPr>
               <a:t>step1:</a:t>
             </a:r>
+            <a:endParaRPr lang="en-US" altLang="zh-CN" sz="1800" b="1" dirty="0">
+              <a:latin typeface="黑体" panose="02010609060101010101" pitchFamily="49" charset="-122"/>
+              <a:ea typeface="黑体" panose="02010609060101010101" pitchFamily="49" charset="-122"/>
+            </a:endParaRPr>
           </a:p>
           <a:p>
             <a:pPr marL="0" indent="0">
@@ -9135,6 +8481,10 @@
               </a:rPr>
               <a:t> </a:t>
             </a:r>
+            <a:endParaRPr lang="en-US" altLang="zh-CN" sz="1800" b="1" dirty="0">
+              <a:latin typeface="黑体" panose="02010609060101010101" pitchFamily="49" charset="-122"/>
+              <a:ea typeface="黑体" panose="02010609060101010101" pitchFamily="49" charset="-122"/>
+            </a:endParaRPr>
           </a:p>
           <a:p>
             <a:pPr marL="0" indent="0">
@@ -9150,18 +8500,16 @@
               </a:rPr>
               <a:t>step2:</a:t>
             </a:r>
+            <a:endParaRPr lang="en-US" altLang="zh-CN" sz="1800" b="1" dirty="0">
+              <a:latin typeface="黑体" panose="02010609060101010101" pitchFamily="49" charset="-122"/>
+              <a:ea typeface="黑体" panose="02010609060101010101" pitchFamily="49" charset="-122"/>
+            </a:endParaRPr>
           </a:p>
         </p:txBody>
       </p:sp>
       <p:grpSp>
         <p:nvGrpSpPr>
-          <p:cNvPr id="6" name="组合 5">
-            <a:extLst>
-              <a:ext uri="{FF2B5EF4-FFF2-40B4-BE49-F238E27FC236}">
-                <a16:creationId xmlns:a16="http://schemas.microsoft.com/office/drawing/2014/main" id="{B05B5981-53D3-47BF-A784-C65E7BD5193A}"/>
-              </a:ext>
-            </a:extLst>
-          </p:cNvPr>
+          <p:cNvPr id="6" name="组合 5"/>
           <p:cNvGrpSpPr/>
           <p:nvPr/>
         </p:nvGrpSpPr>
@@ -9175,20 +8523,14 @@
         </p:grpSpPr>
         <p:pic>
           <p:nvPicPr>
-            <p:cNvPr id="7" name="内容占位符 4">
-              <a:extLst>
-                <a:ext uri="{FF2B5EF4-FFF2-40B4-BE49-F238E27FC236}">
-                  <a16:creationId xmlns:a16="http://schemas.microsoft.com/office/drawing/2014/main" id="{46E07B98-6F9B-424C-8323-6E51591F18B4}"/>
-                </a:ext>
-              </a:extLst>
-            </p:cNvPr>
+            <p:cNvPr id="7" name="内容占位符 4"/>
             <p:cNvPicPr>
               <a:picLocks noChangeAspect="1"/>
             </p:cNvPicPr>
             <p:nvPr/>
           </p:nvPicPr>
           <p:blipFill>
-            <a:blip r:embed="rId2"/>
+            <a:blip r:embed="rId1"/>
             <a:stretch>
               <a:fillRect/>
             </a:stretch>
@@ -9203,17 +8545,11 @@
             </a:prstGeom>
           </p:spPr>
         </p:pic>
-        <mc:AlternateContent xmlns:mc="http://schemas.openxmlformats.org/markup-compatibility/2006" xmlns:a14="http://schemas.microsoft.com/office/drawing/2010/main">
-          <mc:Choice Requires="a14">
+        <mc:AlternateContent xmlns:mc="http://schemas.openxmlformats.org/markup-compatibility/2006">
+          <mc:Choice xmlns:a14="http://schemas.microsoft.com/office/drawing/2010/main" Requires="a14">
             <p:sp>
               <p:nvSpPr>
-                <p:cNvPr id="8" name="文本框 7">
-                  <a:extLst>
-                    <a:ext uri="{FF2B5EF4-FFF2-40B4-BE49-F238E27FC236}">
-                      <a16:creationId xmlns:a16="http://schemas.microsoft.com/office/drawing/2014/main" id="{4B9DE688-7EA0-4F44-BDAD-26B2C6D5E593}"/>
-                    </a:ext>
-                  </a:extLst>
-                </p:cNvPr>
+                <p:cNvPr id="8" name="文本框 7"/>
                 <p:cNvSpPr txBox="1"/>
                 <p:nvPr/>
               </p:nvSpPr>
@@ -9235,7 +8571,6 @@
                 </a:bodyPr>
                 <a:lstStyle/>
                 <a:p>
-                  <a:pPr/>
                   <a14:m>
                     <m:oMathPara xmlns:m="http://schemas.openxmlformats.org/officeDocument/2006/math">
                       <m:oMathParaPr>
@@ -9272,7 +8607,7 @@
                                 </a:solidFill>
                                 <a:latin typeface="Cambria Math" panose="02040503050406030204" pitchFamily="18" charset="0"/>
                               </a:rPr>
-                              <m:t>h</m:t>
+                              <m:t>ℎ</m:t>
                             </m:r>
                           </m:sub>
                         </m:sSub>
@@ -9284,16 +8619,10 @@
               </p:txBody>
             </p:sp>
           </mc:Choice>
-          <mc:Fallback xmlns="">
+          <mc:Fallback>
             <p:sp>
               <p:nvSpPr>
-                <p:cNvPr id="16" name="文本框 15">
-                  <a:extLst>
-                    <a:ext uri="{FF2B5EF4-FFF2-40B4-BE49-F238E27FC236}">
-                      <a16:creationId xmlns:a16="http://schemas.microsoft.com/office/drawing/2014/main" id="{7B52B133-7052-4221-94ED-E689B3B9DD5E}"/>
-                    </a:ext>
-                  </a:extLst>
-                </p:cNvPr>
+                <p:cNvPr id="8" name="文本框 7"/>
                 <p:cNvSpPr txBox="1">
                   <a:spLocks noRot="1" noChangeAspect="1" noMove="1" noResize="1" noEditPoints="1" noAdjustHandles="1" noChangeArrowheads="1" noChangeShapeType="1" noTextEdit="1"/>
                 </p:cNvSpPr>
@@ -9307,11 +8636,8 @@
                 <a:prstGeom prst="rect">
                   <a:avLst/>
                 </a:prstGeom>
-                <a:blipFill>
-                  <a:blip r:embed="rId34"/>
-                  <a:stretch>
-                    <a:fillRect l="-4082" r="-2041" b="-25641"/>
-                  </a:stretch>
+                <a:blipFill rotWithShape="1">
+                  <a:blip r:embed="rId2"/>
                 </a:blipFill>
               </p:spPr>
               <p:txBody>
@@ -9329,17 +8655,11 @@
             </p:sp>
           </mc:Fallback>
         </mc:AlternateContent>
-        <mc:AlternateContent xmlns:mc="http://schemas.openxmlformats.org/markup-compatibility/2006" xmlns:a14="http://schemas.microsoft.com/office/drawing/2010/main">
-          <mc:Choice Requires="a14">
+        <mc:AlternateContent xmlns:mc="http://schemas.openxmlformats.org/markup-compatibility/2006">
+          <mc:Choice xmlns:a14="http://schemas.microsoft.com/office/drawing/2010/main" Requires="a14">
             <p:sp>
               <p:nvSpPr>
-                <p:cNvPr id="9" name="文本框 8">
-                  <a:extLst>
-                    <a:ext uri="{FF2B5EF4-FFF2-40B4-BE49-F238E27FC236}">
-                      <a16:creationId xmlns:a16="http://schemas.microsoft.com/office/drawing/2014/main" id="{3CAB6489-8B18-45E3-8E34-DE8C42F23A1F}"/>
-                    </a:ext>
-                  </a:extLst>
-                </p:cNvPr>
+                <p:cNvPr id="9" name="文本框 8"/>
                 <p:cNvSpPr txBox="1"/>
                 <p:nvPr/>
               </p:nvSpPr>
@@ -9361,7 +8681,6 @@
                 </a:bodyPr>
                 <a:lstStyle/>
                 <a:p>
-                  <a:pPr/>
                   <a14:m>
                     <m:oMathPara xmlns:m="http://schemas.openxmlformats.org/officeDocument/2006/math">
                       <m:oMathParaPr>
@@ -9410,16 +8729,10 @@
               </p:txBody>
             </p:sp>
           </mc:Choice>
-          <mc:Fallback xmlns="">
+          <mc:Fallback>
             <p:sp>
               <p:nvSpPr>
-                <p:cNvPr id="30" name="文本框 29">
-                  <a:extLst>
-                    <a:ext uri="{FF2B5EF4-FFF2-40B4-BE49-F238E27FC236}">
-                      <a16:creationId xmlns:a16="http://schemas.microsoft.com/office/drawing/2014/main" id="{0BBA0DFF-2E67-4C96-9F65-BC7A5D0B2C5E}"/>
-                    </a:ext>
-                  </a:extLst>
-                </p:cNvPr>
+                <p:cNvPr id="9" name="文本框 8"/>
                 <p:cNvSpPr txBox="1">
                   <a:spLocks noRot="1" noChangeAspect="1" noMove="1" noResize="1" noEditPoints="1" noAdjustHandles="1" noChangeArrowheads="1" noChangeShapeType="1" noTextEdit="1"/>
                 </p:cNvSpPr>
@@ -9433,11 +8746,8 @@
                 <a:prstGeom prst="rect">
                   <a:avLst/>
                 </a:prstGeom>
-                <a:blipFill>
-                  <a:blip r:embed="rId35"/>
-                  <a:stretch>
-                    <a:fillRect l="-12245" b="-30952"/>
-                  </a:stretch>
+                <a:blipFill rotWithShape="1">
+                  <a:blip r:embed="rId3"/>
                 </a:blipFill>
               </p:spPr>
               <p:txBody>
@@ -9458,13 +8768,7 @@
       </p:grpSp>
       <p:grpSp>
         <p:nvGrpSpPr>
-          <p:cNvPr id="10" name="组合 9">
-            <a:extLst>
-              <a:ext uri="{FF2B5EF4-FFF2-40B4-BE49-F238E27FC236}">
-                <a16:creationId xmlns:a16="http://schemas.microsoft.com/office/drawing/2014/main" id="{2198D79E-F43F-4581-813E-05EBDBCCD914}"/>
-              </a:ext>
-            </a:extLst>
-          </p:cNvPr>
+          <p:cNvPr id="10" name="组合 9"/>
           <p:cNvGrpSpPr/>
           <p:nvPr/>
         </p:nvGrpSpPr>
@@ -9476,143 +8780,62 @@
             <a:chExt cx="3779837" cy="371475"/>
           </a:xfrm>
         </p:grpSpPr>
-        <mc:AlternateContent xmlns:mc="http://schemas.openxmlformats.org/markup-compatibility/2006" xmlns:a14="http://schemas.microsoft.com/office/drawing/2010/main">
-          <mc:Choice Requires="a14">
-            <p:graphicFrame>
-              <p:nvGraphicFramePr>
-                <p:cNvPr id="11" name="对象 10">
-                  <a:extLst>
-                    <a:ext uri="{FF2B5EF4-FFF2-40B4-BE49-F238E27FC236}">
-                      <a16:creationId xmlns:a16="http://schemas.microsoft.com/office/drawing/2014/main" id="{2471456B-1D8D-4B61-A8C3-F6BA4A9B749A}"/>
-                    </a:ext>
-                  </a:extLst>
-                </p:cNvPr>
-                <p:cNvGraphicFramePr>
-                  <a:graphicFrameLocks noChangeAspect="1"/>
-                </p:cNvGraphicFramePr>
-                <p:nvPr>
-                  <p:extLst>
-                    <p:ext uri="{D42A27DB-BD31-4B8C-83A1-F6EECF244321}">
-                      <p14:modId xmlns:p14="http://schemas.microsoft.com/office/powerpoint/2010/main" val="2696915239"/>
-                    </p:ext>
-                  </p:extLst>
-                </p:nvPr>
-              </p:nvGraphicFramePr>
-              <p:xfrm>
-                <a:off x="1420894" y="1868744"/>
-                <a:ext cx="3779837" cy="371475"/>
-              </p:xfrm>
-              <a:graphic>
-                <a:graphicData uri="http://schemas.openxmlformats.org/presentationml/2006/ole">
-                  <mc:AlternateContent>
-                    <mc:Choice xmlns:v="urn:schemas-microsoft-com:vml" Requires="v">
-                      <p:oleObj name="Formula" r:id="rId36" imgW="2106000" imgH="208440" progId="Equation.Ribbit">
-                        <p:embed/>
-                      </p:oleObj>
-                    </mc:Choice>
-                    <mc:Fallback>
-                      <p:oleObj name="Formula" r:id="rId36" imgW="2106000" imgH="208440" progId="Equation.Ribbit">
-                        <p:embed/>
-                        <p:pic>
-                          <p:nvPicPr>
-                            <p:cNvPr id="12" name="对象 11"/>
-                            <p:cNvPicPr/>
-                            <p:nvPr/>
-                          </p:nvPicPr>
-                          <p:blipFill>
-                            <a:blip r:embed="rId37"/>
-                            <a:stretch>
-                              <a:fillRect/>
-                            </a:stretch>
-                          </p:blipFill>
-                          <p:spPr>
-                            <a:xfrm>
-                              <a:off x="1420894" y="1868744"/>
-                              <a:ext cx="3779837" cy="371475"/>
-                            </a:xfrm>
-                            <a:prstGeom prst="rect">
-                              <a:avLst/>
-                            </a:prstGeom>
-                          </p:spPr>
-                        </p:pic>
-                      </p:oleObj>
-                    </mc:Fallback>
-                  </mc:AlternateContent>
-                </a:graphicData>
-              </a:graphic>
-            </p:graphicFrame>
-          </mc:Choice>
-          <mc:Fallback xmlns="">
-            <p:graphicFrame>
-              <p:nvGraphicFramePr>
-                <p:cNvPr id="12" name="对象 11"/>
-                <p:cNvGraphicFramePr>
-                  <a:graphicFrameLocks noChangeAspect="1"/>
-                </p:cNvGraphicFramePr>
-                <p:nvPr>
-                  <p:extLst>
-                    <p:ext uri="{D42A27DB-BD31-4B8C-83A1-F6EECF244321}">
-                      <p14:modId xmlns:p14="http://schemas.microsoft.com/office/powerpoint/2010/main" val="427485303"/>
-                    </p:ext>
-                  </p:extLst>
-                </p:nvPr>
-              </p:nvGraphicFramePr>
-              <p:xfrm>
-                <a:off x="1420894" y="1868744"/>
-                <a:ext cx="3779837" cy="371475"/>
-              </p:xfrm>
-              <a:graphic>
-                <a:graphicData uri="http://schemas.openxmlformats.org/presentationml/2006/ole">
-                  <mc:AlternateContent>
-                    <mc:Choice xmlns:v="urn:schemas-microsoft-com:vml" Requires="v">
-                      <p:oleObj spid="_x0000_s24309" name="Formula" r:id="rId29" imgW="2106000" imgH="208440" progId="Equation.Ribbit">
-                        <p:embed/>
-                      </p:oleObj>
-                    </mc:Choice>
-                    <mc:Fallback>
-                      <p:oleObj name="Formula" r:id="rId29" imgW="2106000" imgH="208440" progId="Equation.Ribbit">
-                        <p:embed/>
-                        <p:pic>
-                          <p:nvPicPr>
-                            <p:cNvPr id="0" name=""/>
-                            <p:cNvPicPr/>
-                            <p:nvPr/>
-                          </p:nvPicPr>
-                          <p:blipFill>
-                            <a:blip r:embed="rId30"/>
-                            <a:stretch>
-                              <a:fillRect/>
-                            </a:stretch>
-                          </p:blipFill>
-                          <p:spPr>
-                            <a:xfrm>
-                              <a:off x="1420894" y="1868744"/>
-                              <a:ext cx="3779837" cy="371475"/>
-                            </a:xfrm>
-                            <a:prstGeom prst="rect">
-                              <a:avLst/>
-                            </a:prstGeom>
-                          </p:spPr>
-                        </p:pic>
-                      </p:oleObj>
-                    </mc:Fallback>
-                  </mc:AlternateContent>
-                </a:graphicData>
-              </a:graphic>
-            </p:graphicFrame>
-          </mc:Fallback>
-        </mc:AlternateContent>
-        <mc:AlternateContent xmlns:mc="http://schemas.openxmlformats.org/markup-compatibility/2006" xmlns:a14="http://schemas.microsoft.com/office/drawing/2010/main">
-          <mc:Choice Requires="a14">
+        <p:graphicFrame>
+          <p:nvGraphicFramePr>
+            <p:cNvPr id="11" name="对象 10"/>
+            <p:cNvGraphicFramePr>
+              <a:graphicFrameLocks noChangeAspect="1"/>
+            </p:cNvGraphicFramePr>
+            <p:nvPr/>
+          </p:nvGraphicFramePr>
+          <p:xfrm>
+            <a:off x="1420894" y="1868744"/>
+            <a:ext cx="3779837" cy="371475"/>
+          </p:xfrm>
+          <a:graphic>
+            <a:graphicData uri="http://schemas.openxmlformats.org/presentationml/2006/ole">
+              <mc:AlternateContent xmlns:mc="http://schemas.openxmlformats.org/markup-compatibility/2006">
+                <mc:Choice xmlns:v="urn:schemas-microsoft-com:vml" Requires="v">
+                  <p:oleObj spid="_x0000_s27941" name="Formula" r:id="rId4" imgW="15792450" imgH="1562100" progId="Equation.Ribbit">
+                    <p:embed/>
+                  </p:oleObj>
+                </mc:Choice>
+                <mc:Fallback>
+                  <p:oleObj name="Formula" r:id="rId4" imgW="15792450" imgH="1562100" progId="Equation.Ribbit">
+                    <p:embed/>
+                    <p:pic>
+                      <p:nvPicPr>
+                        <p:cNvPr id="0" name="对象 11"/>
+                        <p:cNvPicPr/>
+                        <p:nvPr/>
+                      </p:nvPicPr>
+                      <p:blipFill>
+                        <a:blip r:embed="rId5"/>
+                        <a:stretch>
+                          <a:fillRect/>
+                        </a:stretch>
+                      </p:blipFill>
+                      <p:spPr>
+                        <a:xfrm>
+                          <a:off x="1420894" y="1868744"/>
+                          <a:ext cx="3779837" cy="371475"/>
+                        </a:xfrm>
+                        <a:prstGeom prst="rect">
+                          <a:avLst/>
+                        </a:prstGeom>
+                      </p:spPr>
+                    </p:pic>
+                  </p:oleObj>
+                </mc:Fallback>
+              </mc:AlternateContent>
+            </a:graphicData>
+          </a:graphic>
+        </p:graphicFrame>
+        <mc:AlternateContent xmlns:mc="http://schemas.openxmlformats.org/markup-compatibility/2006">
+          <mc:Choice xmlns:a14="http://schemas.microsoft.com/office/drawing/2010/main" Requires="a14">
             <p:sp>
               <p:nvSpPr>
-                <p:cNvPr id="12" name="文本框 11">
-                  <a:extLst>
-                    <a:ext uri="{FF2B5EF4-FFF2-40B4-BE49-F238E27FC236}">
-                      <a16:creationId xmlns:a16="http://schemas.microsoft.com/office/drawing/2014/main" id="{0F7C284A-2ECB-40DC-A16B-1D9FF899DC27}"/>
-                    </a:ext>
-                  </a:extLst>
-                </p:cNvPr>
+                <p:cNvPr id="12" name="文本框 11"/>
                 <p:cNvSpPr txBox="1"/>
                 <p:nvPr/>
               </p:nvSpPr>
@@ -9648,7 +8871,6 @@
                     <a:buSzTx/>
                     <a:buFontTx/>
                     <a:buNone/>
-                    <a:tabLst/>
                     <a:defRPr/>
                   </a:pPr>
                   <a14:m>
@@ -9705,7 +8927,7 @@
                                 <a:uFillTx/>
                                 <a:latin typeface="Cambria Math" panose="02040503050406030204" pitchFamily="18" charset="0"/>
                               </a:rPr>
-                              <m:t>h</m:t>
+                              <m:t>ℎ</m:t>
                             </m:r>
                           </m:sub>
                         </m:sSub>
@@ -9722,23 +8944,17 @@
                     <a:effectLst/>
                     <a:uLnTx/>
                     <a:uFillTx/>
-                    <a:latin typeface="Verdana"/>
-                    <a:ea typeface="幼圆"/>
+                    <a:latin typeface="Verdana" panose="020B0604030504040204"/>
+                    <a:ea typeface="幼圆" panose="02010509060101010101" pitchFamily="49" charset="-122"/>
                   </a:endParaRPr>
                 </a:p>
               </p:txBody>
             </p:sp>
           </mc:Choice>
-          <mc:Fallback xmlns="">
+          <mc:Fallback>
             <p:sp>
               <p:nvSpPr>
-                <p:cNvPr id="13" name="文本框 12">
-                  <a:extLst>
-                    <a:ext uri="{FF2B5EF4-FFF2-40B4-BE49-F238E27FC236}">
-                      <a16:creationId xmlns:a16="http://schemas.microsoft.com/office/drawing/2014/main" id="{1B2896D3-9EB2-4176-84BE-9231717A921C}"/>
-                    </a:ext>
-                  </a:extLst>
-                </p:cNvPr>
+                <p:cNvPr id="12" name="文本框 11"/>
                 <p:cNvSpPr txBox="1">
                   <a:spLocks noRot="1" noChangeAspect="1" noMove="1" noResize="1" noEditPoints="1" noAdjustHandles="1" noChangeArrowheads="1" noChangeShapeType="1" noTextEdit="1"/>
                 </p:cNvSpPr>
@@ -9752,11 +8968,8 @@
                 <a:prstGeom prst="rect">
                   <a:avLst/>
                 </a:prstGeom>
-                <a:blipFill>
-                  <a:blip r:embed="rId31"/>
-                  <a:stretch>
-                    <a:fillRect l="-23913" r="-19565" b="-22000"/>
-                  </a:stretch>
+                <a:blipFill rotWithShape="1">
+                  <a:blip r:embed="rId6"/>
                 </a:blipFill>
               </p:spPr>
               <p:txBody>
@@ -9774,17 +8987,11 @@
             </p:sp>
           </mc:Fallback>
         </mc:AlternateContent>
-        <mc:AlternateContent xmlns:mc="http://schemas.openxmlformats.org/markup-compatibility/2006" xmlns:a14="http://schemas.microsoft.com/office/drawing/2010/main">
-          <mc:Choice Requires="a14">
+        <mc:AlternateContent xmlns:mc="http://schemas.openxmlformats.org/markup-compatibility/2006">
+          <mc:Choice xmlns:a14="http://schemas.microsoft.com/office/drawing/2010/main" Requires="a14">
             <p:sp>
               <p:nvSpPr>
-                <p:cNvPr id="13" name="文本框 12">
-                  <a:extLst>
-                    <a:ext uri="{FF2B5EF4-FFF2-40B4-BE49-F238E27FC236}">
-                      <a16:creationId xmlns:a16="http://schemas.microsoft.com/office/drawing/2014/main" id="{C74FC439-2274-458B-A7B7-E1021A25EFDD}"/>
-                    </a:ext>
-                  </a:extLst>
-                </p:cNvPr>
+                <p:cNvPr id="13" name="文本框 12"/>
                 <p:cNvSpPr txBox="1"/>
                 <p:nvPr/>
               </p:nvSpPr>
@@ -9820,7 +9027,6 @@
                     <a:buSzTx/>
                     <a:buFontTx/>
                     <a:buNone/>
-                    <a:tabLst/>
                     <a:defRPr/>
                   </a:pPr>
                   <a14:m>
@@ -9877,7 +9083,7 @@
                                 <a:uFillTx/>
                                 <a:latin typeface="Cambria Math" panose="02040503050406030204" pitchFamily="18" charset="0"/>
                               </a:rPr>
-                              <m:t>h</m:t>
+                              <m:t>ℎ</m:t>
                             </m:r>
                           </m:sub>
                         </m:sSub>
@@ -9894,23 +9100,17 @@
                     <a:effectLst/>
                     <a:uLnTx/>
                     <a:uFillTx/>
-                    <a:latin typeface="Verdana"/>
-                    <a:ea typeface="幼圆"/>
+                    <a:latin typeface="Verdana" panose="020B0604030504040204"/>
+                    <a:ea typeface="幼圆" panose="02010509060101010101" pitchFamily="49" charset="-122"/>
                   </a:endParaRPr>
                 </a:p>
               </p:txBody>
             </p:sp>
           </mc:Choice>
-          <mc:Fallback xmlns="">
+          <mc:Fallback>
             <p:sp>
               <p:nvSpPr>
-                <p:cNvPr id="14" name="文本框 13">
-                  <a:extLst>
-                    <a:ext uri="{FF2B5EF4-FFF2-40B4-BE49-F238E27FC236}">
-                      <a16:creationId xmlns:a16="http://schemas.microsoft.com/office/drawing/2014/main" id="{D1E556CC-9A5A-4C51-BED0-EE9144F0D6A0}"/>
-                    </a:ext>
-                  </a:extLst>
-                </p:cNvPr>
+                <p:cNvPr id="13" name="文本框 12"/>
                 <p:cNvSpPr txBox="1">
                   <a:spLocks noRot="1" noChangeAspect="1" noMove="1" noResize="1" noEditPoints="1" noAdjustHandles="1" noChangeArrowheads="1" noChangeShapeType="1" noTextEdit="1"/>
                 </p:cNvSpPr>
@@ -9924,11 +9124,8 @@
                 <a:prstGeom prst="rect">
                   <a:avLst/>
                 </a:prstGeom>
-                <a:blipFill>
-                  <a:blip r:embed="rId32"/>
-                  <a:stretch>
-                    <a:fillRect l="-21277" r="-17021" b="-22000"/>
-                  </a:stretch>
+                <a:blipFill rotWithShape="1">
+                  <a:blip r:embed="rId6"/>
                 </a:blipFill>
               </p:spPr>
               <p:txBody>
@@ -9949,20 +9146,14 @@
       </p:grpSp>
       <p:pic>
         <p:nvPicPr>
-          <p:cNvPr id="14" name="图片 13">
-            <a:extLst>
-              <a:ext uri="{FF2B5EF4-FFF2-40B4-BE49-F238E27FC236}">
-                <a16:creationId xmlns:a16="http://schemas.microsoft.com/office/drawing/2014/main" id="{E7C9C964-180F-4881-A9AA-2A3435CC2C04}"/>
-              </a:ext>
-            </a:extLst>
-          </p:cNvPr>
+          <p:cNvPr id="14" name="图片 13"/>
           <p:cNvPicPr>
             <a:picLocks noChangeAspect="1"/>
           </p:cNvPicPr>
           <p:nvPr/>
         </p:nvPicPr>
         <p:blipFill>
-          <a:blip r:embed="rId38"/>
+          <a:blip r:embed="rId7"/>
           <a:stretch>
             <a:fillRect/>
           </a:stretch>
@@ -9979,13 +9170,7 @@
       </p:pic>
       <p:sp>
         <p:nvSpPr>
-          <p:cNvPr id="16" name="文本框 15">
-            <a:extLst>
-              <a:ext uri="{FF2B5EF4-FFF2-40B4-BE49-F238E27FC236}">
-                <a16:creationId xmlns:a16="http://schemas.microsoft.com/office/drawing/2014/main" id="{24A66FBA-D0CB-4D11-8822-14B52854CF8C}"/>
-              </a:ext>
-            </a:extLst>
-          </p:cNvPr>
+          <p:cNvPr id="16" name="文本框 15"/>
           <p:cNvSpPr txBox="1"/>
           <p:nvPr/>
         </p:nvSpPr>
@@ -10039,28 +9224,20 @@
               </a:rPr>
               <a:t> 		</a:t>
             </a:r>
+            <a:endParaRPr lang="en-US" altLang="zh-CN" sz="1800" b="1" dirty="0">
+              <a:latin typeface="黑体" panose="02010609060101010101" pitchFamily="49" charset="-122"/>
+              <a:ea typeface="黑体" panose="02010609060101010101" pitchFamily="49" charset="-122"/>
+            </a:endParaRPr>
           </a:p>
         </p:txBody>
       </p:sp>
       <p:graphicFrame>
         <p:nvGraphicFramePr>
-          <p:cNvPr id="17" name="对象 16">
-            <a:extLst>
-              <a:ext uri="{FF2B5EF4-FFF2-40B4-BE49-F238E27FC236}">
-                <a16:creationId xmlns:a16="http://schemas.microsoft.com/office/drawing/2014/main" id="{EF4DBBB7-3120-477F-A000-3A32FC06EF1B}"/>
-              </a:ext>
-            </a:extLst>
-          </p:cNvPr>
+          <p:cNvPr id="17" name="对象 16"/>
           <p:cNvGraphicFramePr>
             <a:graphicFrameLocks noChangeAspect="1"/>
           </p:cNvGraphicFramePr>
-          <p:nvPr>
-            <p:extLst>
-              <p:ext uri="{D42A27DB-BD31-4B8C-83A1-F6EECF244321}">
-                <p14:modId xmlns:p14="http://schemas.microsoft.com/office/powerpoint/2010/main" val="2443801431"/>
-              </p:ext>
-            </p:extLst>
-          </p:nvPr>
+          <p:nvPr/>
         </p:nvGraphicFramePr>
         <p:xfrm>
           <a:off x="1403648" y="614068"/>
@@ -10070,21 +9247,21 @@
           <a:graphicData uri="http://schemas.openxmlformats.org/presentationml/2006/ole">
             <mc:AlternateContent xmlns:mc="http://schemas.openxmlformats.org/markup-compatibility/2006">
               <mc:Choice xmlns:v="urn:schemas-microsoft-com:vml" Requires="v">
-                <p:oleObj name="Formula" r:id="rId39" imgW="177840" imgH="119520" progId="Equation.Ribbit">
+                <p:oleObj spid="_x0000_s2" name="Formula" r:id="rId8" imgW="1333500" imgH="895350" progId="Equation.Ribbit">
                   <p:embed/>
                 </p:oleObj>
               </mc:Choice>
               <mc:Fallback>
-                <p:oleObj name="Formula" r:id="rId39" imgW="177840" imgH="119520" progId="Equation.Ribbit">
+                <p:oleObj name="Formula" r:id="rId8" imgW="1333500" imgH="895350" progId="Equation.Ribbit">
                   <p:embed/>
                   <p:pic>
                     <p:nvPicPr>
-                      <p:cNvPr id="17" name="对象 16"/>
+                      <p:cNvPr id="0" name="对象 16"/>
                       <p:cNvPicPr/>
                       <p:nvPr/>
                     </p:nvPicPr>
                     <p:blipFill>
-                      <a:blip r:embed="rId40"/>
+                      <a:blip r:embed="rId9"/>
                       <a:stretch>
                         <a:fillRect/>
                       </a:stretch>
@@ -10107,23 +9284,11 @@
       </p:graphicFrame>
       <p:graphicFrame>
         <p:nvGraphicFramePr>
-          <p:cNvPr id="18" name="对象 17">
-            <a:extLst>
-              <a:ext uri="{FF2B5EF4-FFF2-40B4-BE49-F238E27FC236}">
-                <a16:creationId xmlns:a16="http://schemas.microsoft.com/office/drawing/2014/main" id="{7780210C-26E5-4151-BCEF-5626D358747D}"/>
-              </a:ext>
-            </a:extLst>
-          </p:cNvPr>
+          <p:cNvPr id="18" name="对象 17"/>
           <p:cNvGraphicFramePr>
             <a:graphicFrameLocks noChangeAspect="1"/>
           </p:cNvGraphicFramePr>
-          <p:nvPr>
-            <p:extLst>
-              <p:ext uri="{D42A27DB-BD31-4B8C-83A1-F6EECF244321}">
-                <p14:modId xmlns:p14="http://schemas.microsoft.com/office/powerpoint/2010/main" val="2189219821"/>
-              </p:ext>
-            </p:extLst>
-          </p:nvPr>
+          <p:nvPr/>
         </p:nvGraphicFramePr>
         <p:xfrm>
           <a:off x="1954633" y="598403"/>
@@ -10133,21 +9298,21 @@
           <a:graphicData uri="http://schemas.openxmlformats.org/presentationml/2006/ole">
             <mc:AlternateContent xmlns:mc="http://schemas.openxmlformats.org/markup-compatibility/2006">
               <mc:Choice xmlns:v="urn:schemas-microsoft-com:vml" Requires="v">
-                <p:oleObj name="Formula" r:id="rId41" imgW="219960" imgH="133560" progId="Equation.Ribbit">
+                <p:oleObj spid="_x0000_s3" name="Formula" r:id="rId10" imgW="1647825" imgH="1000125" progId="Equation.Ribbit">
                   <p:embed/>
                 </p:oleObj>
               </mc:Choice>
               <mc:Fallback>
-                <p:oleObj name="Formula" r:id="rId41" imgW="219960" imgH="133560" progId="Equation.Ribbit">
+                <p:oleObj name="Formula" r:id="rId10" imgW="1647825" imgH="1000125" progId="Equation.Ribbit">
                   <p:embed/>
                   <p:pic>
                     <p:nvPicPr>
-                      <p:cNvPr id="20" name="对象 19"/>
+                      <p:cNvPr id="0" name="对象 19"/>
                       <p:cNvPicPr/>
                       <p:nvPr/>
                     </p:nvPicPr>
                     <p:blipFill>
-                      <a:blip r:embed="rId42"/>
+                      <a:blip r:embed="rId11"/>
                       <a:stretch>
                         <a:fillRect/>
                       </a:stretch>
@@ -10170,23 +9335,11 @@
       </p:graphicFrame>
       <p:graphicFrame>
         <p:nvGraphicFramePr>
-          <p:cNvPr id="19" name="对象 18">
-            <a:extLst>
-              <a:ext uri="{FF2B5EF4-FFF2-40B4-BE49-F238E27FC236}">
-                <a16:creationId xmlns:a16="http://schemas.microsoft.com/office/drawing/2014/main" id="{E9635BD2-BEA3-44EB-A7BE-532C3AD84412}"/>
-              </a:ext>
-            </a:extLst>
-          </p:cNvPr>
+          <p:cNvPr id="19" name="对象 18"/>
           <p:cNvGraphicFramePr>
             <a:graphicFrameLocks noChangeAspect="1"/>
           </p:cNvGraphicFramePr>
-          <p:nvPr>
-            <p:extLst>
-              <p:ext uri="{D42A27DB-BD31-4B8C-83A1-F6EECF244321}">
-                <p14:modId xmlns:p14="http://schemas.microsoft.com/office/powerpoint/2010/main" val="3765758827"/>
-              </p:ext>
-            </p:extLst>
-          </p:nvPr>
+          <p:nvPr/>
         </p:nvGraphicFramePr>
         <p:xfrm>
           <a:off x="3315570" y="585670"/>
@@ -10196,21 +9349,21 @@
           <a:graphicData uri="http://schemas.openxmlformats.org/presentationml/2006/ole">
             <mc:AlternateContent xmlns:mc="http://schemas.openxmlformats.org/markup-compatibility/2006">
               <mc:Choice xmlns:v="urn:schemas-microsoft-com:vml" Requires="v">
-                <p:oleObj name="Formula" r:id="rId43" imgW="119520" imgH="174240" progId="Equation.Ribbit">
+                <p:oleObj spid="_x0000_s4" name="Formula" r:id="rId12" imgW="895350" imgH="1304925" progId="Equation.Ribbit">
                   <p:embed/>
                 </p:oleObj>
               </mc:Choice>
               <mc:Fallback>
-                <p:oleObj name="Formula" r:id="rId43" imgW="119520" imgH="174240" progId="Equation.Ribbit">
+                <p:oleObj name="Formula" r:id="rId12" imgW="895350" imgH="1304925" progId="Equation.Ribbit">
                   <p:embed/>
                   <p:pic>
                     <p:nvPicPr>
-                      <p:cNvPr id="11" name="对象 10"/>
+                      <p:cNvPr id="0" name="对象 10"/>
                       <p:cNvPicPr/>
                       <p:nvPr/>
                     </p:nvPicPr>
                     <p:blipFill>
-                      <a:blip r:embed="rId44"/>
+                      <a:blip r:embed="rId13"/>
                       <a:stretch>
                         <a:fillRect/>
                       </a:stretch>
@@ -10233,23 +9386,11 @@
       </p:graphicFrame>
       <p:graphicFrame>
         <p:nvGraphicFramePr>
-          <p:cNvPr id="20" name="对象 19">
-            <a:extLst>
-              <a:ext uri="{FF2B5EF4-FFF2-40B4-BE49-F238E27FC236}">
-                <a16:creationId xmlns:a16="http://schemas.microsoft.com/office/drawing/2014/main" id="{D1F58B69-33ED-4EED-BADC-5D7A15F15066}"/>
-              </a:ext>
-            </a:extLst>
-          </p:cNvPr>
+          <p:cNvPr id="20" name="对象 19"/>
           <p:cNvGraphicFramePr>
             <a:graphicFrameLocks noChangeAspect="1"/>
           </p:cNvGraphicFramePr>
-          <p:nvPr>
-            <p:extLst>
-              <p:ext uri="{D42A27DB-BD31-4B8C-83A1-F6EECF244321}">
-                <p14:modId xmlns:p14="http://schemas.microsoft.com/office/powerpoint/2010/main" val="10631158"/>
-              </p:ext>
-            </p:extLst>
-          </p:nvPr>
+          <p:nvPr/>
         </p:nvGraphicFramePr>
         <p:xfrm>
           <a:off x="3740121" y="585670"/>
@@ -10259,21 +9400,21 @@
           <a:graphicData uri="http://schemas.openxmlformats.org/presentationml/2006/ole">
             <mc:AlternateContent xmlns:mc="http://schemas.openxmlformats.org/markup-compatibility/2006">
               <mc:Choice xmlns:v="urn:schemas-microsoft-com:vml" Requires="v">
-                <p:oleObj name="Formula" r:id="rId45" imgW="147600" imgH="122040" progId="Equation.Ribbit">
+                <p:oleObj spid="_x0000_s15" name="Formula" r:id="rId14" imgW="1104900" imgH="914400" progId="Equation.Ribbit">
                   <p:embed/>
                 </p:oleObj>
               </mc:Choice>
               <mc:Fallback>
-                <p:oleObj name="Formula" r:id="rId45" imgW="147600" imgH="122040" progId="Equation.Ribbit">
+                <p:oleObj name="Formula" r:id="rId14" imgW="1104900" imgH="914400" progId="Equation.Ribbit">
                   <p:embed/>
                   <p:pic>
                     <p:nvPicPr>
-                      <p:cNvPr id="15" name="对象 14"/>
+                      <p:cNvPr id="0" name="对象 14"/>
                       <p:cNvPicPr/>
                       <p:nvPr/>
                     </p:nvPicPr>
                     <p:blipFill>
-                      <a:blip r:embed="rId46"/>
+                      <a:blip r:embed="rId15"/>
                       <a:stretch>
                         <a:fillRect/>
                       </a:stretch>
@@ -10296,23 +9437,11 @@
       </p:graphicFrame>
       <p:graphicFrame>
         <p:nvGraphicFramePr>
-          <p:cNvPr id="21" name="对象 20">
-            <a:extLst>
-              <a:ext uri="{FF2B5EF4-FFF2-40B4-BE49-F238E27FC236}">
-                <a16:creationId xmlns:a16="http://schemas.microsoft.com/office/drawing/2014/main" id="{E2B7F0EE-6FDC-4062-B6C1-25F1FAF7B495}"/>
-              </a:ext>
-            </a:extLst>
-          </p:cNvPr>
+          <p:cNvPr id="21" name="对象 20"/>
           <p:cNvGraphicFramePr>
             <a:graphicFrameLocks noChangeAspect="1"/>
           </p:cNvGraphicFramePr>
-          <p:nvPr>
-            <p:extLst>
-              <p:ext uri="{D42A27DB-BD31-4B8C-83A1-F6EECF244321}">
-                <p14:modId xmlns:p14="http://schemas.microsoft.com/office/powerpoint/2010/main" val="2961829140"/>
-              </p:ext>
-            </p:extLst>
-          </p:nvPr>
+          <p:nvPr/>
         </p:nvGraphicFramePr>
         <p:xfrm>
           <a:off x="4247864" y="614068"/>
@@ -10322,21 +9451,21 @@
           <a:graphicData uri="http://schemas.openxmlformats.org/presentationml/2006/ole">
             <mc:AlternateContent xmlns:mc="http://schemas.openxmlformats.org/markup-compatibility/2006">
               <mc:Choice xmlns:v="urn:schemas-microsoft-com:vml" Requires="v">
-                <p:oleObj name="Formula" r:id="rId47" imgW="2608920" imgH="176760" progId="Equation.Ribbit">
+                <p:oleObj spid="_x0000_s22" name="Formula" r:id="rId16" imgW="19564350" imgH="1323975" progId="Equation.Ribbit">
                   <p:embed/>
                 </p:oleObj>
               </mc:Choice>
               <mc:Fallback>
-                <p:oleObj name="Formula" r:id="rId47" imgW="2608920" imgH="176760" progId="Equation.Ribbit">
+                <p:oleObj name="Formula" r:id="rId16" imgW="19564350" imgH="1323975" progId="Equation.Ribbit">
                   <p:embed/>
                   <p:pic>
                     <p:nvPicPr>
-                      <p:cNvPr id="22" name="对象 21"/>
+                      <p:cNvPr id="0" name="对象 21"/>
                       <p:cNvPicPr/>
                       <p:nvPr/>
                     </p:nvPicPr>
                     <p:blipFill>
-                      <a:blip r:embed="rId48"/>
+                      <a:blip r:embed="rId17"/>
                       <a:stretch>
                         <a:fillRect/>
                       </a:stretch>
@@ -10359,13 +9488,7 @@
       </p:graphicFrame>
       <p:sp>
         <p:nvSpPr>
-          <p:cNvPr id="23" name="文本框 22">
-            <a:extLst>
-              <a:ext uri="{FF2B5EF4-FFF2-40B4-BE49-F238E27FC236}">
-                <a16:creationId xmlns:a16="http://schemas.microsoft.com/office/drawing/2014/main" id="{3FFBB9B9-7717-43B1-B55F-21DCD3A14C71}"/>
-              </a:ext>
-            </a:extLst>
-          </p:cNvPr>
+          <p:cNvPr id="23" name="文本框 22"/>
           <p:cNvSpPr txBox="1"/>
           <p:nvPr/>
         </p:nvSpPr>
@@ -10398,23 +9521,11 @@
       </p:sp>
       <p:graphicFrame>
         <p:nvGraphicFramePr>
-          <p:cNvPr id="24" name="对象 23">
-            <a:extLst>
-              <a:ext uri="{FF2B5EF4-FFF2-40B4-BE49-F238E27FC236}">
-                <a16:creationId xmlns:a16="http://schemas.microsoft.com/office/drawing/2014/main" id="{AFB753A7-6141-4428-BF0B-6B4581F92F2D}"/>
-              </a:ext>
-            </a:extLst>
-          </p:cNvPr>
+          <p:cNvPr id="24" name="对象 23"/>
           <p:cNvGraphicFramePr>
             <a:graphicFrameLocks noChangeAspect="1"/>
           </p:cNvGraphicFramePr>
-          <p:nvPr>
-            <p:extLst>
-              <p:ext uri="{D42A27DB-BD31-4B8C-83A1-F6EECF244321}">
-                <p14:modId xmlns:p14="http://schemas.microsoft.com/office/powerpoint/2010/main" val="1923342896"/>
-              </p:ext>
-            </p:extLst>
-          </p:nvPr>
+          <p:nvPr/>
         </p:nvGraphicFramePr>
         <p:xfrm>
           <a:off x="2409002" y="5413889"/>
@@ -10424,21 +9535,21 @@
           <a:graphicData uri="http://schemas.openxmlformats.org/presentationml/2006/ole">
             <mc:AlternateContent xmlns:mc="http://schemas.openxmlformats.org/markup-compatibility/2006">
               <mc:Choice xmlns:v="urn:schemas-microsoft-com:vml" Requires="v">
-                <p:oleObj name="Formula" r:id="rId49" imgW="1482120" imgH="235080" progId="Equation.Ribbit">
+                <p:oleObj spid="_x0000_s25" name="Formula" r:id="rId18" imgW="11115675" imgH="1762125" progId="Equation.Ribbit">
                   <p:embed/>
                 </p:oleObj>
               </mc:Choice>
               <mc:Fallback>
-                <p:oleObj name="Formula" r:id="rId49" imgW="1482120" imgH="235080" progId="Equation.Ribbit">
+                <p:oleObj name="Formula" r:id="rId18" imgW="11115675" imgH="1762125" progId="Equation.Ribbit">
                   <p:embed/>
                   <p:pic>
                     <p:nvPicPr>
-                      <p:cNvPr id="21" name="对象 20"/>
+                      <p:cNvPr id="0" name="对象 20"/>
                       <p:cNvPicPr/>
                       <p:nvPr/>
                     </p:nvPicPr>
                     <p:blipFill>
-                      <a:blip r:embed="rId50"/>
+                      <a:blip r:embed="rId19"/>
                       <a:stretch>
                         <a:fillRect/>
                       </a:stretch>
@@ -10461,13 +9572,7 @@
       </p:graphicFrame>
       <p:grpSp>
         <p:nvGrpSpPr>
-          <p:cNvPr id="27" name="组合 26">
-            <a:extLst>
-              <a:ext uri="{FF2B5EF4-FFF2-40B4-BE49-F238E27FC236}">
-                <a16:creationId xmlns:a16="http://schemas.microsoft.com/office/drawing/2014/main" id="{F50344AC-4D6B-45A0-82E9-9D3B9B5B8BE5}"/>
-              </a:ext>
-            </a:extLst>
-          </p:cNvPr>
+          <p:cNvPr id="27" name="组合 26"/>
           <p:cNvGrpSpPr/>
           <p:nvPr/>
         </p:nvGrpSpPr>
@@ -10481,20 +9586,14 @@
         </p:grpSpPr>
         <p:pic>
           <p:nvPicPr>
-            <p:cNvPr id="25" name="图片 24">
-              <a:extLst>
-                <a:ext uri="{FF2B5EF4-FFF2-40B4-BE49-F238E27FC236}">
-                  <a16:creationId xmlns:a16="http://schemas.microsoft.com/office/drawing/2014/main" id="{E956A502-76B5-4234-AFE7-E569806D853A}"/>
-                </a:ext>
-              </a:extLst>
-            </p:cNvPr>
+            <p:cNvPr id="26" name="图片 25"/>
             <p:cNvPicPr>
               <a:picLocks noChangeAspect="1"/>
             </p:cNvPicPr>
             <p:nvPr/>
           </p:nvPicPr>
           <p:blipFill>
-            <a:blip r:embed="rId51"/>
+            <a:blip r:embed="rId20"/>
             <a:stretch>
               <a:fillRect/>
             </a:stretch>
@@ -10511,13 +9610,7 @@
         </p:pic>
         <p:sp>
           <p:nvSpPr>
-            <p:cNvPr id="26" name="文本框 25">
-              <a:extLst>
-                <a:ext uri="{FF2B5EF4-FFF2-40B4-BE49-F238E27FC236}">
-                  <a16:creationId xmlns:a16="http://schemas.microsoft.com/office/drawing/2014/main" id="{3897B4E1-1ED7-43D4-9DD6-F700F7CE6AE1}"/>
-                </a:ext>
-              </a:extLst>
-            </p:cNvPr>
+            <p:cNvPr id="28" name="文本框 27"/>
             <p:cNvSpPr txBox="1"/>
             <p:nvPr/>
           </p:nvSpPr>
@@ -10560,11 +9653,6 @@
         </p:sp>
       </p:grpSp>
     </p:spTree>
-    <p:extLst>
-      <p:ext uri="{BB962C8B-B14F-4D97-AF65-F5344CB8AC3E}">
-        <p14:creationId xmlns:p14="http://schemas.microsoft.com/office/powerpoint/2010/main" val="4218266056"/>
-      </p:ext>
-    </p:extLst>
   </p:cSld>
   <p:clrMapOvr>
     <a:masterClrMapping/>
@@ -10591,13 +9679,7 @@
       </p:grpSpPr>
       <p:sp>
         <p:nvSpPr>
-          <p:cNvPr id="18434" name="灯片编号占位符 5">
-            <a:extLst>
-              <a:ext uri="{FF2B5EF4-FFF2-40B4-BE49-F238E27FC236}">
-                <a16:creationId xmlns:a16="http://schemas.microsoft.com/office/drawing/2014/main" id="{CBBD9809-2CC4-42C3-B564-FAC6896E7580}"/>
-              </a:ext>
-            </a:extLst>
-          </p:cNvPr>
+          <p:cNvPr id="18434" name="灯片编号占位符 5"/>
           <p:cNvSpPr>
             <a:spLocks noGrp="1"/>
           </p:cNvSpPr>
@@ -10784,7 +9866,6 @@
               <a:buSzTx/>
               <a:buFontTx/>
               <a:buNone/>
-              <a:tabLst/>
               <a:defRPr/>
             </a:pPr>
             <a:fld id="{F12A9DEA-C3F6-4401-A5BF-3745117890AB}" type="slidenum">
@@ -10802,24 +9883,6 @@
                 <a:ea typeface="宋体" panose="02010600030101010101" pitchFamily="2" charset="-122"/>
                 <a:cs typeface="+mn-cs"/>
               </a:rPr>
-              <a:pPr marL="0" marR="0" lvl="0" indent="0" algn="r" defTabSz="914400" rtl="0" eaLnBrk="1" fontAlgn="base" latinLnBrk="0" hangingPunct="1">
-                <a:lnSpc>
-                  <a:spcPct val="100000"/>
-                </a:lnSpc>
-                <a:spcBef>
-                  <a:spcPct val="0"/>
-                </a:spcBef>
-                <a:spcAft>
-                  <a:spcPct val="0"/>
-                </a:spcAft>
-                <a:buClrTx/>
-                <a:buSzTx/>
-                <a:buFontTx/>
-                <a:buNone/>
-                <a:tabLst/>
-                <a:defRPr/>
-              </a:pPr>
-              <a:t>12</a:t>
             </a:fld>
             <a:endParaRPr kumimoji="1" lang="en-US" altLang="zh-CN" sz="1400" b="0" i="0" u="none" strike="noStrike" kern="1200" cap="none" spc="0" normalizeH="0" baseline="0" noProof="0">
               <a:ln>
@@ -10840,13 +9903,7 @@
       </p:sp>
       <p:sp>
         <p:nvSpPr>
-          <p:cNvPr id="887811" name="Rectangle 3">
-            <a:extLst>
-              <a:ext uri="{FF2B5EF4-FFF2-40B4-BE49-F238E27FC236}">
-                <a16:creationId xmlns:a16="http://schemas.microsoft.com/office/drawing/2014/main" id="{E67925BF-BD9D-4849-975B-B00461AA9122}"/>
-              </a:ext>
-            </a:extLst>
-          </p:cNvPr>
+          <p:cNvPr id="887811" name="Rectangle 3"/>
           <p:cNvSpPr>
             <a:spLocks noGrp="1"/>
           </p:cNvSpPr>
@@ -11240,13 +10297,7 @@
       </p:sp>
       <p:sp>
         <p:nvSpPr>
-          <p:cNvPr id="18436" name="Text Box 4">
-            <a:extLst>
-              <a:ext uri="{FF2B5EF4-FFF2-40B4-BE49-F238E27FC236}">
-                <a16:creationId xmlns:a16="http://schemas.microsoft.com/office/drawing/2014/main" id="{EB81EA09-BA58-4C02-A7E1-E64004DF3351}"/>
-              </a:ext>
-            </a:extLst>
-          </p:cNvPr>
+          <p:cNvPr id="18436" name="Text Box 4"/>
           <p:cNvSpPr txBox="1">
             <a:spLocks noChangeArrowheads="1"/>
           </p:cNvSpPr>
@@ -11453,7 +10504,6 @@
               <a:buSzTx/>
               <a:buFontTx/>
               <a:buNone/>
-              <a:tabLst/>
               <a:defRPr/>
             </a:pPr>
             <a:r>
@@ -11507,6 +10557,20 @@
               </a:rPr>
               <a:t>章：支持向量机</a:t>
             </a:r>
+            <a:endParaRPr kumimoji="1" lang="zh-CN" altLang="en-US" sz="3200" b="1" i="0" u="none" strike="noStrike" kern="1200" cap="none" spc="0" normalizeH="0" baseline="0" noProof="0" dirty="0">
+              <a:ln>
+                <a:noFill/>
+              </a:ln>
+              <a:solidFill>
+                <a:prstClr val="black"/>
+              </a:solidFill>
+              <a:effectLst/>
+              <a:uLnTx/>
+              <a:uFillTx/>
+              <a:latin typeface="黑体" panose="02010609060101010101" pitchFamily="49" charset="-122"/>
+              <a:ea typeface="黑体" panose="02010609060101010101" pitchFamily="49" charset="-122"/>
+              <a:cs typeface="楷体_GB2312"/>
+            </a:endParaRPr>
           </a:p>
         </p:txBody>
       </p:sp>
@@ -11519,7 +10583,7 @@
           <p:nvPr/>
         </p:nvPicPr>
         <p:blipFill>
-          <a:blip r:embed="rId2"/>
+          <a:blip r:embed="rId1"/>
           <a:stretch>
             <a:fillRect/>
           </a:stretch>
@@ -11543,7 +10607,7 @@
           <p:nvPr/>
         </p:nvPicPr>
         <p:blipFill>
-          <a:blip r:embed="rId3">
+          <a:blip r:embed="rId2">
             <a:extLst>
               <a:ext uri="{28A0092B-C50C-407E-A947-70E740481C1C}">
                 <a14:useLocalDpi xmlns:a14="http://schemas.microsoft.com/office/drawing/2010/main" val="0"/>
@@ -11565,11 +10629,6 @@
         </p:spPr>
       </p:pic>
     </p:spTree>
-    <p:extLst>
-      <p:ext uri="{BB962C8B-B14F-4D97-AF65-F5344CB8AC3E}">
-        <p14:creationId xmlns:p14="http://schemas.microsoft.com/office/powerpoint/2010/main" val="371217219"/>
-      </p:ext>
-    </p:extLst>
   </p:cSld>
   <p:clrMapOvr>
     <a:masterClrMapping/>
@@ -11584,13 +10643,13 @@
               <p:cTn id="2" dur="indefinite" nodeType="mainSeq">
                 <p:childTnLst>
                   <p:par>
-                    <p:cTn id="3" fill="hold" nodeType="clickPar">
+                    <p:cTn id="3" fill="hold">
                       <p:stCondLst>
                         <p:cond delay="indefinite"/>
                       </p:stCondLst>
                       <p:childTnLst>
                         <p:par>
-                          <p:cTn id="4" fill="hold" nodeType="withGroup">
+                          <p:cTn id="4" fill="hold">
                             <p:stCondLst>
                               <p:cond delay="0"/>
                             </p:stCondLst>
@@ -11691,13 +10750,7 @@
       </p:grpSpPr>
       <p:sp>
         <p:nvSpPr>
-          <p:cNvPr id="18434" name="灯片编号占位符 5">
-            <a:extLst>
-              <a:ext uri="{FF2B5EF4-FFF2-40B4-BE49-F238E27FC236}">
-                <a16:creationId xmlns:a16="http://schemas.microsoft.com/office/drawing/2014/main" id="{CBBD9809-2CC4-42C3-B564-FAC6896E7580}"/>
-              </a:ext>
-            </a:extLst>
-          </p:cNvPr>
+          <p:cNvPr id="18434" name="灯片编号占位符 5"/>
           <p:cNvSpPr>
             <a:spLocks noGrp="1"/>
           </p:cNvSpPr>
@@ -11884,7 +10937,6 @@
               <a:buSzTx/>
               <a:buFontTx/>
               <a:buNone/>
-              <a:tabLst/>
               <a:defRPr/>
             </a:pPr>
             <a:fld id="{F12A9DEA-C3F6-4401-A5BF-3745117890AB}" type="slidenum">
@@ -11902,24 +10954,6 @@
                 <a:ea typeface="宋体" panose="02010600030101010101" pitchFamily="2" charset="-122"/>
                 <a:cs typeface="+mn-cs"/>
               </a:rPr>
-              <a:pPr marL="0" marR="0" lvl="0" indent="0" algn="r" defTabSz="914400" rtl="0" eaLnBrk="1" fontAlgn="base" latinLnBrk="0" hangingPunct="1">
-                <a:lnSpc>
-                  <a:spcPct val="100000"/>
-                </a:lnSpc>
-                <a:spcBef>
-                  <a:spcPct val="0"/>
-                </a:spcBef>
-                <a:spcAft>
-                  <a:spcPct val="0"/>
-                </a:spcAft>
-                <a:buClrTx/>
-                <a:buSzTx/>
-                <a:buFontTx/>
-                <a:buNone/>
-                <a:tabLst/>
-                <a:defRPr/>
-              </a:pPr>
-              <a:t>13</a:t>
             </a:fld>
             <a:endParaRPr kumimoji="1" lang="en-US" altLang="zh-CN" sz="1400" b="0" i="0" u="none" strike="noStrike" kern="1200" cap="none" spc="0" normalizeH="0" baseline="0" noProof="0">
               <a:ln>
@@ -11940,13 +10974,7 @@
       </p:sp>
       <p:sp>
         <p:nvSpPr>
-          <p:cNvPr id="887811" name="Rectangle 3">
-            <a:extLst>
-              <a:ext uri="{FF2B5EF4-FFF2-40B4-BE49-F238E27FC236}">
-                <a16:creationId xmlns:a16="http://schemas.microsoft.com/office/drawing/2014/main" id="{E67925BF-BD9D-4849-975B-B00461AA9122}"/>
-              </a:ext>
-            </a:extLst>
-          </p:cNvPr>
+          <p:cNvPr id="887811" name="Rectangle 3"/>
           <p:cNvSpPr>
             <a:spLocks noGrp="1"/>
           </p:cNvSpPr>
@@ -12101,6 +11129,11 @@
               </a:rPr>
               <a:t>来预测</a:t>
             </a:r>
+            <a:endParaRPr lang="zh-CN" altLang="en-US" sz="2400" dirty="0">
+              <a:latin typeface="Times New Roman" panose="02020603050405020304" pitchFamily="18" charset="0"/>
+              <a:ea typeface="楷体" panose="02010609060101010101" pitchFamily="49" charset="-122"/>
+              <a:cs typeface="Times New Roman" panose="02020603050405020304" pitchFamily="18" charset="0"/>
+            </a:endParaRPr>
           </a:p>
           <a:p>
             <a:pPr eaLnBrk="1" hangingPunct="1">
@@ -12156,6 +11189,11 @@
               </a:rPr>
               <a:t>先对联合概率分布          建模，再由此获得</a:t>
             </a:r>
+            <a:endParaRPr lang="zh-CN" altLang="en-US" sz="2400" dirty="0">
+              <a:latin typeface="Times New Roman" panose="02020603050405020304" pitchFamily="18" charset="0"/>
+              <a:ea typeface="楷体" panose="02010609060101010101" pitchFamily="49" charset="-122"/>
+              <a:cs typeface="Times New Roman" panose="02020603050405020304" pitchFamily="18" charset="0"/>
+            </a:endParaRPr>
           </a:p>
           <a:p>
             <a:pPr eaLnBrk="1" hangingPunct="1">
@@ -12177,6 +11215,11 @@
               </a:rPr>
               <a:t>贝叶斯定理：</a:t>
             </a:r>
+            <a:endParaRPr lang="zh-CN" altLang="en-US" sz="2600" b="1" dirty="0">
+              <a:latin typeface="Times New Roman" panose="02020603050405020304" pitchFamily="18" charset="0"/>
+              <a:ea typeface="楷体" panose="02010609060101010101" pitchFamily="49" charset="-122"/>
+              <a:cs typeface="Times New Roman" panose="02020603050405020304" pitchFamily="18" charset="0"/>
+            </a:endParaRPr>
           </a:p>
           <a:p>
             <a:pPr eaLnBrk="1" hangingPunct="1">
@@ -12379,13 +11422,7 @@
       </p:sp>
       <p:sp>
         <p:nvSpPr>
-          <p:cNvPr id="18436" name="Text Box 4">
-            <a:extLst>
-              <a:ext uri="{FF2B5EF4-FFF2-40B4-BE49-F238E27FC236}">
-                <a16:creationId xmlns:a16="http://schemas.microsoft.com/office/drawing/2014/main" id="{EB81EA09-BA58-4C02-A7E1-E64004DF3351}"/>
-              </a:ext>
-            </a:extLst>
-          </p:cNvPr>
+          <p:cNvPr id="18436" name="Text Box 4"/>
           <p:cNvSpPr txBox="1">
             <a:spLocks noChangeArrowheads="1"/>
           </p:cNvSpPr>
@@ -12592,7 +11629,6 @@
               <a:buSzTx/>
               <a:buFontTx/>
               <a:buNone/>
-              <a:tabLst/>
               <a:defRPr/>
             </a:pPr>
             <a:r>
@@ -12646,28 +11682,30 @@
               </a:rPr>
               <a:t>章：贝叶斯分类器</a:t>
             </a:r>
+            <a:endParaRPr kumimoji="1" lang="zh-CN" altLang="en-US" sz="3200" b="1" i="0" u="none" strike="noStrike" kern="1200" cap="none" spc="0" normalizeH="0" baseline="0" noProof="0" dirty="0">
+              <a:ln>
+                <a:noFill/>
+              </a:ln>
+              <a:solidFill>
+                <a:prstClr val="black"/>
+              </a:solidFill>
+              <a:effectLst/>
+              <a:uLnTx/>
+              <a:uFillTx/>
+              <a:latin typeface="黑体" panose="02010609060101010101" pitchFamily="49" charset="-122"/>
+              <a:ea typeface="黑体" panose="02010609060101010101" pitchFamily="49" charset="-122"/>
+              <a:cs typeface="楷体_GB2312"/>
+            </a:endParaRPr>
           </a:p>
         </p:txBody>
       </p:sp>
       <p:graphicFrame>
         <p:nvGraphicFramePr>
-          <p:cNvPr id="5" name="对象 4">
-            <a:extLst>
-              <a:ext uri="{FF2B5EF4-FFF2-40B4-BE49-F238E27FC236}">
-                <a16:creationId xmlns:a16="http://schemas.microsoft.com/office/drawing/2014/main" id="{9BEB6148-F99D-4AD0-A85C-9C1995DCE3A1}"/>
-              </a:ext>
-            </a:extLst>
-          </p:cNvPr>
+          <p:cNvPr id="5" name="对象 4"/>
           <p:cNvGraphicFramePr>
             <a:graphicFrameLocks noChangeAspect="1"/>
           </p:cNvGraphicFramePr>
-          <p:nvPr>
-            <p:extLst>
-              <p:ext uri="{D42A27DB-BD31-4B8C-83A1-F6EECF244321}">
-                <p14:modId xmlns:p14="http://schemas.microsoft.com/office/powerpoint/2010/main" val="1223909205"/>
-              </p:ext>
-            </p:extLst>
-          </p:nvPr>
+          <p:nvPr/>
         </p:nvGraphicFramePr>
         <p:xfrm>
           <a:off x="2339752" y="2485082"/>
@@ -12677,21 +11715,21 @@
           <a:graphicData uri="http://schemas.openxmlformats.org/presentationml/2006/ole">
             <mc:AlternateContent xmlns:mc="http://schemas.openxmlformats.org/markup-compatibility/2006">
               <mc:Choice xmlns:v="urn:schemas-microsoft-com:vml" Requires="v">
-                <p:oleObj name="Formula" r:id="rId2" imgW="97920" imgH="120960" progId="Equation.Ribbit">
+                <p:oleObj spid="_x0000_s27941" name="Formula" r:id="rId1" imgW="733425" imgH="904875" progId="Equation.Ribbit">
                   <p:embed/>
                 </p:oleObj>
               </mc:Choice>
               <mc:Fallback>
-                <p:oleObj name="Formula" r:id="rId2" imgW="97920" imgH="120960" progId="Equation.Ribbit">
+                <p:oleObj name="Formula" r:id="rId1" imgW="733425" imgH="904875" progId="Equation.Ribbit">
                   <p:embed/>
                   <p:pic>
                     <p:nvPicPr>
-                      <p:cNvPr id="20" name="对象 19"/>
+                      <p:cNvPr id="0" name="对象 19"/>
                       <p:cNvPicPr/>
                       <p:nvPr/>
                     </p:nvPicPr>
                     <p:blipFill>
-                      <a:blip r:embed="rId3"/>
+                      <a:blip r:embed="rId2"/>
                       <a:stretch>
                         <a:fillRect/>
                       </a:stretch>
@@ -12714,23 +11752,11 @@
       </p:graphicFrame>
       <p:graphicFrame>
         <p:nvGraphicFramePr>
-          <p:cNvPr id="6" name="对象 5">
-            <a:extLst>
-              <a:ext uri="{FF2B5EF4-FFF2-40B4-BE49-F238E27FC236}">
-                <a16:creationId xmlns:a16="http://schemas.microsoft.com/office/drawing/2014/main" id="{C4CC4F8E-5A4D-45BF-AC23-B7843D1D1383}"/>
-              </a:ext>
-            </a:extLst>
-          </p:cNvPr>
+          <p:cNvPr id="6" name="对象 5"/>
           <p:cNvGraphicFramePr>
             <a:graphicFrameLocks noChangeAspect="1"/>
           </p:cNvGraphicFramePr>
-          <p:nvPr>
-            <p:extLst>
-              <p:ext uri="{D42A27DB-BD31-4B8C-83A1-F6EECF244321}">
-                <p14:modId xmlns:p14="http://schemas.microsoft.com/office/powerpoint/2010/main" val="1116031666"/>
-              </p:ext>
-            </p:extLst>
-          </p:nvPr>
+          <p:nvPr/>
         </p:nvGraphicFramePr>
         <p:xfrm>
           <a:off x="4751388" y="2420888"/>
@@ -12740,21 +11766,21 @@
           <a:graphicData uri="http://schemas.openxmlformats.org/presentationml/2006/ole">
             <mc:AlternateContent xmlns:mc="http://schemas.openxmlformats.org/markup-compatibility/2006">
               <mc:Choice xmlns:v="urn:schemas-microsoft-com:vml" Requires="v">
-                <p:oleObj name="Formula" r:id="rId4" imgW="505800" imgH="177840" progId="Equation.Ribbit">
+                <p:oleObj spid="_x0000_s2" name="Formula" r:id="rId3" imgW="3790950" imgH="1333500" progId="Equation.Ribbit">
                   <p:embed/>
                 </p:oleObj>
               </mc:Choice>
               <mc:Fallback>
-                <p:oleObj name="Formula" r:id="rId4" imgW="505800" imgH="177840" progId="Equation.Ribbit">
+                <p:oleObj name="Formula" r:id="rId3" imgW="3790950" imgH="1333500" progId="Equation.Ribbit">
                   <p:embed/>
                   <p:pic>
                     <p:nvPicPr>
-                      <p:cNvPr id="19" name="对象 18"/>
+                      <p:cNvPr id="0" name="对象 18"/>
                       <p:cNvPicPr/>
                       <p:nvPr/>
                     </p:nvPicPr>
                     <p:blipFill>
-                      <a:blip r:embed="rId5"/>
+                      <a:blip r:embed="rId4"/>
                       <a:stretch>
                         <a:fillRect/>
                       </a:stretch>
@@ -12777,23 +11803,11 @@
       </p:graphicFrame>
       <p:graphicFrame>
         <p:nvGraphicFramePr>
-          <p:cNvPr id="7" name="对象 6">
-            <a:extLst>
-              <a:ext uri="{FF2B5EF4-FFF2-40B4-BE49-F238E27FC236}">
-                <a16:creationId xmlns:a16="http://schemas.microsoft.com/office/drawing/2014/main" id="{0B0D8C4E-DDC4-4F7D-B916-19B13F95D747}"/>
-              </a:ext>
-            </a:extLst>
-          </p:cNvPr>
+          <p:cNvPr id="7" name="对象 6"/>
           <p:cNvGraphicFramePr>
             <a:graphicFrameLocks noChangeAspect="1"/>
           </p:cNvGraphicFramePr>
-          <p:nvPr>
-            <p:extLst>
-              <p:ext uri="{D42A27DB-BD31-4B8C-83A1-F6EECF244321}">
-                <p14:modId xmlns:p14="http://schemas.microsoft.com/office/powerpoint/2010/main" val="424410512"/>
-              </p:ext>
-            </p:extLst>
-          </p:nvPr>
+          <p:nvPr/>
         </p:nvGraphicFramePr>
         <p:xfrm>
           <a:off x="6732240" y="2503390"/>
@@ -12803,21 +11817,21 @@
           <a:graphicData uri="http://schemas.openxmlformats.org/presentationml/2006/ole">
             <mc:AlternateContent xmlns:mc="http://schemas.openxmlformats.org/markup-compatibility/2006">
               <mc:Choice xmlns:v="urn:schemas-microsoft-com:vml" Requires="v">
-                <p:oleObj name="Formula" r:id="rId6" imgW="71280" imgH="119520" progId="Equation.Ribbit">
+                <p:oleObj spid="_x0000_s3" name="Formula" r:id="rId5" imgW="533400" imgH="895350" progId="Equation.Ribbit">
                   <p:embed/>
                 </p:oleObj>
               </mc:Choice>
               <mc:Fallback>
-                <p:oleObj name="Formula" r:id="rId6" imgW="71280" imgH="119520" progId="Equation.Ribbit">
+                <p:oleObj name="Formula" r:id="rId5" imgW="533400" imgH="895350" progId="Equation.Ribbit">
                   <p:embed/>
                   <p:pic>
                     <p:nvPicPr>
-                      <p:cNvPr id="21" name="对象 20"/>
+                      <p:cNvPr id="0" name="对象 20"/>
                       <p:cNvPicPr/>
                       <p:nvPr/>
                     </p:nvPicPr>
                     <p:blipFill>
-                      <a:blip r:embed="rId7"/>
+                      <a:blip r:embed="rId6"/>
                       <a:stretch>
                         <a:fillRect/>
                       </a:stretch>
@@ -12840,23 +11854,11 @@
       </p:graphicFrame>
       <p:graphicFrame>
         <p:nvGraphicFramePr>
-          <p:cNvPr id="8" name="对象 7">
-            <a:extLst>
-              <a:ext uri="{FF2B5EF4-FFF2-40B4-BE49-F238E27FC236}">
-                <a16:creationId xmlns:a16="http://schemas.microsoft.com/office/drawing/2014/main" id="{EFE116A0-F2A1-4DE6-B85E-81F3C9035903}"/>
-              </a:ext>
-            </a:extLst>
-          </p:cNvPr>
+          <p:cNvPr id="8" name="对象 7"/>
           <p:cNvGraphicFramePr>
             <a:graphicFrameLocks noChangeAspect="1"/>
           </p:cNvGraphicFramePr>
-          <p:nvPr>
-            <p:extLst>
-              <p:ext uri="{D42A27DB-BD31-4B8C-83A1-F6EECF244321}">
-                <p14:modId xmlns:p14="http://schemas.microsoft.com/office/powerpoint/2010/main" val="1709188973"/>
-              </p:ext>
-            </p:extLst>
-          </p:nvPr>
+          <p:nvPr/>
         </p:nvGraphicFramePr>
         <p:xfrm>
           <a:off x="4118009" y="3501008"/>
@@ -12866,21 +11868,21 @@
           <a:graphicData uri="http://schemas.openxmlformats.org/presentationml/2006/ole">
             <mc:AlternateContent xmlns:mc="http://schemas.openxmlformats.org/markup-compatibility/2006">
               <mc:Choice xmlns:v="urn:schemas-microsoft-com:vml" Requires="v">
-                <p:oleObj name="Formula" r:id="rId8" imgW="444600" imgH="176760" progId="Equation.Ribbit">
+                <p:oleObj spid="_x0000_s4" name="Formula" r:id="rId7" imgW="3333750" imgH="1323975" progId="Equation.Ribbit">
                   <p:embed/>
                 </p:oleObj>
               </mc:Choice>
               <mc:Fallback>
-                <p:oleObj name="Formula" r:id="rId8" imgW="444600" imgH="176760" progId="Equation.Ribbit">
+                <p:oleObj name="Formula" r:id="rId7" imgW="3333750" imgH="1323975" progId="Equation.Ribbit">
                   <p:embed/>
                   <p:pic>
                     <p:nvPicPr>
-                      <p:cNvPr id="22" name="对象 21"/>
+                      <p:cNvPr id="0" name="对象 21"/>
                       <p:cNvPicPr/>
                       <p:nvPr/>
                     </p:nvPicPr>
                     <p:blipFill>
-                      <a:blip r:embed="rId9"/>
+                      <a:blip r:embed="rId8"/>
                       <a:stretch>
                         <a:fillRect/>
                       </a:stretch>
@@ -12903,23 +11905,11 @@
       </p:graphicFrame>
       <p:graphicFrame>
         <p:nvGraphicFramePr>
-          <p:cNvPr id="9" name="对象 8">
-            <a:extLst>
-              <a:ext uri="{FF2B5EF4-FFF2-40B4-BE49-F238E27FC236}">
-                <a16:creationId xmlns:a16="http://schemas.microsoft.com/office/drawing/2014/main" id="{D552B986-D18F-4D39-92B1-1D7EDB8887E2}"/>
-              </a:ext>
-            </a:extLst>
-          </p:cNvPr>
+          <p:cNvPr id="9" name="对象 8"/>
           <p:cNvGraphicFramePr>
             <a:graphicFrameLocks noChangeAspect="1"/>
           </p:cNvGraphicFramePr>
-          <p:nvPr>
-            <p:extLst>
-              <p:ext uri="{D42A27DB-BD31-4B8C-83A1-F6EECF244321}">
-                <p14:modId xmlns:p14="http://schemas.microsoft.com/office/powerpoint/2010/main" val="2823164089"/>
-              </p:ext>
-            </p:extLst>
-          </p:nvPr>
+          <p:nvPr/>
         </p:nvGraphicFramePr>
         <p:xfrm>
           <a:off x="7452320" y="3501008"/>
@@ -12929,21 +11919,21 @@
           <a:graphicData uri="http://schemas.openxmlformats.org/presentationml/2006/ole">
             <mc:AlternateContent xmlns:mc="http://schemas.openxmlformats.org/markup-compatibility/2006">
               <mc:Choice xmlns:v="urn:schemas-microsoft-com:vml" Requires="v">
-                <p:oleObj name="Formula" r:id="rId4" imgW="505800" imgH="177840" progId="Equation.Ribbit">
+                <p:oleObj spid="_x0000_s10" name="Formula" r:id="rId9" imgW="3790950" imgH="1333500" progId="Equation.Ribbit">
                   <p:embed/>
                 </p:oleObj>
               </mc:Choice>
               <mc:Fallback>
-                <p:oleObj name="Formula" r:id="rId4" imgW="505800" imgH="177840" progId="Equation.Ribbit">
+                <p:oleObj name="Formula" r:id="rId9" imgW="3790950" imgH="1333500" progId="Equation.Ribbit">
                   <p:embed/>
                   <p:pic>
                     <p:nvPicPr>
-                      <p:cNvPr id="23" name="对象 22"/>
+                      <p:cNvPr id="0" name="对象 22"/>
                       <p:cNvPicPr/>
                       <p:nvPr/>
                     </p:nvPicPr>
                     <p:blipFill>
-                      <a:blip r:embed="rId5"/>
+                      <a:blip r:embed="rId4"/>
                       <a:stretch>
                         <a:fillRect/>
                       </a:stretch>
@@ -12966,23 +11956,11 @@
       </p:graphicFrame>
       <p:graphicFrame>
         <p:nvGraphicFramePr>
-          <p:cNvPr id="10" name="对象 9">
-            <a:extLst>
-              <a:ext uri="{FF2B5EF4-FFF2-40B4-BE49-F238E27FC236}">
-                <a16:creationId xmlns:a16="http://schemas.microsoft.com/office/drawing/2014/main" id="{531842E4-5311-4E3F-A0E5-91D5ABDAD8B3}"/>
-              </a:ext>
-            </a:extLst>
-          </p:cNvPr>
+          <p:cNvPr id="11" name="对象 10"/>
           <p:cNvGraphicFramePr>
             <a:graphicFrameLocks noChangeAspect="1"/>
           </p:cNvGraphicFramePr>
-          <p:nvPr>
-            <p:extLst>
-              <p:ext uri="{D42A27DB-BD31-4B8C-83A1-F6EECF244321}">
-                <p14:modId xmlns:p14="http://schemas.microsoft.com/office/powerpoint/2010/main" val="3861568209"/>
-              </p:ext>
-            </p:extLst>
-          </p:nvPr>
+          <p:nvPr/>
         </p:nvGraphicFramePr>
         <p:xfrm>
           <a:off x="3635896" y="3936551"/>
@@ -12992,16 +11970,16 @@
           <a:graphicData uri="http://schemas.openxmlformats.org/presentationml/2006/ole">
             <mc:AlternateContent xmlns:mc="http://schemas.openxmlformats.org/markup-compatibility/2006">
               <mc:Choice xmlns:v="urn:schemas-microsoft-com:vml" Requires="v">
-                <p:oleObj name="Formula" r:id="rId10" imgW="1543320" imgH="382320" progId="Equation.Ribbit">
+                <p:oleObj spid="_x0000_s12" name="Formula" r:id="rId10" imgW="11572875" imgH="2867025" progId="Equation.Ribbit">
                   <p:embed/>
                 </p:oleObj>
               </mc:Choice>
               <mc:Fallback>
-                <p:oleObj name="Formula" r:id="rId10" imgW="1543320" imgH="382320" progId="Equation.Ribbit">
+                <p:oleObj name="Formula" r:id="rId10" imgW="11572875" imgH="2867025" progId="Equation.Ribbit">
                   <p:embed/>
                   <p:pic>
                     <p:nvPicPr>
-                      <p:cNvPr id="21" name="对象 20"/>
+                      <p:cNvPr id="0" name="对象 20"/>
                       <p:cNvPicPr/>
                       <p:nvPr/>
                     </p:nvPicPr>
@@ -13029,7 +12007,7 @@
       </p:graphicFrame>
       <p:pic>
         <p:nvPicPr>
-          <p:cNvPr id="2" name="图片 1"/>
+          <p:cNvPr id="13" name="图片 12"/>
           <p:cNvPicPr>
             <a:picLocks noChangeAspect="1"/>
           </p:cNvPicPr>
@@ -13052,11 +12030,6 @@
         </p:spPr>
       </p:pic>
     </p:spTree>
-    <p:extLst>
-      <p:ext uri="{BB962C8B-B14F-4D97-AF65-F5344CB8AC3E}">
-        <p14:creationId xmlns:p14="http://schemas.microsoft.com/office/powerpoint/2010/main" val="1275269740"/>
-      </p:ext>
-    </p:extLst>
   </p:cSld>
   <p:clrMapOvr>
     <a:masterClrMapping/>
@@ -13071,13 +12044,13 @@
               <p:cTn id="2" dur="indefinite" nodeType="mainSeq">
                 <p:childTnLst>
                   <p:par>
-                    <p:cTn id="3" fill="hold" nodeType="clickPar">
+                    <p:cTn id="3" fill="hold">
                       <p:stCondLst>
                         <p:cond delay="indefinite"/>
                       </p:stCondLst>
                       <p:childTnLst>
                         <p:par>
-                          <p:cTn id="4" fill="hold" nodeType="withGroup">
+                          <p:cTn id="4" fill="hold">
                             <p:stCondLst>
                               <p:cond delay="0"/>
                             </p:stCondLst>
@@ -13178,13 +12151,7 @@
       </p:grpSpPr>
       <p:sp>
         <p:nvSpPr>
-          <p:cNvPr id="3" name="内容占位符 2">
-            <a:extLst>
-              <a:ext uri="{FF2B5EF4-FFF2-40B4-BE49-F238E27FC236}">
-                <a16:creationId xmlns:a16="http://schemas.microsoft.com/office/drawing/2014/main" id="{A303477E-A237-4894-86ED-EA77CDD73745}"/>
-              </a:ext>
-            </a:extLst>
-          </p:cNvPr>
+          <p:cNvPr id="3" name="内容占位符 2"/>
           <p:cNvSpPr>
             <a:spLocks noGrp="1"/>
           </p:cNvSpPr>
@@ -13254,6 +12221,10 @@
               </a:rPr>
               <a:t>。假定来了一位新患者，其化验结果为阳性。利用贝叶斯法则计算该患者患此疾病的概率有多大？</a:t>
             </a:r>
+            <a:endParaRPr lang="zh-CN" altLang="en-US" sz="2400" dirty="0">
+              <a:latin typeface="楷体" panose="02010609060101010101" pitchFamily="49" charset="-122"/>
+              <a:ea typeface="楷体" panose="02010609060101010101" pitchFamily="49" charset="-122"/>
+            </a:endParaRPr>
           </a:p>
         </p:txBody>
       </p:sp>
@@ -13266,7 +12237,7 @@
           <p:nvPr/>
         </p:nvPicPr>
         <p:blipFill>
-          <a:blip r:embed="rId2"/>
+          <a:blip r:embed="rId1"/>
           <a:stretch>
             <a:fillRect/>
           </a:stretch>
@@ -13282,11 +12253,6 @@
         </p:spPr>
       </p:pic>
     </p:spTree>
-    <p:extLst>
-      <p:ext uri="{BB962C8B-B14F-4D97-AF65-F5344CB8AC3E}">
-        <p14:creationId xmlns:p14="http://schemas.microsoft.com/office/powerpoint/2010/main" val="826215254"/>
-      </p:ext>
-    </p:extLst>
   </p:cSld>
   <p:clrMapOvr>
     <a:masterClrMapping/>
@@ -13395,7 +12361,7 @@
           <p:nvPr/>
         </p:nvPicPr>
         <p:blipFill>
-          <a:blip r:embed="rId2"/>
+          <a:blip r:embed="rId1"/>
           <a:stretch>
             <a:fillRect/>
           </a:stretch>
@@ -13412,20 +12378,14 @@
       </p:pic>
       <p:pic>
         <p:nvPicPr>
-          <p:cNvPr id="6" name="图片 5">
-            <a:extLst>
-              <a:ext uri="{FF2B5EF4-FFF2-40B4-BE49-F238E27FC236}">
-                <a16:creationId xmlns:a16="http://schemas.microsoft.com/office/drawing/2014/main" id="{A719B10E-3693-46FD-BE07-C955AAC15438}"/>
-              </a:ext>
-            </a:extLst>
-          </p:cNvPr>
+          <p:cNvPr id="6" name="图片 5"/>
           <p:cNvPicPr>
             <a:picLocks noChangeAspect="1"/>
           </p:cNvPicPr>
           <p:nvPr/>
         </p:nvPicPr>
         <p:blipFill>
-          <a:blip r:embed="rId3"/>
+          <a:blip r:embed="rId2"/>
           <a:stretch>
             <a:fillRect/>
           </a:stretch>
@@ -13449,7 +12409,7 @@
           <p:nvPr/>
         </p:nvPicPr>
         <p:blipFill>
-          <a:blip r:embed="rId4"/>
+          <a:blip r:embed="rId3"/>
           <a:stretch>
             <a:fillRect/>
           </a:stretch>
@@ -13470,13 +12430,7 @@
           <p:cNvGraphicFramePr>
             <a:graphicFrameLocks noChangeAspect="1"/>
           </p:cNvGraphicFramePr>
-          <p:nvPr>
-            <p:extLst>
-              <p:ext uri="{D42A27DB-BD31-4B8C-83A1-F6EECF244321}">
-                <p14:modId xmlns:p14="http://schemas.microsoft.com/office/powerpoint/2010/main" val="3933501538"/>
-              </p:ext>
-            </p:extLst>
-          </p:nvPr>
+          <p:nvPr/>
         </p:nvGraphicFramePr>
         <p:xfrm>
           <a:off x="971600" y="4460395"/>
@@ -13486,21 +12440,21 @@
           <a:graphicData uri="http://schemas.openxmlformats.org/presentationml/2006/ole">
             <mc:AlternateContent xmlns:mc="http://schemas.openxmlformats.org/markup-compatibility/2006">
               <mc:Choice xmlns:v="urn:schemas-microsoft-com:vml" Requires="v">
-                <p:oleObj name="Formula" r:id="rId5" imgW="2173320" imgH="463680" progId="Equation.Ribbit">
+                <p:oleObj spid="_x0000_s27941" name="Formula" r:id="rId4" imgW="16297275" imgH="3476625" progId="Equation.Ribbit">
                   <p:embed/>
                 </p:oleObj>
               </mc:Choice>
               <mc:Fallback>
-                <p:oleObj name="Formula" r:id="rId5" imgW="2173320" imgH="463680" progId="Equation.Ribbit">
+                <p:oleObj name="Formula" r:id="rId4" imgW="16297275" imgH="3476625" progId="Equation.Ribbit">
                   <p:embed/>
                   <p:pic>
                     <p:nvPicPr>
-                      <p:cNvPr id="10" name="对象 9"/>
+                      <p:cNvPr id="0" name="对象 9"/>
                       <p:cNvPicPr/>
                       <p:nvPr/>
                     </p:nvPicPr>
                     <p:blipFill>
-                      <a:blip r:embed="rId6"/>
+                      <a:blip r:embed="rId5"/>
                       <a:stretch>
                         <a:fillRect/>
                       </a:stretch>
@@ -13530,9 +12484,11 @@
           <p:nvPr/>
         </p:nvPicPr>
         <p:blipFill rotWithShape="1">
-          <a:blip r:embed="rId7"/>
+          <a:blip r:embed="rId6"/>
           <a:srcRect t="1" b="45990"/>
-          <a:stretch/>
+          <a:stretch>
+            <a:fillRect/>
+          </a:stretch>
         </p:blipFill>
         <p:spPr>
           <a:xfrm>
@@ -13546,22 +12502,18 @@
       </p:pic>
       <p:pic>
         <p:nvPicPr>
-          <p:cNvPr id="10" name="图片 9">
-            <a:extLst>
-              <a:ext uri="{FF2B5EF4-FFF2-40B4-BE49-F238E27FC236}">
-                <a16:creationId xmlns:a16="http://schemas.microsoft.com/office/drawing/2014/main" id="{8C38D148-C6D1-421E-B652-168895F9FFB2}"/>
-              </a:ext>
-            </a:extLst>
-          </p:cNvPr>
+          <p:cNvPr id="10" name="图片 9"/>
           <p:cNvPicPr>
             <a:picLocks noChangeAspect="1"/>
           </p:cNvPicPr>
           <p:nvPr/>
         </p:nvPicPr>
         <p:blipFill rotWithShape="1">
-          <a:blip r:embed="rId7"/>
+          <a:blip r:embed="rId6"/>
           <a:srcRect t="54466"/>
-          <a:stretch/>
+          <a:stretch>
+            <a:fillRect/>
+          </a:stretch>
         </p:blipFill>
         <p:spPr>
           <a:xfrm>
@@ -13582,7 +12534,7 @@
           <p:nvPr/>
         </p:nvPicPr>
         <p:blipFill>
-          <a:blip r:embed="rId8"/>
+          <a:blip r:embed="rId7"/>
           <a:stretch>
             <a:fillRect/>
           </a:stretch>
@@ -13598,11 +12550,6 @@
         </p:spPr>
       </p:pic>
     </p:spTree>
-    <p:extLst>
-      <p:ext uri="{BB962C8B-B14F-4D97-AF65-F5344CB8AC3E}">
-        <p14:creationId xmlns:p14="http://schemas.microsoft.com/office/powerpoint/2010/main" val="3747657783"/>
-      </p:ext>
-    </p:extLst>
   </p:cSld>
   <p:clrMapOvr>
     <a:masterClrMapping/>
@@ -13839,13 +12786,7 @@
       </p:grpSpPr>
       <p:sp>
         <p:nvSpPr>
-          <p:cNvPr id="18434" name="灯片编号占位符 5">
-            <a:extLst>
-              <a:ext uri="{FF2B5EF4-FFF2-40B4-BE49-F238E27FC236}">
-                <a16:creationId xmlns:a16="http://schemas.microsoft.com/office/drawing/2014/main" id="{CBBD9809-2CC4-42C3-B564-FAC6896E7580}"/>
-              </a:ext>
-            </a:extLst>
-          </p:cNvPr>
+          <p:cNvPr id="18434" name="灯片编号占位符 5"/>
           <p:cNvSpPr>
             <a:spLocks noGrp="1"/>
           </p:cNvSpPr>
@@ -14032,7 +12973,6 @@
               <a:buSzTx/>
               <a:buFontTx/>
               <a:buNone/>
-              <a:tabLst/>
               <a:defRPr/>
             </a:pPr>
             <a:fld id="{F12A9DEA-C3F6-4401-A5BF-3745117890AB}" type="slidenum">
@@ -14050,24 +12990,6 @@
                 <a:ea typeface="宋体" panose="02010600030101010101" pitchFamily="2" charset="-122"/>
                 <a:cs typeface="+mn-cs"/>
               </a:rPr>
-              <a:pPr marL="0" marR="0" lvl="0" indent="0" algn="r" defTabSz="914400" rtl="0" eaLnBrk="1" fontAlgn="base" latinLnBrk="0" hangingPunct="1">
-                <a:lnSpc>
-                  <a:spcPct val="100000"/>
-                </a:lnSpc>
-                <a:spcBef>
-                  <a:spcPct val="0"/>
-                </a:spcBef>
-                <a:spcAft>
-                  <a:spcPct val="0"/>
-                </a:spcAft>
-                <a:buClrTx/>
-                <a:buSzTx/>
-                <a:buFontTx/>
-                <a:buNone/>
-                <a:tabLst/>
-                <a:defRPr/>
-              </a:pPr>
-              <a:t>16</a:t>
             </a:fld>
             <a:endParaRPr kumimoji="1" lang="en-US" altLang="zh-CN" sz="1400" b="0" i="0" u="none" strike="noStrike" kern="1200" cap="none" spc="0" normalizeH="0" baseline="0" noProof="0">
               <a:ln>
@@ -14088,13 +13010,7 @@
       </p:sp>
       <p:sp>
         <p:nvSpPr>
-          <p:cNvPr id="887811" name="Rectangle 3">
-            <a:extLst>
-              <a:ext uri="{FF2B5EF4-FFF2-40B4-BE49-F238E27FC236}">
-                <a16:creationId xmlns:a16="http://schemas.microsoft.com/office/drawing/2014/main" id="{E67925BF-BD9D-4849-975B-B00461AA9122}"/>
-              </a:ext>
-            </a:extLst>
-          </p:cNvPr>
+          <p:cNvPr id="887811" name="Rectangle 3"/>
           <p:cNvSpPr>
             <a:spLocks noGrp="1"/>
           </p:cNvSpPr>
@@ -14481,6 +13397,11 @@
               </a:rPr>
               <a:t>数据样本扰动、输入属性扰动、输出表示扰动、算法参数扰动</a:t>
             </a:r>
+            <a:endParaRPr lang="zh-CN" altLang="en-US" sz="2400" dirty="0">
+              <a:latin typeface="Times New Roman" panose="02020603050405020304" pitchFamily="18" charset="0"/>
+              <a:ea typeface="楷体" panose="02010609060101010101" pitchFamily="49" charset="-122"/>
+              <a:cs typeface="Times New Roman" panose="02020603050405020304" pitchFamily="18" charset="0"/>
+            </a:endParaRPr>
           </a:p>
           <a:p>
             <a:pPr marL="457200" lvl="1" indent="0" eaLnBrk="1" hangingPunct="1">
@@ -14563,13 +13484,7 @@
       </p:sp>
       <p:sp>
         <p:nvSpPr>
-          <p:cNvPr id="18436" name="Text Box 4">
-            <a:extLst>
-              <a:ext uri="{FF2B5EF4-FFF2-40B4-BE49-F238E27FC236}">
-                <a16:creationId xmlns:a16="http://schemas.microsoft.com/office/drawing/2014/main" id="{EB81EA09-BA58-4C02-A7E1-E64004DF3351}"/>
-              </a:ext>
-            </a:extLst>
-          </p:cNvPr>
+          <p:cNvPr id="18436" name="Text Box 4"/>
           <p:cNvSpPr txBox="1">
             <a:spLocks noChangeArrowheads="1"/>
           </p:cNvSpPr>
@@ -14776,7 +13691,6 @@
               <a:buSzTx/>
               <a:buFontTx/>
               <a:buNone/>
-              <a:tabLst/>
               <a:defRPr/>
             </a:pPr>
             <a:r>
@@ -14830,15 +13744,24 @@
               </a:rPr>
               <a:t>章：集成学习</a:t>
             </a:r>
+            <a:endParaRPr kumimoji="1" lang="zh-CN" altLang="en-US" sz="3200" b="1" i="0" u="none" strike="noStrike" kern="1200" cap="none" spc="0" normalizeH="0" baseline="0" noProof="0" dirty="0">
+              <a:ln>
+                <a:noFill/>
+              </a:ln>
+              <a:solidFill>
+                <a:prstClr val="black"/>
+              </a:solidFill>
+              <a:effectLst/>
+              <a:uLnTx/>
+              <a:uFillTx/>
+              <a:latin typeface="黑体" panose="02010609060101010101" pitchFamily="49" charset="-122"/>
+              <a:ea typeface="黑体" panose="02010609060101010101" pitchFamily="49" charset="-122"/>
+              <a:cs typeface="楷体_GB2312"/>
+            </a:endParaRPr>
           </a:p>
         </p:txBody>
       </p:sp>
     </p:spTree>
-    <p:extLst>
-      <p:ext uri="{BB962C8B-B14F-4D97-AF65-F5344CB8AC3E}">
-        <p14:creationId xmlns:p14="http://schemas.microsoft.com/office/powerpoint/2010/main" val="1561591582"/>
-      </p:ext>
-    </p:extLst>
   </p:cSld>
   <p:clrMapOvr>
     <a:masterClrMapping/>
@@ -14853,13 +13776,13 @@
               <p:cTn id="2" dur="indefinite" nodeType="mainSeq">
                 <p:childTnLst>
                   <p:par>
-                    <p:cTn id="3" fill="hold" nodeType="clickPar">
+                    <p:cTn id="3" fill="hold">
                       <p:stCondLst>
                         <p:cond delay="indefinite"/>
                       </p:stCondLst>
                       <p:childTnLst>
                         <p:par>
-                          <p:cTn id="4" fill="hold" nodeType="withGroup">
+                          <p:cTn id="4" fill="hold">
                             <p:stCondLst>
                               <p:cond delay="0"/>
                             </p:stCondLst>
@@ -14967,7 +13890,7 @@
           <p:nvPr/>
         </p:nvPicPr>
         <p:blipFill>
-          <a:blip r:embed="rId2"/>
+          <a:blip r:embed="rId1"/>
           <a:stretch>
             <a:fillRect/>
           </a:stretch>
@@ -15030,7 +13953,7 @@
           <p:nvPr/>
         </p:nvPicPr>
         <p:blipFill>
-          <a:blip r:embed="rId3"/>
+          <a:blip r:embed="rId2"/>
           <a:stretch>
             <a:fillRect/>
           </a:stretch>
@@ -15085,11 +14008,6 @@
         </p:txBody>
       </p:sp>
     </p:spTree>
-    <p:extLst>
-      <p:ext uri="{BB962C8B-B14F-4D97-AF65-F5344CB8AC3E}">
-        <p14:creationId xmlns:p14="http://schemas.microsoft.com/office/powerpoint/2010/main" val="1307462400"/>
-      </p:ext>
-    </p:extLst>
   </p:cSld>
   <p:clrMapOvr>
     <a:masterClrMapping/>
@@ -15116,13 +14034,7 @@
       </p:grpSpPr>
       <p:sp>
         <p:nvSpPr>
-          <p:cNvPr id="18434" name="灯片编号占位符 5">
-            <a:extLst>
-              <a:ext uri="{FF2B5EF4-FFF2-40B4-BE49-F238E27FC236}">
-                <a16:creationId xmlns:a16="http://schemas.microsoft.com/office/drawing/2014/main" id="{CBBD9809-2CC4-42C3-B564-FAC6896E7580}"/>
-              </a:ext>
-            </a:extLst>
-          </p:cNvPr>
+          <p:cNvPr id="18434" name="灯片编号占位符 5"/>
           <p:cNvSpPr>
             <a:spLocks noGrp="1"/>
           </p:cNvSpPr>
@@ -15309,7 +14221,6 @@
               <a:buSzTx/>
               <a:buFontTx/>
               <a:buNone/>
-              <a:tabLst/>
               <a:defRPr/>
             </a:pPr>
             <a:fld id="{F12A9DEA-C3F6-4401-A5BF-3745117890AB}" type="slidenum">
@@ -15327,24 +14238,6 @@
                 <a:ea typeface="宋体" panose="02010600030101010101" pitchFamily="2" charset="-122"/>
                 <a:cs typeface="+mn-cs"/>
               </a:rPr>
-              <a:pPr marL="0" marR="0" lvl="0" indent="0" algn="r" defTabSz="914400" rtl="0" eaLnBrk="1" fontAlgn="base" latinLnBrk="0" hangingPunct="1">
-                <a:lnSpc>
-                  <a:spcPct val="100000"/>
-                </a:lnSpc>
-                <a:spcBef>
-                  <a:spcPct val="0"/>
-                </a:spcBef>
-                <a:spcAft>
-                  <a:spcPct val="0"/>
-                </a:spcAft>
-                <a:buClrTx/>
-                <a:buSzTx/>
-                <a:buFontTx/>
-                <a:buNone/>
-                <a:tabLst/>
-                <a:defRPr/>
-              </a:pPr>
-              <a:t>18</a:t>
             </a:fld>
             <a:endParaRPr kumimoji="1" lang="en-US" altLang="zh-CN" sz="1400" b="0" i="0" u="none" strike="noStrike" kern="1200" cap="none" spc="0" normalizeH="0" baseline="0" noProof="0">
               <a:ln>
@@ -15365,13 +14258,7 @@
       </p:sp>
       <p:sp>
         <p:nvSpPr>
-          <p:cNvPr id="887811" name="Rectangle 3">
-            <a:extLst>
-              <a:ext uri="{FF2B5EF4-FFF2-40B4-BE49-F238E27FC236}">
-                <a16:creationId xmlns:a16="http://schemas.microsoft.com/office/drawing/2014/main" id="{E67925BF-BD9D-4849-975B-B00461AA9122}"/>
-              </a:ext>
-            </a:extLst>
-          </p:cNvPr>
+          <p:cNvPr id="887811" name="Rectangle 3"/>
           <p:cNvSpPr>
             <a:spLocks noGrp="1"/>
           </p:cNvSpPr>
@@ -15570,6 +14457,11 @@
               </a:rPr>
               <a:t>DBSCAN</a:t>
             </a:r>
+            <a:endParaRPr lang="en-US" altLang="zh-CN" sz="2800" dirty="0">
+              <a:latin typeface="Times New Roman" panose="02020603050405020304" pitchFamily="18" charset="0"/>
+              <a:ea typeface="楷体" panose="02010609060101010101" pitchFamily="49" charset="-122"/>
+              <a:cs typeface="Times New Roman" panose="02020603050405020304" pitchFamily="18" charset="0"/>
+            </a:endParaRPr>
           </a:p>
           <a:p>
             <a:pPr eaLnBrk="1" hangingPunct="1">
@@ -15729,13 +14621,7 @@
       </p:sp>
       <p:sp>
         <p:nvSpPr>
-          <p:cNvPr id="18436" name="Text Box 4">
-            <a:extLst>
-              <a:ext uri="{FF2B5EF4-FFF2-40B4-BE49-F238E27FC236}">
-                <a16:creationId xmlns:a16="http://schemas.microsoft.com/office/drawing/2014/main" id="{EB81EA09-BA58-4C02-A7E1-E64004DF3351}"/>
-              </a:ext>
-            </a:extLst>
-          </p:cNvPr>
+          <p:cNvPr id="18436" name="Text Box 4"/>
           <p:cNvSpPr txBox="1">
             <a:spLocks noChangeArrowheads="1"/>
           </p:cNvSpPr>
@@ -15942,7 +14828,6 @@
               <a:buSzTx/>
               <a:buFontTx/>
               <a:buNone/>
-              <a:tabLst/>
               <a:defRPr/>
             </a:pPr>
             <a:r>
@@ -15996,15 +14881,24 @@
               </a:rPr>
               <a:t>章：聚类</a:t>
             </a:r>
+            <a:endParaRPr kumimoji="1" lang="zh-CN" altLang="en-US" sz="3200" b="1" i="0" u="none" strike="noStrike" kern="1200" cap="none" spc="0" normalizeH="0" baseline="0" noProof="0" dirty="0">
+              <a:ln>
+                <a:noFill/>
+              </a:ln>
+              <a:solidFill>
+                <a:prstClr val="black"/>
+              </a:solidFill>
+              <a:effectLst/>
+              <a:uLnTx/>
+              <a:uFillTx/>
+              <a:latin typeface="黑体" panose="02010609060101010101" pitchFamily="49" charset="-122"/>
+              <a:ea typeface="黑体" panose="02010609060101010101" pitchFamily="49" charset="-122"/>
+              <a:cs typeface="楷体_GB2312"/>
+            </a:endParaRPr>
           </a:p>
         </p:txBody>
       </p:sp>
     </p:spTree>
-    <p:extLst>
-      <p:ext uri="{BB962C8B-B14F-4D97-AF65-F5344CB8AC3E}">
-        <p14:creationId xmlns:p14="http://schemas.microsoft.com/office/powerpoint/2010/main" val="1993512533"/>
-      </p:ext>
-    </p:extLst>
   </p:cSld>
   <p:clrMapOvr>
     <a:masterClrMapping/>
@@ -16019,13 +14913,13 @@
               <p:cTn id="2" dur="indefinite" nodeType="mainSeq">
                 <p:childTnLst>
                   <p:par>
-                    <p:cTn id="3" fill="hold" nodeType="clickPar">
+                    <p:cTn id="3" fill="hold">
                       <p:stCondLst>
                         <p:cond delay="indefinite"/>
                       </p:stCondLst>
                       <p:childTnLst>
                         <p:par>
-                          <p:cTn id="4" fill="hold" nodeType="withGroup">
+                          <p:cTn id="4" fill="hold">
                             <p:stCondLst>
                               <p:cond delay="0"/>
                             </p:stCondLst>
@@ -16133,7 +15027,7 @@
           <p:nvPr/>
         </p:nvPicPr>
         <p:blipFill>
-          <a:blip r:embed="rId2" cstate="print"/>
+          <a:blip r:embed="rId1" cstate="print"/>
           <a:srcRect/>
           <a:stretch>
             <a:fillRect/>
@@ -16151,11 +15045,6 @@
         </p:spPr>
       </p:pic>
     </p:spTree>
-    <p:extLst>
-      <p:ext uri="{BB962C8B-B14F-4D97-AF65-F5344CB8AC3E}">
-        <p14:creationId xmlns:p14="http://schemas.microsoft.com/office/powerpoint/2010/main" val="1034560743"/>
-      </p:ext>
-    </p:extLst>
   </p:cSld>
   <p:clrMapOvr>
     <a:masterClrMapping/>
@@ -16182,13 +15071,7 @@
       </p:grpSpPr>
       <p:sp>
         <p:nvSpPr>
-          <p:cNvPr id="11266" name="灯片编号占位符 4">
-            <a:extLst>
-              <a:ext uri="{FF2B5EF4-FFF2-40B4-BE49-F238E27FC236}">
-                <a16:creationId xmlns:a16="http://schemas.microsoft.com/office/drawing/2014/main" id="{D3A026C4-F7B3-455D-8409-EE800BAFF169}"/>
-              </a:ext>
-            </a:extLst>
-          </p:cNvPr>
+          <p:cNvPr id="11266" name="灯片编号占位符 4"/>
           <p:cNvSpPr>
             <a:spLocks noGrp="1"/>
           </p:cNvSpPr>
@@ -16372,14 +15255,6 @@
               <a:rPr kumimoji="1" lang="en-US" altLang="zh-CN" sz="1400" smtClean="0">
                 <a:latin typeface="Times New Roman" panose="02020603050405020304" pitchFamily="18" charset="0"/>
               </a:rPr>
-              <a:pPr>
-                <a:spcBef>
-                  <a:spcPct val="0"/>
-                </a:spcBef>
-                <a:buFontTx/>
-                <a:buNone/>
-              </a:pPr>
-              <a:t>2</a:t>
             </a:fld>
             <a:endParaRPr kumimoji="1" lang="en-US" altLang="zh-CN" sz="1400">
               <a:latin typeface="Times New Roman" panose="02020603050405020304" pitchFamily="18" charset="0"/>
@@ -16389,13 +15264,7 @@
       </p:sp>
       <p:sp>
         <p:nvSpPr>
-          <p:cNvPr id="11267" name="Text Box 3">
-            <a:extLst>
-              <a:ext uri="{FF2B5EF4-FFF2-40B4-BE49-F238E27FC236}">
-                <a16:creationId xmlns:a16="http://schemas.microsoft.com/office/drawing/2014/main" id="{A797628E-D641-41DC-8511-3686F1781188}"/>
-              </a:ext>
-            </a:extLst>
-          </p:cNvPr>
+          <p:cNvPr id="11267" name="Text Box 3"/>
           <p:cNvSpPr txBox="1">
             <a:spLocks noChangeArrowheads="1"/>
           </p:cNvSpPr>
@@ -16614,13 +15483,7 @@
       </p:sp>
       <p:sp>
         <p:nvSpPr>
-          <p:cNvPr id="11268" name="Text Box 4">
-            <a:extLst>
-              <a:ext uri="{FF2B5EF4-FFF2-40B4-BE49-F238E27FC236}">
-                <a16:creationId xmlns:a16="http://schemas.microsoft.com/office/drawing/2014/main" id="{DF0FB2B5-927B-4658-9A3C-3FAF765B2E43}"/>
-              </a:ext>
-            </a:extLst>
-          </p:cNvPr>
+          <p:cNvPr id="11268" name="Text Box 4"/>
           <p:cNvSpPr txBox="1">
             <a:spLocks noChangeArrowheads="1"/>
           </p:cNvSpPr>
@@ -16830,6 +15693,10 @@
               </a:rPr>
               <a:t>成绩构成</a:t>
             </a:r>
+            <a:endParaRPr kumimoji="1" lang="zh-CN" altLang="en-US" sz="2800" b="1" dirty="0">
+              <a:latin typeface="楷体" panose="02010609060101010101" pitchFamily="49" charset="-122"/>
+              <a:ea typeface="楷体" panose="02010609060101010101" pitchFamily="49" charset="-122"/>
+            </a:endParaRPr>
           </a:p>
           <a:p>
             <a:pPr eaLnBrk="1" hangingPunct="1">
@@ -17027,23 +15894,11 @@
       </p:sp>
       <p:graphicFrame>
         <p:nvGraphicFramePr>
-          <p:cNvPr id="2" name="表格 1">
-            <a:extLst>
-              <a:ext uri="{FF2B5EF4-FFF2-40B4-BE49-F238E27FC236}">
-                <a16:creationId xmlns:a16="http://schemas.microsoft.com/office/drawing/2014/main" id="{F6E6ABA9-571D-4985-BA5B-A623CC43F9E5}"/>
-              </a:ext>
-            </a:extLst>
-          </p:cNvPr>
+          <p:cNvPr id="2" name="表格 1"/>
           <p:cNvGraphicFramePr>
             <a:graphicFrameLocks noGrp="1"/>
           </p:cNvGraphicFramePr>
-          <p:nvPr>
-            <p:extLst>
-              <p:ext uri="{D42A27DB-BD31-4B8C-83A1-F6EECF244321}">
-                <p14:modId xmlns:p14="http://schemas.microsoft.com/office/powerpoint/2010/main" val="2576040134"/>
-              </p:ext>
-            </p:extLst>
-          </p:nvPr>
+          <p:nvPr/>
         </p:nvGraphicFramePr>
         <p:xfrm>
           <a:off x="930275" y="1924050"/>
@@ -17056,27 +15911,9 @@
                 <a:tableStyleId>{5C22544A-7EE6-4342-B048-85BDC9FD1C3A}</a:tableStyleId>
               </a:tblPr>
               <a:tblGrid>
-                <a:gridCol w="2547428">
-                  <a:extLst>
-                    <a:ext uri="{9D8B030D-6E8A-4147-A177-3AD203B41FA5}">
-                      <a16:colId xmlns:a16="http://schemas.microsoft.com/office/drawing/2014/main" val="20000"/>
-                    </a:ext>
-                  </a:extLst>
-                </a:gridCol>
-                <a:gridCol w="2925800">
-                  <a:extLst>
-                    <a:ext uri="{9D8B030D-6E8A-4147-A177-3AD203B41FA5}">
-                      <a16:colId xmlns:a16="http://schemas.microsoft.com/office/drawing/2014/main" val="20001"/>
-                    </a:ext>
-                  </a:extLst>
-                </a:gridCol>
-                <a:gridCol w="2170584">
-                  <a:extLst>
-                    <a:ext uri="{9D8B030D-6E8A-4147-A177-3AD203B41FA5}">
-                      <a16:colId xmlns:a16="http://schemas.microsoft.com/office/drawing/2014/main" val="20002"/>
-                    </a:ext>
-                  </a:extLst>
-                </a:gridCol>
+                <a:gridCol w="2547428"/>
+                <a:gridCol w="2925800"/>
+                <a:gridCol w="2170584"/>
               </a:tblGrid>
               <a:tr h="600221">
                 <a:tc>
@@ -17100,6 +15937,11 @@
                         </a:rPr>
                         <a:t>考核方式</a:t>
                       </a:r>
+                      <a:endParaRPr lang="zh-CN" sz="2200" kern="100" dirty="0">
+                        <a:effectLst/>
+                        <a:latin typeface="楷体" panose="02010609060101010101" pitchFamily="49" charset="-122"/>
+                        <a:ea typeface="楷体" panose="02010609060101010101" pitchFamily="49" charset="-122"/>
+                      </a:endParaRPr>
                     </a:p>
                   </a:txBody>
                   <a:tcPr marL="68594" marR="68594" marT="0" marB="0"/>
@@ -17125,6 +15967,11 @@
                         </a:rPr>
                         <a:t>总分</a:t>
                       </a:r>
+                      <a:endParaRPr lang="zh-CN" sz="2200" kern="100" dirty="0">
+                        <a:effectLst/>
+                        <a:latin typeface="楷体" panose="02010609060101010101" pitchFamily="49" charset="-122"/>
+                        <a:ea typeface="楷体" panose="02010609060101010101" pitchFamily="49" charset="-122"/>
+                      </a:endParaRPr>
                     </a:p>
                   </a:txBody>
                   <a:tcPr marL="68594" marR="68594" marT="0" marB="0"/>
@@ -17150,15 +15997,15 @@
                         </a:rPr>
                         <a:t>占总成绩的比例</a:t>
                       </a:r>
+                      <a:endParaRPr lang="zh-CN" sz="2200" kern="100" dirty="0">
+                        <a:effectLst/>
+                        <a:latin typeface="楷体" panose="02010609060101010101" pitchFamily="49" charset="-122"/>
+                        <a:ea typeface="楷体" panose="02010609060101010101" pitchFamily="49" charset="-122"/>
+                      </a:endParaRPr>
                     </a:p>
                   </a:txBody>
                   <a:tcPr marL="68594" marR="68594" marT="0" marB="0"/>
                 </a:tc>
-                <a:extLst>
-                  <a:ext uri="{0D108BD9-81ED-4DB2-BD59-A6C34878D82A}">
-                    <a16:rowId xmlns:a16="http://schemas.microsoft.com/office/drawing/2014/main" val="10000"/>
-                  </a:ext>
-                </a:extLst>
               </a:tr>
               <a:tr h="637736">
                 <a:tc>
@@ -17200,6 +16047,11 @@
                         </a:rPr>
                         <a:t>课堂教学</a:t>
                       </a:r>
+                      <a:endParaRPr lang="zh-CN" sz="2200" kern="100">
+                        <a:effectLst/>
+                        <a:latin typeface="楷体" panose="02010609060101010101" pitchFamily="49" charset="-122"/>
+                        <a:ea typeface="楷体" panose="02010609060101010101" pitchFamily="49" charset="-122"/>
+                      </a:endParaRPr>
                     </a:p>
                   </a:txBody>
                   <a:tcPr marL="68594" marR="68594" marT="0" marB="0"/>
@@ -17235,6 +16087,12 @@
                         </a:rPr>
                         <a:t>分</a:t>
                       </a:r>
+                      <a:endParaRPr lang="zh-CN" sz="2200" kern="100" dirty="0">
+                        <a:effectLst/>
+                        <a:latin typeface="Times New Roman" panose="02020603050405020304" pitchFamily="18" charset="0"/>
+                        <a:ea typeface="楷体" panose="02010609060101010101" pitchFamily="49" charset="-122"/>
+                        <a:cs typeface="Times New Roman" panose="02020603050405020304" pitchFamily="18" charset="0"/>
+                      </a:endParaRPr>
                     </a:p>
                   </a:txBody>
                   <a:tcPr marL="68594" marR="68594" marT="0" marB="0"/>
@@ -17271,11 +16129,6 @@
                   </a:txBody>
                   <a:tcPr marL="68594" marR="68594" marT="0" marB="0"/>
                 </a:tc>
-                <a:extLst>
-                  <a:ext uri="{0D108BD9-81ED-4DB2-BD59-A6C34878D82A}">
-                    <a16:rowId xmlns:a16="http://schemas.microsoft.com/office/drawing/2014/main" val="10001"/>
-                  </a:ext>
-                </a:extLst>
               </a:tr>
               <a:tr h="600221">
                 <a:tc>
@@ -17297,7 +16150,6 @@
                         <a:buSzTx/>
                         <a:buFontTx/>
                         <a:buNone/>
-                        <a:tabLst/>
                         <a:defRPr/>
                       </a:pPr>
                       <a:r>
@@ -17433,11 +16285,6 @@
                   </a:txBody>
                   <a:tcPr marL="68594" marR="68594" marT="0" marB="0"/>
                 </a:tc>
-                <a:extLst>
-                  <a:ext uri="{0D108BD9-81ED-4DB2-BD59-A6C34878D82A}">
-                    <a16:rowId xmlns:a16="http://schemas.microsoft.com/office/drawing/2014/main" val="10002"/>
-                  </a:ext>
-                </a:extLst>
               </a:tr>
             </a:tbl>
           </a:graphicData>
@@ -17470,13 +16317,7 @@
       </p:grpSpPr>
       <p:sp>
         <p:nvSpPr>
-          <p:cNvPr id="2" name="标题 1">
-            <a:extLst>
-              <a:ext uri="{FF2B5EF4-FFF2-40B4-BE49-F238E27FC236}">
-                <a16:creationId xmlns:a16="http://schemas.microsoft.com/office/drawing/2014/main" id="{0764E2C8-B25A-CA62-6AF3-8E1229BB4744}"/>
-              </a:ext>
-            </a:extLst>
-          </p:cNvPr>
+          <p:cNvPr id="2" name="标题 1"/>
           <p:cNvSpPr>
             <a:spLocks noGrp="1"/>
           </p:cNvSpPr>
@@ -17504,7 +16345,6 @@
               <a:spcAft>
                 <a:spcPct val="0"/>
               </a:spcAft>
-              <a:tabLst/>
               <a:defRPr/>
             </a:pPr>
             <a:r>
@@ -17580,13 +16420,7 @@
       </p:sp>
       <p:sp>
         <p:nvSpPr>
-          <p:cNvPr id="3" name="内容占位符 2">
-            <a:extLst>
-              <a:ext uri="{FF2B5EF4-FFF2-40B4-BE49-F238E27FC236}">
-                <a16:creationId xmlns:a16="http://schemas.microsoft.com/office/drawing/2014/main" id="{A75B9AD9-BAF5-AEF0-BD5B-7484DCFE1327}"/>
-              </a:ext>
-            </a:extLst>
-          </p:cNvPr>
+          <p:cNvPr id="3" name="内容占位符 2"/>
           <p:cNvSpPr>
             <a:spLocks noGrp="1"/>
           </p:cNvSpPr>
@@ -17765,25 +16599,24 @@
               </a:rPr>
               <a:t>最近重构性和最大可分性</a:t>
             </a:r>
+            <a:endParaRPr lang="zh-CN" altLang="en-US" sz="2800" dirty="0">
+              <a:latin typeface="Times New Roman" panose="02020603050405020304" pitchFamily="18" charset="0"/>
+              <a:ea typeface="楷体" panose="02010609060101010101" pitchFamily="49" charset="-122"/>
+              <a:cs typeface="Times New Roman" panose="02020603050405020304" pitchFamily="18" charset="0"/>
+            </a:endParaRPr>
           </a:p>
         </p:txBody>
       </p:sp>
       <p:pic>
         <p:nvPicPr>
-          <p:cNvPr id="4" name="Picture 7">
-            <a:extLst>
-              <a:ext uri="{FF2B5EF4-FFF2-40B4-BE49-F238E27FC236}">
-                <a16:creationId xmlns:a16="http://schemas.microsoft.com/office/drawing/2014/main" id="{7FFA5907-AC84-83E3-BF0E-6EDD7569CE09}"/>
-              </a:ext>
-            </a:extLst>
-          </p:cNvPr>
+          <p:cNvPr id="4" name="Picture 7"/>
           <p:cNvPicPr>
             <a:picLocks noChangeAspect="1"/>
           </p:cNvPicPr>
           <p:nvPr/>
         </p:nvPicPr>
         <p:blipFill>
-          <a:blip r:embed="rId2" cstate="print">
+          <a:blip r:embed="rId1" cstate="print">
             <a:extLst>
               <a:ext uri="{28A0092B-C50C-407E-A947-70E740481C1C}">
                 <a14:useLocalDpi xmlns:a14="http://schemas.microsoft.com/office/drawing/2010/main" val="0"/>
@@ -17805,11 +16638,6 @@
         </p:spPr>
       </p:pic>
     </p:spTree>
-    <p:extLst>
-      <p:ext uri="{BB962C8B-B14F-4D97-AF65-F5344CB8AC3E}">
-        <p14:creationId xmlns:p14="http://schemas.microsoft.com/office/powerpoint/2010/main" val="2051868394"/>
-      </p:ext>
-    </p:extLst>
   </p:cSld>
   <p:clrMapOvr>
     <a:masterClrMapping/>
@@ -17836,13 +16664,7 @@
       </p:grpSpPr>
       <p:sp>
         <p:nvSpPr>
-          <p:cNvPr id="25602" name="灯片编号占位符 4">
-            <a:extLst>
-              <a:ext uri="{FF2B5EF4-FFF2-40B4-BE49-F238E27FC236}">
-                <a16:creationId xmlns:a16="http://schemas.microsoft.com/office/drawing/2014/main" id="{17E635D5-556F-4781-A1B5-F34536FBE096}"/>
-              </a:ext>
-            </a:extLst>
-          </p:cNvPr>
+          <p:cNvPr id="25602" name="灯片编号占位符 4"/>
           <p:cNvSpPr>
             <a:spLocks noGrp="1"/>
           </p:cNvSpPr>
@@ -18026,14 +16848,6 @@
               <a:rPr kumimoji="1" lang="en-US" altLang="zh-CN" sz="1400">
                 <a:latin typeface="Times New Roman" panose="02020603050405020304" pitchFamily="18" charset="0"/>
               </a:rPr>
-              <a:pPr>
-                <a:spcBef>
-                  <a:spcPct val="0"/>
-                </a:spcBef>
-                <a:buFontTx/>
-                <a:buNone/>
-              </a:pPr>
-              <a:t>3</a:t>
             </a:fld>
             <a:endParaRPr kumimoji="1" lang="en-US" altLang="zh-CN" sz="1400">
               <a:latin typeface="Times New Roman" panose="02020603050405020304" pitchFamily="18" charset="0"/>
@@ -18043,13 +16857,7 @@
       </p:sp>
       <p:sp>
         <p:nvSpPr>
-          <p:cNvPr id="25604" name="Text Box 6">
-            <a:extLst>
-              <a:ext uri="{FF2B5EF4-FFF2-40B4-BE49-F238E27FC236}">
-                <a16:creationId xmlns:a16="http://schemas.microsoft.com/office/drawing/2014/main" id="{6E9DF6B3-7770-494F-9AB9-19E6CE2A1EE3}"/>
-              </a:ext>
-            </a:extLst>
-          </p:cNvPr>
+          <p:cNvPr id="25604" name="Text Box 6"/>
           <p:cNvSpPr txBox="1">
             <a:spLocks noChangeArrowheads="1"/>
           </p:cNvSpPr>
@@ -18257,18 +17065,17 @@
               </a:rPr>
               <a:t>本课程主要考试范围</a:t>
             </a:r>
+            <a:endParaRPr kumimoji="1" lang="zh-CN" altLang="en-US" b="1" dirty="0">
+              <a:latin typeface="黑体" panose="02010609060101010101" pitchFamily="49" charset="-122"/>
+              <a:ea typeface="黑体" panose="02010609060101010101" pitchFamily="49" charset="-122"/>
+              <a:cs typeface="楷体_GB2312"/>
+            </a:endParaRPr>
           </a:p>
         </p:txBody>
       </p:sp>
       <p:sp>
         <p:nvSpPr>
-          <p:cNvPr id="843783" name="Text Box 7">
-            <a:extLst>
-              <a:ext uri="{FF2B5EF4-FFF2-40B4-BE49-F238E27FC236}">
-                <a16:creationId xmlns:a16="http://schemas.microsoft.com/office/drawing/2014/main" id="{6DA05D3F-8AF1-4369-AAF6-DBCD6A2887F6}"/>
-              </a:ext>
-            </a:extLst>
-          </p:cNvPr>
+          <p:cNvPr id="843783" name="Text Box 7"/>
           <p:cNvSpPr txBox="1">
             <a:spLocks noChangeArrowheads="1"/>
           </p:cNvSpPr>
@@ -18325,70 +17132,70 @@
               <a:spcBef>
                 <a:spcPct val="20000"/>
               </a:spcBef>
-              <a:buFont typeface="Arial" pitchFamily="34" charset="0"/>
+              <a:buFont typeface="Arial" panose="020B0604020202020204" pitchFamily="34" charset="0"/>
               <a:buChar char="•"/>
               <a:defRPr sz="3200">
                 <a:solidFill>
                   <a:schemeClr val="tx1"/>
                 </a:solidFill>
-                <a:latin typeface="Calibri" pitchFamily="34" charset="0"/>
-                <a:ea typeface="宋体" pitchFamily="2" charset="-122"/>
+                <a:latin typeface="Calibri" panose="020F0502020204030204" pitchFamily="34" charset="0"/>
+                <a:ea typeface="宋体" panose="02010600030101010101" pitchFamily="2" charset="-122"/>
               </a:defRPr>
             </a:lvl1pPr>
             <a:lvl2pPr marL="742950" indent="-285750" eaLnBrk="0" hangingPunct="0">
               <a:spcBef>
                 <a:spcPct val="20000"/>
               </a:spcBef>
-              <a:buFont typeface="Arial" pitchFamily="34" charset="0"/>
+              <a:buFont typeface="Arial" panose="020B0604020202020204" pitchFamily="34" charset="0"/>
               <a:buChar char="–"/>
               <a:defRPr sz="2800">
                 <a:solidFill>
                   <a:schemeClr val="tx1"/>
                 </a:solidFill>
-                <a:latin typeface="Calibri" pitchFamily="34" charset="0"/>
-                <a:ea typeface="宋体" pitchFamily="2" charset="-122"/>
+                <a:latin typeface="Calibri" panose="020F0502020204030204" pitchFamily="34" charset="0"/>
+                <a:ea typeface="宋体" panose="02010600030101010101" pitchFamily="2" charset="-122"/>
               </a:defRPr>
             </a:lvl2pPr>
             <a:lvl3pPr marL="1143000" indent="-228600" eaLnBrk="0" hangingPunct="0">
               <a:spcBef>
                 <a:spcPct val="20000"/>
               </a:spcBef>
-              <a:buFont typeface="Arial" pitchFamily="34" charset="0"/>
+              <a:buFont typeface="Arial" panose="020B0604020202020204" pitchFamily="34" charset="0"/>
               <a:buChar char="•"/>
               <a:defRPr sz="2400">
                 <a:solidFill>
                   <a:schemeClr val="tx1"/>
                 </a:solidFill>
-                <a:latin typeface="Calibri" pitchFamily="34" charset="0"/>
-                <a:ea typeface="宋体" pitchFamily="2" charset="-122"/>
+                <a:latin typeface="Calibri" panose="020F0502020204030204" pitchFamily="34" charset="0"/>
+                <a:ea typeface="宋体" panose="02010600030101010101" pitchFamily="2" charset="-122"/>
               </a:defRPr>
             </a:lvl3pPr>
             <a:lvl4pPr marL="1600200" indent="-228600" eaLnBrk="0" hangingPunct="0">
               <a:spcBef>
                 <a:spcPct val="20000"/>
               </a:spcBef>
-              <a:buFont typeface="Arial" pitchFamily="34" charset="0"/>
+              <a:buFont typeface="Arial" panose="020B0604020202020204" pitchFamily="34" charset="0"/>
               <a:buChar char="–"/>
               <a:defRPr sz="2000">
                 <a:solidFill>
                   <a:schemeClr val="tx1"/>
                 </a:solidFill>
-                <a:latin typeface="Calibri" pitchFamily="34" charset="0"/>
-                <a:ea typeface="宋体" pitchFamily="2" charset="-122"/>
+                <a:latin typeface="Calibri" panose="020F0502020204030204" pitchFamily="34" charset="0"/>
+                <a:ea typeface="宋体" panose="02010600030101010101" pitchFamily="2" charset="-122"/>
               </a:defRPr>
             </a:lvl4pPr>
             <a:lvl5pPr marL="2057400" indent="-228600" eaLnBrk="0" hangingPunct="0">
               <a:spcBef>
                 <a:spcPct val="20000"/>
               </a:spcBef>
-              <a:buFont typeface="Arial" pitchFamily="34" charset="0"/>
+              <a:buFont typeface="Arial" panose="020B0604020202020204" pitchFamily="34" charset="0"/>
               <a:buChar char="»"/>
               <a:defRPr sz="2000">
                 <a:solidFill>
                   <a:schemeClr val="tx1"/>
                 </a:solidFill>
-                <a:latin typeface="Calibri" pitchFamily="34" charset="0"/>
-                <a:ea typeface="宋体" pitchFamily="2" charset="-122"/>
+                <a:latin typeface="Calibri" panose="020F0502020204030204" pitchFamily="34" charset="0"/>
+                <a:ea typeface="宋体" panose="02010600030101010101" pitchFamily="2" charset="-122"/>
               </a:defRPr>
             </a:lvl5pPr>
             <a:lvl6pPr marL="2514600" indent="-228600" eaLnBrk="0" fontAlgn="base" hangingPunct="0">
@@ -18398,14 +17205,14 @@
               <a:spcAft>
                 <a:spcPct val="0"/>
               </a:spcAft>
-              <a:buFont typeface="Arial" pitchFamily="34" charset="0"/>
+              <a:buFont typeface="Arial" panose="020B0604020202020204" pitchFamily="34" charset="0"/>
               <a:buChar char="»"/>
               <a:defRPr sz="2000">
                 <a:solidFill>
                   <a:schemeClr val="tx1"/>
                 </a:solidFill>
-                <a:latin typeface="Calibri" pitchFamily="34" charset="0"/>
-                <a:ea typeface="宋体" pitchFamily="2" charset="-122"/>
+                <a:latin typeface="Calibri" panose="020F0502020204030204" pitchFamily="34" charset="0"/>
+                <a:ea typeface="宋体" panose="02010600030101010101" pitchFamily="2" charset="-122"/>
               </a:defRPr>
             </a:lvl6pPr>
             <a:lvl7pPr marL="2971800" indent="-228600" eaLnBrk="0" fontAlgn="base" hangingPunct="0">
@@ -18415,14 +17222,14 @@
               <a:spcAft>
                 <a:spcPct val="0"/>
               </a:spcAft>
-              <a:buFont typeface="Arial" pitchFamily="34" charset="0"/>
+              <a:buFont typeface="Arial" panose="020B0604020202020204" pitchFamily="34" charset="0"/>
               <a:buChar char="»"/>
               <a:defRPr sz="2000">
                 <a:solidFill>
                   <a:schemeClr val="tx1"/>
                 </a:solidFill>
-                <a:latin typeface="Calibri" pitchFamily="34" charset="0"/>
-                <a:ea typeface="宋体" pitchFamily="2" charset="-122"/>
+                <a:latin typeface="Calibri" panose="020F0502020204030204" pitchFamily="34" charset="0"/>
+                <a:ea typeface="宋体" panose="02010600030101010101" pitchFamily="2" charset="-122"/>
               </a:defRPr>
             </a:lvl7pPr>
             <a:lvl8pPr marL="3429000" indent="-228600" eaLnBrk="0" fontAlgn="base" hangingPunct="0">
@@ -18432,14 +17239,14 @@
               <a:spcAft>
                 <a:spcPct val="0"/>
               </a:spcAft>
-              <a:buFont typeface="Arial" pitchFamily="34" charset="0"/>
+              <a:buFont typeface="Arial" panose="020B0604020202020204" pitchFamily="34" charset="0"/>
               <a:buChar char="»"/>
               <a:defRPr sz="2000">
                 <a:solidFill>
                   <a:schemeClr val="tx1"/>
                 </a:solidFill>
-                <a:latin typeface="Calibri" pitchFamily="34" charset="0"/>
-                <a:ea typeface="宋体" pitchFamily="2" charset="-122"/>
+                <a:latin typeface="Calibri" panose="020F0502020204030204" pitchFamily="34" charset="0"/>
+                <a:ea typeface="宋体" panose="02010600030101010101" pitchFamily="2" charset="-122"/>
               </a:defRPr>
             </a:lvl8pPr>
             <a:lvl9pPr marL="3886200" indent="-228600" eaLnBrk="0" fontAlgn="base" hangingPunct="0">
@@ -18449,14 +17256,14 @@
               <a:spcAft>
                 <a:spcPct val="0"/>
               </a:spcAft>
-              <a:buFont typeface="Arial" pitchFamily="34" charset="0"/>
+              <a:buFont typeface="Arial" panose="020B0604020202020204" pitchFamily="34" charset="0"/>
               <a:buChar char="»"/>
               <a:defRPr sz="2000">
                 <a:solidFill>
                   <a:schemeClr val="tx1"/>
                 </a:solidFill>
-                <a:latin typeface="Calibri" pitchFamily="34" charset="0"/>
-                <a:ea typeface="宋体" pitchFamily="2" charset="-122"/>
+                <a:latin typeface="Calibri" panose="020F0502020204030204" pitchFamily="34" charset="0"/>
+                <a:ea typeface="宋体" panose="02010600030101010101" pitchFamily="2" charset="-122"/>
               </a:defRPr>
             </a:lvl9pPr>
           </a:lstStyle>
@@ -18465,7 +17272,7 @@
               <a:spcBef>
                 <a:spcPct val="50000"/>
               </a:spcBef>
-              <a:buFont typeface="Arial" pitchFamily="34" charset="0"/>
+              <a:buFont typeface="Arial" panose="020B0604020202020204" pitchFamily="34" charset="0"/>
               <a:buNone/>
               <a:defRPr/>
             </a:pPr>
@@ -19071,11 +17878,6 @@
         </p:txBody>
       </p:sp>
     </p:spTree>
-    <p:extLst>
-      <p:ext uri="{BB962C8B-B14F-4D97-AF65-F5344CB8AC3E}">
-        <p14:creationId xmlns:p14="http://schemas.microsoft.com/office/powerpoint/2010/main" val="3095990895"/>
-      </p:ext>
-    </p:extLst>
   </p:cSld>
   <p:clrMapOvr>
     <a:masterClrMapping/>
@@ -19089,13 +17891,13 @@
               <p:cTn id="2" dur="indefinite" nodeType="mainSeq">
                 <p:childTnLst>
                   <p:par>
-                    <p:cTn id="3" fill="hold" nodeType="clickPar">
+                    <p:cTn id="3" fill="hold">
                       <p:stCondLst>
                         <p:cond delay="indefinite"/>
                       </p:stCondLst>
                       <p:childTnLst>
                         <p:par>
-                          <p:cTn id="4" fill="hold" nodeType="withGroup">
+                          <p:cTn id="4" fill="hold">
                             <p:stCondLst>
                               <p:cond delay="0"/>
                             </p:stCondLst>
@@ -19180,13 +17982,7 @@
       </p:grpSpPr>
       <p:sp>
         <p:nvSpPr>
-          <p:cNvPr id="18434" name="灯片编号占位符 5">
-            <a:extLst>
-              <a:ext uri="{FF2B5EF4-FFF2-40B4-BE49-F238E27FC236}">
-                <a16:creationId xmlns:a16="http://schemas.microsoft.com/office/drawing/2014/main" id="{CBBD9809-2CC4-42C3-B564-FAC6896E7580}"/>
-              </a:ext>
-            </a:extLst>
-          </p:cNvPr>
+          <p:cNvPr id="18434" name="灯片编号占位符 5"/>
           <p:cNvSpPr>
             <a:spLocks noGrp="1"/>
           </p:cNvSpPr>
@@ -19374,14 +18170,6 @@
               <a:rPr kumimoji="1" lang="en-US" altLang="zh-CN" sz="1400" smtClean="0">
                 <a:latin typeface="Times New Roman" panose="02020603050405020304" pitchFamily="18" charset="0"/>
               </a:rPr>
-              <a:pPr>
-                <a:spcBef>
-                  <a:spcPct val="0"/>
-                </a:spcBef>
-                <a:buFontTx/>
-                <a:buNone/>
-              </a:pPr>
-              <a:t>4</a:t>
             </a:fld>
             <a:endParaRPr kumimoji="1" lang="en-US" altLang="zh-CN" sz="1400">
               <a:latin typeface="Times New Roman" panose="02020603050405020304" pitchFamily="18" charset="0"/>
@@ -19391,13 +18179,7 @@
       </p:sp>
       <p:sp>
         <p:nvSpPr>
-          <p:cNvPr id="887811" name="Rectangle 3">
-            <a:extLst>
-              <a:ext uri="{FF2B5EF4-FFF2-40B4-BE49-F238E27FC236}">
-                <a16:creationId xmlns:a16="http://schemas.microsoft.com/office/drawing/2014/main" id="{E67925BF-BD9D-4849-975B-B00461AA9122}"/>
-              </a:ext>
-            </a:extLst>
-          </p:cNvPr>
+          <p:cNvPr id="887811" name="Rectangle 3"/>
           <p:cNvSpPr>
             <a:spLocks noGrp="1"/>
           </p:cNvSpPr>
@@ -19467,6 +18249,11 @@
               </a:rPr>
               <a:t>“假设用𝑃来评估计算机程序在某任务类𝑇上的性能，若一个程序通过利用经验𝐸在𝑇中任务上获得了性能改善，则我们就说关于𝑇和𝑃，该程序对𝐸进行了学习”</a:t>
             </a:r>
+            <a:endParaRPr lang="zh-CN" altLang="en-US" sz="2400" dirty="0">
+              <a:latin typeface="Times New Roman" panose="02020603050405020304" pitchFamily="18" charset="0"/>
+              <a:ea typeface="楷体" panose="02010609060101010101" pitchFamily="49" charset="-122"/>
+              <a:cs typeface="Times New Roman" panose="02020603050405020304" pitchFamily="18" charset="0"/>
+            </a:endParaRPr>
           </a:p>
           <a:p>
             <a:pPr eaLnBrk="1" hangingPunct="1">
@@ -19848,13 +18635,7 @@
       </p:sp>
       <p:sp>
         <p:nvSpPr>
-          <p:cNvPr id="18436" name="Text Box 4">
-            <a:extLst>
-              <a:ext uri="{FF2B5EF4-FFF2-40B4-BE49-F238E27FC236}">
-                <a16:creationId xmlns:a16="http://schemas.microsoft.com/office/drawing/2014/main" id="{EB81EA09-BA58-4C02-A7E1-E64004DF3351}"/>
-              </a:ext>
-            </a:extLst>
-          </p:cNvPr>
+          <p:cNvPr id="18436" name="Text Box 4"/>
           <p:cNvSpPr txBox="1">
             <a:spLocks noChangeArrowheads="1"/>
           </p:cNvSpPr>
@@ -20078,1603 +18859,15 @@
               </a:rPr>
               <a:t>章：绪论</a:t>
             </a:r>
+            <a:endParaRPr kumimoji="1" lang="zh-CN" altLang="en-US" b="1" dirty="0">
+              <a:latin typeface="黑体" panose="02010609060101010101" pitchFamily="49" charset="-122"/>
+              <a:ea typeface="黑体" panose="02010609060101010101" pitchFamily="49" charset="-122"/>
+              <a:cs typeface="楷体_GB2312"/>
+            </a:endParaRPr>
           </a:p>
         </p:txBody>
       </p:sp>
     </p:spTree>
-    <p:extLst>
-      <p:ext uri="{BB962C8B-B14F-4D97-AF65-F5344CB8AC3E}">
-        <p14:creationId xmlns:p14="http://schemas.microsoft.com/office/powerpoint/2010/main" val="895409878"/>
-      </p:ext>
-    </p:extLst>
-  </p:cSld>
-  <p:clrMapOvr>
-    <a:masterClrMapping/>
-  </p:clrMapOvr>
-  <p:transition/>
-  <p:timing>
-    <p:tnLst>
-      <p:par>
-        <p:cTn id="1" dur="indefinite" restart="never" nodeType="tmRoot">
-          <p:childTnLst>
-            <p:seq concurrent="1" nextAc="seek">
-              <p:cTn id="2" dur="indefinite" nodeType="mainSeq">
-                <p:childTnLst>
-                  <p:par>
-                    <p:cTn id="3" fill="hold" nodeType="clickPar">
-                      <p:stCondLst>
-                        <p:cond delay="indefinite"/>
-                      </p:stCondLst>
-                      <p:childTnLst>
-                        <p:par>
-                          <p:cTn id="4" fill="hold" nodeType="withGroup">
-                            <p:stCondLst>
-                              <p:cond delay="0"/>
-                            </p:stCondLst>
-                            <p:childTnLst>
-                              <p:par>
-                                <p:cTn id="5" presetID="3" presetClass="entr" presetSubtype="10" fill="hold" grpId="0" nodeType="clickEffect">
-                                  <p:stCondLst>
-                                    <p:cond delay="0"/>
-                                  </p:stCondLst>
-                                  <p:childTnLst>
-                                    <p:set>
-                                      <p:cBhvr>
-                                        <p:cTn id="6" dur="1" fill="hold">
-                                          <p:stCondLst>
-                                            <p:cond delay="0"/>
-                                          </p:stCondLst>
-                                        </p:cTn>
-                                        <p:tgtEl>
-                                          <p:spTgt spid="887811">
-                                            <p:txEl>
-                                              <p:pRg st="0" end="0"/>
-                                            </p:txEl>
-                                          </p:spTgt>
-                                        </p:tgtEl>
-                                        <p:attrNameLst>
-                                          <p:attrName>style.visibility</p:attrName>
-                                        </p:attrNameLst>
-                                      </p:cBhvr>
-                                      <p:to>
-                                        <p:strVal val="visible"/>
-                                      </p:to>
-                                    </p:set>
-                                    <p:animEffect transition="in" filter="blinds(horizontal)">
-                                      <p:cBhvr>
-                                        <p:cTn id="7" dur="500"/>
-                                        <p:tgtEl>
-                                          <p:spTgt spid="887811">
-                                            <p:txEl>
-                                              <p:pRg st="0" end="0"/>
-                                            </p:txEl>
-                                          </p:spTgt>
-                                        </p:tgtEl>
-                                      </p:cBhvr>
-                                    </p:animEffect>
-                                  </p:childTnLst>
-                                </p:cTn>
-                              </p:par>
-                            </p:childTnLst>
-                          </p:cTn>
-                        </p:par>
-                      </p:childTnLst>
-                    </p:cTn>
-                  </p:par>
-                  <p:par>
-                    <p:cTn id="8" fill="hold">
-                      <p:stCondLst>
-                        <p:cond delay="indefinite"/>
-                      </p:stCondLst>
-                      <p:childTnLst>
-                        <p:par>
-                          <p:cTn id="9" fill="hold">
-                            <p:stCondLst>
-                              <p:cond delay="0"/>
-                            </p:stCondLst>
-                            <p:childTnLst>
-                              <p:par>
-                                <p:cTn id="10" presetID="3" presetClass="entr" presetSubtype="10" fill="hold" grpId="0" nodeType="clickEffect">
-                                  <p:stCondLst>
-                                    <p:cond delay="0"/>
-                                  </p:stCondLst>
-                                  <p:childTnLst>
-                                    <p:set>
-                                      <p:cBhvr>
-                                        <p:cTn id="11" dur="1" fill="hold">
-                                          <p:stCondLst>
-                                            <p:cond delay="0"/>
-                                          </p:stCondLst>
-                                        </p:cTn>
-                                        <p:tgtEl>
-                                          <p:spTgt spid="887811">
-                                            <p:txEl>
-                                              <p:pRg st="1" end="1"/>
-                                            </p:txEl>
-                                          </p:spTgt>
-                                        </p:tgtEl>
-                                        <p:attrNameLst>
-                                          <p:attrName>style.visibility</p:attrName>
-                                        </p:attrNameLst>
-                                      </p:cBhvr>
-                                      <p:to>
-                                        <p:strVal val="visible"/>
-                                      </p:to>
-                                    </p:set>
-                                    <p:animEffect transition="in" filter="blinds(horizontal)">
-                                      <p:cBhvr>
-                                        <p:cTn id="12" dur="500"/>
-                                        <p:tgtEl>
-                                          <p:spTgt spid="887811">
-                                            <p:txEl>
-                                              <p:pRg st="1" end="1"/>
-                                            </p:txEl>
-                                          </p:spTgt>
-                                        </p:tgtEl>
-                                      </p:cBhvr>
-                                    </p:animEffect>
-                                  </p:childTnLst>
-                                </p:cTn>
-                              </p:par>
-                            </p:childTnLst>
-                          </p:cTn>
-                        </p:par>
-                      </p:childTnLst>
-                    </p:cTn>
-                  </p:par>
-                  <p:par>
-                    <p:cTn id="13" fill="hold">
-                      <p:stCondLst>
-                        <p:cond delay="indefinite"/>
-                      </p:stCondLst>
-                      <p:childTnLst>
-                        <p:par>
-                          <p:cTn id="14" fill="hold">
-                            <p:stCondLst>
-                              <p:cond delay="0"/>
-                            </p:stCondLst>
-                            <p:childTnLst>
-                              <p:par>
-                                <p:cTn id="15" presetID="3" presetClass="entr" presetSubtype="10" fill="hold" grpId="0" nodeType="clickEffect">
-                                  <p:stCondLst>
-                                    <p:cond delay="0"/>
-                                  </p:stCondLst>
-                                  <p:childTnLst>
-                                    <p:set>
-                                      <p:cBhvr>
-                                        <p:cTn id="16" dur="1" fill="hold">
-                                          <p:stCondLst>
-                                            <p:cond delay="0"/>
-                                          </p:stCondLst>
-                                        </p:cTn>
-                                        <p:tgtEl>
-                                          <p:spTgt spid="887811">
-                                            <p:txEl>
-                                              <p:pRg st="2" end="2"/>
-                                            </p:txEl>
-                                          </p:spTgt>
-                                        </p:tgtEl>
-                                        <p:attrNameLst>
-                                          <p:attrName>style.visibility</p:attrName>
-                                        </p:attrNameLst>
-                                      </p:cBhvr>
-                                      <p:to>
-                                        <p:strVal val="visible"/>
-                                      </p:to>
-                                    </p:set>
-                                    <p:animEffect transition="in" filter="blinds(horizontal)">
-                                      <p:cBhvr>
-                                        <p:cTn id="17" dur="500"/>
-                                        <p:tgtEl>
-                                          <p:spTgt spid="887811">
-                                            <p:txEl>
-                                              <p:pRg st="2" end="2"/>
-                                            </p:txEl>
-                                          </p:spTgt>
-                                        </p:tgtEl>
-                                      </p:cBhvr>
-                                    </p:animEffect>
-                                  </p:childTnLst>
-                                </p:cTn>
-                              </p:par>
-                            </p:childTnLst>
-                          </p:cTn>
-                        </p:par>
-                      </p:childTnLst>
-                    </p:cTn>
-                  </p:par>
-                  <p:par>
-                    <p:cTn id="18" fill="hold" nodeType="clickPar">
-                      <p:stCondLst>
-                        <p:cond delay="indefinite"/>
-                      </p:stCondLst>
-                      <p:childTnLst>
-                        <p:par>
-                          <p:cTn id="19" fill="hold" nodeType="withGroup">
-                            <p:stCondLst>
-                              <p:cond delay="0"/>
-                            </p:stCondLst>
-                            <p:childTnLst>
-                              <p:par>
-                                <p:cTn id="20" presetID="3" presetClass="entr" presetSubtype="10" fill="hold" grpId="0" nodeType="clickEffect">
-                                  <p:stCondLst>
-                                    <p:cond delay="0"/>
-                                  </p:stCondLst>
-                                  <p:childTnLst>
-                                    <p:set>
-                                      <p:cBhvr>
-                                        <p:cTn id="21" dur="1" fill="hold">
-                                          <p:stCondLst>
-                                            <p:cond delay="0"/>
-                                          </p:stCondLst>
-                                        </p:cTn>
-                                        <p:tgtEl>
-                                          <p:spTgt spid="887811">
-                                            <p:txEl>
-                                              <p:pRg st="3" end="3"/>
-                                            </p:txEl>
-                                          </p:spTgt>
-                                        </p:tgtEl>
-                                        <p:attrNameLst>
-                                          <p:attrName>style.visibility</p:attrName>
-                                        </p:attrNameLst>
-                                      </p:cBhvr>
-                                      <p:to>
-                                        <p:strVal val="visible"/>
-                                      </p:to>
-                                    </p:set>
-                                    <p:animEffect transition="in" filter="blinds(horizontal)">
-                                      <p:cBhvr>
-                                        <p:cTn id="22" dur="500"/>
-                                        <p:tgtEl>
-                                          <p:spTgt spid="887811">
-                                            <p:txEl>
-                                              <p:pRg st="3" end="3"/>
-                                            </p:txEl>
-                                          </p:spTgt>
-                                        </p:tgtEl>
-                                      </p:cBhvr>
-                                    </p:animEffect>
-                                  </p:childTnLst>
-                                </p:cTn>
-                              </p:par>
-                            </p:childTnLst>
-                          </p:cTn>
-                        </p:par>
-                      </p:childTnLst>
-                    </p:cTn>
-                  </p:par>
-                  <p:par>
-                    <p:cTn id="23" fill="hold">
-                      <p:stCondLst>
-                        <p:cond delay="indefinite"/>
-                      </p:stCondLst>
-                      <p:childTnLst>
-                        <p:par>
-                          <p:cTn id="24" fill="hold">
-                            <p:stCondLst>
-                              <p:cond delay="0"/>
-                            </p:stCondLst>
-                            <p:childTnLst>
-                              <p:par>
-                                <p:cTn id="25" presetID="3" presetClass="entr" presetSubtype="10" fill="hold" grpId="0" nodeType="clickEffect">
-                                  <p:stCondLst>
-                                    <p:cond delay="0"/>
-                                  </p:stCondLst>
-                                  <p:childTnLst>
-                                    <p:set>
-                                      <p:cBhvr>
-                                        <p:cTn id="26" dur="1" fill="hold">
-                                          <p:stCondLst>
-                                            <p:cond delay="0"/>
-                                          </p:stCondLst>
-                                        </p:cTn>
-                                        <p:tgtEl>
-                                          <p:spTgt spid="887811">
-                                            <p:txEl>
-                                              <p:pRg st="4" end="4"/>
-                                            </p:txEl>
-                                          </p:spTgt>
-                                        </p:tgtEl>
-                                        <p:attrNameLst>
-                                          <p:attrName>style.visibility</p:attrName>
-                                        </p:attrNameLst>
-                                      </p:cBhvr>
-                                      <p:to>
-                                        <p:strVal val="visible"/>
-                                      </p:to>
-                                    </p:set>
-                                    <p:animEffect transition="in" filter="blinds(horizontal)">
-                                      <p:cBhvr>
-                                        <p:cTn id="27" dur="500"/>
-                                        <p:tgtEl>
-                                          <p:spTgt spid="887811">
-                                            <p:txEl>
-                                              <p:pRg st="4" end="4"/>
-                                            </p:txEl>
-                                          </p:spTgt>
-                                        </p:tgtEl>
-                                      </p:cBhvr>
-                                    </p:animEffect>
-                                  </p:childTnLst>
-                                </p:cTn>
-                              </p:par>
-                            </p:childTnLst>
-                          </p:cTn>
-                        </p:par>
-                      </p:childTnLst>
-                    </p:cTn>
-                  </p:par>
-                  <p:par>
-                    <p:cTn id="28" fill="hold">
-                      <p:stCondLst>
-                        <p:cond delay="indefinite"/>
-                      </p:stCondLst>
-                      <p:childTnLst>
-                        <p:par>
-                          <p:cTn id="29" fill="hold">
-                            <p:stCondLst>
-                              <p:cond delay="0"/>
-                            </p:stCondLst>
-                            <p:childTnLst>
-                              <p:par>
-                                <p:cTn id="30" presetID="3" presetClass="entr" presetSubtype="10" fill="hold" grpId="0" nodeType="clickEffect">
-                                  <p:stCondLst>
-                                    <p:cond delay="0"/>
-                                  </p:stCondLst>
-                                  <p:childTnLst>
-                                    <p:set>
-                                      <p:cBhvr>
-                                        <p:cTn id="31" dur="1" fill="hold">
-                                          <p:stCondLst>
-                                            <p:cond delay="0"/>
-                                          </p:stCondLst>
-                                        </p:cTn>
-                                        <p:tgtEl>
-                                          <p:spTgt spid="887811">
-                                            <p:txEl>
-                                              <p:pRg st="5" end="5"/>
-                                            </p:txEl>
-                                          </p:spTgt>
-                                        </p:tgtEl>
-                                        <p:attrNameLst>
-                                          <p:attrName>style.visibility</p:attrName>
-                                        </p:attrNameLst>
-                                      </p:cBhvr>
-                                      <p:to>
-                                        <p:strVal val="visible"/>
-                                      </p:to>
-                                    </p:set>
-                                    <p:animEffect transition="in" filter="blinds(horizontal)">
-                                      <p:cBhvr>
-                                        <p:cTn id="32" dur="500"/>
-                                        <p:tgtEl>
-                                          <p:spTgt spid="887811">
-                                            <p:txEl>
-                                              <p:pRg st="5" end="5"/>
-                                            </p:txEl>
-                                          </p:spTgt>
-                                        </p:tgtEl>
-                                      </p:cBhvr>
-                                    </p:animEffect>
-                                  </p:childTnLst>
-                                </p:cTn>
-                              </p:par>
-                            </p:childTnLst>
-                          </p:cTn>
-                        </p:par>
-                      </p:childTnLst>
-                    </p:cTn>
-                  </p:par>
-                  <p:par>
-                    <p:cTn id="33" fill="hold">
-                      <p:stCondLst>
-                        <p:cond delay="indefinite"/>
-                      </p:stCondLst>
-                      <p:childTnLst>
-                        <p:par>
-                          <p:cTn id="34" fill="hold">
-                            <p:stCondLst>
-                              <p:cond delay="0"/>
-                            </p:stCondLst>
-                            <p:childTnLst>
-                              <p:par>
-                                <p:cTn id="35" presetID="3" presetClass="entr" presetSubtype="10" fill="hold" grpId="0" nodeType="clickEffect">
-                                  <p:stCondLst>
-                                    <p:cond delay="0"/>
-                                  </p:stCondLst>
-                                  <p:childTnLst>
-                                    <p:set>
-                                      <p:cBhvr>
-                                        <p:cTn id="36" dur="1" fill="hold">
-                                          <p:stCondLst>
-                                            <p:cond delay="0"/>
-                                          </p:stCondLst>
-                                        </p:cTn>
-                                        <p:tgtEl>
-                                          <p:spTgt spid="887811">
-                                            <p:txEl>
-                                              <p:pRg st="6" end="6"/>
-                                            </p:txEl>
-                                          </p:spTgt>
-                                        </p:tgtEl>
-                                        <p:attrNameLst>
-                                          <p:attrName>style.visibility</p:attrName>
-                                        </p:attrNameLst>
-                                      </p:cBhvr>
-                                      <p:to>
-                                        <p:strVal val="visible"/>
-                                      </p:to>
-                                    </p:set>
-                                    <p:animEffect transition="in" filter="blinds(horizontal)">
-                                      <p:cBhvr>
-                                        <p:cTn id="37" dur="500"/>
-                                        <p:tgtEl>
-                                          <p:spTgt spid="887811">
-                                            <p:txEl>
-                                              <p:pRg st="6" end="6"/>
-                                            </p:txEl>
-                                          </p:spTgt>
-                                        </p:tgtEl>
-                                      </p:cBhvr>
-                                    </p:animEffect>
-                                  </p:childTnLst>
-                                </p:cTn>
-                              </p:par>
-                            </p:childTnLst>
-                          </p:cTn>
-                        </p:par>
-                      </p:childTnLst>
-                    </p:cTn>
-                  </p:par>
-                  <p:par>
-                    <p:cTn id="38" fill="hold">
-                      <p:stCondLst>
-                        <p:cond delay="indefinite"/>
-                      </p:stCondLst>
-                      <p:childTnLst>
-                        <p:par>
-                          <p:cTn id="39" fill="hold">
-                            <p:stCondLst>
-                              <p:cond delay="0"/>
-                            </p:stCondLst>
-                            <p:childTnLst>
-                              <p:par>
-                                <p:cTn id="40" presetID="3" presetClass="entr" presetSubtype="10" fill="hold" grpId="0" nodeType="clickEffect">
-                                  <p:stCondLst>
-                                    <p:cond delay="0"/>
-                                  </p:stCondLst>
-                                  <p:childTnLst>
-                                    <p:set>
-                                      <p:cBhvr>
-                                        <p:cTn id="41" dur="1" fill="hold">
-                                          <p:stCondLst>
-                                            <p:cond delay="0"/>
-                                          </p:stCondLst>
-                                        </p:cTn>
-                                        <p:tgtEl>
-                                          <p:spTgt spid="887811">
-                                            <p:txEl>
-                                              <p:pRg st="7" end="7"/>
-                                            </p:txEl>
-                                          </p:spTgt>
-                                        </p:tgtEl>
-                                        <p:attrNameLst>
-                                          <p:attrName>style.visibility</p:attrName>
-                                        </p:attrNameLst>
-                                      </p:cBhvr>
-                                      <p:to>
-                                        <p:strVal val="visible"/>
-                                      </p:to>
-                                    </p:set>
-                                    <p:animEffect transition="in" filter="blinds(horizontal)">
-                                      <p:cBhvr>
-                                        <p:cTn id="42" dur="500"/>
-                                        <p:tgtEl>
-                                          <p:spTgt spid="887811">
-                                            <p:txEl>
-                                              <p:pRg st="7" end="7"/>
-                                            </p:txEl>
-                                          </p:spTgt>
-                                        </p:tgtEl>
-                                      </p:cBhvr>
-                                    </p:animEffect>
-                                  </p:childTnLst>
-                                </p:cTn>
-                              </p:par>
-                            </p:childTnLst>
-                          </p:cTn>
-                        </p:par>
-                      </p:childTnLst>
-                    </p:cTn>
-                  </p:par>
-                  <p:par>
-                    <p:cTn id="43" fill="hold">
-                      <p:stCondLst>
-                        <p:cond delay="indefinite"/>
-                      </p:stCondLst>
-                      <p:childTnLst>
-                        <p:par>
-                          <p:cTn id="44" fill="hold">
-                            <p:stCondLst>
-                              <p:cond delay="0"/>
-                            </p:stCondLst>
-                            <p:childTnLst>
-                              <p:par>
-                                <p:cTn id="45" presetID="3" presetClass="entr" presetSubtype="10" fill="hold" grpId="0" nodeType="clickEffect">
-                                  <p:stCondLst>
-                                    <p:cond delay="0"/>
-                                  </p:stCondLst>
-                                  <p:childTnLst>
-                                    <p:set>
-                                      <p:cBhvr>
-                                        <p:cTn id="46" dur="1" fill="hold">
-                                          <p:stCondLst>
-                                            <p:cond delay="0"/>
-                                          </p:stCondLst>
-                                        </p:cTn>
-                                        <p:tgtEl>
-                                          <p:spTgt spid="887811">
-                                            <p:txEl>
-                                              <p:pRg st="8" end="8"/>
-                                            </p:txEl>
-                                          </p:spTgt>
-                                        </p:tgtEl>
-                                        <p:attrNameLst>
-                                          <p:attrName>style.visibility</p:attrName>
-                                        </p:attrNameLst>
-                                      </p:cBhvr>
-                                      <p:to>
-                                        <p:strVal val="visible"/>
-                                      </p:to>
-                                    </p:set>
-                                    <p:animEffect transition="in" filter="blinds(horizontal)">
-                                      <p:cBhvr>
-                                        <p:cTn id="47" dur="500"/>
-                                        <p:tgtEl>
-                                          <p:spTgt spid="887811">
-                                            <p:txEl>
-                                              <p:pRg st="8" end="8"/>
-                                            </p:txEl>
-                                          </p:spTgt>
-                                        </p:tgtEl>
-                                      </p:cBhvr>
-                                    </p:animEffect>
-                                  </p:childTnLst>
-                                </p:cTn>
-                              </p:par>
-                            </p:childTnLst>
-                          </p:cTn>
-                        </p:par>
-                      </p:childTnLst>
-                    </p:cTn>
-                  </p:par>
-                  <p:par>
-                    <p:cTn id="48" fill="hold" nodeType="clickPar">
-                      <p:stCondLst>
-                        <p:cond delay="indefinite"/>
-                      </p:stCondLst>
-                      <p:childTnLst>
-                        <p:par>
-                          <p:cTn id="49" fill="hold" nodeType="withGroup">
-                            <p:stCondLst>
-                              <p:cond delay="0"/>
-                            </p:stCondLst>
-                            <p:childTnLst>
-                              <p:par>
-                                <p:cTn id="50" presetID="3" presetClass="entr" presetSubtype="10" fill="hold" grpId="0" nodeType="clickEffect">
-                                  <p:stCondLst>
-                                    <p:cond delay="0"/>
-                                  </p:stCondLst>
-                                  <p:childTnLst>
-                                    <p:set>
-                                      <p:cBhvr>
-                                        <p:cTn id="51" dur="1" fill="hold">
-                                          <p:stCondLst>
-                                            <p:cond delay="0"/>
-                                          </p:stCondLst>
-                                        </p:cTn>
-                                        <p:tgtEl>
-                                          <p:spTgt spid="887811">
-                                            <p:txEl>
-                                              <p:pRg st="14" end="14"/>
-                                            </p:txEl>
-                                          </p:spTgt>
-                                        </p:tgtEl>
-                                        <p:attrNameLst>
-                                          <p:attrName>style.visibility</p:attrName>
-                                        </p:attrNameLst>
-                                      </p:cBhvr>
-                                      <p:to>
-                                        <p:strVal val="visible"/>
-                                      </p:to>
-                                    </p:set>
-                                    <p:animEffect transition="in" filter="blinds(horizontal)">
-                                      <p:cBhvr>
-                                        <p:cTn id="52" dur="500"/>
-                                        <p:tgtEl>
-                                          <p:spTgt spid="887811">
-                                            <p:txEl>
-                                              <p:pRg st="14" end="14"/>
-                                            </p:txEl>
-                                          </p:spTgt>
-                                        </p:tgtEl>
-                                      </p:cBhvr>
-                                    </p:animEffect>
-                                  </p:childTnLst>
-                                </p:cTn>
-                              </p:par>
-                            </p:childTnLst>
-                          </p:cTn>
-                        </p:par>
-                      </p:childTnLst>
-                    </p:cTn>
-                  </p:par>
-                </p:childTnLst>
-              </p:cTn>
-              <p:prevCondLst>
-                <p:cond evt="onPrev" delay="0">
-                  <p:tgtEl>
-                    <p:sldTgt/>
-                  </p:tgtEl>
-                </p:cond>
-              </p:prevCondLst>
-              <p:nextCondLst>
-                <p:cond evt="onNext" delay="0">
-                  <p:tgtEl>
-                    <p:sldTgt/>
-                  </p:tgtEl>
-                </p:cond>
-              </p:nextCondLst>
-            </p:seq>
-          </p:childTnLst>
-        </p:cTn>
-      </p:par>
-    </p:tnLst>
-    <p:bldLst>
-      <p:bldP spid="887811" grpId="0" build="p"/>
-    </p:bldLst>
-  </p:timing>
-</p:sld>
-</file>
-
-<file path=ppt/slides/slide5.xml><?xml version="1.0" encoding="utf-8"?>
-<p:sld xmlns:a="http://schemas.openxmlformats.org/drawingml/2006/main" xmlns:r="http://schemas.openxmlformats.org/officeDocument/2006/relationships" xmlns:p="http://schemas.openxmlformats.org/presentationml/2006/main">
-  <p:cSld>
-    <p:spTree>
-      <p:nvGrpSpPr>
-        <p:cNvPr id="1" name=""/>
-        <p:cNvGrpSpPr/>
-        <p:nvPr/>
-      </p:nvGrpSpPr>
-      <p:grpSpPr>
-        <a:xfrm>
-          <a:off x="0" y="0"/>
-          <a:ext cx="0" cy="0"/>
-          <a:chOff x="0" y="0"/>
-          <a:chExt cx="0" cy="0"/>
-        </a:xfrm>
-      </p:grpSpPr>
-      <p:sp>
-        <p:nvSpPr>
-          <p:cNvPr id="18434" name="灯片编号占位符 5">
-            <a:extLst>
-              <a:ext uri="{FF2B5EF4-FFF2-40B4-BE49-F238E27FC236}">
-                <a16:creationId xmlns:a16="http://schemas.microsoft.com/office/drawing/2014/main" id="{CBBD9809-2CC4-42C3-B564-FAC6896E7580}"/>
-              </a:ext>
-            </a:extLst>
-          </p:cNvPr>
-          <p:cNvSpPr>
-            <a:spLocks noGrp="1"/>
-          </p:cNvSpPr>
-          <p:nvPr>
-            <p:ph type="sldNum" sz="quarter" idx="12"/>
-          </p:nvPr>
-        </p:nvSpPr>
-        <p:spPr bwMode="auto">
-          <a:noFill/>
-          <a:extLst>
-            <a:ext uri="{909E8E84-426E-40DD-AFC4-6F175D3DCCD1}">
-              <a14:hiddenFill xmlns:a14="http://schemas.microsoft.com/office/drawing/2010/main">
-                <a:solidFill>
-                  <a:srgbClr val="FFFFFF"/>
-                </a:solidFill>
-              </a14:hiddenFill>
-            </a:ext>
-            <a:ext uri="{91240B29-F687-4F45-9708-019B960494DF}">
-              <a14:hiddenLine xmlns:a14="http://schemas.microsoft.com/office/drawing/2010/main" w="9525">
-                <a:solidFill>
-                  <a:srgbClr val="000000"/>
-                </a:solidFill>
-                <a:miter lim="800000"/>
-                <a:headEnd/>
-                <a:tailEnd/>
-              </a14:hiddenLine>
-            </a:ext>
-          </a:extLst>
-        </p:spPr>
-        <p:txBody>
-          <a:bodyPr/>
-          <a:lstStyle>
-            <a:lvl1pPr>
-              <a:spcBef>
-                <a:spcPct val="20000"/>
-              </a:spcBef>
-              <a:buFont typeface="Arial" panose="020B0604020202020204" pitchFamily="34" charset="0"/>
-              <a:buChar char="•"/>
-              <a:defRPr sz="3200">
-                <a:solidFill>
-                  <a:schemeClr val="tx1"/>
-                </a:solidFill>
-                <a:latin typeface="Calibri" panose="020F0502020204030204" pitchFamily="34" charset="0"/>
-                <a:ea typeface="宋体" panose="02010600030101010101" pitchFamily="2" charset="-122"/>
-              </a:defRPr>
-            </a:lvl1pPr>
-            <a:lvl2pPr marL="742950" indent="-285750">
-              <a:spcBef>
-                <a:spcPct val="20000"/>
-              </a:spcBef>
-              <a:buFont typeface="Arial" panose="020B0604020202020204" pitchFamily="34" charset="0"/>
-              <a:buChar char="–"/>
-              <a:defRPr sz="2800">
-                <a:solidFill>
-                  <a:schemeClr val="tx1"/>
-                </a:solidFill>
-                <a:latin typeface="Calibri" panose="020F0502020204030204" pitchFamily="34" charset="0"/>
-                <a:ea typeface="宋体" panose="02010600030101010101" pitchFamily="2" charset="-122"/>
-              </a:defRPr>
-            </a:lvl2pPr>
-            <a:lvl3pPr marL="1143000" indent="-228600">
-              <a:spcBef>
-                <a:spcPct val="20000"/>
-              </a:spcBef>
-              <a:buFont typeface="Arial" panose="020B0604020202020204" pitchFamily="34" charset="0"/>
-              <a:buChar char="•"/>
-              <a:defRPr sz="2400">
-                <a:solidFill>
-                  <a:schemeClr val="tx1"/>
-                </a:solidFill>
-                <a:latin typeface="Calibri" panose="020F0502020204030204" pitchFamily="34" charset="0"/>
-                <a:ea typeface="宋体" panose="02010600030101010101" pitchFamily="2" charset="-122"/>
-              </a:defRPr>
-            </a:lvl3pPr>
-            <a:lvl4pPr marL="1600200" indent="-228600">
-              <a:spcBef>
-                <a:spcPct val="20000"/>
-              </a:spcBef>
-              <a:buFont typeface="Arial" panose="020B0604020202020204" pitchFamily="34" charset="0"/>
-              <a:buChar char="–"/>
-              <a:defRPr sz="2000">
-                <a:solidFill>
-                  <a:schemeClr val="tx1"/>
-                </a:solidFill>
-                <a:latin typeface="Calibri" panose="020F0502020204030204" pitchFamily="34" charset="0"/>
-                <a:ea typeface="宋体" panose="02010600030101010101" pitchFamily="2" charset="-122"/>
-              </a:defRPr>
-            </a:lvl4pPr>
-            <a:lvl5pPr marL="2057400" indent="-228600">
-              <a:spcBef>
-                <a:spcPct val="20000"/>
-              </a:spcBef>
-              <a:buFont typeface="Arial" panose="020B0604020202020204" pitchFamily="34" charset="0"/>
-              <a:buChar char="»"/>
-              <a:defRPr sz="2000">
-                <a:solidFill>
-                  <a:schemeClr val="tx1"/>
-                </a:solidFill>
-                <a:latin typeface="Calibri" panose="020F0502020204030204" pitchFamily="34" charset="0"/>
-                <a:ea typeface="宋体" panose="02010600030101010101" pitchFamily="2" charset="-122"/>
-              </a:defRPr>
-            </a:lvl5pPr>
-            <a:lvl6pPr marL="2514600" indent="-228600" eaLnBrk="0" fontAlgn="base" hangingPunct="0">
-              <a:spcBef>
-                <a:spcPct val="20000"/>
-              </a:spcBef>
-              <a:spcAft>
-                <a:spcPct val="0"/>
-              </a:spcAft>
-              <a:buFont typeface="Arial" panose="020B0604020202020204" pitchFamily="34" charset="0"/>
-              <a:buChar char="»"/>
-              <a:defRPr sz="2000">
-                <a:solidFill>
-                  <a:schemeClr val="tx1"/>
-                </a:solidFill>
-                <a:latin typeface="Calibri" panose="020F0502020204030204" pitchFamily="34" charset="0"/>
-                <a:ea typeface="宋体" panose="02010600030101010101" pitchFamily="2" charset="-122"/>
-              </a:defRPr>
-            </a:lvl6pPr>
-            <a:lvl7pPr marL="2971800" indent="-228600" eaLnBrk="0" fontAlgn="base" hangingPunct="0">
-              <a:spcBef>
-                <a:spcPct val="20000"/>
-              </a:spcBef>
-              <a:spcAft>
-                <a:spcPct val="0"/>
-              </a:spcAft>
-              <a:buFont typeface="Arial" panose="020B0604020202020204" pitchFamily="34" charset="0"/>
-              <a:buChar char="»"/>
-              <a:defRPr sz="2000">
-                <a:solidFill>
-                  <a:schemeClr val="tx1"/>
-                </a:solidFill>
-                <a:latin typeface="Calibri" panose="020F0502020204030204" pitchFamily="34" charset="0"/>
-                <a:ea typeface="宋体" panose="02010600030101010101" pitchFamily="2" charset="-122"/>
-              </a:defRPr>
-            </a:lvl7pPr>
-            <a:lvl8pPr marL="3429000" indent="-228600" eaLnBrk="0" fontAlgn="base" hangingPunct="0">
-              <a:spcBef>
-                <a:spcPct val="20000"/>
-              </a:spcBef>
-              <a:spcAft>
-                <a:spcPct val="0"/>
-              </a:spcAft>
-              <a:buFont typeface="Arial" panose="020B0604020202020204" pitchFamily="34" charset="0"/>
-              <a:buChar char="»"/>
-              <a:defRPr sz="2000">
-                <a:solidFill>
-                  <a:schemeClr val="tx1"/>
-                </a:solidFill>
-                <a:latin typeface="Calibri" panose="020F0502020204030204" pitchFamily="34" charset="0"/>
-                <a:ea typeface="宋体" panose="02010600030101010101" pitchFamily="2" charset="-122"/>
-              </a:defRPr>
-            </a:lvl8pPr>
-            <a:lvl9pPr marL="3886200" indent="-228600" eaLnBrk="0" fontAlgn="base" hangingPunct="0">
-              <a:spcBef>
-                <a:spcPct val="20000"/>
-              </a:spcBef>
-              <a:spcAft>
-                <a:spcPct val="0"/>
-              </a:spcAft>
-              <a:buFont typeface="Arial" panose="020B0604020202020204" pitchFamily="34" charset="0"/>
-              <a:buChar char="»"/>
-              <a:defRPr sz="2000">
-                <a:solidFill>
-                  <a:schemeClr val="tx1"/>
-                </a:solidFill>
-                <a:latin typeface="Calibri" panose="020F0502020204030204" pitchFamily="34" charset="0"/>
-                <a:ea typeface="宋体" panose="02010600030101010101" pitchFamily="2" charset="-122"/>
-              </a:defRPr>
-            </a:lvl9pPr>
-          </a:lstStyle>
-          <a:p>
-            <a:pPr>
-              <a:spcBef>
-                <a:spcPct val="0"/>
-              </a:spcBef>
-              <a:buFontTx/>
-              <a:buNone/>
-            </a:pPr>
-            <a:fld id="{F12A9DEA-C3F6-4401-A5BF-3745117890AB}" type="slidenum">
-              <a:rPr kumimoji="1" lang="en-US" altLang="zh-CN" sz="1400" smtClean="0">
-                <a:latin typeface="Times New Roman" panose="02020603050405020304" pitchFamily="18" charset="0"/>
-              </a:rPr>
-              <a:pPr>
-                <a:spcBef>
-                  <a:spcPct val="0"/>
-                </a:spcBef>
-                <a:buFontTx/>
-                <a:buNone/>
-              </a:pPr>
-              <a:t>5</a:t>
-            </a:fld>
-            <a:endParaRPr kumimoji="1" lang="en-US" altLang="zh-CN" sz="1400">
-              <a:latin typeface="Times New Roman" panose="02020603050405020304" pitchFamily="18" charset="0"/>
-            </a:endParaRPr>
-          </a:p>
-        </p:txBody>
-      </p:sp>
-      <p:sp>
-        <p:nvSpPr>
-          <p:cNvPr id="887811" name="Rectangle 3">
-            <a:extLst>
-              <a:ext uri="{FF2B5EF4-FFF2-40B4-BE49-F238E27FC236}">
-                <a16:creationId xmlns:a16="http://schemas.microsoft.com/office/drawing/2014/main" id="{E67925BF-BD9D-4849-975B-B00461AA9122}"/>
-              </a:ext>
-            </a:extLst>
-          </p:cNvPr>
-          <p:cNvSpPr>
-            <a:spLocks noGrp="1"/>
-          </p:cNvSpPr>
-          <p:nvPr>
-            <p:ph type="body" idx="1"/>
-          </p:nvPr>
-        </p:nvSpPr>
-        <p:spPr>
-          <a:xfrm>
-            <a:off x="755576" y="1340768"/>
-            <a:ext cx="7416800" cy="1231900"/>
-          </a:xfrm>
-        </p:spPr>
-        <p:txBody>
-          <a:bodyPr/>
-          <a:lstStyle/>
-          <a:p>
-            <a:pPr eaLnBrk="1" hangingPunct="1">
-              <a:lnSpc>
-                <a:spcPct val="120000"/>
-              </a:lnSpc>
-              <a:buClr>
-                <a:srgbClr val="FF0000"/>
-              </a:buClr>
-              <a:buFont typeface="Wingdings" panose="05000000000000000000" pitchFamily="2" charset="2"/>
-              <a:buChar char="p"/>
-              <a:defRPr/>
-            </a:pPr>
-            <a:r>
-              <a:rPr lang="zh-CN" altLang="en-US" sz="2800" dirty="0">
-                <a:latin typeface="Times New Roman" panose="02020603050405020304" pitchFamily="18" charset="0"/>
-                <a:ea typeface="楷体" panose="02010609060101010101" pitchFamily="49" charset="-122"/>
-                <a:cs typeface="Times New Roman" panose="02020603050405020304" pitchFamily="18" charset="0"/>
-              </a:rPr>
-              <a:t> </a:t>
-            </a:r>
-            <a:r>
-              <a:rPr lang="zh-CN" altLang="en-US" sz="2800" b="1" dirty="0">
-                <a:latin typeface="Times New Roman" panose="02020603050405020304" pitchFamily="18" charset="0"/>
-                <a:ea typeface="楷体" panose="02010609060101010101" pitchFamily="49" charset="-122"/>
-                <a:cs typeface="Times New Roman" panose="02020603050405020304" pitchFamily="18" charset="0"/>
-              </a:rPr>
-              <a:t>过拟合和欠拟合以及相应的解决方案</a:t>
-            </a:r>
-            <a:endParaRPr lang="en-US" altLang="zh-CN" sz="2800" b="1" dirty="0">
-              <a:latin typeface="Times New Roman" panose="02020603050405020304" pitchFamily="18" charset="0"/>
-              <a:ea typeface="楷体" panose="02010609060101010101" pitchFamily="49" charset="-122"/>
-              <a:cs typeface="Times New Roman" panose="02020603050405020304" pitchFamily="18" charset="0"/>
-            </a:endParaRPr>
-          </a:p>
-          <a:p>
-            <a:pPr eaLnBrk="1" hangingPunct="1">
-              <a:lnSpc>
-                <a:spcPct val="120000"/>
-              </a:lnSpc>
-              <a:buClr>
-                <a:srgbClr val="FF0000"/>
-              </a:buClr>
-              <a:buFont typeface="Wingdings" panose="05000000000000000000" pitchFamily="2" charset="2"/>
-              <a:buChar char="p"/>
-              <a:defRPr/>
-            </a:pPr>
-            <a:r>
-              <a:rPr lang="zh-CN" altLang="en-US" sz="2800" b="1" dirty="0">
-                <a:latin typeface="Times New Roman" panose="02020603050405020304" pitchFamily="18" charset="0"/>
-                <a:ea typeface="楷体" panose="02010609060101010101" pitchFamily="49" charset="-122"/>
-                <a:cs typeface="Times New Roman" panose="02020603050405020304" pitchFamily="18" charset="0"/>
-              </a:rPr>
-              <a:t> 评估方法：泛化性能</a:t>
-            </a:r>
-            <a:endParaRPr lang="en-US" altLang="zh-CN" sz="2800" b="1" dirty="0">
-              <a:latin typeface="Times New Roman" panose="02020603050405020304" pitchFamily="18" charset="0"/>
-              <a:ea typeface="楷体" panose="02010609060101010101" pitchFamily="49" charset="-122"/>
-              <a:cs typeface="Times New Roman" panose="02020603050405020304" pitchFamily="18" charset="0"/>
-            </a:endParaRPr>
-          </a:p>
-          <a:p>
-            <a:pPr marL="0" indent="0" eaLnBrk="1" hangingPunct="1">
-              <a:lnSpc>
-                <a:spcPct val="120000"/>
-              </a:lnSpc>
-              <a:buClr>
-                <a:srgbClr val="FF0000"/>
-              </a:buClr>
-              <a:buNone/>
-              <a:defRPr/>
-            </a:pPr>
-            <a:r>
-              <a:rPr lang="zh-CN" altLang="en-US" sz="2400" dirty="0">
-                <a:latin typeface="Times New Roman" panose="02020603050405020304" pitchFamily="18" charset="0"/>
-                <a:ea typeface="楷体" panose="02010609060101010101" pitchFamily="49" charset="-122"/>
-                <a:cs typeface="Times New Roman" panose="02020603050405020304" pitchFamily="18" charset="0"/>
-              </a:rPr>
-              <a:t>（</a:t>
-            </a:r>
-            <a:r>
-              <a:rPr lang="en-US" altLang="zh-CN" sz="2400" dirty="0">
-                <a:latin typeface="Times New Roman" panose="02020603050405020304" pitchFamily="18" charset="0"/>
-                <a:ea typeface="楷体" panose="02010609060101010101" pitchFamily="49" charset="-122"/>
-                <a:cs typeface="Times New Roman" panose="02020603050405020304" pitchFamily="18" charset="0"/>
-              </a:rPr>
-              <a:t>1</a:t>
-            </a:r>
-            <a:r>
-              <a:rPr lang="zh-CN" altLang="en-US" sz="2400" dirty="0">
-                <a:latin typeface="Times New Roman" panose="02020603050405020304" pitchFamily="18" charset="0"/>
-                <a:ea typeface="楷体" panose="02010609060101010101" pitchFamily="49" charset="-122"/>
-                <a:cs typeface="Times New Roman" panose="02020603050405020304" pitchFamily="18" charset="0"/>
-              </a:rPr>
-              <a:t>）留出法（</a:t>
-            </a:r>
-            <a:r>
-              <a:rPr lang="en-US" altLang="zh-CN" sz="2400" dirty="0">
-                <a:latin typeface="Times New Roman" panose="02020603050405020304" pitchFamily="18" charset="0"/>
-                <a:ea typeface="楷体" panose="02010609060101010101" pitchFamily="49" charset="-122"/>
-                <a:cs typeface="Times New Roman" panose="02020603050405020304" pitchFamily="18" charset="0"/>
-              </a:rPr>
-              <a:t>2</a:t>
-            </a:r>
-            <a:r>
-              <a:rPr lang="zh-CN" altLang="en-US" sz="2400" dirty="0">
-                <a:latin typeface="Times New Roman" panose="02020603050405020304" pitchFamily="18" charset="0"/>
-                <a:ea typeface="楷体" panose="02010609060101010101" pitchFamily="49" charset="-122"/>
-                <a:cs typeface="Times New Roman" panose="02020603050405020304" pitchFamily="18" charset="0"/>
-              </a:rPr>
-              <a:t>）交叉验证法</a:t>
-            </a:r>
-            <a:endParaRPr lang="en-US" altLang="zh-CN" sz="2400" dirty="0">
-              <a:latin typeface="Times New Roman" panose="02020603050405020304" pitchFamily="18" charset="0"/>
-              <a:ea typeface="楷体" panose="02010609060101010101" pitchFamily="49" charset="-122"/>
-              <a:cs typeface="Times New Roman" panose="02020603050405020304" pitchFamily="18" charset="0"/>
-            </a:endParaRPr>
-          </a:p>
-          <a:p>
-            <a:pPr marL="0" indent="0" eaLnBrk="1" hangingPunct="1">
-              <a:lnSpc>
-                <a:spcPct val="120000"/>
-              </a:lnSpc>
-              <a:buClr>
-                <a:srgbClr val="FF0000"/>
-              </a:buClr>
-              <a:buNone/>
-              <a:defRPr/>
-            </a:pPr>
-            <a:r>
-              <a:rPr lang="zh-CN" altLang="en-US" sz="2400" dirty="0">
-                <a:latin typeface="Times New Roman" panose="02020603050405020304" pitchFamily="18" charset="0"/>
-                <a:ea typeface="楷体" panose="02010609060101010101" pitchFamily="49" charset="-122"/>
-                <a:cs typeface="Times New Roman" panose="02020603050405020304" pitchFamily="18" charset="0"/>
-              </a:rPr>
-              <a:t>（</a:t>
-            </a:r>
-            <a:r>
-              <a:rPr lang="en-US" altLang="zh-CN" sz="2400" dirty="0">
-                <a:latin typeface="Times New Roman" panose="02020603050405020304" pitchFamily="18" charset="0"/>
-                <a:ea typeface="楷体" panose="02010609060101010101" pitchFamily="49" charset="-122"/>
-                <a:cs typeface="Times New Roman" panose="02020603050405020304" pitchFamily="18" charset="0"/>
-              </a:rPr>
-              <a:t>3</a:t>
-            </a:r>
-            <a:r>
-              <a:rPr lang="zh-CN" altLang="en-US" sz="2400" dirty="0">
-                <a:latin typeface="Times New Roman" panose="02020603050405020304" pitchFamily="18" charset="0"/>
-                <a:ea typeface="楷体" panose="02010609060101010101" pitchFamily="49" charset="-122"/>
-                <a:cs typeface="Times New Roman" panose="02020603050405020304" pitchFamily="18" charset="0"/>
-              </a:rPr>
-              <a:t>）自助法（</a:t>
-            </a:r>
-            <a:r>
-              <a:rPr lang="en-US" altLang="zh-CN" sz="2400" dirty="0">
-                <a:latin typeface="Times New Roman" panose="02020603050405020304" pitchFamily="18" charset="0"/>
-                <a:ea typeface="楷体" panose="02010609060101010101" pitchFamily="49" charset="-122"/>
-                <a:cs typeface="Times New Roman" panose="02020603050405020304" pitchFamily="18" charset="0"/>
-              </a:rPr>
-              <a:t>4</a:t>
-            </a:r>
-            <a:r>
-              <a:rPr lang="zh-CN" altLang="en-US" sz="2400" dirty="0">
-                <a:latin typeface="Times New Roman" panose="02020603050405020304" pitchFamily="18" charset="0"/>
-                <a:ea typeface="楷体" panose="02010609060101010101" pitchFamily="49" charset="-122"/>
-                <a:cs typeface="Times New Roman" panose="02020603050405020304" pitchFamily="18" charset="0"/>
-              </a:rPr>
-              <a:t>）调参与最终模型</a:t>
-            </a:r>
-            <a:endParaRPr lang="en-US" altLang="zh-CN" sz="2400" dirty="0">
-              <a:latin typeface="Times New Roman" panose="02020603050405020304" pitchFamily="18" charset="0"/>
-              <a:ea typeface="楷体" panose="02010609060101010101" pitchFamily="49" charset="-122"/>
-              <a:cs typeface="Times New Roman" panose="02020603050405020304" pitchFamily="18" charset="0"/>
-            </a:endParaRPr>
-          </a:p>
-          <a:p>
-            <a:pPr eaLnBrk="1" hangingPunct="1">
-              <a:lnSpc>
-                <a:spcPct val="120000"/>
-              </a:lnSpc>
-              <a:buClr>
-                <a:srgbClr val="FF0000"/>
-              </a:buClr>
-              <a:buFont typeface="Wingdings" panose="05000000000000000000" pitchFamily="2" charset="2"/>
-              <a:buChar char="p"/>
-              <a:defRPr/>
-            </a:pPr>
-            <a:r>
-              <a:rPr lang="zh-CN" altLang="en-US" sz="2800" b="1" dirty="0">
-                <a:latin typeface="Times New Roman" panose="02020603050405020304" pitchFamily="18" charset="0"/>
-                <a:ea typeface="楷体" panose="02010609060101010101" pitchFamily="49" charset="-122"/>
-                <a:cs typeface="Times New Roman" panose="02020603050405020304" pitchFamily="18" charset="0"/>
-              </a:rPr>
-              <a:t>性能度量</a:t>
-            </a:r>
-            <a:endParaRPr lang="en-US" altLang="zh-CN" sz="2800" b="1" dirty="0">
-              <a:latin typeface="Times New Roman" panose="02020603050405020304" pitchFamily="18" charset="0"/>
-              <a:ea typeface="楷体" panose="02010609060101010101" pitchFamily="49" charset="-122"/>
-              <a:cs typeface="Times New Roman" panose="02020603050405020304" pitchFamily="18" charset="0"/>
-            </a:endParaRPr>
-          </a:p>
-          <a:p>
-            <a:pPr eaLnBrk="1" hangingPunct="1">
-              <a:lnSpc>
-                <a:spcPct val="120000"/>
-              </a:lnSpc>
-              <a:buClr>
-                <a:srgbClr val="FF0000"/>
-              </a:buClr>
-              <a:buFont typeface="Wingdings" panose="05000000000000000000" pitchFamily="2" charset="2"/>
-              <a:buChar char="p"/>
-              <a:defRPr/>
-            </a:pPr>
-            <a:r>
-              <a:rPr lang="zh-CN" altLang="en-US" sz="2800" b="1" dirty="0">
-                <a:latin typeface="Times New Roman" panose="02020603050405020304" pitchFamily="18" charset="0"/>
-                <a:ea typeface="楷体" panose="02010609060101010101" pitchFamily="49" charset="-122"/>
-                <a:cs typeface="Times New Roman" panose="02020603050405020304" pitchFamily="18" charset="0"/>
-              </a:rPr>
-              <a:t>比较检验</a:t>
-            </a:r>
-            <a:endParaRPr lang="en-US" altLang="zh-CN" sz="2800" b="1" dirty="0">
-              <a:latin typeface="Times New Roman" panose="02020603050405020304" pitchFamily="18" charset="0"/>
-              <a:ea typeface="楷体" panose="02010609060101010101" pitchFamily="49" charset="-122"/>
-              <a:cs typeface="Times New Roman" panose="02020603050405020304" pitchFamily="18" charset="0"/>
-            </a:endParaRPr>
-          </a:p>
-          <a:p>
-            <a:pPr eaLnBrk="1" hangingPunct="1">
-              <a:lnSpc>
-                <a:spcPct val="120000"/>
-              </a:lnSpc>
-              <a:buClr>
-                <a:srgbClr val="FF0000"/>
-              </a:buClr>
-              <a:buFont typeface="Wingdings" panose="05000000000000000000" pitchFamily="2" charset="2"/>
-              <a:buChar char="p"/>
-              <a:defRPr/>
-            </a:pPr>
-            <a:r>
-              <a:rPr lang="zh-CN" altLang="en-US" sz="2800" b="1" dirty="0">
-                <a:latin typeface="Times New Roman" panose="02020603050405020304" pitchFamily="18" charset="0"/>
-                <a:ea typeface="楷体" panose="02010609060101010101" pitchFamily="49" charset="-122"/>
-                <a:cs typeface="Times New Roman" panose="02020603050405020304" pitchFamily="18" charset="0"/>
-              </a:rPr>
-              <a:t>偏差与方差：偏差、方差和噪声解释；偏差</a:t>
-            </a:r>
-            <a:r>
-              <a:rPr lang="en-US" altLang="zh-CN" sz="2800" b="1" dirty="0">
-                <a:latin typeface="Times New Roman" panose="02020603050405020304" pitchFamily="18" charset="0"/>
-                <a:ea typeface="楷体" panose="02010609060101010101" pitchFamily="49" charset="-122"/>
-                <a:cs typeface="Times New Roman" panose="02020603050405020304" pitchFamily="18" charset="0"/>
-              </a:rPr>
-              <a:t>-</a:t>
-            </a:r>
-            <a:r>
-              <a:rPr lang="zh-CN" altLang="en-US" sz="2800" b="1" dirty="0">
-                <a:latin typeface="Times New Roman" panose="02020603050405020304" pitchFamily="18" charset="0"/>
-                <a:ea typeface="楷体" panose="02010609060101010101" pitchFamily="49" charset="-122"/>
-                <a:cs typeface="Times New Roman" panose="02020603050405020304" pitchFamily="18" charset="0"/>
-              </a:rPr>
-              <a:t>方差窘境（与泛化误差的关系）</a:t>
-            </a:r>
-            <a:endParaRPr lang="en-US" altLang="zh-CN" sz="2800" b="1" dirty="0">
-              <a:latin typeface="Times New Roman" panose="02020603050405020304" pitchFamily="18" charset="0"/>
-              <a:ea typeface="楷体" panose="02010609060101010101" pitchFamily="49" charset="-122"/>
-              <a:cs typeface="Times New Roman" panose="02020603050405020304" pitchFamily="18" charset="0"/>
-            </a:endParaRPr>
-          </a:p>
-          <a:p>
-            <a:pPr marL="0" indent="0" eaLnBrk="1" hangingPunct="1">
-              <a:lnSpc>
-                <a:spcPct val="120000"/>
-              </a:lnSpc>
-              <a:buClr>
-                <a:srgbClr val="FF0000"/>
-              </a:buClr>
-              <a:buNone/>
-              <a:defRPr/>
-            </a:pPr>
-            <a:endParaRPr lang="en-US" altLang="zh-CN" sz="2800" dirty="0">
-              <a:latin typeface="Times New Roman" panose="02020603050405020304" pitchFamily="18" charset="0"/>
-              <a:ea typeface="楷体" panose="02010609060101010101" pitchFamily="49" charset="-122"/>
-              <a:cs typeface="Times New Roman" panose="02020603050405020304" pitchFamily="18" charset="0"/>
-            </a:endParaRPr>
-          </a:p>
-          <a:p>
-            <a:pPr eaLnBrk="1" hangingPunct="1">
-              <a:lnSpc>
-                <a:spcPct val="120000"/>
-              </a:lnSpc>
-              <a:buClr>
-                <a:srgbClr val="FF0000"/>
-              </a:buClr>
-              <a:buFont typeface="Wingdings" panose="05000000000000000000" pitchFamily="2" charset="2"/>
-              <a:buChar char="p"/>
-              <a:defRPr/>
-            </a:pPr>
-            <a:endParaRPr lang="en-US" altLang="zh-CN" sz="2800" dirty="0">
-              <a:latin typeface="Times New Roman" panose="02020603050405020304" pitchFamily="18" charset="0"/>
-              <a:ea typeface="楷体" panose="02010609060101010101" pitchFamily="49" charset="-122"/>
-              <a:cs typeface="Times New Roman" panose="02020603050405020304" pitchFamily="18" charset="0"/>
-            </a:endParaRPr>
-          </a:p>
-          <a:p>
-            <a:pPr eaLnBrk="1" hangingPunct="1">
-              <a:lnSpc>
-                <a:spcPct val="120000"/>
-              </a:lnSpc>
-              <a:buClr>
-                <a:srgbClr val="FF0000"/>
-              </a:buClr>
-              <a:buFont typeface="Wingdings" panose="05000000000000000000" pitchFamily="2" charset="2"/>
-              <a:buChar char="p"/>
-              <a:defRPr/>
-            </a:pPr>
-            <a:endParaRPr lang="en-US" altLang="zh-CN" sz="2800" dirty="0">
-              <a:latin typeface="Times New Roman" panose="02020603050405020304" pitchFamily="18" charset="0"/>
-              <a:ea typeface="楷体" panose="02010609060101010101" pitchFamily="49" charset="-122"/>
-              <a:cs typeface="Times New Roman" panose="02020603050405020304" pitchFamily="18" charset="0"/>
-            </a:endParaRPr>
-          </a:p>
-          <a:p>
-            <a:pPr marL="0" indent="0" eaLnBrk="1" hangingPunct="1">
-              <a:lnSpc>
-                <a:spcPct val="120000"/>
-              </a:lnSpc>
-              <a:buClr>
-                <a:srgbClr val="FF0000"/>
-              </a:buClr>
-              <a:buNone/>
-              <a:defRPr/>
-            </a:pPr>
-            <a:endParaRPr lang="en-US" altLang="zh-CN" sz="2800" dirty="0">
-              <a:latin typeface="Times New Roman" panose="02020603050405020304" pitchFamily="18" charset="0"/>
-              <a:ea typeface="楷体" panose="02010609060101010101" pitchFamily="49" charset="-122"/>
-              <a:cs typeface="Times New Roman" panose="02020603050405020304" pitchFamily="18" charset="0"/>
-            </a:endParaRPr>
-          </a:p>
-          <a:p>
-            <a:pPr eaLnBrk="1" hangingPunct="1">
-              <a:lnSpc>
-                <a:spcPct val="120000"/>
-              </a:lnSpc>
-              <a:buClr>
-                <a:srgbClr val="FF0000"/>
-              </a:buClr>
-              <a:buFont typeface="Wingdings" panose="05000000000000000000" pitchFamily="2" charset="2"/>
-              <a:buChar char="p"/>
-              <a:defRPr/>
-            </a:pPr>
-            <a:endParaRPr lang="en-US" altLang="zh-CN" sz="2800" dirty="0">
-              <a:latin typeface="Times New Roman" panose="02020603050405020304" pitchFamily="18" charset="0"/>
-              <a:ea typeface="楷体" panose="02010609060101010101" pitchFamily="49" charset="-122"/>
-              <a:cs typeface="Times New Roman" panose="02020603050405020304" pitchFamily="18" charset="0"/>
-            </a:endParaRPr>
-          </a:p>
-          <a:p>
-            <a:pPr marL="0" indent="0" eaLnBrk="1" hangingPunct="1">
-              <a:lnSpc>
-                <a:spcPct val="120000"/>
-              </a:lnSpc>
-              <a:buClr>
-                <a:srgbClr val="FF0000"/>
-              </a:buClr>
-              <a:buFont typeface="Arial" panose="020B0604020202020204" pitchFamily="34" charset="0"/>
-              <a:buNone/>
-              <a:defRPr/>
-            </a:pPr>
-            <a:r>
-              <a:rPr kumimoji="1" lang="en-US" altLang="zh-CN" sz="2800" dirty="0">
-                <a:latin typeface="Times New Roman" panose="02020603050405020304" pitchFamily="18" charset="0"/>
-                <a:ea typeface="楷体" panose="02010609060101010101" pitchFamily="49" charset="-122"/>
-                <a:cs typeface="Times New Roman" panose="02020603050405020304" pitchFamily="18" charset="0"/>
-              </a:rPr>
-              <a:t>      </a:t>
-            </a:r>
-            <a:endParaRPr kumimoji="1" lang="en-US" altLang="zh-CN" sz="2400" dirty="0">
-              <a:latin typeface="楷体" panose="02010609060101010101" pitchFamily="49" charset="-122"/>
-              <a:ea typeface="楷体" panose="02010609060101010101" pitchFamily="49" charset="-122"/>
-            </a:endParaRPr>
-          </a:p>
-        </p:txBody>
-      </p:sp>
-      <p:sp>
-        <p:nvSpPr>
-          <p:cNvPr id="18436" name="Text Box 4">
-            <a:extLst>
-              <a:ext uri="{FF2B5EF4-FFF2-40B4-BE49-F238E27FC236}">
-                <a16:creationId xmlns:a16="http://schemas.microsoft.com/office/drawing/2014/main" id="{EB81EA09-BA58-4C02-A7E1-E64004DF3351}"/>
-              </a:ext>
-            </a:extLst>
-          </p:cNvPr>
-          <p:cNvSpPr txBox="1">
-            <a:spLocks noChangeArrowheads="1"/>
-          </p:cNvSpPr>
-          <p:nvPr/>
-        </p:nvSpPr>
-        <p:spPr bwMode="auto">
-          <a:xfrm>
-            <a:off x="684213" y="620713"/>
-            <a:ext cx="8134350" cy="579437"/>
-          </a:xfrm>
-          <a:prstGeom prst="rect">
-            <a:avLst/>
-          </a:prstGeom>
-          <a:noFill/>
-          <a:ln>
-            <a:noFill/>
-          </a:ln>
-          <a:effectLst/>
-          <a:extLst>
-            <a:ext uri="{909E8E84-426E-40DD-AFC4-6F175D3DCCD1}">
-              <a14:hiddenFill xmlns:a14="http://schemas.microsoft.com/office/drawing/2010/main">
-                <a:solidFill>
-                  <a:schemeClr val="hlink"/>
-                </a:solidFill>
-              </a14:hiddenFill>
-            </a:ext>
-            <a:ext uri="{91240B29-F687-4F45-9708-019B960494DF}">
-              <a14:hiddenLine xmlns:a14="http://schemas.microsoft.com/office/drawing/2010/main" w="9525">
-                <a:solidFill>
-                  <a:schemeClr val="tx1"/>
-                </a:solidFill>
-                <a:miter lim="800000"/>
-                <a:headEnd/>
-                <a:tailEnd/>
-              </a14:hiddenLine>
-            </a:ext>
-            <a:ext uri="{AF507438-7753-43E0-B8FC-AC1667EBCBE1}">
-              <a14:hiddenEffects xmlns:a14="http://schemas.microsoft.com/office/drawing/2010/main">
-                <a:effectLst>
-                  <a:outerShdw dist="35921" dir="2700000" algn="ctr" rotWithShape="0">
-                    <a:schemeClr val="bg2"/>
-                  </a:outerShdw>
-                </a:effectLst>
-              </a14:hiddenEffects>
-            </a:ext>
-          </a:extLst>
-        </p:spPr>
-        <p:txBody>
-          <a:bodyPr>
-            <a:spAutoFit/>
-          </a:bodyPr>
-          <a:lstStyle>
-            <a:lvl1pPr marL="457200" indent="-457200">
-              <a:spcBef>
-                <a:spcPct val="20000"/>
-              </a:spcBef>
-              <a:buFont typeface="Arial" panose="020B0604020202020204" pitchFamily="34" charset="0"/>
-              <a:buChar char="•"/>
-              <a:defRPr sz="3200">
-                <a:solidFill>
-                  <a:schemeClr val="tx1"/>
-                </a:solidFill>
-                <a:latin typeface="Calibri" panose="020F0502020204030204" pitchFamily="34" charset="0"/>
-                <a:ea typeface="宋体" panose="02010600030101010101" pitchFamily="2" charset="-122"/>
-              </a:defRPr>
-            </a:lvl1pPr>
-            <a:lvl2pPr marL="742950" indent="-285750">
-              <a:spcBef>
-                <a:spcPct val="20000"/>
-              </a:spcBef>
-              <a:buFont typeface="Arial" panose="020B0604020202020204" pitchFamily="34" charset="0"/>
-              <a:buChar char="–"/>
-              <a:defRPr sz="2800">
-                <a:solidFill>
-                  <a:schemeClr val="tx1"/>
-                </a:solidFill>
-                <a:latin typeface="Calibri" panose="020F0502020204030204" pitchFamily="34" charset="0"/>
-                <a:ea typeface="宋体" panose="02010600030101010101" pitchFamily="2" charset="-122"/>
-              </a:defRPr>
-            </a:lvl2pPr>
-            <a:lvl3pPr marL="1143000" indent="-228600">
-              <a:spcBef>
-                <a:spcPct val="20000"/>
-              </a:spcBef>
-              <a:buFont typeface="Arial" panose="020B0604020202020204" pitchFamily="34" charset="0"/>
-              <a:buChar char="•"/>
-              <a:defRPr sz="2400">
-                <a:solidFill>
-                  <a:schemeClr val="tx1"/>
-                </a:solidFill>
-                <a:latin typeface="Calibri" panose="020F0502020204030204" pitchFamily="34" charset="0"/>
-                <a:ea typeface="宋体" panose="02010600030101010101" pitchFamily="2" charset="-122"/>
-              </a:defRPr>
-            </a:lvl3pPr>
-            <a:lvl4pPr marL="1600200" indent="-228600">
-              <a:spcBef>
-                <a:spcPct val="20000"/>
-              </a:spcBef>
-              <a:buFont typeface="Arial" panose="020B0604020202020204" pitchFamily="34" charset="0"/>
-              <a:buChar char="–"/>
-              <a:defRPr sz="2000">
-                <a:solidFill>
-                  <a:schemeClr val="tx1"/>
-                </a:solidFill>
-                <a:latin typeface="Calibri" panose="020F0502020204030204" pitchFamily="34" charset="0"/>
-                <a:ea typeface="宋体" panose="02010600030101010101" pitchFamily="2" charset="-122"/>
-              </a:defRPr>
-            </a:lvl4pPr>
-            <a:lvl5pPr marL="2057400" indent="-228600">
-              <a:spcBef>
-                <a:spcPct val="20000"/>
-              </a:spcBef>
-              <a:buFont typeface="Arial" panose="020B0604020202020204" pitchFamily="34" charset="0"/>
-              <a:buChar char="»"/>
-              <a:defRPr sz="2000">
-                <a:solidFill>
-                  <a:schemeClr val="tx1"/>
-                </a:solidFill>
-                <a:latin typeface="Calibri" panose="020F0502020204030204" pitchFamily="34" charset="0"/>
-                <a:ea typeface="宋体" panose="02010600030101010101" pitchFamily="2" charset="-122"/>
-              </a:defRPr>
-            </a:lvl5pPr>
-            <a:lvl6pPr marL="2514600" indent="-228600" eaLnBrk="0" fontAlgn="base" hangingPunct="0">
-              <a:spcBef>
-                <a:spcPct val="20000"/>
-              </a:spcBef>
-              <a:spcAft>
-                <a:spcPct val="0"/>
-              </a:spcAft>
-              <a:buFont typeface="Arial" panose="020B0604020202020204" pitchFamily="34" charset="0"/>
-              <a:buChar char="»"/>
-              <a:defRPr sz="2000">
-                <a:solidFill>
-                  <a:schemeClr val="tx1"/>
-                </a:solidFill>
-                <a:latin typeface="Calibri" panose="020F0502020204030204" pitchFamily="34" charset="0"/>
-                <a:ea typeface="宋体" panose="02010600030101010101" pitchFamily="2" charset="-122"/>
-              </a:defRPr>
-            </a:lvl6pPr>
-            <a:lvl7pPr marL="2971800" indent="-228600" eaLnBrk="0" fontAlgn="base" hangingPunct="0">
-              <a:spcBef>
-                <a:spcPct val="20000"/>
-              </a:spcBef>
-              <a:spcAft>
-                <a:spcPct val="0"/>
-              </a:spcAft>
-              <a:buFont typeface="Arial" panose="020B0604020202020204" pitchFamily="34" charset="0"/>
-              <a:buChar char="»"/>
-              <a:defRPr sz="2000">
-                <a:solidFill>
-                  <a:schemeClr val="tx1"/>
-                </a:solidFill>
-                <a:latin typeface="Calibri" panose="020F0502020204030204" pitchFamily="34" charset="0"/>
-                <a:ea typeface="宋体" panose="02010600030101010101" pitchFamily="2" charset="-122"/>
-              </a:defRPr>
-            </a:lvl7pPr>
-            <a:lvl8pPr marL="3429000" indent="-228600" eaLnBrk="0" fontAlgn="base" hangingPunct="0">
-              <a:spcBef>
-                <a:spcPct val="20000"/>
-              </a:spcBef>
-              <a:spcAft>
-                <a:spcPct val="0"/>
-              </a:spcAft>
-              <a:buFont typeface="Arial" panose="020B0604020202020204" pitchFamily="34" charset="0"/>
-              <a:buChar char="»"/>
-              <a:defRPr sz="2000">
-                <a:solidFill>
-                  <a:schemeClr val="tx1"/>
-                </a:solidFill>
-                <a:latin typeface="Calibri" panose="020F0502020204030204" pitchFamily="34" charset="0"/>
-                <a:ea typeface="宋体" panose="02010600030101010101" pitchFamily="2" charset="-122"/>
-              </a:defRPr>
-            </a:lvl8pPr>
-            <a:lvl9pPr marL="3886200" indent="-228600" eaLnBrk="0" fontAlgn="base" hangingPunct="0">
-              <a:spcBef>
-                <a:spcPct val="20000"/>
-              </a:spcBef>
-              <a:spcAft>
-                <a:spcPct val="0"/>
-              </a:spcAft>
-              <a:buFont typeface="Arial" panose="020B0604020202020204" pitchFamily="34" charset="0"/>
-              <a:buChar char="»"/>
-              <a:defRPr sz="2000">
-                <a:solidFill>
-                  <a:schemeClr val="tx1"/>
-                </a:solidFill>
-                <a:latin typeface="Calibri" panose="020F0502020204030204" pitchFamily="34" charset="0"/>
-                <a:ea typeface="宋体" panose="02010600030101010101" pitchFamily="2" charset="-122"/>
-              </a:defRPr>
-            </a:lvl9pPr>
-          </a:lstStyle>
-          <a:p>
-            <a:pPr eaLnBrk="1" hangingPunct="1">
-              <a:spcBef>
-                <a:spcPct val="50000"/>
-              </a:spcBef>
-              <a:buFontTx/>
-              <a:buNone/>
-            </a:pPr>
-            <a:r>
-              <a:rPr kumimoji="1" lang="zh-CN" altLang="en-US" b="1" dirty="0">
-                <a:latin typeface="黑体" panose="02010609060101010101" pitchFamily="49" charset="-122"/>
-                <a:ea typeface="黑体" panose="02010609060101010101" pitchFamily="49" charset="-122"/>
-                <a:cs typeface="楷体_GB2312"/>
-              </a:rPr>
-              <a:t>第</a:t>
-            </a:r>
-            <a:r>
-              <a:rPr kumimoji="1" lang="en-US" altLang="zh-CN" b="1" dirty="0">
-                <a:latin typeface="黑体" panose="02010609060101010101" pitchFamily="49" charset="-122"/>
-                <a:ea typeface="黑体" panose="02010609060101010101" pitchFamily="49" charset="-122"/>
-                <a:cs typeface="楷体_GB2312"/>
-              </a:rPr>
-              <a:t>2</a:t>
-            </a:r>
-            <a:r>
-              <a:rPr kumimoji="1" lang="zh-CN" altLang="en-US" b="1" dirty="0">
-                <a:latin typeface="黑体" panose="02010609060101010101" pitchFamily="49" charset="-122"/>
-                <a:ea typeface="黑体" panose="02010609060101010101" pitchFamily="49" charset="-122"/>
-                <a:cs typeface="楷体_GB2312"/>
-              </a:rPr>
-              <a:t>章：模型评估与选择</a:t>
-            </a:r>
-          </a:p>
-        </p:txBody>
-      </p:sp>
-      <p:pic>
-        <p:nvPicPr>
-          <p:cNvPr id="5" name="Picture 2"/>
-          <p:cNvPicPr>
-            <a:picLocks noChangeAspect="1" noChangeArrowheads="1"/>
-          </p:cNvPicPr>
-          <p:nvPr/>
-        </p:nvPicPr>
-        <p:blipFill>
-          <a:blip r:embed="rId2">
-            <a:extLst>
-              <a:ext uri="{28A0092B-C50C-407E-A947-70E740481C1C}">
-                <a14:useLocalDpi xmlns:a14="http://schemas.microsoft.com/office/drawing/2010/main" val="0"/>
-              </a:ext>
-            </a:extLst>
-          </a:blip>
-          <a:srcRect/>
-          <a:stretch>
-            <a:fillRect/>
-          </a:stretch>
-        </p:blipFill>
-        <p:spPr bwMode="auto">
-          <a:xfrm>
-            <a:off x="5292080" y="2132856"/>
-            <a:ext cx="3616849" cy="2664296"/>
-          </a:xfrm>
-          <a:prstGeom prst="rect">
-            <a:avLst/>
-          </a:prstGeom>
-          <a:noFill/>
-          <a:ln>
-            <a:noFill/>
-          </a:ln>
-          <a:effectLst/>
-          <a:extLst>
-            <a:ext uri="{909E8E84-426E-40DD-AFC4-6F175D3DCCD1}">
-              <a14:hiddenFill xmlns:a14="http://schemas.microsoft.com/office/drawing/2010/main">
-                <a:solidFill>
-                  <a:schemeClr val="accent1"/>
-                </a:solidFill>
-              </a14:hiddenFill>
-            </a:ext>
-            <a:ext uri="{91240B29-F687-4F45-9708-019B960494DF}">
-              <a14:hiddenLine xmlns:a14="http://schemas.microsoft.com/office/drawing/2010/main" w="9525">
-                <a:solidFill>
-                  <a:schemeClr val="tx1"/>
-                </a:solidFill>
-                <a:miter lim="800000"/>
-                <a:headEnd/>
-                <a:tailEnd/>
-              </a14:hiddenLine>
-            </a:ext>
-            <a:ext uri="{AF507438-7753-43E0-B8FC-AC1667EBCBE1}">
-              <a14:hiddenEffects xmlns:a14="http://schemas.microsoft.com/office/drawing/2010/main">
-                <a:effectLst>
-                  <a:outerShdw dist="35921" dir="2700000" algn="ctr" rotWithShape="0">
-                    <a:schemeClr val="bg2"/>
-                  </a:outerShdw>
-                </a:effectLst>
-              </a14:hiddenEffects>
-            </a:ext>
-          </a:extLst>
-        </p:spPr>
-      </p:pic>
-    </p:spTree>
-    <p:extLst>
-      <p:ext uri="{BB962C8B-B14F-4D97-AF65-F5344CB8AC3E}">
-        <p14:creationId xmlns:p14="http://schemas.microsoft.com/office/powerpoint/2010/main" val="3305225567"/>
-      </p:ext>
-    </p:extLst>
   </p:cSld>
   <p:clrMapOvr>
     <a:masterClrMapping/>
@@ -22116,13 +19309,1575 @@
                     </p:cTn>
                   </p:par>
                   <p:par>
-                    <p:cTn id="38" fill="hold" nodeType="clickPar">
+                    <p:cTn id="38" fill="hold">
                       <p:stCondLst>
                         <p:cond delay="indefinite"/>
                       </p:stCondLst>
                       <p:childTnLst>
                         <p:par>
-                          <p:cTn id="39" fill="hold" nodeType="withGroup">
+                          <p:cTn id="39" fill="hold">
+                            <p:stCondLst>
+                              <p:cond delay="0"/>
+                            </p:stCondLst>
+                            <p:childTnLst>
+                              <p:par>
+                                <p:cTn id="40" presetID="3" presetClass="entr" presetSubtype="10" fill="hold" grpId="0" nodeType="clickEffect">
+                                  <p:stCondLst>
+                                    <p:cond delay="0"/>
+                                  </p:stCondLst>
+                                  <p:childTnLst>
+                                    <p:set>
+                                      <p:cBhvr>
+                                        <p:cTn id="41" dur="1" fill="hold">
+                                          <p:stCondLst>
+                                            <p:cond delay="0"/>
+                                          </p:stCondLst>
+                                        </p:cTn>
+                                        <p:tgtEl>
+                                          <p:spTgt spid="887811">
+                                            <p:txEl>
+                                              <p:pRg st="7" end="7"/>
+                                            </p:txEl>
+                                          </p:spTgt>
+                                        </p:tgtEl>
+                                        <p:attrNameLst>
+                                          <p:attrName>style.visibility</p:attrName>
+                                        </p:attrNameLst>
+                                      </p:cBhvr>
+                                      <p:to>
+                                        <p:strVal val="visible"/>
+                                      </p:to>
+                                    </p:set>
+                                    <p:animEffect transition="in" filter="blinds(horizontal)">
+                                      <p:cBhvr>
+                                        <p:cTn id="42" dur="500"/>
+                                        <p:tgtEl>
+                                          <p:spTgt spid="887811">
+                                            <p:txEl>
+                                              <p:pRg st="7" end="7"/>
+                                            </p:txEl>
+                                          </p:spTgt>
+                                        </p:tgtEl>
+                                      </p:cBhvr>
+                                    </p:animEffect>
+                                  </p:childTnLst>
+                                </p:cTn>
+                              </p:par>
+                            </p:childTnLst>
+                          </p:cTn>
+                        </p:par>
+                      </p:childTnLst>
+                    </p:cTn>
+                  </p:par>
+                  <p:par>
+                    <p:cTn id="43" fill="hold">
+                      <p:stCondLst>
+                        <p:cond delay="indefinite"/>
+                      </p:stCondLst>
+                      <p:childTnLst>
+                        <p:par>
+                          <p:cTn id="44" fill="hold">
+                            <p:stCondLst>
+                              <p:cond delay="0"/>
+                            </p:stCondLst>
+                            <p:childTnLst>
+                              <p:par>
+                                <p:cTn id="45" presetID="3" presetClass="entr" presetSubtype="10" fill="hold" grpId="0" nodeType="clickEffect">
+                                  <p:stCondLst>
+                                    <p:cond delay="0"/>
+                                  </p:stCondLst>
+                                  <p:childTnLst>
+                                    <p:set>
+                                      <p:cBhvr>
+                                        <p:cTn id="46" dur="1" fill="hold">
+                                          <p:stCondLst>
+                                            <p:cond delay="0"/>
+                                          </p:stCondLst>
+                                        </p:cTn>
+                                        <p:tgtEl>
+                                          <p:spTgt spid="887811">
+                                            <p:txEl>
+                                              <p:pRg st="8" end="8"/>
+                                            </p:txEl>
+                                          </p:spTgt>
+                                        </p:tgtEl>
+                                        <p:attrNameLst>
+                                          <p:attrName>style.visibility</p:attrName>
+                                        </p:attrNameLst>
+                                      </p:cBhvr>
+                                      <p:to>
+                                        <p:strVal val="visible"/>
+                                      </p:to>
+                                    </p:set>
+                                    <p:animEffect transition="in" filter="blinds(horizontal)">
+                                      <p:cBhvr>
+                                        <p:cTn id="47" dur="500"/>
+                                        <p:tgtEl>
+                                          <p:spTgt spid="887811">
+                                            <p:txEl>
+                                              <p:pRg st="8" end="8"/>
+                                            </p:txEl>
+                                          </p:spTgt>
+                                        </p:tgtEl>
+                                      </p:cBhvr>
+                                    </p:animEffect>
+                                  </p:childTnLst>
+                                </p:cTn>
+                              </p:par>
+                            </p:childTnLst>
+                          </p:cTn>
+                        </p:par>
+                      </p:childTnLst>
+                    </p:cTn>
+                  </p:par>
+                  <p:par>
+                    <p:cTn id="48" fill="hold">
+                      <p:stCondLst>
+                        <p:cond delay="indefinite"/>
+                      </p:stCondLst>
+                      <p:childTnLst>
+                        <p:par>
+                          <p:cTn id="49" fill="hold">
+                            <p:stCondLst>
+                              <p:cond delay="0"/>
+                            </p:stCondLst>
+                            <p:childTnLst>
+                              <p:par>
+                                <p:cTn id="50" presetID="3" presetClass="entr" presetSubtype="10" fill="hold" grpId="0" nodeType="clickEffect">
+                                  <p:stCondLst>
+                                    <p:cond delay="0"/>
+                                  </p:stCondLst>
+                                  <p:childTnLst>
+                                    <p:set>
+                                      <p:cBhvr>
+                                        <p:cTn id="51" dur="1" fill="hold">
+                                          <p:stCondLst>
+                                            <p:cond delay="0"/>
+                                          </p:stCondLst>
+                                        </p:cTn>
+                                        <p:tgtEl>
+                                          <p:spTgt spid="887811">
+                                            <p:txEl>
+                                              <p:pRg st="14" end="14"/>
+                                            </p:txEl>
+                                          </p:spTgt>
+                                        </p:tgtEl>
+                                        <p:attrNameLst>
+                                          <p:attrName>style.visibility</p:attrName>
+                                        </p:attrNameLst>
+                                      </p:cBhvr>
+                                      <p:to>
+                                        <p:strVal val="visible"/>
+                                      </p:to>
+                                    </p:set>
+                                    <p:animEffect transition="in" filter="blinds(horizontal)">
+                                      <p:cBhvr>
+                                        <p:cTn id="52" dur="500"/>
+                                        <p:tgtEl>
+                                          <p:spTgt spid="887811">
+                                            <p:txEl>
+                                              <p:pRg st="14" end="14"/>
+                                            </p:txEl>
+                                          </p:spTgt>
+                                        </p:tgtEl>
+                                      </p:cBhvr>
+                                    </p:animEffect>
+                                  </p:childTnLst>
+                                </p:cTn>
+                              </p:par>
+                            </p:childTnLst>
+                          </p:cTn>
+                        </p:par>
+                      </p:childTnLst>
+                    </p:cTn>
+                  </p:par>
+                </p:childTnLst>
+              </p:cTn>
+              <p:prevCondLst>
+                <p:cond evt="onPrev" delay="0">
+                  <p:tgtEl>
+                    <p:sldTgt/>
+                  </p:tgtEl>
+                </p:cond>
+              </p:prevCondLst>
+              <p:nextCondLst>
+                <p:cond evt="onNext" delay="0">
+                  <p:tgtEl>
+                    <p:sldTgt/>
+                  </p:tgtEl>
+                </p:cond>
+              </p:nextCondLst>
+            </p:seq>
+          </p:childTnLst>
+        </p:cTn>
+      </p:par>
+    </p:tnLst>
+    <p:bldLst>
+      <p:bldP spid="887811" grpId="0" build="p"/>
+    </p:bldLst>
+  </p:timing>
+</p:sld>
+</file>
+
+<file path=ppt/slides/slide5.xml><?xml version="1.0" encoding="utf-8"?>
+<p:sld xmlns:a="http://schemas.openxmlformats.org/drawingml/2006/main" xmlns:r="http://schemas.openxmlformats.org/officeDocument/2006/relationships" xmlns:p="http://schemas.openxmlformats.org/presentationml/2006/main">
+  <p:cSld>
+    <p:spTree>
+      <p:nvGrpSpPr>
+        <p:cNvPr id="1" name=""/>
+        <p:cNvGrpSpPr/>
+        <p:nvPr/>
+      </p:nvGrpSpPr>
+      <p:grpSpPr>
+        <a:xfrm>
+          <a:off x="0" y="0"/>
+          <a:ext cx="0" cy="0"/>
+          <a:chOff x="0" y="0"/>
+          <a:chExt cx="0" cy="0"/>
+        </a:xfrm>
+      </p:grpSpPr>
+      <p:sp>
+        <p:nvSpPr>
+          <p:cNvPr id="18434" name="灯片编号占位符 5"/>
+          <p:cNvSpPr>
+            <a:spLocks noGrp="1"/>
+          </p:cNvSpPr>
+          <p:nvPr>
+            <p:ph type="sldNum" sz="quarter" idx="12"/>
+          </p:nvPr>
+        </p:nvSpPr>
+        <p:spPr bwMode="auto">
+          <a:noFill/>
+          <a:extLst>
+            <a:ext uri="{909E8E84-426E-40DD-AFC4-6F175D3DCCD1}">
+              <a14:hiddenFill xmlns:a14="http://schemas.microsoft.com/office/drawing/2010/main">
+                <a:solidFill>
+                  <a:srgbClr val="FFFFFF"/>
+                </a:solidFill>
+              </a14:hiddenFill>
+            </a:ext>
+            <a:ext uri="{91240B29-F687-4F45-9708-019B960494DF}">
+              <a14:hiddenLine xmlns:a14="http://schemas.microsoft.com/office/drawing/2010/main" w="9525">
+                <a:solidFill>
+                  <a:srgbClr val="000000"/>
+                </a:solidFill>
+                <a:miter lim="800000"/>
+                <a:headEnd/>
+                <a:tailEnd/>
+              </a14:hiddenLine>
+            </a:ext>
+          </a:extLst>
+        </p:spPr>
+        <p:txBody>
+          <a:bodyPr/>
+          <a:lstStyle>
+            <a:lvl1pPr>
+              <a:spcBef>
+                <a:spcPct val="20000"/>
+              </a:spcBef>
+              <a:buFont typeface="Arial" panose="020B0604020202020204" pitchFamily="34" charset="0"/>
+              <a:buChar char="•"/>
+              <a:defRPr sz="3200">
+                <a:solidFill>
+                  <a:schemeClr val="tx1"/>
+                </a:solidFill>
+                <a:latin typeface="Calibri" panose="020F0502020204030204" pitchFamily="34" charset="0"/>
+                <a:ea typeface="宋体" panose="02010600030101010101" pitchFamily="2" charset="-122"/>
+              </a:defRPr>
+            </a:lvl1pPr>
+            <a:lvl2pPr marL="742950" indent="-285750">
+              <a:spcBef>
+                <a:spcPct val="20000"/>
+              </a:spcBef>
+              <a:buFont typeface="Arial" panose="020B0604020202020204" pitchFamily="34" charset="0"/>
+              <a:buChar char="–"/>
+              <a:defRPr sz="2800">
+                <a:solidFill>
+                  <a:schemeClr val="tx1"/>
+                </a:solidFill>
+                <a:latin typeface="Calibri" panose="020F0502020204030204" pitchFamily="34" charset="0"/>
+                <a:ea typeface="宋体" panose="02010600030101010101" pitchFamily="2" charset="-122"/>
+              </a:defRPr>
+            </a:lvl2pPr>
+            <a:lvl3pPr marL="1143000" indent="-228600">
+              <a:spcBef>
+                <a:spcPct val="20000"/>
+              </a:spcBef>
+              <a:buFont typeface="Arial" panose="020B0604020202020204" pitchFamily="34" charset="0"/>
+              <a:buChar char="•"/>
+              <a:defRPr sz="2400">
+                <a:solidFill>
+                  <a:schemeClr val="tx1"/>
+                </a:solidFill>
+                <a:latin typeface="Calibri" panose="020F0502020204030204" pitchFamily="34" charset="0"/>
+                <a:ea typeface="宋体" panose="02010600030101010101" pitchFamily="2" charset="-122"/>
+              </a:defRPr>
+            </a:lvl3pPr>
+            <a:lvl4pPr marL="1600200" indent="-228600">
+              <a:spcBef>
+                <a:spcPct val="20000"/>
+              </a:spcBef>
+              <a:buFont typeface="Arial" panose="020B0604020202020204" pitchFamily="34" charset="0"/>
+              <a:buChar char="–"/>
+              <a:defRPr sz="2000">
+                <a:solidFill>
+                  <a:schemeClr val="tx1"/>
+                </a:solidFill>
+                <a:latin typeface="Calibri" panose="020F0502020204030204" pitchFamily="34" charset="0"/>
+                <a:ea typeface="宋体" panose="02010600030101010101" pitchFamily="2" charset="-122"/>
+              </a:defRPr>
+            </a:lvl4pPr>
+            <a:lvl5pPr marL="2057400" indent="-228600">
+              <a:spcBef>
+                <a:spcPct val="20000"/>
+              </a:spcBef>
+              <a:buFont typeface="Arial" panose="020B0604020202020204" pitchFamily="34" charset="0"/>
+              <a:buChar char="»"/>
+              <a:defRPr sz="2000">
+                <a:solidFill>
+                  <a:schemeClr val="tx1"/>
+                </a:solidFill>
+                <a:latin typeface="Calibri" panose="020F0502020204030204" pitchFamily="34" charset="0"/>
+                <a:ea typeface="宋体" panose="02010600030101010101" pitchFamily="2" charset="-122"/>
+              </a:defRPr>
+            </a:lvl5pPr>
+            <a:lvl6pPr marL="2514600" indent="-228600" eaLnBrk="0" fontAlgn="base" hangingPunct="0">
+              <a:spcBef>
+                <a:spcPct val="20000"/>
+              </a:spcBef>
+              <a:spcAft>
+                <a:spcPct val="0"/>
+              </a:spcAft>
+              <a:buFont typeface="Arial" panose="020B0604020202020204" pitchFamily="34" charset="0"/>
+              <a:buChar char="»"/>
+              <a:defRPr sz="2000">
+                <a:solidFill>
+                  <a:schemeClr val="tx1"/>
+                </a:solidFill>
+                <a:latin typeface="Calibri" panose="020F0502020204030204" pitchFamily="34" charset="0"/>
+                <a:ea typeface="宋体" panose="02010600030101010101" pitchFamily="2" charset="-122"/>
+              </a:defRPr>
+            </a:lvl6pPr>
+            <a:lvl7pPr marL="2971800" indent="-228600" eaLnBrk="0" fontAlgn="base" hangingPunct="0">
+              <a:spcBef>
+                <a:spcPct val="20000"/>
+              </a:spcBef>
+              <a:spcAft>
+                <a:spcPct val="0"/>
+              </a:spcAft>
+              <a:buFont typeface="Arial" panose="020B0604020202020204" pitchFamily="34" charset="0"/>
+              <a:buChar char="»"/>
+              <a:defRPr sz="2000">
+                <a:solidFill>
+                  <a:schemeClr val="tx1"/>
+                </a:solidFill>
+                <a:latin typeface="Calibri" panose="020F0502020204030204" pitchFamily="34" charset="0"/>
+                <a:ea typeface="宋体" panose="02010600030101010101" pitchFamily="2" charset="-122"/>
+              </a:defRPr>
+            </a:lvl7pPr>
+            <a:lvl8pPr marL="3429000" indent="-228600" eaLnBrk="0" fontAlgn="base" hangingPunct="0">
+              <a:spcBef>
+                <a:spcPct val="20000"/>
+              </a:spcBef>
+              <a:spcAft>
+                <a:spcPct val="0"/>
+              </a:spcAft>
+              <a:buFont typeface="Arial" panose="020B0604020202020204" pitchFamily="34" charset="0"/>
+              <a:buChar char="»"/>
+              <a:defRPr sz="2000">
+                <a:solidFill>
+                  <a:schemeClr val="tx1"/>
+                </a:solidFill>
+                <a:latin typeface="Calibri" panose="020F0502020204030204" pitchFamily="34" charset="0"/>
+                <a:ea typeface="宋体" panose="02010600030101010101" pitchFamily="2" charset="-122"/>
+              </a:defRPr>
+            </a:lvl8pPr>
+            <a:lvl9pPr marL="3886200" indent="-228600" eaLnBrk="0" fontAlgn="base" hangingPunct="0">
+              <a:spcBef>
+                <a:spcPct val="20000"/>
+              </a:spcBef>
+              <a:spcAft>
+                <a:spcPct val="0"/>
+              </a:spcAft>
+              <a:buFont typeface="Arial" panose="020B0604020202020204" pitchFamily="34" charset="0"/>
+              <a:buChar char="»"/>
+              <a:defRPr sz="2000">
+                <a:solidFill>
+                  <a:schemeClr val="tx1"/>
+                </a:solidFill>
+                <a:latin typeface="Calibri" panose="020F0502020204030204" pitchFamily="34" charset="0"/>
+                <a:ea typeface="宋体" panose="02010600030101010101" pitchFamily="2" charset="-122"/>
+              </a:defRPr>
+            </a:lvl9pPr>
+          </a:lstStyle>
+          <a:p>
+            <a:pPr>
+              <a:spcBef>
+                <a:spcPct val="0"/>
+              </a:spcBef>
+              <a:buFontTx/>
+              <a:buNone/>
+            </a:pPr>
+            <a:fld id="{F12A9DEA-C3F6-4401-A5BF-3745117890AB}" type="slidenum">
+              <a:rPr kumimoji="1" lang="en-US" altLang="zh-CN" sz="1400" smtClean="0">
+                <a:latin typeface="Times New Roman" panose="02020603050405020304" pitchFamily="18" charset="0"/>
+              </a:rPr>
+            </a:fld>
+            <a:endParaRPr kumimoji="1" lang="en-US" altLang="zh-CN" sz="1400">
+              <a:latin typeface="Times New Roman" panose="02020603050405020304" pitchFamily="18" charset="0"/>
+            </a:endParaRPr>
+          </a:p>
+        </p:txBody>
+      </p:sp>
+      <p:sp>
+        <p:nvSpPr>
+          <p:cNvPr id="887811" name="Rectangle 3"/>
+          <p:cNvSpPr>
+            <a:spLocks noGrp="1"/>
+          </p:cNvSpPr>
+          <p:nvPr>
+            <p:ph type="body" idx="1"/>
+          </p:nvPr>
+        </p:nvSpPr>
+        <p:spPr>
+          <a:xfrm>
+            <a:off x="755576" y="1340768"/>
+            <a:ext cx="7416800" cy="1231900"/>
+          </a:xfrm>
+        </p:spPr>
+        <p:txBody>
+          <a:bodyPr/>
+          <a:lstStyle/>
+          <a:p>
+            <a:pPr eaLnBrk="1" hangingPunct="1">
+              <a:lnSpc>
+                <a:spcPct val="120000"/>
+              </a:lnSpc>
+              <a:buClr>
+                <a:srgbClr val="FF0000"/>
+              </a:buClr>
+              <a:buFont typeface="Wingdings" panose="05000000000000000000" pitchFamily="2" charset="2"/>
+              <a:buChar char="p"/>
+              <a:defRPr/>
+            </a:pPr>
+            <a:r>
+              <a:rPr lang="zh-CN" altLang="en-US" sz="2800" dirty="0">
+                <a:latin typeface="Times New Roman" panose="02020603050405020304" pitchFamily="18" charset="0"/>
+                <a:ea typeface="楷体" panose="02010609060101010101" pitchFamily="49" charset="-122"/>
+                <a:cs typeface="Times New Roman" panose="02020603050405020304" pitchFamily="18" charset="0"/>
+              </a:rPr>
+              <a:t> </a:t>
+            </a:r>
+            <a:r>
+              <a:rPr lang="zh-CN" altLang="en-US" sz="2800" b="1" dirty="0">
+                <a:latin typeface="Times New Roman" panose="02020603050405020304" pitchFamily="18" charset="0"/>
+                <a:ea typeface="楷体" panose="02010609060101010101" pitchFamily="49" charset="-122"/>
+                <a:cs typeface="Times New Roman" panose="02020603050405020304" pitchFamily="18" charset="0"/>
+              </a:rPr>
+              <a:t>过拟合和欠拟合以及相应的解决方案</a:t>
+            </a:r>
+            <a:endParaRPr lang="en-US" altLang="zh-CN" sz="2800" b="1" dirty="0">
+              <a:latin typeface="Times New Roman" panose="02020603050405020304" pitchFamily="18" charset="0"/>
+              <a:ea typeface="楷体" panose="02010609060101010101" pitchFamily="49" charset="-122"/>
+              <a:cs typeface="Times New Roman" panose="02020603050405020304" pitchFamily="18" charset="0"/>
+            </a:endParaRPr>
+          </a:p>
+          <a:p>
+            <a:pPr eaLnBrk="1" hangingPunct="1">
+              <a:lnSpc>
+                <a:spcPct val="120000"/>
+              </a:lnSpc>
+              <a:buClr>
+                <a:srgbClr val="FF0000"/>
+              </a:buClr>
+              <a:buFont typeface="Wingdings" panose="05000000000000000000" pitchFamily="2" charset="2"/>
+              <a:buChar char="p"/>
+              <a:defRPr/>
+            </a:pPr>
+            <a:r>
+              <a:rPr lang="zh-CN" altLang="en-US" sz="2800" b="1" dirty="0">
+                <a:latin typeface="Times New Roman" panose="02020603050405020304" pitchFamily="18" charset="0"/>
+                <a:ea typeface="楷体" panose="02010609060101010101" pitchFamily="49" charset="-122"/>
+                <a:cs typeface="Times New Roman" panose="02020603050405020304" pitchFamily="18" charset="0"/>
+              </a:rPr>
+              <a:t> 评估方法：泛化性能</a:t>
+            </a:r>
+            <a:endParaRPr lang="en-US" altLang="zh-CN" sz="2800" b="1" dirty="0">
+              <a:latin typeface="Times New Roman" panose="02020603050405020304" pitchFamily="18" charset="0"/>
+              <a:ea typeface="楷体" panose="02010609060101010101" pitchFamily="49" charset="-122"/>
+              <a:cs typeface="Times New Roman" panose="02020603050405020304" pitchFamily="18" charset="0"/>
+            </a:endParaRPr>
+          </a:p>
+          <a:p>
+            <a:pPr marL="0" indent="0" eaLnBrk="1" hangingPunct="1">
+              <a:lnSpc>
+                <a:spcPct val="120000"/>
+              </a:lnSpc>
+              <a:buClr>
+                <a:srgbClr val="FF0000"/>
+              </a:buClr>
+              <a:buNone/>
+              <a:defRPr/>
+            </a:pPr>
+            <a:r>
+              <a:rPr lang="zh-CN" altLang="en-US" sz="2400" dirty="0">
+                <a:latin typeface="Times New Roman" panose="02020603050405020304" pitchFamily="18" charset="0"/>
+                <a:ea typeface="楷体" panose="02010609060101010101" pitchFamily="49" charset="-122"/>
+                <a:cs typeface="Times New Roman" panose="02020603050405020304" pitchFamily="18" charset="0"/>
+              </a:rPr>
+              <a:t>（</a:t>
+            </a:r>
+            <a:r>
+              <a:rPr lang="en-US" altLang="zh-CN" sz="2400" dirty="0">
+                <a:latin typeface="Times New Roman" panose="02020603050405020304" pitchFamily="18" charset="0"/>
+                <a:ea typeface="楷体" panose="02010609060101010101" pitchFamily="49" charset="-122"/>
+                <a:cs typeface="Times New Roman" panose="02020603050405020304" pitchFamily="18" charset="0"/>
+              </a:rPr>
+              <a:t>1</a:t>
+            </a:r>
+            <a:r>
+              <a:rPr lang="zh-CN" altLang="en-US" sz="2400" dirty="0">
+                <a:latin typeface="Times New Roman" panose="02020603050405020304" pitchFamily="18" charset="0"/>
+                <a:ea typeface="楷体" panose="02010609060101010101" pitchFamily="49" charset="-122"/>
+                <a:cs typeface="Times New Roman" panose="02020603050405020304" pitchFamily="18" charset="0"/>
+              </a:rPr>
+              <a:t>）留出法（</a:t>
+            </a:r>
+            <a:r>
+              <a:rPr lang="en-US" altLang="zh-CN" sz="2400" dirty="0">
+                <a:latin typeface="Times New Roman" panose="02020603050405020304" pitchFamily="18" charset="0"/>
+                <a:ea typeface="楷体" panose="02010609060101010101" pitchFamily="49" charset="-122"/>
+                <a:cs typeface="Times New Roman" panose="02020603050405020304" pitchFamily="18" charset="0"/>
+              </a:rPr>
+              <a:t>2</a:t>
+            </a:r>
+            <a:r>
+              <a:rPr lang="zh-CN" altLang="en-US" sz="2400" dirty="0">
+                <a:latin typeface="Times New Roman" panose="02020603050405020304" pitchFamily="18" charset="0"/>
+                <a:ea typeface="楷体" panose="02010609060101010101" pitchFamily="49" charset="-122"/>
+                <a:cs typeface="Times New Roman" panose="02020603050405020304" pitchFamily="18" charset="0"/>
+              </a:rPr>
+              <a:t>）交叉验证法</a:t>
+            </a:r>
+            <a:endParaRPr lang="en-US" altLang="zh-CN" sz="2400" dirty="0">
+              <a:latin typeface="Times New Roman" panose="02020603050405020304" pitchFamily="18" charset="0"/>
+              <a:ea typeface="楷体" panose="02010609060101010101" pitchFamily="49" charset="-122"/>
+              <a:cs typeface="Times New Roman" panose="02020603050405020304" pitchFamily="18" charset="0"/>
+            </a:endParaRPr>
+          </a:p>
+          <a:p>
+            <a:pPr marL="0" indent="0" eaLnBrk="1" hangingPunct="1">
+              <a:lnSpc>
+                <a:spcPct val="120000"/>
+              </a:lnSpc>
+              <a:buClr>
+                <a:srgbClr val="FF0000"/>
+              </a:buClr>
+              <a:buNone/>
+              <a:defRPr/>
+            </a:pPr>
+            <a:r>
+              <a:rPr lang="zh-CN" altLang="en-US" sz="2400" dirty="0">
+                <a:latin typeface="Times New Roman" panose="02020603050405020304" pitchFamily="18" charset="0"/>
+                <a:ea typeface="楷体" panose="02010609060101010101" pitchFamily="49" charset="-122"/>
+                <a:cs typeface="Times New Roman" panose="02020603050405020304" pitchFamily="18" charset="0"/>
+              </a:rPr>
+              <a:t>（</a:t>
+            </a:r>
+            <a:r>
+              <a:rPr lang="en-US" altLang="zh-CN" sz="2400" dirty="0">
+                <a:latin typeface="Times New Roman" panose="02020603050405020304" pitchFamily="18" charset="0"/>
+                <a:ea typeface="楷体" panose="02010609060101010101" pitchFamily="49" charset="-122"/>
+                <a:cs typeface="Times New Roman" panose="02020603050405020304" pitchFamily="18" charset="0"/>
+              </a:rPr>
+              <a:t>3</a:t>
+            </a:r>
+            <a:r>
+              <a:rPr lang="zh-CN" altLang="en-US" sz="2400" dirty="0">
+                <a:latin typeface="Times New Roman" panose="02020603050405020304" pitchFamily="18" charset="0"/>
+                <a:ea typeface="楷体" panose="02010609060101010101" pitchFamily="49" charset="-122"/>
+                <a:cs typeface="Times New Roman" panose="02020603050405020304" pitchFamily="18" charset="0"/>
+              </a:rPr>
+              <a:t>）自助法（</a:t>
+            </a:r>
+            <a:r>
+              <a:rPr lang="en-US" altLang="zh-CN" sz="2400" dirty="0">
+                <a:latin typeface="Times New Roman" panose="02020603050405020304" pitchFamily="18" charset="0"/>
+                <a:ea typeface="楷体" panose="02010609060101010101" pitchFamily="49" charset="-122"/>
+                <a:cs typeface="Times New Roman" panose="02020603050405020304" pitchFamily="18" charset="0"/>
+              </a:rPr>
+              <a:t>4</a:t>
+            </a:r>
+            <a:r>
+              <a:rPr lang="zh-CN" altLang="en-US" sz="2400" dirty="0">
+                <a:latin typeface="Times New Roman" panose="02020603050405020304" pitchFamily="18" charset="0"/>
+                <a:ea typeface="楷体" panose="02010609060101010101" pitchFamily="49" charset="-122"/>
+                <a:cs typeface="Times New Roman" panose="02020603050405020304" pitchFamily="18" charset="0"/>
+              </a:rPr>
+              <a:t>）调参与最终模型</a:t>
+            </a:r>
+            <a:endParaRPr lang="en-US" altLang="zh-CN" sz="2400" dirty="0">
+              <a:latin typeface="Times New Roman" panose="02020603050405020304" pitchFamily="18" charset="0"/>
+              <a:ea typeface="楷体" panose="02010609060101010101" pitchFamily="49" charset="-122"/>
+              <a:cs typeface="Times New Roman" panose="02020603050405020304" pitchFamily="18" charset="0"/>
+            </a:endParaRPr>
+          </a:p>
+          <a:p>
+            <a:pPr eaLnBrk="1" hangingPunct="1">
+              <a:lnSpc>
+                <a:spcPct val="120000"/>
+              </a:lnSpc>
+              <a:buClr>
+                <a:srgbClr val="FF0000"/>
+              </a:buClr>
+              <a:buFont typeface="Wingdings" panose="05000000000000000000" pitchFamily="2" charset="2"/>
+              <a:buChar char="p"/>
+              <a:defRPr/>
+            </a:pPr>
+            <a:r>
+              <a:rPr lang="zh-CN" altLang="en-US" sz="2800" b="1" dirty="0">
+                <a:latin typeface="Times New Roman" panose="02020603050405020304" pitchFamily="18" charset="0"/>
+                <a:ea typeface="楷体" panose="02010609060101010101" pitchFamily="49" charset="-122"/>
+                <a:cs typeface="Times New Roman" panose="02020603050405020304" pitchFamily="18" charset="0"/>
+              </a:rPr>
+              <a:t>性能度量</a:t>
+            </a:r>
+            <a:endParaRPr lang="en-US" altLang="zh-CN" sz="2800" b="1" dirty="0">
+              <a:latin typeface="Times New Roman" panose="02020603050405020304" pitchFamily="18" charset="0"/>
+              <a:ea typeface="楷体" panose="02010609060101010101" pitchFamily="49" charset="-122"/>
+              <a:cs typeface="Times New Roman" panose="02020603050405020304" pitchFamily="18" charset="0"/>
+            </a:endParaRPr>
+          </a:p>
+          <a:p>
+            <a:pPr eaLnBrk="1" hangingPunct="1">
+              <a:lnSpc>
+                <a:spcPct val="120000"/>
+              </a:lnSpc>
+              <a:buClr>
+                <a:srgbClr val="FF0000"/>
+              </a:buClr>
+              <a:buFont typeface="Wingdings" panose="05000000000000000000" pitchFamily="2" charset="2"/>
+              <a:buChar char="p"/>
+              <a:defRPr/>
+            </a:pPr>
+            <a:r>
+              <a:rPr lang="zh-CN" altLang="en-US" sz="2800" b="1" dirty="0">
+                <a:latin typeface="Times New Roman" panose="02020603050405020304" pitchFamily="18" charset="0"/>
+                <a:ea typeface="楷体" panose="02010609060101010101" pitchFamily="49" charset="-122"/>
+                <a:cs typeface="Times New Roman" panose="02020603050405020304" pitchFamily="18" charset="0"/>
+              </a:rPr>
+              <a:t>比较检验</a:t>
+            </a:r>
+            <a:endParaRPr lang="en-US" altLang="zh-CN" sz="2800" b="1" dirty="0">
+              <a:latin typeface="Times New Roman" panose="02020603050405020304" pitchFamily="18" charset="0"/>
+              <a:ea typeface="楷体" panose="02010609060101010101" pitchFamily="49" charset="-122"/>
+              <a:cs typeface="Times New Roman" panose="02020603050405020304" pitchFamily="18" charset="0"/>
+            </a:endParaRPr>
+          </a:p>
+          <a:p>
+            <a:pPr eaLnBrk="1" hangingPunct="1">
+              <a:lnSpc>
+                <a:spcPct val="120000"/>
+              </a:lnSpc>
+              <a:buClr>
+                <a:srgbClr val="FF0000"/>
+              </a:buClr>
+              <a:buFont typeface="Wingdings" panose="05000000000000000000" pitchFamily="2" charset="2"/>
+              <a:buChar char="p"/>
+              <a:defRPr/>
+            </a:pPr>
+            <a:r>
+              <a:rPr lang="zh-CN" altLang="en-US" sz="2800" b="1" dirty="0">
+                <a:latin typeface="Times New Roman" panose="02020603050405020304" pitchFamily="18" charset="0"/>
+                <a:ea typeface="楷体" panose="02010609060101010101" pitchFamily="49" charset="-122"/>
+                <a:cs typeface="Times New Roman" panose="02020603050405020304" pitchFamily="18" charset="0"/>
+              </a:rPr>
+              <a:t>偏差与方差：偏差、方差和噪声解释；偏差</a:t>
+            </a:r>
+            <a:r>
+              <a:rPr lang="en-US" altLang="zh-CN" sz="2800" b="1" dirty="0">
+                <a:latin typeface="Times New Roman" panose="02020603050405020304" pitchFamily="18" charset="0"/>
+                <a:ea typeface="楷体" panose="02010609060101010101" pitchFamily="49" charset="-122"/>
+                <a:cs typeface="Times New Roman" panose="02020603050405020304" pitchFamily="18" charset="0"/>
+              </a:rPr>
+              <a:t>-</a:t>
+            </a:r>
+            <a:r>
+              <a:rPr lang="zh-CN" altLang="en-US" sz="2800" b="1" dirty="0">
+                <a:latin typeface="Times New Roman" panose="02020603050405020304" pitchFamily="18" charset="0"/>
+                <a:ea typeface="楷体" panose="02010609060101010101" pitchFamily="49" charset="-122"/>
+                <a:cs typeface="Times New Roman" panose="02020603050405020304" pitchFamily="18" charset="0"/>
+              </a:rPr>
+              <a:t>方差窘境（与泛化误差的关系）</a:t>
+            </a:r>
+            <a:endParaRPr lang="en-US" altLang="zh-CN" sz="2800" b="1" dirty="0">
+              <a:latin typeface="Times New Roman" panose="02020603050405020304" pitchFamily="18" charset="0"/>
+              <a:ea typeface="楷体" panose="02010609060101010101" pitchFamily="49" charset="-122"/>
+              <a:cs typeface="Times New Roman" panose="02020603050405020304" pitchFamily="18" charset="0"/>
+            </a:endParaRPr>
+          </a:p>
+          <a:p>
+            <a:pPr marL="0" indent="0" eaLnBrk="1" hangingPunct="1">
+              <a:lnSpc>
+                <a:spcPct val="120000"/>
+              </a:lnSpc>
+              <a:buClr>
+                <a:srgbClr val="FF0000"/>
+              </a:buClr>
+              <a:buNone/>
+              <a:defRPr/>
+            </a:pPr>
+            <a:endParaRPr lang="en-US" altLang="zh-CN" sz="2800" dirty="0">
+              <a:latin typeface="Times New Roman" panose="02020603050405020304" pitchFamily="18" charset="0"/>
+              <a:ea typeface="楷体" panose="02010609060101010101" pitchFamily="49" charset="-122"/>
+              <a:cs typeface="Times New Roman" panose="02020603050405020304" pitchFamily="18" charset="0"/>
+            </a:endParaRPr>
+          </a:p>
+          <a:p>
+            <a:pPr eaLnBrk="1" hangingPunct="1">
+              <a:lnSpc>
+                <a:spcPct val="120000"/>
+              </a:lnSpc>
+              <a:buClr>
+                <a:srgbClr val="FF0000"/>
+              </a:buClr>
+              <a:buFont typeface="Wingdings" panose="05000000000000000000" pitchFamily="2" charset="2"/>
+              <a:buChar char="p"/>
+              <a:defRPr/>
+            </a:pPr>
+            <a:endParaRPr lang="en-US" altLang="zh-CN" sz="2800" dirty="0">
+              <a:latin typeface="Times New Roman" panose="02020603050405020304" pitchFamily="18" charset="0"/>
+              <a:ea typeface="楷体" panose="02010609060101010101" pitchFamily="49" charset="-122"/>
+              <a:cs typeface="Times New Roman" panose="02020603050405020304" pitchFamily="18" charset="0"/>
+            </a:endParaRPr>
+          </a:p>
+          <a:p>
+            <a:pPr eaLnBrk="1" hangingPunct="1">
+              <a:lnSpc>
+                <a:spcPct val="120000"/>
+              </a:lnSpc>
+              <a:buClr>
+                <a:srgbClr val="FF0000"/>
+              </a:buClr>
+              <a:buFont typeface="Wingdings" panose="05000000000000000000" pitchFamily="2" charset="2"/>
+              <a:buChar char="p"/>
+              <a:defRPr/>
+            </a:pPr>
+            <a:endParaRPr lang="en-US" altLang="zh-CN" sz="2800" dirty="0">
+              <a:latin typeface="Times New Roman" panose="02020603050405020304" pitchFamily="18" charset="0"/>
+              <a:ea typeface="楷体" panose="02010609060101010101" pitchFamily="49" charset="-122"/>
+              <a:cs typeface="Times New Roman" panose="02020603050405020304" pitchFamily="18" charset="0"/>
+            </a:endParaRPr>
+          </a:p>
+          <a:p>
+            <a:pPr marL="0" indent="0" eaLnBrk="1" hangingPunct="1">
+              <a:lnSpc>
+                <a:spcPct val="120000"/>
+              </a:lnSpc>
+              <a:buClr>
+                <a:srgbClr val="FF0000"/>
+              </a:buClr>
+              <a:buNone/>
+              <a:defRPr/>
+            </a:pPr>
+            <a:endParaRPr lang="en-US" altLang="zh-CN" sz="2800" dirty="0">
+              <a:latin typeface="Times New Roman" panose="02020603050405020304" pitchFamily="18" charset="0"/>
+              <a:ea typeface="楷体" panose="02010609060101010101" pitchFamily="49" charset="-122"/>
+              <a:cs typeface="Times New Roman" panose="02020603050405020304" pitchFamily="18" charset="0"/>
+            </a:endParaRPr>
+          </a:p>
+          <a:p>
+            <a:pPr eaLnBrk="1" hangingPunct="1">
+              <a:lnSpc>
+                <a:spcPct val="120000"/>
+              </a:lnSpc>
+              <a:buClr>
+                <a:srgbClr val="FF0000"/>
+              </a:buClr>
+              <a:buFont typeface="Wingdings" panose="05000000000000000000" pitchFamily="2" charset="2"/>
+              <a:buChar char="p"/>
+              <a:defRPr/>
+            </a:pPr>
+            <a:endParaRPr lang="en-US" altLang="zh-CN" sz="2800" dirty="0">
+              <a:latin typeface="Times New Roman" panose="02020603050405020304" pitchFamily="18" charset="0"/>
+              <a:ea typeface="楷体" panose="02010609060101010101" pitchFamily="49" charset="-122"/>
+              <a:cs typeface="Times New Roman" panose="02020603050405020304" pitchFamily="18" charset="0"/>
+            </a:endParaRPr>
+          </a:p>
+          <a:p>
+            <a:pPr marL="0" indent="0" eaLnBrk="1" hangingPunct="1">
+              <a:lnSpc>
+                <a:spcPct val="120000"/>
+              </a:lnSpc>
+              <a:buClr>
+                <a:srgbClr val="FF0000"/>
+              </a:buClr>
+              <a:buFont typeface="Arial" panose="020B0604020202020204" pitchFamily="34" charset="0"/>
+              <a:buNone/>
+              <a:defRPr/>
+            </a:pPr>
+            <a:r>
+              <a:rPr kumimoji="1" lang="en-US" altLang="zh-CN" sz="2800" dirty="0">
+                <a:latin typeface="Times New Roman" panose="02020603050405020304" pitchFamily="18" charset="0"/>
+                <a:ea typeface="楷体" panose="02010609060101010101" pitchFamily="49" charset="-122"/>
+                <a:cs typeface="Times New Roman" panose="02020603050405020304" pitchFamily="18" charset="0"/>
+              </a:rPr>
+              <a:t>      </a:t>
+            </a:r>
+            <a:endParaRPr kumimoji="1" lang="en-US" altLang="zh-CN" sz="2400" dirty="0">
+              <a:latin typeface="楷体" panose="02010609060101010101" pitchFamily="49" charset="-122"/>
+              <a:ea typeface="楷体" panose="02010609060101010101" pitchFamily="49" charset="-122"/>
+            </a:endParaRPr>
+          </a:p>
+        </p:txBody>
+      </p:sp>
+      <p:sp>
+        <p:nvSpPr>
+          <p:cNvPr id="18436" name="Text Box 4"/>
+          <p:cNvSpPr txBox="1">
+            <a:spLocks noChangeArrowheads="1"/>
+          </p:cNvSpPr>
+          <p:nvPr/>
+        </p:nvSpPr>
+        <p:spPr bwMode="auto">
+          <a:xfrm>
+            <a:off x="684213" y="620713"/>
+            <a:ext cx="8134350" cy="579437"/>
+          </a:xfrm>
+          <a:prstGeom prst="rect">
+            <a:avLst/>
+          </a:prstGeom>
+          <a:noFill/>
+          <a:ln>
+            <a:noFill/>
+          </a:ln>
+          <a:effectLst/>
+          <a:extLst>
+            <a:ext uri="{909E8E84-426E-40DD-AFC4-6F175D3DCCD1}">
+              <a14:hiddenFill xmlns:a14="http://schemas.microsoft.com/office/drawing/2010/main">
+                <a:solidFill>
+                  <a:schemeClr val="hlink"/>
+                </a:solidFill>
+              </a14:hiddenFill>
+            </a:ext>
+            <a:ext uri="{91240B29-F687-4F45-9708-019B960494DF}">
+              <a14:hiddenLine xmlns:a14="http://schemas.microsoft.com/office/drawing/2010/main" w="9525">
+                <a:solidFill>
+                  <a:schemeClr val="tx1"/>
+                </a:solidFill>
+                <a:miter lim="800000"/>
+                <a:headEnd/>
+                <a:tailEnd/>
+              </a14:hiddenLine>
+            </a:ext>
+            <a:ext uri="{AF507438-7753-43E0-B8FC-AC1667EBCBE1}">
+              <a14:hiddenEffects xmlns:a14="http://schemas.microsoft.com/office/drawing/2010/main">
+                <a:effectLst>
+                  <a:outerShdw dist="35921" dir="2700000" algn="ctr" rotWithShape="0">
+                    <a:schemeClr val="bg2"/>
+                  </a:outerShdw>
+                </a:effectLst>
+              </a14:hiddenEffects>
+            </a:ext>
+          </a:extLst>
+        </p:spPr>
+        <p:txBody>
+          <a:bodyPr>
+            <a:spAutoFit/>
+          </a:bodyPr>
+          <a:lstStyle>
+            <a:lvl1pPr marL="457200" indent="-457200">
+              <a:spcBef>
+                <a:spcPct val="20000"/>
+              </a:spcBef>
+              <a:buFont typeface="Arial" panose="020B0604020202020204" pitchFamily="34" charset="0"/>
+              <a:buChar char="•"/>
+              <a:defRPr sz="3200">
+                <a:solidFill>
+                  <a:schemeClr val="tx1"/>
+                </a:solidFill>
+                <a:latin typeface="Calibri" panose="020F0502020204030204" pitchFamily="34" charset="0"/>
+                <a:ea typeface="宋体" panose="02010600030101010101" pitchFamily="2" charset="-122"/>
+              </a:defRPr>
+            </a:lvl1pPr>
+            <a:lvl2pPr marL="742950" indent="-285750">
+              <a:spcBef>
+                <a:spcPct val="20000"/>
+              </a:spcBef>
+              <a:buFont typeface="Arial" panose="020B0604020202020204" pitchFamily="34" charset="0"/>
+              <a:buChar char="–"/>
+              <a:defRPr sz="2800">
+                <a:solidFill>
+                  <a:schemeClr val="tx1"/>
+                </a:solidFill>
+                <a:latin typeface="Calibri" panose="020F0502020204030204" pitchFamily="34" charset="0"/>
+                <a:ea typeface="宋体" panose="02010600030101010101" pitchFamily="2" charset="-122"/>
+              </a:defRPr>
+            </a:lvl2pPr>
+            <a:lvl3pPr marL="1143000" indent="-228600">
+              <a:spcBef>
+                <a:spcPct val="20000"/>
+              </a:spcBef>
+              <a:buFont typeface="Arial" panose="020B0604020202020204" pitchFamily="34" charset="0"/>
+              <a:buChar char="•"/>
+              <a:defRPr sz="2400">
+                <a:solidFill>
+                  <a:schemeClr val="tx1"/>
+                </a:solidFill>
+                <a:latin typeface="Calibri" panose="020F0502020204030204" pitchFamily="34" charset="0"/>
+                <a:ea typeface="宋体" panose="02010600030101010101" pitchFamily="2" charset="-122"/>
+              </a:defRPr>
+            </a:lvl3pPr>
+            <a:lvl4pPr marL="1600200" indent="-228600">
+              <a:spcBef>
+                <a:spcPct val="20000"/>
+              </a:spcBef>
+              <a:buFont typeface="Arial" panose="020B0604020202020204" pitchFamily="34" charset="0"/>
+              <a:buChar char="–"/>
+              <a:defRPr sz="2000">
+                <a:solidFill>
+                  <a:schemeClr val="tx1"/>
+                </a:solidFill>
+                <a:latin typeface="Calibri" panose="020F0502020204030204" pitchFamily="34" charset="0"/>
+                <a:ea typeface="宋体" panose="02010600030101010101" pitchFamily="2" charset="-122"/>
+              </a:defRPr>
+            </a:lvl4pPr>
+            <a:lvl5pPr marL="2057400" indent="-228600">
+              <a:spcBef>
+                <a:spcPct val="20000"/>
+              </a:spcBef>
+              <a:buFont typeface="Arial" panose="020B0604020202020204" pitchFamily="34" charset="0"/>
+              <a:buChar char="»"/>
+              <a:defRPr sz="2000">
+                <a:solidFill>
+                  <a:schemeClr val="tx1"/>
+                </a:solidFill>
+                <a:latin typeface="Calibri" panose="020F0502020204030204" pitchFamily="34" charset="0"/>
+                <a:ea typeface="宋体" panose="02010600030101010101" pitchFamily="2" charset="-122"/>
+              </a:defRPr>
+            </a:lvl5pPr>
+            <a:lvl6pPr marL="2514600" indent="-228600" eaLnBrk="0" fontAlgn="base" hangingPunct="0">
+              <a:spcBef>
+                <a:spcPct val="20000"/>
+              </a:spcBef>
+              <a:spcAft>
+                <a:spcPct val="0"/>
+              </a:spcAft>
+              <a:buFont typeface="Arial" panose="020B0604020202020204" pitchFamily="34" charset="0"/>
+              <a:buChar char="»"/>
+              <a:defRPr sz="2000">
+                <a:solidFill>
+                  <a:schemeClr val="tx1"/>
+                </a:solidFill>
+                <a:latin typeface="Calibri" panose="020F0502020204030204" pitchFamily="34" charset="0"/>
+                <a:ea typeface="宋体" panose="02010600030101010101" pitchFamily="2" charset="-122"/>
+              </a:defRPr>
+            </a:lvl6pPr>
+            <a:lvl7pPr marL="2971800" indent="-228600" eaLnBrk="0" fontAlgn="base" hangingPunct="0">
+              <a:spcBef>
+                <a:spcPct val="20000"/>
+              </a:spcBef>
+              <a:spcAft>
+                <a:spcPct val="0"/>
+              </a:spcAft>
+              <a:buFont typeface="Arial" panose="020B0604020202020204" pitchFamily="34" charset="0"/>
+              <a:buChar char="»"/>
+              <a:defRPr sz="2000">
+                <a:solidFill>
+                  <a:schemeClr val="tx1"/>
+                </a:solidFill>
+                <a:latin typeface="Calibri" panose="020F0502020204030204" pitchFamily="34" charset="0"/>
+                <a:ea typeface="宋体" panose="02010600030101010101" pitchFamily="2" charset="-122"/>
+              </a:defRPr>
+            </a:lvl7pPr>
+            <a:lvl8pPr marL="3429000" indent="-228600" eaLnBrk="0" fontAlgn="base" hangingPunct="0">
+              <a:spcBef>
+                <a:spcPct val="20000"/>
+              </a:spcBef>
+              <a:spcAft>
+                <a:spcPct val="0"/>
+              </a:spcAft>
+              <a:buFont typeface="Arial" panose="020B0604020202020204" pitchFamily="34" charset="0"/>
+              <a:buChar char="»"/>
+              <a:defRPr sz="2000">
+                <a:solidFill>
+                  <a:schemeClr val="tx1"/>
+                </a:solidFill>
+                <a:latin typeface="Calibri" panose="020F0502020204030204" pitchFamily="34" charset="0"/>
+                <a:ea typeface="宋体" panose="02010600030101010101" pitchFamily="2" charset="-122"/>
+              </a:defRPr>
+            </a:lvl8pPr>
+            <a:lvl9pPr marL="3886200" indent="-228600" eaLnBrk="0" fontAlgn="base" hangingPunct="0">
+              <a:spcBef>
+                <a:spcPct val="20000"/>
+              </a:spcBef>
+              <a:spcAft>
+                <a:spcPct val="0"/>
+              </a:spcAft>
+              <a:buFont typeface="Arial" panose="020B0604020202020204" pitchFamily="34" charset="0"/>
+              <a:buChar char="»"/>
+              <a:defRPr sz="2000">
+                <a:solidFill>
+                  <a:schemeClr val="tx1"/>
+                </a:solidFill>
+                <a:latin typeface="Calibri" panose="020F0502020204030204" pitchFamily="34" charset="0"/>
+                <a:ea typeface="宋体" panose="02010600030101010101" pitchFamily="2" charset="-122"/>
+              </a:defRPr>
+            </a:lvl9pPr>
+          </a:lstStyle>
+          <a:p>
+            <a:pPr eaLnBrk="1" hangingPunct="1">
+              <a:spcBef>
+                <a:spcPct val="50000"/>
+              </a:spcBef>
+              <a:buFontTx/>
+              <a:buNone/>
+            </a:pPr>
+            <a:r>
+              <a:rPr kumimoji="1" lang="zh-CN" altLang="en-US" b="1" dirty="0">
+                <a:latin typeface="黑体" panose="02010609060101010101" pitchFamily="49" charset="-122"/>
+                <a:ea typeface="黑体" panose="02010609060101010101" pitchFamily="49" charset="-122"/>
+                <a:cs typeface="楷体_GB2312"/>
+              </a:rPr>
+              <a:t>第</a:t>
+            </a:r>
+            <a:r>
+              <a:rPr kumimoji="1" lang="en-US" altLang="zh-CN" b="1" dirty="0">
+                <a:latin typeface="黑体" panose="02010609060101010101" pitchFamily="49" charset="-122"/>
+                <a:ea typeface="黑体" panose="02010609060101010101" pitchFamily="49" charset="-122"/>
+                <a:cs typeface="楷体_GB2312"/>
+              </a:rPr>
+              <a:t>2</a:t>
+            </a:r>
+            <a:r>
+              <a:rPr kumimoji="1" lang="zh-CN" altLang="en-US" b="1" dirty="0">
+                <a:latin typeface="黑体" panose="02010609060101010101" pitchFamily="49" charset="-122"/>
+                <a:ea typeface="黑体" panose="02010609060101010101" pitchFamily="49" charset="-122"/>
+                <a:cs typeface="楷体_GB2312"/>
+              </a:rPr>
+              <a:t>章：模型评估与选择</a:t>
+            </a:r>
+            <a:endParaRPr kumimoji="1" lang="zh-CN" altLang="en-US" b="1" dirty="0">
+              <a:latin typeface="黑体" panose="02010609060101010101" pitchFamily="49" charset="-122"/>
+              <a:ea typeface="黑体" panose="02010609060101010101" pitchFamily="49" charset="-122"/>
+              <a:cs typeface="楷体_GB2312"/>
+            </a:endParaRPr>
+          </a:p>
+        </p:txBody>
+      </p:sp>
+      <p:pic>
+        <p:nvPicPr>
+          <p:cNvPr id="5" name="Picture 2"/>
+          <p:cNvPicPr>
+            <a:picLocks noChangeAspect="1" noChangeArrowheads="1"/>
+          </p:cNvPicPr>
+          <p:nvPr/>
+        </p:nvPicPr>
+        <p:blipFill>
+          <a:blip r:embed="rId1">
+            <a:extLst>
+              <a:ext uri="{28A0092B-C50C-407E-A947-70E740481C1C}">
+                <a14:useLocalDpi xmlns:a14="http://schemas.microsoft.com/office/drawing/2010/main" val="0"/>
+              </a:ext>
+            </a:extLst>
+          </a:blip>
+          <a:srcRect/>
+          <a:stretch>
+            <a:fillRect/>
+          </a:stretch>
+        </p:blipFill>
+        <p:spPr bwMode="auto">
+          <a:xfrm>
+            <a:off x="5292080" y="2132856"/>
+            <a:ext cx="3616849" cy="2664296"/>
+          </a:xfrm>
+          <a:prstGeom prst="rect">
+            <a:avLst/>
+          </a:prstGeom>
+          <a:noFill/>
+          <a:ln>
+            <a:noFill/>
+          </a:ln>
+          <a:effectLst/>
+          <a:extLst>
+            <a:ext uri="{909E8E84-426E-40DD-AFC4-6F175D3DCCD1}">
+              <a14:hiddenFill xmlns:a14="http://schemas.microsoft.com/office/drawing/2010/main">
+                <a:solidFill>
+                  <a:schemeClr val="accent1"/>
+                </a:solidFill>
+              </a14:hiddenFill>
+            </a:ext>
+            <a:ext uri="{91240B29-F687-4F45-9708-019B960494DF}">
+              <a14:hiddenLine xmlns:a14="http://schemas.microsoft.com/office/drawing/2010/main" w="9525">
+                <a:solidFill>
+                  <a:schemeClr val="tx1"/>
+                </a:solidFill>
+                <a:miter lim="800000"/>
+                <a:headEnd/>
+                <a:tailEnd/>
+              </a14:hiddenLine>
+            </a:ext>
+            <a:ext uri="{AF507438-7753-43E0-B8FC-AC1667EBCBE1}">
+              <a14:hiddenEffects xmlns:a14="http://schemas.microsoft.com/office/drawing/2010/main">
+                <a:effectLst>
+                  <a:outerShdw dist="35921" dir="2700000" algn="ctr" rotWithShape="0">
+                    <a:schemeClr val="bg2"/>
+                  </a:outerShdw>
+                </a:effectLst>
+              </a14:hiddenEffects>
+            </a:ext>
+          </a:extLst>
+        </p:spPr>
+      </p:pic>
+    </p:spTree>
+  </p:cSld>
+  <p:clrMapOvr>
+    <a:masterClrMapping/>
+  </p:clrMapOvr>
+  <p:transition/>
+  <p:timing>
+    <p:tnLst>
+      <p:par>
+        <p:cTn id="1" dur="indefinite" restart="never" nodeType="tmRoot">
+          <p:childTnLst>
+            <p:seq concurrent="1" nextAc="seek">
+              <p:cTn id="2" dur="indefinite" nodeType="mainSeq">
+                <p:childTnLst>
+                  <p:par>
+                    <p:cTn id="3" fill="hold">
+                      <p:stCondLst>
+                        <p:cond delay="indefinite"/>
+                      </p:stCondLst>
+                      <p:childTnLst>
+                        <p:par>
+                          <p:cTn id="4" fill="hold">
+                            <p:stCondLst>
+                              <p:cond delay="0"/>
+                            </p:stCondLst>
+                            <p:childTnLst>
+                              <p:par>
+                                <p:cTn id="5" presetID="3" presetClass="entr" presetSubtype="10" fill="hold" grpId="0" nodeType="clickEffect">
+                                  <p:stCondLst>
+                                    <p:cond delay="0"/>
+                                  </p:stCondLst>
+                                  <p:childTnLst>
+                                    <p:set>
+                                      <p:cBhvr>
+                                        <p:cTn id="6" dur="1" fill="hold">
+                                          <p:stCondLst>
+                                            <p:cond delay="0"/>
+                                          </p:stCondLst>
+                                        </p:cTn>
+                                        <p:tgtEl>
+                                          <p:spTgt spid="887811">
+                                            <p:txEl>
+                                              <p:pRg st="0" end="0"/>
+                                            </p:txEl>
+                                          </p:spTgt>
+                                        </p:tgtEl>
+                                        <p:attrNameLst>
+                                          <p:attrName>style.visibility</p:attrName>
+                                        </p:attrNameLst>
+                                      </p:cBhvr>
+                                      <p:to>
+                                        <p:strVal val="visible"/>
+                                      </p:to>
+                                    </p:set>
+                                    <p:animEffect transition="in" filter="blinds(horizontal)">
+                                      <p:cBhvr>
+                                        <p:cTn id="7" dur="500"/>
+                                        <p:tgtEl>
+                                          <p:spTgt spid="887811">
+                                            <p:txEl>
+                                              <p:pRg st="0" end="0"/>
+                                            </p:txEl>
+                                          </p:spTgt>
+                                        </p:tgtEl>
+                                      </p:cBhvr>
+                                    </p:animEffect>
+                                  </p:childTnLst>
+                                </p:cTn>
+                              </p:par>
+                            </p:childTnLst>
+                          </p:cTn>
+                        </p:par>
+                      </p:childTnLst>
+                    </p:cTn>
+                  </p:par>
+                  <p:par>
+                    <p:cTn id="8" fill="hold">
+                      <p:stCondLst>
+                        <p:cond delay="indefinite"/>
+                      </p:stCondLst>
+                      <p:childTnLst>
+                        <p:par>
+                          <p:cTn id="9" fill="hold">
+                            <p:stCondLst>
+                              <p:cond delay="0"/>
+                            </p:stCondLst>
+                            <p:childTnLst>
+                              <p:par>
+                                <p:cTn id="10" presetID="3" presetClass="entr" presetSubtype="10" fill="hold" grpId="0" nodeType="clickEffect">
+                                  <p:stCondLst>
+                                    <p:cond delay="0"/>
+                                  </p:stCondLst>
+                                  <p:childTnLst>
+                                    <p:set>
+                                      <p:cBhvr>
+                                        <p:cTn id="11" dur="1" fill="hold">
+                                          <p:stCondLst>
+                                            <p:cond delay="0"/>
+                                          </p:stCondLst>
+                                        </p:cTn>
+                                        <p:tgtEl>
+                                          <p:spTgt spid="887811">
+                                            <p:txEl>
+                                              <p:pRg st="1" end="1"/>
+                                            </p:txEl>
+                                          </p:spTgt>
+                                        </p:tgtEl>
+                                        <p:attrNameLst>
+                                          <p:attrName>style.visibility</p:attrName>
+                                        </p:attrNameLst>
+                                      </p:cBhvr>
+                                      <p:to>
+                                        <p:strVal val="visible"/>
+                                      </p:to>
+                                    </p:set>
+                                    <p:animEffect transition="in" filter="blinds(horizontal)">
+                                      <p:cBhvr>
+                                        <p:cTn id="12" dur="500"/>
+                                        <p:tgtEl>
+                                          <p:spTgt spid="887811">
+                                            <p:txEl>
+                                              <p:pRg st="1" end="1"/>
+                                            </p:txEl>
+                                          </p:spTgt>
+                                        </p:tgtEl>
+                                      </p:cBhvr>
+                                    </p:animEffect>
+                                  </p:childTnLst>
+                                </p:cTn>
+                              </p:par>
+                            </p:childTnLst>
+                          </p:cTn>
+                        </p:par>
+                      </p:childTnLst>
+                    </p:cTn>
+                  </p:par>
+                  <p:par>
+                    <p:cTn id="13" fill="hold">
+                      <p:stCondLst>
+                        <p:cond delay="indefinite"/>
+                      </p:stCondLst>
+                      <p:childTnLst>
+                        <p:par>
+                          <p:cTn id="14" fill="hold">
+                            <p:stCondLst>
+                              <p:cond delay="0"/>
+                            </p:stCondLst>
+                            <p:childTnLst>
+                              <p:par>
+                                <p:cTn id="15" presetID="3" presetClass="entr" presetSubtype="10" fill="hold" grpId="0" nodeType="clickEffect">
+                                  <p:stCondLst>
+                                    <p:cond delay="0"/>
+                                  </p:stCondLst>
+                                  <p:childTnLst>
+                                    <p:set>
+                                      <p:cBhvr>
+                                        <p:cTn id="16" dur="1" fill="hold">
+                                          <p:stCondLst>
+                                            <p:cond delay="0"/>
+                                          </p:stCondLst>
+                                        </p:cTn>
+                                        <p:tgtEl>
+                                          <p:spTgt spid="887811">
+                                            <p:txEl>
+                                              <p:pRg st="2" end="2"/>
+                                            </p:txEl>
+                                          </p:spTgt>
+                                        </p:tgtEl>
+                                        <p:attrNameLst>
+                                          <p:attrName>style.visibility</p:attrName>
+                                        </p:attrNameLst>
+                                      </p:cBhvr>
+                                      <p:to>
+                                        <p:strVal val="visible"/>
+                                      </p:to>
+                                    </p:set>
+                                    <p:animEffect transition="in" filter="blinds(horizontal)">
+                                      <p:cBhvr>
+                                        <p:cTn id="17" dur="500"/>
+                                        <p:tgtEl>
+                                          <p:spTgt spid="887811">
+                                            <p:txEl>
+                                              <p:pRg st="2" end="2"/>
+                                            </p:txEl>
+                                          </p:spTgt>
+                                        </p:tgtEl>
+                                      </p:cBhvr>
+                                    </p:animEffect>
+                                  </p:childTnLst>
+                                </p:cTn>
+                              </p:par>
+                            </p:childTnLst>
+                          </p:cTn>
+                        </p:par>
+                      </p:childTnLst>
+                    </p:cTn>
+                  </p:par>
+                  <p:par>
+                    <p:cTn id="18" fill="hold">
+                      <p:stCondLst>
+                        <p:cond delay="indefinite"/>
+                      </p:stCondLst>
+                      <p:childTnLst>
+                        <p:par>
+                          <p:cTn id="19" fill="hold">
+                            <p:stCondLst>
+                              <p:cond delay="0"/>
+                            </p:stCondLst>
+                            <p:childTnLst>
+                              <p:par>
+                                <p:cTn id="20" presetID="3" presetClass="entr" presetSubtype="10" fill="hold" grpId="0" nodeType="clickEffect">
+                                  <p:stCondLst>
+                                    <p:cond delay="0"/>
+                                  </p:stCondLst>
+                                  <p:childTnLst>
+                                    <p:set>
+                                      <p:cBhvr>
+                                        <p:cTn id="21" dur="1" fill="hold">
+                                          <p:stCondLst>
+                                            <p:cond delay="0"/>
+                                          </p:stCondLst>
+                                        </p:cTn>
+                                        <p:tgtEl>
+                                          <p:spTgt spid="887811">
+                                            <p:txEl>
+                                              <p:pRg st="3" end="3"/>
+                                            </p:txEl>
+                                          </p:spTgt>
+                                        </p:tgtEl>
+                                        <p:attrNameLst>
+                                          <p:attrName>style.visibility</p:attrName>
+                                        </p:attrNameLst>
+                                      </p:cBhvr>
+                                      <p:to>
+                                        <p:strVal val="visible"/>
+                                      </p:to>
+                                    </p:set>
+                                    <p:animEffect transition="in" filter="blinds(horizontal)">
+                                      <p:cBhvr>
+                                        <p:cTn id="22" dur="500"/>
+                                        <p:tgtEl>
+                                          <p:spTgt spid="887811">
+                                            <p:txEl>
+                                              <p:pRg st="3" end="3"/>
+                                            </p:txEl>
+                                          </p:spTgt>
+                                        </p:tgtEl>
+                                      </p:cBhvr>
+                                    </p:animEffect>
+                                  </p:childTnLst>
+                                </p:cTn>
+                              </p:par>
+                            </p:childTnLst>
+                          </p:cTn>
+                        </p:par>
+                      </p:childTnLst>
+                    </p:cTn>
+                  </p:par>
+                  <p:par>
+                    <p:cTn id="23" fill="hold">
+                      <p:stCondLst>
+                        <p:cond delay="indefinite"/>
+                      </p:stCondLst>
+                      <p:childTnLst>
+                        <p:par>
+                          <p:cTn id="24" fill="hold">
+                            <p:stCondLst>
+                              <p:cond delay="0"/>
+                            </p:stCondLst>
+                            <p:childTnLst>
+                              <p:par>
+                                <p:cTn id="25" presetID="3" presetClass="entr" presetSubtype="10" fill="hold" grpId="0" nodeType="clickEffect">
+                                  <p:stCondLst>
+                                    <p:cond delay="0"/>
+                                  </p:stCondLst>
+                                  <p:childTnLst>
+                                    <p:set>
+                                      <p:cBhvr>
+                                        <p:cTn id="26" dur="1" fill="hold">
+                                          <p:stCondLst>
+                                            <p:cond delay="0"/>
+                                          </p:stCondLst>
+                                        </p:cTn>
+                                        <p:tgtEl>
+                                          <p:spTgt spid="887811">
+                                            <p:txEl>
+                                              <p:pRg st="4" end="4"/>
+                                            </p:txEl>
+                                          </p:spTgt>
+                                        </p:tgtEl>
+                                        <p:attrNameLst>
+                                          <p:attrName>style.visibility</p:attrName>
+                                        </p:attrNameLst>
+                                      </p:cBhvr>
+                                      <p:to>
+                                        <p:strVal val="visible"/>
+                                      </p:to>
+                                    </p:set>
+                                    <p:animEffect transition="in" filter="blinds(horizontal)">
+                                      <p:cBhvr>
+                                        <p:cTn id="27" dur="500"/>
+                                        <p:tgtEl>
+                                          <p:spTgt spid="887811">
+                                            <p:txEl>
+                                              <p:pRg st="4" end="4"/>
+                                            </p:txEl>
+                                          </p:spTgt>
+                                        </p:tgtEl>
+                                      </p:cBhvr>
+                                    </p:animEffect>
+                                  </p:childTnLst>
+                                </p:cTn>
+                              </p:par>
+                            </p:childTnLst>
+                          </p:cTn>
+                        </p:par>
+                      </p:childTnLst>
+                    </p:cTn>
+                  </p:par>
+                  <p:par>
+                    <p:cTn id="28" fill="hold">
+                      <p:stCondLst>
+                        <p:cond delay="indefinite"/>
+                      </p:stCondLst>
+                      <p:childTnLst>
+                        <p:par>
+                          <p:cTn id="29" fill="hold">
+                            <p:stCondLst>
+                              <p:cond delay="0"/>
+                            </p:stCondLst>
+                            <p:childTnLst>
+                              <p:par>
+                                <p:cTn id="30" presetID="3" presetClass="entr" presetSubtype="10" fill="hold" grpId="0" nodeType="clickEffect">
+                                  <p:stCondLst>
+                                    <p:cond delay="0"/>
+                                  </p:stCondLst>
+                                  <p:childTnLst>
+                                    <p:set>
+                                      <p:cBhvr>
+                                        <p:cTn id="31" dur="1" fill="hold">
+                                          <p:stCondLst>
+                                            <p:cond delay="0"/>
+                                          </p:stCondLst>
+                                        </p:cTn>
+                                        <p:tgtEl>
+                                          <p:spTgt spid="887811">
+                                            <p:txEl>
+                                              <p:pRg st="5" end="5"/>
+                                            </p:txEl>
+                                          </p:spTgt>
+                                        </p:tgtEl>
+                                        <p:attrNameLst>
+                                          <p:attrName>style.visibility</p:attrName>
+                                        </p:attrNameLst>
+                                      </p:cBhvr>
+                                      <p:to>
+                                        <p:strVal val="visible"/>
+                                      </p:to>
+                                    </p:set>
+                                    <p:animEffect transition="in" filter="blinds(horizontal)">
+                                      <p:cBhvr>
+                                        <p:cTn id="32" dur="500"/>
+                                        <p:tgtEl>
+                                          <p:spTgt spid="887811">
+                                            <p:txEl>
+                                              <p:pRg st="5" end="5"/>
+                                            </p:txEl>
+                                          </p:spTgt>
+                                        </p:tgtEl>
+                                      </p:cBhvr>
+                                    </p:animEffect>
+                                  </p:childTnLst>
+                                </p:cTn>
+                              </p:par>
+                            </p:childTnLst>
+                          </p:cTn>
+                        </p:par>
+                      </p:childTnLst>
+                    </p:cTn>
+                  </p:par>
+                  <p:par>
+                    <p:cTn id="33" fill="hold">
+                      <p:stCondLst>
+                        <p:cond delay="indefinite"/>
+                      </p:stCondLst>
+                      <p:childTnLst>
+                        <p:par>
+                          <p:cTn id="34" fill="hold">
+                            <p:stCondLst>
+                              <p:cond delay="0"/>
+                            </p:stCondLst>
+                            <p:childTnLst>
+                              <p:par>
+                                <p:cTn id="35" presetID="3" presetClass="entr" presetSubtype="10" fill="hold" grpId="0" nodeType="clickEffect">
+                                  <p:stCondLst>
+                                    <p:cond delay="0"/>
+                                  </p:stCondLst>
+                                  <p:childTnLst>
+                                    <p:set>
+                                      <p:cBhvr>
+                                        <p:cTn id="36" dur="1" fill="hold">
+                                          <p:stCondLst>
+                                            <p:cond delay="0"/>
+                                          </p:stCondLst>
+                                        </p:cTn>
+                                        <p:tgtEl>
+                                          <p:spTgt spid="887811">
+                                            <p:txEl>
+                                              <p:pRg st="6" end="6"/>
+                                            </p:txEl>
+                                          </p:spTgt>
+                                        </p:tgtEl>
+                                        <p:attrNameLst>
+                                          <p:attrName>style.visibility</p:attrName>
+                                        </p:attrNameLst>
+                                      </p:cBhvr>
+                                      <p:to>
+                                        <p:strVal val="visible"/>
+                                      </p:to>
+                                    </p:set>
+                                    <p:animEffect transition="in" filter="blinds(horizontal)">
+                                      <p:cBhvr>
+                                        <p:cTn id="37" dur="500"/>
+                                        <p:tgtEl>
+                                          <p:spTgt spid="887811">
+                                            <p:txEl>
+                                              <p:pRg st="6" end="6"/>
+                                            </p:txEl>
+                                          </p:spTgt>
+                                        </p:tgtEl>
+                                      </p:cBhvr>
+                                    </p:animEffect>
+                                  </p:childTnLst>
+                                </p:cTn>
+                              </p:par>
+                            </p:childTnLst>
+                          </p:cTn>
+                        </p:par>
+                      </p:childTnLst>
+                    </p:cTn>
+                  </p:par>
+                  <p:par>
+                    <p:cTn id="38" fill="hold">
+                      <p:stCondLst>
+                        <p:cond delay="indefinite"/>
+                      </p:stCondLst>
+                      <p:childTnLst>
+                        <p:par>
+                          <p:cTn id="39" fill="hold">
                             <p:stCondLst>
                               <p:cond delay="0"/>
                             </p:stCondLst>
@@ -22512,6 +21267,11 @@
               </a:rPr>
               <a:t>AUC</a:t>
             </a:r>
+            <a:endParaRPr lang="en-US" altLang="zh-CN" sz="2400" b="1" dirty="0">
+              <a:latin typeface="Times New Roman" panose="02020603050405020304" pitchFamily="18" charset="0"/>
+              <a:ea typeface="楷体" panose="02010609060101010101" pitchFamily="49" charset="-122"/>
+              <a:cs typeface="Times New Roman" panose="02020603050405020304" pitchFamily="18" charset="0"/>
+            </a:endParaRPr>
           </a:p>
         </p:txBody>
       </p:sp>
@@ -22524,7 +21284,7 @@
           <p:nvPr/>
         </p:nvPicPr>
         <p:blipFill>
-          <a:blip r:embed="rId2" cstate="print">
+          <a:blip r:embed="rId1" cstate="print">
             <a:extLst>
               <a:ext uri="{28A0092B-C50C-407E-A947-70E740481C1C}">
                 <a14:useLocalDpi xmlns:a14="http://schemas.microsoft.com/office/drawing/2010/main" val="0"/>
@@ -22580,11 +21340,6 @@
         </p:spPr>
       </p:pic>
     </p:spTree>
-    <p:extLst>
-      <p:ext uri="{BB962C8B-B14F-4D97-AF65-F5344CB8AC3E}">
-        <p14:creationId xmlns:p14="http://schemas.microsoft.com/office/powerpoint/2010/main" val="3273693375"/>
-      </p:ext>
-    </p:extLst>
   </p:cSld>
   <p:clrMapOvr>
     <a:masterClrMapping/>
@@ -22686,13 +21441,7 @@
       </p:grpSpPr>
       <p:sp>
         <p:nvSpPr>
-          <p:cNvPr id="18434" name="灯片编号占位符 5">
-            <a:extLst>
-              <a:ext uri="{FF2B5EF4-FFF2-40B4-BE49-F238E27FC236}">
-                <a16:creationId xmlns:a16="http://schemas.microsoft.com/office/drawing/2014/main" id="{CBBD9809-2CC4-42C3-B564-FAC6896E7580}"/>
-              </a:ext>
-            </a:extLst>
-          </p:cNvPr>
+          <p:cNvPr id="18434" name="灯片编号占位符 5"/>
           <p:cNvSpPr>
             <a:spLocks noGrp="1"/>
           </p:cNvSpPr>
@@ -22876,14 +21625,6 @@
               <a:rPr kumimoji="1" lang="en-US" altLang="zh-CN" sz="1400" smtClean="0">
                 <a:latin typeface="Times New Roman" panose="02020603050405020304" pitchFamily="18" charset="0"/>
               </a:rPr>
-              <a:pPr>
-                <a:spcBef>
-                  <a:spcPct val="0"/>
-                </a:spcBef>
-                <a:buFontTx/>
-                <a:buNone/>
-              </a:pPr>
-              <a:t>7</a:t>
             </a:fld>
             <a:endParaRPr kumimoji="1" lang="en-US" altLang="zh-CN" sz="1400">
               <a:latin typeface="Times New Roman" panose="02020603050405020304" pitchFamily="18" charset="0"/>
@@ -22893,13 +21634,7 @@
       </p:sp>
       <p:sp>
         <p:nvSpPr>
-          <p:cNvPr id="887811" name="Rectangle 3">
-            <a:extLst>
-              <a:ext uri="{FF2B5EF4-FFF2-40B4-BE49-F238E27FC236}">
-                <a16:creationId xmlns:a16="http://schemas.microsoft.com/office/drawing/2014/main" id="{E67925BF-BD9D-4849-975B-B00461AA9122}"/>
-              </a:ext>
-            </a:extLst>
-          </p:cNvPr>
+          <p:cNvPr id="887811" name="Rectangle 3"/>
           <p:cNvSpPr>
             <a:spLocks noGrp="1"/>
           </p:cNvSpPr>
@@ -22996,6 +21731,11 @@
               </a:rPr>
               <a:t>对数几率回归（极大似然法）</a:t>
             </a:r>
+            <a:endParaRPr lang="zh-CN" altLang="en-US" sz="2400" dirty="0">
+              <a:latin typeface="Times New Roman" panose="02020603050405020304" pitchFamily="18" charset="0"/>
+              <a:ea typeface="楷体" panose="02010609060101010101" pitchFamily="49" charset="-122"/>
+              <a:cs typeface="Times New Roman" panose="02020603050405020304" pitchFamily="18" charset="0"/>
+            </a:endParaRPr>
           </a:p>
           <a:p>
             <a:pPr lvl="1" eaLnBrk="1" hangingPunct="1">
@@ -23085,6 +21825,11 @@
               </a:rPr>
               <a:t>一对一</a:t>
             </a:r>
+            <a:endParaRPr lang="zh-CN" altLang="en-US" sz="2400" dirty="0">
+              <a:latin typeface="Times New Roman" panose="02020603050405020304" pitchFamily="18" charset="0"/>
+              <a:ea typeface="楷体" panose="02010609060101010101" pitchFamily="49" charset="-122"/>
+              <a:cs typeface="Times New Roman" panose="02020603050405020304" pitchFamily="18" charset="0"/>
+            </a:endParaRPr>
           </a:p>
           <a:p>
             <a:pPr lvl="1" eaLnBrk="1" hangingPunct="1">
@@ -23106,6 +21851,11 @@
               </a:rPr>
               <a:t>一对其余</a:t>
             </a:r>
+            <a:endParaRPr lang="zh-CN" altLang="en-US" sz="2400" dirty="0">
+              <a:latin typeface="Times New Roman" panose="02020603050405020304" pitchFamily="18" charset="0"/>
+              <a:ea typeface="楷体" panose="02010609060101010101" pitchFamily="49" charset="-122"/>
+              <a:cs typeface="Times New Roman" panose="02020603050405020304" pitchFamily="18" charset="0"/>
+            </a:endParaRPr>
           </a:p>
           <a:p>
             <a:pPr lvl="1" eaLnBrk="1" hangingPunct="1">
@@ -23143,6 +21893,11 @@
               </a:rPr>
               <a:t>）</a:t>
             </a:r>
+            <a:endParaRPr lang="zh-CN" altLang="en-US" sz="2400" dirty="0">
+              <a:latin typeface="Times New Roman" panose="02020603050405020304" pitchFamily="18" charset="0"/>
+              <a:ea typeface="楷体" panose="02010609060101010101" pitchFamily="49" charset="-122"/>
+              <a:cs typeface="Times New Roman" panose="02020603050405020304" pitchFamily="18" charset="0"/>
+            </a:endParaRPr>
           </a:p>
           <a:p>
             <a:pPr eaLnBrk="1" hangingPunct="1">
@@ -23288,13 +22043,7 @@
       </p:sp>
       <p:sp>
         <p:nvSpPr>
-          <p:cNvPr id="18436" name="Text Box 4">
-            <a:extLst>
-              <a:ext uri="{FF2B5EF4-FFF2-40B4-BE49-F238E27FC236}">
-                <a16:creationId xmlns:a16="http://schemas.microsoft.com/office/drawing/2014/main" id="{EB81EA09-BA58-4C02-A7E1-E64004DF3351}"/>
-              </a:ext>
-            </a:extLst>
-          </p:cNvPr>
+          <p:cNvPr id="18436" name="Text Box 4"/>
           <p:cNvSpPr txBox="1">
             <a:spLocks noChangeArrowheads="1"/>
           </p:cNvSpPr>
@@ -23518,6 +22267,11 @@
               </a:rPr>
               <a:t>章：线性模型</a:t>
             </a:r>
+            <a:endParaRPr kumimoji="1" lang="zh-CN" altLang="en-US" b="1" dirty="0">
+              <a:latin typeface="黑体" panose="02010609060101010101" pitchFamily="49" charset="-122"/>
+              <a:ea typeface="黑体" panose="02010609060101010101" pitchFamily="49" charset="-122"/>
+              <a:cs typeface="楷体_GB2312"/>
+            </a:endParaRPr>
           </a:p>
         </p:txBody>
       </p:sp>
@@ -23527,13 +22281,7 @@
           <p:cNvGraphicFramePr>
             <a:graphicFrameLocks noChangeAspect="1"/>
           </p:cNvGraphicFramePr>
-          <p:nvPr>
-            <p:extLst>
-              <p:ext uri="{D42A27DB-BD31-4B8C-83A1-F6EECF244321}">
-                <p14:modId xmlns:p14="http://schemas.microsoft.com/office/powerpoint/2010/main" val="1011501050"/>
-              </p:ext>
-            </p:extLst>
-          </p:nvPr>
+          <p:nvPr/>
         </p:nvGraphicFramePr>
         <p:xfrm>
           <a:off x="4211960" y="726281"/>
@@ -23543,23 +22291,23 @@
           <a:graphicData uri="http://schemas.openxmlformats.org/presentationml/2006/ole">
             <mc:AlternateContent xmlns:mc="http://schemas.openxmlformats.org/markup-compatibility/2006">
               <mc:Choice xmlns:v="urn:schemas-microsoft-com:vml" Requires="v">
-                <p:oleObj name="Formula" r:id="rId3" imgW="1096200" imgH="186840" progId="Equation.Ribbit">
+                <p:oleObj spid="_x0000_s27941" name="Formula" r:id="rId1" imgW="1096010" imgH="186690" progId="Equation.Ribbit">
                   <p:embed/>
                 </p:oleObj>
               </mc:Choice>
               <mc:Fallback>
-                <p:oleObj name="Formula" r:id="rId3" imgW="1096200" imgH="186840" progId="Equation.Ribbit">
+                <p:oleObj name="Formula" r:id="rId1" imgW="1096010" imgH="186690" progId="Equation.Ribbit">
                   <p:embed/>
                   <p:pic>
                     <p:nvPicPr>
-                      <p:cNvPr id="6" name="对象 5"/>
+                      <p:cNvPr id="0" name="对象 5"/>
                       <p:cNvPicPr>
                         <a:picLocks noChangeAspect="1" noChangeArrowheads="1"/>
                       </p:cNvPicPr>
                       <p:nvPr/>
                     </p:nvPicPr>
                     <p:blipFill>
-                      <a:blip r:embed="rId4">
+                      <a:blip r:embed="rId2">
                         <a:extLst>
                           <a:ext uri="{28A0092B-C50C-407E-A947-70E740481C1C}">
                             <a14:useLocalDpi xmlns:a14="http://schemas.microsoft.com/office/drawing/2010/main" val="0"/>
@@ -23619,7 +22367,7 @@
           <p:nvPr/>
         </p:nvPicPr>
         <p:blipFill>
-          <a:blip r:embed="rId5"/>
+          <a:blip r:embed="rId3"/>
           <a:stretch>
             <a:fillRect/>
           </a:stretch>
@@ -23640,13 +22388,7 @@
           <p:cNvGraphicFramePr>
             <a:graphicFrameLocks noChangeAspect="1"/>
           </p:cNvGraphicFramePr>
-          <p:nvPr>
-            <p:extLst>
-              <p:ext uri="{D42A27DB-BD31-4B8C-83A1-F6EECF244321}">
-                <p14:modId xmlns:p14="http://schemas.microsoft.com/office/powerpoint/2010/main" val="1885593413"/>
-              </p:ext>
-            </p:extLst>
-          </p:nvPr>
+          <p:nvPr/>
         </p:nvGraphicFramePr>
         <p:xfrm>
           <a:off x="7264021" y="2895020"/>
@@ -23656,23 +22398,23 @@
           <a:graphicData uri="http://schemas.openxmlformats.org/presentationml/2006/ole">
             <mc:AlternateContent xmlns:mc="http://schemas.openxmlformats.org/markup-compatibility/2006">
               <mc:Choice xmlns:v="urn:schemas-microsoft-com:vml" Requires="v">
-                <p:oleObj name="Formula" r:id="rId6" imgW="839520" imgH="379800" progId="Equation.Ribbit">
+                <p:oleObj spid="_x0000_s3" name="Formula" r:id="rId4" imgW="839470" imgH="379730" progId="Equation.Ribbit">
                   <p:embed/>
                 </p:oleObj>
               </mc:Choice>
               <mc:Fallback>
-                <p:oleObj name="Formula" r:id="rId6" imgW="839520" imgH="379800" progId="Equation.Ribbit">
+                <p:oleObj name="Formula" r:id="rId4" imgW="839470" imgH="379730" progId="Equation.Ribbit">
                   <p:embed/>
                   <p:pic>
                     <p:nvPicPr>
-                      <p:cNvPr id="5" name="对象 4"/>
+                      <p:cNvPr id="0" name="对象 4"/>
                       <p:cNvPicPr>
                         <a:picLocks noChangeAspect="1" noChangeArrowheads="1"/>
                       </p:cNvPicPr>
                       <p:nvPr/>
                     </p:nvPicPr>
                     <p:blipFill>
-                      <a:blip r:embed="rId7">
+                      <a:blip r:embed="rId5">
                         <a:extLst>
                           <a:ext uri="{28A0092B-C50C-407E-A947-70E740481C1C}">
                             <a14:useLocalDpi xmlns:a14="http://schemas.microsoft.com/office/drawing/2010/main" val="0"/>
@@ -23710,13 +22452,7 @@
           <p:cNvGraphicFramePr>
             <a:graphicFrameLocks noChangeAspect="1"/>
           </p:cNvGraphicFramePr>
-          <p:nvPr>
-            <p:extLst>
-              <p:ext uri="{D42A27DB-BD31-4B8C-83A1-F6EECF244321}">
-                <p14:modId xmlns:p14="http://schemas.microsoft.com/office/powerpoint/2010/main" val="620882007"/>
-              </p:ext>
-            </p:extLst>
-          </p:nvPr>
+          <p:nvPr/>
         </p:nvGraphicFramePr>
         <p:xfrm>
           <a:off x="5673535" y="1618580"/>
@@ -23726,23 +22462,23 @@
           <a:graphicData uri="http://schemas.openxmlformats.org/presentationml/2006/ole">
             <mc:AlternateContent xmlns:mc="http://schemas.openxmlformats.org/markup-compatibility/2006">
               <mc:Choice xmlns:v="urn:schemas-microsoft-com:vml" Requires="v">
-                <p:oleObj name="Formula" r:id="rId8" imgW="1158480" imgH="344520" progId="Equation.Ribbit">
+                <p:oleObj spid="_x0000_s4" name="Formula" r:id="rId6" imgW="1158240" imgH="344170" progId="Equation.Ribbit">
                   <p:embed/>
                 </p:oleObj>
               </mc:Choice>
               <mc:Fallback>
-                <p:oleObj name="Formula" r:id="rId8" imgW="1158480" imgH="344520" progId="Equation.Ribbit">
+                <p:oleObj name="Formula" r:id="rId6" imgW="1158240" imgH="344170" progId="Equation.Ribbit">
                   <p:embed/>
                   <p:pic>
                     <p:nvPicPr>
-                      <p:cNvPr id="5" name="对象 4"/>
+                      <p:cNvPr id="0" name="对象 4"/>
                       <p:cNvPicPr>
                         <a:picLocks noChangeAspect="1" noChangeArrowheads="1"/>
                       </p:cNvPicPr>
                       <p:nvPr/>
                     </p:nvPicPr>
                     <p:blipFill>
-                      <a:blip r:embed="rId9">
+                      <a:blip r:embed="rId7">
                         <a:extLst>
                           <a:ext uri="{28A0092B-C50C-407E-A947-70E740481C1C}">
                             <a14:useLocalDpi xmlns:a14="http://schemas.microsoft.com/office/drawing/2010/main" val="0"/>
@@ -23794,11 +22530,6 @@
         </a:graphic>
       </p:graphicFrame>
     </p:spTree>
-    <p:extLst>
-      <p:ext uri="{BB962C8B-B14F-4D97-AF65-F5344CB8AC3E}">
-        <p14:creationId xmlns:p14="http://schemas.microsoft.com/office/powerpoint/2010/main" val="99380758"/>
-      </p:ext>
-    </p:extLst>
   </p:cSld>
   <p:clrMapOvr>
     <a:masterClrMapping/>
@@ -24514,13 +23245,7 @@
       </p:grpSpPr>
       <p:sp>
         <p:nvSpPr>
-          <p:cNvPr id="18434" name="灯片编号占位符 5">
-            <a:extLst>
-              <a:ext uri="{FF2B5EF4-FFF2-40B4-BE49-F238E27FC236}">
-                <a16:creationId xmlns:a16="http://schemas.microsoft.com/office/drawing/2014/main" id="{CBBD9809-2CC4-42C3-B564-FAC6896E7580}"/>
-              </a:ext>
-            </a:extLst>
-          </p:cNvPr>
+          <p:cNvPr id="18434" name="灯片编号占位符 5"/>
           <p:cNvSpPr>
             <a:spLocks noGrp="1"/>
           </p:cNvSpPr>
@@ -24704,14 +23429,6 @@
               <a:rPr kumimoji="1" lang="en-US" altLang="zh-CN" sz="1400" smtClean="0">
                 <a:latin typeface="Times New Roman" panose="02020603050405020304" pitchFamily="18" charset="0"/>
               </a:rPr>
-              <a:pPr>
-                <a:spcBef>
-                  <a:spcPct val="0"/>
-                </a:spcBef>
-                <a:buFontTx/>
-                <a:buNone/>
-              </a:pPr>
-              <a:t>8</a:t>
             </a:fld>
             <a:endParaRPr kumimoji="1" lang="en-US" altLang="zh-CN" sz="1400">
               <a:latin typeface="Times New Roman" panose="02020603050405020304" pitchFamily="18" charset="0"/>
@@ -24721,13 +23438,7 @@
       </p:sp>
       <p:sp>
         <p:nvSpPr>
-          <p:cNvPr id="887811" name="Rectangle 3">
-            <a:extLst>
-              <a:ext uri="{FF2B5EF4-FFF2-40B4-BE49-F238E27FC236}">
-                <a16:creationId xmlns:a16="http://schemas.microsoft.com/office/drawing/2014/main" id="{E67925BF-BD9D-4849-975B-B00461AA9122}"/>
-              </a:ext>
-            </a:extLst>
-          </p:cNvPr>
+          <p:cNvPr id="887811" name="Rectangle 3"/>
           <p:cNvSpPr>
             <a:spLocks noGrp="1"/>
           </p:cNvSpPr>
@@ -24764,6 +23475,11 @@
               </a:rPr>
               <a:t>经典的属性划分方法：</a:t>
             </a:r>
+            <a:endParaRPr lang="zh-CN" altLang="en-US" sz="2800" b="1" dirty="0">
+              <a:latin typeface="Times New Roman" panose="02020603050405020304" pitchFamily="18" charset="0"/>
+              <a:ea typeface="楷体" panose="02010609060101010101" pitchFamily="49" charset="-122"/>
+              <a:cs typeface="Times New Roman" panose="02020603050405020304" pitchFamily="18" charset="0"/>
+            </a:endParaRPr>
           </a:p>
           <a:p>
             <a:pPr lvl="1" eaLnBrk="1" hangingPunct="1">
@@ -24793,6 +23509,11 @@
               </a:rPr>
               <a:t>ID3</a:t>
             </a:r>
+            <a:endParaRPr lang="en-US" altLang="zh-CN" sz="2400" dirty="0">
+              <a:latin typeface="Times New Roman" panose="02020603050405020304" pitchFamily="18" charset="0"/>
+              <a:ea typeface="楷体" panose="02010609060101010101" pitchFamily="49" charset="-122"/>
+              <a:cs typeface="Times New Roman" panose="02020603050405020304" pitchFamily="18" charset="0"/>
+            </a:endParaRPr>
           </a:p>
           <a:p>
             <a:pPr lvl="1" eaLnBrk="1" hangingPunct="1">
@@ -24822,6 +23543,11 @@
               </a:rPr>
               <a:t>C4.5</a:t>
             </a:r>
+            <a:endParaRPr lang="en-US" altLang="zh-CN" sz="2400" dirty="0">
+              <a:latin typeface="Times New Roman" panose="02020603050405020304" pitchFamily="18" charset="0"/>
+              <a:ea typeface="楷体" panose="02010609060101010101" pitchFamily="49" charset="-122"/>
+              <a:cs typeface="Times New Roman" panose="02020603050405020304" pitchFamily="18" charset="0"/>
+            </a:endParaRPr>
           </a:p>
           <a:p>
             <a:pPr lvl="1" eaLnBrk="1" hangingPunct="1">
@@ -24851,6 +23577,11 @@
               </a:rPr>
               <a:t>CART</a:t>
             </a:r>
+            <a:endParaRPr lang="en-US" altLang="zh-CN" sz="2400" dirty="0">
+              <a:latin typeface="Times New Roman" panose="02020603050405020304" pitchFamily="18" charset="0"/>
+              <a:ea typeface="楷体" panose="02010609060101010101" pitchFamily="49" charset="-122"/>
+              <a:cs typeface="Times New Roman" panose="02020603050405020304" pitchFamily="18" charset="0"/>
+            </a:endParaRPr>
           </a:p>
           <a:p>
             <a:pPr eaLnBrk="1" hangingPunct="1">
@@ -24872,6 +23603,11 @@
               </a:rPr>
               <a:t>剪枝处理：“过拟合”的解决手段</a:t>
             </a:r>
+            <a:endParaRPr lang="zh-CN" altLang="en-US" sz="2800" b="1" dirty="0">
+              <a:latin typeface="Times New Roman" panose="02020603050405020304" pitchFamily="18" charset="0"/>
+              <a:ea typeface="楷体" panose="02010609060101010101" pitchFamily="49" charset="-122"/>
+              <a:cs typeface="Times New Roman" panose="02020603050405020304" pitchFamily="18" charset="0"/>
+            </a:endParaRPr>
           </a:p>
           <a:p>
             <a:pPr lvl="1" eaLnBrk="1" hangingPunct="1">
@@ -24893,6 +23629,11 @@
               </a:rPr>
               <a:t>预剪枝（优缺点）</a:t>
             </a:r>
+            <a:endParaRPr lang="zh-CN" altLang="en-US" sz="2400" dirty="0">
+              <a:latin typeface="Times New Roman" panose="02020603050405020304" pitchFamily="18" charset="0"/>
+              <a:ea typeface="楷体" panose="02010609060101010101" pitchFamily="49" charset="-122"/>
+              <a:cs typeface="Times New Roman" panose="02020603050405020304" pitchFamily="18" charset="0"/>
+            </a:endParaRPr>
           </a:p>
           <a:p>
             <a:pPr lvl="1" eaLnBrk="1" hangingPunct="1">
@@ -24914,6 +23655,11 @@
               </a:rPr>
               <a:t>后剪枝（优缺点）</a:t>
             </a:r>
+            <a:endParaRPr lang="zh-CN" altLang="en-US" sz="2400" dirty="0">
+              <a:latin typeface="Times New Roman" panose="02020603050405020304" pitchFamily="18" charset="0"/>
+              <a:ea typeface="楷体" panose="02010609060101010101" pitchFamily="49" charset="-122"/>
+              <a:cs typeface="Times New Roman" panose="02020603050405020304" pitchFamily="18" charset="0"/>
+            </a:endParaRPr>
           </a:p>
           <a:p>
             <a:pPr eaLnBrk="1" hangingPunct="1">
@@ -24987,6 +23733,11 @@
               </a:rPr>
               <a:t>回归树</a:t>
             </a:r>
+            <a:endParaRPr lang="zh-CN" altLang="en-US" sz="2800" b="1" dirty="0">
+              <a:latin typeface="Times New Roman" panose="02020603050405020304" pitchFamily="18" charset="0"/>
+              <a:ea typeface="楷体" panose="02010609060101010101" pitchFamily="49" charset="-122"/>
+              <a:cs typeface="Times New Roman" panose="02020603050405020304" pitchFamily="18" charset="0"/>
+            </a:endParaRPr>
           </a:p>
           <a:p>
             <a:pPr marL="0" indent="0" eaLnBrk="1" hangingPunct="1">
@@ -25122,13 +23873,7 @@
       </p:sp>
       <p:sp>
         <p:nvSpPr>
-          <p:cNvPr id="18436" name="Text Box 4">
-            <a:extLst>
-              <a:ext uri="{FF2B5EF4-FFF2-40B4-BE49-F238E27FC236}">
-                <a16:creationId xmlns:a16="http://schemas.microsoft.com/office/drawing/2014/main" id="{EB81EA09-BA58-4C02-A7E1-E64004DF3351}"/>
-              </a:ext>
-            </a:extLst>
-          </p:cNvPr>
+          <p:cNvPr id="18436" name="Text Box 4"/>
           <p:cNvSpPr txBox="1">
             <a:spLocks noChangeArrowheads="1"/>
           </p:cNvSpPr>
@@ -25352,15 +24097,15 @@
               </a:rPr>
               <a:t>章：决策树</a:t>
             </a:r>
+            <a:endParaRPr kumimoji="1" lang="zh-CN" altLang="en-US" b="1" dirty="0">
+              <a:latin typeface="黑体" panose="02010609060101010101" pitchFamily="49" charset="-122"/>
+              <a:ea typeface="黑体" panose="02010609060101010101" pitchFamily="49" charset="-122"/>
+              <a:cs typeface="楷体_GB2312"/>
+            </a:endParaRPr>
           </a:p>
         </p:txBody>
       </p:sp>
     </p:spTree>
-    <p:extLst>
-      <p:ext uri="{BB962C8B-B14F-4D97-AF65-F5344CB8AC3E}">
-        <p14:creationId xmlns:p14="http://schemas.microsoft.com/office/powerpoint/2010/main" val="2249180221"/>
-      </p:ext>
-    </p:extLst>
   </p:cSld>
   <p:clrMapOvr>
     <a:masterClrMapping/>
@@ -25712,13 +24457,13 @@
                     </p:cTn>
                   </p:par>
                   <p:par>
-                    <p:cTn id="28" fill="hold" nodeType="clickPar">
+                    <p:cTn id="28" fill="hold">
                       <p:stCondLst>
                         <p:cond delay="indefinite"/>
                       </p:stCondLst>
                       <p:childTnLst>
                         <p:par>
-                          <p:cTn id="29" fill="hold" nodeType="withGroup">
+                          <p:cTn id="29" fill="hold">
                             <p:stCondLst>
                               <p:cond delay="0"/>
                             </p:stCondLst>
@@ -25973,7 +24718,7 @@
           <p:nvPr/>
         </p:nvPicPr>
         <p:blipFill>
-          <a:blip r:embed="rId2">
+          <a:blip r:embed="rId1">
             <a:extLst>
               <a:ext uri="{28A0092B-C50C-407E-A947-70E740481C1C}">
                 <a14:useLocalDpi xmlns:a14="http://schemas.microsoft.com/office/drawing/2010/main" val="0"/>
@@ -26019,11 +24764,6 @@
         </p:spPr>
       </p:pic>
     </p:spTree>
-    <p:extLst>
-      <p:ext uri="{BB962C8B-B14F-4D97-AF65-F5344CB8AC3E}">
-        <p14:creationId xmlns:p14="http://schemas.microsoft.com/office/powerpoint/2010/main" val="31295996"/>
-      </p:ext>
-    </p:extLst>
   </p:cSld>
   <p:clrMapOvr>
     <a:masterClrMapping/>
@@ -26309,8 +25049,11 @@
       </a:bgFillStyleLst>
     </a:fmtScheme>
   </a:themeElements>
-  <a:objectDefaults/>
-  <a:extraClrSchemeLst/>
+  <a:extLst>
+    <a:ext uri="{05A4C25C-085E-4340-85A3-A5531E510DB2}">
+      <thm15:themeFamily xmlns:thm15="http://schemas.microsoft.com/office/thememl/2012/main" name="Office Theme" id="{62F939B6-93AF-4DB8-9C6B-D6C7DFDC589F}" vid="{4A3C46E8-61CC-4603-A589-7422A47A8E4A}"/>
+    </a:ext>
+  </a:extLst>
 </a:theme>
 </file>
 
@@ -26594,8 +25337,11 @@
       </a:bgFillStyleLst>
     </a:fmtScheme>
   </a:themeElements>
-  <a:objectDefaults/>
-  <a:extraClrSchemeLst/>
+  <a:extLst>
+    <a:ext uri="{05A4C25C-085E-4340-85A3-A5531E510DB2}">
+      <thm15:themeFamily xmlns:thm15="http://schemas.microsoft.com/office/thememl/2012/main" name="Office Theme" id="{62F939B6-93AF-4DB8-9C6B-D6C7DFDC589F}" vid="{4A3C46E8-61CC-4603-A589-7422A47A8E4A}"/>
+    </a:ext>
+  </a:extLst>
 </a:theme>
 </file>
 
@@ -26879,7 +25625,10 @@
       </a:bgFillStyleLst>
     </a:fmtScheme>
   </a:themeElements>
-  <a:objectDefaults/>
-  <a:extraClrSchemeLst/>
+  <a:extLst>
+    <a:ext uri="{05A4C25C-085E-4340-85A3-A5531E510DB2}">
+      <thm15:themeFamily xmlns:thm15="http://schemas.microsoft.com/office/thememl/2012/main" name="Office Theme" id="{62F939B6-93AF-4DB8-9C6B-D6C7DFDC589F}" vid="{4A3C46E8-61CC-4603-A589-7422A47A8E4A}"/>
+    </a:ext>
+  </a:extLst>
 </a:theme>
 </file>
--- a/机器学习/课件/ML-复习2026.pptx
+++ b/机器学习/课件/ML-复习2026.pptx
@@ -1,36 +1,36 @@
 
 <file path=ppt/presentation.xml><?xml version="1.0" encoding="utf-8"?>
-<p:presentation xmlns:a="http://schemas.openxmlformats.org/drawingml/2006/main" xmlns:r="http://schemas.openxmlformats.org/officeDocument/2006/relationships" xmlns:p="http://schemas.openxmlformats.org/presentationml/2006/main">
+<p:presentation xmlns:a="http://schemas.openxmlformats.org/drawingml/2006/main" xmlns:r="http://schemas.openxmlformats.org/officeDocument/2006/relationships" xmlns:p="http://schemas.openxmlformats.org/presentationml/2006/main" saveSubsetFonts="1">
   <p:sldMasterIdLst>
     <p:sldMasterId id="2147483648" r:id="rId1"/>
   </p:sldMasterIdLst>
   <p:notesMasterIdLst>
-    <p:notesMasterId r:id="rId4"/>
+    <p:notesMasterId r:id="rId22"/>
   </p:notesMasterIdLst>
   <p:handoutMasterIdLst>
-    <p:handoutMasterId r:id="rId24"/>
+    <p:handoutMasterId r:id="rId23"/>
   </p:handoutMasterIdLst>
   <p:sldIdLst>
-    <p:sldId id="257" r:id="rId3"/>
-    <p:sldId id="440" r:id="rId5"/>
-    <p:sldId id="441" r:id="rId6"/>
-    <p:sldId id="442" r:id="rId7"/>
-    <p:sldId id="338" r:id="rId8"/>
-    <p:sldId id="456" r:id="rId9"/>
-    <p:sldId id="443" r:id="rId10"/>
-    <p:sldId id="444" r:id="rId11"/>
-    <p:sldId id="453" r:id="rId12"/>
-    <p:sldId id="445" r:id="rId13"/>
-    <p:sldId id="452" r:id="rId14"/>
-    <p:sldId id="446" r:id="rId15"/>
-    <p:sldId id="447" r:id="rId16"/>
-    <p:sldId id="455" r:id="rId17"/>
-    <p:sldId id="457" r:id="rId18"/>
-    <p:sldId id="448" r:id="rId19"/>
-    <p:sldId id="458" r:id="rId20"/>
-    <p:sldId id="449" r:id="rId21"/>
-    <p:sldId id="454" r:id="rId22"/>
-    <p:sldId id="459" r:id="rId23"/>
+    <p:sldId id="257" r:id="rId2"/>
+    <p:sldId id="440" r:id="rId3"/>
+    <p:sldId id="441" r:id="rId4"/>
+    <p:sldId id="442" r:id="rId5"/>
+    <p:sldId id="338" r:id="rId6"/>
+    <p:sldId id="456" r:id="rId7"/>
+    <p:sldId id="443" r:id="rId8"/>
+    <p:sldId id="444" r:id="rId9"/>
+    <p:sldId id="453" r:id="rId10"/>
+    <p:sldId id="445" r:id="rId11"/>
+    <p:sldId id="452" r:id="rId12"/>
+    <p:sldId id="446" r:id="rId13"/>
+    <p:sldId id="447" r:id="rId14"/>
+    <p:sldId id="455" r:id="rId15"/>
+    <p:sldId id="457" r:id="rId16"/>
+    <p:sldId id="448" r:id="rId17"/>
+    <p:sldId id="458" r:id="rId18"/>
+    <p:sldId id="449" r:id="rId19"/>
+    <p:sldId id="454" r:id="rId20"/>
+    <p:sldId id="459" r:id="rId21"/>
   </p:sldIdLst>
   <p:sldSz cx="9144000" cy="6858000" type="screen4x3"/>
   <p:notesSz cx="9144000" cy="6858000"/>
@@ -162,17 +162,31 @@
   <p:extLst>
     <p:ext uri="{EFAFB233-063F-42B5-8137-9DF3F51BA10A}">
       <p15:sldGuideLst xmlns:p15="http://schemas.microsoft.com/office/powerpoint/2012/main">
-        <p15:guide id="1" orient="horz" pos="2160" userDrawn="1">
+        <p15:guide id="1" orient="horz" pos="2160">
           <p15:clr>
             <a:srgbClr val="A4A3A4"/>
           </p15:clr>
         </p15:guide>
-        <p15:guide id="2" pos="2857" userDrawn="1">
+        <p15:guide id="2" pos="2880">
           <p15:clr>
             <a:srgbClr val="A4A3A4"/>
           </p15:clr>
         </p15:guide>
       </p15:sldGuideLst>
+    </p:ext>
+    <p:ext uri="{2D200454-40CA-4A62-9FC3-DE9A4176ACB9}">
+      <p15:notesGuideLst xmlns:p15="http://schemas.microsoft.com/office/powerpoint/2012/main">
+        <p15:guide id="1" orient="horz" pos="2160">
+          <p15:clr>
+            <a:srgbClr val="A4A3A4"/>
+          </p15:clr>
+        </p15:guide>
+        <p15:guide id="2" pos="2880">
+          <p15:clr>
+            <a:srgbClr val="A4A3A4"/>
+          </p15:clr>
+        </p15:guide>
+      </p15:notesGuideLst>
     </p:ext>
   </p:extLst>
 </p:presentation>
@@ -205,7 +219,13 @@
       </p:grpSpPr>
       <p:sp>
         <p:nvSpPr>
-          <p:cNvPr id="2" name="页眉占位符 1"/>
+          <p:cNvPr id="2" name="页眉占位符 1">
+            <a:extLst>
+              <a:ext uri="{FF2B5EF4-FFF2-40B4-BE49-F238E27FC236}">
+                <a16:creationId xmlns:a16="http://schemas.microsoft.com/office/drawing/2014/main" id="{16F1F154-D08B-4637-BD6B-EE69DBEDFA29}"/>
+              </a:ext>
+            </a:extLst>
+          </p:cNvPr>
           <p:cNvSpPr>
             <a:spLocks noGrp="1"/>
           </p:cNvSpPr>
@@ -248,7 +268,13 @@
       </p:sp>
       <p:sp>
         <p:nvSpPr>
-          <p:cNvPr id="3" name="日期占位符 2"/>
+          <p:cNvPr id="3" name="日期占位符 2">
+            <a:extLst>
+              <a:ext uri="{FF2B5EF4-FFF2-40B4-BE49-F238E27FC236}">
+                <a16:creationId xmlns:a16="http://schemas.microsoft.com/office/drawing/2014/main" id="{73F24782-B8CC-4BB5-84E6-002BAC732084}"/>
+              </a:ext>
+            </a:extLst>
+          </p:cNvPr>
           <p:cNvSpPr>
             <a:spLocks noGrp="1"/>
           </p:cNvSpPr>
@@ -287,6 +313,10 @@
             </a:pPr>
             <a:fld id="{081DFCA3-140D-47A9-812B-EF4671D077DA}" type="datetimeFigureOut">
               <a:rPr lang="zh-CN" altLang="en-US"/>
+              <a:pPr>
+                <a:defRPr/>
+              </a:pPr>
+              <a:t>2026/6/2</a:t>
             </a:fld>
             <a:endParaRPr lang="zh-CN" altLang="en-US"/>
           </a:p>
@@ -294,7 +324,13 @@
       </p:sp>
       <p:sp>
         <p:nvSpPr>
-          <p:cNvPr id="4" name="页脚占位符 3"/>
+          <p:cNvPr id="4" name="页脚占位符 3">
+            <a:extLst>
+              <a:ext uri="{FF2B5EF4-FFF2-40B4-BE49-F238E27FC236}">
+                <a16:creationId xmlns:a16="http://schemas.microsoft.com/office/drawing/2014/main" id="{DB747B93-988F-4543-BD9C-1C7CB3B58114}"/>
+              </a:ext>
+            </a:extLst>
+          </p:cNvPr>
           <p:cNvSpPr>
             <a:spLocks noGrp="1"/>
           </p:cNvSpPr>
@@ -337,7 +373,13 @@
       </p:sp>
       <p:sp>
         <p:nvSpPr>
-          <p:cNvPr id="5" name="灯片编号占位符 4"/>
+          <p:cNvPr id="5" name="灯片编号占位符 4">
+            <a:extLst>
+              <a:ext uri="{FF2B5EF4-FFF2-40B4-BE49-F238E27FC236}">
+                <a16:creationId xmlns:a16="http://schemas.microsoft.com/office/drawing/2014/main" id="{BD722FE9-DBFB-41DB-83A5-159F33A862E4}"/>
+              </a:ext>
+            </a:extLst>
+          </p:cNvPr>
           <p:cNvSpPr>
             <a:spLocks noGrp="1"/>
           </p:cNvSpPr>
@@ -355,7 +397,11 @@
           </a:prstGeom>
         </p:spPr>
         <p:txBody>
-          <a:bodyPr vert="horz" wrap="square" lIns="91440" tIns="45720" rIns="91440" bIns="45720" numCol="1" anchor="b" anchorCtr="0" compatLnSpc="1"/>
+          <a:bodyPr vert="horz" wrap="square" lIns="91440" tIns="45720" rIns="91440" bIns="45720" numCol="1" anchor="b" anchorCtr="0" compatLnSpc="1">
+            <a:prstTxWarp prst="textNoShape">
+              <a:avLst/>
+            </a:prstTxWarp>
+          </a:bodyPr>
           <a:lstStyle>
             <a:lvl1pPr algn="r" eaLnBrk="1" hangingPunct="1">
               <a:defRPr sz="1200"/>
@@ -367,12 +413,21 @@
             </a:pPr>
             <a:fld id="{274AB649-9B77-47B4-86AE-79A195B7BF2A}" type="slidenum">
               <a:rPr lang="zh-CN" altLang="en-US"/>
+              <a:pPr>
+                <a:defRPr/>
+              </a:pPr>
+              <a:t>‹#›</a:t>
             </a:fld>
             <a:endParaRPr lang="zh-CN" altLang="en-US"/>
           </a:p>
         </p:txBody>
       </p:sp>
     </p:spTree>
+    <p:extLst>
+      <p:ext uri="{BB962C8B-B14F-4D97-AF65-F5344CB8AC3E}">
+        <p14:creationId xmlns:p14="http://schemas.microsoft.com/office/powerpoint/2010/main" val="1"/>
+      </p:ext>
+    </p:extLst>
   </p:cSld>
   <p:clrMap bg1="lt1" tx1="dk1" bg2="lt2" tx2="dk2" accent1="accent1" accent2="accent2" accent3="accent3" accent4="accent4" accent5="accent5" accent6="accent6" hlink="hlink" folHlink="folHlink"/>
 </p:handoutMaster>
@@ -405,7 +460,13 @@
       </p:grpSpPr>
       <p:sp>
         <p:nvSpPr>
-          <p:cNvPr id="2" name="页眉占位符 1"/>
+          <p:cNvPr id="2" name="页眉占位符 1">
+            <a:extLst>
+              <a:ext uri="{FF2B5EF4-FFF2-40B4-BE49-F238E27FC236}">
+                <a16:creationId xmlns:a16="http://schemas.microsoft.com/office/drawing/2014/main" id="{BDCBF277-B712-400F-957F-39A8A840EED6}"/>
+              </a:ext>
+            </a:extLst>
+          </p:cNvPr>
           <p:cNvSpPr>
             <a:spLocks noGrp="1"/>
           </p:cNvSpPr>
@@ -448,7 +509,13 @@
       </p:sp>
       <p:sp>
         <p:nvSpPr>
-          <p:cNvPr id="3" name="日期占位符 2"/>
+          <p:cNvPr id="3" name="日期占位符 2">
+            <a:extLst>
+              <a:ext uri="{FF2B5EF4-FFF2-40B4-BE49-F238E27FC236}">
+                <a16:creationId xmlns:a16="http://schemas.microsoft.com/office/drawing/2014/main" id="{D931A883-E5D4-4659-8BCA-E5DCFAE454B1}"/>
+              </a:ext>
+            </a:extLst>
+          </p:cNvPr>
           <p:cNvSpPr>
             <a:spLocks noGrp="1"/>
           </p:cNvSpPr>
@@ -487,6 +554,10 @@
             </a:pPr>
             <a:fld id="{822AF62D-6F31-46D6-B269-0F8F56C4162E}" type="datetimeFigureOut">
               <a:rPr lang="zh-CN" altLang="en-US"/>
+              <a:pPr>
+                <a:defRPr/>
+              </a:pPr>
+              <a:t>2026/6/2</a:t>
             </a:fld>
             <a:endParaRPr lang="zh-CN" altLang="en-US"/>
           </a:p>
@@ -494,7 +565,13 @@
       </p:sp>
       <p:sp>
         <p:nvSpPr>
-          <p:cNvPr id="4" name="幻灯片图像占位符 3"/>
+          <p:cNvPr id="4" name="幻灯片图像占位符 3">
+            <a:extLst>
+              <a:ext uri="{FF2B5EF4-FFF2-40B4-BE49-F238E27FC236}">
+                <a16:creationId xmlns:a16="http://schemas.microsoft.com/office/drawing/2014/main" id="{5F41D5C3-29C3-4D18-A73E-68E70946BD1C}"/>
+              </a:ext>
+            </a:extLst>
+          </p:cNvPr>
           <p:cNvSpPr>
             <a:spLocks noGrp="1" noRot="1" noChangeAspect="1"/>
           </p:cNvSpPr>
@@ -528,7 +605,13 @@
       </p:sp>
       <p:sp>
         <p:nvSpPr>
-          <p:cNvPr id="5" name="备注占位符 4"/>
+          <p:cNvPr id="5" name="备注占位符 4">
+            <a:extLst>
+              <a:ext uri="{FF2B5EF4-FFF2-40B4-BE49-F238E27FC236}">
+                <a16:creationId xmlns:a16="http://schemas.microsoft.com/office/drawing/2014/main" id="{4E8581BB-C447-4235-AF25-DF5DD22191EA}"/>
+              </a:ext>
+            </a:extLst>
+          </p:cNvPr>
           <p:cNvSpPr>
             <a:spLocks noGrp="1"/>
           </p:cNvSpPr>
@@ -554,7 +637,6 @@
               <a:rPr lang="zh-CN" altLang="en-US" noProof="0"/>
               <a:t>单击此处编辑母版文本样式</a:t>
             </a:r>
-            <a:endParaRPr lang="zh-CN" altLang="en-US" noProof="0"/>
           </a:p>
           <a:p>
             <a:pPr lvl="1"/>
@@ -562,7 +644,6 @@
               <a:rPr lang="zh-CN" altLang="en-US" noProof="0"/>
               <a:t>第二级</a:t>
             </a:r>
-            <a:endParaRPr lang="zh-CN" altLang="en-US" noProof="0"/>
           </a:p>
           <a:p>
             <a:pPr lvl="2"/>
@@ -570,7 +651,6 @@
               <a:rPr lang="zh-CN" altLang="en-US" noProof="0"/>
               <a:t>第三级</a:t>
             </a:r>
-            <a:endParaRPr lang="zh-CN" altLang="en-US" noProof="0"/>
           </a:p>
           <a:p>
             <a:pPr lvl="3"/>
@@ -578,7 +658,6 @@
               <a:rPr lang="zh-CN" altLang="en-US" noProof="0"/>
               <a:t>第四级</a:t>
             </a:r>
-            <a:endParaRPr lang="zh-CN" altLang="en-US" noProof="0"/>
           </a:p>
           <a:p>
             <a:pPr lvl="4"/>
@@ -586,13 +665,18 @@
               <a:rPr lang="zh-CN" altLang="en-US" noProof="0"/>
               <a:t>第五级</a:t>
             </a:r>
-            <a:endParaRPr lang="zh-CN" altLang="en-US" noProof="0"/>
           </a:p>
         </p:txBody>
       </p:sp>
       <p:sp>
         <p:nvSpPr>
-          <p:cNvPr id="6" name="页脚占位符 5"/>
+          <p:cNvPr id="6" name="页脚占位符 5">
+            <a:extLst>
+              <a:ext uri="{FF2B5EF4-FFF2-40B4-BE49-F238E27FC236}">
+                <a16:creationId xmlns:a16="http://schemas.microsoft.com/office/drawing/2014/main" id="{BC2BF2D4-077B-491A-A12A-DA192A4FE69B}"/>
+              </a:ext>
+            </a:extLst>
+          </p:cNvPr>
           <p:cNvSpPr>
             <a:spLocks noGrp="1"/>
           </p:cNvSpPr>
@@ -635,7 +719,13 @@
       </p:sp>
       <p:sp>
         <p:nvSpPr>
-          <p:cNvPr id="7" name="灯片编号占位符 6"/>
+          <p:cNvPr id="7" name="灯片编号占位符 6">
+            <a:extLst>
+              <a:ext uri="{FF2B5EF4-FFF2-40B4-BE49-F238E27FC236}">
+                <a16:creationId xmlns:a16="http://schemas.microsoft.com/office/drawing/2014/main" id="{8E56B28C-60B8-44BD-9F27-BF4F6458E97E}"/>
+              </a:ext>
+            </a:extLst>
+          </p:cNvPr>
           <p:cNvSpPr>
             <a:spLocks noGrp="1"/>
           </p:cNvSpPr>
@@ -653,7 +743,11 @@
           </a:prstGeom>
         </p:spPr>
         <p:txBody>
-          <a:bodyPr vert="horz" wrap="square" lIns="91440" tIns="45720" rIns="91440" bIns="45720" numCol="1" anchor="b" anchorCtr="0" compatLnSpc="1"/>
+          <a:bodyPr vert="horz" wrap="square" lIns="91440" tIns="45720" rIns="91440" bIns="45720" numCol="1" anchor="b" anchorCtr="0" compatLnSpc="1">
+            <a:prstTxWarp prst="textNoShape">
+              <a:avLst/>
+            </a:prstTxWarp>
+          </a:bodyPr>
           <a:lstStyle>
             <a:lvl1pPr algn="r" eaLnBrk="1" hangingPunct="1">
               <a:defRPr sz="1200"/>
@@ -665,6 +759,10 @@
             </a:pPr>
             <a:fld id="{E942E71B-E9B3-4820-B67A-F8BCFD290363}" type="slidenum">
               <a:rPr lang="zh-CN" altLang="en-US"/>
+              <a:pPr>
+                <a:defRPr/>
+              </a:pPr>
+              <a:t>‹#›</a:t>
             </a:fld>
             <a:endParaRPr lang="zh-CN" altLang="en-US"/>
           </a:p>
@@ -817,7 +915,13 @@
       </p:grpSpPr>
       <p:sp>
         <p:nvSpPr>
-          <p:cNvPr id="6146" name="Rectangle 2"/>
+          <p:cNvPr id="6146" name="Rectangle 2">
+            <a:extLst>
+              <a:ext uri="{FF2B5EF4-FFF2-40B4-BE49-F238E27FC236}">
+                <a16:creationId xmlns:a16="http://schemas.microsoft.com/office/drawing/2014/main" id="{4D01A8CA-9D3D-4C4D-8CDD-E6DF20BF1131}"/>
+              </a:ext>
+            </a:extLst>
+          </p:cNvPr>
           <p:cNvSpPr>
             <a:spLocks noGrp="1" noChangeArrowheads="1"/>
           </p:cNvSpPr>
@@ -848,9 +952,13 @@
           </a:extLst>
         </p:spPr>
         <p:txBody>
-          <a:bodyPr wrap="square" numCol="1" anchor="t" anchorCtr="0" compatLnSpc="1"/>
+          <a:bodyPr wrap="square" numCol="1" anchor="t" anchorCtr="0" compatLnSpc="1">
+            <a:prstTxWarp prst="textNoShape">
+              <a:avLst/>
+            </a:prstTxWarp>
+          </a:bodyPr>
           <a:lstStyle>
-            <a:lvl1pPr defTabSz="973455">
+            <a:lvl1pPr defTabSz="973138">
               <a:spcBef>
                 <a:spcPct val="30000"/>
               </a:spcBef>
@@ -862,7 +970,7 @@
                 <a:ea typeface="宋体" panose="02010600030101010101" pitchFamily="2" charset="-122"/>
               </a:defRPr>
             </a:lvl1pPr>
-            <a:lvl2pPr marL="742950" indent="-285750" defTabSz="973455">
+            <a:lvl2pPr marL="742950" indent="-285750" defTabSz="973138">
               <a:spcBef>
                 <a:spcPct val="30000"/>
               </a:spcBef>
@@ -874,7 +982,7 @@
                 <a:ea typeface="宋体" panose="02010600030101010101" pitchFamily="2" charset="-122"/>
               </a:defRPr>
             </a:lvl2pPr>
-            <a:lvl3pPr marL="1143000" indent="-228600" defTabSz="973455">
+            <a:lvl3pPr marL="1143000" indent="-228600" defTabSz="973138">
               <a:spcBef>
                 <a:spcPct val="30000"/>
               </a:spcBef>
@@ -886,7 +994,7 @@
                 <a:ea typeface="宋体" panose="02010600030101010101" pitchFamily="2" charset="-122"/>
               </a:defRPr>
             </a:lvl3pPr>
-            <a:lvl4pPr marL="1600200" indent="-228600" defTabSz="973455">
+            <a:lvl4pPr marL="1600200" indent="-228600" defTabSz="973138">
               <a:spcBef>
                 <a:spcPct val="30000"/>
               </a:spcBef>
@@ -898,7 +1006,7 @@
                 <a:ea typeface="宋体" panose="02010600030101010101" pitchFamily="2" charset="-122"/>
               </a:defRPr>
             </a:lvl4pPr>
-            <a:lvl5pPr marL="2057400" indent="-228600" defTabSz="973455">
+            <a:lvl5pPr marL="2057400" indent="-228600" defTabSz="973138">
               <a:spcBef>
                 <a:spcPct val="30000"/>
               </a:spcBef>
@@ -910,7 +1018,7 @@
                 <a:ea typeface="宋体" panose="02010600030101010101" pitchFamily="2" charset="-122"/>
               </a:defRPr>
             </a:lvl5pPr>
-            <a:lvl6pPr marL="2514600" indent="-228600" defTabSz="973455" eaLnBrk="0" fontAlgn="base" hangingPunct="0">
+            <a:lvl6pPr marL="2514600" indent="-228600" defTabSz="973138" eaLnBrk="0" fontAlgn="base" hangingPunct="0">
               <a:spcBef>
                 <a:spcPct val="30000"/>
               </a:spcBef>
@@ -925,7 +1033,7 @@
                 <a:ea typeface="宋体" panose="02010600030101010101" pitchFamily="2" charset="-122"/>
               </a:defRPr>
             </a:lvl6pPr>
-            <a:lvl7pPr marL="2971800" indent="-228600" defTabSz="973455" eaLnBrk="0" fontAlgn="base" hangingPunct="0">
+            <a:lvl7pPr marL="2971800" indent="-228600" defTabSz="973138" eaLnBrk="0" fontAlgn="base" hangingPunct="0">
               <a:spcBef>
                 <a:spcPct val="30000"/>
               </a:spcBef>
@@ -940,7 +1048,7 @@
                 <a:ea typeface="宋体" panose="02010600030101010101" pitchFamily="2" charset="-122"/>
               </a:defRPr>
             </a:lvl7pPr>
-            <a:lvl8pPr marL="3429000" indent="-228600" defTabSz="973455" eaLnBrk="0" fontAlgn="base" hangingPunct="0">
+            <a:lvl8pPr marL="3429000" indent="-228600" defTabSz="973138" eaLnBrk="0" fontAlgn="base" hangingPunct="0">
               <a:spcBef>
                 <a:spcPct val="30000"/>
               </a:spcBef>
@@ -955,7 +1063,7 @@
                 <a:ea typeface="宋体" panose="02010600030101010101" pitchFamily="2" charset="-122"/>
               </a:defRPr>
             </a:lvl8pPr>
-            <a:lvl9pPr marL="3886200" indent="-228600" defTabSz="973455" eaLnBrk="0" fontAlgn="base" hangingPunct="0">
+            <a:lvl9pPr marL="3886200" indent="-228600" defTabSz="973138" eaLnBrk="0" fontAlgn="base" hangingPunct="0">
               <a:spcBef>
                 <a:spcPct val="30000"/>
               </a:spcBef>
@@ -986,15 +1094,18 @@
               </a:rPr>
               <a:t>高等代数</a:t>
             </a:r>
-            <a:endParaRPr kumimoji="1" lang="en-US" altLang="zh-CN" sz="1300">
-              <a:latin typeface="Times New Roman" panose="02020603050405020304" pitchFamily="18" charset="0"/>
-            </a:endParaRPr>
           </a:p>
         </p:txBody>
       </p:sp>
       <p:sp>
         <p:nvSpPr>
-          <p:cNvPr id="6147" name="Rectangle 3"/>
+          <p:cNvPr id="6147" name="Rectangle 3">
+            <a:extLst>
+              <a:ext uri="{FF2B5EF4-FFF2-40B4-BE49-F238E27FC236}">
+                <a16:creationId xmlns:a16="http://schemas.microsoft.com/office/drawing/2014/main" id="{9908787A-D443-429F-A574-148DE50B38AD}"/>
+              </a:ext>
+            </a:extLst>
+          </p:cNvPr>
           <p:cNvSpPr>
             <a:spLocks noGrp="1" noChangeArrowheads="1"/>
           </p:cNvSpPr>
@@ -1025,9 +1136,13 @@
           </a:extLst>
         </p:spPr>
         <p:txBody>
-          <a:bodyPr wrap="square" numCol="1" anchor="t" anchorCtr="0" compatLnSpc="1"/>
+          <a:bodyPr wrap="square" numCol="1" anchor="t" anchorCtr="0" compatLnSpc="1">
+            <a:prstTxWarp prst="textNoShape">
+              <a:avLst/>
+            </a:prstTxWarp>
+          </a:bodyPr>
           <a:lstStyle>
-            <a:lvl1pPr defTabSz="973455">
+            <a:lvl1pPr defTabSz="973138">
               <a:spcBef>
                 <a:spcPct val="30000"/>
               </a:spcBef>
@@ -1039,7 +1154,7 @@
                 <a:ea typeface="宋体" panose="02010600030101010101" pitchFamily="2" charset="-122"/>
               </a:defRPr>
             </a:lvl1pPr>
-            <a:lvl2pPr marL="742950" indent="-285750" defTabSz="973455">
+            <a:lvl2pPr marL="742950" indent="-285750" defTabSz="973138">
               <a:spcBef>
                 <a:spcPct val="30000"/>
               </a:spcBef>
@@ -1051,7 +1166,7 @@
                 <a:ea typeface="宋体" panose="02010600030101010101" pitchFamily="2" charset="-122"/>
               </a:defRPr>
             </a:lvl2pPr>
-            <a:lvl3pPr marL="1143000" indent="-228600" defTabSz="973455">
+            <a:lvl3pPr marL="1143000" indent="-228600" defTabSz="973138">
               <a:spcBef>
                 <a:spcPct val="30000"/>
               </a:spcBef>
@@ -1063,7 +1178,7 @@
                 <a:ea typeface="宋体" panose="02010600030101010101" pitchFamily="2" charset="-122"/>
               </a:defRPr>
             </a:lvl3pPr>
-            <a:lvl4pPr marL="1600200" indent="-228600" defTabSz="973455">
+            <a:lvl4pPr marL="1600200" indent="-228600" defTabSz="973138">
               <a:spcBef>
                 <a:spcPct val="30000"/>
               </a:spcBef>
@@ -1075,7 +1190,7 @@
                 <a:ea typeface="宋体" panose="02010600030101010101" pitchFamily="2" charset="-122"/>
               </a:defRPr>
             </a:lvl4pPr>
-            <a:lvl5pPr marL="2057400" indent="-228600" defTabSz="973455">
+            <a:lvl5pPr marL="2057400" indent="-228600" defTabSz="973138">
               <a:spcBef>
                 <a:spcPct val="30000"/>
               </a:spcBef>
@@ -1087,7 +1202,7 @@
                 <a:ea typeface="宋体" panose="02010600030101010101" pitchFamily="2" charset="-122"/>
               </a:defRPr>
             </a:lvl5pPr>
-            <a:lvl6pPr marL="2514600" indent="-228600" defTabSz="973455" eaLnBrk="0" fontAlgn="base" hangingPunct="0">
+            <a:lvl6pPr marL="2514600" indent="-228600" defTabSz="973138" eaLnBrk="0" fontAlgn="base" hangingPunct="0">
               <a:spcBef>
                 <a:spcPct val="30000"/>
               </a:spcBef>
@@ -1102,7 +1217,7 @@
                 <a:ea typeface="宋体" panose="02010600030101010101" pitchFamily="2" charset="-122"/>
               </a:defRPr>
             </a:lvl6pPr>
-            <a:lvl7pPr marL="2971800" indent="-228600" defTabSz="973455" eaLnBrk="0" fontAlgn="base" hangingPunct="0">
+            <a:lvl7pPr marL="2971800" indent="-228600" defTabSz="973138" eaLnBrk="0" fontAlgn="base" hangingPunct="0">
               <a:spcBef>
                 <a:spcPct val="30000"/>
               </a:spcBef>
@@ -1117,7 +1232,7 @@
                 <a:ea typeface="宋体" panose="02010600030101010101" pitchFamily="2" charset="-122"/>
               </a:defRPr>
             </a:lvl7pPr>
-            <a:lvl8pPr marL="3429000" indent="-228600" defTabSz="973455" eaLnBrk="0" fontAlgn="base" hangingPunct="0">
+            <a:lvl8pPr marL="3429000" indent="-228600" defTabSz="973138" eaLnBrk="0" fontAlgn="base" hangingPunct="0">
               <a:spcBef>
                 <a:spcPct val="30000"/>
               </a:spcBef>
@@ -1132,7 +1247,7 @@
                 <a:ea typeface="宋体" panose="02010600030101010101" pitchFamily="2" charset="-122"/>
               </a:defRPr>
             </a:lvl8pPr>
-            <a:lvl9pPr marL="3886200" indent="-228600" defTabSz="973455" eaLnBrk="0" fontAlgn="base" hangingPunct="0">
+            <a:lvl9pPr marL="3886200" indent="-228600" defTabSz="973138" eaLnBrk="0" fontAlgn="base" hangingPunct="0">
               <a:spcBef>
                 <a:spcPct val="30000"/>
               </a:spcBef>
@@ -1161,6 +1276,15 @@
               <a:rPr kumimoji="1" lang="zh-CN" altLang="en-US" sz="1300" smtClean="0">
                 <a:latin typeface="Times New Roman" panose="02020603050405020304" pitchFamily="18" charset="0"/>
               </a:rPr>
+              <a:pPr fontAlgn="base">
+                <a:spcBef>
+                  <a:spcPct val="0"/>
+                </a:spcBef>
+                <a:spcAft>
+                  <a:spcPct val="0"/>
+                </a:spcAft>
+              </a:pPr>
+              <a:t>2026/6/2</a:t>
             </a:fld>
             <a:endParaRPr kumimoji="1" lang="en-US" altLang="zh-CN" sz="1300">
               <a:latin typeface="Times New Roman" panose="02020603050405020304" pitchFamily="18" charset="0"/>
@@ -1170,7 +1294,13 @@
       </p:sp>
       <p:sp>
         <p:nvSpPr>
-          <p:cNvPr id="6148" name="Rectangle 7"/>
+          <p:cNvPr id="6148" name="Rectangle 7">
+            <a:extLst>
+              <a:ext uri="{FF2B5EF4-FFF2-40B4-BE49-F238E27FC236}">
+                <a16:creationId xmlns:a16="http://schemas.microsoft.com/office/drawing/2014/main" id="{B8131C3E-0544-4AEA-AB54-2E5CF4AE25D3}"/>
+              </a:ext>
+            </a:extLst>
+          </p:cNvPr>
           <p:cNvSpPr>
             <a:spLocks noGrp="1" noChangeArrowheads="1"/>
           </p:cNvSpPr>
@@ -1203,7 +1333,7 @@
         <p:txBody>
           <a:bodyPr/>
           <a:lstStyle>
-            <a:lvl1pPr defTabSz="973455">
+            <a:lvl1pPr defTabSz="973138">
               <a:spcBef>
                 <a:spcPct val="30000"/>
               </a:spcBef>
@@ -1215,7 +1345,7 @@
                 <a:ea typeface="宋体" panose="02010600030101010101" pitchFamily="2" charset="-122"/>
               </a:defRPr>
             </a:lvl1pPr>
-            <a:lvl2pPr marL="742950" indent="-285750" defTabSz="973455">
+            <a:lvl2pPr marL="742950" indent="-285750" defTabSz="973138">
               <a:spcBef>
                 <a:spcPct val="30000"/>
               </a:spcBef>
@@ -1227,7 +1357,7 @@
                 <a:ea typeface="宋体" panose="02010600030101010101" pitchFamily="2" charset="-122"/>
               </a:defRPr>
             </a:lvl2pPr>
-            <a:lvl3pPr marL="1143000" indent="-228600" defTabSz="973455">
+            <a:lvl3pPr marL="1143000" indent="-228600" defTabSz="973138">
               <a:spcBef>
                 <a:spcPct val="30000"/>
               </a:spcBef>
@@ -1239,7 +1369,7 @@
                 <a:ea typeface="宋体" panose="02010600030101010101" pitchFamily="2" charset="-122"/>
               </a:defRPr>
             </a:lvl3pPr>
-            <a:lvl4pPr marL="1600200" indent="-228600" defTabSz="973455">
+            <a:lvl4pPr marL="1600200" indent="-228600" defTabSz="973138">
               <a:spcBef>
                 <a:spcPct val="30000"/>
               </a:spcBef>
@@ -1251,7 +1381,7 @@
                 <a:ea typeface="宋体" panose="02010600030101010101" pitchFamily="2" charset="-122"/>
               </a:defRPr>
             </a:lvl4pPr>
-            <a:lvl5pPr marL="2057400" indent="-228600" defTabSz="973455">
+            <a:lvl5pPr marL="2057400" indent="-228600" defTabSz="973138">
               <a:spcBef>
                 <a:spcPct val="30000"/>
               </a:spcBef>
@@ -1263,7 +1393,7 @@
                 <a:ea typeface="宋体" panose="02010600030101010101" pitchFamily="2" charset="-122"/>
               </a:defRPr>
             </a:lvl5pPr>
-            <a:lvl6pPr marL="2514600" indent="-228600" defTabSz="973455" eaLnBrk="0" fontAlgn="base" hangingPunct="0">
+            <a:lvl6pPr marL="2514600" indent="-228600" defTabSz="973138" eaLnBrk="0" fontAlgn="base" hangingPunct="0">
               <a:spcBef>
                 <a:spcPct val="30000"/>
               </a:spcBef>
@@ -1278,7 +1408,7 @@
                 <a:ea typeface="宋体" panose="02010600030101010101" pitchFamily="2" charset="-122"/>
               </a:defRPr>
             </a:lvl6pPr>
-            <a:lvl7pPr marL="2971800" indent="-228600" defTabSz="973455" eaLnBrk="0" fontAlgn="base" hangingPunct="0">
+            <a:lvl7pPr marL="2971800" indent="-228600" defTabSz="973138" eaLnBrk="0" fontAlgn="base" hangingPunct="0">
               <a:spcBef>
                 <a:spcPct val="30000"/>
               </a:spcBef>
@@ -1293,7 +1423,7 @@
                 <a:ea typeface="宋体" panose="02010600030101010101" pitchFamily="2" charset="-122"/>
               </a:defRPr>
             </a:lvl7pPr>
-            <a:lvl8pPr marL="3429000" indent="-228600" defTabSz="973455" eaLnBrk="0" fontAlgn="base" hangingPunct="0">
+            <a:lvl8pPr marL="3429000" indent="-228600" defTabSz="973138" eaLnBrk="0" fontAlgn="base" hangingPunct="0">
               <a:spcBef>
                 <a:spcPct val="30000"/>
               </a:spcBef>
@@ -1308,7 +1438,7 @@
                 <a:ea typeface="宋体" panose="02010600030101010101" pitchFamily="2" charset="-122"/>
               </a:defRPr>
             </a:lvl8pPr>
-            <a:lvl9pPr marL="3886200" indent="-228600" defTabSz="973455" eaLnBrk="0" fontAlgn="base" hangingPunct="0">
+            <a:lvl9pPr marL="3886200" indent="-228600" defTabSz="973138" eaLnBrk="0" fontAlgn="base" hangingPunct="0">
               <a:spcBef>
                 <a:spcPct val="30000"/>
               </a:spcBef>
@@ -1334,6 +1464,12 @@
               <a:rPr kumimoji="1" lang="en-US" altLang="zh-CN" sz="1300" smtClean="0">
                 <a:latin typeface="Times New Roman" panose="02020603050405020304" pitchFamily="18" charset="0"/>
               </a:rPr>
+              <a:pPr>
+                <a:spcBef>
+                  <a:spcPct val="0"/>
+                </a:spcBef>
+              </a:pPr>
+              <a:t>1</a:t>
             </a:fld>
             <a:endParaRPr kumimoji="1" lang="en-US" altLang="zh-CN" sz="1300">
               <a:latin typeface="Times New Roman" panose="02020603050405020304" pitchFamily="18" charset="0"/>
@@ -1343,7 +1479,13 @@
       </p:sp>
       <p:sp>
         <p:nvSpPr>
-          <p:cNvPr id="6149" name="Rectangle 2"/>
+          <p:cNvPr id="6149" name="Rectangle 2">
+            <a:extLst>
+              <a:ext uri="{FF2B5EF4-FFF2-40B4-BE49-F238E27FC236}">
+                <a16:creationId xmlns:a16="http://schemas.microsoft.com/office/drawing/2014/main" id="{4E4FE87F-CDE4-460E-881D-9ED4C3D8116E}"/>
+              </a:ext>
+            </a:extLst>
+          </p:cNvPr>
           <p:cNvSpPr>
             <a:spLocks noGrp="1" noRot="1" noChangeAspect="1" noChangeArrowheads="1" noTextEdit="1"/>
           </p:cNvSpPr>
@@ -1360,12 +1502,20 @@
               <a:srgbClr val="000000"/>
             </a:solidFill>
             <a:miter lim="800000"/>
+            <a:headEnd/>
+            <a:tailEnd/>
           </a:ln>
         </p:spPr>
       </p:sp>
       <p:sp>
         <p:nvSpPr>
-          <p:cNvPr id="6150" name="Rectangle 3"/>
+          <p:cNvPr id="6150" name="Rectangle 3">
+            <a:extLst>
+              <a:ext uri="{FF2B5EF4-FFF2-40B4-BE49-F238E27FC236}">
+                <a16:creationId xmlns:a16="http://schemas.microsoft.com/office/drawing/2014/main" id="{3E528532-329A-4864-9D0A-64808B13A79B}"/>
+              </a:ext>
+            </a:extLst>
+          </p:cNvPr>
           <p:cNvSpPr>
             <a:spLocks noGrp="1" noChangeArrowheads="1"/>
           </p:cNvSpPr>
@@ -1382,10 +1532,16 @@
               <a:srgbClr val="000000"/>
             </a:solidFill>
             <a:miter lim="800000"/>
+            <a:headEnd/>
+            <a:tailEnd/>
           </a:ln>
         </p:spPr>
         <p:txBody>
-          <a:bodyPr wrap="square" numCol="1" anchor="t" anchorCtr="0" compatLnSpc="1"/>
+          <a:bodyPr wrap="square" numCol="1" anchor="t" anchorCtr="0" compatLnSpc="1">
+            <a:prstTxWarp prst="textNoShape">
+              <a:avLst/>
+            </a:prstTxWarp>
+          </a:bodyPr>
           <a:lstStyle/>
           <a:p>
             <a:pPr eaLnBrk="1" hangingPunct="1">
@@ -1397,7 +1553,6 @@
               <a:rPr lang="zh-CN" altLang="en-US"/>
               <a:t>重庆大学</a:t>
             </a:r>
-            <a:endParaRPr lang="zh-CN" altLang="en-US"/>
           </a:p>
         </p:txBody>
       </p:sp>
@@ -1428,7 +1583,13 @@
       </p:grpSpPr>
       <p:sp>
         <p:nvSpPr>
-          <p:cNvPr id="12290" name="Rectangle 2"/>
+          <p:cNvPr id="12290" name="Rectangle 2">
+            <a:extLst>
+              <a:ext uri="{FF2B5EF4-FFF2-40B4-BE49-F238E27FC236}">
+                <a16:creationId xmlns:a16="http://schemas.microsoft.com/office/drawing/2014/main" id="{DDD982A9-5E02-48A1-96E2-36AE38A9E7D5}"/>
+              </a:ext>
+            </a:extLst>
+          </p:cNvPr>
           <p:cNvSpPr>
             <a:spLocks noGrp="1" noChangeArrowheads="1"/>
           </p:cNvSpPr>
@@ -1459,9 +1620,13 @@
           </a:extLst>
         </p:spPr>
         <p:txBody>
-          <a:bodyPr wrap="square" numCol="1" anchor="t" anchorCtr="0" compatLnSpc="1"/>
+          <a:bodyPr wrap="square" numCol="1" anchor="t" anchorCtr="0" compatLnSpc="1">
+            <a:prstTxWarp prst="textNoShape">
+              <a:avLst/>
+            </a:prstTxWarp>
+          </a:bodyPr>
           <a:lstStyle>
-            <a:lvl1pPr defTabSz="973455">
+            <a:lvl1pPr defTabSz="973138">
               <a:spcBef>
                 <a:spcPct val="30000"/>
               </a:spcBef>
@@ -1473,7 +1638,7 @@
                 <a:ea typeface="宋体" panose="02010600030101010101" pitchFamily="2" charset="-122"/>
               </a:defRPr>
             </a:lvl1pPr>
-            <a:lvl2pPr marL="742950" indent="-285750" defTabSz="973455">
+            <a:lvl2pPr marL="742950" indent="-285750" defTabSz="973138">
               <a:spcBef>
                 <a:spcPct val="30000"/>
               </a:spcBef>
@@ -1485,7 +1650,7 @@
                 <a:ea typeface="宋体" panose="02010600030101010101" pitchFamily="2" charset="-122"/>
               </a:defRPr>
             </a:lvl2pPr>
-            <a:lvl3pPr marL="1143000" indent="-228600" defTabSz="973455">
+            <a:lvl3pPr marL="1143000" indent="-228600" defTabSz="973138">
               <a:spcBef>
                 <a:spcPct val="30000"/>
               </a:spcBef>
@@ -1497,7 +1662,7 @@
                 <a:ea typeface="宋体" panose="02010600030101010101" pitchFamily="2" charset="-122"/>
               </a:defRPr>
             </a:lvl3pPr>
-            <a:lvl4pPr marL="1600200" indent="-228600" defTabSz="973455">
+            <a:lvl4pPr marL="1600200" indent="-228600" defTabSz="973138">
               <a:spcBef>
                 <a:spcPct val="30000"/>
               </a:spcBef>
@@ -1509,7 +1674,7 @@
                 <a:ea typeface="宋体" panose="02010600030101010101" pitchFamily="2" charset="-122"/>
               </a:defRPr>
             </a:lvl4pPr>
-            <a:lvl5pPr marL="2057400" indent="-228600" defTabSz="973455">
+            <a:lvl5pPr marL="2057400" indent="-228600" defTabSz="973138">
               <a:spcBef>
                 <a:spcPct val="30000"/>
               </a:spcBef>
@@ -1521,7 +1686,7 @@
                 <a:ea typeface="宋体" panose="02010600030101010101" pitchFamily="2" charset="-122"/>
               </a:defRPr>
             </a:lvl5pPr>
-            <a:lvl6pPr marL="2514600" indent="-228600" defTabSz="973455" eaLnBrk="0" fontAlgn="base" hangingPunct="0">
+            <a:lvl6pPr marL="2514600" indent="-228600" defTabSz="973138" eaLnBrk="0" fontAlgn="base" hangingPunct="0">
               <a:spcBef>
                 <a:spcPct val="30000"/>
               </a:spcBef>
@@ -1536,7 +1701,7 @@
                 <a:ea typeface="宋体" panose="02010600030101010101" pitchFamily="2" charset="-122"/>
               </a:defRPr>
             </a:lvl6pPr>
-            <a:lvl7pPr marL="2971800" indent="-228600" defTabSz="973455" eaLnBrk="0" fontAlgn="base" hangingPunct="0">
+            <a:lvl7pPr marL="2971800" indent="-228600" defTabSz="973138" eaLnBrk="0" fontAlgn="base" hangingPunct="0">
               <a:spcBef>
                 <a:spcPct val="30000"/>
               </a:spcBef>
@@ -1551,7 +1716,7 @@
                 <a:ea typeface="宋体" panose="02010600030101010101" pitchFamily="2" charset="-122"/>
               </a:defRPr>
             </a:lvl7pPr>
-            <a:lvl8pPr marL="3429000" indent="-228600" defTabSz="973455" eaLnBrk="0" fontAlgn="base" hangingPunct="0">
+            <a:lvl8pPr marL="3429000" indent="-228600" defTabSz="973138" eaLnBrk="0" fontAlgn="base" hangingPunct="0">
               <a:spcBef>
                 <a:spcPct val="30000"/>
               </a:spcBef>
@@ -1566,7 +1731,7 @@
                 <a:ea typeface="宋体" panose="02010600030101010101" pitchFamily="2" charset="-122"/>
               </a:defRPr>
             </a:lvl8pPr>
-            <a:lvl9pPr marL="3886200" indent="-228600" defTabSz="973455" eaLnBrk="0" fontAlgn="base" hangingPunct="0">
+            <a:lvl9pPr marL="3886200" indent="-228600" defTabSz="973138" eaLnBrk="0" fontAlgn="base" hangingPunct="0">
               <a:spcBef>
                 <a:spcPct val="30000"/>
               </a:spcBef>
@@ -1597,15 +1762,18 @@
               </a:rPr>
               <a:t>高等代数</a:t>
             </a:r>
-            <a:endParaRPr kumimoji="1" lang="en-US" altLang="zh-CN" sz="1300">
-              <a:latin typeface="Times New Roman" panose="02020603050405020304" pitchFamily="18" charset="0"/>
-            </a:endParaRPr>
           </a:p>
         </p:txBody>
       </p:sp>
       <p:sp>
         <p:nvSpPr>
-          <p:cNvPr id="12291" name="Rectangle 3"/>
+          <p:cNvPr id="12291" name="Rectangle 3">
+            <a:extLst>
+              <a:ext uri="{FF2B5EF4-FFF2-40B4-BE49-F238E27FC236}">
+                <a16:creationId xmlns:a16="http://schemas.microsoft.com/office/drawing/2014/main" id="{BB2D036D-A015-497D-A941-6AA03F0068FE}"/>
+              </a:ext>
+            </a:extLst>
+          </p:cNvPr>
           <p:cNvSpPr>
             <a:spLocks noGrp="1" noChangeArrowheads="1"/>
           </p:cNvSpPr>
@@ -1636,9 +1804,13 @@
           </a:extLst>
         </p:spPr>
         <p:txBody>
-          <a:bodyPr wrap="square" numCol="1" anchor="t" anchorCtr="0" compatLnSpc="1"/>
+          <a:bodyPr wrap="square" numCol="1" anchor="t" anchorCtr="0" compatLnSpc="1">
+            <a:prstTxWarp prst="textNoShape">
+              <a:avLst/>
+            </a:prstTxWarp>
+          </a:bodyPr>
           <a:lstStyle>
-            <a:lvl1pPr defTabSz="973455">
+            <a:lvl1pPr defTabSz="973138">
               <a:spcBef>
                 <a:spcPct val="30000"/>
               </a:spcBef>
@@ -1650,7 +1822,7 @@
                 <a:ea typeface="宋体" panose="02010600030101010101" pitchFamily="2" charset="-122"/>
               </a:defRPr>
             </a:lvl1pPr>
-            <a:lvl2pPr marL="742950" indent="-285750" defTabSz="973455">
+            <a:lvl2pPr marL="742950" indent="-285750" defTabSz="973138">
               <a:spcBef>
                 <a:spcPct val="30000"/>
               </a:spcBef>
@@ -1662,7 +1834,7 @@
                 <a:ea typeface="宋体" panose="02010600030101010101" pitchFamily="2" charset="-122"/>
               </a:defRPr>
             </a:lvl2pPr>
-            <a:lvl3pPr marL="1143000" indent="-228600" defTabSz="973455">
+            <a:lvl3pPr marL="1143000" indent="-228600" defTabSz="973138">
               <a:spcBef>
                 <a:spcPct val="30000"/>
               </a:spcBef>
@@ -1674,7 +1846,7 @@
                 <a:ea typeface="宋体" panose="02010600030101010101" pitchFamily="2" charset="-122"/>
               </a:defRPr>
             </a:lvl3pPr>
-            <a:lvl4pPr marL="1600200" indent="-228600" defTabSz="973455">
+            <a:lvl4pPr marL="1600200" indent="-228600" defTabSz="973138">
               <a:spcBef>
                 <a:spcPct val="30000"/>
               </a:spcBef>
@@ -1686,7 +1858,7 @@
                 <a:ea typeface="宋体" panose="02010600030101010101" pitchFamily="2" charset="-122"/>
               </a:defRPr>
             </a:lvl4pPr>
-            <a:lvl5pPr marL="2057400" indent="-228600" defTabSz="973455">
+            <a:lvl5pPr marL="2057400" indent="-228600" defTabSz="973138">
               <a:spcBef>
                 <a:spcPct val="30000"/>
               </a:spcBef>
@@ -1698,7 +1870,7 @@
                 <a:ea typeface="宋体" panose="02010600030101010101" pitchFamily="2" charset="-122"/>
               </a:defRPr>
             </a:lvl5pPr>
-            <a:lvl6pPr marL="2514600" indent="-228600" defTabSz="973455" eaLnBrk="0" fontAlgn="base" hangingPunct="0">
+            <a:lvl6pPr marL="2514600" indent="-228600" defTabSz="973138" eaLnBrk="0" fontAlgn="base" hangingPunct="0">
               <a:spcBef>
                 <a:spcPct val="30000"/>
               </a:spcBef>
@@ -1713,7 +1885,7 @@
                 <a:ea typeface="宋体" panose="02010600030101010101" pitchFamily="2" charset="-122"/>
               </a:defRPr>
             </a:lvl6pPr>
-            <a:lvl7pPr marL="2971800" indent="-228600" defTabSz="973455" eaLnBrk="0" fontAlgn="base" hangingPunct="0">
+            <a:lvl7pPr marL="2971800" indent="-228600" defTabSz="973138" eaLnBrk="0" fontAlgn="base" hangingPunct="0">
               <a:spcBef>
                 <a:spcPct val="30000"/>
               </a:spcBef>
@@ -1728,7 +1900,7 @@
                 <a:ea typeface="宋体" panose="02010600030101010101" pitchFamily="2" charset="-122"/>
               </a:defRPr>
             </a:lvl7pPr>
-            <a:lvl8pPr marL="3429000" indent="-228600" defTabSz="973455" eaLnBrk="0" fontAlgn="base" hangingPunct="0">
+            <a:lvl8pPr marL="3429000" indent="-228600" defTabSz="973138" eaLnBrk="0" fontAlgn="base" hangingPunct="0">
               <a:spcBef>
                 <a:spcPct val="30000"/>
               </a:spcBef>
@@ -1743,7 +1915,7 @@
                 <a:ea typeface="宋体" panose="02010600030101010101" pitchFamily="2" charset="-122"/>
               </a:defRPr>
             </a:lvl8pPr>
-            <a:lvl9pPr marL="3886200" indent="-228600" defTabSz="973455" eaLnBrk="0" fontAlgn="base" hangingPunct="0">
+            <a:lvl9pPr marL="3886200" indent="-228600" defTabSz="973138" eaLnBrk="0" fontAlgn="base" hangingPunct="0">
               <a:spcBef>
                 <a:spcPct val="30000"/>
               </a:spcBef>
@@ -1772,6 +1944,15 @@
               <a:rPr kumimoji="1" lang="zh-CN" altLang="en-US" sz="1300" smtClean="0">
                 <a:latin typeface="Times New Roman" panose="02020603050405020304" pitchFamily="18" charset="0"/>
               </a:rPr>
+              <a:pPr fontAlgn="base">
+                <a:spcBef>
+                  <a:spcPct val="0"/>
+                </a:spcBef>
+                <a:spcAft>
+                  <a:spcPct val="0"/>
+                </a:spcAft>
+              </a:pPr>
+              <a:t>2026/6/2</a:t>
             </a:fld>
             <a:endParaRPr kumimoji="1" lang="en-US" altLang="zh-CN" sz="1300">
               <a:latin typeface="Times New Roman" panose="02020603050405020304" pitchFamily="18" charset="0"/>
@@ -1781,7 +1962,13 @@
       </p:sp>
       <p:sp>
         <p:nvSpPr>
-          <p:cNvPr id="12292" name="Rectangle 7"/>
+          <p:cNvPr id="12292" name="Rectangle 7">
+            <a:extLst>
+              <a:ext uri="{FF2B5EF4-FFF2-40B4-BE49-F238E27FC236}">
+                <a16:creationId xmlns:a16="http://schemas.microsoft.com/office/drawing/2014/main" id="{1F5A9F09-0D46-442C-B44C-6AFEEB24347F}"/>
+              </a:ext>
+            </a:extLst>
+          </p:cNvPr>
           <p:cNvSpPr>
             <a:spLocks noGrp="1" noChangeArrowheads="1"/>
           </p:cNvSpPr>
@@ -1814,7 +2001,7 @@
         <p:txBody>
           <a:bodyPr/>
           <a:lstStyle>
-            <a:lvl1pPr defTabSz="973455">
+            <a:lvl1pPr defTabSz="973138">
               <a:spcBef>
                 <a:spcPct val="30000"/>
               </a:spcBef>
@@ -1826,7 +2013,7 @@
                 <a:ea typeface="宋体" panose="02010600030101010101" pitchFamily="2" charset="-122"/>
               </a:defRPr>
             </a:lvl1pPr>
-            <a:lvl2pPr marL="742950" indent="-285750" defTabSz="973455">
+            <a:lvl2pPr marL="742950" indent="-285750" defTabSz="973138">
               <a:spcBef>
                 <a:spcPct val="30000"/>
               </a:spcBef>
@@ -1838,7 +2025,7 @@
                 <a:ea typeface="宋体" panose="02010600030101010101" pitchFamily="2" charset="-122"/>
               </a:defRPr>
             </a:lvl2pPr>
-            <a:lvl3pPr marL="1143000" indent="-228600" defTabSz="973455">
+            <a:lvl3pPr marL="1143000" indent="-228600" defTabSz="973138">
               <a:spcBef>
                 <a:spcPct val="30000"/>
               </a:spcBef>
@@ -1850,7 +2037,7 @@
                 <a:ea typeface="宋体" panose="02010600030101010101" pitchFamily="2" charset="-122"/>
               </a:defRPr>
             </a:lvl3pPr>
-            <a:lvl4pPr marL="1600200" indent="-228600" defTabSz="973455">
+            <a:lvl4pPr marL="1600200" indent="-228600" defTabSz="973138">
               <a:spcBef>
                 <a:spcPct val="30000"/>
               </a:spcBef>
@@ -1862,7 +2049,7 @@
                 <a:ea typeface="宋体" panose="02010600030101010101" pitchFamily="2" charset="-122"/>
               </a:defRPr>
             </a:lvl4pPr>
-            <a:lvl5pPr marL="2057400" indent="-228600" defTabSz="973455">
+            <a:lvl5pPr marL="2057400" indent="-228600" defTabSz="973138">
               <a:spcBef>
                 <a:spcPct val="30000"/>
               </a:spcBef>
@@ -1874,7 +2061,7 @@
                 <a:ea typeface="宋体" panose="02010600030101010101" pitchFamily="2" charset="-122"/>
               </a:defRPr>
             </a:lvl5pPr>
-            <a:lvl6pPr marL="2514600" indent="-228600" defTabSz="973455" eaLnBrk="0" fontAlgn="base" hangingPunct="0">
+            <a:lvl6pPr marL="2514600" indent="-228600" defTabSz="973138" eaLnBrk="0" fontAlgn="base" hangingPunct="0">
               <a:spcBef>
                 <a:spcPct val="30000"/>
               </a:spcBef>
@@ -1889,7 +2076,7 @@
                 <a:ea typeface="宋体" panose="02010600030101010101" pitchFamily="2" charset="-122"/>
               </a:defRPr>
             </a:lvl6pPr>
-            <a:lvl7pPr marL="2971800" indent="-228600" defTabSz="973455" eaLnBrk="0" fontAlgn="base" hangingPunct="0">
+            <a:lvl7pPr marL="2971800" indent="-228600" defTabSz="973138" eaLnBrk="0" fontAlgn="base" hangingPunct="0">
               <a:spcBef>
                 <a:spcPct val="30000"/>
               </a:spcBef>
@@ -1904,7 +2091,7 @@
                 <a:ea typeface="宋体" panose="02010600030101010101" pitchFamily="2" charset="-122"/>
               </a:defRPr>
             </a:lvl7pPr>
-            <a:lvl8pPr marL="3429000" indent="-228600" defTabSz="973455" eaLnBrk="0" fontAlgn="base" hangingPunct="0">
+            <a:lvl8pPr marL="3429000" indent="-228600" defTabSz="973138" eaLnBrk="0" fontAlgn="base" hangingPunct="0">
               <a:spcBef>
                 <a:spcPct val="30000"/>
               </a:spcBef>
@@ -1919,7 +2106,7 @@
                 <a:ea typeface="宋体" panose="02010600030101010101" pitchFamily="2" charset="-122"/>
               </a:defRPr>
             </a:lvl8pPr>
-            <a:lvl9pPr marL="3886200" indent="-228600" defTabSz="973455" eaLnBrk="0" fontAlgn="base" hangingPunct="0">
+            <a:lvl9pPr marL="3886200" indent="-228600" defTabSz="973138" eaLnBrk="0" fontAlgn="base" hangingPunct="0">
               <a:spcBef>
                 <a:spcPct val="30000"/>
               </a:spcBef>
@@ -1945,6 +2132,12 @@
               <a:rPr kumimoji="1" lang="en-US" altLang="zh-CN" sz="1300" smtClean="0">
                 <a:latin typeface="Times New Roman" panose="02020603050405020304" pitchFamily="18" charset="0"/>
               </a:rPr>
+              <a:pPr>
+                <a:spcBef>
+                  <a:spcPct val="0"/>
+                </a:spcBef>
+              </a:pPr>
+              <a:t>2</a:t>
             </a:fld>
             <a:endParaRPr kumimoji="1" lang="en-US" altLang="zh-CN" sz="1300">
               <a:latin typeface="Times New Roman" panose="02020603050405020304" pitchFamily="18" charset="0"/>
@@ -1954,7 +2147,13 @@
       </p:sp>
       <p:sp>
         <p:nvSpPr>
-          <p:cNvPr id="12293" name="Rectangle 2"/>
+          <p:cNvPr id="12293" name="Rectangle 2">
+            <a:extLst>
+              <a:ext uri="{FF2B5EF4-FFF2-40B4-BE49-F238E27FC236}">
+                <a16:creationId xmlns:a16="http://schemas.microsoft.com/office/drawing/2014/main" id="{7BD8AAAD-5528-4021-AC18-5931D989EBBD}"/>
+              </a:ext>
+            </a:extLst>
+          </p:cNvPr>
           <p:cNvSpPr>
             <a:spLocks noGrp="1" noRot="1" noChangeAspect="1" noChangeArrowheads="1" noTextEdit="1"/>
           </p:cNvSpPr>
@@ -1969,6 +2168,8 @@
               <a:srgbClr val="000000"/>
             </a:solidFill>
             <a:miter lim="800000"/>
+            <a:headEnd/>
+            <a:tailEnd/>
           </a:ln>
           <a:extLst>
             <a:ext uri="{909E8E84-426E-40DD-AFC4-6F175D3DCCD1}">
@@ -1983,7 +2184,13 @@
       </p:sp>
       <p:sp>
         <p:nvSpPr>
-          <p:cNvPr id="12294" name="Rectangle 3"/>
+          <p:cNvPr id="12294" name="Rectangle 3">
+            <a:extLst>
+              <a:ext uri="{FF2B5EF4-FFF2-40B4-BE49-F238E27FC236}">
+                <a16:creationId xmlns:a16="http://schemas.microsoft.com/office/drawing/2014/main" id="{790700FD-795C-4BC0-B86D-95C8F9544CA6}"/>
+              </a:ext>
+            </a:extLst>
+          </p:cNvPr>
           <p:cNvSpPr>
             <a:spLocks noGrp="1" noChangeArrowheads="1"/>
           </p:cNvSpPr>
@@ -2014,7 +2221,11 @@
           </a:extLst>
         </p:spPr>
         <p:txBody>
-          <a:bodyPr wrap="square" numCol="1" anchor="t" anchorCtr="0" compatLnSpc="1"/>
+          <a:bodyPr wrap="square" numCol="1" anchor="t" anchorCtr="0" compatLnSpc="1">
+            <a:prstTxWarp prst="textNoShape">
+              <a:avLst/>
+            </a:prstTxWarp>
+          </a:bodyPr>
           <a:lstStyle/>
           <a:p>
             <a:pPr eaLnBrk="1" hangingPunct="1">
@@ -2102,12 +2313,21 @@
             </a:pPr>
             <a:fld id="{E942E71B-E9B3-4820-B67A-F8BCFD290363}" type="slidenum">
               <a:rPr lang="zh-CN" altLang="en-US" smtClean="0"/>
+              <a:pPr>
+                <a:defRPr/>
+              </a:pPr>
+              <a:t>7</a:t>
             </a:fld>
             <a:endParaRPr lang="zh-CN" altLang="en-US"/>
           </a:p>
         </p:txBody>
       </p:sp>
     </p:spTree>
+    <p:extLst>
+      <p:ext uri="{BB962C8B-B14F-4D97-AF65-F5344CB8AC3E}">
+        <p14:creationId xmlns:p14="http://schemas.microsoft.com/office/powerpoint/2010/main" val="1294584971"/>
+      </p:ext>
+    </p:extLst>
   </p:cSld>
   <p:clrMapOvr>
     <a:masterClrMapping/>
@@ -2183,12 +2403,21 @@
             </a:pPr>
             <a:fld id="{E942E71B-E9B3-4820-B67A-F8BCFD290363}" type="slidenum">
               <a:rPr lang="zh-CN" altLang="en-US" smtClean="0"/>
+              <a:pPr>
+                <a:defRPr/>
+              </a:pPr>
+              <a:t>10</a:t>
             </a:fld>
             <a:endParaRPr lang="zh-CN" altLang="en-US"/>
           </a:p>
         </p:txBody>
       </p:sp>
     </p:spTree>
+    <p:extLst>
+      <p:ext uri="{BB962C8B-B14F-4D97-AF65-F5344CB8AC3E}">
+        <p14:creationId xmlns:p14="http://schemas.microsoft.com/office/powerpoint/2010/main" val="4292069539"/>
+      </p:ext>
+    </p:extLst>
   </p:cSld>
   <p:clrMapOvr>
     <a:masterClrMapping/>
@@ -2264,12 +2493,21 @@
             </a:pPr>
             <a:fld id="{E942E71B-E9B3-4820-B67A-F8BCFD290363}" type="slidenum">
               <a:rPr lang="zh-CN" altLang="en-US" smtClean="0"/>
+              <a:pPr>
+                <a:defRPr/>
+              </a:pPr>
+              <a:t>16</a:t>
             </a:fld>
             <a:endParaRPr lang="zh-CN" altLang="en-US"/>
           </a:p>
         </p:txBody>
       </p:sp>
     </p:spTree>
+    <p:extLst>
+      <p:ext uri="{BB962C8B-B14F-4D97-AF65-F5344CB8AC3E}">
+        <p14:creationId xmlns:p14="http://schemas.microsoft.com/office/powerpoint/2010/main" val="3651586397"/>
+      </p:ext>
+    </p:extLst>
   </p:cSld>
   <p:clrMapOvr>
     <a:masterClrMapping/>
@@ -2318,7 +2556,6 @@
               <a:rPr lang="zh-CN" altLang="en-US"/>
               <a:t>单击此处编辑母版标题样式</a:t>
             </a:r>
-            <a:endParaRPr lang="zh-CN" altLang="en-US"/>
           </a:p>
         </p:txBody>
       </p:sp>
@@ -2437,13 +2674,18 @@
               <a:rPr lang="zh-CN" altLang="en-US"/>
               <a:t>单击此处编辑母版副标题样式</a:t>
             </a:r>
-            <a:endParaRPr lang="zh-CN" altLang="en-US"/>
           </a:p>
         </p:txBody>
       </p:sp>
       <p:sp>
         <p:nvSpPr>
-          <p:cNvPr id="4" name="日期占位符 3"/>
+          <p:cNvPr id="4" name="日期占位符 3">
+            <a:extLst>
+              <a:ext uri="{FF2B5EF4-FFF2-40B4-BE49-F238E27FC236}">
+                <a16:creationId xmlns:a16="http://schemas.microsoft.com/office/drawing/2014/main" id="{BA0259C8-C7EE-4156-9DC0-3109D38887C8}"/>
+              </a:ext>
+            </a:extLst>
+          </p:cNvPr>
           <p:cNvSpPr>
             <a:spLocks noGrp="1"/>
           </p:cNvSpPr>
@@ -2465,6 +2707,10 @@
             </a:pPr>
             <a:fld id="{053C517D-F1EF-450D-A68B-03ED621FDC53}" type="datetimeFigureOut">
               <a:rPr lang="zh-CN" altLang="en-US"/>
+              <a:pPr>
+                <a:defRPr/>
+              </a:pPr>
+              <a:t>2026/6/2</a:t>
             </a:fld>
             <a:endParaRPr lang="zh-CN" altLang="en-US"/>
           </a:p>
@@ -2472,7 +2718,13 @@
       </p:sp>
       <p:sp>
         <p:nvSpPr>
-          <p:cNvPr id="5" name="页脚占位符 4"/>
+          <p:cNvPr id="5" name="页脚占位符 4">
+            <a:extLst>
+              <a:ext uri="{FF2B5EF4-FFF2-40B4-BE49-F238E27FC236}">
+                <a16:creationId xmlns:a16="http://schemas.microsoft.com/office/drawing/2014/main" id="{3C562696-FBBC-4EB8-9EBD-19EE2BB47515}"/>
+              </a:ext>
+            </a:extLst>
+          </p:cNvPr>
           <p:cNvSpPr>
             <a:spLocks noGrp="1"/>
           </p:cNvSpPr>
@@ -2498,7 +2750,13 @@
       </p:sp>
       <p:sp>
         <p:nvSpPr>
-          <p:cNvPr id="6" name="灯片编号占位符 5"/>
+          <p:cNvPr id="6" name="灯片编号占位符 5">
+            <a:extLst>
+              <a:ext uri="{FF2B5EF4-FFF2-40B4-BE49-F238E27FC236}">
+                <a16:creationId xmlns:a16="http://schemas.microsoft.com/office/drawing/2014/main" id="{5C0E1A01-6584-4619-AB08-FD6FEFF096AF}"/>
+              </a:ext>
+            </a:extLst>
+          </p:cNvPr>
           <p:cNvSpPr>
             <a:spLocks noGrp="1"/>
           </p:cNvSpPr>
@@ -2520,12 +2778,21 @@
             </a:pPr>
             <a:fld id="{F4094204-A637-4043-9CC7-987AF444C4F4}" type="slidenum">
               <a:rPr lang="zh-CN" altLang="en-US"/>
+              <a:pPr>
+                <a:defRPr/>
+              </a:pPr>
+              <a:t>‹#›</a:t>
             </a:fld>
             <a:endParaRPr lang="zh-CN" altLang="en-US"/>
           </a:p>
         </p:txBody>
       </p:sp>
     </p:spTree>
+    <p:extLst>
+      <p:ext uri="{BB962C8B-B14F-4D97-AF65-F5344CB8AC3E}">
+        <p14:creationId xmlns:p14="http://schemas.microsoft.com/office/powerpoint/2010/main" val="819006490"/>
+      </p:ext>
+    </p:extLst>
   </p:cSld>
   <p:clrMapOvr>
     <a:masterClrMapping/>
@@ -2569,7 +2836,6 @@
               <a:rPr lang="zh-CN" altLang="en-US"/>
               <a:t>单击此处编辑母版标题样式</a:t>
             </a:r>
-            <a:endParaRPr lang="zh-CN" altLang="en-US"/>
           </a:p>
         </p:txBody>
       </p:sp>
@@ -2593,7 +2859,6 @@
               <a:rPr lang="zh-CN" altLang="en-US"/>
               <a:t>单击此处编辑母版文本样式</a:t>
             </a:r>
-            <a:endParaRPr lang="zh-CN" altLang="en-US"/>
           </a:p>
           <a:p>
             <a:pPr lvl="1"/>
@@ -2601,7 +2866,6 @@
               <a:rPr lang="zh-CN" altLang="en-US"/>
               <a:t>第二级</a:t>
             </a:r>
-            <a:endParaRPr lang="zh-CN" altLang="en-US"/>
           </a:p>
           <a:p>
             <a:pPr lvl="2"/>
@@ -2609,7 +2873,6 @@
               <a:rPr lang="zh-CN" altLang="en-US"/>
               <a:t>第三级</a:t>
             </a:r>
-            <a:endParaRPr lang="zh-CN" altLang="en-US"/>
           </a:p>
           <a:p>
             <a:pPr lvl="3"/>
@@ -2617,7 +2880,6 @@
               <a:rPr lang="zh-CN" altLang="en-US"/>
               <a:t>第四级</a:t>
             </a:r>
-            <a:endParaRPr lang="zh-CN" altLang="en-US"/>
           </a:p>
           <a:p>
             <a:pPr lvl="4"/>
@@ -2625,13 +2887,18 @@
               <a:rPr lang="zh-CN" altLang="en-US"/>
               <a:t>第五级</a:t>
             </a:r>
-            <a:endParaRPr lang="zh-CN" altLang="en-US"/>
           </a:p>
         </p:txBody>
       </p:sp>
       <p:sp>
         <p:nvSpPr>
-          <p:cNvPr id="4" name="日期占位符 3"/>
+          <p:cNvPr id="4" name="日期占位符 3">
+            <a:extLst>
+              <a:ext uri="{FF2B5EF4-FFF2-40B4-BE49-F238E27FC236}">
+                <a16:creationId xmlns:a16="http://schemas.microsoft.com/office/drawing/2014/main" id="{7AD7936C-15CE-4AAB-848B-6D270D7375DD}"/>
+              </a:ext>
+            </a:extLst>
+          </p:cNvPr>
           <p:cNvSpPr>
             <a:spLocks noGrp="1"/>
           </p:cNvSpPr>
@@ -2653,6 +2920,10 @@
             </a:pPr>
             <a:fld id="{B5AC7AC8-BDAF-459E-A39D-6ECCEBA31388}" type="datetimeFigureOut">
               <a:rPr lang="zh-CN" altLang="en-US"/>
+              <a:pPr>
+                <a:defRPr/>
+              </a:pPr>
+              <a:t>2026/6/2</a:t>
             </a:fld>
             <a:endParaRPr lang="zh-CN" altLang="en-US"/>
           </a:p>
@@ -2660,7 +2931,13 @@
       </p:sp>
       <p:sp>
         <p:nvSpPr>
-          <p:cNvPr id="5" name="页脚占位符 4"/>
+          <p:cNvPr id="5" name="页脚占位符 4">
+            <a:extLst>
+              <a:ext uri="{FF2B5EF4-FFF2-40B4-BE49-F238E27FC236}">
+                <a16:creationId xmlns:a16="http://schemas.microsoft.com/office/drawing/2014/main" id="{EED9C6D5-B12F-401F-97BA-2B556388BCCF}"/>
+              </a:ext>
+            </a:extLst>
+          </p:cNvPr>
           <p:cNvSpPr>
             <a:spLocks noGrp="1"/>
           </p:cNvSpPr>
@@ -2686,7 +2963,13 @@
       </p:sp>
       <p:sp>
         <p:nvSpPr>
-          <p:cNvPr id="6" name="灯片编号占位符 5"/>
+          <p:cNvPr id="6" name="灯片编号占位符 5">
+            <a:extLst>
+              <a:ext uri="{FF2B5EF4-FFF2-40B4-BE49-F238E27FC236}">
+                <a16:creationId xmlns:a16="http://schemas.microsoft.com/office/drawing/2014/main" id="{22483FAA-5398-41B1-AE28-EE41BB0F15C3}"/>
+              </a:ext>
+            </a:extLst>
+          </p:cNvPr>
           <p:cNvSpPr>
             <a:spLocks noGrp="1"/>
           </p:cNvSpPr>
@@ -2708,12 +2991,21 @@
             </a:pPr>
             <a:fld id="{AA73592C-DF7F-4F25-95AD-A0D5EFEFC057}" type="slidenum">
               <a:rPr lang="zh-CN" altLang="en-US"/>
+              <a:pPr>
+                <a:defRPr/>
+              </a:pPr>
+              <a:t>‹#›</a:t>
             </a:fld>
             <a:endParaRPr lang="zh-CN" altLang="en-US"/>
           </a:p>
         </p:txBody>
       </p:sp>
     </p:spTree>
+    <p:extLst>
+      <p:ext uri="{BB962C8B-B14F-4D97-AF65-F5344CB8AC3E}">
+        <p14:creationId xmlns:p14="http://schemas.microsoft.com/office/powerpoint/2010/main" val="579073889"/>
+      </p:ext>
+    </p:extLst>
   </p:cSld>
   <p:clrMapOvr>
     <a:masterClrMapping/>
@@ -2762,7 +3054,6 @@
               <a:rPr lang="zh-CN" altLang="en-US"/>
               <a:t>单击此处编辑母版标题样式</a:t>
             </a:r>
-            <a:endParaRPr lang="zh-CN" altLang="en-US"/>
           </a:p>
         </p:txBody>
       </p:sp>
@@ -2791,7 +3082,6 @@
               <a:rPr lang="zh-CN" altLang="en-US"/>
               <a:t>单击此处编辑母版文本样式</a:t>
             </a:r>
-            <a:endParaRPr lang="zh-CN" altLang="en-US"/>
           </a:p>
           <a:p>
             <a:pPr lvl="1"/>
@@ -2799,7 +3089,6 @@
               <a:rPr lang="zh-CN" altLang="en-US"/>
               <a:t>第二级</a:t>
             </a:r>
-            <a:endParaRPr lang="zh-CN" altLang="en-US"/>
           </a:p>
           <a:p>
             <a:pPr lvl="2"/>
@@ -2807,7 +3096,6 @@
               <a:rPr lang="zh-CN" altLang="en-US"/>
               <a:t>第三级</a:t>
             </a:r>
-            <a:endParaRPr lang="zh-CN" altLang="en-US"/>
           </a:p>
           <a:p>
             <a:pPr lvl="3"/>
@@ -2815,7 +3103,6 @@
               <a:rPr lang="zh-CN" altLang="en-US"/>
               <a:t>第四级</a:t>
             </a:r>
-            <a:endParaRPr lang="zh-CN" altLang="en-US"/>
           </a:p>
           <a:p>
             <a:pPr lvl="4"/>
@@ -2823,13 +3110,18 @@
               <a:rPr lang="zh-CN" altLang="en-US"/>
               <a:t>第五级</a:t>
             </a:r>
-            <a:endParaRPr lang="zh-CN" altLang="en-US"/>
           </a:p>
         </p:txBody>
       </p:sp>
       <p:sp>
         <p:nvSpPr>
-          <p:cNvPr id="4" name="日期占位符 3"/>
+          <p:cNvPr id="4" name="日期占位符 3">
+            <a:extLst>
+              <a:ext uri="{FF2B5EF4-FFF2-40B4-BE49-F238E27FC236}">
+                <a16:creationId xmlns:a16="http://schemas.microsoft.com/office/drawing/2014/main" id="{1894C623-0ADE-484A-BE33-E702B35822D4}"/>
+              </a:ext>
+            </a:extLst>
+          </p:cNvPr>
           <p:cNvSpPr>
             <a:spLocks noGrp="1"/>
           </p:cNvSpPr>
@@ -2851,6 +3143,10 @@
             </a:pPr>
             <a:fld id="{57DA897F-8DA0-4D46-8DD8-2287ABC8EEC1}" type="datetimeFigureOut">
               <a:rPr lang="zh-CN" altLang="en-US"/>
+              <a:pPr>
+                <a:defRPr/>
+              </a:pPr>
+              <a:t>2026/6/2</a:t>
             </a:fld>
             <a:endParaRPr lang="zh-CN" altLang="en-US"/>
           </a:p>
@@ -2858,7 +3154,13 @@
       </p:sp>
       <p:sp>
         <p:nvSpPr>
-          <p:cNvPr id="5" name="页脚占位符 4"/>
+          <p:cNvPr id="5" name="页脚占位符 4">
+            <a:extLst>
+              <a:ext uri="{FF2B5EF4-FFF2-40B4-BE49-F238E27FC236}">
+                <a16:creationId xmlns:a16="http://schemas.microsoft.com/office/drawing/2014/main" id="{40C84BD7-9901-416C-95BF-36949573D301}"/>
+              </a:ext>
+            </a:extLst>
+          </p:cNvPr>
           <p:cNvSpPr>
             <a:spLocks noGrp="1"/>
           </p:cNvSpPr>
@@ -2884,7 +3186,13 @@
       </p:sp>
       <p:sp>
         <p:nvSpPr>
-          <p:cNvPr id="6" name="灯片编号占位符 5"/>
+          <p:cNvPr id="6" name="灯片编号占位符 5">
+            <a:extLst>
+              <a:ext uri="{FF2B5EF4-FFF2-40B4-BE49-F238E27FC236}">
+                <a16:creationId xmlns:a16="http://schemas.microsoft.com/office/drawing/2014/main" id="{FF5E8AF4-C2BC-4E32-9DB3-E8FB1A1C9C6C}"/>
+              </a:ext>
+            </a:extLst>
+          </p:cNvPr>
           <p:cNvSpPr>
             <a:spLocks noGrp="1"/>
           </p:cNvSpPr>
@@ -2906,12 +3214,21 @@
             </a:pPr>
             <a:fld id="{76D54C32-A54F-443A-900C-0AC299C29E82}" type="slidenum">
               <a:rPr lang="zh-CN" altLang="en-US"/>
+              <a:pPr>
+                <a:defRPr/>
+              </a:pPr>
+              <a:t>‹#›</a:t>
             </a:fld>
             <a:endParaRPr lang="zh-CN" altLang="en-US"/>
           </a:p>
         </p:txBody>
       </p:sp>
     </p:spTree>
+    <p:extLst>
+      <p:ext uri="{BB962C8B-B14F-4D97-AF65-F5344CB8AC3E}">
+        <p14:creationId xmlns:p14="http://schemas.microsoft.com/office/powerpoint/2010/main" val="4182868265"/>
+      </p:ext>
+    </p:extLst>
   </p:cSld>
   <p:clrMapOvr>
     <a:masterClrMapping/>
@@ -2961,7 +3278,6 @@
               <a:rPr lang="zh-CN" altLang="en-US"/>
               <a:t>单击此处编辑母版文本样式</a:t>
             </a:r>
-            <a:endParaRPr lang="zh-CN" altLang="en-US"/>
           </a:p>
           <a:p>
             <a:pPr lvl="1"/>
@@ -2969,7 +3285,6 @@
               <a:rPr lang="zh-CN" altLang="en-US"/>
               <a:t>第二级</a:t>
             </a:r>
-            <a:endParaRPr lang="zh-CN" altLang="en-US"/>
           </a:p>
           <a:p>
             <a:pPr lvl="2"/>
@@ -2977,7 +3292,6 @@
               <a:rPr lang="zh-CN" altLang="en-US"/>
               <a:t>第三级</a:t>
             </a:r>
-            <a:endParaRPr lang="zh-CN" altLang="en-US"/>
           </a:p>
           <a:p>
             <a:pPr lvl="3"/>
@@ -2985,7 +3299,6 @@
               <a:rPr lang="zh-CN" altLang="en-US"/>
               <a:t>第四级</a:t>
             </a:r>
-            <a:endParaRPr lang="zh-CN" altLang="en-US"/>
           </a:p>
           <a:p>
             <a:pPr lvl="4"/>
@@ -2993,13 +3306,18 @@
               <a:rPr lang="zh-CN" altLang="en-US"/>
               <a:t>第五级</a:t>
             </a:r>
-            <a:endParaRPr lang="zh-CN" altLang="en-US"/>
           </a:p>
         </p:txBody>
       </p:sp>
       <p:sp>
         <p:nvSpPr>
-          <p:cNvPr id="3" name="Rectangle 4"/>
+          <p:cNvPr id="3" name="Rectangle 4">
+            <a:extLst>
+              <a:ext uri="{FF2B5EF4-FFF2-40B4-BE49-F238E27FC236}">
+                <a16:creationId xmlns:a16="http://schemas.microsoft.com/office/drawing/2014/main" id="{A4E221A7-0730-4633-B4BD-24B39355CC5D}"/>
+              </a:ext>
+            </a:extLst>
+          </p:cNvPr>
           <p:cNvSpPr>
             <a:spLocks noGrp="1" noChangeArrowheads="1"/>
           </p:cNvSpPr>
@@ -3025,7 +3343,13 @@
       </p:sp>
       <p:sp>
         <p:nvSpPr>
-          <p:cNvPr id="4" name="Rectangle 5"/>
+          <p:cNvPr id="4" name="Rectangle 5">
+            <a:extLst>
+              <a:ext uri="{FF2B5EF4-FFF2-40B4-BE49-F238E27FC236}">
+                <a16:creationId xmlns:a16="http://schemas.microsoft.com/office/drawing/2014/main" id="{78DCF6A7-B355-459E-B60A-77FF55BDCAAC}"/>
+              </a:ext>
+            </a:extLst>
+          </p:cNvPr>
           <p:cNvSpPr>
             <a:spLocks noGrp="1" noChangeArrowheads="1"/>
           </p:cNvSpPr>
@@ -3051,7 +3375,13 @@
       </p:sp>
       <p:sp>
         <p:nvSpPr>
-          <p:cNvPr id="5" name="Rectangle 6"/>
+          <p:cNvPr id="5" name="Rectangle 6">
+            <a:extLst>
+              <a:ext uri="{FF2B5EF4-FFF2-40B4-BE49-F238E27FC236}">
+                <a16:creationId xmlns:a16="http://schemas.microsoft.com/office/drawing/2014/main" id="{483CACA6-08B1-457A-9623-D84272E7D764}"/>
+              </a:ext>
+            </a:extLst>
+          </p:cNvPr>
           <p:cNvSpPr>
             <a:spLocks noGrp="1" noChangeArrowheads="1"/>
           </p:cNvSpPr>
@@ -3073,12 +3403,21 @@
             </a:pPr>
             <a:fld id="{97C3CAD6-A1E2-4004-850D-629E47C74569}" type="slidenum">
               <a:rPr lang="en-US" altLang="zh-CN"/>
+              <a:pPr>
+                <a:defRPr/>
+              </a:pPr>
+              <a:t>‹#›</a:t>
             </a:fld>
             <a:endParaRPr lang="en-US" altLang="zh-CN"/>
           </a:p>
         </p:txBody>
       </p:sp>
     </p:spTree>
+    <p:extLst>
+      <p:ext uri="{BB962C8B-B14F-4D97-AF65-F5344CB8AC3E}">
+        <p14:creationId xmlns:p14="http://schemas.microsoft.com/office/powerpoint/2010/main" val="1648139582"/>
+      </p:ext>
+    </p:extLst>
   </p:cSld>
   <p:clrMapOvr>
     <a:masterClrMapping/>
@@ -3122,7 +3461,6 @@
               <a:rPr lang="zh-CN" altLang="en-US"/>
               <a:t>单击此处编辑母版标题样式</a:t>
             </a:r>
-            <a:endParaRPr lang="zh-CN" altLang="en-US"/>
           </a:p>
         </p:txBody>
       </p:sp>
@@ -3146,7 +3484,6 @@
               <a:rPr lang="zh-CN" altLang="en-US" dirty="0"/>
               <a:t>单击此处编辑母版文本样式</a:t>
             </a:r>
-            <a:endParaRPr lang="zh-CN" altLang="en-US" dirty="0"/>
           </a:p>
           <a:p>
             <a:pPr lvl="1"/>
@@ -3154,7 +3491,6 @@
               <a:rPr lang="zh-CN" altLang="en-US" dirty="0"/>
               <a:t>第二级</a:t>
             </a:r>
-            <a:endParaRPr lang="zh-CN" altLang="en-US" dirty="0"/>
           </a:p>
           <a:p>
             <a:pPr lvl="2"/>
@@ -3162,7 +3498,6 @@
               <a:rPr lang="zh-CN" altLang="en-US" dirty="0"/>
               <a:t>第三级</a:t>
             </a:r>
-            <a:endParaRPr lang="zh-CN" altLang="en-US" dirty="0"/>
           </a:p>
           <a:p>
             <a:pPr lvl="3"/>
@@ -3170,7 +3505,6 @@
               <a:rPr lang="zh-CN" altLang="en-US" dirty="0"/>
               <a:t>第四级</a:t>
             </a:r>
-            <a:endParaRPr lang="zh-CN" altLang="en-US" dirty="0"/>
           </a:p>
           <a:p>
             <a:pPr lvl="4"/>
@@ -3178,13 +3512,18 @@
               <a:rPr lang="zh-CN" altLang="en-US" dirty="0"/>
               <a:t>第五级</a:t>
             </a:r>
-            <a:endParaRPr lang="zh-CN" altLang="en-US" dirty="0"/>
           </a:p>
         </p:txBody>
       </p:sp>
       <p:sp>
         <p:nvSpPr>
-          <p:cNvPr id="4" name="日期占位符 3"/>
+          <p:cNvPr id="4" name="日期占位符 3">
+            <a:extLst>
+              <a:ext uri="{FF2B5EF4-FFF2-40B4-BE49-F238E27FC236}">
+                <a16:creationId xmlns:a16="http://schemas.microsoft.com/office/drawing/2014/main" id="{64ECD5CD-4A9C-42BE-9B3F-0ABDA58F33AB}"/>
+              </a:ext>
+            </a:extLst>
+          </p:cNvPr>
           <p:cNvSpPr>
             <a:spLocks noGrp="1"/>
           </p:cNvSpPr>
@@ -3206,6 +3545,10 @@
             </a:pPr>
             <a:fld id="{0C08AD0D-2896-4BF3-923E-FFF8221B046F}" type="datetimeFigureOut">
               <a:rPr lang="zh-CN" altLang="en-US"/>
+              <a:pPr>
+                <a:defRPr/>
+              </a:pPr>
+              <a:t>2026/6/2</a:t>
             </a:fld>
             <a:endParaRPr lang="zh-CN" altLang="en-US"/>
           </a:p>
@@ -3213,7 +3556,13 @@
       </p:sp>
       <p:sp>
         <p:nvSpPr>
-          <p:cNvPr id="5" name="页脚占位符 4"/>
+          <p:cNvPr id="5" name="页脚占位符 4">
+            <a:extLst>
+              <a:ext uri="{FF2B5EF4-FFF2-40B4-BE49-F238E27FC236}">
+                <a16:creationId xmlns:a16="http://schemas.microsoft.com/office/drawing/2014/main" id="{A3BE9E60-15CC-4A0A-B209-61423A3C2F39}"/>
+              </a:ext>
+            </a:extLst>
+          </p:cNvPr>
           <p:cNvSpPr>
             <a:spLocks noGrp="1"/>
           </p:cNvSpPr>
@@ -3239,7 +3588,13 @@
       </p:sp>
       <p:sp>
         <p:nvSpPr>
-          <p:cNvPr id="6" name="灯片编号占位符 5"/>
+          <p:cNvPr id="6" name="灯片编号占位符 5">
+            <a:extLst>
+              <a:ext uri="{FF2B5EF4-FFF2-40B4-BE49-F238E27FC236}">
+                <a16:creationId xmlns:a16="http://schemas.microsoft.com/office/drawing/2014/main" id="{1944ABA8-1820-4B9B-8398-8FE5EBFF2F45}"/>
+              </a:ext>
+            </a:extLst>
+          </p:cNvPr>
           <p:cNvSpPr>
             <a:spLocks noGrp="1"/>
           </p:cNvSpPr>
@@ -3261,12 +3616,21 @@
             </a:pPr>
             <a:fld id="{5C03C437-6D35-4DF2-9DDF-16D33DE3BB70}" type="slidenum">
               <a:rPr lang="zh-CN" altLang="en-US"/>
+              <a:pPr>
+                <a:defRPr/>
+              </a:pPr>
+              <a:t>‹#›</a:t>
             </a:fld>
             <a:endParaRPr lang="zh-CN" altLang="en-US"/>
           </a:p>
         </p:txBody>
       </p:sp>
     </p:spTree>
+    <p:extLst>
+      <p:ext uri="{BB962C8B-B14F-4D97-AF65-F5344CB8AC3E}">
+        <p14:creationId xmlns:p14="http://schemas.microsoft.com/office/powerpoint/2010/main" val="2487465138"/>
+      </p:ext>
+    </p:extLst>
   </p:cSld>
   <p:clrMapOvr>
     <a:masterClrMapping/>
@@ -3319,7 +3683,6 @@
               <a:rPr lang="zh-CN" altLang="en-US"/>
               <a:t>单击此处编辑母版标题样式</a:t>
             </a:r>
-            <a:endParaRPr lang="zh-CN" altLang="en-US"/>
           </a:p>
         </p:txBody>
       </p:sp>
@@ -3439,13 +3802,18 @@
               <a:rPr lang="zh-CN" altLang="en-US"/>
               <a:t>单击此处编辑母版文本样式</a:t>
             </a:r>
-            <a:endParaRPr lang="zh-CN" altLang="en-US"/>
           </a:p>
         </p:txBody>
       </p:sp>
       <p:sp>
         <p:nvSpPr>
-          <p:cNvPr id="4" name="日期占位符 3"/>
+          <p:cNvPr id="4" name="日期占位符 3">
+            <a:extLst>
+              <a:ext uri="{FF2B5EF4-FFF2-40B4-BE49-F238E27FC236}">
+                <a16:creationId xmlns:a16="http://schemas.microsoft.com/office/drawing/2014/main" id="{3B513924-75A6-4FB4-87F0-175FBDEB6CD1}"/>
+              </a:ext>
+            </a:extLst>
+          </p:cNvPr>
           <p:cNvSpPr>
             <a:spLocks noGrp="1"/>
           </p:cNvSpPr>
@@ -3467,6 +3835,10 @@
             </a:pPr>
             <a:fld id="{413F5F9B-25E3-46A1-98D1-D8DF1644CD11}" type="datetimeFigureOut">
               <a:rPr lang="zh-CN" altLang="en-US"/>
+              <a:pPr>
+                <a:defRPr/>
+              </a:pPr>
+              <a:t>2026/6/2</a:t>
             </a:fld>
             <a:endParaRPr lang="zh-CN" altLang="en-US"/>
           </a:p>
@@ -3474,7 +3846,13 @@
       </p:sp>
       <p:sp>
         <p:nvSpPr>
-          <p:cNvPr id="5" name="页脚占位符 4"/>
+          <p:cNvPr id="5" name="页脚占位符 4">
+            <a:extLst>
+              <a:ext uri="{FF2B5EF4-FFF2-40B4-BE49-F238E27FC236}">
+                <a16:creationId xmlns:a16="http://schemas.microsoft.com/office/drawing/2014/main" id="{A62A2985-7505-4F1A-88BD-AC95D4F9C358}"/>
+              </a:ext>
+            </a:extLst>
+          </p:cNvPr>
           <p:cNvSpPr>
             <a:spLocks noGrp="1"/>
           </p:cNvSpPr>
@@ -3500,7 +3878,13 @@
       </p:sp>
       <p:sp>
         <p:nvSpPr>
-          <p:cNvPr id="6" name="灯片编号占位符 5"/>
+          <p:cNvPr id="6" name="灯片编号占位符 5">
+            <a:extLst>
+              <a:ext uri="{FF2B5EF4-FFF2-40B4-BE49-F238E27FC236}">
+                <a16:creationId xmlns:a16="http://schemas.microsoft.com/office/drawing/2014/main" id="{2394F377-6737-4278-BE4F-1C7BE8311EE3}"/>
+              </a:ext>
+            </a:extLst>
+          </p:cNvPr>
           <p:cNvSpPr>
             <a:spLocks noGrp="1"/>
           </p:cNvSpPr>
@@ -3522,12 +3906,21 @@
             </a:pPr>
             <a:fld id="{6BCEA479-BF3B-473D-BBE0-F05445F3474A}" type="slidenum">
               <a:rPr lang="zh-CN" altLang="en-US"/>
+              <a:pPr>
+                <a:defRPr/>
+              </a:pPr>
+              <a:t>‹#›</a:t>
             </a:fld>
             <a:endParaRPr lang="zh-CN" altLang="en-US"/>
           </a:p>
         </p:txBody>
       </p:sp>
     </p:spTree>
+    <p:extLst>
+      <p:ext uri="{BB962C8B-B14F-4D97-AF65-F5344CB8AC3E}">
+        <p14:creationId xmlns:p14="http://schemas.microsoft.com/office/powerpoint/2010/main" val="2867425211"/>
+      </p:ext>
+    </p:extLst>
   </p:cSld>
   <p:clrMapOvr>
     <a:masterClrMapping/>
@@ -3571,7 +3964,6 @@
               <a:rPr lang="zh-CN" altLang="en-US"/>
               <a:t>单击此处编辑母版标题样式</a:t>
             </a:r>
-            <a:endParaRPr lang="zh-CN" altLang="en-US"/>
           </a:p>
         </p:txBody>
       </p:sp>
@@ -3628,7 +4020,6 @@
               <a:rPr lang="zh-CN" altLang="en-US"/>
               <a:t>单击此处编辑母版文本样式</a:t>
             </a:r>
-            <a:endParaRPr lang="zh-CN" altLang="en-US"/>
           </a:p>
           <a:p>
             <a:pPr lvl="1"/>
@@ -3636,7 +4027,6 @@
               <a:rPr lang="zh-CN" altLang="en-US"/>
               <a:t>第二级</a:t>
             </a:r>
-            <a:endParaRPr lang="zh-CN" altLang="en-US"/>
           </a:p>
           <a:p>
             <a:pPr lvl="2"/>
@@ -3644,7 +4034,6 @@
               <a:rPr lang="zh-CN" altLang="en-US"/>
               <a:t>第三级</a:t>
             </a:r>
-            <a:endParaRPr lang="zh-CN" altLang="en-US"/>
           </a:p>
           <a:p>
             <a:pPr lvl="3"/>
@@ -3652,7 +4041,6 @@
               <a:rPr lang="zh-CN" altLang="en-US"/>
               <a:t>第四级</a:t>
             </a:r>
-            <a:endParaRPr lang="zh-CN" altLang="en-US"/>
           </a:p>
           <a:p>
             <a:pPr lvl="4"/>
@@ -3660,7 +4048,6 @@
               <a:rPr lang="zh-CN" altLang="en-US"/>
               <a:t>第五级</a:t>
             </a:r>
-            <a:endParaRPr lang="zh-CN" altLang="en-US"/>
           </a:p>
         </p:txBody>
       </p:sp>
@@ -3717,7 +4104,6 @@
               <a:rPr lang="zh-CN" altLang="en-US"/>
               <a:t>单击此处编辑母版文本样式</a:t>
             </a:r>
-            <a:endParaRPr lang="zh-CN" altLang="en-US"/>
           </a:p>
           <a:p>
             <a:pPr lvl="1"/>
@@ -3725,7 +4111,6 @@
               <a:rPr lang="zh-CN" altLang="en-US"/>
               <a:t>第二级</a:t>
             </a:r>
-            <a:endParaRPr lang="zh-CN" altLang="en-US"/>
           </a:p>
           <a:p>
             <a:pPr lvl="2"/>
@@ -3733,7 +4118,6 @@
               <a:rPr lang="zh-CN" altLang="en-US"/>
               <a:t>第三级</a:t>
             </a:r>
-            <a:endParaRPr lang="zh-CN" altLang="en-US"/>
           </a:p>
           <a:p>
             <a:pPr lvl="3"/>
@@ -3741,7 +4125,6 @@
               <a:rPr lang="zh-CN" altLang="en-US"/>
               <a:t>第四级</a:t>
             </a:r>
-            <a:endParaRPr lang="zh-CN" altLang="en-US"/>
           </a:p>
           <a:p>
             <a:pPr lvl="4"/>
@@ -3749,13 +4132,18 @@
               <a:rPr lang="zh-CN" altLang="en-US"/>
               <a:t>第五级</a:t>
             </a:r>
-            <a:endParaRPr lang="zh-CN" altLang="en-US"/>
           </a:p>
         </p:txBody>
       </p:sp>
       <p:sp>
         <p:nvSpPr>
-          <p:cNvPr id="5" name="日期占位符 3"/>
+          <p:cNvPr id="5" name="日期占位符 3">
+            <a:extLst>
+              <a:ext uri="{FF2B5EF4-FFF2-40B4-BE49-F238E27FC236}">
+                <a16:creationId xmlns:a16="http://schemas.microsoft.com/office/drawing/2014/main" id="{20880CC9-7971-4098-B87F-8480BDBD0DFD}"/>
+              </a:ext>
+            </a:extLst>
+          </p:cNvPr>
           <p:cNvSpPr>
             <a:spLocks noGrp="1"/>
           </p:cNvSpPr>
@@ -3777,6 +4165,10 @@
             </a:pPr>
             <a:fld id="{B2CBB680-830C-4A88-AF9D-51D5BB13C0CE}" type="datetimeFigureOut">
               <a:rPr lang="zh-CN" altLang="en-US"/>
+              <a:pPr>
+                <a:defRPr/>
+              </a:pPr>
+              <a:t>2026/6/2</a:t>
             </a:fld>
             <a:endParaRPr lang="zh-CN" altLang="en-US"/>
           </a:p>
@@ -3784,7 +4176,13 @@
       </p:sp>
       <p:sp>
         <p:nvSpPr>
-          <p:cNvPr id="6" name="页脚占位符 4"/>
+          <p:cNvPr id="6" name="页脚占位符 4">
+            <a:extLst>
+              <a:ext uri="{FF2B5EF4-FFF2-40B4-BE49-F238E27FC236}">
+                <a16:creationId xmlns:a16="http://schemas.microsoft.com/office/drawing/2014/main" id="{2AE3D943-B121-407E-916D-9FAD9F38AE58}"/>
+              </a:ext>
+            </a:extLst>
+          </p:cNvPr>
           <p:cNvSpPr>
             <a:spLocks noGrp="1"/>
           </p:cNvSpPr>
@@ -3810,7 +4208,13 @@
       </p:sp>
       <p:sp>
         <p:nvSpPr>
-          <p:cNvPr id="7" name="灯片编号占位符 5"/>
+          <p:cNvPr id="7" name="灯片编号占位符 5">
+            <a:extLst>
+              <a:ext uri="{FF2B5EF4-FFF2-40B4-BE49-F238E27FC236}">
+                <a16:creationId xmlns:a16="http://schemas.microsoft.com/office/drawing/2014/main" id="{22CF24BB-C6B9-4C32-9E47-C86D43E7CCD0}"/>
+              </a:ext>
+            </a:extLst>
+          </p:cNvPr>
           <p:cNvSpPr>
             <a:spLocks noGrp="1"/>
           </p:cNvSpPr>
@@ -3832,12 +4236,21 @@
             </a:pPr>
             <a:fld id="{91F71099-1BE1-4EC4-99FA-0E8A4EF43A17}" type="slidenum">
               <a:rPr lang="zh-CN" altLang="en-US"/>
+              <a:pPr>
+                <a:defRPr/>
+              </a:pPr>
+              <a:t>‹#›</a:t>
             </a:fld>
             <a:endParaRPr lang="zh-CN" altLang="en-US"/>
           </a:p>
         </p:txBody>
       </p:sp>
     </p:spTree>
+    <p:extLst>
+      <p:ext uri="{BB962C8B-B14F-4D97-AF65-F5344CB8AC3E}">
+        <p14:creationId xmlns:p14="http://schemas.microsoft.com/office/powerpoint/2010/main" val="3343344951"/>
+      </p:ext>
+    </p:extLst>
   </p:cSld>
   <p:clrMapOvr>
     <a:masterClrMapping/>
@@ -3885,7 +4298,6 @@
               <a:rPr lang="zh-CN" altLang="en-US"/>
               <a:t>单击此处编辑母版标题样式</a:t>
             </a:r>
-            <a:endParaRPr lang="zh-CN" altLang="en-US"/>
           </a:p>
         </p:txBody>
       </p:sp>
@@ -3951,7 +4363,6 @@
               <a:rPr lang="zh-CN" altLang="en-US"/>
               <a:t>单击此处编辑母版文本样式</a:t>
             </a:r>
-            <a:endParaRPr lang="zh-CN" altLang="en-US"/>
           </a:p>
         </p:txBody>
       </p:sp>
@@ -4008,7 +4419,6 @@
               <a:rPr lang="zh-CN" altLang="en-US"/>
               <a:t>单击此处编辑母版文本样式</a:t>
             </a:r>
-            <a:endParaRPr lang="zh-CN" altLang="en-US"/>
           </a:p>
           <a:p>
             <a:pPr lvl="1"/>
@@ -4016,7 +4426,6 @@
               <a:rPr lang="zh-CN" altLang="en-US"/>
               <a:t>第二级</a:t>
             </a:r>
-            <a:endParaRPr lang="zh-CN" altLang="en-US"/>
           </a:p>
           <a:p>
             <a:pPr lvl="2"/>
@@ -4024,7 +4433,6 @@
               <a:rPr lang="zh-CN" altLang="en-US"/>
               <a:t>第三级</a:t>
             </a:r>
-            <a:endParaRPr lang="zh-CN" altLang="en-US"/>
           </a:p>
           <a:p>
             <a:pPr lvl="3"/>
@@ -4032,7 +4440,6 @@
               <a:rPr lang="zh-CN" altLang="en-US"/>
               <a:t>第四级</a:t>
             </a:r>
-            <a:endParaRPr lang="zh-CN" altLang="en-US"/>
           </a:p>
           <a:p>
             <a:pPr lvl="4"/>
@@ -4040,7 +4447,6 @@
               <a:rPr lang="zh-CN" altLang="en-US"/>
               <a:t>第五级</a:t>
             </a:r>
-            <a:endParaRPr lang="zh-CN" altLang="en-US"/>
           </a:p>
         </p:txBody>
       </p:sp>
@@ -4106,7 +4512,6 @@
               <a:rPr lang="zh-CN" altLang="en-US"/>
               <a:t>单击此处编辑母版文本样式</a:t>
             </a:r>
-            <a:endParaRPr lang="zh-CN" altLang="en-US"/>
           </a:p>
         </p:txBody>
       </p:sp>
@@ -4163,7 +4568,6 @@
               <a:rPr lang="zh-CN" altLang="en-US"/>
               <a:t>单击此处编辑母版文本样式</a:t>
             </a:r>
-            <a:endParaRPr lang="zh-CN" altLang="en-US"/>
           </a:p>
           <a:p>
             <a:pPr lvl="1"/>
@@ -4171,7 +4575,6 @@
               <a:rPr lang="zh-CN" altLang="en-US"/>
               <a:t>第二级</a:t>
             </a:r>
-            <a:endParaRPr lang="zh-CN" altLang="en-US"/>
           </a:p>
           <a:p>
             <a:pPr lvl="2"/>
@@ -4179,7 +4582,6 @@
               <a:rPr lang="zh-CN" altLang="en-US"/>
               <a:t>第三级</a:t>
             </a:r>
-            <a:endParaRPr lang="zh-CN" altLang="en-US"/>
           </a:p>
           <a:p>
             <a:pPr lvl="3"/>
@@ -4187,7 +4589,6 @@
               <a:rPr lang="zh-CN" altLang="en-US"/>
               <a:t>第四级</a:t>
             </a:r>
-            <a:endParaRPr lang="zh-CN" altLang="en-US"/>
           </a:p>
           <a:p>
             <a:pPr lvl="4"/>
@@ -4195,13 +4596,18 @@
               <a:rPr lang="zh-CN" altLang="en-US"/>
               <a:t>第五级</a:t>
             </a:r>
-            <a:endParaRPr lang="zh-CN" altLang="en-US"/>
           </a:p>
         </p:txBody>
       </p:sp>
       <p:sp>
         <p:nvSpPr>
-          <p:cNvPr id="7" name="日期占位符 3"/>
+          <p:cNvPr id="7" name="日期占位符 3">
+            <a:extLst>
+              <a:ext uri="{FF2B5EF4-FFF2-40B4-BE49-F238E27FC236}">
+                <a16:creationId xmlns:a16="http://schemas.microsoft.com/office/drawing/2014/main" id="{8CE374B4-C9E2-4251-B199-E4EB7F5E42B1}"/>
+              </a:ext>
+            </a:extLst>
+          </p:cNvPr>
           <p:cNvSpPr>
             <a:spLocks noGrp="1"/>
           </p:cNvSpPr>
@@ -4223,6 +4629,10 @@
             </a:pPr>
             <a:fld id="{0D29C6AF-5792-4C28-AF80-D5340AE435B0}" type="datetimeFigureOut">
               <a:rPr lang="zh-CN" altLang="en-US"/>
+              <a:pPr>
+                <a:defRPr/>
+              </a:pPr>
+              <a:t>2026/6/2</a:t>
             </a:fld>
             <a:endParaRPr lang="zh-CN" altLang="en-US"/>
           </a:p>
@@ -4230,7 +4640,13 @@
       </p:sp>
       <p:sp>
         <p:nvSpPr>
-          <p:cNvPr id="8" name="页脚占位符 4"/>
+          <p:cNvPr id="8" name="页脚占位符 4">
+            <a:extLst>
+              <a:ext uri="{FF2B5EF4-FFF2-40B4-BE49-F238E27FC236}">
+                <a16:creationId xmlns:a16="http://schemas.microsoft.com/office/drawing/2014/main" id="{E9B58D44-811D-4457-B664-5138E3841E88}"/>
+              </a:ext>
+            </a:extLst>
+          </p:cNvPr>
           <p:cNvSpPr>
             <a:spLocks noGrp="1"/>
           </p:cNvSpPr>
@@ -4256,7 +4672,13 @@
       </p:sp>
       <p:sp>
         <p:nvSpPr>
-          <p:cNvPr id="9" name="灯片编号占位符 5"/>
+          <p:cNvPr id="9" name="灯片编号占位符 5">
+            <a:extLst>
+              <a:ext uri="{FF2B5EF4-FFF2-40B4-BE49-F238E27FC236}">
+                <a16:creationId xmlns:a16="http://schemas.microsoft.com/office/drawing/2014/main" id="{0A1AC865-3AD2-427E-AFE6-3583B2CEC9B6}"/>
+              </a:ext>
+            </a:extLst>
+          </p:cNvPr>
           <p:cNvSpPr>
             <a:spLocks noGrp="1"/>
           </p:cNvSpPr>
@@ -4278,12 +4700,21 @@
             </a:pPr>
             <a:fld id="{DE48EC19-AA48-483B-9C69-7C29A53F1D62}" type="slidenum">
               <a:rPr lang="zh-CN" altLang="en-US"/>
+              <a:pPr>
+                <a:defRPr/>
+              </a:pPr>
+              <a:t>‹#›</a:t>
             </a:fld>
             <a:endParaRPr lang="zh-CN" altLang="en-US"/>
           </a:p>
         </p:txBody>
       </p:sp>
     </p:spTree>
+    <p:extLst>
+      <p:ext uri="{BB962C8B-B14F-4D97-AF65-F5344CB8AC3E}">
+        <p14:creationId xmlns:p14="http://schemas.microsoft.com/office/powerpoint/2010/main" val="3549895189"/>
+      </p:ext>
+    </p:extLst>
   </p:cSld>
   <p:clrMapOvr>
     <a:masterClrMapping/>
@@ -4327,13 +4758,18 @@
               <a:rPr lang="zh-CN" altLang="en-US"/>
               <a:t>单击此处编辑母版标题样式</a:t>
             </a:r>
-            <a:endParaRPr lang="zh-CN" altLang="en-US"/>
           </a:p>
         </p:txBody>
       </p:sp>
       <p:sp>
         <p:nvSpPr>
-          <p:cNvPr id="3" name="日期占位符 3"/>
+          <p:cNvPr id="3" name="日期占位符 3">
+            <a:extLst>
+              <a:ext uri="{FF2B5EF4-FFF2-40B4-BE49-F238E27FC236}">
+                <a16:creationId xmlns:a16="http://schemas.microsoft.com/office/drawing/2014/main" id="{D4571941-D6AA-47A6-B45C-08C11357B850}"/>
+              </a:ext>
+            </a:extLst>
+          </p:cNvPr>
           <p:cNvSpPr>
             <a:spLocks noGrp="1"/>
           </p:cNvSpPr>
@@ -4355,6 +4791,10 @@
             </a:pPr>
             <a:fld id="{38ACEB95-638D-4867-89C1-C84FCA55FD02}" type="datetimeFigureOut">
               <a:rPr lang="zh-CN" altLang="en-US"/>
+              <a:pPr>
+                <a:defRPr/>
+              </a:pPr>
+              <a:t>2026/6/2</a:t>
             </a:fld>
             <a:endParaRPr lang="zh-CN" altLang="en-US"/>
           </a:p>
@@ -4362,7 +4802,13 @@
       </p:sp>
       <p:sp>
         <p:nvSpPr>
-          <p:cNvPr id="4" name="页脚占位符 4"/>
+          <p:cNvPr id="4" name="页脚占位符 4">
+            <a:extLst>
+              <a:ext uri="{FF2B5EF4-FFF2-40B4-BE49-F238E27FC236}">
+                <a16:creationId xmlns:a16="http://schemas.microsoft.com/office/drawing/2014/main" id="{BE81DE41-E008-427E-A0EB-9D01D03BFCDB}"/>
+              </a:ext>
+            </a:extLst>
+          </p:cNvPr>
           <p:cNvSpPr>
             <a:spLocks noGrp="1"/>
           </p:cNvSpPr>
@@ -4388,7 +4834,13 @@
       </p:sp>
       <p:sp>
         <p:nvSpPr>
-          <p:cNvPr id="5" name="灯片编号占位符 5"/>
+          <p:cNvPr id="5" name="灯片编号占位符 5">
+            <a:extLst>
+              <a:ext uri="{FF2B5EF4-FFF2-40B4-BE49-F238E27FC236}">
+                <a16:creationId xmlns:a16="http://schemas.microsoft.com/office/drawing/2014/main" id="{894AE7B3-31F8-4E8C-BB75-7A3F0EC815D9}"/>
+              </a:ext>
+            </a:extLst>
+          </p:cNvPr>
           <p:cNvSpPr>
             <a:spLocks noGrp="1"/>
           </p:cNvSpPr>
@@ -4410,12 +4862,21 @@
             </a:pPr>
             <a:fld id="{3BD03AD1-CBA7-43A5-BDAB-D2A6671AEF2A}" type="slidenum">
               <a:rPr lang="zh-CN" altLang="en-US"/>
+              <a:pPr>
+                <a:defRPr/>
+              </a:pPr>
+              <a:t>‹#›</a:t>
             </a:fld>
             <a:endParaRPr lang="zh-CN" altLang="en-US"/>
           </a:p>
         </p:txBody>
       </p:sp>
     </p:spTree>
+    <p:extLst>
+      <p:ext uri="{BB962C8B-B14F-4D97-AF65-F5344CB8AC3E}">
+        <p14:creationId xmlns:p14="http://schemas.microsoft.com/office/powerpoint/2010/main" val="2816883384"/>
+      </p:ext>
+    </p:extLst>
   </p:cSld>
   <p:clrMapOvr>
     <a:masterClrMapping/>
@@ -4442,7 +4903,13 @@
       </p:grpSpPr>
       <p:sp>
         <p:nvSpPr>
-          <p:cNvPr id="2" name="日期占位符 3"/>
+          <p:cNvPr id="2" name="日期占位符 3">
+            <a:extLst>
+              <a:ext uri="{FF2B5EF4-FFF2-40B4-BE49-F238E27FC236}">
+                <a16:creationId xmlns:a16="http://schemas.microsoft.com/office/drawing/2014/main" id="{0182AB05-0F02-4448-AA3F-1E48E8443E8A}"/>
+              </a:ext>
+            </a:extLst>
+          </p:cNvPr>
           <p:cNvSpPr>
             <a:spLocks noGrp="1"/>
           </p:cNvSpPr>
@@ -4464,6 +4931,10 @@
             </a:pPr>
             <a:fld id="{B883964D-015F-45A6-BBB8-525A43BB96E4}" type="datetimeFigureOut">
               <a:rPr lang="zh-CN" altLang="en-US"/>
+              <a:pPr>
+                <a:defRPr/>
+              </a:pPr>
+              <a:t>2026/6/2</a:t>
             </a:fld>
             <a:endParaRPr lang="zh-CN" altLang="en-US"/>
           </a:p>
@@ -4471,7 +4942,13 @@
       </p:sp>
       <p:sp>
         <p:nvSpPr>
-          <p:cNvPr id="3" name="页脚占位符 4"/>
+          <p:cNvPr id="3" name="页脚占位符 4">
+            <a:extLst>
+              <a:ext uri="{FF2B5EF4-FFF2-40B4-BE49-F238E27FC236}">
+                <a16:creationId xmlns:a16="http://schemas.microsoft.com/office/drawing/2014/main" id="{CDEBB7F7-48E2-4D51-996D-99CFA564FDC1}"/>
+              </a:ext>
+            </a:extLst>
+          </p:cNvPr>
           <p:cNvSpPr>
             <a:spLocks noGrp="1"/>
           </p:cNvSpPr>
@@ -4497,7 +4974,13 @@
       </p:sp>
       <p:sp>
         <p:nvSpPr>
-          <p:cNvPr id="4" name="灯片编号占位符 5"/>
+          <p:cNvPr id="4" name="灯片编号占位符 5">
+            <a:extLst>
+              <a:ext uri="{FF2B5EF4-FFF2-40B4-BE49-F238E27FC236}">
+                <a16:creationId xmlns:a16="http://schemas.microsoft.com/office/drawing/2014/main" id="{4A9F14A0-6B8E-4251-9D5B-A21946D8CD22}"/>
+              </a:ext>
+            </a:extLst>
+          </p:cNvPr>
           <p:cNvSpPr>
             <a:spLocks noGrp="1"/>
           </p:cNvSpPr>
@@ -4519,12 +5002,21 @@
             </a:pPr>
             <a:fld id="{DDDA8CA2-A1CB-4473-A6CD-72E4CDDC229B}" type="slidenum">
               <a:rPr lang="zh-CN" altLang="en-US"/>
+              <a:pPr>
+                <a:defRPr/>
+              </a:pPr>
+              <a:t>‹#›</a:t>
             </a:fld>
             <a:endParaRPr lang="zh-CN" altLang="en-US"/>
           </a:p>
         </p:txBody>
       </p:sp>
     </p:spTree>
+    <p:extLst>
+      <p:ext uri="{BB962C8B-B14F-4D97-AF65-F5344CB8AC3E}">
+        <p14:creationId xmlns:p14="http://schemas.microsoft.com/office/powerpoint/2010/main" val="3325645518"/>
+      </p:ext>
+    </p:extLst>
   </p:cSld>
   <p:clrMapOvr>
     <a:masterClrMapping/>
@@ -4577,7 +5069,6 @@
               <a:rPr lang="zh-CN" altLang="en-US"/>
               <a:t>单击此处编辑母版标题样式</a:t>
             </a:r>
-            <a:endParaRPr lang="zh-CN" altLang="en-US"/>
           </a:p>
         </p:txBody>
       </p:sp>
@@ -4634,7 +5125,6 @@
               <a:rPr lang="zh-CN" altLang="en-US"/>
               <a:t>单击此处编辑母版文本样式</a:t>
             </a:r>
-            <a:endParaRPr lang="zh-CN" altLang="en-US"/>
           </a:p>
           <a:p>
             <a:pPr lvl="1"/>
@@ -4642,7 +5132,6 @@
               <a:rPr lang="zh-CN" altLang="en-US"/>
               <a:t>第二级</a:t>
             </a:r>
-            <a:endParaRPr lang="zh-CN" altLang="en-US"/>
           </a:p>
           <a:p>
             <a:pPr lvl="2"/>
@@ -4650,7 +5139,6 @@
               <a:rPr lang="zh-CN" altLang="en-US"/>
               <a:t>第三级</a:t>
             </a:r>
-            <a:endParaRPr lang="zh-CN" altLang="en-US"/>
           </a:p>
           <a:p>
             <a:pPr lvl="3"/>
@@ -4658,7 +5146,6 @@
               <a:rPr lang="zh-CN" altLang="en-US"/>
               <a:t>第四级</a:t>
             </a:r>
-            <a:endParaRPr lang="zh-CN" altLang="en-US"/>
           </a:p>
           <a:p>
             <a:pPr lvl="4"/>
@@ -4666,7 +5153,6 @@
               <a:rPr lang="zh-CN" altLang="en-US"/>
               <a:t>第五级</a:t>
             </a:r>
-            <a:endParaRPr lang="zh-CN" altLang="en-US"/>
           </a:p>
         </p:txBody>
       </p:sp>
@@ -4732,13 +5218,18 @@
               <a:rPr lang="zh-CN" altLang="en-US"/>
               <a:t>单击此处编辑母版文本样式</a:t>
             </a:r>
-            <a:endParaRPr lang="zh-CN" altLang="en-US"/>
           </a:p>
         </p:txBody>
       </p:sp>
       <p:sp>
         <p:nvSpPr>
-          <p:cNvPr id="5" name="日期占位符 3"/>
+          <p:cNvPr id="5" name="日期占位符 3">
+            <a:extLst>
+              <a:ext uri="{FF2B5EF4-FFF2-40B4-BE49-F238E27FC236}">
+                <a16:creationId xmlns:a16="http://schemas.microsoft.com/office/drawing/2014/main" id="{87165CD9-A9F8-4E14-B869-E12DC6348616}"/>
+              </a:ext>
+            </a:extLst>
+          </p:cNvPr>
           <p:cNvSpPr>
             <a:spLocks noGrp="1"/>
           </p:cNvSpPr>
@@ -4760,6 +5251,10 @@
             </a:pPr>
             <a:fld id="{B9E1E904-1879-477D-A111-3DA566B9A543}" type="datetimeFigureOut">
               <a:rPr lang="zh-CN" altLang="en-US"/>
+              <a:pPr>
+                <a:defRPr/>
+              </a:pPr>
+              <a:t>2026/6/2</a:t>
             </a:fld>
             <a:endParaRPr lang="zh-CN" altLang="en-US"/>
           </a:p>
@@ -4767,7 +5262,13 @@
       </p:sp>
       <p:sp>
         <p:nvSpPr>
-          <p:cNvPr id="6" name="页脚占位符 4"/>
+          <p:cNvPr id="6" name="页脚占位符 4">
+            <a:extLst>
+              <a:ext uri="{FF2B5EF4-FFF2-40B4-BE49-F238E27FC236}">
+                <a16:creationId xmlns:a16="http://schemas.microsoft.com/office/drawing/2014/main" id="{6FEB713F-8388-465C-A6A3-E3AF8B630C3F}"/>
+              </a:ext>
+            </a:extLst>
+          </p:cNvPr>
           <p:cNvSpPr>
             <a:spLocks noGrp="1"/>
           </p:cNvSpPr>
@@ -4793,7 +5294,13 @@
       </p:sp>
       <p:sp>
         <p:nvSpPr>
-          <p:cNvPr id="7" name="灯片编号占位符 5"/>
+          <p:cNvPr id="7" name="灯片编号占位符 5">
+            <a:extLst>
+              <a:ext uri="{FF2B5EF4-FFF2-40B4-BE49-F238E27FC236}">
+                <a16:creationId xmlns:a16="http://schemas.microsoft.com/office/drawing/2014/main" id="{BB7237E4-351C-408F-B400-C4ACC19C0794}"/>
+              </a:ext>
+            </a:extLst>
+          </p:cNvPr>
           <p:cNvSpPr>
             <a:spLocks noGrp="1"/>
           </p:cNvSpPr>
@@ -4815,12 +5322,21 @@
             </a:pPr>
             <a:fld id="{99DE49F4-97E0-4BE7-BD10-8E3DF8F88B7B}" type="slidenum">
               <a:rPr lang="zh-CN" altLang="en-US"/>
+              <a:pPr>
+                <a:defRPr/>
+              </a:pPr>
+              <a:t>‹#›</a:t>
             </a:fld>
             <a:endParaRPr lang="zh-CN" altLang="en-US"/>
           </a:p>
         </p:txBody>
       </p:sp>
     </p:spTree>
+    <p:extLst>
+      <p:ext uri="{BB962C8B-B14F-4D97-AF65-F5344CB8AC3E}">
+        <p14:creationId xmlns:p14="http://schemas.microsoft.com/office/powerpoint/2010/main" val="1179324734"/>
+      </p:ext>
+    </p:extLst>
   </p:cSld>
   <p:clrMapOvr>
     <a:masterClrMapping/>
@@ -4873,7 +5389,6 @@
               <a:rPr lang="zh-CN" altLang="en-US"/>
               <a:t>单击此处编辑母版标题样式</a:t>
             </a:r>
-            <a:endParaRPr lang="zh-CN" altLang="en-US"/>
           </a:p>
         </p:txBody>
       </p:sp>
@@ -5003,13 +5518,18 @@
               <a:rPr lang="zh-CN" altLang="en-US"/>
               <a:t>单击此处编辑母版文本样式</a:t>
             </a:r>
-            <a:endParaRPr lang="zh-CN" altLang="en-US"/>
           </a:p>
         </p:txBody>
       </p:sp>
       <p:sp>
         <p:nvSpPr>
-          <p:cNvPr id="5" name="日期占位符 3"/>
+          <p:cNvPr id="5" name="日期占位符 3">
+            <a:extLst>
+              <a:ext uri="{FF2B5EF4-FFF2-40B4-BE49-F238E27FC236}">
+                <a16:creationId xmlns:a16="http://schemas.microsoft.com/office/drawing/2014/main" id="{ECA3C3AB-5D7A-472A-91E7-79B6F6C2D109}"/>
+              </a:ext>
+            </a:extLst>
+          </p:cNvPr>
           <p:cNvSpPr>
             <a:spLocks noGrp="1"/>
           </p:cNvSpPr>
@@ -5031,6 +5551,10 @@
             </a:pPr>
             <a:fld id="{E2F26D2F-F923-4410-AEB6-AD53FFFD4FFF}" type="datetimeFigureOut">
               <a:rPr lang="zh-CN" altLang="en-US"/>
+              <a:pPr>
+                <a:defRPr/>
+              </a:pPr>
+              <a:t>2026/6/2</a:t>
             </a:fld>
             <a:endParaRPr lang="zh-CN" altLang="en-US"/>
           </a:p>
@@ -5038,7 +5562,13 @@
       </p:sp>
       <p:sp>
         <p:nvSpPr>
-          <p:cNvPr id="6" name="页脚占位符 4"/>
+          <p:cNvPr id="6" name="页脚占位符 4">
+            <a:extLst>
+              <a:ext uri="{FF2B5EF4-FFF2-40B4-BE49-F238E27FC236}">
+                <a16:creationId xmlns:a16="http://schemas.microsoft.com/office/drawing/2014/main" id="{5FABE7F1-1CC2-408E-B868-6C222099C0BD}"/>
+              </a:ext>
+            </a:extLst>
+          </p:cNvPr>
           <p:cNvSpPr>
             <a:spLocks noGrp="1"/>
           </p:cNvSpPr>
@@ -5064,7 +5594,13 @@
       </p:sp>
       <p:sp>
         <p:nvSpPr>
-          <p:cNvPr id="7" name="灯片编号占位符 5"/>
+          <p:cNvPr id="7" name="灯片编号占位符 5">
+            <a:extLst>
+              <a:ext uri="{FF2B5EF4-FFF2-40B4-BE49-F238E27FC236}">
+                <a16:creationId xmlns:a16="http://schemas.microsoft.com/office/drawing/2014/main" id="{E7347EC8-EAD4-4D9F-B832-88008A8D5C8D}"/>
+              </a:ext>
+            </a:extLst>
+          </p:cNvPr>
           <p:cNvSpPr>
             <a:spLocks noGrp="1"/>
           </p:cNvSpPr>
@@ -5086,12 +5622,21 @@
             </a:pPr>
             <a:fld id="{9C997849-179C-4BF5-8A5B-F91223F744E8}" type="slidenum">
               <a:rPr lang="zh-CN" altLang="en-US"/>
+              <a:pPr>
+                <a:defRPr/>
+              </a:pPr>
+              <a:t>‹#›</a:t>
             </a:fld>
             <a:endParaRPr lang="zh-CN" altLang="en-US"/>
           </a:p>
         </p:txBody>
       </p:sp>
     </p:spTree>
+    <p:extLst>
+      <p:ext uri="{BB962C8B-B14F-4D97-AF65-F5344CB8AC3E}">
+        <p14:creationId xmlns:p14="http://schemas.microsoft.com/office/powerpoint/2010/main" val="3757372752"/>
+      </p:ext>
+    </p:extLst>
   </p:cSld>
   <p:clrMapOvr>
     <a:masterClrMapping/>
@@ -5126,14 +5671,20 @@
       </p:grpSpPr>
       <p:pic>
         <p:nvPicPr>
-          <p:cNvPr id="1026" name="图片 6"/>
+          <p:cNvPr id="1026" name="图片 6">
+            <a:extLst>
+              <a:ext uri="{FF2B5EF4-FFF2-40B4-BE49-F238E27FC236}">
+                <a16:creationId xmlns:a16="http://schemas.microsoft.com/office/drawing/2014/main" id="{C7E279F9-4D1D-41C2-B594-847DFD60A4AC}"/>
+              </a:ext>
+            </a:extLst>
+          </p:cNvPr>
           <p:cNvPicPr>
             <a:picLocks noChangeAspect="1"/>
           </p:cNvPicPr>
           <p:nvPr userDrawn="1"/>
         </p:nvPicPr>
         <p:blipFill>
-          <a:blip r:embed="rId13">
+          <a:blip r:embed="rId14">
             <a:extLst>
               <a:ext uri="{28A0092B-C50C-407E-A947-70E740481C1C}">
                 <a14:useLocalDpi xmlns:a14="http://schemas.microsoft.com/office/drawing/2010/main" val="0"/>
@@ -5180,7 +5731,13 @@
       </p:pic>
       <p:sp>
         <p:nvSpPr>
-          <p:cNvPr id="1027" name="标题占位符 1"/>
+          <p:cNvPr id="1027" name="标题占位符 1">
+            <a:extLst>
+              <a:ext uri="{FF2B5EF4-FFF2-40B4-BE49-F238E27FC236}">
+                <a16:creationId xmlns:a16="http://schemas.microsoft.com/office/drawing/2014/main" id="{764418EE-8BFB-4E4C-AAF1-C4099A235923}"/>
+              </a:ext>
+            </a:extLst>
+          </p:cNvPr>
           <p:cNvSpPr>
             <a:spLocks noGrp="1"/>
           </p:cNvSpPr>
@@ -5221,7 +5778,11 @@
           </a:extLst>
         </p:spPr>
         <p:txBody>
-          <a:bodyPr vert="horz" wrap="square" lIns="91440" tIns="45720" rIns="91440" bIns="45720" numCol="1" anchor="ctr" anchorCtr="0" compatLnSpc="1"/>
+          <a:bodyPr vert="horz" wrap="square" lIns="91440" tIns="45720" rIns="91440" bIns="45720" numCol="1" anchor="ctr" anchorCtr="0" compatLnSpc="1">
+            <a:prstTxWarp prst="textNoShape">
+              <a:avLst/>
+            </a:prstTxWarp>
+          </a:bodyPr>
           <a:lstStyle/>
           <a:p>
             <a:pPr lvl="0"/>
@@ -5229,13 +5790,18 @@
               <a:rPr lang="zh-CN" altLang="en-US"/>
               <a:t>单击此处编辑母版标题样式</a:t>
             </a:r>
-            <a:endParaRPr lang="zh-CN" altLang="en-US"/>
           </a:p>
         </p:txBody>
       </p:sp>
       <p:sp>
         <p:nvSpPr>
-          <p:cNvPr id="1028" name="文本占位符 2"/>
+          <p:cNvPr id="1028" name="文本占位符 2">
+            <a:extLst>
+              <a:ext uri="{FF2B5EF4-FFF2-40B4-BE49-F238E27FC236}">
+                <a16:creationId xmlns:a16="http://schemas.microsoft.com/office/drawing/2014/main" id="{829A604F-10BF-4619-82BD-2A4750A6231C}"/>
+              </a:ext>
+            </a:extLst>
+          </p:cNvPr>
           <p:cNvSpPr>
             <a:spLocks noGrp="1"/>
           </p:cNvSpPr>
@@ -5276,7 +5842,11 @@
           </a:extLst>
         </p:spPr>
         <p:txBody>
-          <a:bodyPr vert="horz" wrap="square" lIns="91440" tIns="45720" rIns="91440" bIns="45720" numCol="1" anchor="t" anchorCtr="0" compatLnSpc="1"/>
+          <a:bodyPr vert="horz" wrap="square" lIns="91440" tIns="45720" rIns="91440" bIns="45720" numCol="1" anchor="t" anchorCtr="0" compatLnSpc="1">
+            <a:prstTxWarp prst="textNoShape">
+              <a:avLst/>
+            </a:prstTxWarp>
+          </a:bodyPr>
           <a:lstStyle/>
           <a:p>
             <a:pPr lvl="0"/>
@@ -5284,7 +5854,6 @@
               <a:rPr lang="zh-CN" altLang="en-US"/>
               <a:t>单击此处编辑母版文本样式</a:t>
             </a:r>
-            <a:endParaRPr lang="zh-CN" altLang="en-US"/>
           </a:p>
           <a:p>
             <a:pPr lvl="1"/>
@@ -5292,7 +5861,6 @@
               <a:rPr lang="zh-CN" altLang="en-US"/>
               <a:t>第二级</a:t>
             </a:r>
-            <a:endParaRPr lang="zh-CN" altLang="en-US"/>
           </a:p>
           <a:p>
             <a:pPr lvl="2"/>
@@ -5300,7 +5868,6 @@
               <a:rPr lang="zh-CN" altLang="en-US"/>
               <a:t>第三级</a:t>
             </a:r>
-            <a:endParaRPr lang="zh-CN" altLang="en-US"/>
           </a:p>
           <a:p>
             <a:pPr lvl="3"/>
@@ -5308,7 +5875,6 @@
               <a:rPr lang="zh-CN" altLang="en-US"/>
               <a:t>第四级</a:t>
             </a:r>
-            <a:endParaRPr lang="zh-CN" altLang="en-US"/>
           </a:p>
           <a:p>
             <a:pPr lvl="4"/>
@@ -5316,13 +5882,18 @@
               <a:rPr lang="zh-CN" altLang="en-US"/>
               <a:t>第五级</a:t>
             </a:r>
-            <a:endParaRPr lang="zh-CN" altLang="en-US"/>
           </a:p>
         </p:txBody>
       </p:sp>
       <p:sp>
         <p:nvSpPr>
-          <p:cNvPr id="4" name="日期占位符 3"/>
+          <p:cNvPr id="4" name="日期占位符 3">
+            <a:extLst>
+              <a:ext uri="{FF2B5EF4-FFF2-40B4-BE49-F238E27FC236}">
+                <a16:creationId xmlns:a16="http://schemas.microsoft.com/office/drawing/2014/main" id="{5D1BEE02-6019-452C-A6F6-3A0A8D13C996}"/>
+              </a:ext>
+            </a:extLst>
+          </p:cNvPr>
           <p:cNvSpPr>
             <a:spLocks noGrp="1"/>
           </p:cNvSpPr>
@@ -5366,6 +5937,10 @@
             </a:pPr>
             <a:fld id="{3B7BE501-E7B6-47ED-A922-6C02EB619C18}" type="datetimeFigureOut">
               <a:rPr lang="zh-CN" altLang="en-US"/>
+              <a:pPr>
+                <a:defRPr/>
+              </a:pPr>
+              <a:t>2026/6/2</a:t>
             </a:fld>
             <a:endParaRPr lang="zh-CN" altLang="en-US"/>
           </a:p>
@@ -5373,7 +5948,13 @@
       </p:sp>
       <p:sp>
         <p:nvSpPr>
-          <p:cNvPr id="5" name="页脚占位符 4"/>
+          <p:cNvPr id="5" name="页脚占位符 4">
+            <a:extLst>
+              <a:ext uri="{FF2B5EF4-FFF2-40B4-BE49-F238E27FC236}">
+                <a16:creationId xmlns:a16="http://schemas.microsoft.com/office/drawing/2014/main" id="{F7F54BB4-FEDF-41F9-BBFC-5687461F6767}"/>
+              </a:ext>
+            </a:extLst>
+          </p:cNvPr>
           <p:cNvSpPr>
             <a:spLocks noGrp="1"/>
           </p:cNvSpPr>
@@ -5421,7 +6002,13 @@
       </p:sp>
       <p:sp>
         <p:nvSpPr>
-          <p:cNvPr id="6" name="灯片编号占位符 5"/>
+          <p:cNvPr id="6" name="灯片编号占位符 5">
+            <a:extLst>
+              <a:ext uri="{FF2B5EF4-FFF2-40B4-BE49-F238E27FC236}">
+                <a16:creationId xmlns:a16="http://schemas.microsoft.com/office/drawing/2014/main" id="{A4F037EF-6145-49C6-93ED-FCFAE075395B}"/>
+              </a:ext>
+            </a:extLst>
+          </p:cNvPr>
           <p:cNvSpPr>
             <a:spLocks noGrp="1"/>
           </p:cNvSpPr>
@@ -5439,7 +6026,11 @@
           </a:prstGeom>
         </p:spPr>
         <p:txBody>
-          <a:bodyPr vert="horz" wrap="square" lIns="91440" tIns="45720" rIns="91440" bIns="45720" numCol="1" anchor="ctr" anchorCtr="0" compatLnSpc="1"/>
+          <a:bodyPr vert="horz" wrap="square" lIns="91440" tIns="45720" rIns="91440" bIns="45720" numCol="1" anchor="ctr" anchorCtr="0" compatLnSpc="1">
+            <a:prstTxWarp prst="textNoShape">
+              <a:avLst/>
+            </a:prstTxWarp>
+          </a:bodyPr>
           <a:lstStyle>
             <a:lvl1pPr algn="r" eaLnBrk="1" hangingPunct="1">
               <a:defRPr sz="1200">
@@ -5455,6 +6046,10 @@
             </a:pPr>
             <a:fld id="{5F1DB772-2744-4267-A0B6-7B9C40C910D0}" type="slidenum">
               <a:rPr lang="zh-CN" altLang="en-US"/>
+              <a:pPr>
+                <a:defRPr/>
+              </a:pPr>
+              <a:t>‹#›</a:t>
             </a:fld>
             <a:endParaRPr lang="zh-CN" altLang="en-US"/>
           </a:p>
@@ -5462,14 +6057,20 @@
       </p:sp>
       <p:pic>
         <p:nvPicPr>
-          <p:cNvPr id="1032" name="图片 7"/>
+          <p:cNvPr id="1032" name="图片 7">
+            <a:extLst>
+              <a:ext uri="{FF2B5EF4-FFF2-40B4-BE49-F238E27FC236}">
+                <a16:creationId xmlns:a16="http://schemas.microsoft.com/office/drawing/2014/main" id="{C1A97169-7106-41F3-916B-B51B6D3967A5}"/>
+              </a:ext>
+            </a:extLst>
+          </p:cNvPr>
           <p:cNvPicPr>
             <a:picLocks noChangeAspect="1"/>
           </p:cNvPicPr>
           <p:nvPr userDrawn="1"/>
         </p:nvPicPr>
         <p:blipFill>
-          <a:blip r:embed="rId14">
+          <a:blip r:embed="rId15">
             <a:extLst>
               <a:ext uri="{28A0092B-C50C-407E-A947-70E740481C1C}">
                 <a14:useLocalDpi xmlns:a14="http://schemas.microsoft.com/office/drawing/2010/main" val="0"/>
@@ -5518,18 +6119,18 @@
   </p:cSld>
   <p:clrMap bg1="lt1" tx1="dk1" bg2="lt2" tx2="dk2" accent1="accent1" accent2="accent2" accent3="accent3" accent4="accent4" accent5="accent5" accent6="accent6" hlink="hlink" folHlink="folHlink"/>
   <p:sldLayoutIdLst>
-    <p:sldLayoutId id="2147483649" r:id="rId1"/>
-    <p:sldLayoutId id="2147483650" r:id="rId2"/>
-    <p:sldLayoutId id="2147483651" r:id="rId3"/>
-    <p:sldLayoutId id="2147483652" r:id="rId4"/>
-    <p:sldLayoutId id="2147483653" r:id="rId5"/>
-    <p:sldLayoutId id="2147483654" r:id="rId6"/>
-    <p:sldLayoutId id="2147483655" r:id="rId7"/>
-    <p:sldLayoutId id="2147483656" r:id="rId8"/>
-    <p:sldLayoutId id="2147483657" r:id="rId9"/>
-    <p:sldLayoutId id="2147483658" r:id="rId10"/>
-    <p:sldLayoutId id="2147483659" r:id="rId11"/>
-    <p:sldLayoutId id="2147483660" r:id="rId12"/>
+    <p:sldLayoutId id="2147483936" r:id="rId1"/>
+    <p:sldLayoutId id="2147483937" r:id="rId2"/>
+    <p:sldLayoutId id="2147483938" r:id="rId3"/>
+    <p:sldLayoutId id="2147483939" r:id="rId4"/>
+    <p:sldLayoutId id="2147483940" r:id="rId5"/>
+    <p:sldLayoutId id="2147483941" r:id="rId6"/>
+    <p:sldLayoutId id="2147483942" r:id="rId7"/>
+    <p:sldLayoutId id="2147483943" r:id="rId8"/>
+    <p:sldLayoutId id="2147483944" r:id="rId9"/>
+    <p:sldLayoutId id="2147483945" r:id="rId10"/>
+    <p:sldLayoutId id="2147483946" r:id="rId11"/>
+    <p:sldLayoutId id="2147483947" r:id="rId12"/>
   </p:sldLayoutIdLst>
   <p:txStyles>
     <p:titleStyle>
@@ -5560,8 +6161,8 @@
           <a:solidFill>
             <a:schemeClr val="tx1"/>
           </a:solidFill>
-          <a:latin typeface="Calibri" panose="020F0502020204030204" pitchFamily="34" charset="0"/>
-          <a:ea typeface="宋体" panose="02010600030101010101" pitchFamily="2" charset="-122"/>
+          <a:latin typeface="Calibri" pitchFamily="34" charset="0"/>
+          <a:ea typeface="宋体" pitchFamily="2" charset="-122"/>
         </a:defRPr>
       </a:lvl2pPr>
       <a:lvl3pPr algn="ctr" rtl="0" eaLnBrk="0" fontAlgn="base" hangingPunct="0">
@@ -5575,8 +6176,8 @@
           <a:solidFill>
             <a:schemeClr val="tx1"/>
           </a:solidFill>
-          <a:latin typeface="Calibri" panose="020F0502020204030204" pitchFamily="34" charset="0"/>
-          <a:ea typeface="宋体" panose="02010600030101010101" pitchFamily="2" charset="-122"/>
+          <a:latin typeface="Calibri" pitchFamily="34" charset="0"/>
+          <a:ea typeface="宋体" pitchFamily="2" charset="-122"/>
         </a:defRPr>
       </a:lvl3pPr>
       <a:lvl4pPr algn="ctr" rtl="0" eaLnBrk="0" fontAlgn="base" hangingPunct="0">
@@ -5590,8 +6191,8 @@
           <a:solidFill>
             <a:schemeClr val="tx1"/>
           </a:solidFill>
-          <a:latin typeface="Calibri" panose="020F0502020204030204" pitchFamily="34" charset="0"/>
-          <a:ea typeface="宋体" panose="02010600030101010101" pitchFamily="2" charset="-122"/>
+          <a:latin typeface="Calibri" pitchFamily="34" charset="0"/>
+          <a:ea typeface="宋体" pitchFamily="2" charset="-122"/>
         </a:defRPr>
       </a:lvl4pPr>
       <a:lvl5pPr algn="ctr" rtl="0" eaLnBrk="0" fontAlgn="base" hangingPunct="0">
@@ -5605,8 +6206,8 @@
           <a:solidFill>
             <a:schemeClr val="tx1"/>
           </a:solidFill>
-          <a:latin typeface="Calibri" panose="020F0502020204030204" pitchFamily="34" charset="0"/>
-          <a:ea typeface="宋体" panose="02010600030101010101" pitchFamily="2" charset="-122"/>
+          <a:latin typeface="Calibri" pitchFamily="34" charset="0"/>
+          <a:ea typeface="宋体" pitchFamily="2" charset="-122"/>
         </a:defRPr>
       </a:lvl5pPr>
       <a:lvl6pPr marL="457200" algn="ctr" rtl="0" fontAlgn="base">
@@ -5620,8 +6221,8 @@
           <a:solidFill>
             <a:schemeClr val="tx1"/>
           </a:solidFill>
-          <a:latin typeface="Calibri" panose="020F0502020204030204" pitchFamily="34" charset="0"/>
-          <a:ea typeface="宋体" panose="02010600030101010101" pitchFamily="2" charset="-122"/>
+          <a:latin typeface="Calibri" pitchFamily="34" charset="0"/>
+          <a:ea typeface="宋体" pitchFamily="2" charset="-122"/>
         </a:defRPr>
       </a:lvl6pPr>
       <a:lvl7pPr marL="914400" algn="ctr" rtl="0" fontAlgn="base">
@@ -5635,8 +6236,8 @@
           <a:solidFill>
             <a:schemeClr val="tx1"/>
           </a:solidFill>
-          <a:latin typeface="Calibri" panose="020F0502020204030204" pitchFamily="34" charset="0"/>
-          <a:ea typeface="宋体" panose="02010600030101010101" pitchFamily="2" charset="-122"/>
+          <a:latin typeface="Calibri" pitchFamily="34" charset="0"/>
+          <a:ea typeface="宋体" pitchFamily="2" charset="-122"/>
         </a:defRPr>
       </a:lvl7pPr>
       <a:lvl8pPr marL="1371600" algn="ctr" rtl="0" fontAlgn="base">
@@ -5650,8 +6251,8 @@
           <a:solidFill>
             <a:schemeClr val="tx1"/>
           </a:solidFill>
-          <a:latin typeface="Calibri" panose="020F0502020204030204" pitchFamily="34" charset="0"/>
-          <a:ea typeface="宋体" panose="02010600030101010101" pitchFamily="2" charset="-122"/>
+          <a:latin typeface="Calibri" pitchFamily="34" charset="0"/>
+          <a:ea typeface="宋体" pitchFamily="2" charset="-122"/>
         </a:defRPr>
       </a:lvl8pPr>
       <a:lvl9pPr marL="1828800" algn="ctr" rtl="0" fontAlgn="base">
@@ -5665,8 +6266,8 @@
           <a:solidFill>
             <a:schemeClr val="tx1"/>
           </a:solidFill>
-          <a:latin typeface="Calibri" panose="020F0502020204030204" pitchFamily="34" charset="0"/>
-          <a:ea typeface="宋体" panose="02010600030101010101" pitchFamily="2" charset="-122"/>
+          <a:latin typeface="Calibri" pitchFamily="34" charset="0"/>
+          <a:ea typeface="宋体" pitchFamily="2" charset="-122"/>
         </a:defRPr>
       </a:lvl9pPr>
     </p:titleStyle>
@@ -5765,7 +6366,7 @@
         <a:spcBef>
           <a:spcPct val="20000"/>
         </a:spcBef>
-        <a:buFont typeface="Arial" panose="020B0604020202020204" pitchFamily="34" charset="0"/>
+        <a:buFont typeface="Arial" pitchFamily="34" charset="0"/>
         <a:buChar char="•"/>
         <a:defRPr sz="2000" kern="1200">
           <a:solidFill>
@@ -5780,7 +6381,7 @@
         <a:spcBef>
           <a:spcPct val="20000"/>
         </a:spcBef>
-        <a:buFont typeface="Arial" panose="020B0604020202020204" pitchFamily="34" charset="0"/>
+        <a:buFont typeface="Arial" pitchFamily="34" charset="0"/>
         <a:buChar char="•"/>
         <a:defRPr sz="2000" kern="1200">
           <a:solidFill>
@@ -5795,7 +6396,7 @@
         <a:spcBef>
           <a:spcPct val="20000"/>
         </a:spcBef>
-        <a:buFont typeface="Arial" panose="020B0604020202020204" pitchFamily="34" charset="0"/>
+        <a:buFont typeface="Arial" pitchFamily="34" charset="0"/>
         <a:buChar char="•"/>
         <a:defRPr sz="2000" kern="1200">
           <a:solidFill>
@@ -5810,7 +6411,7 @@
         <a:spcBef>
           <a:spcPct val="20000"/>
         </a:spcBef>
-        <a:buFont typeface="Arial" panose="020B0604020202020204" pitchFamily="34" charset="0"/>
+        <a:buFont typeface="Arial" pitchFamily="34" charset="0"/>
         <a:buChar char="•"/>
         <a:defRPr sz="2000" kern="1200">
           <a:solidFill>
@@ -5940,7 +6541,13 @@
       </p:grpSpPr>
       <p:sp>
         <p:nvSpPr>
-          <p:cNvPr id="5122" name="灯片编号占位符 3"/>
+          <p:cNvPr id="5122" name="灯片编号占位符 3">
+            <a:extLst>
+              <a:ext uri="{FF2B5EF4-FFF2-40B4-BE49-F238E27FC236}">
+                <a16:creationId xmlns:a16="http://schemas.microsoft.com/office/drawing/2014/main" id="{010FA458-7200-4009-A108-DFB16957AE27}"/>
+              </a:ext>
+            </a:extLst>
+          </p:cNvPr>
           <p:cNvSpPr>
             <a:spLocks noGrp="1"/>
           </p:cNvSpPr>
@@ -6128,6 +6735,14 @@
               <a:rPr kumimoji="1" lang="en-US" altLang="zh-CN" sz="1400" smtClean="0">
                 <a:latin typeface="Times New Roman" panose="02020603050405020304" pitchFamily="18" charset="0"/>
               </a:rPr>
+              <a:pPr>
+                <a:spcBef>
+                  <a:spcPct val="0"/>
+                </a:spcBef>
+                <a:buFontTx/>
+                <a:buNone/>
+              </a:pPr>
+              <a:t>1</a:t>
             </a:fld>
             <a:endParaRPr kumimoji="1" lang="en-US" altLang="zh-CN" sz="1400">
               <a:latin typeface="Times New Roman" panose="02020603050405020304" pitchFamily="18" charset="0"/>
@@ -6137,7 +6752,13 @@
       </p:sp>
       <p:sp>
         <p:nvSpPr>
-          <p:cNvPr id="94211" name="Text Box 3"/>
+          <p:cNvPr id="94211" name="Text Box 3">
+            <a:extLst>
+              <a:ext uri="{FF2B5EF4-FFF2-40B4-BE49-F238E27FC236}">
+                <a16:creationId xmlns:a16="http://schemas.microsoft.com/office/drawing/2014/main" id="{1180118F-0F9B-44F4-8C1A-78D508EB7A89}"/>
+              </a:ext>
+            </a:extLst>
+          </p:cNvPr>
           <p:cNvSpPr txBox="1">
             <a:spLocks noChangeArrowheads="1"/>
           </p:cNvSpPr>
@@ -6343,7 +6964,13 @@
       </p:sp>
       <p:sp>
         <p:nvSpPr>
-          <p:cNvPr id="5124" name="Text Box 4"/>
+          <p:cNvPr id="5124" name="Text Box 4">
+            <a:extLst>
+              <a:ext uri="{FF2B5EF4-FFF2-40B4-BE49-F238E27FC236}">
+                <a16:creationId xmlns:a16="http://schemas.microsoft.com/office/drawing/2014/main" id="{84260868-6AAC-43C8-A32C-83B235E5F9F0}"/>
+              </a:ext>
+            </a:extLst>
+          </p:cNvPr>
           <p:cNvSpPr txBox="1">
             <a:spLocks noChangeArrowheads="1"/>
           </p:cNvSpPr>
@@ -6562,15 +7189,18 @@
               </a:rPr>
               <a:t>Foundations of Machine Learning</a:t>
             </a:r>
-            <a:endParaRPr kumimoji="1" lang="en-US" altLang="zh-CN" sz="4400" b="1">
-              <a:latin typeface="Monotype Corsiva" panose="03010101010201010101" pitchFamily="66" charset="0"/>
-            </a:endParaRPr>
           </a:p>
         </p:txBody>
       </p:sp>
       <p:sp>
         <p:nvSpPr>
-          <p:cNvPr id="5125" name="Text Box 18"/>
+          <p:cNvPr id="5125" name="Text Box 18">
+            <a:extLst>
+              <a:ext uri="{FF2B5EF4-FFF2-40B4-BE49-F238E27FC236}">
+                <a16:creationId xmlns:a16="http://schemas.microsoft.com/office/drawing/2014/main" id="{D2CB22B5-00BE-49EC-93A1-107A76F4713F}"/>
+              </a:ext>
+            </a:extLst>
+          </p:cNvPr>
           <p:cNvSpPr txBox="1">
             <a:spLocks noChangeArrowheads="1"/>
           </p:cNvSpPr>
@@ -6790,13 +7420,13 @@
               <p:cTn id="2" dur="indefinite" nodeType="mainSeq">
                 <p:childTnLst>
                   <p:par>
-                    <p:cTn id="3" fill="hold">
+                    <p:cTn id="3" fill="hold" nodeType="clickPar">
                       <p:stCondLst>
                         <p:cond delay="indefinite"/>
                       </p:stCondLst>
                       <p:childTnLst>
                         <p:par>
-                          <p:cTn id="4" fill="hold">
+                          <p:cTn id="4" fill="hold" nodeType="withGroup">
                             <p:stCondLst>
                               <p:cond delay="0"/>
                             </p:stCondLst>
@@ -6889,7 +7519,13 @@
       </p:grpSpPr>
       <p:sp>
         <p:nvSpPr>
-          <p:cNvPr id="18434" name="灯片编号占位符 5"/>
+          <p:cNvPr id="18434" name="灯片编号占位符 5">
+            <a:extLst>
+              <a:ext uri="{FF2B5EF4-FFF2-40B4-BE49-F238E27FC236}">
+                <a16:creationId xmlns:a16="http://schemas.microsoft.com/office/drawing/2014/main" id="{CBBD9809-2CC4-42C3-B564-FAC6896E7580}"/>
+              </a:ext>
+            </a:extLst>
+          </p:cNvPr>
           <p:cNvSpPr>
             <a:spLocks noGrp="1"/>
           </p:cNvSpPr>
@@ -7073,6 +7709,14 @@
               <a:rPr kumimoji="1" lang="en-US" altLang="zh-CN" sz="1400" smtClean="0">
                 <a:latin typeface="Times New Roman" panose="02020603050405020304" pitchFamily="18" charset="0"/>
               </a:rPr>
+              <a:pPr>
+                <a:spcBef>
+                  <a:spcPct val="0"/>
+                </a:spcBef>
+                <a:buFontTx/>
+                <a:buNone/>
+              </a:pPr>
+              <a:t>10</a:t>
             </a:fld>
             <a:endParaRPr kumimoji="1" lang="en-US" altLang="zh-CN" sz="1400">
               <a:latin typeface="Times New Roman" panose="02020603050405020304" pitchFamily="18" charset="0"/>
@@ -7082,7 +7726,13 @@
       </p:sp>
       <p:sp>
         <p:nvSpPr>
-          <p:cNvPr id="887811" name="Rectangle 3"/>
+          <p:cNvPr id="887811" name="Rectangle 3">
+            <a:extLst>
+              <a:ext uri="{FF2B5EF4-FFF2-40B4-BE49-F238E27FC236}">
+                <a16:creationId xmlns:a16="http://schemas.microsoft.com/office/drawing/2014/main" id="{E67925BF-BD9D-4849-975B-B00461AA9122}"/>
+              </a:ext>
+            </a:extLst>
+          </p:cNvPr>
           <p:cNvSpPr>
             <a:spLocks noGrp="1"/>
           </p:cNvSpPr>
@@ -7145,11 +7795,6 @@
               </a:rPr>
               <a:t>多层前馈神经网络</a:t>
             </a:r>
-            <a:endParaRPr lang="zh-CN" altLang="en-US" sz="2800" b="1" dirty="0">
-              <a:latin typeface="Times New Roman" panose="02020603050405020304" pitchFamily="18" charset="0"/>
-              <a:ea typeface="楷体" panose="02010609060101010101" pitchFamily="49" charset="-122"/>
-              <a:cs typeface="Times New Roman" panose="02020603050405020304" pitchFamily="18" charset="0"/>
-            </a:endParaRPr>
           </a:p>
           <a:p>
             <a:pPr eaLnBrk="1" hangingPunct="1">
@@ -7211,11 +7856,6 @@
               </a:rPr>
               <a:t>BP</a:t>
             </a:r>
-            <a:endParaRPr lang="en-US" altLang="zh-CN" sz="2800" b="1" dirty="0">
-              <a:latin typeface="Times New Roman" panose="02020603050405020304" pitchFamily="18" charset="0"/>
-              <a:ea typeface="楷体" panose="02010609060101010101" pitchFamily="49" charset="-122"/>
-              <a:cs typeface="Times New Roman" panose="02020603050405020304" pitchFamily="18" charset="0"/>
-            </a:endParaRPr>
           </a:p>
           <a:p>
             <a:pPr eaLnBrk="1" hangingPunct="1">
@@ -7539,7 +8179,13 @@
       </p:sp>
       <p:sp>
         <p:nvSpPr>
-          <p:cNvPr id="18436" name="Text Box 4"/>
+          <p:cNvPr id="18436" name="Text Box 4">
+            <a:extLst>
+              <a:ext uri="{FF2B5EF4-FFF2-40B4-BE49-F238E27FC236}">
+                <a16:creationId xmlns:a16="http://schemas.microsoft.com/office/drawing/2014/main" id="{EB81EA09-BA58-4C02-A7E1-E64004DF3351}"/>
+              </a:ext>
+            </a:extLst>
+          </p:cNvPr>
           <p:cNvSpPr txBox="1">
             <a:spLocks noChangeArrowheads="1"/>
           </p:cNvSpPr>
@@ -7763,11 +8409,6 @@
               </a:rPr>
               <a:t>章：神经网络</a:t>
             </a:r>
-            <a:endParaRPr kumimoji="1" lang="zh-CN" altLang="en-US" b="1" dirty="0">
-              <a:latin typeface="黑体" panose="02010609060101010101" pitchFamily="49" charset="-122"/>
-              <a:ea typeface="黑体" panose="02010609060101010101" pitchFamily="49" charset="-122"/>
-              <a:cs typeface="楷体_GB2312"/>
-            </a:endParaRPr>
           </a:p>
         </p:txBody>
       </p:sp>
@@ -7777,7 +8418,13 @@
           <p:cNvGraphicFramePr>
             <a:graphicFrameLocks noChangeAspect="1"/>
           </p:cNvGraphicFramePr>
-          <p:nvPr/>
+          <p:nvPr>
+            <p:extLst>
+              <p:ext uri="{D42A27DB-BD31-4B8C-83A1-F6EECF244321}">
+                <p14:modId xmlns:p14="http://schemas.microsoft.com/office/powerpoint/2010/main" val="773565080"/>
+              </p:ext>
+            </p:extLst>
+          </p:nvPr>
         </p:nvGraphicFramePr>
         <p:xfrm>
           <a:off x="6300192" y="5995987"/>
@@ -7787,21 +8434,21 @@
           <a:graphicData uri="http://schemas.openxmlformats.org/presentationml/2006/ole">
             <mc:AlternateContent xmlns:mc="http://schemas.openxmlformats.org/markup-compatibility/2006">
               <mc:Choice xmlns:v="urn:schemas-microsoft-com:vml" Requires="v">
-                <p:oleObj spid="_x0000_s27941" name="Formula" r:id="rId1" imgW="8239125" imgH="1323975" progId="Equation.Ribbit">
+                <p:oleObj name="Formula" r:id="rId3" imgW="1098720" imgH="176760" progId="Equation.Ribbit">
                   <p:embed/>
                 </p:oleObj>
               </mc:Choice>
               <mc:Fallback>
-                <p:oleObj name="Formula" r:id="rId1" imgW="8239125" imgH="1323975" progId="Equation.Ribbit">
+                <p:oleObj name="Formula" r:id="rId3" imgW="1098720" imgH="176760" progId="Equation.Ribbit">
                   <p:embed/>
                   <p:pic>
                     <p:nvPicPr>
-                      <p:cNvPr id="0" name="对象 4"/>
+                      <p:cNvPr id="5" name="对象 4"/>
                       <p:cNvPicPr/>
                       <p:nvPr/>
                     </p:nvPicPr>
                     <p:blipFill>
-                      <a:blip r:embed="rId2"/>
+                      <a:blip r:embed="rId4"/>
                       <a:stretch>
                         <a:fillRect/>
                       </a:stretch>
@@ -7823,6 +8470,11 @@
         </a:graphic>
       </p:graphicFrame>
     </p:spTree>
+    <p:extLst>
+      <p:ext uri="{BB962C8B-B14F-4D97-AF65-F5344CB8AC3E}">
+        <p14:creationId xmlns:p14="http://schemas.microsoft.com/office/powerpoint/2010/main" val="3578388625"/>
+      </p:ext>
+    </p:extLst>
   </p:cSld>
   <p:clrMapOvr>
     <a:masterClrMapping/>
@@ -8081,13 +8733,13 @@
                     </p:cTn>
                   </p:par>
                   <p:par>
-                    <p:cTn id="23" fill="hold">
+                    <p:cTn id="23" fill="hold" nodeType="clickPar">
                       <p:stCondLst>
                         <p:cond delay="indefinite"/>
                       </p:stCondLst>
                       <p:childTnLst>
                         <p:par>
-                          <p:cTn id="24" fill="hold">
+                          <p:cTn id="24" fill="hold" nodeType="withGroup">
                             <p:stCondLst>
                               <p:cond delay="0"/>
                             </p:stCondLst>
@@ -8429,7 +9081,13 @@
       </p:grpSpPr>
       <p:sp>
         <p:nvSpPr>
-          <p:cNvPr id="5" name="文本框 4"/>
+          <p:cNvPr id="5" name="文本框 4">
+            <a:extLst>
+              <a:ext uri="{FF2B5EF4-FFF2-40B4-BE49-F238E27FC236}">
+                <a16:creationId xmlns:a16="http://schemas.microsoft.com/office/drawing/2014/main" id="{A1E984C5-FC8E-4733-9E4F-3AA81FAE2DE6}"/>
+              </a:ext>
+            </a:extLst>
+          </p:cNvPr>
           <p:cNvSpPr txBox="1"/>
           <p:nvPr/>
         </p:nvSpPr>
@@ -8462,10 +9120,6 @@
               </a:rPr>
               <a:t>step1:</a:t>
             </a:r>
-            <a:endParaRPr lang="en-US" altLang="zh-CN" sz="1800" b="1" dirty="0">
-              <a:latin typeface="黑体" panose="02010609060101010101" pitchFamily="49" charset="-122"/>
-              <a:ea typeface="黑体" panose="02010609060101010101" pitchFamily="49" charset="-122"/>
-            </a:endParaRPr>
           </a:p>
           <a:p>
             <a:pPr marL="0" indent="0">
@@ -8481,10 +9135,6 @@
               </a:rPr>
               <a:t> </a:t>
             </a:r>
-            <a:endParaRPr lang="en-US" altLang="zh-CN" sz="1800" b="1" dirty="0">
-              <a:latin typeface="黑体" panose="02010609060101010101" pitchFamily="49" charset="-122"/>
-              <a:ea typeface="黑体" panose="02010609060101010101" pitchFamily="49" charset="-122"/>
-            </a:endParaRPr>
           </a:p>
           <a:p>
             <a:pPr marL="0" indent="0">
@@ -8500,16 +9150,18 @@
               </a:rPr>
               <a:t>step2:</a:t>
             </a:r>
-            <a:endParaRPr lang="en-US" altLang="zh-CN" sz="1800" b="1" dirty="0">
-              <a:latin typeface="黑体" panose="02010609060101010101" pitchFamily="49" charset="-122"/>
-              <a:ea typeface="黑体" panose="02010609060101010101" pitchFamily="49" charset="-122"/>
-            </a:endParaRPr>
           </a:p>
         </p:txBody>
       </p:sp>
       <p:grpSp>
         <p:nvGrpSpPr>
-          <p:cNvPr id="6" name="组合 5"/>
+          <p:cNvPr id="6" name="组合 5">
+            <a:extLst>
+              <a:ext uri="{FF2B5EF4-FFF2-40B4-BE49-F238E27FC236}">
+                <a16:creationId xmlns:a16="http://schemas.microsoft.com/office/drawing/2014/main" id="{B05B5981-53D3-47BF-A784-C65E7BD5193A}"/>
+              </a:ext>
+            </a:extLst>
+          </p:cNvPr>
           <p:cNvGrpSpPr/>
           <p:nvPr/>
         </p:nvGrpSpPr>
@@ -8523,14 +9175,20 @@
         </p:grpSpPr>
         <p:pic>
           <p:nvPicPr>
-            <p:cNvPr id="7" name="内容占位符 4"/>
+            <p:cNvPr id="7" name="内容占位符 4">
+              <a:extLst>
+                <a:ext uri="{FF2B5EF4-FFF2-40B4-BE49-F238E27FC236}">
+                  <a16:creationId xmlns:a16="http://schemas.microsoft.com/office/drawing/2014/main" id="{46E07B98-6F9B-424C-8323-6E51591F18B4}"/>
+                </a:ext>
+              </a:extLst>
+            </p:cNvPr>
             <p:cNvPicPr>
               <a:picLocks noChangeAspect="1"/>
             </p:cNvPicPr>
             <p:nvPr/>
           </p:nvPicPr>
           <p:blipFill>
-            <a:blip r:embed="rId1"/>
+            <a:blip r:embed="rId2"/>
             <a:stretch>
               <a:fillRect/>
             </a:stretch>
@@ -8545,11 +9203,17 @@
             </a:prstGeom>
           </p:spPr>
         </p:pic>
-        <mc:AlternateContent xmlns:mc="http://schemas.openxmlformats.org/markup-compatibility/2006">
-          <mc:Choice xmlns:a14="http://schemas.microsoft.com/office/drawing/2010/main" Requires="a14">
+        <mc:AlternateContent xmlns:mc="http://schemas.openxmlformats.org/markup-compatibility/2006" xmlns:a14="http://schemas.microsoft.com/office/drawing/2010/main">
+          <mc:Choice Requires="a14">
             <p:sp>
               <p:nvSpPr>
-                <p:cNvPr id="8" name="文本框 7"/>
+                <p:cNvPr id="8" name="文本框 7">
+                  <a:extLst>
+                    <a:ext uri="{FF2B5EF4-FFF2-40B4-BE49-F238E27FC236}">
+                      <a16:creationId xmlns:a16="http://schemas.microsoft.com/office/drawing/2014/main" id="{4B9DE688-7EA0-4F44-BDAD-26B2C6D5E593}"/>
+                    </a:ext>
+                  </a:extLst>
+                </p:cNvPr>
                 <p:cNvSpPr txBox="1"/>
                 <p:nvPr/>
               </p:nvSpPr>
@@ -8571,6 +9235,7 @@
                 </a:bodyPr>
                 <a:lstStyle/>
                 <a:p>
+                  <a:pPr/>
                   <a14:m>
                     <m:oMathPara xmlns:m="http://schemas.openxmlformats.org/officeDocument/2006/math">
                       <m:oMathParaPr>
@@ -8607,7 +9272,7 @@
                                 </a:solidFill>
                                 <a:latin typeface="Cambria Math" panose="02040503050406030204" pitchFamily="18" charset="0"/>
                               </a:rPr>
-                              <m:t>ℎ</m:t>
+                              <m:t>h</m:t>
                             </m:r>
                           </m:sub>
                         </m:sSub>
@@ -8619,10 +9284,16 @@
               </p:txBody>
             </p:sp>
           </mc:Choice>
-          <mc:Fallback>
+          <mc:Fallback xmlns="">
             <p:sp>
               <p:nvSpPr>
-                <p:cNvPr id="8" name="文本框 7"/>
+                <p:cNvPr id="16" name="文本框 15">
+                  <a:extLst>
+                    <a:ext uri="{FF2B5EF4-FFF2-40B4-BE49-F238E27FC236}">
+                      <a16:creationId xmlns:a16="http://schemas.microsoft.com/office/drawing/2014/main" id="{7B52B133-7052-4221-94ED-E689B3B9DD5E}"/>
+                    </a:ext>
+                  </a:extLst>
+                </p:cNvPr>
                 <p:cNvSpPr txBox="1">
                   <a:spLocks noRot="1" noChangeAspect="1" noMove="1" noResize="1" noEditPoints="1" noAdjustHandles="1" noChangeArrowheads="1" noChangeShapeType="1" noTextEdit="1"/>
                 </p:cNvSpPr>
@@ -8636,8 +9307,11 @@
                 <a:prstGeom prst="rect">
                   <a:avLst/>
                 </a:prstGeom>
-                <a:blipFill rotWithShape="1">
-                  <a:blip r:embed="rId2"/>
+                <a:blipFill>
+                  <a:blip r:embed="rId34"/>
+                  <a:stretch>
+                    <a:fillRect l="-4082" r="-2041" b="-25641"/>
+                  </a:stretch>
                 </a:blipFill>
               </p:spPr>
               <p:txBody>
@@ -8655,11 +9329,17 @@
             </p:sp>
           </mc:Fallback>
         </mc:AlternateContent>
-        <mc:AlternateContent xmlns:mc="http://schemas.openxmlformats.org/markup-compatibility/2006">
-          <mc:Choice xmlns:a14="http://schemas.microsoft.com/office/drawing/2010/main" Requires="a14">
+        <mc:AlternateContent xmlns:mc="http://schemas.openxmlformats.org/markup-compatibility/2006" xmlns:a14="http://schemas.microsoft.com/office/drawing/2010/main">
+          <mc:Choice Requires="a14">
             <p:sp>
               <p:nvSpPr>
-                <p:cNvPr id="9" name="文本框 8"/>
+                <p:cNvPr id="9" name="文本框 8">
+                  <a:extLst>
+                    <a:ext uri="{FF2B5EF4-FFF2-40B4-BE49-F238E27FC236}">
+                      <a16:creationId xmlns:a16="http://schemas.microsoft.com/office/drawing/2014/main" id="{3CAB6489-8B18-45E3-8E34-DE8C42F23A1F}"/>
+                    </a:ext>
+                  </a:extLst>
+                </p:cNvPr>
                 <p:cNvSpPr txBox="1"/>
                 <p:nvPr/>
               </p:nvSpPr>
@@ -8681,6 +9361,7 @@
                 </a:bodyPr>
                 <a:lstStyle/>
                 <a:p>
+                  <a:pPr/>
                   <a14:m>
                     <m:oMathPara xmlns:m="http://schemas.openxmlformats.org/officeDocument/2006/math">
                       <m:oMathParaPr>
@@ -8729,10 +9410,16 @@
               </p:txBody>
             </p:sp>
           </mc:Choice>
-          <mc:Fallback>
+          <mc:Fallback xmlns="">
             <p:sp>
               <p:nvSpPr>
-                <p:cNvPr id="9" name="文本框 8"/>
+                <p:cNvPr id="30" name="文本框 29">
+                  <a:extLst>
+                    <a:ext uri="{FF2B5EF4-FFF2-40B4-BE49-F238E27FC236}">
+                      <a16:creationId xmlns:a16="http://schemas.microsoft.com/office/drawing/2014/main" id="{0BBA0DFF-2E67-4C96-9F65-BC7A5D0B2C5E}"/>
+                    </a:ext>
+                  </a:extLst>
+                </p:cNvPr>
                 <p:cNvSpPr txBox="1">
                   <a:spLocks noRot="1" noChangeAspect="1" noMove="1" noResize="1" noEditPoints="1" noAdjustHandles="1" noChangeArrowheads="1" noChangeShapeType="1" noTextEdit="1"/>
                 </p:cNvSpPr>
@@ -8746,8 +9433,11 @@
                 <a:prstGeom prst="rect">
                   <a:avLst/>
                 </a:prstGeom>
-                <a:blipFill rotWithShape="1">
-                  <a:blip r:embed="rId3"/>
+                <a:blipFill>
+                  <a:blip r:embed="rId35"/>
+                  <a:stretch>
+                    <a:fillRect l="-12245" b="-30952"/>
+                  </a:stretch>
                 </a:blipFill>
               </p:spPr>
               <p:txBody>
@@ -8768,7 +9458,13 @@
       </p:grpSp>
       <p:grpSp>
         <p:nvGrpSpPr>
-          <p:cNvPr id="10" name="组合 9"/>
+          <p:cNvPr id="10" name="组合 9">
+            <a:extLst>
+              <a:ext uri="{FF2B5EF4-FFF2-40B4-BE49-F238E27FC236}">
+                <a16:creationId xmlns:a16="http://schemas.microsoft.com/office/drawing/2014/main" id="{2198D79E-F43F-4581-813E-05EBDBCCD914}"/>
+              </a:ext>
+            </a:extLst>
+          </p:cNvPr>
           <p:cNvGrpSpPr/>
           <p:nvPr/>
         </p:nvGrpSpPr>
@@ -8780,62 +9476,143 @@
             <a:chExt cx="3779837" cy="371475"/>
           </a:xfrm>
         </p:grpSpPr>
-        <p:graphicFrame>
-          <p:nvGraphicFramePr>
-            <p:cNvPr id="11" name="对象 10"/>
-            <p:cNvGraphicFramePr>
-              <a:graphicFrameLocks noChangeAspect="1"/>
-            </p:cNvGraphicFramePr>
-            <p:nvPr/>
-          </p:nvGraphicFramePr>
-          <p:xfrm>
-            <a:off x="1420894" y="1868744"/>
-            <a:ext cx="3779837" cy="371475"/>
-          </p:xfrm>
-          <a:graphic>
-            <a:graphicData uri="http://schemas.openxmlformats.org/presentationml/2006/ole">
-              <mc:AlternateContent xmlns:mc="http://schemas.openxmlformats.org/markup-compatibility/2006">
-                <mc:Choice xmlns:v="urn:schemas-microsoft-com:vml" Requires="v">
-                  <p:oleObj spid="_x0000_s27941" name="Formula" r:id="rId4" imgW="15792450" imgH="1562100" progId="Equation.Ribbit">
-                    <p:embed/>
-                  </p:oleObj>
-                </mc:Choice>
-                <mc:Fallback>
-                  <p:oleObj name="Formula" r:id="rId4" imgW="15792450" imgH="1562100" progId="Equation.Ribbit">
-                    <p:embed/>
-                    <p:pic>
-                      <p:nvPicPr>
-                        <p:cNvPr id="0" name="对象 11"/>
-                        <p:cNvPicPr/>
-                        <p:nvPr/>
-                      </p:nvPicPr>
-                      <p:blipFill>
-                        <a:blip r:embed="rId5"/>
-                        <a:stretch>
-                          <a:fillRect/>
-                        </a:stretch>
-                      </p:blipFill>
-                      <p:spPr>
-                        <a:xfrm>
-                          <a:off x="1420894" y="1868744"/>
-                          <a:ext cx="3779837" cy="371475"/>
-                        </a:xfrm>
-                        <a:prstGeom prst="rect">
-                          <a:avLst/>
-                        </a:prstGeom>
-                      </p:spPr>
-                    </p:pic>
-                  </p:oleObj>
-                </mc:Fallback>
-              </mc:AlternateContent>
-            </a:graphicData>
-          </a:graphic>
-        </p:graphicFrame>
-        <mc:AlternateContent xmlns:mc="http://schemas.openxmlformats.org/markup-compatibility/2006">
-          <mc:Choice xmlns:a14="http://schemas.microsoft.com/office/drawing/2010/main" Requires="a14">
+        <mc:AlternateContent xmlns:mc="http://schemas.openxmlformats.org/markup-compatibility/2006" xmlns:a14="http://schemas.microsoft.com/office/drawing/2010/main">
+          <mc:Choice Requires="a14">
+            <p:graphicFrame>
+              <p:nvGraphicFramePr>
+                <p:cNvPr id="11" name="对象 10">
+                  <a:extLst>
+                    <a:ext uri="{FF2B5EF4-FFF2-40B4-BE49-F238E27FC236}">
+                      <a16:creationId xmlns:a16="http://schemas.microsoft.com/office/drawing/2014/main" id="{2471456B-1D8D-4B61-A8C3-F6BA4A9B749A}"/>
+                    </a:ext>
+                  </a:extLst>
+                </p:cNvPr>
+                <p:cNvGraphicFramePr>
+                  <a:graphicFrameLocks noChangeAspect="1"/>
+                </p:cNvGraphicFramePr>
+                <p:nvPr>
+                  <p:extLst>
+                    <p:ext uri="{D42A27DB-BD31-4B8C-83A1-F6EECF244321}">
+                      <p14:modId xmlns:p14="http://schemas.microsoft.com/office/powerpoint/2010/main" val="2696915239"/>
+                    </p:ext>
+                  </p:extLst>
+                </p:nvPr>
+              </p:nvGraphicFramePr>
+              <p:xfrm>
+                <a:off x="1420894" y="1868744"/>
+                <a:ext cx="3779837" cy="371475"/>
+              </p:xfrm>
+              <a:graphic>
+                <a:graphicData uri="http://schemas.openxmlformats.org/presentationml/2006/ole">
+                  <mc:AlternateContent>
+                    <mc:Choice xmlns:v="urn:schemas-microsoft-com:vml" Requires="v">
+                      <p:oleObj name="Formula" r:id="rId36" imgW="2106000" imgH="208440" progId="Equation.Ribbit">
+                        <p:embed/>
+                      </p:oleObj>
+                    </mc:Choice>
+                    <mc:Fallback>
+                      <p:oleObj name="Formula" r:id="rId36" imgW="2106000" imgH="208440" progId="Equation.Ribbit">
+                        <p:embed/>
+                        <p:pic>
+                          <p:nvPicPr>
+                            <p:cNvPr id="12" name="对象 11"/>
+                            <p:cNvPicPr/>
+                            <p:nvPr/>
+                          </p:nvPicPr>
+                          <p:blipFill>
+                            <a:blip r:embed="rId37"/>
+                            <a:stretch>
+                              <a:fillRect/>
+                            </a:stretch>
+                          </p:blipFill>
+                          <p:spPr>
+                            <a:xfrm>
+                              <a:off x="1420894" y="1868744"/>
+                              <a:ext cx="3779837" cy="371475"/>
+                            </a:xfrm>
+                            <a:prstGeom prst="rect">
+                              <a:avLst/>
+                            </a:prstGeom>
+                          </p:spPr>
+                        </p:pic>
+                      </p:oleObj>
+                    </mc:Fallback>
+                  </mc:AlternateContent>
+                </a:graphicData>
+              </a:graphic>
+            </p:graphicFrame>
+          </mc:Choice>
+          <mc:Fallback xmlns="">
+            <p:graphicFrame>
+              <p:nvGraphicFramePr>
+                <p:cNvPr id="12" name="对象 11"/>
+                <p:cNvGraphicFramePr>
+                  <a:graphicFrameLocks noChangeAspect="1"/>
+                </p:cNvGraphicFramePr>
+                <p:nvPr>
+                  <p:extLst>
+                    <p:ext uri="{D42A27DB-BD31-4B8C-83A1-F6EECF244321}">
+                      <p14:modId xmlns:p14="http://schemas.microsoft.com/office/powerpoint/2010/main" val="427485303"/>
+                    </p:ext>
+                  </p:extLst>
+                </p:nvPr>
+              </p:nvGraphicFramePr>
+              <p:xfrm>
+                <a:off x="1420894" y="1868744"/>
+                <a:ext cx="3779837" cy="371475"/>
+              </p:xfrm>
+              <a:graphic>
+                <a:graphicData uri="http://schemas.openxmlformats.org/presentationml/2006/ole">
+                  <mc:AlternateContent>
+                    <mc:Choice xmlns:v="urn:schemas-microsoft-com:vml" Requires="v">
+                      <p:oleObj spid="_x0000_s24309" name="Formula" r:id="rId29" imgW="2106000" imgH="208440" progId="Equation.Ribbit">
+                        <p:embed/>
+                      </p:oleObj>
+                    </mc:Choice>
+                    <mc:Fallback>
+                      <p:oleObj name="Formula" r:id="rId29" imgW="2106000" imgH="208440" progId="Equation.Ribbit">
+                        <p:embed/>
+                        <p:pic>
+                          <p:nvPicPr>
+                            <p:cNvPr id="0" name=""/>
+                            <p:cNvPicPr/>
+                            <p:nvPr/>
+                          </p:nvPicPr>
+                          <p:blipFill>
+                            <a:blip r:embed="rId30"/>
+                            <a:stretch>
+                              <a:fillRect/>
+                            </a:stretch>
+                          </p:blipFill>
+                          <p:spPr>
+                            <a:xfrm>
+                              <a:off x="1420894" y="1868744"/>
+                              <a:ext cx="3779837" cy="371475"/>
+                            </a:xfrm>
+                            <a:prstGeom prst="rect">
+                              <a:avLst/>
+                            </a:prstGeom>
+                          </p:spPr>
+                        </p:pic>
+                      </p:oleObj>
+                    </mc:Fallback>
+                  </mc:AlternateContent>
+                </a:graphicData>
+              </a:graphic>
+            </p:graphicFrame>
+          </mc:Fallback>
+        </mc:AlternateContent>
+        <mc:AlternateContent xmlns:mc="http://schemas.openxmlformats.org/markup-compatibility/2006" xmlns:a14="http://schemas.microsoft.com/office/drawing/2010/main">
+          <mc:Choice Requires="a14">
             <p:sp>
               <p:nvSpPr>
-                <p:cNvPr id="12" name="文本框 11"/>
+                <p:cNvPr id="12" name="文本框 11">
+                  <a:extLst>
+                    <a:ext uri="{FF2B5EF4-FFF2-40B4-BE49-F238E27FC236}">
+                      <a16:creationId xmlns:a16="http://schemas.microsoft.com/office/drawing/2014/main" id="{0F7C284A-2ECB-40DC-A16B-1D9FF899DC27}"/>
+                    </a:ext>
+                  </a:extLst>
+                </p:cNvPr>
                 <p:cNvSpPr txBox="1"/>
                 <p:nvPr/>
               </p:nvSpPr>
@@ -8871,6 +9648,7 @@
                     <a:buSzTx/>
                     <a:buFontTx/>
                     <a:buNone/>
+                    <a:tabLst/>
                     <a:defRPr/>
                   </a:pPr>
                   <a14:m>
@@ -8927,7 +9705,7 @@
                                 <a:uFillTx/>
                                 <a:latin typeface="Cambria Math" panose="02040503050406030204" pitchFamily="18" charset="0"/>
                               </a:rPr>
-                              <m:t>ℎ</m:t>
+                              <m:t>h</m:t>
                             </m:r>
                           </m:sub>
                         </m:sSub>
@@ -8944,17 +9722,23 @@
                     <a:effectLst/>
                     <a:uLnTx/>
                     <a:uFillTx/>
-                    <a:latin typeface="Verdana" panose="020B0604030504040204"/>
-                    <a:ea typeface="幼圆" panose="02010509060101010101" pitchFamily="49" charset="-122"/>
+                    <a:latin typeface="Verdana"/>
+                    <a:ea typeface="幼圆"/>
                   </a:endParaRPr>
                 </a:p>
               </p:txBody>
             </p:sp>
           </mc:Choice>
-          <mc:Fallback>
+          <mc:Fallback xmlns="">
             <p:sp>
               <p:nvSpPr>
-                <p:cNvPr id="12" name="文本框 11"/>
+                <p:cNvPr id="13" name="文本框 12">
+                  <a:extLst>
+                    <a:ext uri="{FF2B5EF4-FFF2-40B4-BE49-F238E27FC236}">
+                      <a16:creationId xmlns:a16="http://schemas.microsoft.com/office/drawing/2014/main" id="{1B2896D3-9EB2-4176-84BE-9231717A921C}"/>
+                    </a:ext>
+                  </a:extLst>
+                </p:cNvPr>
                 <p:cNvSpPr txBox="1">
                   <a:spLocks noRot="1" noChangeAspect="1" noMove="1" noResize="1" noEditPoints="1" noAdjustHandles="1" noChangeArrowheads="1" noChangeShapeType="1" noTextEdit="1"/>
                 </p:cNvSpPr>
@@ -8968,8 +9752,11 @@
                 <a:prstGeom prst="rect">
                   <a:avLst/>
                 </a:prstGeom>
-                <a:blipFill rotWithShape="1">
-                  <a:blip r:embed="rId6"/>
+                <a:blipFill>
+                  <a:blip r:embed="rId31"/>
+                  <a:stretch>
+                    <a:fillRect l="-23913" r="-19565" b="-22000"/>
+                  </a:stretch>
                 </a:blipFill>
               </p:spPr>
               <p:txBody>
@@ -8987,11 +9774,17 @@
             </p:sp>
           </mc:Fallback>
         </mc:AlternateContent>
-        <mc:AlternateContent xmlns:mc="http://schemas.openxmlformats.org/markup-compatibility/2006">
-          <mc:Choice xmlns:a14="http://schemas.microsoft.com/office/drawing/2010/main" Requires="a14">
+        <mc:AlternateContent xmlns:mc="http://schemas.openxmlformats.org/markup-compatibility/2006" xmlns:a14="http://schemas.microsoft.com/office/drawing/2010/main">
+          <mc:Choice Requires="a14">
             <p:sp>
               <p:nvSpPr>
-                <p:cNvPr id="13" name="文本框 12"/>
+                <p:cNvPr id="13" name="文本框 12">
+                  <a:extLst>
+                    <a:ext uri="{FF2B5EF4-FFF2-40B4-BE49-F238E27FC236}">
+                      <a16:creationId xmlns:a16="http://schemas.microsoft.com/office/drawing/2014/main" id="{C74FC439-2274-458B-A7B7-E1021A25EFDD}"/>
+                    </a:ext>
+                  </a:extLst>
+                </p:cNvPr>
                 <p:cNvSpPr txBox="1"/>
                 <p:nvPr/>
               </p:nvSpPr>
@@ -9027,6 +9820,7 @@
                     <a:buSzTx/>
                     <a:buFontTx/>
                     <a:buNone/>
+                    <a:tabLst/>
                     <a:defRPr/>
                   </a:pPr>
                   <a14:m>
@@ -9083,7 +9877,7 @@
                                 <a:uFillTx/>
                                 <a:latin typeface="Cambria Math" panose="02040503050406030204" pitchFamily="18" charset="0"/>
                               </a:rPr>
-                              <m:t>ℎ</m:t>
+                              <m:t>h</m:t>
                             </m:r>
                           </m:sub>
                         </m:sSub>
@@ -9100,17 +9894,23 @@
                     <a:effectLst/>
                     <a:uLnTx/>
                     <a:uFillTx/>
-                    <a:latin typeface="Verdana" panose="020B0604030504040204"/>
-                    <a:ea typeface="幼圆" panose="02010509060101010101" pitchFamily="49" charset="-122"/>
+                    <a:latin typeface="Verdana"/>
+                    <a:ea typeface="幼圆"/>
                   </a:endParaRPr>
                 </a:p>
               </p:txBody>
             </p:sp>
           </mc:Choice>
-          <mc:Fallback>
+          <mc:Fallback xmlns="">
             <p:sp>
               <p:nvSpPr>
-                <p:cNvPr id="13" name="文本框 12"/>
+                <p:cNvPr id="14" name="文本框 13">
+                  <a:extLst>
+                    <a:ext uri="{FF2B5EF4-FFF2-40B4-BE49-F238E27FC236}">
+                      <a16:creationId xmlns:a16="http://schemas.microsoft.com/office/drawing/2014/main" id="{D1E556CC-9A5A-4C51-BED0-EE9144F0D6A0}"/>
+                    </a:ext>
+                  </a:extLst>
+                </p:cNvPr>
                 <p:cNvSpPr txBox="1">
                   <a:spLocks noRot="1" noChangeAspect="1" noMove="1" noResize="1" noEditPoints="1" noAdjustHandles="1" noChangeArrowheads="1" noChangeShapeType="1" noTextEdit="1"/>
                 </p:cNvSpPr>
@@ -9124,8 +9924,11 @@
                 <a:prstGeom prst="rect">
                   <a:avLst/>
                 </a:prstGeom>
-                <a:blipFill rotWithShape="1">
-                  <a:blip r:embed="rId6"/>
+                <a:blipFill>
+                  <a:blip r:embed="rId32"/>
+                  <a:stretch>
+                    <a:fillRect l="-21277" r="-17021" b="-22000"/>
+                  </a:stretch>
                 </a:blipFill>
               </p:spPr>
               <p:txBody>
@@ -9146,14 +9949,20 @@
       </p:grpSp>
       <p:pic>
         <p:nvPicPr>
-          <p:cNvPr id="14" name="图片 13"/>
+          <p:cNvPr id="14" name="图片 13">
+            <a:extLst>
+              <a:ext uri="{FF2B5EF4-FFF2-40B4-BE49-F238E27FC236}">
+                <a16:creationId xmlns:a16="http://schemas.microsoft.com/office/drawing/2014/main" id="{E7C9C964-180F-4881-A9AA-2A3435CC2C04}"/>
+              </a:ext>
+            </a:extLst>
+          </p:cNvPr>
           <p:cNvPicPr>
             <a:picLocks noChangeAspect="1"/>
           </p:cNvPicPr>
           <p:nvPr/>
         </p:nvPicPr>
         <p:blipFill>
-          <a:blip r:embed="rId7"/>
+          <a:blip r:embed="rId38"/>
           <a:stretch>
             <a:fillRect/>
           </a:stretch>
@@ -9170,7 +9979,13 @@
       </p:pic>
       <p:sp>
         <p:nvSpPr>
-          <p:cNvPr id="16" name="文本框 15"/>
+          <p:cNvPr id="16" name="文本框 15">
+            <a:extLst>
+              <a:ext uri="{FF2B5EF4-FFF2-40B4-BE49-F238E27FC236}">
+                <a16:creationId xmlns:a16="http://schemas.microsoft.com/office/drawing/2014/main" id="{24A66FBA-D0CB-4D11-8822-14B52854CF8C}"/>
+              </a:ext>
+            </a:extLst>
+          </p:cNvPr>
           <p:cNvSpPr txBox="1"/>
           <p:nvPr/>
         </p:nvSpPr>
@@ -9224,20 +10039,28 @@
               </a:rPr>
               <a:t> 		</a:t>
             </a:r>
-            <a:endParaRPr lang="en-US" altLang="zh-CN" sz="1800" b="1" dirty="0">
-              <a:latin typeface="黑体" panose="02010609060101010101" pitchFamily="49" charset="-122"/>
-              <a:ea typeface="黑体" panose="02010609060101010101" pitchFamily="49" charset="-122"/>
-            </a:endParaRPr>
           </a:p>
         </p:txBody>
       </p:sp>
       <p:graphicFrame>
         <p:nvGraphicFramePr>
-          <p:cNvPr id="17" name="对象 16"/>
+          <p:cNvPr id="17" name="对象 16">
+            <a:extLst>
+              <a:ext uri="{FF2B5EF4-FFF2-40B4-BE49-F238E27FC236}">
+                <a16:creationId xmlns:a16="http://schemas.microsoft.com/office/drawing/2014/main" id="{EF4DBBB7-3120-477F-A000-3A32FC06EF1B}"/>
+              </a:ext>
+            </a:extLst>
+          </p:cNvPr>
           <p:cNvGraphicFramePr>
             <a:graphicFrameLocks noChangeAspect="1"/>
           </p:cNvGraphicFramePr>
-          <p:nvPr/>
+          <p:nvPr>
+            <p:extLst>
+              <p:ext uri="{D42A27DB-BD31-4B8C-83A1-F6EECF244321}">
+                <p14:modId xmlns:p14="http://schemas.microsoft.com/office/powerpoint/2010/main" val="2443801431"/>
+              </p:ext>
+            </p:extLst>
+          </p:nvPr>
         </p:nvGraphicFramePr>
         <p:xfrm>
           <a:off x="1403648" y="614068"/>
@@ -9247,21 +10070,21 @@
           <a:graphicData uri="http://schemas.openxmlformats.org/presentationml/2006/ole">
             <mc:AlternateContent xmlns:mc="http://schemas.openxmlformats.org/markup-compatibility/2006">
               <mc:Choice xmlns:v="urn:schemas-microsoft-com:vml" Requires="v">
-                <p:oleObj spid="_x0000_s2" name="Formula" r:id="rId8" imgW="1333500" imgH="895350" progId="Equation.Ribbit">
+                <p:oleObj name="Formula" r:id="rId39" imgW="177840" imgH="119520" progId="Equation.Ribbit">
                   <p:embed/>
                 </p:oleObj>
               </mc:Choice>
               <mc:Fallback>
-                <p:oleObj name="Formula" r:id="rId8" imgW="1333500" imgH="895350" progId="Equation.Ribbit">
+                <p:oleObj name="Formula" r:id="rId39" imgW="177840" imgH="119520" progId="Equation.Ribbit">
                   <p:embed/>
                   <p:pic>
                     <p:nvPicPr>
-                      <p:cNvPr id="0" name="对象 16"/>
+                      <p:cNvPr id="17" name="对象 16"/>
                       <p:cNvPicPr/>
                       <p:nvPr/>
                     </p:nvPicPr>
                     <p:blipFill>
-                      <a:blip r:embed="rId9"/>
+                      <a:blip r:embed="rId40"/>
                       <a:stretch>
                         <a:fillRect/>
                       </a:stretch>
@@ -9284,11 +10107,23 @@
       </p:graphicFrame>
       <p:graphicFrame>
         <p:nvGraphicFramePr>
-          <p:cNvPr id="18" name="对象 17"/>
+          <p:cNvPr id="18" name="对象 17">
+            <a:extLst>
+              <a:ext uri="{FF2B5EF4-FFF2-40B4-BE49-F238E27FC236}">
+                <a16:creationId xmlns:a16="http://schemas.microsoft.com/office/drawing/2014/main" id="{7780210C-26E5-4151-BCEF-5626D358747D}"/>
+              </a:ext>
+            </a:extLst>
+          </p:cNvPr>
           <p:cNvGraphicFramePr>
             <a:graphicFrameLocks noChangeAspect="1"/>
           </p:cNvGraphicFramePr>
-          <p:nvPr/>
+          <p:nvPr>
+            <p:extLst>
+              <p:ext uri="{D42A27DB-BD31-4B8C-83A1-F6EECF244321}">
+                <p14:modId xmlns:p14="http://schemas.microsoft.com/office/powerpoint/2010/main" val="2189219821"/>
+              </p:ext>
+            </p:extLst>
+          </p:nvPr>
         </p:nvGraphicFramePr>
         <p:xfrm>
           <a:off x="1954633" y="598403"/>
@@ -9298,21 +10133,21 @@
           <a:graphicData uri="http://schemas.openxmlformats.org/presentationml/2006/ole">
             <mc:AlternateContent xmlns:mc="http://schemas.openxmlformats.org/markup-compatibility/2006">
               <mc:Choice xmlns:v="urn:schemas-microsoft-com:vml" Requires="v">
-                <p:oleObj spid="_x0000_s3" name="Formula" r:id="rId10" imgW="1647825" imgH="1000125" progId="Equation.Ribbit">
+                <p:oleObj name="Formula" r:id="rId41" imgW="219960" imgH="133560" progId="Equation.Ribbit">
                   <p:embed/>
                 </p:oleObj>
               </mc:Choice>
               <mc:Fallback>
-                <p:oleObj name="Formula" r:id="rId10" imgW="1647825" imgH="1000125" progId="Equation.Ribbit">
+                <p:oleObj name="Formula" r:id="rId41" imgW="219960" imgH="133560" progId="Equation.Ribbit">
                   <p:embed/>
                   <p:pic>
                     <p:nvPicPr>
-                      <p:cNvPr id="0" name="对象 19"/>
+                      <p:cNvPr id="20" name="对象 19"/>
                       <p:cNvPicPr/>
                       <p:nvPr/>
                     </p:nvPicPr>
                     <p:blipFill>
-                      <a:blip r:embed="rId11"/>
+                      <a:blip r:embed="rId42"/>
                       <a:stretch>
                         <a:fillRect/>
                       </a:stretch>
@@ -9335,11 +10170,23 @@
       </p:graphicFrame>
       <p:graphicFrame>
         <p:nvGraphicFramePr>
-          <p:cNvPr id="19" name="对象 18"/>
+          <p:cNvPr id="19" name="对象 18">
+            <a:extLst>
+              <a:ext uri="{FF2B5EF4-FFF2-40B4-BE49-F238E27FC236}">
+                <a16:creationId xmlns:a16="http://schemas.microsoft.com/office/drawing/2014/main" id="{E9635BD2-BEA3-44EB-A7BE-532C3AD84412}"/>
+              </a:ext>
+            </a:extLst>
+          </p:cNvPr>
           <p:cNvGraphicFramePr>
             <a:graphicFrameLocks noChangeAspect="1"/>
           </p:cNvGraphicFramePr>
-          <p:nvPr/>
+          <p:nvPr>
+            <p:extLst>
+              <p:ext uri="{D42A27DB-BD31-4B8C-83A1-F6EECF244321}">
+                <p14:modId xmlns:p14="http://schemas.microsoft.com/office/powerpoint/2010/main" val="3765758827"/>
+              </p:ext>
+            </p:extLst>
+          </p:nvPr>
         </p:nvGraphicFramePr>
         <p:xfrm>
           <a:off x="3315570" y="585670"/>
@@ -9349,21 +10196,21 @@
           <a:graphicData uri="http://schemas.openxmlformats.org/presentationml/2006/ole">
             <mc:AlternateContent xmlns:mc="http://schemas.openxmlformats.org/markup-compatibility/2006">
               <mc:Choice xmlns:v="urn:schemas-microsoft-com:vml" Requires="v">
-                <p:oleObj spid="_x0000_s4" name="Formula" r:id="rId12" imgW="895350" imgH="1304925" progId="Equation.Ribbit">
+                <p:oleObj name="Formula" r:id="rId43" imgW="119520" imgH="174240" progId="Equation.Ribbit">
                   <p:embed/>
                 </p:oleObj>
               </mc:Choice>
               <mc:Fallback>
-                <p:oleObj name="Formula" r:id="rId12" imgW="895350" imgH="1304925" progId="Equation.Ribbit">
+                <p:oleObj name="Formula" r:id="rId43" imgW="119520" imgH="174240" progId="Equation.Ribbit">
                   <p:embed/>
                   <p:pic>
                     <p:nvPicPr>
-                      <p:cNvPr id="0" name="对象 10"/>
+                      <p:cNvPr id="11" name="对象 10"/>
                       <p:cNvPicPr/>
                       <p:nvPr/>
                     </p:nvPicPr>
                     <p:blipFill>
-                      <a:blip r:embed="rId13"/>
+                      <a:blip r:embed="rId44"/>
                       <a:stretch>
                         <a:fillRect/>
                       </a:stretch>
@@ -9386,11 +10233,23 @@
       </p:graphicFrame>
       <p:graphicFrame>
         <p:nvGraphicFramePr>
-          <p:cNvPr id="20" name="对象 19"/>
+          <p:cNvPr id="20" name="对象 19">
+            <a:extLst>
+              <a:ext uri="{FF2B5EF4-FFF2-40B4-BE49-F238E27FC236}">
+                <a16:creationId xmlns:a16="http://schemas.microsoft.com/office/drawing/2014/main" id="{D1F58B69-33ED-4EED-BADC-5D7A15F15066}"/>
+              </a:ext>
+            </a:extLst>
+          </p:cNvPr>
           <p:cNvGraphicFramePr>
             <a:graphicFrameLocks noChangeAspect="1"/>
           </p:cNvGraphicFramePr>
-          <p:nvPr/>
+          <p:nvPr>
+            <p:extLst>
+              <p:ext uri="{D42A27DB-BD31-4B8C-83A1-F6EECF244321}">
+                <p14:modId xmlns:p14="http://schemas.microsoft.com/office/powerpoint/2010/main" val="10631158"/>
+              </p:ext>
+            </p:extLst>
+          </p:nvPr>
         </p:nvGraphicFramePr>
         <p:xfrm>
           <a:off x="3740121" y="585670"/>
@@ -9400,21 +10259,21 @@
           <a:graphicData uri="http://schemas.openxmlformats.org/presentationml/2006/ole">
             <mc:AlternateContent xmlns:mc="http://schemas.openxmlformats.org/markup-compatibility/2006">
               <mc:Choice xmlns:v="urn:schemas-microsoft-com:vml" Requires="v">
-                <p:oleObj spid="_x0000_s15" name="Formula" r:id="rId14" imgW="1104900" imgH="914400" progId="Equation.Ribbit">
+                <p:oleObj name="Formula" r:id="rId45" imgW="147600" imgH="122040" progId="Equation.Ribbit">
                   <p:embed/>
                 </p:oleObj>
               </mc:Choice>
               <mc:Fallback>
-                <p:oleObj name="Formula" r:id="rId14" imgW="1104900" imgH="914400" progId="Equation.Ribbit">
+                <p:oleObj name="Formula" r:id="rId45" imgW="147600" imgH="122040" progId="Equation.Ribbit">
                   <p:embed/>
                   <p:pic>
                     <p:nvPicPr>
-                      <p:cNvPr id="0" name="对象 14"/>
+                      <p:cNvPr id="15" name="对象 14"/>
                       <p:cNvPicPr/>
                       <p:nvPr/>
                     </p:nvPicPr>
                     <p:blipFill>
-                      <a:blip r:embed="rId15"/>
+                      <a:blip r:embed="rId46"/>
                       <a:stretch>
                         <a:fillRect/>
                       </a:stretch>
@@ -9437,11 +10296,23 @@
       </p:graphicFrame>
       <p:graphicFrame>
         <p:nvGraphicFramePr>
-          <p:cNvPr id="21" name="对象 20"/>
+          <p:cNvPr id="21" name="对象 20">
+            <a:extLst>
+              <a:ext uri="{FF2B5EF4-FFF2-40B4-BE49-F238E27FC236}">
+                <a16:creationId xmlns:a16="http://schemas.microsoft.com/office/drawing/2014/main" id="{E2B7F0EE-6FDC-4062-B6C1-25F1FAF7B495}"/>
+              </a:ext>
+            </a:extLst>
+          </p:cNvPr>
           <p:cNvGraphicFramePr>
             <a:graphicFrameLocks noChangeAspect="1"/>
           </p:cNvGraphicFramePr>
-          <p:nvPr/>
+          <p:nvPr>
+            <p:extLst>
+              <p:ext uri="{D42A27DB-BD31-4B8C-83A1-F6EECF244321}">
+                <p14:modId xmlns:p14="http://schemas.microsoft.com/office/powerpoint/2010/main" val="2961829140"/>
+              </p:ext>
+            </p:extLst>
+          </p:nvPr>
         </p:nvGraphicFramePr>
         <p:xfrm>
           <a:off x="4247864" y="614068"/>
@@ -9451,21 +10322,21 @@
           <a:graphicData uri="http://schemas.openxmlformats.org/presentationml/2006/ole">
             <mc:AlternateContent xmlns:mc="http://schemas.openxmlformats.org/markup-compatibility/2006">
               <mc:Choice xmlns:v="urn:schemas-microsoft-com:vml" Requires="v">
-                <p:oleObj spid="_x0000_s22" name="Formula" r:id="rId16" imgW="19564350" imgH="1323975" progId="Equation.Ribbit">
+                <p:oleObj name="Formula" r:id="rId47" imgW="2608920" imgH="176760" progId="Equation.Ribbit">
                   <p:embed/>
                 </p:oleObj>
               </mc:Choice>
               <mc:Fallback>
-                <p:oleObj name="Formula" r:id="rId16" imgW="19564350" imgH="1323975" progId="Equation.Ribbit">
+                <p:oleObj name="Formula" r:id="rId47" imgW="2608920" imgH="176760" progId="Equation.Ribbit">
                   <p:embed/>
                   <p:pic>
                     <p:nvPicPr>
-                      <p:cNvPr id="0" name="对象 21"/>
+                      <p:cNvPr id="22" name="对象 21"/>
                       <p:cNvPicPr/>
                       <p:nvPr/>
                     </p:nvPicPr>
                     <p:blipFill>
-                      <a:blip r:embed="rId17"/>
+                      <a:blip r:embed="rId48"/>
                       <a:stretch>
                         <a:fillRect/>
                       </a:stretch>
@@ -9488,7 +10359,13 @@
       </p:graphicFrame>
       <p:sp>
         <p:nvSpPr>
-          <p:cNvPr id="23" name="文本框 22"/>
+          <p:cNvPr id="23" name="文本框 22">
+            <a:extLst>
+              <a:ext uri="{FF2B5EF4-FFF2-40B4-BE49-F238E27FC236}">
+                <a16:creationId xmlns:a16="http://schemas.microsoft.com/office/drawing/2014/main" id="{3FFBB9B9-7717-43B1-B55F-21DCD3A14C71}"/>
+              </a:ext>
+            </a:extLst>
+          </p:cNvPr>
           <p:cNvSpPr txBox="1"/>
           <p:nvPr/>
         </p:nvSpPr>
@@ -9521,11 +10398,23 @@
       </p:sp>
       <p:graphicFrame>
         <p:nvGraphicFramePr>
-          <p:cNvPr id="24" name="对象 23"/>
+          <p:cNvPr id="24" name="对象 23">
+            <a:extLst>
+              <a:ext uri="{FF2B5EF4-FFF2-40B4-BE49-F238E27FC236}">
+                <a16:creationId xmlns:a16="http://schemas.microsoft.com/office/drawing/2014/main" id="{AFB753A7-6141-4428-BF0B-6B4581F92F2D}"/>
+              </a:ext>
+            </a:extLst>
+          </p:cNvPr>
           <p:cNvGraphicFramePr>
             <a:graphicFrameLocks noChangeAspect="1"/>
           </p:cNvGraphicFramePr>
-          <p:nvPr/>
+          <p:nvPr>
+            <p:extLst>
+              <p:ext uri="{D42A27DB-BD31-4B8C-83A1-F6EECF244321}">
+                <p14:modId xmlns:p14="http://schemas.microsoft.com/office/powerpoint/2010/main" val="1923342896"/>
+              </p:ext>
+            </p:extLst>
+          </p:nvPr>
         </p:nvGraphicFramePr>
         <p:xfrm>
           <a:off x="2409002" y="5413889"/>
@@ -9535,21 +10424,21 @@
           <a:graphicData uri="http://schemas.openxmlformats.org/presentationml/2006/ole">
             <mc:AlternateContent xmlns:mc="http://schemas.openxmlformats.org/markup-compatibility/2006">
               <mc:Choice xmlns:v="urn:schemas-microsoft-com:vml" Requires="v">
-                <p:oleObj spid="_x0000_s25" name="Formula" r:id="rId18" imgW="11115675" imgH="1762125" progId="Equation.Ribbit">
+                <p:oleObj name="Formula" r:id="rId49" imgW="1482120" imgH="235080" progId="Equation.Ribbit">
                   <p:embed/>
                 </p:oleObj>
               </mc:Choice>
               <mc:Fallback>
-                <p:oleObj name="Formula" r:id="rId18" imgW="11115675" imgH="1762125" progId="Equation.Ribbit">
+                <p:oleObj name="Formula" r:id="rId49" imgW="1482120" imgH="235080" progId="Equation.Ribbit">
                   <p:embed/>
                   <p:pic>
                     <p:nvPicPr>
-                      <p:cNvPr id="0" name="对象 20"/>
+                      <p:cNvPr id="21" name="对象 20"/>
                       <p:cNvPicPr/>
                       <p:nvPr/>
                     </p:nvPicPr>
                     <p:blipFill>
-                      <a:blip r:embed="rId19"/>
+                      <a:blip r:embed="rId50"/>
                       <a:stretch>
                         <a:fillRect/>
                       </a:stretch>
@@ -9572,7 +10461,13 @@
       </p:graphicFrame>
       <p:grpSp>
         <p:nvGrpSpPr>
-          <p:cNvPr id="27" name="组合 26"/>
+          <p:cNvPr id="27" name="组合 26">
+            <a:extLst>
+              <a:ext uri="{FF2B5EF4-FFF2-40B4-BE49-F238E27FC236}">
+                <a16:creationId xmlns:a16="http://schemas.microsoft.com/office/drawing/2014/main" id="{F50344AC-4D6B-45A0-82E9-9D3B9B5B8BE5}"/>
+              </a:ext>
+            </a:extLst>
+          </p:cNvPr>
           <p:cNvGrpSpPr/>
           <p:nvPr/>
         </p:nvGrpSpPr>
@@ -9586,14 +10481,20 @@
         </p:grpSpPr>
         <p:pic>
           <p:nvPicPr>
-            <p:cNvPr id="26" name="图片 25"/>
+            <p:cNvPr id="25" name="图片 24">
+              <a:extLst>
+                <a:ext uri="{FF2B5EF4-FFF2-40B4-BE49-F238E27FC236}">
+                  <a16:creationId xmlns:a16="http://schemas.microsoft.com/office/drawing/2014/main" id="{E956A502-76B5-4234-AFE7-E569806D853A}"/>
+                </a:ext>
+              </a:extLst>
+            </p:cNvPr>
             <p:cNvPicPr>
               <a:picLocks noChangeAspect="1"/>
             </p:cNvPicPr>
             <p:nvPr/>
           </p:nvPicPr>
           <p:blipFill>
-            <a:blip r:embed="rId20"/>
+            <a:blip r:embed="rId51"/>
             <a:stretch>
               <a:fillRect/>
             </a:stretch>
@@ -9610,7 +10511,13 @@
         </p:pic>
         <p:sp>
           <p:nvSpPr>
-            <p:cNvPr id="28" name="文本框 27"/>
+            <p:cNvPr id="26" name="文本框 25">
+              <a:extLst>
+                <a:ext uri="{FF2B5EF4-FFF2-40B4-BE49-F238E27FC236}">
+                  <a16:creationId xmlns:a16="http://schemas.microsoft.com/office/drawing/2014/main" id="{3897B4E1-1ED7-43D4-9DD6-F700F7CE6AE1}"/>
+                </a:ext>
+              </a:extLst>
+            </p:cNvPr>
             <p:cNvSpPr txBox="1"/>
             <p:nvPr/>
           </p:nvSpPr>
@@ -9653,6 +10560,11 @@
         </p:sp>
       </p:grpSp>
     </p:spTree>
+    <p:extLst>
+      <p:ext uri="{BB962C8B-B14F-4D97-AF65-F5344CB8AC3E}">
+        <p14:creationId xmlns:p14="http://schemas.microsoft.com/office/powerpoint/2010/main" val="4218266056"/>
+      </p:ext>
+    </p:extLst>
   </p:cSld>
   <p:clrMapOvr>
     <a:masterClrMapping/>
@@ -9679,7 +10591,13 @@
       </p:grpSpPr>
       <p:sp>
         <p:nvSpPr>
-          <p:cNvPr id="18434" name="灯片编号占位符 5"/>
+          <p:cNvPr id="18434" name="灯片编号占位符 5">
+            <a:extLst>
+              <a:ext uri="{FF2B5EF4-FFF2-40B4-BE49-F238E27FC236}">
+                <a16:creationId xmlns:a16="http://schemas.microsoft.com/office/drawing/2014/main" id="{CBBD9809-2CC4-42C3-B564-FAC6896E7580}"/>
+              </a:ext>
+            </a:extLst>
+          </p:cNvPr>
           <p:cNvSpPr>
             <a:spLocks noGrp="1"/>
           </p:cNvSpPr>
@@ -9866,6 +10784,7 @@
               <a:buSzTx/>
               <a:buFontTx/>
               <a:buNone/>
+              <a:tabLst/>
               <a:defRPr/>
             </a:pPr>
             <a:fld id="{F12A9DEA-C3F6-4401-A5BF-3745117890AB}" type="slidenum">
@@ -9883,6 +10802,24 @@
                 <a:ea typeface="宋体" panose="02010600030101010101" pitchFamily="2" charset="-122"/>
                 <a:cs typeface="+mn-cs"/>
               </a:rPr>
+              <a:pPr marL="0" marR="0" lvl="0" indent="0" algn="r" defTabSz="914400" rtl="0" eaLnBrk="1" fontAlgn="base" latinLnBrk="0" hangingPunct="1">
+                <a:lnSpc>
+                  <a:spcPct val="100000"/>
+                </a:lnSpc>
+                <a:spcBef>
+                  <a:spcPct val="0"/>
+                </a:spcBef>
+                <a:spcAft>
+                  <a:spcPct val="0"/>
+                </a:spcAft>
+                <a:buClrTx/>
+                <a:buSzTx/>
+                <a:buFontTx/>
+                <a:buNone/>
+                <a:tabLst/>
+                <a:defRPr/>
+              </a:pPr>
+              <a:t>12</a:t>
             </a:fld>
             <a:endParaRPr kumimoji="1" lang="en-US" altLang="zh-CN" sz="1400" b="0" i="0" u="none" strike="noStrike" kern="1200" cap="none" spc="0" normalizeH="0" baseline="0" noProof="0">
               <a:ln>
@@ -9903,7 +10840,13 @@
       </p:sp>
       <p:sp>
         <p:nvSpPr>
-          <p:cNvPr id="887811" name="Rectangle 3"/>
+          <p:cNvPr id="887811" name="Rectangle 3">
+            <a:extLst>
+              <a:ext uri="{FF2B5EF4-FFF2-40B4-BE49-F238E27FC236}">
+                <a16:creationId xmlns:a16="http://schemas.microsoft.com/office/drawing/2014/main" id="{E67925BF-BD9D-4849-975B-B00461AA9122}"/>
+              </a:ext>
+            </a:extLst>
+          </p:cNvPr>
           <p:cNvSpPr>
             <a:spLocks noGrp="1"/>
           </p:cNvSpPr>
@@ -10297,7 +11240,13 @@
       </p:sp>
       <p:sp>
         <p:nvSpPr>
-          <p:cNvPr id="18436" name="Text Box 4"/>
+          <p:cNvPr id="18436" name="Text Box 4">
+            <a:extLst>
+              <a:ext uri="{FF2B5EF4-FFF2-40B4-BE49-F238E27FC236}">
+                <a16:creationId xmlns:a16="http://schemas.microsoft.com/office/drawing/2014/main" id="{EB81EA09-BA58-4C02-A7E1-E64004DF3351}"/>
+              </a:ext>
+            </a:extLst>
+          </p:cNvPr>
           <p:cNvSpPr txBox="1">
             <a:spLocks noChangeArrowheads="1"/>
           </p:cNvSpPr>
@@ -10504,6 +11453,7 @@
               <a:buSzTx/>
               <a:buFontTx/>
               <a:buNone/>
+              <a:tabLst/>
               <a:defRPr/>
             </a:pPr>
             <a:r>
@@ -10557,20 +11507,6 @@
               </a:rPr>
               <a:t>章：支持向量机</a:t>
             </a:r>
-            <a:endParaRPr kumimoji="1" lang="zh-CN" altLang="en-US" sz="3200" b="1" i="0" u="none" strike="noStrike" kern="1200" cap="none" spc="0" normalizeH="0" baseline="0" noProof="0" dirty="0">
-              <a:ln>
-                <a:noFill/>
-              </a:ln>
-              <a:solidFill>
-                <a:prstClr val="black"/>
-              </a:solidFill>
-              <a:effectLst/>
-              <a:uLnTx/>
-              <a:uFillTx/>
-              <a:latin typeface="黑体" panose="02010609060101010101" pitchFamily="49" charset="-122"/>
-              <a:ea typeface="黑体" panose="02010609060101010101" pitchFamily="49" charset="-122"/>
-              <a:cs typeface="楷体_GB2312"/>
-            </a:endParaRPr>
           </a:p>
         </p:txBody>
       </p:sp>
@@ -10583,7 +11519,7 @@
           <p:nvPr/>
         </p:nvPicPr>
         <p:blipFill>
-          <a:blip r:embed="rId1"/>
+          <a:blip r:embed="rId2"/>
           <a:stretch>
             <a:fillRect/>
           </a:stretch>
@@ -10607,7 +11543,7 @@
           <p:nvPr/>
         </p:nvPicPr>
         <p:blipFill>
-          <a:blip r:embed="rId2">
+          <a:blip r:embed="rId3">
             <a:extLst>
               <a:ext uri="{28A0092B-C50C-407E-A947-70E740481C1C}">
                 <a14:useLocalDpi xmlns:a14="http://schemas.microsoft.com/office/drawing/2010/main" val="0"/>
@@ -10629,6 +11565,11 @@
         </p:spPr>
       </p:pic>
     </p:spTree>
+    <p:extLst>
+      <p:ext uri="{BB962C8B-B14F-4D97-AF65-F5344CB8AC3E}">
+        <p14:creationId xmlns:p14="http://schemas.microsoft.com/office/powerpoint/2010/main" val="371217219"/>
+      </p:ext>
+    </p:extLst>
   </p:cSld>
   <p:clrMapOvr>
     <a:masterClrMapping/>
@@ -10643,13 +11584,13 @@
               <p:cTn id="2" dur="indefinite" nodeType="mainSeq">
                 <p:childTnLst>
                   <p:par>
-                    <p:cTn id="3" fill="hold">
+                    <p:cTn id="3" fill="hold" nodeType="clickPar">
                       <p:stCondLst>
                         <p:cond delay="indefinite"/>
                       </p:stCondLst>
                       <p:childTnLst>
                         <p:par>
-                          <p:cTn id="4" fill="hold">
+                          <p:cTn id="4" fill="hold" nodeType="withGroup">
                             <p:stCondLst>
                               <p:cond delay="0"/>
                             </p:stCondLst>
@@ -10750,7 +11691,13 @@
       </p:grpSpPr>
       <p:sp>
         <p:nvSpPr>
-          <p:cNvPr id="18434" name="灯片编号占位符 5"/>
+          <p:cNvPr id="18434" name="灯片编号占位符 5">
+            <a:extLst>
+              <a:ext uri="{FF2B5EF4-FFF2-40B4-BE49-F238E27FC236}">
+                <a16:creationId xmlns:a16="http://schemas.microsoft.com/office/drawing/2014/main" id="{CBBD9809-2CC4-42C3-B564-FAC6896E7580}"/>
+              </a:ext>
+            </a:extLst>
+          </p:cNvPr>
           <p:cNvSpPr>
             <a:spLocks noGrp="1"/>
           </p:cNvSpPr>
@@ -10937,6 +11884,7 @@
               <a:buSzTx/>
               <a:buFontTx/>
               <a:buNone/>
+              <a:tabLst/>
               <a:defRPr/>
             </a:pPr>
             <a:fld id="{F12A9DEA-C3F6-4401-A5BF-3745117890AB}" type="slidenum">
@@ -10954,6 +11902,24 @@
                 <a:ea typeface="宋体" panose="02010600030101010101" pitchFamily="2" charset="-122"/>
                 <a:cs typeface="+mn-cs"/>
               </a:rPr>
+              <a:pPr marL="0" marR="0" lvl="0" indent="0" algn="r" defTabSz="914400" rtl="0" eaLnBrk="1" fontAlgn="base" latinLnBrk="0" hangingPunct="1">
+                <a:lnSpc>
+                  <a:spcPct val="100000"/>
+                </a:lnSpc>
+                <a:spcBef>
+                  <a:spcPct val="0"/>
+                </a:spcBef>
+                <a:spcAft>
+                  <a:spcPct val="0"/>
+                </a:spcAft>
+                <a:buClrTx/>
+                <a:buSzTx/>
+                <a:buFontTx/>
+                <a:buNone/>
+                <a:tabLst/>
+                <a:defRPr/>
+              </a:pPr>
+              <a:t>13</a:t>
             </a:fld>
             <a:endParaRPr kumimoji="1" lang="en-US" altLang="zh-CN" sz="1400" b="0" i="0" u="none" strike="noStrike" kern="1200" cap="none" spc="0" normalizeH="0" baseline="0" noProof="0">
               <a:ln>
@@ -10974,7 +11940,13 @@
       </p:sp>
       <p:sp>
         <p:nvSpPr>
-          <p:cNvPr id="887811" name="Rectangle 3"/>
+          <p:cNvPr id="887811" name="Rectangle 3">
+            <a:extLst>
+              <a:ext uri="{FF2B5EF4-FFF2-40B4-BE49-F238E27FC236}">
+                <a16:creationId xmlns:a16="http://schemas.microsoft.com/office/drawing/2014/main" id="{E67925BF-BD9D-4849-975B-B00461AA9122}"/>
+              </a:ext>
+            </a:extLst>
+          </p:cNvPr>
           <p:cNvSpPr>
             <a:spLocks noGrp="1"/>
           </p:cNvSpPr>
@@ -11129,11 +12101,6 @@
               </a:rPr>
               <a:t>来预测</a:t>
             </a:r>
-            <a:endParaRPr lang="zh-CN" altLang="en-US" sz="2400" dirty="0">
-              <a:latin typeface="Times New Roman" panose="02020603050405020304" pitchFamily="18" charset="0"/>
-              <a:ea typeface="楷体" panose="02010609060101010101" pitchFamily="49" charset="-122"/>
-              <a:cs typeface="Times New Roman" panose="02020603050405020304" pitchFamily="18" charset="0"/>
-            </a:endParaRPr>
           </a:p>
           <a:p>
             <a:pPr eaLnBrk="1" hangingPunct="1">
@@ -11189,11 +12156,6 @@
               </a:rPr>
               <a:t>先对联合概率分布          建模，再由此获得</a:t>
             </a:r>
-            <a:endParaRPr lang="zh-CN" altLang="en-US" sz="2400" dirty="0">
-              <a:latin typeface="Times New Roman" panose="02020603050405020304" pitchFamily="18" charset="0"/>
-              <a:ea typeface="楷体" panose="02010609060101010101" pitchFamily="49" charset="-122"/>
-              <a:cs typeface="Times New Roman" panose="02020603050405020304" pitchFamily="18" charset="0"/>
-            </a:endParaRPr>
           </a:p>
           <a:p>
             <a:pPr eaLnBrk="1" hangingPunct="1">
@@ -11215,11 +12177,6 @@
               </a:rPr>
               <a:t>贝叶斯定理：</a:t>
             </a:r>
-            <a:endParaRPr lang="zh-CN" altLang="en-US" sz="2600" b="1" dirty="0">
-              <a:latin typeface="Times New Roman" panose="02020603050405020304" pitchFamily="18" charset="0"/>
-              <a:ea typeface="楷体" panose="02010609060101010101" pitchFamily="49" charset="-122"/>
-              <a:cs typeface="Times New Roman" panose="02020603050405020304" pitchFamily="18" charset="0"/>
-            </a:endParaRPr>
           </a:p>
           <a:p>
             <a:pPr eaLnBrk="1" hangingPunct="1">
@@ -11422,7 +12379,13 @@
       </p:sp>
       <p:sp>
         <p:nvSpPr>
-          <p:cNvPr id="18436" name="Text Box 4"/>
+          <p:cNvPr id="18436" name="Text Box 4">
+            <a:extLst>
+              <a:ext uri="{FF2B5EF4-FFF2-40B4-BE49-F238E27FC236}">
+                <a16:creationId xmlns:a16="http://schemas.microsoft.com/office/drawing/2014/main" id="{EB81EA09-BA58-4C02-A7E1-E64004DF3351}"/>
+              </a:ext>
+            </a:extLst>
+          </p:cNvPr>
           <p:cNvSpPr txBox="1">
             <a:spLocks noChangeArrowheads="1"/>
           </p:cNvSpPr>
@@ -11629,6 +12592,7 @@
               <a:buSzTx/>
               <a:buFontTx/>
               <a:buNone/>
+              <a:tabLst/>
               <a:defRPr/>
             </a:pPr>
             <a:r>
@@ -11682,30 +12646,28 @@
               </a:rPr>
               <a:t>章：贝叶斯分类器</a:t>
             </a:r>
-            <a:endParaRPr kumimoji="1" lang="zh-CN" altLang="en-US" sz="3200" b="1" i="0" u="none" strike="noStrike" kern="1200" cap="none" spc="0" normalizeH="0" baseline="0" noProof="0" dirty="0">
-              <a:ln>
-                <a:noFill/>
-              </a:ln>
-              <a:solidFill>
-                <a:prstClr val="black"/>
-              </a:solidFill>
-              <a:effectLst/>
-              <a:uLnTx/>
-              <a:uFillTx/>
-              <a:latin typeface="黑体" panose="02010609060101010101" pitchFamily="49" charset="-122"/>
-              <a:ea typeface="黑体" panose="02010609060101010101" pitchFamily="49" charset="-122"/>
-              <a:cs typeface="楷体_GB2312"/>
-            </a:endParaRPr>
           </a:p>
         </p:txBody>
       </p:sp>
       <p:graphicFrame>
         <p:nvGraphicFramePr>
-          <p:cNvPr id="5" name="对象 4"/>
+          <p:cNvPr id="5" name="对象 4">
+            <a:extLst>
+              <a:ext uri="{FF2B5EF4-FFF2-40B4-BE49-F238E27FC236}">
+                <a16:creationId xmlns:a16="http://schemas.microsoft.com/office/drawing/2014/main" id="{9BEB6148-F99D-4AD0-A85C-9C1995DCE3A1}"/>
+              </a:ext>
+            </a:extLst>
+          </p:cNvPr>
           <p:cNvGraphicFramePr>
             <a:graphicFrameLocks noChangeAspect="1"/>
           </p:cNvGraphicFramePr>
-          <p:nvPr/>
+          <p:nvPr>
+            <p:extLst>
+              <p:ext uri="{D42A27DB-BD31-4B8C-83A1-F6EECF244321}">
+                <p14:modId xmlns:p14="http://schemas.microsoft.com/office/powerpoint/2010/main" val="1223909205"/>
+              </p:ext>
+            </p:extLst>
+          </p:nvPr>
         </p:nvGraphicFramePr>
         <p:xfrm>
           <a:off x="2339752" y="2485082"/>
@@ -11715,21 +12677,21 @@
           <a:graphicData uri="http://schemas.openxmlformats.org/presentationml/2006/ole">
             <mc:AlternateContent xmlns:mc="http://schemas.openxmlformats.org/markup-compatibility/2006">
               <mc:Choice xmlns:v="urn:schemas-microsoft-com:vml" Requires="v">
-                <p:oleObj spid="_x0000_s27941" name="Formula" r:id="rId1" imgW="733425" imgH="904875" progId="Equation.Ribbit">
+                <p:oleObj name="Formula" r:id="rId2" imgW="97920" imgH="120960" progId="Equation.Ribbit">
                   <p:embed/>
                 </p:oleObj>
               </mc:Choice>
               <mc:Fallback>
-                <p:oleObj name="Formula" r:id="rId1" imgW="733425" imgH="904875" progId="Equation.Ribbit">
+                <p:oleObj name="Formula" r:id="rId2" imgW="97920" imgH="120960" progId="Equation.Ribbit">
                   <p:embed/>
                   <p:pic>
                     <p:nvPicPr>
-                      <p:cNvPr id="0" name="对象 19"/>
+                      <p:cNvPr id="20" name="对象 19"/>
                       <p:cNvPicPr/>
                       <p:nvPr/>
                     </p:nvPicPr>
                     <p:blipFill>
-                      <a:blip r:embed="rId2"/>
+                      <a:blip r:embed="rId3"/>
                       <a:stretch>
                         <a:fillRect/>
                       </a:stretch>
@@ -11752,11 +12714,23 @@
       </p:graphicFrame>
       <p:graphicFrame>
         <p:nvGraphicFramePr>
-          <p:cNvPr id="6" name="对象 5"/>
+          <p:cNvPr id="6" name="对象 5">
+            <a:extLst>
+              <a:ext uri="{FF2B5EF4-FFF2-40B4-BE49-F238E27FC236}">
+                <a16:creationId xmlns:a16="http://schemas.microsoft.com/office/drawing/2014/main" id="{C4CC4F8E-5A4D-45BF-AC23-B7843D1D1383}"/>
+              </a:ext>
+            </a:extLst>
+          </p:cNvPr>
           <p:cNvGraphicFramePr>
             <a:graphicFrameLocks noChangeAspect="1"/>
           </p:cNvGraphicFramePr>
-          <p:nvPr/>
+          <p:nvPr>
+            <p:extLst>
+              <p:ext uri="{D42A27DB-BD31-4B8C-83A1-F6EECF244321}">
+                <p14:modId xmlns:p14="http://schemas.microsoft.com/office/powerpoint/2010/main" val="1116031666"/>
+              </p:ext>
+            </p:extLst>
+          </p:nvPr>
         </p:nvGraphicFramePr>
         <p:xfrm>
           <a:off x="4751388" y="2420888"/>
@@ -11766,21 +12740,21 @@
           <a:graphicData uri="http://schemas.openxmlformats.org/presentationml/2006/ole">
             <mc:AlternateContent xmlns:mc="http://schemas.openxmlformats.org/markup-compatibility/2006">
               <mc:Choice xmlns:v="urn:schemas-microsoft-com:vml" Requires="v">
-                <p:oleObj spid="_x0000_s2" name="Formula" r:id="rId3" imgW="3790950" imgH="1333500" progId="Equation.Ribbit">
+                <p:oleObj name="Formula" r:id="rId4" imgW="505800" imgH="177840" progId="Equation.Ribbit">
                   <p:embed/>
                 </p:oleObj>
               </mc:Choice>
               <mc:Fallback>
-                <p:oleObj name="Formula" r:id="rId3" imgW="3790950" imgH="1333500" progId="Equation.Ribbit">
+                <p:oleObj name="Formula" r:id="rId4" imgW="505800" imgH="177840" progId="Equation.Ribbit">
                   <p:embed/>
                   <p:pic>
                     <p:nvPicPr>
-                      <p:cNvPr id="0" name="对象 18"/>
+                      <p:cNvPr id="19" name="对象 18"/>
                       <p:cNvPicPr/>
                       <p:nvPr/>
                     </p:nvPicPr>
                     <p:blipFill>
-                      <a:blip r:embed="rId4"/>
+                      <a:blip r:embed="rId5"/>
                       <a:stretch>
                         <a:fillRect/>
                       </a:stretch>
@@ -11803,11 +12777,23 @@
       </p:graphicFrame>
       <p:graphicFrame>
         <p:nvGraphicFramePr>
-          <p:cNvPr id="7" name="对象 6"/>
+          <p:cNvPr id="7" name="对象 6">
+            <a:extLst>
+              <a:ext uri="{FF2B5EF4-FFF2-40B4-BE49-F238E27FC236}">
+                <a16:creationId xmlns:a16="http://schemas.microsoft.com/office/drawing/2014/main" id="{0B0D8C4E-DDC4-4F7D-B916-19B13F95D747}"/>
+              </a:ext>
+            </a:extLst>
+          </p:cNvPr>
           <p:cNvGraphicFramePr>
             <a:graphicFrameLocks noChangeAspect="1"/>
           </p:cNvGraphicFramePr>
-          <p:nvPr/>
+          <p:nvPr>
+            <p:extLst>
+              <p:ext uri="{D42A27DB-BD31-4B8C-83A1-F6EECF244321}">
+                <p14:modId xmlns:p14="http://schemas.microsoft.com/office/powerpoint/2010/main" val="424410512"/>
+              </p:ext>
+            </p:extLst>
+          </p:nvPr>
         </p:nvGraphicFramePr>
         <p:xfrm>
           <a:off x="6732240" y="2503390"/>
@@ -11817,21 +12803,21 @@
           <a:graphicData uri="http://schemas.openxmlformats.org/presentationml/2006/ole">
             <mc:AlternateContent xmlns:mc="http://schemas.openxmlformats.org/markup-compatibility/2006">
               <mc:Choice xmlns:v="urn:schemas-microsoft-com:vml" Requires="v">
-                <p:oleObj spid="_x0000_s3" name="Formula" r:id="rId5" imgW="533400" imgH="895350" progId="Equation.Ribbit">
+                <p:oleObj name="Formula" r:id="rId6" imgW="71280" imgH="119520" progId="Equation.Ribbit">
                   <p:embed/>
                 </p:oleObj>
               </mc:Choice>
               <mc:Fallback>
-                <p:oleObj name="Formula" r:id="rId5" imgW="533400" imgH="895350" progId="Equation.Ribbit">
+                <p:oleObj name="Formula" r:id="rId6" imgW="71280" imgH="119520" progId="Equation.Ribbit">
                   <p:embed/>
                   <p:pic>
                     <p:nvPicPr>
-                      <p:cNvPr id="0" name="对象 20"/>
+                      <p:cNvPr id="21" name="对象 20"/>
                       <p:cNvPicPr/>
                       <p:nvPr/>
                     </p:nvPicPr>
                     <p:blipFill>
-                      <a:blip r:embed="rId6"/>
+                      <a:blip r:embed="rId7"/>
                       <a:stretch>
                         <a:fillRect/>
                       </a:stretch>
@@ -11854,11 +12840,23 @@
       </p:graphicFrame>
       <p:graphicFrame>
         <p:nvGraphicFramePr>
-          <p:cNvPr id="8" name="对象 7"/>
+          <p:cNvPr id="8" name="对象 7">
+            <a:extLst>
+              <a:ext uri="{FF2B5EF4-FFF2-40B4-BE49-F238E27FC236}">
+                <a16:creationId xmlns:a16="http://schemas.microsoft.com/office/drawing/2014/main" id="{EFE116A0-F2A1-4DE6-B85E-81F3C9035903}"/>
+              </a:ext>
+            </a:extLst>
+          </p:cNvPr>
           <p:cNvGraphicFramePr>
             <a:graphicFrameLocks noChangeAspect="1"/>
           </p:cNvGraphicFramePr>
-          <p:nvPr/>
+          <p:nvPr>
+            <p:extLst>
+              <p:ext uri="{D42A27DB-BD31-4B8C-83A1-F6EECF244321}">
+                <p14:modId xmlns:p14="http://schemas.microsoft.com/office/powerpoint/2010/main" val="1709188973"/>
+              </p:ext>
+            </p:extLst>
+          </p:nvPr>
         </p:nvGraphicFramePr>
         <p:xfrm>
           <a:off x="4118009" y="3501008"/>
@@ -11868,21 +12866,21 @@
           <a:graphicData uri="http://schemas.openxmlformats.org/presentationml/2006/ole">
             <mc:AlternateContent xmlns:mc="http://schemas.openxmlformats.org/markup-compatibility/2006">
               <mc:Choice xmlns:v="urn:schemas-microsoft-com:vml" Requires="v">
-                <p:oleObj spid="_x0000_s4" name="Formula" r:id="rId7" imgW="3333750" imgH="1323975" progId="Equation.Ribbit">
+                <p:oleObj name="Formula" r:id="rId8" imgW="444600" imgH="176760" progId="Equation.Ribbit">
                   <p:embed/>
                 </p:oleObj>
               </mc:Choice>
               <mc:Fallback>
-                <p:oleObj name="Formula" r:id="rId7" imgW="3333750" imgH="1323975" progId="Equation.Ribbit">
+                <p:oleObj name="Formula" r:id="rId8" imgW="444600" imgH="176760" progId="Equation.Ribbit">
                   <p:embed/>
                   <p:pic>
                     <p:nvPicPr>
-                      <p:cNvPr id="0" name="对象 21"/>
+                      <p:cNvPr id="22" name="对象 21"/>
                       <p:cNvPicPr/>
                       <p:nvPr/>
                     </p:nvPicPr>
                     <p:blipFill>
-                      <a:blip r:embed="rId8"/>
+                      <a:blip r:embed="rId9"/>
                       <a:stretch>
                         <a:fillRect/>
                       </a:stretch>
@@ -11905,11 +12903,23 @@
       </p:graphicFrame>
       <p:graphicFrame>
         <p:nvGraphicFramePr>
-          <p:cNvPr id="9" name="对象 8"/>
+          <p:cNvPr id="9" name="对象 8">
+            <a:extLst>
+              <a:ext uri="{FF2B5EF4-FFF2-40B4-BE49-F238E27FC236}">
+                <a16:creationId xmlns:a16="http://schemas.microsoft.com/office/drawing/2014/main" id="{D552B986-D18F-4D39-92B1-1D7EDB8887E2}"/>
+              </a:ext>
+            </a:extLst>
+          </p:cNvPr>
           <p:cNvGraphicFramePr>
             <a:graphicFrameLocks noChangeAspect="1"/>
           </p:cNvGraphicFramePr>
-          <p:nvPr/>
+          <p:nvPr>
+            <p:extLst>
+              <p:ext uri="{D42A27DB-BD31-4B8C-83A1-F6EECF244321}">
+                <p14:modId xmlns:p14="http://schemas.microsoft.com/office/powerpoint/2010/main" val="2823164089"/>
+              </p:ext>
+            </p:extLst>
+          </p:nvPr>
         </p:nvGraphicFramePr>
         <p:xfrm>
           <a:off x="7452320" y="3501008"/>
@@ -11919,21 +12929,21 @@
           <a:graphicData uri="http://schemas.openxmlformats.org/presentationml/2006/ole">
             <mc:AlternateContent xmlns:mc="http://schemas.openxmlformats.org/markup-compatibility/2006">
               <mc:Choice xmlns:v="urn:schemas-microsoft-com:vml" Requires="v">
-                <p:oleObj spid="_x0000_s10" name="Formula" r:id="rId9" imgW="3790950" imgH="1333500" progId="Equation.Ribbit">
+                <p:oleObj name="Formula" r:id="rId4" imgW="505800" imgH="177840" progId="Equation.Ribbit">
                   <p:embed/>
                 </p:oleObj>
               </mc:Choice>
               <mc:Fallback>
-                <p:oleObj name="Formula" r:id="rId9" imgW="3790950" imgH="1333500" progId="Equation.Ribbit">
+                <p:oleObj name="Formula" r:id="rId4" imgW="505800" imgH="177840" progId="Equation.Ribbit">
                   <p:embed/>
                   <p:pic>
                     <p:nvPicPr>
-                      <p:cNvPr id="0" name="对象 22"/>
+                      <p:cNvPr id="23" name="对象 22"/>
                       <p:cNvPicPr/>
                       <p:nvPr/>
                     </p:nvPicPr>
                     <p:blipFill>
-                      <a:blip r:embed="rId4"/>
+                      <a:blip r:embed="rId5"/>
                       <a:stretch>
                         <a:fillRect/>
                       </a:stretch>
@@ -11956,11 +12966,23 @@
       </p:graphicFrame>
       <p:graphicFrame>
         <p:nvGraphicFramePr>
-          <p:cNvPr id="11" name="对象 10"/>
+          <p:cNvPr id="10" name="对象 9">
+            <a:extLst>
+              <a:ext uri="{FF2B5EF4-FFF2-40B4-BE49-F238E27FC236}">
+                <a16:creationId xmlns:a16="http://schemas.microsoft.com/office/drawing/2014/main" id="{531842E4-5311-4E3F-A0E5-91D5ABDAD8B3}"/>
+              </a:ext>
+            </a:extLst>
+          </p:cNvPr>
           <p:cNvGraphicFramePr>
             <a:graphicFrameLocks noChangeAspect="1"/>
           </p:cNvGraphicFramePr>
-          <p:nvPr/>
+          <p:nvPr>
+            <p:extLst>
+              <p:ext uri="{D42A27DB-BD31-4B8C-83A1-F6EECF244321}">
+                <p14:modId xmlns:p14="http://schemas.microsoft.com/office/powerpoint/2010/main" val="3861568209"/>
+              </p:ext>
+            </p:extLst>
+          </p:nvPr>
         </p:nvGraphicFramePr>
         <p:xfrm>
           <a:off x="3635896" y="3936551"/>
@@ -11970,16 +12992,16 @@
           <a:graphicData uri="http://schemas.openxmlformats.org/presentationml/2006/ole">
             <mc:AlternateContent xmlns:mc="http://schemas.openxmlformats.org/markup-compatibility/2006">
               <mc:Choice xmlns:v="urn:schemas-microsoft-com:vml" Requires="v">
-                <p:oleObj spid="_x0000_s12" name="Formula" r:id="rId10" imgW="11572875" imgH="2867025" progId="Equation.Ribbit">
+                <p:oleObj name="Formula" r:id="rId10" imgW="1543320" imgH="382320" progId="Equation.Ribbit">
                   <p:embed/>
                 </p:oleObj>
               </mc:Choice>
               <mc:Fallback>
-                <p:oleObj name="Formula" r:id="rId10" imgW="11572875" imgH="2867025" progId="Equation.Ribbit">
+                <p:oleObj name="Formula" r:id="rId10" imgW="1543320" imgH="382320" progId="Equation.Ribbit">
                   <p:embed/>
                   <p:pic>
                     <p:nvPicPr>
-                      <p:cNvPr id="0" name="对象 20"/>
+                      <p:cNvPr id="21" name="对象 20"/>
                       <p:cNvPicPr/>
                       <p:nvPr/>
                     </p:nvPicPr>
@@ -12007,7 +13029,7 @@
       </p:graphicFrame>
       <p:pic>
         <p:nvPicPr>
-          <p:cNvPr id="13" name="图片 12"/>
+          <p:cNvPr id="2" name="图片 1"/>
           <p:cNvPicPr>
             <a:picLocks noChangeAspect="1"/>
           </p:cNvPicPr>
@@ -12030,6 +13052,11 @@
         </p:spPr>
       </p:pic>
     </p:spTree>
+    <p:extLst>
+      <p:ext uri="{BB962C8B-B14F-4D97-AF65-F5344CB8AC3E}">
+        <p14:creationId xmlns:p14="http://schemas.microsoft.com/office/powerpoint/2010/main" val="1275269740"/>
+      </p:ext>
+    </p:extLst>
   </p:cSld>
   <p:clrMapOvr>
     <a:masterClrMapping/>
@@ -12044,13 +13071,13 @@
               <p:cTn id="2" dur="indefinite" nodeType="mainSeq">
                 <p:childTnLst>
                   <p:par>
-                    <p:cTn id="3" fill="hold">
+                    <p:cTn id="3" fill="hold" nodeType="clickPar">
                       <p:stCondLst>
                         <p:cond delay="indefinite"/>
                       </p:stCondLst>
                       <p:childTnLst>
                         <p:par>
-                          <p:cTn id="4" fill="hold">
+                          <p:cTn id="4" fill="hold" nodeType="withGroup">
                             <p:stCondLst>
                               <p:cond delay="0"/>
                             </p:stCondLst>
@@ -12151,7 +13178,13 @@
       </p:grpSpPr>
       <p:sp>
         <p:nvSpPr>
-          <p:cNvPr id="3" name="内容占位符 2"/>
+          <p:cNvPr id="3" name="内容占位符 2">
+            <a:extLst>
+              <a:ext uri="{FF2B5EF4-FFF2-40B4-BE49-F238E27FC236}">
+                <a16:creationId xmlns:a16="http://schemas.microsoft.com/office/drawing/2014/main" id="{A303477E-A237-4894-86ED-EA77CDD73745}"/>
+              </a:ext>
+            </a:extLst>
+          </p:cNvPr>
           <p:cNvSpPr>
             <a:spLocks noGrp="1"/>
           </p:cNvSpPr>
@@ -12221,10 +13254,6 @@
               </a:rPr>
               <a:t>。假定来了一位新患者，其化验结果为阳性。利用贝叶斯法则计算该患者患此疾病的概率有多大？</a:t>
             </a:r>
-            <a:endParaRPr lang="zh-CN" altLang="en-US" sz="2400" dirty="0">
-              <a:latin typeface="楷体" panose="02010609060101010101" pitchFamily="49" charset="-122"/>
-              <a:ea typeface="楷体" panose="02010609060101010101" pitchFamily="49" charset="-122"/>
-            </a:endParaRPr>
           </a:p>
         </p:txBody>
       </p:sp>
@@ -12237,7 +13266,7 @@
           <p:nvPr/>
         </p:nvPicPr>
         <p:blipFill>
-          <a:blip r:embed="rId1"/>
+          <a:blip r:embed="rId2"/>
           <a:stretch>
             <a:fillRect/>
           </a:stretch>
@@ -12253,6 +13282,11 @@
         </p:spPr>
       </p:pic>
     </p:spTree>
+    <p:extLst>
+      <p:ext uri="{BB962C8B-B14F-4D97-AF65-F5344CB8AC3E}">
+        <p14:creationId xmlns:p14="http://schemas.microsoft.com/office/powerpoint/2010/main" val="826215254"/>
+      </p:ext>
+    </p:extLst>
   </p:cSld>
   <p:clrMapOvr>
     <a:masterClrMapping/>
@@ -12361,7 +13395,7 @@
           <p:nvPr/>
         </p:nvPicPr>
         <p:blipFill>
-          <a:blip r:embed="rId1"/>
+          <a:blip r:embed="rId2"/>
           <a:stretch>
             <a:fillRect/>
           </a:stretch>
@@ -12378,14 +13412,20 @@
       </p:pic>
       <p:pic>
         <p:nvPicPr>
-          <p:cNvPr id="6" name="图片 5"/>
+          <p:cNvPr id="6" name="图片 5">
+            <a:extLst>
+              <a:ext uri="{FF2B5EF4-FFF2-40B4-BE49-F238E27FC236}">
+                <a16:creationId xmlns:a16="http://schemas.microsoft.com/office/drawing/2014/main" id="{A719B10E-3693-46FD-BE07-C955AAC15438}"/>
+              </a:ext>
+            </a:extLst>
+          </p:cNvPr>
           <p:cNvPicPr>
             <a:picLocks noChangeAspect="1"/>
           </p:cNvPicPr>
           <p:nvPr/>
         </p:nvPicPr>
         <p:blipFill>
-          <a:blip r:embed="rId2"/>
+          <a:blip r:embed="rId3"/>
           <a:stretch>
             <a:fillRect/>
           </a:stretch>
@@ -12409,7 +13449,7 @@
           <p:nvPr/>
         </p:nvPicPr>
         <p:blipFill>
-          <a:blip r:embed="rId3"/>
+          <a:blip r:embed="rId4"/>
           <a:stretch>
             <a:fillRect/>
           </a:stretch>
@@ -12430,7 +13470,13 @@
           <p:cNvGraphicFramePr>
             <a:graphicFrameLocks noChangeAspect="1"/>
           </p:cNvGraphicFramePr>
-          <p:nvPr/>
+          <p:nvPr>
+            <p:extLst>
+              <p:ext uri="{D42A27DB-BD31-4B8C-83A1-F6EECF244321}">
+                <p14:modId xmlns:p14="http://schemas.microsoft.com/office/powerpoint/2010/main" val="3933501538"/>
+              </p:ext>
+            </p:extLst>
+          </p:nvPr>
         </p:nvGraphicFramePr>
         <p:xfrm>
           <a:off x="971600" y="4460395"/>
@@ -12440,21 +13486,21 @@
           <a:graphicData uri="http://schemas.openxmlformats.org/presentationml/2006/ole">
             <mc:AlternateContent xmlns:mc="http://schemas.openxmlformats.org/markup-compatibility/2006">
               <mc:Choice xmlns:v="urn:schemas-microsoft-com:vml" Requires="v">
-                <p:oleObj spid="_x0000_s27941" name="Formula" r:id="rId4" imgW="16297275" imgH="3476625" progId="Equation.Ribbit">
+                <p:oleObj name="Formula" r:id="rId5" imgW="2173320" imgH="463680" progId="Equation.Ribbit">
                   <p:embed/>
                 </p:oleObj>
               </mc:Choice>
               <mc:Fallback>
-                <p:oleObj name="Formula" r:id="rId4" imgW="16297275" imgH="3476625" progId="Equation.Ribbit">
+                <p:oleObj name="Formula" r:id="rId5" imgW="2173320" imgH="463680" progId="Equation.Ribbit">
                   <p:embed/>
                   <p:pic>
                     <p:nvPicPr>
-                      <p:cNvPr id="0" name="对象 9"/>
+                      <p:cNvPr id="10" name="对象 9"/>
                       <p:cNvPicPr/>
                       <p:nvPr/>
                     </p:nvPicPr>
                     <p:blipFill>
-                      <a:blip r:embed="rId5"/>
+                      <a:blip r:embed="rId6"/>
                       <a:stretch>
                         <a:fillRect/>
                       </a:stretch>
@@ -12484,11 +13530,9 @@
           <p:nvPr/>
         </p:nvPicPr>
         <p:blipFill rotWithShape="1">
-          <a:blip r:embed="rId6"/>
+          <a:blip r:embed="rId7"/>
           <a:srcRect t="1" b="45990"/>
-          <a:stretch>
-            <a:fillRect/>
-          </a:stretch>
+          <a:stretch/>
         </p:blipFill>
         <p:spPr>
           <a:xfrm>
@@ -12502,18 +13546,22 @@
       </p:pic>
       <p:pic>
         <p:nvPicPr>
-          <p:cNvPr id="10" name="图片 9"/>
+          <p:cNvPr id="10" name="图片 9">
+            <a:extLst>
+              <a:ext uri="{FF2B5EF4-FFF2-40B4-BE49-F238E27FC236}">
+                <a16:creationId xmlns:a16="http://schemas.microsoft.com/office/drawing/2014/main" id="{8C38D148-C6D1-421E-B652-168895F9FFB2}"/>
+              </a:ext>
+            </a:extLst>
+          </p:cNvPr>
           <p:cNvPicPr>
             <a:picLocks noChangeAspect="1"/>
           </p:cNvPicPr>
           <p:nvPr/>
         </p:nvPicPr>
         <p:blipFill rotWithShape="1">
-          <a:blip r:embed="rId6"/>
+          <a:blip r:embed="rId7"/>
           <a:srcRect t="54466"/>
-          <a:stretch>
-            <a:fillRect/>
-          </a:stretch>
+          <a:stretch/>
         </p:blipFill>
         <p:spPr>
           <a:xfrm>
@@ -12534,7 +13582,7 @@
           <p:nvPr/>
         </p:nvPicPr>
         <p:blipFill>
-          <a:blip r:embed="rId7"/>
+          <a:blip r:embed="rId8"/>
           <a:stretch>
             <a:fillRect/>
           </a:stretch>
@@ -12550,6 +13598,11 @@
         </p:spPr>
       </p:pic>
     </p:spTree>
+    <p:extLst>
+      <p:ext uri="{BB962C8B-B14F-4D97-AF65-F5344CB8AC3E}">
+        <p14:creationId xmlns:p14="http://schemas.microsoft.com/office/powerpoint/2010/main" val="3747657783"/>
+      </p:ext>
+    </p:extLst>
   </p:cSld>
   <p:clrMapOvr>
     <a:masterClrMapping/>
@@ -12786,7 +13839,13 @@
       </p:grpSpPr>
       <p:sp>
         <p:nvSpPr>
-          <p:cNvPr id="18434" name="灯片编号占位符 5"/>
+          <p:cNvPr id="18434" name="灯片编号占位符 5">
+            <a:extLst>
+              <a:ext uri="{FF2B5EF4-FFF2-40B4-BE49-F238E27FC236}">
+                <a16:creationId xmlns:a16="http://schemas.microsoft.com/office/drawing/2014/main" id="{CBBD9809-2CC4-42C3-B564-FAC6896E7580}"/>
+              </a:ext>
+            </a:extLst>
+          </p:cNvPr>
           <p:cNvSpPr>
             <a:spLocks noGrp="1"/>
           </p:cNvSpPr>
@@ -12973,6 +14032,7 @@
               <a:buSzTx/>
               <a:buFontTx/>
               <a:buNone/>
+              <a:tabLst/>
               <a:defRPr/>
             </a:pPr>
             <a:fld id="{F12A9DEA-C3F6-4401-A5BF-3745117890AB}" type="slidenum">
@@ -12990,6 +14050,24 @@
                 <a:ea typeface="宋体" panose="02010600030101010101" pitchFamily="2" charset="-122"/>
                 <a:cs typeface="+mn-cs"/>
               </a:rPr>
+              <a:pPr marL="0" marR="0" lvl="0" indent="0" algn="r" defTabSz="914400" rtl="0" eaLnBrk="1" fontAlgn="base" latinLnBrk="0" hangingPunct="1">
+                <a:lnSpc>
+                  <a:spcPct val="100000"/>
+                </a:lnSpc>
+                <a:spcBef>
+                  <a:spcPct val="0"/>
+                </a:spcBef>
+                <a:spcAft>
+                  <a:spcPct val="0"/>
+                </a:spcAft>
+                <a:buClrTx/>
+                <a:buSzTx/>
+                <a:buFontTx/>
+                <a:buNone/>
+                <a:tabLst/>
+                <a:defRPr/>
+              </a:pPr>
+              <a:t>16</a:t>
             </a:fld>
             <a:endParaRPr kumimoji="1" lang="en-US" altLang="zh-CN" sz="1400" b="0" i="0" u="none" strike="noStrike" kern="1200" cap="none" spc="0" normalizeH="0" baseline="0" noProof="0">
               <a:ln>
@@ -13010,7 +14088,13 @@
       </p:sp>
       <p:sp>
         <p:nvSpPr>
-          <p:cNvPr id="887811" name="Rectangle 3"/>
+          <p:cNvPr id="887811" name="Rectangle 3">
+            <a:extLst>
+              <a:ext uri="{FF2B5EF4-FFF2-40B4-BE49-F238E27FC236}">
+                <a16:creationId xmlns:a16="http://schemas.microsoft.com/office/drawing/2014/main" id="{E67925BF-BD9D-4849-975B-B00461AA9122}"/>
+              </a:ext>
+            </a:extLst>
+          </p:cNvPr>
           <p:cNvSpPr>
             <a:spLocks noGrp="1"/>
           </p:cNvSpPr>
@@ -13397,11 +14481,6 @@
               </a:rPr>
               <a:t>数据样本扰动、输入属性扰动、输出表示扰动、算法参数扰动</a:t>
             </a:r>
-            <a:endParaRPr lang="zh-CN" altLang="en-US" sz="2400" dirty="0">
-              <a:latin typeface="Times New Roman" panose="02020603050405020304" pitchFamily="18" charset="0"/>
-              <a:ea typeface="楷体" panose="02010609060101010101" pitchFamily="49" charset="-122"/>
-              <a:cs typeface="Times New Roman" panose="02020603050405020304" pitchFamily="18" charset="0"/>
-            </a:endParaRPr>
           </a:p>
           <a:p>
             <a:pPr marL="457200" lvl="1" indent="0" eaLnBrk="1" hangingPunct="1">
@@ -13484,7 +14563,13 @@
       </p:sp>
       <p:sp>
         <p:nvSpPr>
-          <p:cNvPr id="18436" name="Text Box 4"/>
+          <p:cNvPr id="18436" name="Text Box 4">
+            <a:extLst>
+              <a:ext uri="{FF2B5EF4-FFF2-40B4-BE49-F238E27FC236}">
+                <a16:creationId xmlns:a16="http://schemas.microsoft.com/office/drawing/2014/main" id="{EB81EA09-BA58-4C02-A7E1-E64004DF3351}"/>
+              </a:ext>
+            </a:extLst>
+          </p:cNvPr>
           <p:cNvSpPr txBox="1">
             <a:spLocks noChangeArrowheads="1"/>
           </p:cNvSpPr>
@@ -13691,6 +14776,7 @@
               <a:buSzTx/>
               <a:buFontTx/>
               <a:buNone/>
+              <a:tabLst/>
               <a:defRPr/>
             </a:pPr>
             <a:r>
@@ -13744,24 +14830,15 @@
               </a:rPr>
               <a:t>章：集成学习</a:t>
             </a:r>
-            <a:endParaRPr kumimoji="1" lang="zh-CN" altLang="en-US" sz="3200" b="1" i="0" u="none" strike="noStrike" kern="1200" cap="none" spc="0" normalizeH="0" baseline="0" noProof="0" dirty="0">
-              <a:ln>
-                <a:noFill/>
-              </a:ln>
-              <a:solidFill>
-                <a:prstClr val="black"/>
-              </a:solidFill>
-              <a:effectLst/>
-              <a:uLnTx/>
-              <a:uFillTx/>
-              <a:latin typeface="黑体" panose="02010609060101010101" pitchFamily="49" charset="-122"/>
-              <a:ea typeface="黑体" panose="02010609060101010101" pitchFamily="49" charset="-122"/>
-              <a:cs typeface="楷体_GB2312"/>
-            </a:endParaRPr>
           </a:p>
         </p:txBody>
       </p:sp>
     </p:spTree>
+    <p:extLst>
+      <p:ext uri="{BB962C8B-B14F-4D97-AF65-F5344CB8AC3E}">
+        <p14:creationId xmlns:p14="http://schemas.microsoft.com/office/powerpoint/2010/main" val="1561591582"/>
+      </p:ext>
+    </p:extLst>
   </p:cSld>
   <p:clrMapOvr>
     <a:masterClrMapping/>
@@ -13776,13 +14853,13 @@
               <p:cTn id="2" dur="indefinite" nodeType="mainSeq">
                 <p:childTnLst>
                   <p:par>
-                    <p:cTn id="3" fill="hold">
+                    <p:cTn id="3" fill="hold" nodeType="clickPar">
                       <p:stCondLst>
                         <p:cond delay="indefinite"/>
                       </p:stCondLst>
                       <p:childTnLst>
                         <p:par>
-                          <p:cTn id="4" fill="hold">
+                          <p:cTn id="4" fill="hold" nodeType="withGroup">
                             <p:stCondLst>
                               <p:cond delay="0"/>
                             </p:stCondLst>
@@ -13890,7 +14967,7 @@
           <p:nvPr/>
         </p:nvPicPr>
         <p:blipFill>
-          <a:blip r:embed="rId1"/>
+          <a:blip r:embed="rId2"/>
           <a:stretch>
             <a:fillRect/>
           </a:stretch>
@@ -13953,7 +15030,7 @@
           <p:nvPr/>
         </p:nvPicPr>
         <p:blipFill>
-          <a:blip r:embed="rId2"/>
+          <a:blip r:embed="rId3"/>
           <a:stretch>
             <a:fillRect/>
           </a:stretch>
@@ -14008,6 +15085,11 @@
         </p:txBody>
       </p:sp>
     </p:spTree>
+    <p:extLst>
+      <p:ext uri="{BB962C8B-B14F-4D97-AF65-F5344CB8AC3E}">
+        <p14:creationId xmlns:p14="http://schemas.microsoft.com/office/powerpoint/2010/main" val="1307462400"/>
+      </p:ext>
+    </p:extLst>
   </p:cSld>
   <p:clrMapOvr>
     <a:masterClrMapping/>
@@ -14034,7 +15116,13 @@
       </p:grpSpPr>
       <p:sp>
         <p:nvSpPr>
-          <p:cNvPr id="18434" name="灯片编号占位符 5"/>
+          <p:cNvPr id="18434" name="灯片编号占位符 5">
+            <a:extLst>
+              <a:ext uri="{FF2B5EF4-FFF2-40B4-BE49-F238E27FC236}">
+                <a16:creationId xmlns:a16="http://schemas.microsoft.com/office/drawing/2014/main" id="{CBBD9809-2CC4-42C3-B564-FAC6896E7580}"/>
+              </a:ext>
+            </a:extLst>
+          </p:cNvPr>
           <p:cNvSpPr>
             <a:spLocks noGrp="1"/>
           </p:cNvSpPr>
@@ -14221,6 +15309,7 @@
               <a:buSzTx/>
               <a:buFontTx/>
               <a:buNone/>
+              <a:tabLst/>
               <a:defRPr/>
             </a:pPr>
             <a:fld id="{F12A9DEA-C3F6-4401-A5BF-3745117890AB}" type="slidenum">
@@ -14238,6 +15327,24 @@
                 <a:ea typeface="宋体" panose="02010600030101010101" pitchFamily="2" charset="-122"/>
                 <a:cs typeface="+mn-cs"/>
               </a:rPr>
+              <a:pPr marL="0" marR="0" lvl="0" indent="0" algn="r" defTabSz="914400" rtl="0" eaLnBrk="1" fontAlgn="base" latinLnBrk="0" hangingPunct="1">
+                <a:lnSpc>
+                  <a:spcPct val="100000"/>
+                </a:lnSpc>
+                <a:spcBef>
+                  <a:spcPct val="0"/>
+                </a:spcBef>
+                <a:spcAft>
+                  <a:spcPct val="0"/>
+                </a:spcAft>
+                <a:buClrTx/>
+                <a:buSzTx/>
+                <a:buFontTx/>
+                <a:buNone/>
+                <a:tabLst/>
+                <a:defRPr/>
+              </a:pPr>
+              <a:t>18</a:t>
             </a:fld>
             <a:endParaRPr kumimoji="1" lang="en-US" altLang="zh-CN" sz="1400" b="0" i="0" u="none" strike="noStrike" kern="1200" cap="none" spc="0" normalizeH="0" baseline="0" noProof="0">
               <a:ln>
@@ -14258,7 +15365,13 @@
       </p:sp>
       <p:sp>
         <p:nvSpPr>
-          <p:cNvPr id="887811" name="Rectangle 3"/>
+          <p:cNvPr id="887811" name="Rectangle 3">
+            <a:extLst>
+              <a:ext uri="{FF2B5EF4-FFF2-40B4-BE49-F238E27FC236}">
+                <a16:creationId xmlns:a16="http://schemas.microsoft.com/office/drawing/2014/main" id="{E67925BF-BD9D-4849-975B-B00461AA9122}"/>
+              </a:ext>
+            </a:extLst>
+          </p:cNvPr>
           <p:cNvSpPr>
             <a:spLocks noGrp="1"/>
           </p:cNvSpPr>
@@ -14457,11 +15570,6 @@
               </a:rPr>
               <a:t>DBSCAN</a:t>
             </a:r>
-            <a:endParaRPr lang="en-US" altLang="zh-CN" sz="2800" dirty="0">
-              <a:latin typeface="Times New Roman" panose="02020603050405020304" pitchFamily="18" charset="0"/>
-              <a:ea typeface="楷体" panose="02010609060101010101" pitchFamily="49" charset="-122"/>
-              <a:cs typeface="Times New Roman" panose="02020603050405020304" pitchFamily="18" charset="0"/>
-            </a:endParaRPr>
           </a:p>
           <a:p>
             <a:pPr eaLnBrk="1" hangingPunct="1">
@@ -14621,7 +15729,13 @@
       </p:sp>
       <p:sp>
         <p:nvSpPr>
-          <p:cNvPr id="18436" name="Text Box 4"/>
+          <p:cNvPr id="18436" name="Text Box 4">
+            <a:extLst>
+              <a:ext uri="{FF2B5EF4-FFF2-40B4-BE49-F238E27FC236}">
+                <a16:creationId xmlns:a16="http://schemas.microsoft.com/office/drawing/2014/main" id="{EB81EA09-BA58-4C02-A7E1-E64004DF3351}"/>
+              </a:ext>
+            </a:extLst>
+          </p:cNvPr>
           <p:cNvSpPr txBox="1">
             <a:spLocks noChangeArrowheads="1"/>
           </p:cNvSpPr>
@@ -14828,6 +15942,7 @@
               <a:buSzTx/>
               <a:buFontTx/>
               <a:buNone/>
+              <a:tabLst/>
               <a:defRPr/>
             </a:pPr>
             <a:r>
@@ -14881,24 +15996,15 @@
               </a:rPr>
               <a:t>章：聚类</a:t>
             </a:r>
-            <a:endParaRPr kumimoji="1" lang="zh-CN" altLang="en-US" sz="3200" b="1" i="0" u="none" strike="noStrike" kern="1200" cap="none" spc="0" normalizeH="0" baseline="0" noProof="0" dirty="0">
-              <a:ln>
-                <a:noFill/>
-              </a:ln>
-              <a:solidFill>
-                <a:prstClr val="black"/>
-              </a:solidFill>
-              <a:effectLst/>
-              <a:uLnTx/>
-              <a:uFillTx/>
-              <a:latin typeface="黑体" panose="02010609060101010101" pitchFamily="49" charset="-122"/>
-              <a:ea typeface="黑体" panose="02010609060101010101" pitchFamily="49" charset="-122"/>
-              <a:cs typeface="楷体_GB2312"/>
-            </a:endParaRPr>
           </a:p>
         </p:txBody>
       </p:sp>
     </p:spTree>
+    <p:extLst>
+      <p:ext uri="{BB962C8B-B14F-4D97-AF65-F5344CB8AC3E}">
+        <p14:creationId xmlns:p14="http://schemas.microsoft.com/office/powerpoint/2010/main" val="1993512533"/>
+      </p:ext>
+    </p:extLst>
   </p:cSld>
   <p:clrMapOvr>
     <a:masterClrMapping/>
@@ -14913,13 +16019,13 @@
               <p:cTn id="2" dur="indefinite" nodeType="mainSeq">
                 <p:childTnLst>
                   <p:par>
-                    <p:cTn id="3" fill="hold">
+                    <p:cTn id="3" fill="hold" nodeType="clickPar">
                       <p:stCondLst>
                         <p:cond delay="indefinite"/>
                       </p:stCondLst>
                       <p:childTnLst>
                         <p:par>
-                          <p:cTn id="4" fill="hold">
+                          <p:cTn id="4" fill="hold" nodeType="withGroup">
                             <p:stCondLst>
                               <p:cond delay="0"/>
                             </p:stCondLst>
@@ -15027,7 +16133,7 @@
           <p:nvPr/>
         </p:nvPicPr>
         <p:blipFill>
-          <a:blip r:embed="rId1" cstate="print"/>
+          <a:blip r:embed="rId2" cstate="print"/>
           <a:srcRect/>
           <a:stretch>
             <a:fillRect/>
@@ -15045,6 +16151,11 @@
         </p:spPr>
       </p:pic>
     </p:spTree>
+    <p:extLst>
+      <p:ext uri="{BB962C8B-B14F-4D97-AF65-F5344CB8AC3E}">
+        <p14:creationId xmlns:p14="http://schemas.microsoft.com/office/powerpoint/2010/main" val="1034560743"/>
+      </p:ext>
+    </p:extLst>
   </p:cSld>
   <p:clrMapOvr>
     <a:masterClrMapping/>
@@ -15071,7 +16182,13 @@
       </p:grpSpPr>
       <p:sp>
         <p:nvSpPr>
-          <p:cNvPr id="11266" name="灯片编号占位符 4"/>
+          <p:cNvPr id="11266" name="灯片编号占位符 4">
+            <a:extLst>
+              <a:ext uri="{FF2B5EF4-FFF2-40B4-BE49-F238E27FC236}">
+                <a16:creationId xmlns:a16="http://schemas.microsoft.com/office/drawing/2014/main" id="{D3A026C4-F7B3-455D-8409-EE800BAFF169}"/>
+              </a:ext>
+            </a:extLst>
+          </p:cNvPr>
           <p:cNvSpPr>
             <a:spLocks noGrp="1"/>
           </p:cNvSpPr>
@@ -15255,6 +16372,14 @@
               <a:rPr kumimoji="1" lang="en-US" altLang="zh-CN" sz="1400" smtClean="0">
                 <a:latin typeface="Times New Roman" panose="02020603050405020304" pitchFamily="18" charset="0"/>
               </a:rPr>
+              <a:pPr>
+                <a:spcBef>
+                  <a:spcPct val="0"/>
+                </a:spcBef>
+                <a:buFontTx/>
+                <a:buNone/>
+              </a:pPr>
+              <a:t>2</a:t>
             </a:fld>
             <a:endParaRPr kumimoji="1" lang="en-US" altLang="zh-CN" sz="1400">
               <a:latin typeface="Times New Roman" panose="02020603050405020304" pitchFamily="18" charset="0"/>
@@ -15264,7 +16389,13 @@
       </p:sp>
       <p:sp>
         <p:nvSpPr>
-          <p:cNvPr id="11267" name="Text Box 3"/>
+          <p:cNvPr id="11267" name="Text Box 3">
+            <a:extLst>
+              <a:ext uri="{FF2B5EF4-FFF2-40B4-BE49-F238E27FC236}">
+                <a16:creationId xmlns:a16="http://schemas.microsoft.com/office/drawing/2014/main" id="{A797628E-D641-41DC-8511-3686F1781188}"/>
+              </a:ext>
+            </a:extLst>
+          </p:cNvPr>
           <p:cNvSpPr txBox="1">
             <a:spLocks noChangeArrowheads="1"/>
           </p:cNvSpPr>
@@ -15483,7 +16614,13 @@
       </p:sp>
       <p:sp>
         <p:nvSpPr>
-          <p:cNvPr id="11268" name="Text Box 4"/>
+          <p:cNvPr id="11268" name="Text Box 4">
+            <a:extLst>
+              <a:ext uri="{FF2B5EF4-FFF2-40B4-BE49-F238E27FC236}">
+                <a16:creationId xmlns:a16="http://schemas.microsoft.com/office/drawing/2014/main" id="{DF0FB2B5-927B-4658-9A3C-3FAF765B2E43}"/>
+              </a:ext>
+            </a:extLst>
+          </p:cNvPr>
           <p:cNvSpPr txBox="1">
             <a:spLocks noChangeArrowheads="1"/>
           </p:cNvSpPr>
@@ -15693,10 +16830,6 @@
               </a:rPr>
               <a:t>成绩构成</a:t>
             </a:r>
-            <a:endParaRPr kumimoji="1" lang="zh-CN" altLang="en-US" sz="2800" b="1" dirty="0">
-              <a:latin typeface="楷体" panose="02010609060101010101" pitchFamily="49" charset="-122"/>
-              <a:ea typeface="楷体" panose="02010609060101010101" pitchFamily="49" charset="-122"/>
-            </a:endParaRPr>
           </a:p>
           <a:p>
             <a:pPr eaLnBrk="1" hangingPunct="1">
@@ -15894,11 +17027,23 @@
       </p:sp>
       <p:graphicFrame>
         <p:nvGraphicFramePr>
-          <p:cNvPr id="2" name="表格 1"/>
+          <p:cNvPr id="2" name="表格 1">
+            <a:extLst>
+              <a:ext uri="{FF2B5EF4-FFF2-40B4-BE49-F238E27FC236}">
+                <a16:creationId xmlns:a16="http://schemas.microsoft.com/office/drawing/2014/main" id="{F6E6ABA9-571D-4985-BA5B-A623CC43F9E5}"/>
+              </a:ext>
+            </a:extLst>
+          </p:cNvPr>
           <p:cNvGraphicFramePr>
             <a:graphicFrameLocks noGrp="1"/>
           </p:cNvGraphicFramePr>
-          <p:nvPr/>
+          <p:nvPr>
+            <p:extLst>
+              <p:ext uri="{D42A27DB-BD31-4B8C-83A1-F6EECF244321}">
+                <p14:modId xmlns:p14="http://schemas.microsoft.com/office/powerpoint/2010/main" val="2576040134"/>
+              </p:ext>
+            </p:extLst>
+          </p:nvPr>
         </p:nvGraphicFramePr>
         <p:xfrm>
           <a:off x="930275" y="1924050"/>
@@ -15911,9 +17056,27 @@
                 <a:tableStyleId>{5C22544A-7EE6-4342-B048-85BDC9FD1C3A}</a:tableStyleId>
               </a:tblPr>
               <a:tblGrid>
-                <a:gridCol w="2547428"/>
-                <a:gridCol w="2925800"/>
-                <a:gridCol w="2170584"/>
+                <a:gridCol w="2547428">
+                  <a:extLst>
+                    <a:ext uri="{9D8B030D-6E8A-4147-A177-3AD203B41FA5}">
+                      <a16:colId xmlns:a16="http://schemas.microsoft.com/office/drawing/2014/main" val="20000"/>
+                    </a:ext>
+                  </a:extLst>
+                </a:gridCol>
+                <a:gridCol w="2925800">
+                  <a:extLst>
+                    <a:ext uri="{9D8B030D-6E8A-4147-A177-3AD203B41FA5}">
+                      <a16:colId xmlns:a16="http://schemas.microsoft.com/office/drawing/2014/main" val="20001"/>
+                    </a:ext>
+                  </a:extLst>
+                </a:gridCol>
+                <a:gridCol w="2170584">
+                  <a:extLst>
+                    <a:ext uri="{9D8B030D-6E8A-4147-A177-3AD203B41FA5}">
+                      <a16:colId xmlns:a16="http://schemas.microsoft.com/office/drawing/2014/main" val="20002"/>
+                    </a:ext>
+                  </a:extLst>
+                </a:gridCol>
               </a:tblGrid>
               <a:tr h="600221">
                 <a:tc>
@@ -15937,11 +17100,6 @@
                         </a:rPr>
                         <a:t>考核方式</a:t>
                       </a:r>
-                      <a:endParaRPr lang="zh-CN" sz="2200" kern="100" dirty="0">
-                        <a:effectLst/>
-                        <a:latin typeface="楷体" panose="02010609060101010101" pitchFamily="49" charset="-122"/>
-                        <a:ea typeface="楷体" panose="02010609060101010101" pitchFamily="49" charset="-122"/>
-                      </a:endParaRPr>
                     </a:p>
                   </a:txBody>
                   <a:tcPr marL="68594" marR="68594" marT="0" marB="0"/>
@@ -15967,11 +17125,6 @@
                         </a:rPr>
                         <a:t>总分</a:t>
                       </a:r>
-                      <a:endParaRPr lang="zh-CN" sz="2200" kern="100" dirty="0">
-                        <a:effectLst/>
-                        <a:latin typeface="楷体" panose="02010609060101010101" pitchFamily="49" charset="-122"/>
-                        <a:ea typeface="楷体" panose="02010609060101010101" pitchFamily="49" charset="-122"/>
-                      </a:endParaRPr>
                     </a:p>
                   </a:txBody>
                   <a:tcPr marL="68594" marR="68594" marT="0" marB="0"/>
@@ -15997,15 +17150,15 @@
                         </a:rPr>
                         <a:t>占总成绩的比例</a:t>
                       </a:r>
-                      <a:endParaRPr lang="zh-CN" sz="2200" kern="100" dirty="0">
-                        <a:effectLst/>
-                        <a:latin typeface="楷体" panose="02010609060101010101" pitchFamily="49" charset="-122"/>
-                        <a:ea typeface="楷体" panose="02010609060101010101" pitchFamily="49" charset="-122"/>
-                      </a:endParaRPr>
                     </a:p>
                   </a:txBody>
                   <a:tcPr marL="68594" marR="68594" marT="0" marB="0"/>
                 </a:tc>
+                <a:extLst>
+                  <a:ext uri="{0D108BD9-81ED-4DB2-BD59-A6C34878D82A}">
+                    <a16:rowId xmlns:a16="http://schemas.microsoft.com/office/drawing/2014/main" val="10000"/>
+                  </a:ext>
+                </a:extLst>
               </a:tr>
               <a:tr h="637736">
                 <a:tc>
@@ -16047,11 +17200,6 @@
                         </a:rPr>
                         <a:t>课堂教学</a:t>
                       </a:r>
-                      <a:endParaRPr lang="zh-CN" sz="2200" kern="100">
-                        <a:effectLst/>
-                        <a:latin typeface="楷体" panose="02010609060101010101" pitchFamily="49" charset="-122"/>
-                        <a:ea typeface="楷体" panose="02010609060101010101" pitchFamily="49" charset="-122"/>
-                      </a:endParaRPr>
                     </a:p>
                   </a:txBody>
                   <a:tcPr marL="68594" marR="68594" marT="0" marB="0"/>
@@ -16087,12 +17235,6 @@
                         </a:rPr>
                         <a:t>分</a:t>
                       </a:r>
-                      <a:endParaRPr lang="zh-CN" sz="2200" kern="100" dirty="0">
-                        <a:effectLst/>
-                        <a:latin typeface="Times New Roman" panose="02020603050405020304" pitchFamily="18" charset="0"/>
-                        <a:ea typeface="楷体" panose="02010609060101010101" pitchFamily="49" charset="-122"/>
-                        <a:cs typeface="Times New Roman" panose="02020603050405020304" pitchFamily="18" charset="0"/>
-                      </a:endParaRPr>
                     </a:p>
                   </a:txBody>
                   <a:tcPr marL="68594" marR="68594" marT="0" marB="0"/>
@@ -16129,6 +17271,11 @@
                   </a:txBody>
                   <a:tcPr marL="68594" marR="68594" marT="0" marB="0"/>
                 </a:tc>
+                <a:extLst>
+                  <a:ext uri="{0D108BD9-81ED-4DB2-BD59-A6C34878D82A}">
+                    <a16:rowId xmlns:a16="http://schemas.microsoft.com/office/drawing/2014/main" val="10001"/>
+                  </a:ext>
+                </a:extLst>
               </a:tr>
               <a:tr h="600221">
                 <a:tc>
@@ -16150,6 +17297,7 @@
                         <a:buSzTx/>
                         <a:buFontTx/>
                         <a:buNone/>
+                        <a:tabLst/>
                         <a:defRPr/>
                       </a:pPr>
                       <a:r>
@@ -16285,6 +17433,11 @@
                   </a:txBody>
                   <a:tcPr marL="68594" marR="68594" marT="0" marB="0"/>
                 </a:tc>
+                <a:extLst>
+                  <a:ext uri="{0D108BD9-81ED-4DB2-BD59-A6C34878D82A}">
+                    <a16:rowId xmlns:a16="http://schemas.microsoft.com/office/drawing/2014/main" val="10002"/>
+                  </a:ext>
+                </a:extLst>
               </a:tr>
             </a:tbl>
           </a:graphicData>
@@ -16317,7 +17470,13 @@
       </p:grpSpPr>
       <p:sp>
         <p:nvSpPr>
-          <p:cNvPr id="2" name="标题 1"/>
+          <p:cNvPr id="2" name="标题 1">
+            <a:extLst>
+              <a:ext uri="{FF2B5EF4-FFF2-40B4-BE49-F238E27FC236}">
+                <a16:creationId xmlns:a16="http://schemas.microsoft.com/office/drawing/2014/main" id="{0764E2C8-B25A-CA62-6AF3-8E1229BB4744}"/>
+              </a:ext>
+            </a:extLst>
+          </p:cNvPr>
           <p:cNvSpPr>
             <a:spLocks noGrp="1"/>
           </p:cNvSpPr>
@@ -16345,6 +17504,7 @@
               <a:spcAft>
                 <a:spcPct val="0"/>
               </a:spcAft>
+              <a:tabLst/>
               <a:defRPr/>
             </a:pPr>
             <a:r>
@@ -16420,7 +17580,13 @@
       </p:sp>
       <p:sp>
         <p:nvSpPr>
-          <p:cNvPr id="3" name="内容占位符 2"/>
+          <p:cNvPr id="3" name="内容占位符 2">
+            <a:extLst>
+              <a:ext uri="{FF2B5EF4-FFF2-40B4-BE49-F238E27FC236}">
+                <a16:creationId xmlns:a16="http://schemas.microsoft.com/office/drawing/2014/main" id="{A75B9AD9-BAF5-AEF0-BD5B-7484DCFE1327}"/>
+              </a:ext>
+            </a:extLst>
+          </p:cNvPr>
           <p:cNvSpPr>
             <a:spLocks noGrp="1"/>
           </p:cNvSpPr>
@@ -16599,24 +17765,25 @@
               </a:rPr>
               <a:t>最近重构性和最大可分性</a:t>
             </a:r>
-            <a:endParaRPr lang="zh-CN" altLang="en-US" sz="2800" dirty="0">
-              <a:latin typeface="Times New Roman" panose="02020603050405020304" pitchFamily="18" charset="0"/>
-              <a:ea typeface="楷体" panose="02010609060101010101" pitchFamily="49" charset="-122"/>
-              <a:cs typeface="Times New Roman" panose="02020603050405020304" pitchFamily="18" charset="0"/>
-            </a:endParaRPr>
           </a:p>
         </p:txBody>
       </p:sp>
       <p:pic>
         <p:nvPicPr>
-          <p:cNvPr id="4" name="Picture 7"/>
+          <p:cNvPr id="4" name="Picture 7">
+            <a:extLst>
+              <a:ext uri="{FF2B5EF4-FFF2-40B4-BE49-F238E27FC236}">
+                <a16:creationId xmlns:a16="http://schemas.microsoft.com/office/drawing/2014/main" id="{7FFA5907-AC84-83E3-BF0E-6EDD7569CE09}"/>
+              </a:ext>
+            </a:extLst>
+          </p:cNvPr>
           <p:cNvPicPr>
             <a:picLocks noChangeAspect="1"/>
           </p:cNvPicPr>
           <p:nvPr/>
         </p:nvPicPr>
         <p:blipFill>
-          <a:blip r:embed="rId1" cstate="print">
+          <a:blip r:embed="rId2" cstate="print">
             <a:extLst>
               <a:ext uri="{28A0092B-C50C-407E-A947-70E740481C1C}">
                 <a14:useLocalDpi xmlns:a14="http://schemas.microsoft.com/office/drawing/2010/main" val="0"/>
@@ -16638,6 +17805,11 @@
         </p:spPr>
       </p:pic>
     </p:spTree>
+    <p:extLst>
+      <p:ext uri="{BB962C8B-B14F-4D97-AF65-F5344CB8AC3E}">
+        <p14:creationId xmlns:p14="http://schemas.microsoft.com/office/powerpoint/2010/main" val="2051868394"/>
+      </p:ext>
+    </p:extLst>
   </p:cSld>
   <p:clrMapOvr>
     <a:masterClrMapping/>
@@ -16664,7 +17836,13 @@
       </p:grpSpPr>
       <p:sp>
         <p:nvSpPr>
-          <p:cNvPr id="25602" name="灯片编号占位符 4"/>
+          <p:cNvPr id="25602" name="灯片编号占位符 4">
+            <a:extLst>
+              <a:ext uri="{FF2B5EF4-FFF2-40B4-BE49-F238E27FC236}">
+                <a16:creationId xmlns:a16="http://schemas.microsoft.com/office/drawing/2014/main" id="{17E635D5-556F-4781-A1B5-F34536FBE096}"/>
+              </a:ext>
+            </a:extLst>
+          </p:cNvPr>
           <p:cNvSpPr>
             <a:spLocks noGrp="1"/>
           </p:cNvSpPr>
@@ -16848,6 +18026,14 @@
               <a:rPr kumimoji="1" lang="en-US" altLang="zh-CN" sz="1400">
                 <a:latin typeface="Times New Roman" panose="02020603050405020304" pitchFamily="18" charset="0"/>
               </a:rPr>
+              <a:pPr>
+                <a:spcBef>
+                  <a:spcPct val="0"/>
+                </a:spcBef>
+                <a:buFontTx/>
+                <a:buNone/>
+              </a:pPr>
+              <a:t>3</a:t>
             </a:fld>
             <a:endParaRPr kumimoji="1" lang="en-US" altLang="zh-CN" sz="1400">
               <a:latin typeface="Times New Roman" panose="02020603050405020304" pitchFamily="18" charset="0"/>
@@ -16857,7 +18043,13 @@
       </p:sp>
       <p:sp>
         <p:nvSpPr>
-          <p:cNvPr id="25604" name="Text Box 6"/>
+          <p:cNvPr id="25604" name="Text Box 6">
+            <a:extLst>
+              <a:ext uri="{FF2B5EF4-FFF2-40B4-BE49-F238E27FC236}">
+                <a16:creationId xmlns:a16="http://schemas.microsoft.com/office/drawing/2014/main" id="{6E9DF6B3-7770-494F-9AB9-19E6CE2A1EE3}"/>
+              </a:ext>
+            </a:extLst>
+          </p:cNvPr>
           <p:cNvSpPr txBox="1">
             <a:spLocks noChangeArrowheads="1"/>
           </p:cNvSpPr>
@@ -17065,17 +18257,18 @@
               </a:rPr>
               <a:t>本课程主要考试范围</a:t>
             </a:r>
-            <a:endParaRPr kumimoji="1" lang="zh-CN" altLang="en-US" b="1" dirty="0">
-              <a:latin typeface="黑体" panose="02010609060101010101" pitchFamily="49" charset="-122"/>
-              <a:ea typeface="黑体" panose="02010609060101010101" pitchFamily="49" charset="-122"/>
-              <a:cs typeface="楷体_GB2312"/>
-            </a:endParaRPr>
           </a:p>
         </p:txBody>
       </p:sp>
       <p:sp>
         <p:nvSpPr>
-          <p:cNvPr id="843783" name="Text Box 7"/>
+          <p:cNvPr id="843783" name="Text Box 7">
+            <a:extLst>
+              <a:ext uri="{FF2B5EF4-FFF2-40B4-BE49-F238E27FC236}">
+                <a16:creationId xmlns:a16="http://schemas.microsoft.com/office/drawing/2014/main" id="{6DA05D3F-8AF1-4369-AAF6-DBCD6A2887F6}"/>
+              </a:ext>
+            </a:extLst>
+          </p:cNvPr>
           <p:cNvSpPr txBox="1">
             <a:spLocks noChangeArrowheads="1"/>
           </p:cNvSpPr>
@@ -17132,70 +18325,70 @@
               <a:spcBef>
                 <a:spcPct val="20000"/>
               </a:spcBef>
-              <a:buFont typeface="Arial" panose="020B0604020202020204" pitchFamily="34" charset="0"/>
+              <a:buFont typeface="Arial" pitchFamily="34" charset="0"/>
               <a:buChar char="•"/>
               <a:defRPr sz="3200">
                 <a:solidFill>
                   <a:schemeClr val="tx1"/>
                 </a:solidFill>
-                <a:latin typeface="Calibri" panose="020F0502020204030204" pitchFamily="34" charset="0"/>
-                <a:ea typeface="宋体" panose="02010600030101010101" pitchFamily="2" charset="-122"/>
+                <a:latin typeface="Calibri" pitchFamily="34" charset="0"/>
+                <a:ea typeface="宋体" pitchFamily="2" charset="-122"/>
               </a:defRPr>
             </a:lvl1pPr>
             <a:lvl2pPr marL="742950" indent="-285750" eaLnBrk="0" hangingPunct="0">
               <a:spcBef>
                 <a:spcPct val="20000"/>
               </a:spcBef>
-              <a:buFont typeface="Arial" panose="020B0604020202020204" pitchFamily="34" charset="0"/>
+              <a:buFont typeface="Arial" pitchFamily="34" charset="0"/>
               <a:buChar char="–"/>
               <a:defRPr sz="2800">
                 <a:solidFill>
                   <a:schemeClr val="tx1"/>
                 </a:solidFill>
-                <a:latin typeface="Calibri" panose="020F0502020204030204" pitchFamily="34" charset="0"/>
-                <a:ea typeface="宋体" panose="02010600030101010101" pitchFamily="2" charset="-122"/>
+                <a:latin typeface="Calibri" pitchFamily="34" charset="0"/>
+                <a:ea typeface="宋体" pitchFamily="2" charset="-122"/>
               </a:defRPr>
             </a:lvl2pPr>
             <a:lvl3pPr marL="1143000" indent="-228600" eaLnBrk="0" hangingPunct="0">
               <a:spcBef>
                 <a:spcPct val="20000"/>
               </a:spcBef>
-              <a:buFont typeface="Arial" panose="020B0604020202020204" pitchFamily="34" charset="0"/>
+              <a:buFont typeface="Arial" pitchFamily="34" charset="0"/>
               <a:buChar char="•"/>
               <a:defRPr sz="2400">
                 <a:solidFill>
                   <a:schemeClr val="tx1"/>
                 </a:solidFill>
-                <a:latin typeface="Calibri" panose="020F0502020204030204" pitchFamily="34" charset="0"/>
-                <a:ea typeface="宋体" panose="02010600030101010101" pitchFamily="2" charset="-122"/>
+                <a:latin typeface="Calibri" pitchFamily="34" charset="0"/>
+                <a:ea typeface="宋体" pitchFamily="2" charset="-122"/>
               </a:defRPr>
             </a:lvl3pPr>
             <a:lvl4pPr marL="1600200" indent="-228600" eaLnBrk="0" hangingPunct="0">
               <a:spcBef>
                 <a:spcPct val="20000"/>
               </a:spcBef>
-              <a:buFont typeface="Arial" panose="020B0604020202020204" pitchFamily="34" charset="0"/>
+              <a:buFont typeface="Arial" pitchFamily="34" charset="0"/>
               <a:buChar char="–"/>
               <a:defRPr sz="2000">
                 <a:solidFill>
                   <a:schemeClr val="tx1"/>
                 </a:solidFill>
-                <a:latin typeface="Calibri" panose="020F0502020204030204" pitchFamily="34" charset="0"/>
-                <a:ea typeface="宋体" panose="02010600030101010101" pitchFamily="2" charset="-122"/>
+                <a:latin typeface="Calibri" pitchFamily="34" charset="0"/>
+                <a:ea typeface="宋体" pitchFamily="2" charset="-122"/>
               </a:defRPr>
             </a:lvl4pPr>
             <a:lvl5pPr marL="2057400" indent="-228600" eaLnBrk="0" hangingPunct="0">
               <a:spcBef>
                 <a:spcPct val="20000"/>
               </a:spcBef>
-              <a:buFont typeface="Arial" panose="020B0604020202020204" pitchFamily="34" charset="0"/>
+              <a:buFont typeface="Arial" pitchFamily="34" charset="0"/>
               <a:buChar char="»"/>
               <a:defRPr sz="2000">
                 <a:solidFill>
                   <a:schemeClr val="tx1"/>
                 </a:solidFill>
-                <a:latin typeface="Calibri" panose="020F0502020204030204" pitchFamily="34" charset="0"/>
-                <a:ea typeface="宋体" panose="02010600030101010101" pitchFamily="2" charset="-122"/>
+                <a:latin typeface="Calibri" pitchFamily="34" charset="0"/>
+                <a:ea typeface="宋体" pitchFamily="2" charset="-122"/>
               </a:defRPr>
             </a:lvl5pPr>
             <a:lvl6pPr marL="2514600" indent="-228600" eaLnBrk="0" fontAlgn="base" hangingPunct="0">
@@ -17205,14 +18398,14 @@
               <a:spcAft>
                 <a:spcPct val="0"/>
               </a:spcAft>
-              <a:buFont typeface="Arial" panose="020B0604020202020204" pitchFamily="34" charset="0"/>
+              <a:buFont typeface="Arial" pitchFamily="34" charset="0"/>
               <a:buChar char="»"/>
               <a:defRPr sz="2000">
                 <a:solidFill>
                   <a:schemeClr val="tx1"/>
                 </a:solidFill>
-                <a:latin typeface="Calibri" panose="020F0502020204030204" pitchFamily="34" charset="0"/>
-                <a:ea typeface="宋体" panose="02010600030101010101" pitchFamily="2" charset="-122"/>
+                <a:latin typeface="Calibri" pitchFamily="34" charset="0"/>
+                <a:ea typeface="宋体" pitchFamily="2" charset="-122"/>
               </a:defRPr>
             </a:lvl6pPr>
             <a:lvl7pPr marL="2971800" indent="-228600" eaLnBrk="0" fontAlgn="base" hangingPunct="0">
@@ -17222,14 +18415,14 @@
               <a:spcAft>
                 <a:spcPct val="0"/>
               </a:spcAft>
-              <a:buFont typeface="Arial" panose="020B0604020202020204" pitchFamily="34" charset="0"/>
+              <a:buFont typeface="Arial" pitchFamily="34" charset="0"/>
               <a:buChar char="»"/>
               <a:defRPr sz="2000">
                 <a:solidFill>
                   <a:schemeClr val="tx1"/>
                 </a:solidFill>
-                <a:latin typeface="Calibri" panose="020F0502020204030204" pitchFamily="34" charset="0"/>
-                <a:ea typeface="宋体" panose="02010600030101010101" pitchFamily="2" charset="-122"/>
+                <a:latin typeface="Calibri" pitchFamily="34" charset="0"/>
+                <a:ea typeface="宋体" pitchFamily="2" charset="-122"/>
               </a:defRPr>
             </a:lvl7pPr>
             <a:lvl8pPr marL="3429000" indent="-228600" eaLnBrk="0" fontAlgn="base" hangingPunct="0">
@@ -17239,14 +18432,14 @@
               <a:spcAft>
                 <a:spcPct val="0"/>
               </a:spcAft>
-              <a:buFont typeface="Arial" panose="020B0604020202020204" pitchFamily="34" charset="0"/>
+              <a:buFont typeface="Arial" pitchFamily="34" charset="0"/>
               <a:buChar char="»"/>
               <a:defRPr sz="2000">
                 <a:solidFill>
                   <a:schemeClr val="tx1"/>
                 </a:solidFill>
-                <a:latin typeface="Calibri" panose="020F0502020204030204" pitchFamily="34" charset="0"/>
-                <a:ea typeface="宋体" panose="02010600030101010101" pitchFamily="2" charset="-122"/>
+                <a:latin typeface="Calibri" pitchFamily="34" charset="0"/>
+                <a:ea typeface="宋体" pitchFamily="2" charset="-122"/>
               </a:defRPr>
             </a:lvl8pPr>
             <a:lvl9pPr marL="3886200" indent="-228600" eaLnBrk="0" fontAlgn="base" hangingPunct="0">
@@ -17256,14 +18449,14 @@
               <a:spcAft>
                 <a:spcPct val="0"/>
               </a:spcAft>
-              <a:buFont typeface="Arial" panose="020B0604020202020204" pitchFamily="34" charset="0"/>
+              <a:buFont typeface="Arial" pitchFamily="34" charset="0"/>
               <a:buChar char="»"/>
               <a:defRPr sz="2000">
                 <a:solidFill>
                   <a:schemeClr val="tx1"/>
                 </a:solidFill>
-                <a:latin typeface="Calibri" panose="020F0502020204030204" pitchFamily="34" charset="0"/>
-                <a:ea typeface="宋体" panose="02010600030101010101" pitchFamily="2" charset="-122"/>
+                <a:latin typeface="Calibri" pitchFamily="34" charset="0"/>
+                <a:ea typeface="宋体" pitchFamily="2" charset="-122"/>
               </a:defRPr>
             </a:lvl9pPr>
           </a:lstStyle>
@@ -17272,7 +18465,7 @@
               <a:spcBef>
                 <a:spcPct val="50000"/>
               </a:spcBef>
-              <a:buFont typeface="Arial" panose="020B0604020202020204" pitchFamily="34" charset="0"/>
+              <a:buFont typeface="Arial" pitchFamily="34" charset="0"/>
               <a:buNone/>
               <a:defRPr/>
             </a:pPr>
@@ -17878,6 +19071,11 @@
         </p:txBody>
       </p:sp>
     </p:spTree>
+    <p:extLst>
+      <p:ext uri="{BB962C8B-B14F-4D97-AF65-F5344CB8AC3E}">
+        <p14:creationId xmlns:p14="http://schemas.microsoft.com/office/powerpoint/2010/main" val="3095990895"/>
+      </p:ext>
+    </p:extLst>
   </p:cSld>
   <p:clrMapOvr>
     <a:masterClrMapping/>
@@ -17891,13 +19089,13 @@
               <p:cTn id="2" dur="indefinite" nodeType="mainSeq">
                 <p:childTnLst>
                   <p:par>
-                    <p:cTn id="3" fill="hold">
+                    <p:cTn id="3" fill="hold" nodeType="clickPar">
                       <p:stCondLst>
                         <p:cond delay="indefinite"/>
                       </p:stCondLst>
                       <p:childTnLst>
                         <p:par>
-                          <p:cTn id="4" fill="hold">
+                          <p:cTn id="4" fill="hold" nodeType="withGroup">
                             <p:stCondLst>
                               <p:cond delay="0"/>
                             </p:stCondLst>
@@ -17982,7 +19180,13 @@
       </p:grpSpPr>
       <p:sp>
         <p:nvSpPr>
-          <p:cNvPr id="18434" name="灯片编号占位符 5"/>
+          <p:cNvPr id="18434" name="灯片编号占位符 5">
+            <a:extLst>
+              <a:ext uri="{FF2B5EF4-FFF2-40B4-BE49-F238E27FC236}">
+                <a16:creationId xmlns:a16="http://schemas.microsoft.com/office/drawing/2014/main" id="{CBBD9809-2CC4-42C3-B564-FAC6896E7580}"/>
+              </a:ext>
+            </a:extLst>
+          </p:cNvPr>
           <p:cNvSpPr>
             <a:spLocks noGrp="1"/>
           </p:cNvSpPr>
@@ -18170,6 +19374,14 @@
               <a:rPr kumimoji="1" lang="en-US" altLang="zh-CN" sz="1400" smtClean="0">
                 <a:latin typeface="Times New Roman" panose="02020603050405020304" pitchFamily="18" charset="0"/>
               </a:rPr>
+              <a:pPr>
+                <a:spcBef>
+                  <a:spcPct val="0"/>
+                </a:spcBef>
+                <a:buFontTx/>
+                <a:buNone/>
+              </a:pPr>
+              <a:t>4</a:t>
             </a:fld>
             <a:endParaRPr kumimoji="1" lang="en-US" altLang="zh-CN" sz="1400">
               <a:latin typeface="Times New Roman" panose="02020603050405020304" pitchFamily="18" charset="0"/>
@@ -18179,7 +19391,13 @@
       </p:sp>
       <p:sp>
         <p:nvSpPr>
-          <p:cNvPr id="887811" name="Rectangle 3"/>
+          <p:cNvPr id="887811" name="Rectangle 3">
+            <a:extLst>
+              <a:ext uri="{FF2B5EF4-FFF2-40B4-BE49-F238E27FC236}">
+                <a16:creationId xmlns:a16="http://schemas.microsoft.com/office/drawing/2014/main" id="{E67925BF-BD9D-4849-975B-B00461AA9122}"/>
+              </a:ext>
+            </a:extLst>
+          </p:cNvPr>
           <p:cNvSpPr>
             <a:spLocks noGrp="1"/>
           </p:cNvSpPr>
@@ -18249,11 +19467,6 @@
               </a:rPr>
               <a:t>“假设用𝑃来评估计算机程序在某任务类𝑇上的性能，若一个程序通过利用经验𝐸在𝑇中任务上获得了性能改善，则我们就说关于𝑇和𝑃，该程序对𝐸进行了学习”</a:t>
             </a:r>
-            <a:endParaRPr lang="zh-CN" altLang="en-US" sz="2400" dirty="0">
-              <a:latin typeface="Times New Roman" panose="02020603050405020304" pitchFamily="18" charset="0"/>
-              <a:ea typeface="楷体" panose="02010609060101010101" pitchFamily="49" charset="-122"/>
-              <a:cs typeface="Times New Roman" panose="02020603050405020304" pitchFamily="18" charset="0"/>
-            </a:endParaRPr>
           </a:p>
           <a:p>
             <a:pPr eaLnBrk="1" hangingPunct="1">
@@ -18635,7 +19848,13 @@
       </p:sp>
       <p:sp>
         <p:nvSpPr>
-          <p:cNvPr id="18436" name="Text Box 4"/>
+          <p:cNvPr id="18436" name="Text Box 4">
+            <a:extLst>
+              <a:ext uri="{FF2B5EF4-FFF2-40B4-BE49-F238E27FC236}">
+                <a16:creationId xmlns:a16="http://schemas.microsoft.com/office/drawing/2014/main" id="{EB81EA09-BA58-4C02-A7E1-E64004DF3351}"/>
+              </a:ext>
+            </a:extLst>
+          </p:cNvPr>
           <p:cNvSpPr txBox="1">
             <a:spLocks noChangeArrowheads="1"/>
           </p:cNvSpPr>
@@ -18859,15 +20078,1603 @@
               </a:rPr>
               <a:t>章：绪论</a:t>
             </a:r>
-            <a:endParaRPr kumimoji="1" lang="zh-CN" altLang="en-US" b="1" dirty="0">
-              <a:latin typeface="黑体" panose="02010609060101010101" pitchFamily="49" charset="-122"/>
-              <a:ea typeface="黑体" panose="02010609060101010101" pitchFamily="49" charset="-122"/>
-              <a:cs typeface="楷体_GB2312"/>
-            </a:endParaRPr>
           </a:p>
         </p:txBody>
       </p:sp>
     </p:spTree>
+    <p:extLst>
+      <p:ext uri="{BB962C8B-B14F-4D97-AF65-F5344CB8AC3E}">
+        <p14:creationId xmlns:p14="http://schemas.microsoft.com/office/powerpoint/2010/main" val="895409878"/>
+      </p:ext>
+    </p:extLst>
+  </p:cSld>
+  <p:clrMapOvr>
+    <a:masterClrMapping/>
+  </p:clrMapOvr>
+  <p:transition/>
+  <p:timing>
+    <p:tnLst>
+      <p:par>
+        <p:cTn id="1" dur="indefinite" restart="never" nodeType="tmRoot">
+          <p:childTnLst>
+            <p:seq concurrent="1" nextAc="seek">
+              <p:cTn id="2" dur="indefinite" nodeType="mainSeq">
+                <p:childTnLst>
+                  <p:par>
+                    <p:cTn id="3" fill="hold" nodeType="clickPar">
+                      <p:stCondLst>
+                        <p:cond delay="indefinite"/>
+                      </p:stCondLst>
+                      <p:childTnLst>
+                        <p:par>
+                          <p:cTn id="4" fill="hold" nodeType="withGroup">
+                            <p:stCondLst>
+                              <p:cond delay="0"/>
+                            </p:stCondLst>
+                            <p:childTnLst>
+                              <p:par>
+                                <p:cTn id="5" presetID="3" presetClass="entr" presetSubtype="10" fill="hold" grpId="0" nodeType="clickEffect">
+                                  <p:stCondLst>
+                                    <p:cond delay="0"/>
+                                  </p:stCondLst>
+                                  <p:childTnLst>
+                                    <p:set>
+                                      <p:cBhvr>
+                                        <p:cTn id="6" dur="1" fill="hold">
+                                          <p:stCondLst>
+                                            <p:cond delay="0"/>
+                                          </p:stCondLst>
+                                        </p:cTn>
+                                        <p:tgtEl>
+                                          <p:spTgt spid="887811">
+                                            <p:txEl>
+                                              <p:pRg st="0" end="0"/>
+                                            </p:txEl>
+                                          </p:spTgt>
+                                        </p:tgtEl>
+                                        <p:attrNameLst>
+                                          <p:attrName>style.visibility</p:attrName>
+                                        </p:attrNameLst>
+                                      </p:cBhvr>
+                                      <p:to>
+                                        <p:strVal val="visible"/>
+                                      </p:to>
+                                    </p:set>
+                                    <p:animEffect transition="in" filter="blinds(horizontal)">
+                                      <p:cBhvr>
+                                        <p:cTn id="7" dur="500"/>
+                                        <p:tgtEl>
+                                          <p:spTgt spid="887811">
+                                            <p:txEl>
+                                              <p:pRg st="0" end="0"/>
+                                            </p:txEl>
+                                          </p:spTgt>
+                                        </p:tgtEl>
+                                      </p:cBhvr>
+                                    </p:animEffect>
+                                  </p:childTnLst>
+                                </p:cTn>
+                              </p:par>
+                            </p:childTnLst>
+                          </p:cTn>
+                        </p:par>
+                      </p:childTnLst>
+                    </p:cTn>
+                  </p:par>
+                  <p:par>
+                    <p:cTn id="8" fill="hold">
+                      <p:stCondLst>
+                        <p:cond delay="indefinite"/>
+                      </p:stCondLst>
+                      <p:childTnLst>
+                        <p:par>
+                          <p:cTn id="9" fill="hold">
+                            <p:stCondLst>
+                              <p:cond delay="0"/>
+                            </p:stCondLst>
+                            <p:childTnLst>
+                              <p:par>
+                                <p:cTn id="10" presetID="3" presetClass="entr" presetSubtype="10" fill="hold" grpId="0" nodeType="clickEffect">
+                                  <p:stCondLst>
+                                    <p:cond delay="0"/>
+                                  </p:stCondLst>
+                                  <p:childTnLst>
+                                    <p:set>
+                                      <p:cBhvr>
+                                        <p:cTn id="11" dur="1" fill="hold">
+                                          <p:stCondLst>
+                                            <p:cond delay="0"/>
+                                          </p:stCondLst>
+                                        </p:cTn>
+                                        <p:tgtEl>
+                                          <p:spTgt spid="887811">
+                                            <p:txEl>
+                                              <p:pRg st="1" end="1"/>
+                                            </p:txEl>
+                                          </p:spTgt>
+                                        </p:tgtEl>
+                                        <p:attrNameLst>
+                                          <p:attrName>style.visibility</p:attrName>
+                                        </p:attrNameLst>
+                                      </p:cBhvr>
+                                      <p:to>
+                                        <p:strVal val="visible"/>
+                                      </p:to>
+                                    </p:set>
+                                    <p:animEffect transition="in" filter="blinds(horizontal)">
+                                      <p:cBhvr>
+                                        <p:cTn id="12" dur="500"/>
+                                        <p:tgtEl>
+                                          <p:spTgt spid="887811">
+                                            <p:txEl>
+                                              <p:pRg st="1" end="1"/>
+                                            </p:txEl>
+                                          </p:spTgt>
+                                        </p:tgtEl>
+                                      </p:cBhvr>
+                                    </p:animEffect>
+                                  </p:childTnLst>
+                                </p:cTn>
+                              </p:par>
+                            </p:childTnLst>
+                          </p:cTn>
+                        </p:par>
+                      </p:childTnLst>
+                    </p:cTn>
+                  </p:par>
+                  <p:par>
+                    <p:cTn id="13" fill="hold">
+                      <p:stCondLst>
+                        <p:cond delay="indefinite"/>
+                      </p:stCondLst>
+                      <p:childTnLst>
+                        <p:par>
+                          <p:cTn id="14" fill="hold">
+                            <p:stCondLst>
+                              <p:cond delay="0"/>
+                            </p:stCondLst>
+                            <p:childTnLst>
+                              <p:par>
+                                <p:cTn id="15" presetID="3" presetClass="entr" presetSubtype="10" fill="hold" grpId="0" nodeType="clickEffect">
+                                  <p:stCondLst>
+                                    <p:cond delay="0"/>
+                                  </p:stCondLst>
+                                  <p:childTnLst>
+                                    <p:set>
+                                      <p:cBhvr>
+                                        <p:cTn id="16" dur="1" fill="hold">
+                                          <p:stCondLst>
+                                            <p:cond delay="0"/>
+                                          </p:stCondLst>
+                                        </p:cTn>
+                                        <p:tgtEl>
+                                          <p:spTgt spid="887811">
+                                            <p:txEl>
+                                              <p:pRg st="2" end="2"/>
+                                            </p:txEl>
+                                          </p:spTgt>
+                                        </p:tgtEl>
+                                        <p:attrNameLst>
+                                          <p:attrName>style.visibility</p:attrName>
+                                        </p:attrNameLst>
+                                      </p:cBhvr>
+                                      <p:to>
+                                        <p:strVal val="visible"/>
+                                      </p:to>
+                                    </p:set>
+                                    <p:animEffect transition="in" filter="blinds(horizontal)">
+                                      <p:cBhvr>
+                                        <p:cTn id="17" dur="500"/>
+                                        <p:tgtEl>
+                                          <p:spTgt spid="887811">
+                                            <p:txEl>
+                                              <p:pRg st="2" end="2"/>
+                                            </p:txEl>
+                                          </p:spTgt>
+                                        </p:tgtEl>
+                                      </p:cBhvr>
+                                    </p:animEffect>
+                                  </p:childTnLst>
+                                </p:cTn>
+                              </p:par>
+                            </p:childTnLst>
+                          </p:cTn>
+                        </p:par>
+                      </p:childTnLst>
+                    </p:cTn>
+                  </p:par>
+                  <p:par>
+                    <p:cTn id="18" fill="hold" nodeType="clickPar">
+                      <p:stCondLst>
+                        <p:cond delay="indefinite"/>
+                      </p:stCondLst>
+                      <p:childTnLst>
+                        <p:par>
+                          <p:cTn id="19" fill="hold" nodeType="withGroup">
+                            <p:stCondLst>
+                              <p:cond delay="0"/>
+                            </p:stCondLst>
+                            <p:childTnLst>
+                              <p:par>
+                                <p:cTn id="20" presetID="3" presetClass="entr" presetSubtype="10" fill="hold" grpId="0" nodeType="clickEffect">
+                                  <p:stCondLst>
+                                    <p:cond delay="0"/>
+                                  </p:stCondLst>
+                                  <p:childTnLst>
+                                    <p:set>
+                                      <p:cBhvr>
+                                        <p:cTn id="21" dur="1" fill="hold">
+                                          <p:stCondLst>
+                                            <p:cond delay="0"/>
+                                          </p:stCondLst>
+                                        </p:cTn>
+                                        <p:tgtEl>
+                                          <p:spTgt spid="887811">
+                                            <p:txEl>
+                                              <p:pRg st="3" end="3"/>
+                                            </p:txEl>
+                                          </p:spTgt>
+                                        </p:tgtEl>
+                                        <p:attrNameLst>
+                                          <p:attrName>style.visibility</p:attrName>
+                                        </p:attrNameLst>
+                                      </p:cBhvr>
+                                      <p:to>
+                                        <p:strVal val="visible"/>
+                                      </p:to>
+                                    </p:set>
+                                    <p:animEffect transition="in" filter="blinds(horizontal)">
+                                      <p:cBhvr>
+                                        <p:cTn id="22" dur="500"/>
+                                        <p:tgtEl>
+                                          <p:spTgt spid="887811">
+                                            <p:txEl>
+                                              <p:pRg st="3" end="3"/>
+                                            </p:txEl>
+                                          </p:spTgt>
+                                        </p:tgtEl>
+                                      </p:cBhvr>
+                                    </p:animEffect>
+                                  </p:childTnLst>
+                                </p:cTn>
+                              </p:par>
+                            </p:childTnLst>
+                          </p:cTn>
+                        </p:par>
+                      </p:childTnLst>
+                    </p:cTn>
+                  </p:par>
+                  <p:par>
+                    <p:cTn id="23" fill="hold">
+                      <p:stCondLst>
+                        <p:cond delay="indefinite"/>
+                      </p:stCondLst>
+                      <p:childTnLst>
+                        <p:par>
+                          <p:cTn id="24" fill="hold">
+                            <p:stCondLst>
+                              <p:cond delay="0"/>
+                            </p:stCondLst>
+                            <p:childTnLst>
+                              <p:par>
+                                <p:cTn id="25" presetID="3" presetClass="entr" presetSubtype="10" fill="hold" grpId="0" nodeType="clickEffect">
+                                  <p:stCondLst>
+                                    <p:cond delay="0"/>
+                                  </p:stCondLst>
+                                  <p:childTnLst>
+                                    <p:set>
+                                      <p:cBhvr>
+                                        <p:cTn id="26" dur="1" fill="hold">
+                                          <p:stCondLst>
+                                            <p:cond delay="0"/>
+                                          </p:stCondLst>
+                                        </p:cTn>
+                                        <p:tgtEl>
+                                          <p:spTgt spid="887811">
+                                            <p:txEl>
+                                              <p:pRg st="4" end="4"/>
+                                            </p:txEl>
+                                          </p:spTgt>
+                                        </p:tgtEl>
+                                        <p:attrNameLst>
+                                          <p:attrName>style.visibility</p:attrName>
+                                        </p:attrNameLst>
+                                      </p:cBhvr>
+                                      <p:to>
+                                        <p:strVal val="visible"/>
+                                      </p:to>
+                                    </p:set>
+                                    <p:animEffect transition="in" filter="blinds(horizontal)">
+                                      <p:cBhvr>
+                                        <p:cTn id="27" dur="500"/>
+                                        <p:tgtEl>
+                                          <p:spTgt spid="887811">
+                                            <p:txEl>
+                                              <p:pRg st="4" end="4"/>
+                                            </p:txEl>
+                                          </p:spTgt>
+                                        </p:tgtEl>
+                                      </p:cBhvr>
+                                    </p:animEffect>
+                                  </p:childTnLst>
+                                </p:cTn>
+                              </p:par>
+                            </p:childTnLst>
+                          </p:cTn>
+                        </p:par>
+                      </p:childTnLst>
+                    </p:cTn>
+                  </p:par>
+                  <p:par>
+                    <p:cTn id="28" fill="hold">
+                      <p:stCondLst>
+                        <p:cond delay="indefinite"/>
+                      </p:stCondLst>
+                      <p:childTnLst>
+                        <p:par>
+                          <p:cTn id="29" fill="hold">
+                            <p:stCondLst>
+                              <p:cond delay="0"/>
+                            </p:stCondLst>
+                            <p:childTnLst>
+                              <p:par>
+                                <p:cTn id="30" presetID="3" presetClass="entr" presetSubtype="10" fill="hold" grpId="0" nodeType="clickEffect">
+                                  <p:stCondLst>
+                                    <p:cond delay="0"/>
+                                  </p:stCondLst>
+                                  <p:childTnLst>
+                                    <p:set>
+                                      <p:cBhvr>
+                                        <p:cTn id="31" dur="1" fill="hold">
+                                          <p:stCondLst>
+                                            <p:cond delay="0"/>
+                                          </p:stCondLst>
+                                        </p:cTn>
+                                        <p:tgtEl>
+                                          <p:spTgt spid="887811">
+                                            <p:txEl>
+                                              <p:pRg st="5" end="5"/>
+                                            </p:txEl>
+                                          </p:spTgt>
+                                        </p:tgtEl>
+                                        <p:attrNameLst>
+                                          <p:attrName>style.visibility</p:attrName>
+                                        </p:attrNameLst>
+                                      </p:cBhvr>
+                                      <p:to>
+                                        <p:strVal val="visible"/>
+                                      </p:to>
+                                    </p:set>
+                                    <p:animEffect transition="in" filter="blinds(horizontal)">
+                                      <p:cBhvr>
+                                        <p:cTn id="32" dur="500"/>
+                                        <p:tgtEl>
+                                          <p:spTgt spid="887811">
+                                            <p:txEl>
+                                              <p:pRg st="5" end="5"/>
+                                            </p:txEl>
+                                          </p:spTgt>
+                                        </p:tgtEl>
+                                      </p:cBhvr>
+                                    </p:animEffect>
+                                  </p:childTnLst>
+                                </p:cTn>
+                              </p:par>
+                            </p:childTnLst>
+                          </p:cTn>
+                        </p:par>
+                      </p:childTnLst>
+                    </p:cTn>
+                  </p:par>
+                  <p:par>
+                    <p:cTn id="33" fill="hold">
+                      <p:stCondLst>
+                        <p:cond delay="indefinite"/>
+                      </p:stCondLst>
+                      <p:childTnLst>
+                        <p:par>
+                          <p:cTn id="34" fill="hold">
+                            <p:stCondLst>
+                              <p:cond delay="0"/>
+                            </p:stCondLst>
+                            <p:childTnLst>
+                              <p:par>
+                                <p:cTn id="35" presetID="3" presetClass="entr" presetSubtype="10" fill="hold" grpId="0" nodeType="clickEffect">
+                                  <p:stCondLst>
+                                    <p:cond delay="0"/>
+                                  </p:stCondLst>
+                                  <p:childTnLst>
+                                    <p:set>
+                                      <p:cBhvr>
+                                        <p:cTn id="36" dur="1" fill="hold">
+                                          <p:stCondLst>
+                                            <p:cond delay="0"/>
+                                          </p:stCondLst>
+                                        </p:cTn>
+                                        <p:tgtEl>
+                                          <p:spTgt spid="887811">
+                                            <p:txEl>
+                                              <p:pRg st="6" end="6"/>
+                                            </p:txEl>
+                                          </p:spTgt>
+                                        </p:tgtEl>
+                                        <p:attrNameLst>
+                                          <p:attrName>style.visibility</p:attrName>
+                                        </p:attrNameLst>
+                                      </p:cBhvr>
+                                      <p:to>
+                                        <p:strVal val="visible"/>
+                                      </p:to>
+                                    </p:set>
+                                    <p:animEffect transition="in" filter="blinds(horizontal)">
+                                      <p:cBhvr>
+                                        <p:cTn id="37" dur="500"/>
+                                        <p:tgtEl>
+                                          <p:spTgt spid="887811">
+                                            <p:txEl>
+                                              <p:pRg st="6" end="6"/>
+                                            </p:txEl>
+                                          </p:spTgt>
+                                        </p:tgtEl>
+                                      </p:cBhvr>
+                                    </p:animEffect>
+                                  </p:childTnLst>
+                                </p:cTn>
+                              </p:par>
+                            </p:childTnLst>
+                          </p:cTn>
+                        </p:par>
+                      </p:childTnLst>
+                    </p:cTn>
+                  </p:par>
+                  <p:par>
+                    <p:cTn id="38" fill="hold">
+                      <p:stCondLst>
+                        <p:cond delay="indefinite"/>
+                      </p:stCondLst>
+                      <p:childTnLst>
+                        <p:par>
+                          <p:cTn id="39" fill="hold">
+                            <p:stCondLst>
+                              <p:cond delay="0"/>
+                            </p:stCondLst>
+                            <p:childTnLst>
+                              <p:par>
+                                <p:cTn id="40" presetID="3" presetClass="entr" presetSubtype="10" fill="hold" grpId="0" nodeType="clickEffect">
+                                  <p:stCondLst>
+                                    <p:cond delay="0"/>
+                                  </p:stCondLst>
+                                  <p:childTnLst>
+                                    <p:set>
+                                      <p:cBhvr>
+                                        <p:cTn id="41" dur="1" fill="hold">
+                                          <p:stCondLst>
+                                            <p:cond delay="0"/>
+                                          </p:stCondLst>
+                                        </p:cTn>
+                                        <p:tgtEl>
+                                          <p:spTgt spid="887811">
+                                            <p:txEl>
+                                              <p:pRg st="7" end="7"/>
+                                            </p:txEl>
+                                          </p:spTgt>
+                                        </p:tgtEl>
+                                        <p:attrNameLst>
+                                          <p:attrName>style.visibility</p:attrName>
+                                        </p:attrNameLst>
+                                      </p:cBhvr>
+                                      <p:to>
+                                        <p:strVal val="visible"/>
+                                      </p:to>
+                                    </p:set>
+                                    <p:animEffect transition="in" filter="blinds(horizontal)">
+                                      <p:cBhvr>
+                                        <p:cTn id="42" dur="500"/>
+                                        <p:tgtEl>
+                                          <p:spTgt spid="887811">
+                                            <p:txEl>
+                                              <p:pRg st="7" end="7"/>
+                                            </p:txEl>
+                                          </p:spTgt>
+                                        </p:tgtEl>
+                                      </p:cBhvr>
+                                    </p:animEffect>
+                                  </p:childTnLst>
+                                </p:cTn>
+                              </p:par>
+                            </p:childTnLst>
+                          </p:cTn>
+                        </p:par>
+                      </p:childTnLst>
+                    </p:cTn>
+                  </p:par>
+                  <p:par>
+                    <p:cTn id="43" fill="hold">
+                      <p:stCondLst>
+                        <p:cond delay="indefinite"/>
+                      </p:stCondLst>
+                      <p:childTnLst>
+                        <p:par>
+                          <p:cTn id="44" fill="hold">
+                            <p:stCondLst>
+                              <p:cond delay="0"/>
+                            </p:stCondLst>
+                            <p:childTnLst>
+                              <p:par>
+                                <p:cTn id="45" presetID="3" presetClass="entr" presetSubtype="10" fill="hold" grpId="0" nodeType="clickEffect">
+                                  <p:stCondLst>
+                                    <p:cond delay="0"/>
+                                  </p:stCondLst>
+                                  <p:childTnLst>
+                                    <p:set>
+                                      <p:cBhvr>
+                                        <p:cTn id="46" dur="1" fill="hold">
+                                          <p:stCondLst>
+                                            <p:cond delay="0"/>
+                                          </p:stCondLst>
+                                        </p:cTn>
+                                        <p:tgtEl>
+                                          <p:spTgt spid="887811">
+                                            <p:txEl>
+                                              <p:pRg st="8" end="8"/>
+                                            </p:txEl>
+                                          </p:spTgt>
+                                        </p:tgtEl>
+                                        <p:attrNameLst>
+                                          <p:attrName>style.visibility</p:attrName>
+                                        </p:attrNameLst>
+                                      </p:cBhvr>
+                                      <p:to>
+                                        <p:strVal val="visible"/>
+                                      </p:to>
+                                    </p:set>
+                                    <p:animEffect transition="in" filter="blinds(horizontal)">
+                                      <p:cBhvr>
+                                        <p:cTn id="47" dur="500"/>
+                                        <p:tgtEl>
+                                          <p:spTgt spid="887811">
+                                            <p:txEl>
+                                              <p:pRg st="8" end="8"/>
+                                            </p:txEl>
+                                          </p:spTgt>
+                                        </p:tgtEl>
+                                      </p:cBhvr>
+                                    </p:animEffect>
+                                  </p:childTnLst>
+                                </p:cTn>
+                              </p:par>
+                            </p:childTnLst>
+                          </p:cTn>
+                        </p:par>
+                      </p:childTnLst>
+                    </p:cTn>
+                  </p:par>
+                  <p:par>
+                    <p:cTn id="48" fill="hold" nodeType="clickPar">
+                      <p:stCondLst>
+                        <p:cond delay="indefinite"/>
+                      </p:stCondLst>
+                      <p:childTnLst>
+                        <p:par>
+                          <p:cTn id="49" fill="hold" nodeType="withGroup">
+                            <p:stCondLst>
+                              <p:cond delay="0"/>
+                            </p:stCondLst>
+                            <p:childTnLst>
+                              <p:par>
+                                <p:cTn id="50" presetID="3" presetClass="entr" presetSubtype="10" fill="hold" grpId="0" nodeType="clickEffect">
+                                  <p:stCondLst>
+                                    <p:cond delay="0"/>
+                                  </p:stCondLst>
+                                  <p:childTnLst>
+                                    <p:set>
+                                      <p:cBhvr>
+                                        <p:cTn id="51" dur="1" fill="hold">
+                                          <p:stCondLst>
+                                            <p:cond delay="0"/>
+                                          </p:stCondLst>
+                                        </p:cTn>
+                                        <p:tgtEl>
+                                          <p:spTgt spid="887811">
+                                            <p:txEl>
+                                              <p:pRg st="14" end="14"/>
+                                            </p:txEl>
+                                          </p:spTgt>
+                                        </p:tgtEl>
+                                        <p:attrNameLst>
+                                          <p:attrName>style.visibility</p:attrName>
+                                        </p:attrNameLst>
+                                      </p:cBhvr>
+                                      <p:to>
+                                        <p:strVal val="visible"/>
+                                      </p:to>
+                                    </p:set>
+                                    <p:animEffect transition="in" filter="blinds(horizontal)">
+                                      <p:cBhvr>
+                                        <p:cTn id="52" dur="500"/>
+                                        <p:tgtEl>
+                                          <p:spTgt spid="887811">
+                                            <p:txEl>
+                                              <p:pRg st="14" end="14"/>
+                                            </p:txEl>
+                                          </p:spTgt>
+                                        </p:tgtEl>
+                                      </p:cBhvr>
+                                    </p:animEffect>
+                                  </p:childTnLst>
+                                </p:cTn>
+                              </p:par>
+                            </p:childTnLst>
+                          </p:cTn>
+                        </p:par>
+                      </p:childTnLst>
+                    </p:cTn>
+                  </p:par>
+                </p:childTnLst>
+              </p:cTn>
+              <p:prevCondLst>
+                <p:cond evt="onPrev" delay="0">
+                  <p:tgtEl>
+                    <p:sldTgt/>
+                  </p:tgtEl>
+                </p:cond>
+              </p:prevCondLst>
+              <p:nextCondLst>
+                <p:cond evt="onNext" delay="0">
+                  <p:tgtEl>
+                    <p:sldTgt/>
+                  </p:tgtEl>
+                </p:cond>
+              </p:nextCondLst>
+            </p:seq>
+          </p:childTnLst>
+        </p:cTn>
+      </p:par>
+    </p:tnLst>
+    <p:bldLst>
+      <p:bldP spid="887811" grpId="0" build="p"/>
+    </p:bldLst>
+  </p:timing>
+</p:sld>
+</file>
+
+<file path=ppt/slides/slide5.xml><?xml version="1.0" encoding="utf-8"?>
+<p:sld xmlns:a="http://schemas.openxmlformats.org/drawingml/2006/main" xmlns:r="http://schemas.openxmlformats.org/officeDocument/2006/relationships" xmlns:p="http://schemas.openxmlformats.org/presentationml/2006/main">
+  <p:cSld>
+    <p:spTree>
+      <p:nvGrpSpPr>
+        <p:cNvPr id="1" name=""/>
+        <p:cNvGrpSpPr/>
+        <p:nvPr/>
+      </p:nvGrpSpPr>
+      <p:grpSpPr>
+        <a:xfrm>
+          <a:off x="0" y="0"/>
+          <a:ext cx="0" cy="0"/>
+          <a:chOff x="0" y="0"/>
+          <a:chExt cx="0" cy="0"/>
+        </a:xfrm>
+      </p:grpSpPr>
+      <p:sp>
+        <p:nvSpPr>
+          <p:cNvPr id="18434" name="灯片编号占位符 5">
+            <a:extLst>
+              <a:ext uri="{FF2B5EF4-FFF2-40B4-BE49-F238E27FC236}">
+                <a16:creationId xmlns:a16="http://schemas.microsoft.com/office/drawing/2014/main" id="{CBBD9809-2CC4-42C3-B564-FAC6896E7580}"/>
+              </a:ext>
+            </a:extLst>
+          </p:cNvPr>
+          <p:cNvSpPr>
+            <a:spLocks noGrp="1"/>
+          </p:cNvSpPr>
+          <p:nvPr>
+            <p:ph type="sldNum" sz="quarter" idx="12"/>
+          </p:nvPr>
+        </p:nvSpPr>
+        <p:spPr bwMode="auto">
+          <a:noFill/>
+          <a:extLst>
+            <a:ext uri="{909E8E84-426E-40DD-AFC4-6F175D3DCCD1}">
+              <a14:hiddenFill xmlns:a14="http://schemas.microsoft.com/office/drawing/2010/main">
+                <a:solidFill>
+                  <a:srgbClr val="FFFFFF"/>
+                </a:solidFill>
+              </a14:hiddenFill>
+            </a:ext>
+            <a:ext uri="{91240B29-F687-4F45-9708-019B960494DF}">
+              <a14:hiddenLine xmlns:a14="http://schemas.microsoft.com/office/drawing/2010/main" w="9525">
+                <a:solidFill>
+                  <a:srgbClr val="000000"/>
+                </a:solidFill>
+                <a:miter lim="800000"/>
+                <a:headEnd/>
+                <a:tailEnd/>
+              </a14:hiddenLine>
+            </a:ext>
+          </a:extLst>
+        </p:spPr>
+        <p:txBody>
+          <a:bodyPr/>
+          <a:lstStyle>
+            <a:lvl1pPr>
+              <a:spcBef>
+                <a:spcPct val="20000"/>
+              </a:spcBef>
+              <a:buFont typeface="Arial" panose="020B0604020202020204" pitchFamily="34" charset="0"/>
+              <a:buChar char="•"/>
+              <a:defRPr sz="3200">
+                <a:solidFill>
+                  <a:schemeClr val="tx1"/>
+                </a:solidFill>
+                <a:latin typeface="Calibri" panose="020F0502020204030204" pitchFamily="34" charset="0"/>
+                <a:ea typeface="宋体" panose="02010600030101010101" pitchFamily="2" charset="-122"/>
+              </a:defRPr>
+            </a:lvl1pPr>
+            <a:lvl2pPr marL="742950" indent="-285750">
+              <a:spcBef>
+                <a:spcPct val="20000"/>
+              </a:spcBef>
+              <a:buFont typeface="Arial" panose="020B0604020202020204" pitchFamily="34" charset="0"/>
+              <a:buChar char="–"/>
+              <a:defRPr sz="2800">
+                <a:solidFill>
+                  <a:schemeClr val="tx1"/>
+                </a:solidFill>
+                <a:latin typeface="Calibri" panose="020F0502020204030204" pitchFamily="34" charset="0"/>
+                <a:ea typeface="宋体" panose="02010600030101010101" pitchFamily="2" charset="-122"/>
+              </a:defRPr>
+            </a:lvl2pPr>
+            <a:lvl3pPr marL="1143000" indent="-228600">
+              <a:spcBef>
+                <a:spcPct val="20000"/>
+              </a:spcBef>
+              <a:buFont typeface="Arial" panose="020B0604020202020204" pitchFamily="34" charset="0"/>
+              <a:buChar char="•"/>
+              <a:defRPr sz="2400">
+                <a:solidFill>
+                  <a:schemeClr val="tx1"/>
+                </a:solidFill>
+                <a:latin typeface="Calibri" panose="020F0502020204030204" pitchFamily="34" charset="0"/>
+                <a:ea typeface="宋体" panose="02010600030101010101" pitchFamily="2" charset="-122"/>
+              </a:defRPr>
+            </a:lvl3pPr>
+            <a:lvl4pPr marL="1600200" indent="-228600">
+              <a:spcBef>
+                <a:spcPct val="20000"/>
+              </a:spcBef>
+              <a:buFont typeface="Arial" panose="020B0604020202020204" pitchFamily="34" charset="0"/>
+              <a:buChar char="–"/>
+              <a:defRPr sz="2000">
+                <a:solidFill>
+                  <a:schemeClr val="tx1"/>
+                </a:solidFill>
+                <a:latin typeface="Calibri" panose="020F0502020204030204" pitchFamily="34" charset="0"/>
+                <a:ea typeface="宋体" panose="02010600030101010101" pitchFamily="2" charset="-122"/>
+              </a:defRPr>
+            </a:lvl4pPr>
+            <a:lvl5pPr marL="2057400" indent="-228600">
+              <a:spcBef>
+                <a:spcPct val="20000"/>
+              </a:spcBef>
+              <a:buFont typeface="Arial" panose="020B0604020202020204" pitchFamily="34" charset="0"/>
+              <a:buChar char="»"/>
+              <a:defRPr sz="2000">
+                <a:solidFill>
+                  <a:schemeClr val="tx1"/>
+                </a:solidFill>
+                <a:latin typeface="Calibri" panose="020F0502020204030204" pitchFamily="34" charset="0"/>
+                <a:ea typeface="宋体" panose="02010600030101010101" pitchFamily="2" charset="-122"/>
+              </a:defRPr>
+            </a:lvl5pPr>
+            <a:lvl6pPr marL="2514600" indent="-228600" eaLnBrk="0" fontAlgn="base" hangingPunct="0">
+              <a:spcBef>
+                <a:spcPct val="20000"/>
+              </a:spcBef>
+              <a:spcAft>
+                <a:spcPct val="0"/>
+              </a:spcAft>
+              <a:buFont typeface="Arial" panose="020B0604020202020204" pitchFamily="34" charset="0"/>
+              <a:buChar char="»"/>
+              <a:defRPr sz="2000">
+                <a:solidFill>
+                  <a:schemeClr val="tx1"/>
+                </a:solidFill>
+                <a:latin typeface="Calibri" panose="020F0502020204030204" pitchFamily="34" charset="0"/>
+                <a:ea typeface="宋体" panose="02010600030101010101" pitchFamily="2" charset="-122"/>
+              </a:defRPr>
+            </a:lvl6pPr>
+            <a:lvl7pPr marL="2971800" indent="-228600" eaLnBrk="0" fontAlgn="base" hangingPunct="0">
+              <a:spcBef>
+                <a:spcPct val="20000"/>
+              </a:spcBef>
+              <a:spcAft>
+                <a:spcPct val="0"/>
+              </a:spcAft>
+              <a:buFont typeface="Arial" panose="020B0604020202020204" pitchFamily="34" charset="0"/>
+              <a:buChar char="»"/>
+              <a:defRPr sz="2000">
+                <a:solidFill>
+                  <a:schemeClr val="tx1"/>
+                </a:solidFill>
+                <a:latin typeface="Calibri" panose="020F0502020204030204" pitchFamily="34" charset="0"/>
+                <a:ea typeface="宋体" panose="02010600030101010101" pitchFamily="2" charset="-122"/>
+              </a:defRPr>
+            </a:lvl7pPr>
+            <a:lvl8pPr marL="3429000" indent="-228600" eaLnBrk="0" fontAlgn="base" hangingPunct="0">
+              <a:spcBef>
+                <a:spcPct val="20000"/>
+              </a:spcBef>
+              <a:spcAft>
+                <a:spcPct val="0"/>
+              </a:spcAft>
+              <a:buFont typeface="Arial" panose="020B0604020202020204" pitchFamily="34" charset="0"/>
+              <a:buChar char="»"/>
+              <a:defRPr sz="2000">
+                <a:solidFill>
+                  <a:schemeClr val="tx1"/>
+                </a:solidFill>
+                <a:latin typeface="Calibri" panose="020F0502020204030204" pitchFamily="34" charset="0"/>
+                <a:ea typeface="宋体" panose="02010600030101010101" pitchFamily="2" charset="-122"/>
+              </a:defRPr>
+            </a:lvl8pPr>
+            <a:lvl9pPr marL="3886200" indent="-228600" eaLnBrk="0" fontAlgn="base" hangingPunct="0">
+              <a:spcBef>
+                <a:spcPct val="20000"/>
+              </a:spcBef>
+              <a:spcAft>
+                <a:spcPct val="0"/>
+              </a:spcAft>
+              <a:buFont typeface="Arial" panose="020B0604020202020204" pitchFamily="34" charset="0"/>
+              <a:buChar char="»"/>
+              <a:defRPr sz="2000">
+                <a:solidFill>
+                  <a:schemeClr val="tx1"/>
+                </a:solidFill>
+                <a:latin typeface="Calibri" panose="020F0502020204030204" pitchFamily="34" charset="0"/>
+                <a:ea typeface="宋体" panose="02010600030101010101" pitchFamily="2" charset="-122"/>
+              </a:defRPr>
+            </a:lvl9pPr>
+          </a:lstStyle>
+          <a:p>
+            <a:pPr>
+              <a:spcBef>
+                <a:spcPct val="0"/>
+              </a:spcBef>
+              <a:buFontTx/>
+              <a:buNone/>
+            </a:pPr>
+            <a:fld id="{F12A9DEA-C3F6-4401-A5BF-3745117890AB}" type="slidenum">
+              <a:rPr kumimoji="1" lang="en-US" altLang="zh-CN" sz="1400" smtClean="0">
+                <a:latin typeface="Times New Roman" panose="02020603050405020304" pitchFamily="18" charset="0"/>
+              </a:rPr>
+              <a:pPr>
+                <a:spcBef>
+                  <a:spcPct val="0"/>
+                </a:spcBef>
+                <a:buFontTx/>
+                <a:buNone/>
+              </a:pPr>
+              <a:t>5</a:t>
+            </a:fld>
+            <a:endParaRPr kumimoji="1" lang="en-US" altLang="zh-CN" sz="1400">
+              <a:latin typeface="Times New Roman" panose="02020603050405020304" pitchFamily="18" charset="0"/>
+            </a:endParaRPr>
+          </a:p>
+        </p:txBody>
+      </p:sp>
+      <p:sp>
+        <p:nvSpPr>
+          <p:cNvPr id="887811" name="Rectangle 3">
+            <a:extLst>
+              <a:ext uri="{FF2B5EF4-FFF2-40B4-BE49-F238E27FC236}">
+                <a16:creationId xmlns:a16="http://schemas.microsoft.com/office/drawing/2014/main" id="{E67925BF-BD9D-4849-975B-B00461AA9122}"/>
+              </a:ext>
+            </a:extLst>
+          </p:cNvPr>
+          <p:cNvSpPr>
+            <a:spLocks noGrp="1"/>
+          </p:cNvSpPr>
+          <p:nvPr>
+            <p:ph type="body" idx="1"/>
+          </p:nvPr>
+        </p:nvSpPr>
+        <p:spPr>
+          <a:xfrm>
+            <a:off x="755576" y="1340768"/>
+            <a:ext cx="7416800" cy="1231900"/>
+          </a:xfrm>
+        </p:spPr>
+        <p:txBody>
+          <a:bodyPr/>
+          <a:lstStyle/>
+          <a:p>
+            <a:pPr eaLnBrk="1" hangingPunct="1">
+              <a:lnSpc>
+                <a:spcPct val="120000"/>
+              </a:lnSpc>
+              <a:buClr>
+                <a:srgbClr val="FF0000"/>
+              </a:buClr>
+              <a:buFont typeface="Wingdings" panose="05000000000000000000" pitchFamily="2" charset="2"/>
+              <a:buChar char="p"/>
+              <a:defRPr/>
+            </a:pPr>
+            <a:r>
+              <a:rPr lang="zh-CN" altLang="en-US" sz="2800" dirty="0">
+                <a:latin typeface="Times New Roman" panose="02020603050405020304" pitchFamily="18" charset="0"/>
+                <a:ea typeface="楷体" panose="02010609060101010101" pitchFamily="49" charset="-122"/>
+                <a:cs typeface="Times New Roman" panose="02020603050405020304" pitchFamily="18" charset="0"/>
+              </a:rPr>
+              <a:t> </a:t>
+            </a:r>
+            <a:r>
+              <a:rPr lang="zh-CN" altLang="en-US" sz="2800" b="1" dirty="0">
+                <a:latin typeface="Times New Roman" panose="02020603050405020304" pitchFamily="18" charset="0"/>
+                <a:ea typeface="楷体" panose="02010609060101010101" pitchFamily="49" charset="-122"/>
+                <a:cs typeface="Times New Roman" panose="02020603050405020304" pitchFamily="18" charset="0"/>
+              </a:rPr>
+              <a:t>过拟合和欠拟合以及相应的解决方案</a:t>
+            </a:r>
+            <a:endParaRPr lang="en-US" altLang="zh-CN" sz="2800" b="1" dirty="0">
+              <a:latin typeface="Times New Roman" panose="02020603050405020304" pitchFamily="18" charset="0"/>
+              <a:ea typeface="楷体" panose="02010609060101010101" pitchFamily="49" charset="-122"/>
+              <a:cs typeface="Times New Roman" panose="02020603050405020304" pitchFamily="18" charset="0"/>
+            </a:endParaRPr>
+          </a:p>
+          <a:p>
+            <a:pPr eaLnBrk="1" hangingPunct="1">
+              <a:lnSpc>
+                <a:spcPct val="120000"/>
+              </a:lnSpc>
+              <a:buClr>
+                <a:srgbClr val="FF0000"/>
+              </a:buClr>
+              <a:buFont typeface="Wingdings" panose="05000000000000000000" pitchFamily="2" charset="2"/>
+              <a:buChar char="p"/>
+              <a:defRPr/>
+            </a:pPr>
+            <a:r>
+              <a:rPr lang="zh-CN" altLang="en-US" sz="2800" b="1" dirty="0">
+                <a:latin typeface="Times New Roman" panose="02020603050405020304" pitchFamily="18" charset="0"/>
+                <a:ea typeface="楷体" panose="02010609060101010101" pitchFamily="49" charset="-122"/>
+                <a:cs typeface="Times New Roman" panose="02020603050405020304" pitchFamily="18" charset="0"/>
+              </a:rPr>
+              <a:t> 评估方法：泛化性能</a:t>
+            </a:r>
+            <a:endParaRPr lang="en-US" altLang="zh-CN" sz="2800" b="1" dirty="0">
+              <a:latin typeface="Times New Roman" panose="02020603050405020304" pitchFamily="18" charset="0"/>
+              <a:ea typeface="楷体" panose="02010609060101010101" pitchFamily="49" charset="-122"/>
+              <a:cs typeface="Times New Roman" panose="02020603050405020304" pitchFamily="18" charset="0"/>
+            </a:endParaRPr>
+          </a:p>
+          <a:p>
+            <a:pPr marL="0" indent="0" eaLnBrk="1" hangingPunct="1">
+              <a:lnSpc>
+                <a:spcPct val="120000"/>
+              </a:lnSpc>
+              <a:buClr>
+                <a:srgbClr val="FF0000"/>
+              </a:buClr>
+              <a:buNone/>
+              <a:defRPr/>
+            </a:pPr>
+            <a:r>
+              <a:rPr lang="zh-CN" altLang="en-US" sz="2400" dirty="0">
+                <a:latin typeface="Times New Roman" panose="02020603050405020304" pitchFamily="18" charset="0"/>
+                <a:ea typeface="楷体" panose="02010609060101010101" pitchFamily="49" charset="-122"/>
+                <a:cs typeface="Times New Roman" panose="02020603050405020304" pitchFamily="18" charset="0"/>
+              </a:rPr>
+              <a:t>（</a:t>
+            </a:r>
+            <a:r>
+              <a:rPr lang="en-US" altLang="zh-CN" sz="2400" dirty="0">
+                <a:latin typeface="Times New Roman" panose="02020603050405020304" pitchFamily="18" charset="0"/>
+                <a:ea typeface="楷体" panose="02010609060101010101" pitchFamily="49" charset="-122"/>
+                <a:cs typeface="Times New Roman" panose="02020603050405020304" pitchFamily="18" charset="0"/>
+              </a:rPr>
+              <a:t>1</a:t>
+            </a:r>
+            <a:r>
+              <a:rPr lang="zh-CN" altLang="en-US" sz="2400" dirty="0">
+                <a:latin typeface="Times New Roman" panose="02020603050405020304" pitchFamily="18" charset="0"/>
+                <a:ea typeface="楷体" panose="02010609060101010101" pitchFamily="49" charset="-122"/>
+                <a:cs typeface="Times New Roman" panose="02020603050405020304" pitchFamily="18" charset="0"/>
+              </a:rPr>
+              <a:t>）留出法（</a:t>
+            </a:r>
+            <a:r>
+              <a:rPr lang="en-US" altLang="zh-CN" sz="2400" dirty="0">
+                <a:latin typeface="Times New Roman" panose="02020603050405020304" pitchFamily="18" charset="0"/>
+                <a:ea typeface="楷体" panose="02010609060101010101" pitchFamily="49" charset="-122"/>
+                <a:cs typeface="Times New Roman" panose="02020603050405020304" pitchFamily="18" charset="0"/>
+              </a:rPr>
+              <a:t>2</a:t>
+            </a:r>
+            <a:r>
+              <a:rPr lang="zh-CN" altLang="en-US" sz="2400" dirty="0">
+                <a:latin typeface="Times New Roman" panose="02020603050405020304" pitchFamily="18" charset="0"/>
+                <a:ea typeface="楷体" panose="02010609060101010101" pitchFamily="49" charset="-122"/>
+                <a:cs typeface="Times New Roman" panose="02020603050405020304" pitchFamily="18" charset="0"/>
+              </a:rPr>
+              <a:t>）交叉验证法</a:t>
+            </a:r>
+            <a:endParaRPr lang="en-US" altLang="zh-CN" sz="2400" dirty="0">
+              <a:latin typeface="Times New Roman" panose="02020603050405020304" pitchFamily="18" charset="0"/>
+              <a:ea typeface="楷体" panose="02010609060101010101" pitchFamily="49" charset="-122"/>
+              <a:cs typeface="Times New Roman" panose="02020603050405020304" pitchFamily="18" charset="0"/>
+            </a:endParaRPr>
+          </a:p>
+          <a:p>
+            <a:pPr marL="0" indent="0" eaLnBrk="1" hangingPunct="1">
+              <a:lnSpc>
+                <a:spcPct val="120000"/>
+              </a:lnSpc>
+              <a:buClr>
+                <a:srgbClr val="FF0000"/>
+              </a:buClr>
+              <a:buNone/>
+              <a:defRPr/>
+            </a:pPr>
+            <a:r>
+              <a:rPr lang="zh-CN" altLang="en-US" sz="2400" dirty="0">
+                <a:latin typeface="Times New Roman" panose="02020603050405020304" pitchFamily="18" charset="0"/>
+                <a:ea typeface="楷体" panose="02010609060101010101" pitchFamily="49" charset="-122"/>
+                <a:cs typeface="Times New Roman" panose="02020603050405020304" pitchFamily="18" charset="0"/>
+              </a:rPr>
+              <a:t>（</a:t>
+            </a:r>
+            <a:r>
+              <a:rPr lang="en-US" altLang="zh-CN" sz="2400" dirty="0">
+                <a:latin typeface="Times New Roman" panose="02020603050405020304" pitchFamily="18" charset="0"/>
+                <a:ea typeface="楷体" panose="02010609060101010101" pitchFamily="49" charset="-122"/>
+                <a:cs typeface="Times New Roman" panose="02020603050405020304" pitchFamily="18" charset="0"/>
+              </a:rPr>
+              <a:t>3</a:t>
+            </a:r>
+            <a:r>
+              <a:rPr lang="zh-CN" altLang="en-US" sz="2400" dirty="0">
+                <a:latin typeface="Times New Roman" panose="02020603050405020304" pitchFamily="18" charset="0"/>
+                <a:ea typeface="楷体" panose="02010609060101010101" pitchFamily="49" charset="-122"/>
+                <a:cs typeface="Times New Roman" panose="02020603050405020304" pitchFamily="18" charset="0"/>
+              </a:rPr>
+              <a:t>）自助法（</a:t>
+            </a:r>
+            <a:r>
+              <a:rPr lang="en-US" altLang="zh-CN" sz="2400" dirty="0">
+                <a:latin typeface="Times New Roman" panose="02020603050405020304" pitchFamily="18" charset="0"/>
+                <a:ea typeface="楷体" panose="02010609060101010101" pitchFamily="49" charset="-122"/>
+                <a:cs typeface="Times New Roman" panose="02020603050405020304" pitchFamily="18" charset="0"/>
+              </a:rPr>
+              <a:t>4</a:t>
+            </a:r>
+            <a:r>
+              <a:rPr lang="zh-CN" altLang="en-US" sz="2400" dirty="0">
+                <a:latin typeface="Times New Roman" panose="02020603050405020304" pitchFamily="18" charset="0"/>
+                <a:ea typeface="楷体" panose="02010609060101010101" pitchFamily="49" charset="-122"/>
+                <a:cs typeface="Times New Roman" panose="02020603050405020304" pitchFamily="18" charset="0"/>
+              </a:rPr>
+              <a:t>）调参与最终模型</a:t>
+            </a:r>
+            <a:endParaRPr lang="en-US" altLang="zh-CN" sz="2400" dirty="0">
+              <a:latin typeface="Times New Roman" panose="02020603050405020304" pitchFamily="18" charset="0"/>
+              <a:ea typeface="楷体" panose="02010609060101010101" pitchFamily="49" charset="-122"/>
+              <a:cs typeface="Times New Roman" panose="02020603050405020304" pitchFamily="18" charset="0"/>
+            </a:endParaRPr>
+          </a:p>
+          <a:p>
+            <a:pPr eaLnBrk="1" hangingPunct="1">
+              <a:lnSpc>
+                <a:spcPct val="120000"/>
+              </a:lnSpc>
+              <a:buClr>
+                <a:srgbClr val="FF0000"/>
+              </a:buClr>
+              <a:buFont typeface="Wingdings" panose="05000000000000000000" pitchFamily="2" charset="2"/>
+              <a:buChar char="p"/>
+              <a:defRPr/>
+            </a:pPr>
+            <a:r>
+              <a:rPr lang="zh-CN" altLang="en-US" sz="2800" b="1" dirty="0">
+                <a:latin typeface="Times New Roman" panose="02020603050405020304" pitchFamily="18" charset="0"/>
+                <a:ea typeface="楷体" panose="02010609060101010101" pitchFamily="49" charset="-122"/>
+                <a:cs typeface="Times New Roman" panose="02020603050405020304" pitchFamily="18" charset="0"/>
+              </a:rPr>
+              <a:t>性能度量</a:t>
+            </a:r>
+            <a:endParaRPr lang="en-US" altLang="zh-CN" sz="2800" b="1" dirty="0">
+              <a:latin typeface="Times New Roman" panose="02020603050405020304" pitchFamily="18" charset="0"/>
+              <a:ea typeface="楷体" panose="02010609060101010101" pitchFamily="49" charset="-122"/>
+              <a:cs typeface="Times New Roman" panose="02020603050405020304" pitchFamily="18" charset="0"/>
+            </a:endParaRPr>
+          </a:p>
+          <a:p>
+            <a:pPr eaLnBrk="1" hangingPunct="1">
+              <a:lnSpc>
+                <a:spcPct val="120000"/>
+              </a:lnSpc>
+              <a:buClr>
+                <a:srgbClr val="FF0000"/>
+              </a:buClr>
+              <a:buFont typeface="Wingdings" panose="05000000000000000000" pitchFamily="2" charset="2"/>
+              <a:buChar char="p"/>
+              <a:defRPr/>
+            </a:pPr>
+            <a:r>
+              <a:rPr lang="zh-CN" altLang="en-US" sz="2800" b="1" dirty="0">
+                <a:latin typeface="Times New Roman" panose="02020603050405020304" pitchFamily="18" charset="0"/>
+                <a:ea typeface="楷体" panose="02010609060101010101" pitchFamily="49" charset="-122"/>
+                <a:cs typeface="Times New Roman" panose="02020603050405020304" pitchFamily="18" charset="0"/>
+              </a:rPr>
+              <a:t>比较检验</a:t>
+            </a:r>
+            <a:endParaRPr lang="en-US" altLang="zh-CN" sz="2800" b="1" dirty="0">
+              <a:latin typeface="Times New Roman" panose="02020603050405020304" pitchFamily="18" charset="0"/>
+              <a:ea typeface="楷体" panose="02010609060101010101" pitchFamily="49" charset="-122"/>
+              <a:cs typeface="Times New Roman" panose="02020603050405020304" pitchFamily="18" charset="0"/>
+            </a:endParaRPr>
+          </a:p>
+          <a:p>
+            <a:pPr eaLnBrk="1" hangingPunct="1">
+              <a:lnSpc>
+                <a:spcPct val="120000"/>
+              </a:lnSpc>
+              <a:buClr>
+                <a:srgbClr val="FF0000"/>
+              </a:buClr>
+              <a:buFont typeface="Wingdings" panose="05000000000000000000" pitchFamily="2" charset="2"/>
+              <a:buChar char="p"/>
+              <a:defRPr/>
+            </a:pPr>
+            <a:r>
+              <a:rPr lang="zh-CN" altLang="en-US" sz="2800" b="1" dirty="0">
+                <a:latin typeface="Times New Roman" panose="02020603050405020304" pitchFamily="18" charset="0"/>
+                <a:ea typeface="楷体" panose="02010609060101010101" pitchFamily="49" charset="-122"/>
+                <a:cs typeface="Times New Roman" panose="02020603050405020304" pitchFamily="18" charset="0"/>
+              </a:rPr>
+              <a:t>偏差与方差：偏差、方差和噪声解释；偏差</a:t>
+            </a:r>
+            <a:r>
+              <a:rPr lang="en-US" altLang="zh-CN" sz="2800" b="1" dirty="0">
+                <a:latin typeface="Times New Roman" panose="02020603050405020304" pitchFamily="18" charset="0"/>
+                <a:ea typeface="楷体" panose="02010609060101010101" pitchFamily="49" charset="-122"/>
+                <a:cs typeface="Times New Roman" panose="02020603050405020304" pitchFamily="18" charset="0"/>
+              </a:rPr>
+              <a:t>-</a:t>
+            </a:r>
+            <a:r>
+              <a:rPr lang="zh-CN" altLang="en-US" sz="2800" b="1" dirty="0">
+                <a:latin typeface="Times New Roman" panose="02020603050405020304" pitchFamily="18" charset="0"/>
+                <a:ea typeface="楷体" panose="02010609060101010101" pitchFamily="49" charset="-122"/>
+                <a:cs typeface="Times New Roman" panose="02020603050405020304" pitchFamily="18" charset="0"/>
+              </a:rPr>
+              <a:t>方差窘境（与泛化误差的关系）</a:t>
+            </a:r>
+            <a:endParaRPr lang="en-US" altLang="zh-CN" sz="2800" b="1" dirty="0">
+              <a:latin typeface="Times New Roman" panose="02020603050405020304" pitchFamily="18" charset="0"/>
+              <a:ea typeface="楷体" panose="02010609060101010101" pitchFamily="49" charset="-122"/>
+              <a:cs typeface="Times New Roman" panose="02020603050405020304" pitchFamily="18" charset="0"/>
+            </a:endParaRPr>
+          </a:p>
+          <a:p>
+            <a:pPr marL="0" indent="0" eaLnBrk="1" hangingPunct="1">
+              <a:lnSpc>
+                <a:spcPct val="120000"/>
+              </a:lnSpc>
+              <a:buClr>
+                <a:srgbClr val="FF0000"/>
+              </a:buClr>
+              <a:buNone/>
+              <a:defRPr/>
+            </a:pPr>
+            <a:endParaRPr lang="en-US" altLang="zh-CN" sz="2800" dirty="0">
+              <a:latin typeface="Times New Roman" panose="02020603050405020304" pitchFamily="18" charset="0"/>
+              <a:ea typeface="楷体" panose="02010609060101010101" pitchFamily="49" charset="-122"/>
+              <a:cs typeface="Times New Roman" panose="02020603050405020304" pitchFamily="18" charset="0"/>
+            </a:endParaRPr>
+          </a:p>
+          <a:p>
+            <a:pPr eaLnBrk="1" hangingPunct="1">
+              <a:lnSpc>
+                <a:spcPct val="120000"/>
+              </a:lnSpc>
+              <a:buClr>
+                <a:srgbClr val="FF0000"/>
+              </a:buClr>
+              <a:buFont typeface="Wingdings" panose="05000000000000000000" pitchFamily="2" charset="2"/>
+              <a:buChar char="p"/>
+              <a:defRPr/>
+            </a:pPr>
+            <a:endParaRPr lang="en-US" altLang="zh-CN" sz="2800" dirty="0">
+              <a:latin typeface="Times New Roman" panose="02020603050405020304" pitchFamily="18" charset="0"/>
+              <a:ea typeface="楷体" panose="02010609060101010101" pitchFamily="49" charset="-122"/>
+              <a:cs typeface="Times New Roman" panose="02020603050405020304" pitchFamily="18" charset="0"/>
+            </a:endParaRPr>
+          </a:p>
+          <a:p>
+            <a:pPr eaLnBrk="1" hangingPunct="1">
+              <a:lnSpc>
+                <a:spcPct val="120000"/>
+              </a:lnSpc>
+              <a:buClr>
+                <a:srgbClr val="FF0000"/>
+              </a:buClr>
+              <a:buFont typeface="Wingdings" panose="05000000000000000000" pitchFamily="2" charset="2"/>
+              <a:buChar char="p"/>
+              <a:defRPr/>
+            </a:pPr>
+            <a:endParaRPr lang="en-US" altLang="zh-CN" sz="2800" dirty="0">
+              <a:latin typeface="Times New Roman" panose="02020603050405020304" pitchFamily="18" charset="0"/>
+              <a:ea typeface="楷体" panose="02010609060101010101" pitchFamily="49" charset="-122"/>
+              <a:cs typeface="Times New Roman" panose="02020603050405020304" pitchFamily="18" charset="0"/>
+            </a:endParaRPr>
+          </a:p>
+          <a:p>
+            <a:pPr marL="0" indent="0" eaLnBrk="1" hangingPunct="1">
+              <a:lnSpc>
+                <a:spcPct val="120000"/>
+              </a:lnSpc>
+              <a:buClr>
+                <a:srgbClr val="FF0000"/>
+              </a:buClr>
+              <a:buNone/>
+              <a:defRPr/>
+            </a:pPr>
+            <a:endParaRPr lang="en-US" altLang="zh-CN" sz="2800" dirty="0">
+              <a:latin typeface="Times New Roman" panose="02020603050405020304" pitchFamily="18" charset="0"/>
+              <a:ea typeface="楷体" panose="02010609060101010101" pitchFamily="49" charset="-122"/>
+              <a:cs typeface="Times New Roman" panose="02020603050405020304" pitchFamily="18" charset="0"/>
+            </a:endParaRPr>
+          </a:p>
+          <a:p>
+            <a:pPr eaLnBrk="1" hangingPunct="1">
+              <a:lnSpc>
+                <a:spcPct val="120000"/>
+              </a:lnSpc>
+              <a:buClr>
+                <a:srgbClr val="FF0000"/>
+              </a:buClr>
+              <a:buFont typeface="Wingdings" panose="05000000000000000000" pitchFamily="2" charset="2"/>
+              <a:buChar char="p"/>
+              <a:defRPr/>
+            </a:pPr>
+            <a:endParaRPr lang="en-US" altLang="zh-CN" sz="2800" dirty="0">
+              <a:latin typeface="Times New Roman" panose="02020603050405020304" pitchFamily="18" charset="0"/>
+              <a:ea typeface="楷体" panose="02010609060101010101" pitchFamily="49" charset="-122"/>
+              <a:cs typeface="Times New Roman" panose="02020603050405020304" pitchFamily="18" charset="0"/>
+            </a:endParaRPr>
+          </a:p>
+          <a:p>
+            <a:pPr marL="0" indent="0" eaLnBrk="1" hangingPunct="1">
+              <a:lnSpc>
+                <a:spcPct val="120000"/>
+              </a:lnSpc>
+              <a:buClr>
+                <a:srgbClr val="FF0000"/>
+              </a:buClr>
+              <a:buFont typeface="Arial" panose="020B0604020202020204" pitchFamily="34" charset="0"/>
+              <a:buNone/>
+              <a:defRPr/>
+            </a:pPr>
+            <a:r>
+              <a:rPr kumimoji="1" lang="en-US" altLang="zh-CN" sz="2800" dirty="0">
+                <a:latin typeface="Times New Roman" panose="02020603050405020304" pitchFamily="18" charset="0"/>
+                <a:ea typeface="楷体" panose="02010609060101010101" pitchFamily="49" charset="-122"/>
+                <a:cs typeface="Times New Roman" panose="02020603050405020304" pitchFamily="18" charset="0"/>
+              </a:rPr>
+              <a:t>      </a:t>
+            </a:r>
+            <a:endParaRPr kumimoji="1" lang="en-US" altLang="zh-CN" sz="2400" dirty="0">
+              <a:latin typeface="楷体" panose="02010609060101010101" pitchFamily="49" charset="-122"/>
+              <a:ea typeface="楷体" panose="02010609060101010101" pitchFamily="49" charset="-122"/>
+            </a:endParaRPr>
+          </a:p>
+        </p:txBody>
+      </p:sp>
+      <p:sp>
+        <p:nvSpPr>
+          <p:cNvPr id="18436" name="Text Box 4">
+            <a:extLst>
+              <a:ext uri="{FF2B5EF4-FFF2-40B4-BE49-F238E27FC236}">
+                <a16:creationId xmlns:a16="http://schemas.microsoft.com/office/drawing/2014/main" id="{EB81EA09-BA58-4C02-A7E1-E64004DF3351}"/>
+              </a:ext>
+            </a:extLst>
+          </p:cNvPr>
+          <p:cNvSpPr txBox="1">
+            <a:spLocks noChangeArrowheads="1"/>
+          </p:cNvSpPr>
+          <p:nvPr/>
+        </p:nvSpPr>
+        <p:spPr bwMode="auto">
+          <a:xfrm>
+            <a:off x="684213" y="620713"/>
+            <a:ext cx="8134350" cy="579437"/>
+          </a:xfrm>
+          <a:prstGeom prst="rect">
+            <a:avLst/>
+          </a:prstGeom>
+          <a:noFill/>
+          <a:ln>
+            <a:noFill/>
+          </a:ln>
+          <a:effectLst/>
+          <a:extLst>
+            <a:ext uri="{909E8E84-426E-40DD-AFC4-6F175D3DCCD1}">
+              <a14:hiddenFill xmlns:a14="http://schemas.microsoft.com/office/drawing/2010/main">
+                <a:solidFill>
+                  <a:schemeClr val="hlink"/>
+                </a:solidFill>
+              </a14:hiddenFill>
+            </a:ext>
+            <a:ext uri="{91240B29-F687-4F45-9708-019B960494DF}">
+              <a14:hiddenLine xmlns:a14="http://schemas.microsoft.com/office/drawing/2010/main" w="9525">
+                <a:solidFill>
+                  <a:schemeClr val="tx1"/>
+                </a:solidFill>
+                <a:miter lim="800000"/>
+                <a:headEnd/>
+                <a:tailEnd/>
+              </a14:hiddenLine>
+            </a:ext>
+            <a:ext uri="{AF507438-7753-43E0-B8FC-AC1667EBCBE1}">
+              <a14:hiddenEffects xmlns:a14="http://schemas.microsoft.com/office/drawing/2010/main">
+                <a:effectLst>
+                  <a:outerShdw dist="35921" dir="2700000" algn="ctr" rotWithShape="0">
+                    <a:schemeClr val="bg2"/>
+                  </a:outerShdw>
+                </a:effectLst>
+              </a14:hiddenEffects>
+            </a:ext>
+          </a:extLst>
+        </p:spPr>
+        <p:txBody>
+          <a:bodyPr>
+            <a:spAutoFit/>
+          </a:bodyPr>
+          <a:lstStyle>
+            <a:lvl1pPr marL="457200" indent="-457200">
+              <a:spcBef>
+                <a:spcPct val="20000"/>
+              </a:spcBef>
+              <a:buFont typeface="Arial" panose="020B0604020202020204" pitchFamily="34" charset="0"/>
+              <a:buChar char="•"/>
+              <a:defRPr sz="3200">
+                <a:solidFill>
+                  <a:schemeClr val="tx1"/>
+                </a:solidFill>
+                <a:latin typeface="Calibri" panose="020F0502020204030204" pitchFamily="34" charset="0"/>
+                <a:ea typeface="宋体" panose="02010600030101010101" pitchFamily="2" charset="-122"/>
+              </a:defRPr>
+            </a:lvl1pPr>
+            <a:lvl2pPr marL="742950" indent="-285750">
+              <a:spcBef>
+                <a:spcPct val="20000"/>
+              </a:spcBef>
+              <a:buFont typeface="Arial" panose="020B0604020202020204" pitchFamily="34" charset="0"/>
+              <a:buChar char="–"/>
+              <a:defRPr sz="2800">
+                <a:solidFill>
+                  <a:schemeClr val="tx1"/>
+                </a:solidFill>
+                <a:latin typeface="Calibri" panose="020F0502020204030204" pitchFamily="34" charset="0"/>
+                <a:ea typeface="宋体" panose="02010600030101010101" pitchFamily="2" charset="-122"/>
+              </a:defRPr>
+            </a:lvl2pPr>
+            <a:lvl3pPr marL="1143000" indent="-228600">
+              <a:spcBef>
+                <a:spcPct val="20000"/>
+              </a:spcBef>
+              <a:buFont typeface="Arial" panose="020B0604020202020204" pitchFamily="34" charset="0"/>
+              <a:buChar char="•"/>
+              <a:defRPr sz="2400">
+                <a:solidFill>
+                  <a:schemeClr val="tx1"/>
+                </a:solidFill>
+                <a:latin typeface="Calibri" panose="020F0502020204030204" pitchFamily="34" charset="0"/>
+                <a:ea typeface="宋体" panose="02010600030101010101" pitchFamily="2" charset="-122"/>
+              </a:defRPr>
+            </a:lvl3pPr>
+            <a:lvl4pPr marL="1600200" indent="-228600">
+              <a:spcBef>
+                <a:spcPct val="20000"/>
+              </a:spcBef>
+              <a:buFont typeface="Arial" panose="020B0604020202020204" pitchFamily="34" charset="0"/>
+              <a:buChar char="–"/>
+              <a:defRPr sz="2000">
+                <a:solidFill>
+                  <a:schemeClr val="tx1"/>
+                </a:solidFill>
+                <a:latin typeface="Calibri" panose="020F0502020204030204" pitchFamily="34" charset="0"/>
+                <a:ea typeface="宋体" panose="02010600030101010101" pitchFamily="2" charset="-122"/>
+              </a:defRPr>
+            </a:lvl4pPr>
+            <a:lvl5pPr marL="2057400" indent="-228600">
+              <a:spcBef>
+                <a:spcPct val="20000"/>
+              </a:spcBef>
+              <a:buFont typeface="Arial" panose="020B0604020202020204" pitchFamily="34" charset="0"/>
+              <a:buChar char="»"/>
+              <a:defRPr sz="2000">
+                <a:solidFill>
+                  <a:schemeClr val="tx1"/>
+                </a:solidFill>
+                <a:latin typeface="Calibri" panose="020F0502020204030204" pitchFamily="34" charset="0"/>
+                <a:ea typeface="宋体" panose="02010600030101010101" pitchFamily="2" charset="-122"/>
+              </a:defRPr>
+            </a:lvl5pPr>
+            <a:lvl6pPr marL="2514600" indent="-228600" eaLnBrk="0" fontAlgn="base" hangingPunct="0">
+              <a:spcBef>
+                <a:spcPct val="20000"/>
+              </a:spcBef>
+              <a:spcAft>
+                <a:spcPct val="0"/>
+              </a:spcAft>
+              <a:buFont typeface="Arial" panose="020B0604020202020204" pitchFamily="34" charset="0"/>
+              <a:buChar char="»"/>
+              <a:defRPr sz="2000">
+                <a:solidFill>
+                  <a:schemeClr val="tx1"/>
+                </a:solidFill>
+                <a:latin typeface="Calibri" panose="020F0502020204030204" pitchFamily="34" charset="0"/>
+                <a:ea typeface="宋体" panose="02010600030101010101" pitchFamily="2" charset="-122"/>
+              </a:defRPr>
+            </a:lvl6pPr>
+            <a:lvl7pPr marL="2971800" indent="-228600" eaLnBrk="0" fontAlgn="base" hangingPunct="0">
+              <a:spcBef>
+                <a:spcPct val="20000"/>
+              </a:spcBef>
+              <a:spcAft>
+                <a:spcPct val="0"/>
+              </a:spcAft>
+              <a:buFont typeface="Arial" panose="020B0604020202020204" pitchFamily="34" charset="0"/>
+              <a:buChar char="»"/>
+              <a:defRPr sz="2000">
+                <a:solidFill>
+                  <a:schemeClr val="tx1"/>
+                </a:solidFill>
+                <a:latin typeface="Calibri" panose="020F0502020204030204" pitchFamily="34" charset="0"/>
+                <a:ea typeface="宋体" panose="02010600030101010101" pitchFamily="2" charset="-122"/>
+              </a:defRPr>
+            </a:lvl7pPr>
+            <a:lvl8pPr marL="3429000" indent="-228600" eaLnBrk="0" fontAlgn="base" hangingPunct="0">
+              <a:spcBef>
+                <a:spcPct val="20000"/>
+              </a:spcBef>
+              <a:spcAft>
+                <a:spcPct val="0"/>
+              </a:spcAft>
+              <a:buFont typeface="Arial" panose="020B0604020202020204" pitchFamily="34" charset="0"/>
+              <a:buChar char="»"/>
+              <a:defRPr sz="2000">
+                <a:solidFill>
+                  <a:schemeClr val="tx1"/>
+                </a:solidFill>
+                <a:latin typeface="Calibri" panose="020F0502020204030204" pitchFamily="34" charset="0"/>
+                <a:ea typeface="宋体" panose="02010600030101010101" pitchFamily="2" charset="-122"/>
+              </a:defRPr>
+            </a:lvl8pPr>
+            <a:lvl9pPr marL="3886200" indent="-228600" eaLnBrk="0" fontAlgn="base" hangingPunct="0">
+              <a:spcBef>
+                <a:spcPct val="20000"/>
+              </a:spcBef>
+              <a:spcAft>
+                <a:spcPct val="0"/>
+              </a:spcAft>
+              <a:buFont typeface="Arial" panose="020B0604020202020204" pitchFamily="34" charset="0"/>
+              <a:buChar char="»"/>
+              <a:defRPr sz="2000">
+                <a:solidFill>
+                  <a:schemeClr val="tx1"/>
+                </a:solidFill>
+                <a:latin typeface="Calibri" panose="020F0502020204030204" pitchFamily="34" charset="0"/>
+                <a:ea typeface="宋体" panose="02010600030101010101" pitchFamily="2" charset="-122"/>
+              </a:defRPr>
+            </a:lvl9pPr>
+          </a:lstStyle>
+          <a:p>
+            <a:pPr eaLnBrk="1" hangingPunct="1">
+              <a:spcBef>
+                <a:spcPct val="50000"/>
+              </a:spcBef>
+              <a:buFontTx/>
+              <a:buNone/>
+            </a:pPr>
+            <a:r>
+              <a:rPr kumimoji="1" lang="zh-CN" altLang="en-US" b="1" dirty="0">
+                <a:latin typeface="黑体" panose="02010609060101010101" pitchFamily="49" charset="-122"/>
+                <a:ea typeface="黑体" panose="02010609060101010101" pitchFamily="49" charset="-122"/>
+                <a:cs typeface="楷体_GB2312"/>
+              </a:rPr>
+              <a:t>第</a:t>
+            </a:r>
+            <a:r>
+              <a:rPr kumimoji="1" lang="en-US" altLang="zh-CN" b="1" dirty="0">
+                <a:latin typeface="黑体" panose="02010609060101010101" pitchFamily="49" charset="-122"/>
+                <a:ea typeface="黑体" panose="02010609060101010101" pitchFamily="49" charset="-122"/>
+                <a:cs typeface="楷体_GB2312"/>
+              </a:rPr>
+              <a:t>2</a:t>
+            </a:r>
+            <a:r>
+              <a:rPr kumimoji="1" lang="zh-CN" altLang="en-US" b="1" dirty="0">
+                <a:latin typeface="黑体" panose="02010609060101010101" pitchFamily="49" charset="-122"/>
+                <a:ea typeface="黑体" panose="02010609060101010101" pitchFamily="49" charset="-122"/>
+                <a:cs typeface="楷体_GB2312"/>
+              </a:rPr>
+              <a:t>章：模型评估与选择</a:t>
+            </a:r>
+          </a:p>
+        </p:txBody>
+      </p:sp>
+      <p:pic>
+        <p:nvPicPr>
+          <p:cNvPr id="5" name="Picture 2"/>
+          <p:cNvPicPr>
+            <a:picLocks noChangeAspect="1" noChangeArrowheads="1"/>
+          </p:cNvPicPr>
+          <p:nvPr/>
+        </p:nvPicPr>
+        <p:blipFill>
+          <a:blip r:embed="rId2">
+            <a:extLst>
+              <a:ext uri="{28A0092B-C50C-407E-A947-70E740481C1C}">
+                <a14:useLocalDpi xmlns:a14="http://schemas.microsoft.com/office/drawing/2010/main" val="0"/>
+              </a:ext>
+            </a:extLst>
+          </a:blip>
+          <a:srcRect/>
+          <a:stretch>
+            <a:fillRect/>
+          </a:stretch>
+        </p:blipFill>
+        <p:spPr bwMode="auto">
+          <a:xfrm>
+            <a:off x="5292080" y="2132856"/>
+            <a:ext cx="3616849" cy="2664296"/>
+          </a:xfrm>
+          <a:prstGeom prst="rect">
+            <a:avLst/>
+          </a:prstGeom>
+          <a:noFill/>
+          <a:ln>
+            <a:noFill/>
+          </a:ln>
+          <a:effectLst/>
+          <a:extLst>
+            <a:ext uri="{909E8E84-426E-40DD-AFC4-6F175D3DCCD1}">
+              <a14:hiddenFill xmlns:a14="http://schemas.microsoft.com/office/drawing/2010/main">
+                <a:solidFill>
+                  <a:schemeClr val="accent1"/>
+                </a:solidFill>
+              </a14:hiddenFill>
+            </a:ext>
+            <a:ext uri="{91240B29-F687-4F45-9708-019B960494DF}">
+              <a14:hiddenLine xmlns:a14="http://schemas.microsoft.com/office/drawing/2010/main" w="9525">
+                <a:solidFill>
+                  <a:schemeClr val="tx1"/>
+                </a:solidFill>
+                <a:miter lim="800000"/>
+                <a:headEnd/>
+                <a:tailEnd/>
+              </a14:hiddenLine>
+            </a:ext>
+            <a:ext uri="{AF507438-7753-43E0-B8FC-AC1667EBCBE1}">
+              <a14:hiddenEffects xmlns:a14="http://schemas.microsoft.com/office/drawing/2010/main">
+                <a:effectLst>
+                  <a:outerShdw dist="35921" dir="2700000" algn="ctr" rotWithShape="0">
+                    <a:schemeClr val="bg2"/>
+                  </a:outerShdw>
+                </a:effectLst>
+              </a14:hiddenEffects>
+            </a:ext>
+          </a:extLst>
+        </p:spPr>
+      </p:pic>
+    </p:spTree>
+    <p:extLst>
+      <p:ext uri="{BB962C8B-B14F-4D97-AF65-F5344CB8AC3E}">
+        <p14:creationId xmlns:p14="http://schemas.microsoft.com/office/powerpoint/2010/main" val="3305225567"/>
+      </p:ext>
+    </p:extLst>
   </p:cSld>
   <p:clrMapOvr>
     <a:masterClrMapping/>
@@ -19309,1575 +22116,13 @@
                     </p:cTn>
                   </p:par>
                   <p:par>
-                    <p:cTn id="38" fill="hold">
+                    <p:cTn id="38" fill="hold" nodeType="clickPar">
                       <p:stCondLst>
                         <p:cond delay="indefinite"/>
                       </p:stCondLst>
                       <p:childTnLst>
                         <p:par>
-                          <p:cTn id="39" fill="hold">
-                            <p:stCondLst>
-                              <p:cond delay="0"/>
-                            </p:stCondLst>
-                            <p:childTnLst>
-                              <p:par>
-                                <p:cTn id="40" presetID="3" presetClass="entr" presetSubtype="10" fill="hold" grpId="0" nodeType="clickEffect">
-                                  <p:stCondLst>
-                                    <p:cond delay="0"/>
-                                  </p:stCondLst>
-                                  <p:childTnLst>
-                                    <p:set>
-                                      <p:cBhvr>
-                                        <p:cTn id="41" dur="1" fill="hold">
-                                          <p:stCondLst>
-                                            <p:cond delay="0"/>
-                                          </p:stCondLst>
-                                        </p:cTn>
-                                        <p:tgtEl>
-                                          <p:spTgt spid="887811">
-                                            <p:txEl>
-                                              <p:pRg st="7" end="7"/>
-                                            </p:txEl>
-                                          </p:spTgt>
-                                        </p:tgtEl>
-                                        <p:attrNameLst>
-                                          <p:attrName>style.visibility</p:attrName>
-                                        </p:attrNameLst>
-                                      </p:cBhvr>
-                                      <p:to>
-                                        <p:strVal val="visible"/>
-                                      </p:to>
-                                    </p:set>
-                                    <p:animEffect transition="in" filter="blinds(horizontal)">
-                                      <p:cBhvr>
-                                        <p:cTn id="42" dur="500"/>
-                                        <p:tgtEl>
-                                          <p:spTgt spid="887811">
-                                            <p:txEl>
-                                              <p:pRg st="7" end="7"/>
-                                            </p:txEl>
-                                          </p:spTgt>
-                                        </p:tgtEl>
-                                      </p:cBhvr>
-                                    </p:animEffect>
-                                  </p:childTnLst>
-                                </p:cTn>
-                              </p:par>
-                            </p:childTnLst>
-                          </p:cTn>
-                        </p:par>
-                      </p:childTnLst>
-                    </p:cTn>
-                  </p:par>
-                  <p:par>
-                    <p:cTn id="43" fill="hold">
-                      <p:stCondLst>
-                        <p:cond delay="indefinite"/>
-                      </p:stCondLst>
-                      <p:childTnLst>
-                        <p:par>
-                          <p:cTn id="44" fill="hold">
-                            <p:stCondLst>
-                              <p:cond delay="0"/>
-                            </p:stCondLst>
-                            <p:childTnLst>
-                              <p:par>
-                                <p:cTn id="45" presetID="3" presetClass="entr" presetSubtype="10" fill="hold" grpId="0" nodeType="clickEffect">
-                                  <p:stCondLst>
-                                    <p:cond delay="0"/>
-                                  </p:stCondLst>
-                                  <p:childTnLst>
-                                    <p:set>
-                                      <p:cBhvr>
-                                        <p:cTn id="46" dur="1" fill="hold">
-                                          <p:stCondLst>
-                                            <p:cond delay="0"/>
-                                          </p:stCondLst>
-                                        </p:cTn>
-                                        <p:tgtEl>
-                                          <p:spTgt spid="887811">
-                                            <p:txEl>
-                                              <p:pRg st="8" end="8"/>
-                                            </p:txEl>
-                                          </p:spTgt>
-                                        </p:tgtEl>
-                                        <p:attrNameLst>
-                                          <p:attrName>style.visibility</p:attrName>
-                                        </p:attrNameLst>
-                                      </p:cBhvr>
-                                      <p:to>
-                                        <p:strVal val="visible"/>
-                                      </p:to>
-                                    </p:set>
-                                    <p:animEffect transition="in" filter="blinds(horizontal)">
-                                      <p:cBhvr>
-                                        <p:cTn id="47" dur="500"/>
-                                        <p:tgtEl>
-                                          <p:spTgt spid="887811">
-                                            <p:txEl>
-                                              <p:pRg st="8" end="8"/>
-                                            </p:txEl>
-                                          </p:spTgt>
-                                        </p:tgtEl>
-                                      </p:cBhvr>
-                                    </p:animEffect>
-                                  </p:childTnLst>
-                                </p:cTn>
-                              </p:par>
-                            </p:childTnLst>
-                          </p:cTn>
-                        </p:par>
-                      </p:childTnLst>
-                    </p:cTn>
-                  </p:par>
-                  <p:par>
-                    <p:cTn id="48" fill="hold">
-                      <p:stCondLst>
-                        <p:cond delay="indefinite"/>
-                      </p:stCondLst>
-                      <p:childTnLst>
-                        <p:par>
-                          <p:cTn id="49" fill="hold">
-                            <p:stCondLst>
-                              <p:cond delay="0"/>
-                            </p:stCondLst>
-                            <p:childTnLst>
-                              <p:par>
-                                <p:cTn id="50" presetID="3" presetClass="entr" presetSubtype="10" fill="hold" grpId="0" nodeType="clickEffect">
-                                  <p:stCondLst>
-                                    <p:cond delay="0"/>
-                                  </p:stCondLst>
-                                  <p:childTnLst>
-                                    <p:set>
-                                      <p:cBhvr>
-                                        <p:cTn id="51" dur="1" fill="hold">
-                                          <p:stCondLst>
-                                            <p:cond delay="0"/>
-                                          </p:stCondLst>
-                                        </p:cTn>
-                                        <p:tgtEl>
-                                          <p:spTgt spid="887811">
-                                            <p:txEl>
-                                              <p:pRg st="14" end="14"/>
-                                            </p:txEl>
-                                          </p:spTgt>
-                                        </p:tgtEl>
-                                        <p:attrNameLst>
-                                          <p:attrName>style.visibility</p:attrName>
-                                        </p:attrNameLst>
-                                      </p:cBhvr>
-                                      <p:to>
-                                        <p:strVal val="visible"/>
-                                      </p:to>
-                                    </p:set>
-                                    <p:animEffect transition="in" filter="blinds(horizontal)">
-                                      <p:cBhvr>
-                                        <p:cTn id="52" dur="500"/>
-                                        <p:tgtEl>
-                                          <p:spTgt spid="887811">
-                                            <p:txEl>
-                                              <p:pRg st="14" end="14"/>
-                                            </p:txEl>
-                                          </p:spTgt>
-                                        </p:tgtEl>
-                                      </p:cBhvr>
-                                    </p:animEffect>
-                                  </p:childTnLst>
-                                </p:cTn>
-                              </p:par>
-                            </p:childTnLst>
-                          </p:cTn>
-                        </p:par>
-                      </p:childTnLst>
-                    </p:cTn>
-                  </p:par>
-                </p:childTnLst>
-              </p:cTn>
-              <p:prevCondLst>
-                <p:cond evt="onPrev" delay="0">
-                  <p:tgtEl>
-                    <p:sldTgt/>
-                  </p:tgtEl>
-                </p:cond>
-              </p:prevCondLst>
-              <p:nextCondLst>
-                <p:cond evt="onNext" delay="0">
-                  <p:tgtEl>
-                    <p:sldTgt/>
-                  </p:tgtEl>
-                </p:cond>
-              </p:nextCondLst>
-            </p:seq>
-          </p:childTnLst>
-        </p:cTn>
-      </p:par>
-    </p:tnLst>
-    <p:bldLst>
-      <p:bldP spid="887811" grpId="0" build="p"/>
-    </p:bldLst>
-  </p:timing>
-</p:sld>
-</file>
-
-<file path=ppt/slides/slide5.xml><?xml version="1.0" encoding="utf-8"?>
-<p:sld xmlns:a="http://schemas.openxmlformats.org/drawingml/2006/main" xmlns:r="http://schemas.openxmlformats.org/officeDocument/2006/relationships" xmlns:p="http://schemas.openxmlformats.org/presentationml/2006/main">
-  <p:cSld>
-    <p:spTree>
-      <p:nvGrpSpPr>
-        <p:cNvPr id="1" name=""/>
-        <p:cNvGrpSpPr/>
-        <p:nvPr/>
-      </p:nvGrpSpPr>
-      <p:grpSpPr>
-        <a:xfrm>
-          <a:off x="0" y="0"/>
-          <a:ext cx="0" cy="0"/>
-          <a:chOff x="0" y="0"/>
-          <a:chExt cx="0" cy="0"/>
-        </a:xfrm>
-      </p:grpSpPr>
-      <p:sp>
-        <p:nvSpPr>
-          <p:cNvPr id="18434" name="灯片编号占位符 5"/>
-          <p:cNvSpPr>
-            <a:spLocks noGrp="1"/>
-          </p:cNvSpPr>
-          <p:nvPr>
-            <p:ph type="sldNum" sz="quarter" idx="12"/>
-          </p:nvPr>
-        </p:nvSpPr>
-        <p:spPr bwMode="auto">
-          <a:noFill/>
-          <a:extLst>
-            <a:ext uri="{909E8E84-426E-40DD-AFC4-6F175D3DCCD1}">
-              <a14:hiddenFill xmlns:a14="http://schemas.microsoft.com/office/drawing/2010/main">
-                <a:solidFill>
-                  <a:srgbClr val="FFFFFF"/>
-                </a:solidFill>
-              </a14:hiddenFill>
-            </a:ext>
-            <a:ext uri="{91240B29-F687-4F45-9708-019B960494DF}">
-              <a14:hiddenLine xmlns:a14="http://schemas.microsoft.com/office/drawing/2010/main" w="9525">
-                <a:solidFill>
-                  <a:srgbClr val="000000"/>
-                </a:solidFill>
-                <a:miter lim="800000"/>
-                <a:headEnd/>
-                <a:tailEnd/>
-              </a14:hiddenLine>
-            </a:ext>
-          </a:extLst>
-        </p:spPr>
-        <p:txBody>
-          <a:bodyPr/>
-          <a:lstStyle>
-            <a:lvl1pPr>
-              <a:spcBef>
-                <a:spcPct val="20000"/>
-              </a:spcBef>
-              <a:buFont typeface="Arial" panose="020B0604020202020204" pitchFamily="34" charset="0"/>
-              <a:buChar char="•"/>
-              <a:defRPr sz="3200">
-                <a:solidFill>
-                  <a:schemeClr val="tx1"/>
-                </a:solidFill>
-                <a:latin typeface="Calibri" panose="020F0502020204030204" pitchFamily="34" charset="0"/>
-                <a:ea typeface="宋体" panose="02010600030101010101" pitchFamily="2" charset="-122"/>
-              </a:defRPr>
-            </a:lvl1pPr>
-            <a:lvl2pPr marL="742950" indent="-285750">
-              <a:spcBef>
-                <a:spcPct val="20000"/>
-              </a:spcBef>
-              <a:buFont typeface="Arial" panose="020B0604020202020204" pitchFamily="34" charset="0"/>
-              <a:buChar char="–"/>
-              <a:defRPr sz="2800">
-                <a:solidFill>
-                  <a:schemeClr val="tx1"/>
-                </a:solidFill>
-                <a:latin typeface="Calibri" panose="020F0502020204030204" pitchFamily="34" charset="0"/>
-                <a:ea typeface="宋体" panose="02010600030101010101" pitchFamily="2" charset="-122"/>
-              </a:defRPr>
-            </a:lvl2pPr>
-            <a:lvl3pPr marL="1143000" indent="-228600">
-              <a:spcBef>
-                <a:spcPct val="20000"/>
-              </a:spcBef>
-              <a:buFont typeface="Arial" panose="020B0604020202020204" pitchFamily="34" charset="0"/>
-              <a:buChar char="•"/>
-              <a:defRPr sz="2400">
-                <a:solidFill>
-                  <a:schemeClr val="tx1"/>
-                </a:solidFill>
-                <a:latin typeface="Calibri" panose="020F0502020204030204" pitchFamily="34" charset="0"/>
-                <a:ea typeface="宋体" panose="02010600030101010101" pitchFamily="2" charset="-122"/>
-              </a:defRPr>
-            </a:lvl3pPr>
-            <a:lvl4pPr marL="1600200" indent="-228600">
-              <a:spcBef>
-                <a:spcPct val="20000"/>
-              </a:spcBef>
-              <a:buFont typeface="Arial" panose="020B0604020202020204" pitchFamily="34" charset="0"/>
-              <a:buChar char="–"/>
-              <a:defRPr sz="2000">
-                <a:solidFill>
-                  <a:schemeClr val="tx1"/>
-                </a:solidFill>
-                <a:latin typeface="Calibri" panose="020F0502020204030204" pitchFamily="34" charset="0"/>
-                <a:ea typeface="宋体" panose="02010600030101010101" pitchFamily="2" charset="-122"/>
-              </a:defRPr>
-            </a:lvl4pPr>
-            <a:lvl5pPr marL="2057400" indent="-228600">
-              <a:spcBef>
-                <a:spcPct val="20000"/>
-              </a:spcBef>
-              <a:buFont typeface="Arial" panose="020B0604020202020204" pitchFamily="34" charset="0"/>
-              <a:buChar char="»"/>
-              <a:defRPr sz="2000">
-                <a:solidFill>
-                  <a:schemeClr val="tx1"/>
-                </a:solidFill>
-                <a:latin typeface="Calibri" panose="020F0502020204030204" pitchFamily="34" charset="0"/>
-                <a:ea typeface="宋体" panose="02010600030101010101" pitchFamily="2" charset="-122"/>
-              </a:defRPr>
-            </a:lvl5pPr>
-            <a:lvl6pPr marL="2514600" indent="-228600" eaLnBrk="0" fontAlgn="base" hangingPunct="0">
-              <a:spcBef>
-                <a:spcPct val="20000"/>
-              </a:spcBef>
-              <a:spcAft>
-                <a:spcPct val="0"/>
-              </a:spcAft>
-              <a:buFont typeface="Arial" panose="020B0604020202020204" pitchFamily="34" charset="0"/>
-              <a:buChar char="»"/>
-              <a:defRPr sz="2000">
-                <a:solidFill>
-                  <a:schemeClr val="tx1"/>
-                </a:solidFill>
-                <a:latin typeface="Calibri" panose="020F0502020204030204" pitchFamily="34" charset="0"/>
-                <a:ea typeface="宋体" panose="02010600030101010101" pitchFamily="2" charset="-122"/>
-              </a:defRPr>
-            </a:lvl6pPr>
-            <a:lvl7pPr marL="2971800" indent="-228600" eaLnBrk="0" fontAlgn="base" hangingPunct="0">
-              <a:spcBef>
-                <a:spcPct val="20000"/>
-              </a:spcBef>
-              <a:spcAft>
-                <a:spcPct val="0"/>
-              </a:spcAft>
-              <a:buFont typeface="Arial" panose="020B0604020202020204" pitchFamily="34" charset="0"/>
-              <a:buChar char="»"/>
-              <a:defRPr sz="2000">
-                <a:solidFill>
-                  <a:schemeClr val="tx1"/>
-                </a:solidFill>
-                <a:latin typeface="Calibri" panose="020F0502020204030204" pitchFamily="34" charset="0"/>
-                <a:ea typeface="宋体" panose="02010600030101010101" pitchFamily="2" charset="-122"/>
-              </a:defRPr>
-            </a:lvl7pPr>
-            <a:lvl8pPr marL="3429000" indent="-228600" eaLnBrk="0" fontAlgn="base" hangingPunct="0">
-              <a:spcBef>
-                <a:spcPct val="20000"/>
-              </a:spcBef>
-              <a:spcAft>
-                <a:spcPct val="0"/>
-              </a:spcAft>
-              <a:buFont typeface="Arial" panose="020B0604020202020204" pitchFamily="34" charset="0"/>
-              <a:buChar char="»"/>
-              <a:defRPr sz="2000">
-                <a:solidFill>
-                  <a:schemeClr val="tx1"/>
-                </a:solidFill>
-                <a:latin typeface="Calibri" panose="020F0502020204030204" pitchFamily="34" charset="0"/>
-                <a:ea typeface="宋体" panose="02010600030101010101" pitchFamily="2" charset="-122"/>
-              </a:defRPr>
-            </a:lvl8pPr>
-            <a:lvl9pPr marL="3886200" indent="-228600" eaLnBrk="0" fontAlgn="base" hangingPunct="0">
-              <a:spcBef>
-                <a:spcPct val="20000"/>
-              </a:spcBef>
-              <a:spcAft>
-                <a:spcPct val="0"/>
-              </a:spcAft>
-              <a:buFont typeface="Arial" panose="020B0604020202020204" pitchFamily="34" charset="0"/>
-              <a:buChar char="»"/>
-              <a:defRPr sz="2000">
-                <a:solidFill>
-                  <a:schemeClr val="tx1"/>
-                </a:solidFill>
-                <a:latin typeface="Calibri" panose="020F0502020204030204" pitchFamily="34" charset="0"/>
-                <a:ea typeface="宋体" panose="02010600030101010101" pitchFamily="2" charset="-122"/>
-              </a:defRPr>
-            </a:lvl9pPr>
-          </a:lstStyle>
-          <a:p>
-            <a:pPr>
-              <a:spcBef>
-                <a:spcPct val="0"/>
-              </a:spcBef>
-              <a:buFontTx/>
-              <a:buNone/>
-            </a:pPr>
-            <a:fld id="{F12A9DEA-C3F6-4401-A5BF-3745117890AB}" type="slidenum">
-              <a:rPr kumimoji="1" lang="en-US" altLang="zh-CN" sz="1400" smtClean="0">
-                <a:latin typeface="Times New Roman" panose="02020603050405020304" pitchFamily="18" charset="0"/>
-              </a:rPr>
-            </a:fld>
-            <a:endParaRPr kumimoji="1" lang="en-US" altLang="zh-CN" sz="1400">
-              <a:latin typeface="Times New Roman" panose="02020603050405020304" pitchFamily="18" charset="0"/>
-            </a:endParaRPr>
-          </a:p>
-        </p:txBody>
-      </p:sp>
-      <p:sp>
-        <p:nvSpPr>
-          <p:cNvPr id="887811" name="Rectangle 3"/>
-          <p:cNvSpPr>
-            <a:spLocks noGrp="1"/>
-          </p:cNvSpPr>
-          <p:nvPr>
-            <p:ph type="body" idx="1"/>
-          </p:nvPr>
-        </p:nvSpPr>
-        <p:spPr>
-          <a:xfrm>
-            <a:off x="755576" y="1340768"/>
-            <a:ext cx="7416800" cy="1231900"/>
-          </a:xfrm>
-        </p:spPr>
-        <p:txBody>
-          <a:bodyPr/>
-          <a:lstStyle/>
-          <a:p>
-            <a:pPr eaLnBrk="1" hangingPunct="1">
-              <a:lnSpc>
-                <a:spcPct val="120000"/>
-              </a:lnSpc>
-              <a:buClr>
-                <a:srgbClr val="FF0000"/>
-              </a:buClr>
-              <a:buFont typeface="Wingdings" panose="05000000000000000000" pitchFamily="2" charset="2"/>
-              <a:buChar char="p"/>
-              <a:defRPr/>
-            </a:pPr>
-            <a:r>
-              <a:rPr lang="zh-CN" altLang="en-US" sz="2800" dirty="0">
-                <a:latin typeface="Times New Roman" panose="02020603050405020304" pitchFamily="18" charset="0"/>
-                <a:ea typeface="楷体" panose="02010609060101010101" pitchFamily="49" charset="-122"/>
-                <a:cs typeface="Times New Roman" panose="02020603050405020304" pitchFamily="18" charset="0"/>
-              </a:rPr>
-              <a:t> </a:t>
-            </a:r>
-            <a:r>
-              <a:rPr lang="zh-CN" altLang="en-US" sz="2800" b="1" dirty="0">
-                <a:latin typeface="Times New Roman" panose="02020603050405020304" pitchFamily="18" charset="0"/>
-                <a:ea typeface="楷体" panose="02010609060101010101" pitchFamily="49" charset="-122"/>
-                <a:cs typeface="Times New Roman" panose="02020603050405020304" pitchFamily="18" charset="0"/>
-              </a:rPr>
-              <a:t>过拟合和欠拟合以及相应的解决方案</a:t>
-            </a:r>
-            <a:endParaRPr lang="en-US" altLang="zh-CN" sz="2800" b="1" dirty="0">
-              <a:latin typeface="Times New Roman" panose="02020603050405020304" pitchFamily="18" charset="0"/>
-              <a:ea typeface="楷体" panose="02010609060101010101" pitchFamily="49" charset="-122"/>
-              <a:cs typeface="Times New Roman" panose="02020603050405020304" pitchFamily="18" charset="0"/>
-            </a:endParaRPr>
-          </a:p>
-          <a:p>
-            <a:pPr eaLnBrk="1" hangingPunct="1">
-              <a:lnSpc>
-                <a:spcPct val="120000"/>
-              </a:lnSpc>
-              <a:buClr>
-                <a:srgbClr val="FF0000"/>
-              </a:buClr>
-              <a:buFont typeface="Wingdings" panose="05000000000000000000" pitchFamily="2" charset="2"/>
-              <a:buChar char="p"/>
-              <a:defRPr/>
-            </a:pPr>
-            <a:r>
-              <a:rPr lang="zh-CN" altLang="en-US" sz="2800" b="1" dirty="0">
-                <a:latin typeface="Times New Roman" panose="02020603050405020304" pitchFamily="18" charset="0"/>
-                <a:ea typeface="楷体" panose="02010609060101010101" pitchFamily="49" charset="-122"/>
-                <a:cs typeface="Times New Roman" panose="02020603050405020304" pitchFamily="18" charset="0"/>
-              </a:rPr>
-              <a:t> 评估方法：泛化性能</a:t>
-            </a:r>
-            <a:endParaRPr lang="en-US" altLang="zh-CN" sz="2800" b="1" dirty="0">
-              <a:latin typeface="Times New Roman" panose="02020603050405020304" pitchFamily="18" charset="0"/>
-              <a:ea typeface="楷体" panose="02010609060101010101" pitchFamily="49" charset="-122"/>
-              <a:cs typeface="Times New Roman" panose="02020603050405020304" pitchFamily="18" charset="0"/>
-            </a:endParaRPr>
-          </a:p>
-          <a:p>
-            <a:pPr marL="0" indent="0" eaLnBrk="1" hangingPunct="1">
-              <a:lnSpc>
-                <a:spcPct val="120000"/>
-              </a:lnSpc>
-              <a:buClr>
-                <a:srgbClr val="FF0000"/>
-              </a:buClr>
-              <a:buNone/>
-              <a:defRPr/>
-            </a:pPr>
-            <a:r>
-              <a:rPr lang="zh-CN" altLang="en-US" sz="2400" dirty="0">
-                <a:latin typeface="Times New Roman" panose="02020603050405020304" pitchFamily="18" charset="0"/>
-                <a:ea typeface="楷体" panose="02010609060101010101" pitchFamily="49" charset="-122"/>
-                <a:cs typeface="Times New Roman" panose="02020603050405020304" pitchFamily="18" charset="0"/>
-              </a:rPr>
-              <a:t>（</a:t>
-            </a:r>
-            <a:r>
-              <a:rPr lang="en-US" altLang="zh-CN" sz="2400" dirty="0">
-                <a:latin typeface="Times New Roman" panose="02020603050405020304" pitchFamily="18" charset="0"/>
-                <a:ea typeface="楷体" panose="02010609060101010101" pitchFamily="49" charset="-122"/>
-                <a:cs typeface="Times New Roman" panose="02020603050405020304" pitchFamily="18" charset="0"/>
-              </a:rPr>
-              <a:t>1</a:t>
-            </a:r>
-            <a:r>
-              <a:rPr lang="zh-CN" altLang="en-US" sz="2400" dirty="0">
-                <a:latin typeface="Times New Roman" panose="02020603050405020304" pitchFamily="18" charset="0"/>
-                <a:ea typeface="楷体" panose="02010609060101010101" pitchFamily="49" charset="-122"/>
-                <a:cs typeface="Times New Roman" panose="02020603050405020304" pitchFamily="18" charset="0"/>
-              </a:rPr>
-              <a:t>）留出法（</a:t>
-            </a:r>
-            <a:r>
-              <a:rPr lang="en-US" altLang="zh-CN" sz="2400" dirty="0">
-                <a:latin typeface="Times New Roman" panose="02020603050405020304" pitchFamily="18" charset="0"/>
-                <a:ea typeface="楷体" panose="02010609060101010101" pitchFamily="49" charset="-122"/>
-                <a:cs typeface="Times New Roman" panose="02020603050405020304" pitchFamily="18" charset="0"/>
-              </a:rPr>
-              <a:t>2</a:t>
-            </a:r>
-            <a:r>
-              <a:rPr lang="zh-CN" altLang="en-US" sz="2400" dirty="0">
-                <a:latin typeface="Times New Roman" panose="02020603050405020304" pitchFamily="18" charset="0"/>
-                <a:ea typeface="楷体" panose="02010609060101010101" pitchFamily="49" charset="-122"/>
-                <a:cs typeface="Times New Roman" panose="02020603050405020304" pitchFamily="18" charset="0"/>
-              </a:rPr>
-              <a:t>）交叉验证法</a:t>
-            </a:r>
-            <a:endParaRPr lang="en-US" altLang="zh-CN" sz="2400" dirty="0">
-              <a:latin typeface="Times New Roman" panose="02020603050405020304" pitchFamily="18" charset="0"/>
-              <a:ea typeface="楷体" panose="02010609060101010101" pitchFamily="49" charset="-122"/>
-              <a:cs typeface="Times New Roman" panose="02020603050405020304" pitchFamily="18" charset="0"/>
-            </a:endParaRPr>
-          </a:p>
-          <a:p>
-            <a:pPr marL="0" indent="0" eaLnBrk="1" hangingPunct="1">
-              <a:lnSpc>
-                <a:spcPct val="120000"/>
-              </a:lnSpc>
-              <a:buClr>
-                <a:srgbClr val="FF0000"/>
-              </a:buClr>
-              <a:buNone/>
-              <a:defRPr/>
-            </a:pPr>
-            <a:r>
-              <a:rPr lang="zh-CN" altLang="en-US" sz="2400" dirty="0">
-                <a:latin typeface="Times New Roman" panose="02020603050405020304" pitchFamily="18" charset="0"/>
-                <a:ea typeface="楷体" panose="02010609060101010101" pitchFamily="49" charset="-122"/>
-                <a:cs typeface="Times New Roman" panose="02020603050405020304" pitchFamily="18" charset="0"/>
-              </a:rPr>
-              <a:t>（</a:t>
-            </a:r>
-            <a:r>
-              <a:rPr lang="en-US" altLang="zh-CN" sz="2400" dirty="0">
-                <a:latin typeface="Times New Roman" panose="02020603050405020304" pitchFamily="18" charset="0"/>
-                <a:ea typeface="楷体" panose="02010609060101010101" pitchFamily="49" charset="-122"/>
-                <a:cs typeface="Times New Roman" panose="02020603050405020304" pitchFamily="18" charset="0"/>
-              </a:rPr>
-              <a:t>3</a:t>
-            </a:r>
-            <a:r>
-              <a:rPr lang="zh-CN" altLang="en-US" sz="2400" dirty="0">
-                <a:latin typeface="Times New Roman" panose="02020603050405020304" pitchFamily="18" charset="0"/>
-                <a:ea typeface="楷体" panose="02010609060101010101" pitchFamily="49" charset="-122"/>
-                <a:cs typeface="Times New Roman" panose="02020603050405020304" pitchFamily="18" charset="0"/>
-              </a:rPr>
-              <a:t>）自助法（</a:t>
-            </a:r>
-            <a:r>
-              <a:rPr lang="en-US" altLang="zh-CN" sz="2400" dirty="0">
-                <a:latin typeface="Times New Roman" panose="02020603050405020304" pitchFamily="18" charset="0"/>
-                <a:ea typeface="楷体" panose="02010609060101010101" pitchFamily="49" charset="-122"/>
-                <a:cs typeface="Times New Roman" panose="02020603050405020304" pitchFamily="18" charset="0"/>
-              </a:rPr>
-              <a:t>4</a:t>
-            </a:r>
-            <a:r>
-              <a:rPr lang="zh-CN" altLang="en-US" sz="2400" dirty="0">
-                <a:latin typeface="Times New Roman" panose="02020603050405020304" pitchFamily="18" charset="0"/>
-                <a:ea typeface="楷体" panose="02010609060101010101" pitchFamily="49" charset="-122"/>
-                <a:cs typeface="Times New Roman" panose="02020603050405020304" pitchFamily="18" charset="0"/>
-              </a:rPr>
-              <a:t>）调参与最终模型</a:t>
-            </a:r>
-            <a:endParaRPr lang="en-US" altLang="zh-CN" sz="2400" dirty="0">
-              <a:latin typeface="Times New Roman" panose="02020603050405020304" pitchFamily="18" charset="0"/>
-              <a:ea typeface="楷体" panose="02010609060101010101" pitchFamily="49" charset="-122"/>
-              <a:cs typeface="Times New Roman" panose="02020603050405020304" pitchFamily="18" charset="0"/>
-            </a:endParaRPr>
-          </a:p>
-          <a:p>
-            <a:pPr eaLnBrk="1" hangingPunct="1">
-              <a:lnSpc>
-                <a:spcPct val="120000"/>
-              </a:lnSpc>
-              <a:buClr>
-                <a:srgbClr val="FF0000"/>
-              </a:buClr>
-              <a:buFont typeface="Wingdings" panose="05000000000000000000" pitchFamily="2" charset="2"/>
-              <a:buChar char="p"/>
-              <a:defRPr/>
-            </a:pPr>
-            <a:r>
-              <a:rPr lang="zh-CN" altLang="en-US" sz="2800" b="1" dirty="0">
-                <a:latin typeface="Times New Roman" panose="02020603050405020304" pitchFamily="18" charset="0"/>
-                <a:ea typeface="楷体" panose="02010609060101010101" pitchFamily="49" charset="-122"/>
-                <a:cs typeface="Times New Roman" panose="02020603050405020304" pitchFamily="18" charset="0"/>
-              </a:rPr>
-              <a:t>性能度量</a:t>
-            </a:r>
-            <a:endParaRPr lang="en-US" altLang="zh-CN" sz="2800" b="1" dirty="0">
-              <a:latin typeface="Times New Roman" panose="02020603050405020304" pitchFamily="18" charset="0"/>
-              <a:ea typeface="楷体" panose="02010609060101010101" pitchFamily="49" charset="-122"/>
-              <a:cs typeface="Times New Roman" panose="02020603050405020304" pitchFamily="18" charset="0"/>
-            </a:endParaRPr>
-          </a:p>
-          <a:p>
-            <a:pPr eaLnBrk="1" hangingPunct="1">
-              <a:lnSpc>
-                <a:spcPct val="120000"/>
-              </a:lnSpc>
-              <a:buClr>
-                <a:srgbClr val="FF0000"/>
-              </a:buClr>
-              <a:buFont typeface="Wingdings" panose="05000000000000000000" pitchFamily="2" charset="2"/>
-              <a:buChar char="p"/>
-              <a:defRPr/>
-            </a:pPr>
-            <a:r>
-              <a:rPr lang="zh-CN" altLang="en-US" sz="2800" b="1" dirty="0">
-                <a:latin typeface="Times New Roman" panose="02020603050405020304" pitchFamily="18" charset="0"/>
-                <a:ea typeface="楷体" panose="02010609060101010101" pitchFamily="49" charset="-122"/>
-                <a:cs typeface="Times New Roman" panose="02020603050405020304" pitchFamily="18" charset="0"/>
-              </a:rPr>
-              <a:t>比较检验</a:t>
-            </a:r>
-            <a:endParaRPr lang="en-US" altLang="zh-CN" sz="2800" b="1" dirty="0">
-              <a:latin typeface="Times New Roman" panose="02020603050405020304" pitchFamily="18" charset="0"/>
-              <a:ea typeface="楷体" panose="02010609060101010101" pitchFamily="49" charset="-122"/>
-              <a:cs typeface="Times New Roman" panose="02020603050405020304" pitchFamily="18" charset="0"/>
-            </a:endParaRPr>
-          </a:p>
-          <a:p>
-            <a:pPr eaLnBrk="1" hangingPunct="1">
-              <a:lnSpc>
-                <a:spcPct val="120000"/>
-              </a:lnSpc>
-              <a:buClr>
-                <a:srgbClr val="FF0000"/>
-              </a:buClr>
-              <a:buFont typeface="Wingdings" panose="05000000000000000000" pitchFamily="2" charset="2"/>
-              <a:buChar char="p"/>
-              <a:defRPr/>
-            </a:pPr>
-            <a:r>
-              <a:rPr lang="zh-CN" altLang="en-US" sz="2800" b="1" dirty="0">
-                <a:latin typeface="Times New Roman" panose="02020603050405020304" pitchFamily="18" charset="0"/>
-                <a:ea typeface="楷体" panose="02010609060101010101" pitchFamily="49" charset="-122"/>
-                <a:cs typeface="Times New Roman" panose="02020603050405020304" pitchFamily="18" charset="0"/>
-              </a:rPr>
-              <a:t>偏差与方差：偏差、方差和噪声解释；偏差</a:t>
-            </a:r>
-            <a:r>
-              <a:rPr lang="en-US" altLang="zh-CN" sz="2800" b="1" dirty="0">
-                <a:latin typeface="Times New Roman" panose="02020603050405020304" pitchFamily="18" charset="0"/>
-                <a:ea typeface="楷体" panose="02010609060101010101" pitchFamily="49" charset="-122"/>
-                <a:cs typeface="Times New Roman" panose="02020603050405020304" pitchFamily="18" charset="0"/>
-              </a:rPr>
-              <a:t>-</a:t>
-            </a:r>
-            <a:r>
-              <a:rPr lang="zh-CN" altLang="en-US" sz="2800" b="1" dirty="0">
-                <a:latin typeface="Times New Roman" panose="02020603050405020304" pitchFamily="18" charset="0"/>
-                <a:ea typeface="楷体" panose="02010609060101010101" pitchFamily="49" charset="-122"/>
-                <a:cs typeface="Times New Roman" panose="02020603050405020304" pitchFamily="18" charset="0"/>
-              </a:rPr>
-              <a:t>方差窘境（与泛化误差的关系）</a:t>
-            </a:r>
-            <a:endParaRPr lang="en-US" altLang="zh-CN" sz="2800" b="1" dirty="0">
-              <a:latin typeface="Times New Roman" panose="02020603050405020304" pitchFamily="18" charset="0"/>
-              <a:ea typeface="楷体" panose="02010609060101010101" pitchFamily="49" charset="-122"/>
-              <a:cs typeface="Times New Roman" panose="02020603050405020304" pitchFamily="18" charset="0"/>
-            </a:endParaRPr>
-          </a:p>
-          <a:p>
-            <a:pPr marL="0" indent="0" eaLnBrk="1" hangingPunct="1">
-              <a:lnSpc>
-                <a:spcPct val="120000"/>
-              </a:lnSpc>
-              <a:buClr>
-                <a:srgbClr val="FF0000"/>
-              </a:buClr>
-              <a:buNone/>
-              <a:defRPr/>
-            </a:pPr>
-            <a:endParaRPr lang="en-US" altLang="zh-CN" sz="2800" dirty="0">
-              <a:latin typeface="Times New Roman" panose="02020603050405020304" pitchFamily="18" charset="0"/>
-              <a:ea typeface="楷体" panose="02010609060101010101" pitchFamily="49" charset="-122"/>
-              <a:cs typeface="Times New Roman" panose="02020603050405020304" pitchFamily="18" charset="0"/>
-            </a:endParaRPr>
-          </a:p>
-          <a:p>
-            <a:pPr eaLnBrk="1" hangingPunct="1">
-              <a:lnSpc>
-                <a:spcPct val="120000"/>
-              </a:lnSpc>
-              <a:buClr>
-                <a:srgbClr val="FF0000"/>
-              </a:buClr>
-              <a:buFont typeface="Wingdings" panose="05000000000000000000" pitchFamily="2" charset="2"/>
-              <a:buChar char="p"/>
-              <a:defRPr/>
-            </a:pPr>
-            <a:endParaRPr lang="en-US" altLang="zh-CN" sz="2800" dirty="0">
-              <a:latin typeface="Times New Roman" panose="02020603050405020304" pitchFamily="18" charset="0"/>
-              <a:ea typeface="楷体" panose="02010609060101010101" pitchFamily="49" charset="-122"/>
-              <a:cs typeface="Times New Roman" panose="02020603050405020304" pitchFamily="18" charset="0"/>
-            </a:endParaRPr>
-          </a:p>
-          <a:p>
-            <a:pPr eaLnBrk="1" hangingPunct="1">
-              <a:lnSpc>
-                <a:spcPct val="120000"/>
-              </a:lnSpc>
-              <a:buClr>
-                <a:srgbClr val="FF0000"/>
-              </a:buClr>
-              <a:buFont typeface="Wingdings" panose="05000000000000000000" pitchFamily="2" charset="2"/>
-              <a:buChar char="p"/>
-              <a:defRPr/>
-            </a:pPr>
-            <a:endParaRPr lang="en-US" altLang="zh-CN" sz="2800" dirty="0">
-              <a:latin typeface="Times New Roman" panose="02020603050405020304" pitchFamily="18" charset="0"/>
-              <a:ea typeface="楷体" panose="02010609060101010101" pitchFamily="49" charset="-122"/>
-              <a:cs typeface="Times New Roman" panose="02020603050405020304" pitchFamily="18" charset="0"/>
-            </a:endParaRPr>
-          </a:p>
-          <a:p>
-            <a:pPr marL="0" indent="0" eaLnBrk="1" hangingPunct="1">
-              <a:lnSpc>
-                <a:spcPct val="120000"/>
-              </a:lnSpc>
-              <a:buClr>
-                <a:srgbClr val="FF0000"/>
-              </a:buClr>
-              <a:buNone/>
-              <a:defRPr/>
-            </a:pPr>
-            <a:endParaRPr lang="en-US" altLang="zh-CN" sz="2800" dirty="0">
-              <a:latin typeface="Times New Roman" panose="02020603050405020304" pitchFamily="18" charset="0"/>
-              <a:ea typeface="楷体" panose="02010609060101010101" pitchFamily="49" charset="-122"/>
-              <a:cs typeface="Times New Roman" panose="02020603050405020304" pitchFamily="18" charset="0"/>
-            </a:endParaRPr>
-          </a:p>
-          <a:p>
-            <a:pPr eaLnBrk="1" hangingPunct="1">
-              <a:lnSpc>
-                <a:spcPct val="120000"/>
-              </a:lnSpc>
-              <a:buClr>
-                <a:srgbClr val="FF0000"/>
-              </a:buClr>
-              <a:buFont typeface="Wingdings" panose="05000000000000000000" pitchFamily="2" charset="2"/>
-              <a:buChar char="p"/>
-              <a:defRPr/>
-            </a:pPr>
-            <a:endParaRPr lang="en-US" altLang="zh-CN" sz="2800" dirty="0">
-              <a:latin typeface="Times New Roman" panose="02020603050405020304" pitchFamily="18" charset="0"/>
-              <a:ea typeface="楷体" panose="02010609060101010101" pitchFamily="49" charset="-122"/>
-              <a:cs typeface="Times New Roman" panose="02020603050405020304" pitchFamily="18" charset="0"/>
-            </a:endParaRPr>
-          </a:p>
-          <a:p>
-            <a:pPr marL="0" indent="0" eaLnBrk="1" hangingPunct="1">
-              <a:lnSpc>
-                <a:spcPct val="120000"/>
-              </a:lnSpc>
-              <a:buClr>
-                <a:srgbClr val="FF0000"/>
-              </a:buClr>
-              <a:buFont typeface="Arial" panose="020B0604020202020204" pitchFamily="34" charset="0"/>
-              <a:buNone/>
-              <a:defRPr/>
-            </a:pPr>
-            <a:r>
-              <a:rPr kumimoji="1" lang="en-US" altLang="zh-CN" sz="2800" dirty="0">
-                <a:latin typeface="Times New Roman" panose="02020603050405020304" pitchFamily="18" charset="0"/>
-                <a:ea typeface="楷体" panose="02010609060101010101" pitchFamily="49" charset="-122"/>
-                <a:cs typeface="Times New Roman" panose="02020603050405020304" pitchFamily="18" charset="0"/>
-              </a:rPr>
-              <a:t>      </a:t>
-            </a:r>
-            <a:endParaRPr kumimoji="1" lang="en-US" altLang="zh-CN" sz="2400" dirty="0">
-              <a:latin typeface="楷体" panose="02010609060101010101" pitchFamily="49" charset="-122"/>
-              <a:ea typeface="楷体" panose="02010609060101010101" pitchFamily="49" charset="-122"/>
-            </a:endParaRPr>
-          </a:p>
-        </p:txBody>
-      </p:sp>
-      <p:sp>
-        <p:nvSpPr>
-          <p:cNvPr id="18436" name="Text Box 4"/>
-          <p:cNvSpPr txBox="1">
-            <a:spLocks noChangeArrowheads="1"/>
-          </p:cNvSpPr>
-          <p:nvPr/>
-        </p:nvSpPr>
-        <p:spPr bwMode="auto">
-          <a:xfrm>
-            <a:off x="684213" y="620713"/>
-            <a:ext cx="8134350" cy="579437"/>
-          </a:xfrm>
-          <a:prstGeom prst="rect">
-            <a:avLst/>
-          </a:prstGeom>
-          <a:noFill/>
-          <a:ln>
-            <a:noFill/>
-          </a:ln>
-          <a:effectLst/>
-          <a:extLst>
-            <a:ext uri="{909E8E84-426E-40DD-AFC4-6F175D3DCCD1}">
-              <a14:hiddenFill xmlns:a14="http://schemas.microsoft.com/office/drawing/2010/main">
-                <a:solidFill>
-                  <a:schemeClr val="hlink"/>
-                </a:solidFill>
-              </a14:hiddenFill>
-            </a:ext>
-            <a:ext uri="{91240B29-F687-4F45-9708-019B960494DF}">
-              <a14:hiddenLine xmlns:a14="http://schemas.microsoft.com/office/drawing/2010/main" w="9525">
-                <a:solidFill>
-                  <a:schemeClr val="tx1"/>
-                </a:solidFill>
-                <a:miter lim="800000"/>
-                <a:headEnd/>
-                <a:tailEnd/>
-              </a14:hiddenLine>
-            </a:ext>
-            <a:ext uri="{AF507438-7753-43E0-B8FC-AC1667EBCBE1}">
-              <a14:hiddenEffects xmlns:a14="http://schemas.microsoft.com/office/drawing/2010/main">
-                <a:effectLst>
-                  <a:outerShdw dist="35921" dir="2700000" algn="ctr" rotWithShape="0">
-                    <a:schemeClr val="bg2"/>
-                  </a:outerShdw>
-                </a:effectLst>
-              </a14:hiddenEffects>
-            </a:ext>
-          </a:extLst>
-        </p:spPr>
-        <p:txBody>
-          <a:bodyPr>
-            <a:spAutoFit/>
-          </a:bodyPr>
-          <a:lstStyle>
-            <a:lvl1pPr marL="457200" indent="-457200">
-              <a:spcBef>
-                <a:spcPct val="20000"/>
-              </a:spcBef>
-              <a:buFont typeface="Arial" panose="020B0604020202020204" pitchFamily="34" charset="0"/>
-              <a:buChar char="•"/>
-              <a:defRPr sz="3200">
-                <a:solidFill>
-                  <a:schemeClr val="tx1"/>
-                </a:solidFill>
-                <a:latin typeface="Calibri" panose="020F0502020204030204" pitchFamily="34" charset="0"/>
-                <a:ea typeface="宋体" panose="02010600030101010101" pitchFamily="2" charset="-122"/>
-              </a:defRPr>
-            </a:lvl1pPr>
-            <a:lvl2pPr marL="742950" indent="-285750">
-              <a:spcBef>
-                <a:spcPct val="20000"/>
-              </a:spcBef>
-              <a:buFont typeface="Arial" panose="020B0604020202020204" pitchFamily="34" charset="0"/>
-              <a:buChar char="–"/>
-              <a:defRPr sz="2800">
-                <a:solidFill>
-                  <a:schemeClr val="tx1"/>
-                </a:solidFill>
-                <a:latin typeface="Calibri" panose="020F0502020204030204" pitchFamily="34" charset="0"/>
-                <a:ea typeface="宋体" panose="02010600030101010101" pitchFamily="2" charset="-122"/>
-              </a:defRPr>
-            </a:lvl2pPr>
-            <a:lvl3pPr marL="1143000" indent="-228600">
-              <a:spcBef>
-                <a:spcPct val="20000"/>
-              </a:spcBef>
-              <a:buFont typeface="Arial" panose="020B0604020202020204" pitchFamily="34" charset="0"/>
-              <a:buChar char="•"/>
-              <a:defRPr sz="2400">
-                <a:solidFill>
-                  <a:schemeClr val="tx1"/>
-                </a:solidFill>
-                <a:latin typeface="Calibri" panose="020F0502020204030204" pitchFamily="34" charset="0"/>
-                <a:ea typeface="宋体" panose="02010600030101010101" pitchFamily="2" charset="-122"/>
-              </a:defRPr>
-            </a:lvl3pPr>
-            <a:lvl4pPr marL="1600200" indent="-228600">
-              <a:spcBef>
-                <a:spcPct val="20000"/>
-              </a:spcBef>
-              <a:buFont typeface="Arial" panose="020B0604020202020204" pitchFamily="34" charset="0"/>
-              <a:buChar char="–"/>
-              <a:defRPr sz="2000">
-                <a:solidFill>
-                  <a:schemeClr val="tx1"/>
-                </a:solidFill>
-                <a:latin typeface="Calibri" panose="020F0502020204030204" pitchFamily="34" charset="0"/>
-                <a:ea typeface="宋体" panose="02010600030101010101" pitchFamily="2" charset="-122"/>
-              </a:defRPr>
-            </a:lvl4pPr>
-            <a:lvl5pPr marL="2057400" indent="-228600">
-              <a:spcBef>
-                <a:spcPct val="20000"/>
-              </a:spcBef>
-              <a:buFont typeface="Arial" panose="020B0604020202020204" pitchFamily="34" charset="0"/>
-              <a:buChar char="»"/>
-              <a:defRPr sz="2000">
-                <a:solidFill>
-                  <a:schemeClr val="tx1"/>
-                </a:solidFill>
-                <a:latin typeface="Calibri" panose="020F0502020204030204" pitchFamily="34" charset="0"/>
-                <a:ea typeface="宋体" panose="02010600030101010101" pitchFamily="2" charset="-122"/>
-              </a:defRPr>
-            </a:lvl5pPr>
-            <a:lvl6pPr marL="2514600" indent="-228600" eaLnBrk="0" fontAlgn="base" hangingPunct="0">
-              <a:spcBef>
-                <a:spcPct val="20000"/>
-              </a:spcBef>
-              <a:spcAft>
-                <a:spcPct val="0"/>
-              </a:spcAft>
-              <a:buFont typeface="Arial" panose="020B0604020202020204" pitchFamily="34" charset="0"/>
-              <a:buChar char="»"/>
-              <a:defRPr sz="2000">
-                <a:solidFill>
-                  <a:schemeClr val="tx1"/>
-                </a:solidFill>
-                <a:latin typeface="Calibri" panose="020F0502020204030204" pitchFamily="34" charset="0"/>
-                <a:ea typeface="宋体" panose="02010600030101010101" pitchFamily="2" charset="-122"/>
-              </a:defRPr>
-            </a:lvl6pPr>
-            <a:lvl7pPr marL="2971800" indent="-228600" eaLnBrk="0" fontAlgn="base" hangingPunct="0">
-              <a:spcBef>
-                <a:spcPct val="20000"/>
-              </a:spcBef>
-              <a:spcAft>
-                <a:spcPct val="0"/>
-              </a:spcAft>
-              <a:buFont typeface="Arial" panose="020B0604020202020204" pitchFamily="34" charset="0"/>
-              <a:buChar char="»"/>
-              <a:defRPr sz="2000">
-                <a:solidFill>
-                  <a:schemeClr val="tx1"/>
-                </a:solidFill>
-                <a:latin typeface="Calibri" panose="020F0502020204030204" pitchFamily="34" charset="0"/>
-                <a:ea typeface="宋体" panose="02010600030101010101" pitchFamily="2" charset="-122"/>
-              </a:defRPr>
-            </a:lvl7pPr>
-            <a:lvl8pPr marL="3429000" indent="-228600" eaLnBrk="0" fontAlgn="base" hangingPunct="0">
-              <a:spcBef>
-                <a:spcPct val="20000"/>
-              </a:spcBef>
-              <a:spcAft>
-                <a:spcPct val="0"/>
-              </a:spcAft>
-              <a:buFont typeface="Arial" panose="020B0604020202020204" pitchFamily="34" charset="0"/>
-              <a:buChar char="»"/>
-              <a:defRPr sz="2000">
-                <a:solidFill>
-                  <a:schemeClr val="tx1"/>
-                </a:solidFill>
-                <a:latin typeface="Calibri" panose="020F0502020204030204" pitchFamily="34" charset="0"/>
-                <a:ea typeface="宋体" panose="02010600030101010101" pitchFamily="2" charset="-122"/>
-              </a:defRPr>
-            </a:lvl8pPr>
-            <a:lvl9pPr marL="3886200" indent="-228600" eaLnBrk="0" fontAlgn="base" hangingPunct="0">
-              <a:spcBef>
-                <a:spcPct val="20000"/>
-              </a:spcBef>
-              <a:spcAft>
-                <a:spcPct val="0"/>
-              </a:spcAft>
-              <a:buFont typeface="Arial" panose="020B0604020202020204" pitchFamily="34" charset="0"/>
-              <a:buChar char="»"/>
-              <a:defRPr sz="2000">
-                <a:solidFill>
-                  <a:schemeClr val="tx1"/>
-                </a:solidFill>
-                <a:latin typeface="Calibri" panose="020F0502020204030204" pitchFamily="34" charset="0"/>
-                <a:ea typeface="宋体" panose="02010600030101010101" pitchFamily="2" charset="-122"/>
-              </a:defRPr>
-            </a:lvl9pPr>
-          </a:lstStyle>
-          <a:p>
-            <a:pPr eaLnBrk="1" hangingPunct="1">
-              <a:spcBef>
-                <a:spcPct val="50000"/>
-              </a:spcBef>
-              <a:buFontTx/>
-              <a:buNone/>
-            </a:pPr>
-            <a:r>
-              <a:rPr kumimoji="1" lang="zh-CN" altLang="en-US" b="1" dirty="0">
-                <a:latin typeface="黑体" panose="02010609060101010101" pitchFamily="49" charset="-122"/>
-                <a:ea typeface="黑体" panose="02010609060101010101" pitchFamily="49" charset="-122"/>
-                <a:cs typeface="楷体_GB2312"/>
-              </a:rPr>
-              <a:t>第</a:t>
-            </a:r>
-            <a:r>
-              <a:rPr kumimoji="1" lang="en-US" altLang="zh-CN" b="1" dirty="0">
-                <a:latin typeface="黑体" panose="02010609060101010101" pitchFamily="49" charset="-122"/>
-                <a:ea typeface="黑体" panose="02010609060101010101" pitchFamily="49" charset="-122"/>
-                <a:cs typeface="楷体_GB2312"/>
-              </a:rPr>
-              <a:t>2</a:t>
-            </a:r>
-            <a:r>
-              <a:rPr kumimoji="1" lang="zh-CN" altLang="en-US" b="1" dirty="0">
-                <a:latin typeface="黑体" panose="02010609060101010101" pitchFamily="49" charset="-122"/>
-                <a:ea typeface="黑体" panose="02010609060101010101" pitchFamily="49" charset="-122"/>
-                <a:cs typeface="楷体_GB2312"/>
-              </a:rPr>
-              <a:t>章：模型评估与选择</a:t>
-            </a:r>
-            <a:endParaRPr kumimoji="1" lang="zh-CN" altLang="en-US" b="1" dirty="0">
-              <a:latin typeface="黑体" panose="02010609060101010101" pitchFamily="49" charset="-122"/>
-              <a:ea typeface="黑体" panose="02010609060101010101" pitchFamily="49" charset="-122"/>
-              <a:cs typeface="楷体_GB2312"/>
-            </a:endParaRPr>
-          </a:p>
-        </p:txBody>
-      </p:sp>
-      <p:pic>
-        <p:nvPicPr>
-          <p:cNvPr id="5" name="Picture 2"/>
-          <p:cNvPicPr>
-            <a:picLocks noChangeAspect="1" noChangeArrowheads="1"/>
-          </p:cNvPicPr>
-          <p:nvPr/>
-        </p:nvPicPr>
-        <p:blipFill>
-          <a:blip r:embed="rId1">
-            <a:extLst>
-              <a:ext uri="{28A0092B-C50C-407E-A947-70E740481C1C}">
-                <a14:useLocalDpi xmlns:a14="http://schemas.microsoft.com/office/drawing/2010/main" val="0"/>
-              </a:ext>
-            </a:extLst>
-          </a:blip>
-          <a:srcRect/>
-          <a:stretch>
-            <a:fillRect/>
-          </a:stretch>
-        </p:blipFill>
-        <p:spPr bwMode="auto">
-          <a:xfrm>
-            <a:off x="5292080" y="2132856"/>
-            <a:ext cx="3616849" cy="2664296"/>
-          </a:xfrm>
-          <a:prstGeom prst="rect">
-            <a:avLst/>
-          </a:prstGeom>
-          <a:noFill/>
-          <a:ln>
-            <a:noFill/>
-          </a:ln>
-          <a:effectLst/>
-          <a:extLst>
-            <a:ext uri="{909E8E84-426E-40DD-AFC4-6F175D3DCCD1}">
-              <a14:hiddenFill xmlns:a14="http://schemas.microsoft.com/office/drawing/2010/main">
-                <a:solidFill>
-                  <a:schemeClr val="accent1"/>
-                </a:solidFill>
-              </a14:hiddenFill>
-            </a:ext>
-            <a:ext uri="{91240B29-F687-4F45-9708-019B960494DF}">
-              <a14:hiddenLine xmlns:a14="http://schemas.microsoft.com/office/drawing/2010/main" w="9525">
-                <a:solidFill>
-                  <a:schemeClr val="tx1"/>
-                </a:solidFill>
-                <a:miter lim="800000"/>
-                <a:headEnd/>
-                <a:tailEnd/>
-              </a14:hiddenLine>
-            </a:ext>
-            <a:ext uri="{AF507438-7753-43E0-B8FC-AC1667EBCBE1}">
-              <a14:hiddenEffects xmlns:a14="http://schemas.microsoft.com/office/drawing/2010/main">
-                <a:effectLst>
-                  <a:outerShdw dist="35921" dir="2700000" algn="ctr" rotWithShape="0">
-                    <a:schemeClr val="bg2"/>
-                  </a:outerShdw>
-                </a:effectLst>
-              </a14:hiddenEffects>
-            </a:ext>
-          </a:extLst>
-        </p:spPr>
-      </p:pic>
-    </p:spTree>
-  </p:cSld>
-  <p:clrMapOvr>
-    <a:masterClrMapping/>
-  </p:clrMapOvr>
-  <p:transition/>
-  <p:timing>
-    <p:tnLst>
-      <p:par>
-        <p:cTn id="1" dur="indefinite" restart="never" nodeType="tmRoot">
-          <p:childTnLst>
-            <p:seq concurrent="1" nextAc="seek">
-              <p:cTn id="2" dur="indefinite" nodeType="mainSeq">
-                <p:childTnLst>
-                  <p:par>
-                    <p:cTn id="3" fill="hold">
-                      <p:stCondLst>
-                        <p:cond delay="indefinite"/>
-                      </p:stCondLst>
-                      <p:childTnLst>
-                        <p:par>
-                          <p:cTn id="4" fill="hold">
-                            <p:stCondLst>
-                              <p:cond delay="0"/>
-                            </p:stCondLst>
-                            <p:childTnLst>
-                              <p:par>
-                                <p:cTn id="5" presetID="3" presetClass="entr" presetSubtype="10" fill="hold" grpId="0" nodeType="clickEffect">
-                                  <p:stCondLst>
-                                    <p:cond delay="0"/>
-                                  </p:stCondLst>
-                                  <p:childTnLst>
-                                    <p:set>
-                                      <p:cBhvr>
-                                        <p:cTn id="6" dur="1" fill="hold">
-                                          <p:stCondLst>
-                                            <p:cond delay="0"/>
-                                          </p:stCondLst>
-                                        </p:cTn>
-                                        <p:tgtEl>
-                                          <p:spTgt spid="887811">
-                                            <p:txEl>
-                                              <p:pRg st="0" end="0"/>
-                                            </p:txEl>
-                                          </p:spTgt>
-                                        </p:tgtEl>
-                                        <p:attrNameLst>
-                                          <p:attrName>style.visibility</p:attrName>
-                                        </p:attrNameLst>
-                                      </p:cBhvr>
-                                      <p:to>
-                                        <p:strVal val="visible"/>
-                                      </p:to>
-                                    </p:set>
-                                    <p:animEffect transition="in" filter="blinds(horizontal)">
-                                      <p:cBhvr>
-                                        <p:cTn id="7" dur="500"/>
-                                        <p:tgtEl>
-                                          <p:spTgt spid="887811">
-                                            <p:txEl>
-                                              <p:pRg st="0" end="0"/>
-                                            </p:txEl>
-                                          </p:spTgt>
-                                        </p:tgtEl>
-                                      </p:cBhvr>
-                                    </p:animEffect>
-                                  </p:childTnLst>
-                                </p:cTn>
-                              </p:par>
-                            </p:childTnLst>
-                          </p:cTn>
-                        </p:par>
-                      </p:childTnLst>
-                    </p:cTn>
-                  </p:par>
-                  <p:par>
-                    <p:cTn id="8" fill="hold">
-                      <p:stCondLst>
-                        <p:cond delay="indefinite"/>
-                      </p:stCondLst>
-                      <p:childTnLst>
-                        <p:par>
-                          <p:cTn id="9" fill="hold">
-                            <p:stCondLst>
-                              <p:cond delay="0"/>
-                            </p:stCondLst>
-                            <p:childTnLst>
-                              <p:par>
-                                <p:cTn id="10" presetID="3" presetClass="entr" presetSubtype="10" fill="hold" grpId="0" nodeType="clickEffect">
-                                  <p:stCondLst>
-                                    <p:cond delay="0"/>
-                                  </p:stCondLst>
-                                  <p:childTnLst>
-                                    <p:set>
-                                      <p:cBhvr>
-                                        <p:cTn id="11" dur="1" fill="hold">
-                                          <p:stCondLst>
-                                            <p:cond delay="0"/>
-                                          </p:stCondLst>
-                                        </p:cTn>
-                                        <p:tgtEl>
-                                          <p:spTgt spid="887811">
-                                            <p:txEl>
-                                              <p:pRg st="1" end="1"/>
-                                            </p:txEl>
-                                          </p:spTgt>
-                                        </p:tgtEl>
-                                        <p:attrNameLst>
-                                          <p:attrName>style.visibility</p:attrName>
-                                        </p:attrNameLst>
-                                      </p:cBhvr>
-                                      <p:to>
-                                        <p:strVal val="visible"/>
-                                      </p:to>
-                                    </p:set>
-                                    <p:animEffect transition="in" filter="blinds(horizontal)">
-                                      <p:cBhvr>
-                                        <p:cTn id="12" dur="500"/>
-                                        <p:tgtEl>
-                                          <p:spTgt spid="887811">
-                                            <p:txEl>
-                                              <p:pRg st="1" end="1"/>
-                                            </p:txEl>
-                                          </p:spTgt>
-                                        </p:tgtEl>
-                                      </p:cBhvr>
-                                    </p:animEffect>
-                                  </p:childTnLst>
-                                </p:cTn>
-                              </p:par>
-                            </p:childTnLst>
-                          </p:cTn>
-                        </p:par>
-                      </p:childTnLst>
-                    </p:cTn>
-                  </p:par>
-                  <p:par>
-                    <p:cTn id="13" fill="hold">
-                      <p:stCondLst>
-                        <p:cond delay="indefinite"/>
-                      </p:stCondLst>
-                      <p:childTnLst>
-                        <p:par>
-                          <p:cTn id="14" fill="hold">
-                            <p:stCondLst>
-                              <p:cond delay="0"/>
-                            </p:stCondLst>
-                            <p:childTnLst>
-                              <p:par>
-                                <p:cTn id="15" presetID="3" presetClass="entr" presetSubtype="10" fill="hold" grpId="0" nodeType="clickEffect">
-                                  <p:stCondLst>
-                                    <p:cond delay="0"/>
-                                  </p:stCondLst>
-                                  <p:childTnLst>
-                                    <p:set>
-                                      <p:cBhvr>
-                                        <p:cTn id="16" dur="1" fill="hold">
-                                          <p:stCondLst>
-                                            <p:cond delay="0"/>
-                                          </p:stCondLst>
-                                        </p:cTn>
-                                        <p:tgtEl>
-                                          <p:spTgt spid="887811">
-                                            <p:txEl>
-                                              <p:pRg st="2" end="2"/>
-                                            </p:txEl>
-                                          </p:spTgt>
-                                        </p:tgtEl>
-                                        <p:attrNameLst>
-                                          <p:attrName>style.visibility</p:attrName>
-                                        </p:attrNameLst>
-                                      </p:cBhvr>
-                                      <p:to>
-                                        <p:strVal val="visible"/>
-                                      </p:to>
-                                    </p:set>
-                                    <p:animEffect transition="in" filter="blinds(horizontal)">
-                                      <p:cBhvr>
-                                        <p:cTn id="17" dur="500"/>
-                                        <p:tgtEl>
-                                          <p:spTgt spid="887811">
-                                            <p:txEl>
-                                              <p:pRg st="2" end="2"/>
-                                            </p:txEl>
-                                          </p:spTgt>
-                                        </p:tgtEl>
-                                      </p:cBhvr>
-                                    </p:animEffect>
-                                  </p:childTnLst>
-                                </p:cTn>
-                              </p:par>
-                            </p:childTnLst>
-                          </p:cTn>
-                        </p:par>
-                      </p:childTnLst>
-                    </p:cTn>
-                  </p:par>
-                  <p:par>
-                    <p:cTn id="18" fill="hold">
-                      <p:stCondLst>
-                        <p:cond delay="indefinite"/>
-                      </p:stCondLst>
-                      <p:childTnLst>
-                        <p:par>
-                          <p:cTn id="19" fill="hold">
-                            <p:stCondLst>
-                              <p:cond delay="0"/>
-                            </p:stCondLst>
-                            <p:childTnLst>
-                              <p:par>
-                                <p:cTn id="20" presetID="3" presetClass="entr" presetSubtype="10" fill="hold" grpId="0" nodeType="clickEffect">
-                                  <p:stCondLst>
-                                    <p:cond delay="0"/>
-                                  </p:stCondLst>
-                                  <p:childTnLst>
-                                    <p:set>
-                                      <p:cBhvr>
-                                        <p:cTn id="21" dur="1" fill="hold">
-                                          <p:stCondLst>
-                                            <p:cond delay="0"/>
-                                          </p:stCondLst>
-                                        </p:cTn>
-                                        <p:tgtEl>
-                                          <p:spTgt spid="887811">
-                                            <p:txEl>
-                                              <p:pRg st="3" end="3"/>
-                                            </p:txEl>
-                                          </p:spTgt>
-                                        </p:tgtEl>
-                                        <p:attrNameLst>
-                                          <p:attrName>style.visibility</p:attrName>
-                                        </p:attrNameLst>
-                                      </p:cBhvr>
-                                      <p:to>
-                                        <p:strVal val="visible"/>
-                                      </p:to>
-                                    </p:set>
-                                    <p:animEffect transition="in" filter="blinds(horizontal)">
-                                      <p:cBhvr>
-                                        <p:cTn id="22" dur="500"/>
-                                        <p:tgtEl>
-                                          <p:spTgt spid="887811">
-                                            <p:txEl>
-                                              <p:pRg st="3" end="3"/>
-                                            </p:txEl>
-                                          </p:spTgt>
-                                        </p:tgtEl>
-                                      </p:cBhvr>
-                                    </p:animEffect>
-                                  </p:childTnLst>
-                                </p:cTn>
-                              </p:par>
-                            </p:childTnLst>
-                          </p:cTn>
-                        </p:par>
-                      </p:childTnLst>
-                    </p:cTn>
-                  </p:par>
-                  <p:par>
-                    <p:cTn id="23" fill="hold">
-                      <p:stCondLst>
-                        <p:cond delay="indefinite"/>
-                      </p:stCondLst>
-                      <p:childTnLst>
-                        <p:par>
-                          <p:cTn id="24" fill="hold">
-                            <p:stCondLst>
-                              <p:cond delay="0"/>
-                            </p:stCondLst>
-                            <p:childTnLst>
-                              <p:par>
-                                <p:cTn id="25" presetID="3" presetClass="entr" presetSubtype="10" fill="hold" grpId="0" nodeType="clickEffect">
-                                  <p:stCondLst>
-                                    <p:cond delay="0"/>
-                                  </p:stCondLst>
-                                  <p:childTnLst>
-                                    <p:set>
-                                      <p:cBhvr>
-                                        <p:cTn id="26" dur="1" fill="hold">
-                                          <p:stCondLst>
-                                            <p:cond delay="0"/>
-                                          </p:stCondLst>
-                                        </p:cTn>
-                                        <p:tgtEl>
-                                          <p:spTgt spid="887811">
-                                            <p:txEl>
-                                              <p:pRg st="4" end="4"/>
-                                            </p:txEl>
-                                          </p:spTgt>
-                                        </p:tgtEl>
-                                        <p:attrNameLst>
-                                          <p:attrName>style.visibility</p:attrName>
-                                        </p:attrNameLst>
-                                      </p:cBhvr>
-                                      <p:to>
-                                        <p:strVal val="visible"/>
-                                      </p:to>
-                                    </p:set>
-                                    <p:animEffect transition="in" filter="blinds(horizontal)">
-                                      <p:cBhvr>
-                                        <p:cTn id="27" dur="500"/>
-                                        <p:tgtEl>
-                                          <p:spTgt spid="887811">
-                                            <p:txEl>
-                                              <p:pRg st="4" end="4"/>
-                                            </p:txEl>
-                                          </p:spTgt>
-                                        </p:tgtEl>
-                                      </p:cBhvr>
-                                    </p:animEffect>
-                                  </p:childTnLst>
-                                </p:cTn>
-                              </p:par>
-                            </p:childTnLst>
-                          </p:cTn>
-                        </p:par>
-                      </p:childTnLst>
-                    </p:cTn>
-                  </p:par>
-                  <p:par>
-                    <p:cTn id="28" fill="hold">
-                      <p:stCondLst>
-                        <p:cond delay="indefinite"/>
-                      </p:stCondLst>
-                      <p:childTnLst>
-                        <p:par>
-                          <p:cTn id="29" fill="hold">
-                            <p:stCondLst>
-                              <p:cond delay="0"/>
-                            </p:stCondLst>
-                            <p:childTnLst>
-                              <p:par>
-                                <p:cTn id="30" presetID="3" presetClass="entr" presetSubtype="10" fill="hold" grpId="0" nodeType="clickEffect">
-                                  <p:stCondLst>
-                                    <p:cond delay="0"/>
-                                  </p:stCondLst>
-                                  <p:childTnLst>
-                                    <p:set>
-                                      <p:cBhvr>
-                                        <p:cTn id="31" dur="1" fill="hold">
-                                          <p:stCondLst>
-                                            <p:cond delay="0"/>
-                                          </p:stCondLst>
-                                        </p:cTn>
-                                        <p:tgtEl>
-                                          <p:spTgt spid="887811">
-                                            <p:txEl>
-                                              <p:pRg st="5" end="5"/>
-                                            </p:txEl>
-                                          </p:spTgt>
-                                        </p:tgtEl>
-                                        <p:attrNameLst>
-                                          <p:attrName>style.visibility</p:attrName>
-                                        </p:attrNameLst>
-                                      </p:cBhvr>
-                                      <p:to>
-                                        <p:strVal val="visible"/>
-                                      </p:to>
-                                    </p:set>
-                                    <p:animEffect transition="in" filter="blinds(horizontal)">
-                                      <p:cBhvr>
-                                        <p:cTn id="32" dur="500"/>
-                                        <p:tgtEl>
-                                          <p:spTgt spid="887811">
-                                            <p:txEl>
-                                              <p:pRg st="5" end="5"/>
-                                            </p:txEl>
-                                          </p:spTgt>
-                                        </p:tgtEl>
-                                      </p:cBhvr>
-                                    </p:animEffect>
-                                  </p:childTnLst>
-                                </p:cTn>
-                              </p:par>
-                            </p:childTnLst>
-                          </p:cTn>
-                        </p:par>
-                      </p:childTnLst>
-                    </p:cTn>
-                  </p:par>
-                  <p:par>
-                    <p:cTn id="33" fill="hold">
-                      <p:stCondLst>
-                        <p:cond delay="indefinite"/>
-                      </p:stCondLst>
-                      <p:childTnLst>
-                        <p:par>
-                          <p:cTn id="34" fill="hold">
-                            <p:stCondLst>
-                              <p:cond delay="0"/>
-                            </p:stCondLst>
-                            <p:childTnLst>
-                              <p:par>
-                                <p:cTn id="35" presetID="3" presetClass="entr" presetSubtype="10" fill="hold" grpId="0" nodeType="clickEffect">
-                                  <p:stCondLst>
-                                    <p:cond delay="0"/>
-                                  </p:stCondLst>
-                                  <p:childTnLst>
-                                    <p:set>
-                                      <p:cBhvr>
-                                        <p:cTn id="36" dur="1" fill="hold">
-                                          <p:stCondLst>
-                                            <p:cond delay="0"/>
-                                          </p:stCondLst>
-                                        </p:cTn>
-                                        <p:tgtEl>
-                                          <p:spTgt spid="887811">
-                                            <p:txEl>
-                                              <p:pRg st="6" end="6"/>
-                                            </p:txEl>
-                                          </p:spTgt>
-                                        </p:tgtEl>
-                                        <p:attrNameLst>
-                                          <p:attrName>style.visibility</p:attrName>
-                                        </p:attrNameLst>
-                                      </p:cBhvr>
-                                      <p:to>
-                                        <p:strVal val="visible"/>
-                                      </p:to>
-                                    </p:set>
-                                    <p:animEffect transition="in" filter="blinds(horizontal)">
-                                      <p:cBhvr>
-                                        <p:cTn id="37" dur="500"/>
-                                        <p:tgtEl>
-                                          <p:spTgt spid="887811">
-                                            <p:txEl>
-                                              <p:pRg st="6" end="6"/>
-                                            </p:txEl>
-                                          </p:spTgt>
-                                        </p:tgtEl>
-                                      </p:cBhvr>
-                                    </p:animEffect>
-                                  </p:childTnLst>
-                                </p:cTn>
-                              </p:par>
-                            </p:childTnLst>
-                          </p:cTn>
-                        </p:par>
-                      </p:childTnLst>
-                    </p:cTn>
-                  </p:par>
-                  <p:par>
-                    <p:cTn id="38" fill="hold">
-                      <p:stCondLst>
-                        <p:cond delay="indefinite"/>
-                      </p:stCondLst>
-                      <p:childTnLst>
-                        <p:par>
-                          <p:cTn id="39" fill="hold">
+                          <p:cTn id="39" fill="hold" nodeType="withGroup">
                             <p:stCondLst>
                               <p:cond delay="0"/>
                             </p:stCondLst>
@@ -21267,11 +22512,6 @@
               </a:rPr>
               <a:t>AUC</a:t>
             </a:r>
-            <a:endParaRPr lang="en-US" altLang="zh-CN" sz="2400" b="1" dirty="0">
-              <a:latin typeface="Times New Roman" panose="02020603050405020304" pitchFamily="18" charset="0"/>
-              <a:ea typeface="楷体" panose="02010609060101010101" pitchFamily="49" charset="-122"/>
-              <a:cs typeface="Times New Roman" panose="02020603050405020304" pitchFamily="18" charset="0"/>
-            </a:endParaRPr>
           </a:p>
         </p:txBody>
       </p:sp>
@@ -21284,7 +22524,7 @@
           <p:nvPr/>
         </p:nvPicPr>
         <p:blipFill>
-          <a:blip r:embed="rId1" cstate="print">
+          <a:blip r:embed="rId2" cstate="print">
             <a:extLst>
               <a:ext uri="{28A0092B-C50C-407E-A947-70E740481C1C}">
                 <a14:useLocalDpi xmlns:a14="http://schemas.microsoft.com/office/drawing/2010/main" val="0"/>
@@ -21340,6 +22580,11 @@
         </p:spPr>
       </p:pic>
     </p:spTree>
+    <p:extLst>
+      <p:ext uri="{BB962C8B-B14F-4D97-AF65-F5344CB8AC3E}">
+        <p14:creationId xmlns:p14="http://schemas.microsoft.com/office/powerpoint/2010/main" val="3273693375"/>
+      </p:ext>
+    </p:extLst>
   </p:cSld>
   <p:clrMapOvr>
     <a:masterClrMapping/>
@@ -21441,7 +22686,13 @@
       </p:grpSpPr>
       <p:sp>
         <p:nvSpPr>
-          <p:cNvPr id="18434" name="灯片编号占位符 5"/>
+          <p:cNvPr id="18434" name="灯片编号占位符 5">
+            <a:extLst>
+              <a:ext uri="{FF2B5EF4-FFF2-40B4-BE49-F238E27FC236}">
+                <a16:creationId xmlns:a16="http://schemas.microsoft.com/office/drawing/2014/main" id="{CBBD9809-2CC4-42C3-B564-FAC6896E7580}"/>
+              </a:ext>
+            </a:extLst>
+          </p:cNvPr>
           <p:cNvSpPr>
             <a:spLocks noGrp="1"/>
           </p:cNvSpPr>
@@ -21625,6 +22876,14 @@
               <a:rPr kumimoji="1" lang="en-US" altLang="zh-CN" sz="1400" smtClean="0">
                 <a:latin typeface="Times New Roman" panose="02020603050405020304" pitchFamily="18" charset="0"/>
               </a:rPr>
+              <a:pPr>
+                <a:spcBef>
+                  <a:spcPct val="0"/>
+                </a:spcBef>
+                <a:buFontTx/>
+                <a:buNone/>
+              </a:pPr>
+              <a:t>7</a:t>
             </a:fld>
             <a:endParaRPr kumimoji="1" lang="en-US" altLang="zh-CN" sz="1400">
               <a:latin typeface="Times New Roman" panose="02020603050405020304" pitchFamily="18" charset="0"/>
@@ -21634,7 +22893,13 @@
       </p:sp>
       <p:sp>
         <p:nvSpPr>
-          <p:cNvPr id="887811" name="Rectangle 3"/>
+          <p:cNvPr id="887811" name="Rectangle 3">
+            <a:extLst>
+              <a:ext uri="{FF2B5EF4-FFF2-40B4-BE49-F238E27FC236}">
+                <a16:creationId xmlns:a16="http://schemas.microsoft.com/office/drawing/2014/main" id="{E67925BF-BD9D-4849-975B-B00461AA9122}"/>
+              </a:ext>
+            </a:extLst>
+          </p:cNvPr>
           <p:cNvSpPr>
             <a:spLocks noGrp="1"/>
           </p:cNvSpPr>
@@ -21731,11 +22996,6 @@
               </a:rPr>
               <a:t>对数几率回归（极大似然法）</a:t>
             </a:r>
-            <a:endParaRPr lang="zh-CN" altLang="en-US" sz="2400" dirty="0">
-              <a:latin typeface="Times New Roman" panose="02020603050405020304" pitchFamily="18" charset="0"/>
-              <a:ea typeface="楷体" panose="02010609060101010101" pitchFamily="49" charset="-122"/>
-              <a:cs typeface="Times New Roman" panose="02020603050405020304" pitchFamily="18" charset="0"/>
-            </a:endParaRPr>
           </a:p>
           <a:p>
             <a:pPr lvl="1" eaLnBrk="1" hangingPunct="1">
@@ -21825,11 +23085,6 @@
               </a:rPr>
               <a:t>一对一</a:t>
             </a:r>
-            <a:endParaRPr lang="zh-CN" altLang="en-US" sz="2400" dirty="0">
-              <a:latin typeface="Times New Roman" panose="02020603050405020304" pitchFamily="18" charset="0"/>
-              <a:ea typeface="楷体" panose="02010609060101010101" pitchFamily="49" charset="-122"/>
-              <a:cs typeface="Times New Roman" panose="02020603050405020304" pitchFamily="18" charset="0"/>
-            </a:endParaRPr>
           </a:p>
           <a:p>
             <a:pPr lvl="1" eaLnBrk="1" hangingPunct="1">
@@ -21851,11 +23106,6 @@
               </a:rPr>
               <a:t>一对其余</a:t>
             </a:r>
-            <a:endParaRPr lang="zh-CN" altLang="en-US" sz="2400" dirty="0">
-              <a:latin typeface="Times New Roman" panose="02020603050405020304" pitchFamily="18" charset="0"/>
-              <a:ea typeface="楷体" panose="02010609060101010101" pitchFamily="49" charset="-122"/>
-              <a:cs typeface="Times New Roman" panose="02020603050405020304" pitchFamily="18" charset="0"/>
-            </a:endParaRPr>
           </a:p>
           <a:p>
             <a:pPr lvl="1" eaLnBrk="1" hangingPunct="1">
@@ -21893,11 +23143,6 @@
               </a:rPr>
               <a:t>）</a:t>
             </a:r>
-            <a:endParaRPr lang="zh-CN" altLang="en-US" sz="2400" dirty="0">
-              <a:latin typeface="Times New Roman" panose="02020603050405020304" pitchFamily="18" charset="0"/>
-              <a:ea typeface="楷体" panose="02010609060101010101" pitchFamily="49" charset="-122"/>
-              <a:cs typeface="Times New Roman" panose="02020603050405020304" pitchFamily="18" charset="0"/>
-            </a:endParaRPr>
           </a:p>
           <a:p>
             <a:pPr eaLnBrk="1" hangingPunct="1">
@@ -22043,7 +23288,13 @@
       </p:sp>
       <p:sp>
         <p:nvSpPr>
-          <p:cNvPr id="18436" name="Text Box 4"/>
+          <p:cNvPr id="18436" name="Text Box 4">
+            <a:extLst>
+              <a:ext uri="{FF2B5EF4-FFF2-40B4-BE49-F238E27FC236}">
+                <a16:creationId xmlns:a16="http://schemas.microsoft.com/office/drawing/2014/main" id="{EB81EA09-BA58-4C02-A7E1-E64004DF3351}"/>
+              </a:ext>
+            </a:extLst>
+          </p:cNvPr>
           <p:cNvSpPr txBox="1">
             <a:spLocks noChangeArrowheads="1"/>
           </p:cNvSpPr>
@@ -22267,11 +23518,6 @@
               </a:rPr>
               <a:t>章：线性模型</a:t>
             </a:r>
-            <a:endParaRPr kumimoji="1" lang="zh-CN" altLang="en-US" b="1" dirty="0">
-              <a:latin typeface="黑体" panose="02010609060101010101" pitchFamily="49" charset="-122"/>
-              <a:ea typeface="黑体" panose="02010609060101010101" pitchFamily="49" charset="-122"/>
-              <a:cs typeface="楷体_GB2312"/>
-            </a:endParaRPr>
           </a:p>
         </p:txBody>
       </p:sp>
@@ -22281,7 +23527,13 @@
           <p:cNvGraphicFramePr>
             <a:graphicFrameLocks noChangeAspect="1"/>
           </p:cNvGraphicFramePr>
-          <p:nvPr/>
+          <p:nvPr>
+            <p:extLst>
+              <p:ext uri="{D42A27DB-BD31-4B8C-83A1-F6EECF244321}">
+                <p14:modId xmlns:p14="http://schemas.microsoft.com/office/powerpoint/2010/main" val="1011501050"/>
+              </p:ext>
+            </p:extLst>
+          </p:nvPr>
         </p:nvGraphicFramePr>
         <p:xfrm>
           <a:off x="4211960" y="726281"/>
@@ -22291,23 +23543,23 @@
           <a:graphicData uri="http://schemas.openxmlformats.org/presentationml/2006/ole">
             <mc:AlternateContent xmlns:mc="http://schemas.openxmlformats.org/markup-compatibility/2006">
               <mc:Choice xmlns:v="urn:schemas-microsoft-com:vml" Requires="v">
-                <p:oleObj spid="_x0000_s27941" name="Formula" r:id="rId1" imgW="1096010" imgH="186690" progId="Equation.Ribbit">
+                <p:oleObj name="Formula" r:id="rId3" imgW="1096200" imgH="186840" progId="Equation.Ribbit">
                   <p:embed/>
                 </p:oleObj>
               </mc:Choice>
               <mc:Fallback>
-                <p:oleObj name="Formula" r:id="rId1" imgW="1096010" imgH="186690" progId="Equation.Ribbit">
+                <p:oleObj name="Formula" r:id="rId3" imgW="1096200" imgH="186840" progId="Equation.Ribbit">
                   <p:embed/>
                   <p:pic>
                     <p:nvPicPr>
-                      <p:cNvPr id="0" name="对象 5"/>
+                      <p:cNvPr id="6" name="对象 5"/>
                       <p:cNvPicPr>
                         <a:picLocks noChangeAspect="1" noChangeArrowheads="1"/>
                       </p:cNvPicPr>
                       <p:nvPr/>
                     </p:nvPicPr>
                     <p:blipFill>
-                      <a:blip r:embed="rId2">
+                      <a:blip r:embed="rId4">
                         <a:extLst>
                           <a:ext uri="{28A0092B-C50C-407E-A947-70E740481C1C}">
                             <a14:useLocalDpi xmlns:a14="http://schemas.microsoft.com/office/drawing/2010/main" val="0"/>
@@ -22367,7 +23619,7 @@
           <p:nvPr/>
         </p:nvPicPr>
         <p:blipFill>
-          <a:blip r:embed="rId3"/>
+          <a:blip r:embed="rId5"/>
           <a:stretch>
             <a:fillRect/>
           </a:stretch>
@@ -22388,7 +23640,13 @@
           <p:cNvGraphicFramePr>
             <a:graphicFrameLocks noChangeAspect="1"/>
           </p:cNvGraphicFramePr>
-          <p:nvPr/>
+          <p:nvPr>
+            <p:extLst>
+              <p:ext uri="{D42A27DB-BD31-4B8C-83A1-F6EECF244321}">
+                <p14:modId xmlns:p14="http://schemas.microsoft.com/office/powerpoint/2010/main" val="1885593413"/>
+              </p:ext>
+            </p:extLst>
+          </p:nvPr>
         </p:nvGraphicFramePr>
         <p:xfrm>
           <a:off x="7264021" y="2895020"/>
@@ -22398,23 +23656,23 @@
           <a:graphicData uri="http://schemas.openxmlformats.org/presentationml/2006/ole">
             <mc:AlternateContent xmlns:mc="http://schemas.openxmlformats.org/markup-compatibility/2006">
               <mc:Choice xmlns:v="urn:schemas-microsoft-com:vml" Requires="v">
-                <p:oleObj spid="_x0000_s3" name="Formula" r:id="rId4" imgW="839470" imgH="379730" progId="Equation.Ribbit">
+                <p:oleObj name="Formula" r:id="rId6" imgW="839520" imgH="379800" progId="Equation.Ribbit">
                   <p:embed/>
                 </p:oleObj>
               </mc:Choice>
               <mc:Fallback>
-                <p:oleObj name="Formula" r:id="rId4" imgW="839470" imgH="379730" progId="Equation.Ribbit">
+                <p:oleObj name="Formula" r:id="rId6" imgW="839520" imgH="379800" progId="Equation.Ribbit">
                   <p:embed/>
                   <p:pic>
                     <p:nvPicPr>
-                      <p:cNvPr id="0" name="对象 4"/>
+                      <p:cNvPr id="5" name="对象 4"/>
                       <p:cNvPicPr>
                         <a:picLocks noChangeAspect="1" noChangeArrowheads="1"/>
                       </p:cNvPicPr>
                       <p:nvPr/>
                     </p:nvPicPr>
                     <p:blipFill>
-                      <a:blip r:embed="rId5">
+                      <a:blip r:embed="rId7">
                         <a:extLst>
                           <a:ext uri="{28A0092B-C50C-407E-A947-70E740481C1C}">
                             <a14:useLocalDpi xmlns:a14="http://schemas.microsoft.com/office/drawing/2010/main" val="0"/>
@@ -22452,7 +23710,13 @@
           <p:cNvGraphicFramePr>
             <a:graphicFrameLocks noChangeAspect="1"/>
           </p:cNvGraphicFramePr>
-          <p:nvPr/>
+          <p:nvPr>
+            <p:extLst>
+              <p:ext uri="{D42A27DB-BD31-4B8C-83A1-F6EECF244321}">
+                <p14:modId xmlns:p14="http://schemas.microsoft.com/office/powerpoint/2010/main" val="620882007"/>
+              </p:ext>
+            </p:extLst>
+          </p:nvPr>
         </p:nvGraphicFramePr>
         <p:xfrm>
           <a:off x="5673535" y="1618580"/>
@@ -22462,23 +23726,23 @@
           <a:graphicData uri="http://schemas.openxmlformats.org/presentationml/2006/ole">
             <mc:AlternateContent xmlns:mc="http://schemas.openxmlformats.org/markup-compatibility/2006">
               <mc:Choice xmlns:v="urn:schemas-microsoft-com:vml" Requires="v">
-                <p:oleObj spid="_x0000_s4" name="Formula" r:id="rId6" imgW="1158240" imgH="344170" progId="Equation.Ribbit">
+                <p:oleObj name="Formula" r:id="rId8" imgW="1158480" imgH="344520" progId="Equation.Ribbit">
                   <p:embed/>
                 </p:oleObj>
               </mc:Choice>
               <mc:Fallback>
-                <p:oleObj name="Formula" r:id="rId6" imgW="1158240" imgH="344170" progId="Equation.Ribbit">
+                <p:oleObj name="Formula" r:id="rId8" imgW="1158480" imgH="344520" progId="Equation.Ribbit">
                   <p:embed/>
                   <p:pic>
                     <p:nvPicPr>
-                      <p:cNvPr id="0" name="对象 4"/>
+                      <p:cNvPr id="5" name="对象 4"/>
                       <p:cNvPicPr>
                         <a:picLocks noChangeAspect="1" noChangeArrowheads="1"/>
                       </p:cNvPicPr>
                       <p:nvPr/>
                     </p:nvPicPr>
                     <p:blipFill>
-                      <a:blip r:embed="rId7">
+                      <a:blip r:embed="rId9">
                         <a:extLst>
                           <a:ext uri="{28A0092B-C50C-407E-A947-70E740481C1C}">
                             <a14:useLocalDpi xmlns:a14="http://schemas.microsoft.com/office/drawing/2010/main" val="0"/>
@@ -22530,6 +23794,11 @@
         </a:graphic>
       </p:graphicFrame>
     </p:spTree>
+    <p:extLst>
+      <p:ext uri="{BB962C8B-B14F-4D97-AF65-F5344CB8AC3E}">
+        <p14:creationId xmlns:p14="http://schemas.microsoft.com/office/powerpoint/2010/main" val="99380758"/>
+      </p:ext>
+    </p:extLst>
   </p:cSld>
   <p:clrMapOvr>
     <a:masterClrMapping/>
@@ -23245,7 +24514,13 @@
       </p:grpSpPr>
       <p:sp>
         <p:nvSpPr>
-          <p:cNvPr id="18434" name="灯片编号占位符 5"/>
+          <p:cNvPr id="18434" name="灯片编号占位符 5">
+            <a:extLst>
+              <a:ext uri="{FF2B5EF4-FFF2-40B4-BE49-F238E27FC236}">
+                <a16:creationId xmlns:a16="http://schemas.microsoft.com/office/drawing/2014/main" id="{CBBD9809-2CC4-42C3-B564-FAC6896E7580}"/>
+              </a:ext>
+            </a:extLst>
+          </p:cNvPr>
           <p:cNvSpPr>
             <a:spLocks noGrp="1"/>
           </p:cNvSpPr>
@@ -23429,6 +24704,14 @@
               <a:rPr kumimoji="1" lang="en-US" altLang="zh-CN" sz="1400" smtClean="0">
                 <a:latin typeface="Times New Roman" panose="02020603050405020304" pitchFamily="18" charset="0"/>
               </a:rPr>
+              <a:pPr>
+                <a:spcBef>
+                  <a:spcPct val="0"/>
+                </a:spcBef>
+                <a:buFontTx/>
+                <a:buNone/>
+              </a:pPr>
+              <a:t>8</a:t>
             </a:fld>
             <a:endParaRPr kumimoji="1" lang="en-US" altLang="zh-CN" sz="1400">
               <a:latin typeface="Times New Roman" panose="02020603050405020304" pitchFamily="18" charset="0"/>
@@ -23438,7 +24721,13 @@
       </p:sp>
       <p:sp>
         <p:nvSpPr>
-          <p:cNvPr id="887811" name="Rectangle 3"/>
+          <p:cNvPr id="887811" name="Rectangle 3">
+            <a:extLst>
+              <a:ext uri="{FF2B5EF4-FFF2-40B4-BE49-F238E27FC236}">
+                <a16:creationId xmlns:a16="http://schemas.microsoft.com/office/drawing/2014/main" id="{E67925BF-BD9D-4849-975B-B00461AA9122}"/>
+              </a:ext>
+            </a:extLst>
+          </p:cNvPr>
           <p:cNvSpPr>
             <a:spLocks noGrp="1"/>
           </p:cNvSpPr>
@@ -23475,11 +24764,6 @@
               </a:rPr>
               <a:t>经典的属性划分方法：</a:t>
             </a:r>
-            <a:endParaRPr lang="zh-CN" altLang="en-US" sz="2800" b="1" dirty="0">
-              <a:latin typeface="Times New Roman" panose="02020603050405020304" pitchFamily="18" charset="0"/>
-              <a:ea typeface="楷体" panose="02010609060101010101" pitchFamily="49" charset="-122"/>
-              <a:cs typeface="Times New Roman" panose="02020603050405020304" pitchFamily="18" charset="0"/>
-            </a:endParaRPr>
           </a:p>
           <a:p>
             <a:pPr lvl="1" eaLnBrk="1" hangingPunct="1">
@@ -23509,11 +24793,6 @@
               </a:rPr>
               <a:t>ID3</a:t>
             </a:r>
-            <a:endParaRPr lang="en-US" altLang="zh-CN" sz="2400" dirty="0">
-              <a:latin typeface="Times New Roman" panose="02020603050405020304" pitchFamily="18" charset="0"/>
-              <a:ea typeface="楷体" panose="02010609060101010101" pitchFamily="49" charset="-122"/>
-              <a:cs typeface="Times New Roman" panose="02020603050405020304" pitchFamily="18" charset="0"/>
-            </a:endParaRPr>
           </a:p>
           <a:p>
             <a:pPr lvl="1" eaLnBrk="1" hangingPunct="1">
@@ -23543,11 +24822,6 @@
               </a:rPr>
               <a:t>C4.5</a:t>
             </a:r>
-            <a:endParaRPr lang="en-US" altLang="zh-CN" sz="2400" dirty="0">
-              <a:latin typeface="Times New Roman" panose="02020603050405020304" pitchFamily="18" charset="0"/>
-              <a:ea typeface="楷体" panose="02010609060101010101" pitchFamily="49" charset="-122"/>
-              <a:cs typeface="Times New Roman" panose="02020603050405020304" pitchFamily="18" charset="0"/>
-            </a:endParaRPr>
           </a:p>
           <a:p>
             <a:pPr lvl="1" eaLnBrk="1" hangingPunct="1">
@@ -23577,11 +24851,6 @@
               </a:rPr>
               <a:t>CART</a:t>
             </a:r>
-            <a:endParaRPr lang="en-US" altLang="zh-CN" sz="2400" dirty="0">
-              <a:latin typeface="Times New Roman" panose="02020603050405020304" pitchFamily="18" charset="0"/>
-              <a:ea typeface="楷体" panose="02010609060101010101" pitchFamily="49" charset="-122"/>
-              <a:cs typeface="Times New Roman" panose="02020603050405020304" pitchFamily="18" charset="0"/>
-            </a:endParaRPr>
           </a:p>
           <a:p>
             <a:pPr eaLnBrk="1" hangingPunct="1">
@@ -23603,11 +24872,6 @@
               </a:rPr>
               <a:t>剪枝处理：“过拟合”的解决手段</a:t>
             </a:r>
-            <a:endParaRPr lang="zh-CN" altLang="en-US" sz="2800" b="1" dirty="0">
-              <a:latin typeface="Times New Roman" panose="02020603050405020304" pitchFamily="18" charset="0"/>
-              <a:ea typeface="楷体" panose="02010609060101010101" pitchFamily="49" charset="-122"/>
-              <a:cs typeface="Times New Roman" panose="02020603050405020304" pitchFamily="18" charset="0"/>
-            </a:endParaRPr>
           </a:p>
           <a:p>
             <a:pPr lvl="1" eaLnBrk="1" hangingPunct="1">
@@ -23629,11 +24893,6 @@
               </a:rPr>
               <a:t>预剪枝（优缺点）</a:t>
             </a:r>
-            <a:endParaRPr lang="zh-CN" altLang="en-US" sz="2400" dirty="0">
-              <a:latin typeface="Times New Roman" panose="02020603050405020304" pitchFamily="18" charset="0"/>
-              <a:ea typeface="楷体" panose="02010609060101010101" pitchFamily="49" charset="-122"/>
-              <a:cs typeface="Times New Roman" panose="02020603050405020304" pitchFamily="18" charset="0"/>
-            </a:endParaRPr>
           </a:p>
           <a:p>
             <a:pPr lvl="1" eaLnBrk="1" hangingPunct="1">
@@ -23655,11 +24914,6 @@
               </a:rPr>
               <a:t>后剪枝（优缺点）</a:t>
             </a:r>
-            <a:endParaRPr lang="zh-CN" altLang="en-US" sz="2400" dirty="0">
-              <a:latin typeface="Times New Roman" panose="02020603050405020304" pitchFamily="18" charset="0"/>
-              <a:ea typeface="楷体" panose="02010609060101010101" pitchFamily="49" charset="-122"/>
-              <a:cs typeface="Times New Roman" panose="02020603050405020304" pitchFamily="18" charset="0"/>
-            </a:endParaRPr>
           </a:p>
           <a:p>
             <a:pPr eaLnBrk="1" hangingPunct="1">
@@ -23733,11 +24987,6 @@
               </a:rPr>
               <a:t>回归树</a:t>
             </a:r>
-            <a:endParaRPr lang="zh-CN" altLang="en-US" sz="2800" b="1" dirty="0">
-              <a:latin typeface="Times New Roman" panose="02020603050405020304" pitchFamily="18" charset="0"/>
-              <a:ea typeface="楷体" panose="02010609060101010101" pitchFamily="49" charset="-122"/>
-              <a:cs typeface="Times New Roman" panose="02020603050405020304" pitchFamily="18" charset="0"/>
-            </a:endParaRPr>
           </a:p>
           <a:p>
             <a:pPr marL="0" indent="0" eaLnBrk="1" hangingPunct="1">
@@ -23873,7 +25122,13 @@
       </p:sp>
       <p:sp>
         <p:nvSpPr>
-          <p:cNvPr id="18436" name="Text Box 4"/>
+          <p:cNvPr id="18436" name="Text Box 4">
+            <a:extLst>
+              <a:ext uri="{FF2B5EF4-FFF2-40B4-BE49-F238E27FC236}">
+                <a16:creationId xmlns:a16="http://schemas.microsoft.com/office/drawing/2014/main" id="{EB81EA09-BA58-4C02-A7E1-E64004DF3351}"/>
+              </a:ext>
+            </a:extLst>
+          </p:cNvPr>
           <p:cNvSpPr txBox="1">
             <a:spLocks noChangeArrowheads="1"/>
           </p:cNvSpPr>
@@ -24097,15 +25352,15 @@
               </a:rPr>
               <a:t>章：决策树</a:t>
             </a:r>
-            <a:endParaRPr kumimoji="1" lang="zh-CN" altLang="en-US" b="1" dirty="0">
-              <a:latin typeface="黑体" panose="02010609060101010101" pitchFamily="49" charset="-122"/>
-              <a:ea typeface="黑体" panose="02010609060101010101" pitchFamily="49" charset="-122"/>
-              <a:cs typeface="楷体_GB2312"/>
-            </a:endParaRPr>
           </a:p>
         </p:txBody>
       </p:sp>
     </p:spTree>
+    <p:extLst>
+      <p:ext uri="{BB962C8B-B14F-4D97-AF65-F5344CB8AC3E}">
+        <p14:creationId xmlns:p14="http://schemas.microsoft.com/office/powerpoint/2010/main" val="2249180221"/>
+      </p:ext>
+    </p:extLst>
   </p:cSld>
   <p:clrMapOvr>
     <a:masterClrMapping/>
@@ -24457,13 +25712,13 @@
                     </p:cTn>
                   </p:par>
                   <p:par>
-                    <p:cTn id="28" fill="hold">
+                    <p:cTn id="28" fill="hold" nodeType="clickPar">
                       <p:stCondLst>
                         <p:cond delay="indefinite"/>
                       </p:stCondLst>
                       <p:childTnLst>
                         <p:par>
-                          <p:cTn id="29" fill="hold">
+                          <p:cTn id="29" fill="hold" nodeType="withGroup">
                             <p:stCondLst>
                               <p:cond delay="0"/>
                             </p:stCondLst>
@@ -24718,7 +25973,7 @@
           <p:nvPr/>
         </p:nvPicPr>
         <p:blipFill>
-          <a:blip r:embed="rId1">
+          <a:blip r:embed="rId2">
             <a:extLst>
               <a:ext uri="{28A0092B-C50C-407E-A947-70E740481C1C}">
                 <a14:useLocalDpi xmlns:a14="http://schemas.microsoft.com/office/drawing/2010/main" val="0"/>
@@ -24764,6 +26019,11 @@
         </p:spPr>
       </p:pic>
     </p:spTree>
+    <p:extLst>
+      <p:ext uri="{BB962C8B-B14F-4D97-AF65-F5344CB8AC3E}">
+        <p14:creationId xmlns:p14="http://schemas.microsoft.com/office/powerpoint/2010/main" val="31295996"/>
+      </p:ext>
+    </p:extLst>
   </p:cSld>
   <p:clrMapOvr>
     <a:masterClrMapping/>
@@ -25049,11 +26309,8 @@
       </a:bgFillStyleLst>
     </a:fmtScheme>
   </a:themeElements>
-  <a:extLst>
-    <a:ext uri="{05A4C25C-085E-4340-85A3-A5531E510DB2}">
-      <thm15:themeFamily xmlns:thm15="http://schemas.microsoft.com/office/thememl/2012/main" name="Office Theme" id="{62F939B6-93AF-4DB8-9C6B-D6C7DFDC589F}" vid="{4A3C46E8-61CC-4603-A589-7422A47A8E4A}"/>
-    </a:ext>
-  </a:extLst>
+  <a:objectDefaults/>
+  <a:extraClrSchemeLst/>
 </a:theme>
 </file>
 
@@ -25337,11 +26594,8 @@
       </a:bgFillStyleLst>
     </a:fmtScheme>
   </a:themeElements>
-  <a:extLst>
-    <a:ext uri="{05A4C25C-085E-4340-85A3-A5531E510DB2}">
-      <thm15:themeFamily xmlns:thm15="http://schemas.microsoft.com/office/thememl/2012/main" name="Office Theme" id="{62F939B6-93AF-4DB8-9C6B-D6C7DFDC589F}" vid="{4A3C46E8-61CC-4603-A589-7422A47A8E4A}"/>
-    </a:ext>
-  </a:extLst>
+  <a:objectDefaults/>
+  <a:extraClrSchemeLst/>
 </a:theme>
 </file>
 
@@ -25625,10 +26879,7 @@
       </a:bgFillStyleLst>
     </a:fmtScheme>
   </a:themeElements>
-  <a:extLst>
-    <a:ext uri="{05A4C25C-085E-4340-85A3-A5531E510DB2}">
-      <thm15:themeFamily xmlns:thm15="http://schemas.microsoft.com/office/thememl/2012/main" name="Office Theme" id="{62F939B6-93AF-4DB8-9C6B-D6C7DFDC589F}" vid="{4A3C46E8-61CC-4603-A589-7422A47A8E4A}"/>
-    </a:ext>
-  </a:extLst>
+  <a:objectDefaults/>
+  <a:extraClrSchemeLst/>
 </a:theme>
 </file>
--- a/机器学习/课件/ML-复习2026.pptx
+++ b/机器学习/课件/ML-复习2026.pptx
@@ -1,36 +1,36 @@
 
 <file path=ppt/presentation.xml><?xml version="1.0" encoding="utf-8"?>
-<p:presentation xmlns:a="http://schemas.openxmlformats.org/drawingml/2006/main" xmlns:r="http://schemas.openxmlformats.org/officeDocument/2006/relationships" xmlns:p="http://schemas.openxmlformats.org/presentationml/2006/main" saveSubsetFonts="1">
+<p:presentation xmlns:a="http://schemas.openxmlformats.org/drawingml/2006/main" xmlns:r="http://schemas.openxmlformats.org/officeDocument/2006/relationships" xmlns:p="http://schemas.openxmlformats.org/presentationml/2006/main">
   <p:sldMasterIdLst>
     <p:sldMasterId id="2147483648" r:id="rId1"/>
   </p:sldMasterIdLst>
   <p:notesMasterIdLst>
-    <p:notesMasterId r:id="rId22"/>
+    <p:notesMasterId r:id="rId4"/>
   </p:notesMasterIdLst>
   <p:handoutMasterIdLst>
-    <p:handoutMasterId r:id="rId23"/>
+    <p:handoutMasterId r:id="rId24"/>
   </p:handoutMasterIdLst>
   <p:sldIdLst>
-    <p:sldId id="257" r:id="rId2"/>
-    <p:sldId id="440" r:id="rId3"/>
-    <p:sldId id="441" r:id="rId4"/>
-    <p:sldId id="442" r:id="rId5"/>
-    <p:sldId id="338" r:id="rId6"/>
-    <p:sldId id="456" r:id="rId7"/>
-    <p:sldId id="443" r:id="rId8"/>
-    <p:sldId id="444" r:id="rId9"/>
-    <p:sldId id="453" r:id="rId10"/>
-    <p:sldId id="445" r:id="rId11"/>
-    <p:sldId id="452" r:id="rId12"/>
-    <p:sldId id="446" r:id="rId13"/>
-    <p:sldId id="447" r:id="rId14"/>
-    <p:sldId id="455" r:id="rId15"/>
-    <p:sldId id="457" r:id="rId16"/>
-    <p:sldId id="448" r:id="rId17"/>
-    <p:sldId id="458" r:id="rId18"/>
-    <p:sldId id="449" r:id="rId19"/>
-    <p:sldId id="454" r:id="rId20"/>
-    <p:sldId id="459" r:id="rId21"/>
+    <p:sldId id="257" r:id="rId3"/>
+    <p:sldId id="440" r:id="rId5"/>
+    <p:sldId id="441" r:id="rId6"/>
+    <p:sldId id="442" r:id="rId7"/>
+    <p:sldId id="338" r:id="rId8"/>
+    <p:sldId id="456" r:id="rId9"/>
+    <p:sldId id="443" r:id="rId10"/>
+    <p:sldId id="444" r:id="rId11"/>
+    <p:sldId id="453" r:id="rId12"/>
+    <p:sldId id="445" r:id="rId13"/>
+    <p:sldId id="452" r:id="rId14"/>
+    <p:sldId id="446" r:id="rId15"/>
+    <p:sldId id="447" r:id="rId16"/>
+    <p:sldId id="455" r:id="rId17"/>
+    <p:sldId id="457" r:id="rId18"/>
+    <p:sldId id="448" r:id="rId19"/>
+    <p:sldId id="458" r:id="rId20"/>
+    <p:sldId id="449" r:id="rId21"/>
+    <p:sldId id="454" r:id="rId22"/>
+    <p:sldId id="459" r:id="rId23"/>
   </p:sldIdLst>
   <p:sldSz cx="9144000" cy="6858000" type="screen4x3"/>
   <p:notesSz cx="9144000" cy="6858000"/>
@@ -162,31 +162,17 @@
   <p:extLst>
     <p:ext uri="{EFAFB233-063F-42B5-8137-9DF3F51BA10A}">
       <p15:sldGuideLst xmlns:p15="http://schemas.microsoft.com/office/powerpoint/2012/main">
-        <p15:guide id="1" orient="horz" pos="2160">
+        <p15:guide id="1" orient="horz" pos="2160" userDrawn="1">
           <p15:clr>
             <a:srgbClr val="A4A3A4"/>
           </p15:clr>
         </p15:guide>
-        <p15:guide id="2" pos="2880">
+        <p15:guide id="2" pos="2857" userDrawn="1">
           <p15:clr>
             <a:srgbClr val="A4A3A4"/>
           </p15:clr>
         </p15:guide>
       </p15:sldGuideLst>
-    </p:ext>
-    <p:ext uri="{2D200454-40CA-4A62-9FC3-DE9A4176ACB9}">
-      <p15:notesGuideLst xmlns:p15="http://schemas.microsoft.com/office/powerpoint/2012/main">
-        <p15:guide id="1" orient="horz" pos="2160">
-          <p15:clr>
-            <a:srgbClr val="A4A3A4"/>
-          </p15:clr>
-        </p15:guide>
-        <p15:guide id="2" pos="2880">
-          <p15:clr>
-            <a:srgbClr val="A4A3A4"/>
-          </p15:clr>
-        </p15:guide>
-      </p15:notesGuideLst>
     </p:ext>
   </p:extLst>
 </p:presentation>
@@ -219,13 +205,7 @@
       </p:grpSpPr>
       <p:sp>
         <p:nvSpPr>
-          <p:cNvPr id="2" name="页眉占位符 1">
-            <a:extLst>
-              <a:ext uri="{FF2B5EF4-FFF2-40B4-BE49-F238E27FC236}">
-                <a16:creationId xmlns:a16="http://schemas.microsoft.com/office/drawing/2014/main" id="{16F1F154-D08B-4637-BD6B-EE69DBEDFA29}"/>
-              </a:ext>
-            </a:extLst>
-          </p:cNvPr>
+          <p:cNvPr id="2" name="页眉占位符 1"/>
           <p:cNvSpPr>
             <a:spLocks noGrp="1"/>
           </p:cNvSpPr>
@@ -268,13 +248,7 @@
       </p:sp>
       <p:sp>
         <p:nvSpPr>
-          <p:cNvPr id="3" name="日期占位符 2">
-            <a:extLst>
-              <a:ext uri="{FF2B5EF4-FFF2-40B4-BE49-F238E27FC236}">
-                <a16:creationId xmlns:a16="http://schemas.microsoft.com/office/drawing/2014/main" id="{73F24782-B8CC-4BB5-84E6-002BAC732084}"/>
-              </a:ext>
-            </a:extLst>
-          </p:cNvPr>
+          <p:cNvPr id="3" name="日期占位符 2"/>
           <p:cNvSpPr>
             <a:spLocks noGrp="1"/>
           </p:cNvSpPr>
@@ -313,10 +287,6 @@
             </a:pPr>
             <a:fld id="{081DFCA3-140D-47A9-812B-EF4671D077DA}" type="datetimeFigureOut">
               <a:rPr lang="zh-CN" altLang="en-US"/>
-              <a:pPr>
-                <a:defRPr/>
-              </a:pPr>
-              <a:t>2026/6/2</a:t>
             </a:fld>
             <a:endParaRPr lang="zh-CN" altLang="en-US"/>
           </a:p>
@@ -324,13 +294,7 @@
       </p:sp>
       <p:sp>
         <p:nvSpPr>
-          <p:cNvPr id="4" name="页脚占位符 3">
-            <a:extLst>
-              <a:ext uri="{FF2B5EF4-FFF2-40B4-BE49-F238E27FC236}">
-                <a16:creationId xmlns:a16="http://schemas.microsoft.com/office/drawing/2014/main" id="{DB747B93-988F-4543-BD9C-1C7CB3B58114}"/>
-              </a:ext>
-            </a:extLst>
-          </p:cNvPr>
+          <p:cNvPr id="4" name="页脚占位符 3"/>
           <p:cNvSpPr>
             <a:spLocks noGrp="1"/>
           </p:cNvSpPr>
@@ -373,13 +337,7 @@
       </p:sp>
       <p:sp>
         <p:nvSpPr>
-          <p:cNvPr id="5" name="灯片编号占位符 4">
-            <a:extLst>
-              <a:ext uri="{FF2B5EF4-FFF2-40B4-BE49-F238E27FC236}">
-                <a16:creationId xmlns:a16="http://schemas.microsoft.com/office/drawing/2014/main" id="{BD722FE9-DBFB-41DB-83A5-159F33A862E4}"/>
-              </a:ext>
-            </a:extLst>
-          </p:cNvPr>
+          <p:cNvPr id="5" name="灯片编号占位符 4"/>
           <p:cNvSpPr>
             <a:spLocks noGrp="1"/>
           </p:cNvSpPr>
@@ -397,11 +355,7 @@
           </a:prstGeom>
         </p:spPr>
         <p:txBody>
-          <a:bodyPr vert="horz" wrap="square" lIns="91440" tIns="45720" rIns="91440" bIns="45720" numCol="1" anchor="b" anchorCtr="0" compatLnSpc="1">
-            <a:prstTxWarp prst="textNoShape">
-              <a:avLst/>
-            </a:prstTxWarp>
-          </a:bodyPr>
+          <a:bodyPr vert="horz" wrap="square" lIns="91440" tIns="45720" rIns="91440" bIns="45720" numCol="1" anchor="b" anchorCtr="0" compatLnSpc="1"/>
           <a:lstStyle>
             <a:lvl1pPr algn="r" eaLnBrk="1" hangingPunct="1">
               <a:defRPr sz="1200"/>
@@ -413,21 +367,12 @@
             </a:pPr>
             <a:fld id="{274AB649-9B77-47B4-86AE-79A195B7BF2A}" type="slidenum">
               <a:rPr lang="zh-CN" altLang="en-US"/>
-              <a:pPr>
-                <a:defRPr/>
-              </a:pPr>
-              <a:t>‹#›</a:t>
             </a:fld>
             <a:endParaRPr lang="zh-CN" altLang="en-US"/>
           </a:p>
         </p:txBody>
       </p:sp>
     </p:spTree>
-    <p:extLst>
-      <p:ext uri="{BB962C8B-B14F-4D97-AF65-F5344CB8AC3E}">
-        <p14:creationId xmlns:p14="http://schemas.microsoft.com/office/powerpoint/2010/main" val="1"/>
-      </p:ext>
-    </p:extLst>
   </p:cSld>
   <p:clrMap bg1="lt1" tx1="dk1" bg2="lt2" tx2="dk2" accent1="accent1" accent2="accent2" accent3="accent3" accent4="accent4" accent5="accent5" accent6="accent6" hlink="hlink" folHlink="folHlink"/>
 </p:handoutMaster>
@@ -460,13 +405,7 @@
       </p:grpSpPr>
       <p:sp>
         <p:nvSpPr>
-          <p:cNvPr id="2" name="页眉占位符 1">
-            <a:extLst>
-              <a:ext uri="{FF2B5EF4-FFF2-40B4-BE49-F238E27FC236}">
-                <a16:creationId xmlns:a16="http://schemas.microsoft.com/office/drawing/2014/main" id="{BDCBF277-B712-400F-957F-39A8A840EED6}"/>
-              </a:ext>
-            </a:extLst>
-          </p:cNvPr>
+          <p:cNvPr id="2" name="页眉占位符 1"/>
           <p:cNvSpPr>
             <a:spLocks noGrp="1"/>
           </p:cNvSpPr>
@@ -509,13 +448,7 @@
       </p:sp>
       <p:sp>
         <p:nvSpPr>
-          <p:cNvPr id="3" name="日期占位符 2">
-            <a:extLst>
-              <a:ext uri="{FF2B5EF4-FFF2-40B4-BE49-F238E27FC236}">
-                <a16:creationId xmlns:a16="http://schemas.microsoft.com/office/drawing/2014/main" id="{D931A883-E5D4-4659-8BCA-E5DCFAE454B1}"/>
-              </a:ext>
-            </a:extLst>
-          </p:cNvPr>
+          <p:cNvPr id="3" name="日期占位符 2"/>
           <p:cNvSpPr>
             <a:spLocks noGrp="1"/>
           </p:cNvSpPr>
@@ -554,10 +487,6 @@
             </a:pPr>
             <a:fld id="{822AF62D-6F31-46D6-B269-0F8F56C4162E}" type="datetimeFigureOut">
               <a:rPr lang="zh-CN" altLang="en-US"/>
-              <a:pPr>
-                <a:defRPr/>
-              </a:pPr>
-              <a:t>2026/6/2</a:t>
             </a:fld>
             <a:endParaRPr lang="zh-CN" altLang="en-US"/>
           </a:p>
@@ -565,13 +494,7 @@
       </p:sp>
       <p:sp>
         <p:nvSpPr>
-          <p:cNvPr id="4" name="幻灯片图像占位符 3">
-            <a:extLst>
-              <a:ext uri="{FF2B5EF4-FFF2-40B4-BE49-F238E27FC236}">
-                <a16:creationId xmlns:a16="http://schemas.microsoft.com/office/drawing/2014/main" id="{5F41D5C3-29C3-4D18-A73E-68E70946BD1C}"/>
-              </a:ext>
-            </a:extLst>
-          </p:cNvPr>
+          <p:cNvPr id="4" name="幻灯片图像占位符 3"/>
           <p:cNvSpPr>
             <a:spLocks noGrp="1" noRot="1" noChangeAspect="1"/>
           </p:cNvSpPr>
@@ -605,13 +528,7 @@
       </p:sp>
       <p:sp>
         <p:nvSpPr>
-          <p:cNvPr id="5" name="备注占位符 4">
-            <a:extLst>
-              <a:ext uri="{FF2B5EF4-FFF2-40B4-BE49-F238E27FC236}">
-                <a16:creationId xmlns:a16="http://schemas.microsoft.com/office/drawing/2014/main" id="{4E8581BB-C447-4235-AF25-DF5DD22191EA}"/>
-              </a:ext>
-            </a:extLst>
-          </p:cNvPr>
+          <p:cNvPr id="5" name="备注占位符 4"/>
           <p:cNvSpPr>
             <a:spLocks noGrp="1"/>
           </p:cNvSpPr>
@@ -637,6 +554,7 @@
               <a:rPr lang="zh-CN" altLang="en-US" noProof="0"/>
               <a:t>单击此处编辑母版文本样式</a:t>
             </a:r>
+            <a:endParaRPr lang="zh-CN" altLang="en-US" noProof="0"/>
           </a:p>
           <a:p>
             <a:pPr lvl="1"/>
@@ -644,6 +562,7 @@
               <a:rPr lang="zh-CN" altLang="en-US" noProof="0"/>
               <a:t>第二级</a:t>
             </a:r>
+            <a:endParaRPr lang="zh-CN" altLang="en-US" noProof="0"/>
           </a:p>
           <a:p>
             <a:pPr lvl="2"/>
@@ -651,6 +570,7 @@
               <a:rPr lang="zh-CN" altLang="en-US" noProof="0"/>
               <a:t>第三级</a:t>
             </a:r>
+            <a:endParaRPr lang="zh-CN" altLang="en-US" noProof="0"/>
           </a:p>
           <a:p>
             <a:pPr lvl="3"/>
@@ -658,6 +578,7 @@
               <a:rPr lang="zh-CN" altLang="en-US" noProof="0"/>
               <a:t>第四级</a:t>
             </a:r>
+            <a:endParaRPr lang="zh-CN" altLang="en-US" noProof="0"/>
           </a:p>
           <a:p>
             <a:pPr lvl="4"/>
@@ -665,18 +586,13 @@
               <a:rPr lang="zh-CN" altLang="en-US" noProof="0"/>
               <a:t>第五级</a:t>
             </a:r>
+            <a:endParaRPr lang="zh-CN" altLang="en-US" noProof="0"/>
           </a:p>
         </p:txBody>
       </p:sp>
       <p:sp>
         <p:nvSpPr>
-          <p:cNvPr id="6" name="页脚占位符 5">
-            <a:extLst>
-              <a:ext uri="{FF2B5EF4-FFF2-40B4-BE49-F238E27FC236}">
-                <a16:creationId xmlns:a16="http://schemas.microsoft.com/office/drawing/2014/main" id="{BC2BF2D4-077B-491A-A12A-DA192A4FE69B}"/>
-              </a:ext>
-            </a:extLst>
-          </p:cNvPr>
+          <p:cNvPr id="6" name="页脚占位符 5"/>
           <p:cNvSpPr>
             <a:spLocks noGrp="1"/>
           </p:cNvSpPr>
@@ -719,13 +635,7 @@
       </p:sp>
       <p:sp>
         <p:nvSpPr>
-          <p:cNvPr id="7" name="灯片编号占位符 6">
-            <a:extLst>
-              <a:ext uri="{FF2B5EF4-FFF2-40B4-BE49-F238E27FC236}">
-                <a16:creationId xmlns:a16="http://schemas.microsoft.com/office/drawing/2014/main" id="{8E56B28C-60B8-44BD-9F27-BF4F6458E97E}"/>
-              </a:ext>
-            </a:extLst>
-          </p:cNvPr>
+          <p:cNvPr id="7" name="灯片编号占位符 6"/>
           <p:cNvSpPr>
             <a:spLocks noGrp="1"/>
           </p:cNvSpPr>
@@ -743,11 +653,7 @@
           </a:prstGeom>
         </p:spPr>
         <p:txBody>
-          <a:bodyPr vert="horz" wrap="square" lIns="91440" tIns="45720" rIns="91440" bIns="45720" numCol="1" anchor="b" anchorCtr="0" compatLnSpc="1">
-            <a:prstTxWarp prst="textNoShape">
-              <a:avLst/>
-            </a:prstTxWarp>
-          </a:bodyPr>
+          <a:bodyPr vert="horz" wrap="square" lIns="91440" tIns="45720" rIns="91440" bIns="45720" numCol="1" anchor="b" anchorCtr="0" compatLnSpc="1"/>
           <a:lstStyle>
             <a:lvl1pPr algn="r" eaLnBrk="1" hangingPunct="1">
               <a:defRPr sz="1200"/>
@@ -759,10 +665,6 @@
             </a:pPr>
             <a:fld id="{E942E71B-E9B3-4820-B67A-F8BCFD290363}" type="slidenum">
               <a:rPr lang="zh-CN" altLang="en-US"/>
-              <a:pPr>
-                <a:defRPr/>
-              </a:pPr>
-              <a:t>‹#›</a:t>
             </a:fld>
             <a:endParaRPr lang="zh-CN" altLang="en-US"/>
           </a:p>
@@ -915,13 +817,7 @@
       </p:grpSpPr>
       <p:sp>
         <p:nvSpPr>
-          <p:cNvPr id="6146" name="Rectangle 2">
-            <a:extLst>
-              <a:ext uri="{FF2B5EF4-FFF2-40B4-BE49-F238E27FC236}">
-                <a16:creationId xmlns:a16="http://schemas.microsoft.com/office/drawing/2014/main" id="{4D01A8CA-9D3D-4C4D-8CDD-E6DF20BF1131}"/>
-              </a:ext>
-            </a:extLst>
-          </p:cNvPr>
+          <p:cNvPr id="6146" name="Rectangle 2"/>
           <p:cNvSpPr>
             <a:spLocks noGrp="1" noChangeArrowheads="1"/>
           </p:cNvSpPr>
@@ -952,13 +848,9 @@
           </a:extLst>
         </p:spPr>
         <p:txBody>
-          <a:bodyPr wrap="square" numCol="1" anchor="t" anchorCtr="0" compatLnSpc="1">
-            <a:prstTxWarp prst="textNoShape">
-              <a:avLst/>
-            </a:prstTxWarp>
-          </a:bodyPr>
+          <a:bodyPr wrap="square" numCol="1" anchor="t" anchorCtr="0" compatLnSpc="1"/>
           <a:lstStyle>
-            <a:lvl1pPr defTabSz="973138">
+            <a:lvl1pPr defTabSz="973455">
               <a:spcBef>
                 <a:spcPct val="30000"/>
               </a:spcBef>
@@ -970,7 +862,7 @@
                 <a:ea typeface="宋体" panose="02010600030101010101" pitchFamily="2" charset="-122"/>
               </a:defRPr>
             </a:lvl1pPr>
-            <a:lvl2pPr marL="742950" indent="-285750" defTabSz="973138">
+            <a:lvl2pPr marL="742950" indent="-285750" defTabSz="973455">
               <a:spcBef>
                 <a:spcPct val="30000"/>
               </a:spcBef>
@@ -982,7 +874,7 @@
                 <a:ea typeface="宋体" panose="02010600030101010101" pitchFamily="2" charset="-122"/>
               </a:defRPr>
             </a:lvl2pPr>
-            <a:lvl3pPr marL="1143000" indent="-228600" defTabSz="973138">
+            <a:lvl3pPr marL="1143000" indent="-228600" defTabSz="973455">
               <a:spcBef>
                 <a:spcPct val="30000"/>
               </a:spcBef>
@@ -994,7 +886,7 @@
                 <a:ea typeface="宋体" panose="02010600030101010101" pitchFamily="2" charset="-122"/>
               </a:defRPr>
             </a:lvl3pPr>
-            <a:lvl4pPr marL="1600200" indent="-228600" defTabSz="973138">
+            <a:lvl4pPr marL="1600200" indent="-228600" defTabSz="973455">
               <a:spcBef>
                 <a:spcPct val="30000"/>
               </a:spcBef>
@@ -1006,7 +898,7 @@
                 <a:ea typeface="宋体" panose="02010600030101010101" pitchFamily="2" charset="-122"/>
               </a:defRPr>
             </a:lvl4pPr>
-            <a:lvl5pPr marL="2057400" indent="-228600" defTabSz="973138">
+            <a:lvl5pPr marL="2057400" indent="-228600" defTabSz="973455">
               <a:spcBef>
                 <a:spcPct val="30000"/>
               </a:spcBef>
@@ -1018,7 +910,7 @@
                 <a:ea typeface="宋体" panose="02010600030101010101" pitchFamily="2" charset="-122"/>
               </a:defRPr>
             </a:lvl5pPr>
-            <a:lvl6pPr marL="2514600" indent="-228600" defTabSz="973138" eaLnBrk="0" fontAlgn="base" hangingPunct="0">
+            <a:lvl6pPr marL="2514600" indent="-228600" defTabSz="973455" eaLnBrk="0" fontAlgn="base" hangingPunct="0">
               <a:spcBef>
                 <a:spcPct val="30000"/>
               </a:spcBef>
@@ -1033,7 +925,7 @@
                 <a:ea typeface="宋体" panose="02010600030101010101" pitchFamily="2" charset="-122"/>
               </a:defRPr>
             </a:lvl6pPr>
-            <a:lvl7pPr marL="2971800" indent="-228600" defTabSz="973138" eaLnBrk="0" fontAlgn="base" hangingPunct="0">
+            <a:lvl7pPr marL="2971800" indent="-228600" defTabSz="973455" eaLnBrk="0" fontAlgn="base" hangingPunct="0">
               <a:spcBef>
                 <a:spcPct val="30000"/>
               </a:spcBef>
@@ -1048,7 +940,7 @@
                 <a:ea typeface="宋体" panose="02010600030101010101" pitchFamily="2" charset="-122"/>
               </a:defRPr>
             </a:lvl7pPr>
-            <a:lvl8pPr marL="3429000" indent="-228600" defTabSz="973138" eaLnBrk="0" fontAlgn="base" hangingPunct="0">
+            <a:lvl8pPr marL="3429000" indent="-228600" defTabSz="973455" eaLnBrk="0" fontAlgn="base" hangingPunct="0">
               <a:spcBef>
                 <a:spcPct val="30000"/>
               </a:spcBef>
@@ -1063,7 +955,7 @@
                 <a:ea typeface="宋体" panose="02010600030101010101" pitchFamily="2" charset="-122"/>
               </a:defRPr>
             </a:lvl8pPr>
-            <a:lvl9pPr marL="3886200" indent="-228600" defTabSz="973138" eaLnBrk="0" fontAlgn="base" hangingPunct="0">
+            <a:lvl9pPr marL="3886200" indent="-228600" defTabSz="973455" eaLnBrk="0" fontAlgn="base" hangingPunct="0">
               <a:spcBef>
                 <a:spcPct val="30000"/>
               </a:spcBef>
@@ -1094,18 +986,15 @@
               </a:rPr>
               <a:t>高等代数</a:t>
             </a:r>
+            <a:endParaRPr kumimoji="1" lang="en-US" altLang="zh-CN" sz="1300">
+              <a:latin typeface="Times New Roman" panose="02020603050405020304" pitchFamily="18" charset="0"/>
+            </a:endParaRPr>
           </a:p>
         </p:txBody>
       </p:sp>
       <p:sp>
         <p:nvSpPr>
-          <p:cNvPr id="6147" name="Rectangle 3">
-            <a:extLst>
-              <a:ext uri="{FF2B5EF4-FFF2-40B4-BE49-F238E27FC236}">
-                <a16:creationId xmlns:a16="http://schemas.microsoft.com/office/drawing/2014/main" id="{9908787A-D443-429F-A574-148DE50B38AD}"/>
-              </a:ext>
-            </a:extLst>
-          </p:cNvPr>
+          <p:cNvPr id="6147" name="Rectangle 3"/>
           <p:cNvSpPr>
             <a:spLocks noGrp="1" noChangeArrowheads="1"/>
           </p:cNvSpPr>
@@ -1136,13 +1025,9 @@
           </a:extLst>
         </p:spPr>
         <p:txBody>
-          <a:bodyPr wrap="square" numCol="1" anchor="t" anchorCtr="0" compatLnSpc="1">
-            <a:prstTxWarp prst="textNoShape">
-              <a:avLst/>
-            </a:prstTxWarp>
-          </a:bodyPr>
+          <a:bodyPr wrap="square" numCol="1" anchor="t" anchorCtr="0" compatLnSpc="1"/>
           <a:lstStyle>
-            <a:lvl1pPr defTabSz="973138">
+            <a:lvl1pPr defTabSz="973455">
               <a:spcBef>
                 <a:spcPct val="30000"/>
               </a:spcBef>
@@ -1154,7 +1039,7 @@
                 <a:ea typeface="宋体" panose="02010600030101010101" pitchFamily="2" charset="-122"/>
               </a:defRPr>
             </a:lvl1pPr>
-            <a:lvl2pPr marL="742950" indent="-285750" defTabSz="973138">
+            <a:lvl2pPr marL="742950" indent="-285750" defTabSz="973455">
               <a:spcBef>
                 <a:spcPct val="30000"/>
               </a:spcBef>
@@ -1166,7 +1051,7 @@
                 <a:ea typeface="宋体" panose="02010600030101010101" pitchFamily="2" charset="-122"/>
               </a:defRPr>
             </a:lvl2pPr>
-            <a:lvl3pPr marL="1143000" indent="-228600" defTabSz="973138">
+            <a:lvl3pPr marL="1143000" indent="-228600" defTabSz="973455">
               <a:spcBef>
                 <a:spcPct val="30000"/>
               </a:spcBef>
@@ -1178,7 +1063,7 @@
                 <a:ea typeface="宋体" panose="02010600030101010101" pitchFamily="2" charset="-122"/>
               </a:defRPr>
             </a:lvl3pPr>
-            <a:lvl4pPr marL="1600200" indent="-228600" defTabSz="973138">
+            <a:lvl4pPr marL="1600200" indent="-228600" defTabSz="973455">
               <a:spcBef>
                 <a:spcPct val="30000"/>
               </a:spcBef>
@@ -1190,7 +1075,7 @@
                 <a:ea typeface="宋体" panose="02010600030101010101" pitchFamily="2" charset="-122"/>
               </a:defRPr>
             </a:lvl4pPr>
-            <a:lvl5pPr marL="2057400" indent="-228600" defTabSz="973138">
+            <a:lvl5pPr marL="2057400" indent="-228600" defTabSz="973455">
               <a:spcBef>
                 <a:spcPct val="30000"/>
               </a:spcBef>
@@ -1202,7 +1087,7 @@
                 <a:ea typeface="宋体" panose="02010600030101010101" pitchFamily="2" charset="-122"/>
               </a:defRPr>
             </a:lvl5pPr>
-            <a:lvl6pPr marL="2514600" indent="-228600" defTabSz="973138" eaLnBrk="0" fontAlgn="base" hangingPunct="0">
+            <a:lvl6pPr marL="2514600" indent="-228600" defTabSz="973455" eaLnBrk="0" fontAlgn="base" hangingPunct="0">
               <a:spcBef>
                 <a:spcPct val="30000"/>
               </a:spcBef>
@@ -1217,7 +1102,7 @@
                 <a:ea typeface="宋体" panose="02010600030101010101" pitchFamily="2" charset="-122"/>
               </a:defRPr>
             </a:lvl6pPr>
-            <a:lvl7pPr marL="2971800" indent="-228600" defTabSz="973138" eaLnBrk="0" fontAlgn="base" hangingPunct="0">
+            <a:lvl7pPr marL="2971800" indent="-228600" defTabSz="973455" eaLnBrk="0" fontAlgn="base" hangingPunct="0">
               <a:spcBef>
                 <a:spcPct val="30000"/>
               </a:spcBef>
@@ -1232,7 +1117,7 @@
                 <a:ea typeface="宋体" panose="02010600030101010101" pitchFamily="2" charset="-122"/>
               </a:defRPr>
             </a:lvl7pPr>
-            <a:lvl8pPr marL="3429000" indent="-228600" defTabSz="973138" eaLnBrk="0" fontAlgn="base" hangingPunct="0">
+            <a:lvl8pPr marL="3429000" indent="-228600" defTabSz="973455" eaLnBrk="0" fontAlgn="base" hangingPunct="0">
               <a:spcBef>
                 <a:spcPct val="30000"/>
               </a:spcBef>
@@ -1247,7 +1132,7 @@
                 <a:ea typeface="宋体" panose="02010600030101010101" pitchFamily="2" charset="-122"/>
               </a:defRPr>
             </a:lvl8pPr>
-            <a:lvl9pPr marL="3886200" indent="-228600" defTabSz="973138" eaLnBrk="0" fontAlgn="base" hangingPunct="0">
+            <a:lvl9pPr marL="3886200" indent="-228600" defTabSz="973455" eaLnBrk="0" fontAlgn="base" hangingPunct="0">
               <a:spcBef>
                 <a:spcPct val="30000"/>
               </a:spcBef>
@@ -1276,15 +1161,6 @@
               <a:rPr kumimoji="1" lang="zh-CN" altLang="en-US" sz="1300" smtClean="0">
                 <a:latin typeface="Times New Roman" panose="02020603050405020304" pitchFamily="18" charset="0"/>
               </a:rPr>
-              <a:pPr fontAlgn="base">
-                <a:spcBef>
-                  <a:spcPct val="0"/>
-                </a:spcBef>
-                <a:spcAft>
-                  <a:spcPct val="0"/>
-                </a:spcAft>
-              </a:pPr>
-              <a:t>2026/6/2</a:t>
             </a:fld>
             <a:endParaRPr kumimoji="1" lang="en-US" altLang="zh-CN" sz="1300">
               <a:latin typeface="Times New Roman" panose="02020603050405020304" pitchFamily="18" charset="0"/>
@@ -1294,13 +1170,7 @@
       </p:sp>
       <p:sp>
         <p:nvSpPr>
-          <p:cNvPr id="6148" name="Rectangle 7">
-            <a:extLst>
-              <a:ext uri="{FF2B5EF4-FFF2-40B4-BE49-F238E27FC236}">
-                <a16:creationId xmlns:a16="http://schemas.microsoft.com/office/drawing/2014/main" id="{B8131C3E-0544-4AEA-AB54-2E5CF4AE25D3}"/>
-              </a:ext>
-            </a:extLst>
-          </p:cNvPr>
+          <p:cNvPr id="6148" name="Rectangle 7"/>
           <p:cNvSpPr>
             <a:spLocks noGrp="1" noChangeArrowheads="1"/>
           </p:cNvSpPr>
@@ -1333,7 +1203,7 @@
         <p:txBody>
           <a:bodyPr/>
           <a:lstStyle>
-            <a:lvl1pPr defTabSz="973138">
+            <a:lvl1pPr defTabSz="973455">
               <a:spcBef>
                 <a:spcPct val="30000"/>
               </a:spcBef>
@@ -1345,7 +1215,7 @@
                 <a:ea typeface="宋体" panose="02010600030101010101" pitchFamily="2" charset="-122"/>
               </a:defRPr>
             </a:lvl1pPr>
-            <a:lvl2pPr marL="742950" indent="-285750" defTabSz="973138">
+            <a:lvl2pPr marL="742950" indent="-285750" defTabSz="973455">
               <a:spcBef>
                 <a:spcPct val="30000"/>
               </a:spcBef>
@@ -1357,7 +1227,7 @@
                 <a:ea typeface="宋体" panose="02010600030101010101" pitchFamily="2" charset="-122"/>
               </a:defRPr>
             </a:lvl2pPr>
-            <a:lvl3pPr marL="1143000" indent="-228600" defTabSz="973138">
+            <a:lvl3pPr marL="1143000" indent="-228600" defTabSz="973455">
               <a:spcBef>
                 <a:spcPct val="30000"/>
               </a:spcBef>
@@ -1369,7 +1239,7 @@
                 <a:ea typeface="宋体" panose="02010600030101010101" pitchFamily="2" charset="-122"/>
               </a:defRPr>
             </a:lvl3pPr>
-            <a:lvl4pPr marL="1600200" indent="-228600" defTabSz="973138">
+            <a:lvl4pPr marL="1600200" indent="-228600" defTabSz="973455">
               <a:spcBef>
                 <a:spcPct val="30000"/>
               </a:spcBef>
@@ -1381,7 +1251,7 @@
                 <a:ea typeface="宋体" panose="02010600030101010101" pitchFamily="2" charset="-122"/>
               </a:defRPr>
             </a:lvl4pPr>
-            <a:lvl5pPr marL="2057400" indent="-228600" defTabSz="973138">
+            <a:lvl5pPr marL="2057400" indent="-228600" defTabSz="973455">
               <a:spcBef>
                 <a:spcPct val="30000"/>
               </a:spcBef>
@@ -1393,7 +1263,7 @@
                 <a:ea typeface="宋体" panose="02010600030101010101" pitchFamily="2" charset="-122"/>
               </a:defRPr>
             </a:lvl5pPr>
-            <a:lvl6pPr marL="2514600" indent="-228600" defTabSz="973138" eaLnBrk="0" fontAlgn="base" hangingPunct="0">
+            <a:lvl6pPr marL="2514600" indent="-228600" defTabSz="973455" eaLnBrk="0" fontAlgn="base" hangingPunct="0">
               <a:spcBef>
                 <a:spcPct val="30000"/>
               </a:spcBef>
@@ -1408,7 +1278,7 @@
                 <a:ea typeface="宋体" panose="02010600030101010101" pitchFamily="2" charset="-122"/>
               </a:defRPr>
             </a:lvl6pPr>
-            <a:lvl7pPr marL="2971800" indent="-228600" defTabSz="973138" eaLnBrk="0" fontAlgn="base" hangingPunct="0">
+            <a:lvl7pPr marL="2971800" indent="-228600" defTabSz="973455" eaLnBrk="0" fontAlgn="base" hangingPunct="0">
               <a:spcBef>
                 <a:spcPct val="30000"/>
               </a:spcBef>
@@ -1423,7 +1293,7 @@
                 <a:ea typeface="宋体" panose="02010600030101010101" pitchFamily="2" charset="-122"/>
               </a:defRPr>
             </a:lvl7pPr>
-            <a:lvl8pPr marL="3429000" indent="-228600" defTabSz="973138" eaLnBrk="0" fontAlgn="base" hangingPunct="0">
+            <a:lvl8pPr marL="3429000" indent="-228600" defTabSz="973455" eaLnBrk="0" fontAlgn="base" hangingPunct="0">
               <a:spcBef>
                 <a:spcPct val="30000"/>
               </a:spcBef>
@@ -1438,7 +1308,7 @@
                 <a:ea typeface="宋体" panose="02010600030101010101" pitchFamily="2" charset="-122"/>
               </a:defRPr>
             </a:lvl8pPr>
-            <a:lvl9pPr marL="3886200" indent="-228600" defTabSz="973138" eaLnBrk="0" fontAlgn="base" hangingPunct="0">
+            <a:lvl9pPr marL="3886200" indent="-228600" defTabSz="973455" eaLnBrk="0" fontAlgn="base" hangingPunct="0">
               <a:spcBef>
                 <a:spcPct val="30000"/>
               </a:spcBef>
@@ -1464,12 +1334,6 @@
               <a:rPr kumimoji="1" lang="en-US" altLang="zh-CN" sz="1300" smtClean="0">
                 <a:latin typeface="Times New Roman" panose="02020603050405020304" pitchFamily="18" charset="0"/>
               </a:rPr>
-              <a:pPr>
-                <a:spcBef>
-                  <a:spcPct val="0"/>
-                </a:spcBef>
-              </a:pPr>
-              <a:t>1</a:t>
             </a:fld>
             <a:endParaRPr kumimoji="1" lang="en-US" altLang="zh-CN" sz="1300">
               <a:latin typeface="Times New Roman" panose="02020603050405020304" pitchFamily="18" charset="0"/>
@@ -1479,13 +1343,7 @@
       </p:sp>
       <p:sp>
         <p:nvSpPr>
-          <p:cNvPr id="6149" name="Rectangle 2">
-            <a:extLst>
-              <a:ext uri="{FF2B5EF4-FFF2-40B4-BE49-F238E27FC236}">
-                <a16:creationId xmlns:a16="http://schemas.microsoft.com/office/drawing/2014/main" id="{4E4FE87F-CDE4-460E-881D-9ED4C3D8116E}"/>
-              </a:ext>
-            </a:extLst>
-          </p:cNvPr>
+          <p:cNvPr id="6149" name="Rectangle 2"/>
           <p:cNvSpPr>
             <a:spLocks noGrp="1" noRot="1" noChangeAspect="1" noChangeArrowheads="1" noTextEdit="1"/>
           </p:cNvSpPr>
@@ -1502,20 +1360,12 @@
               <a:srgbClr val="000000"/>
             </a:solidFill>
             <a:miter lim="800000"/>
-            <a:headEnd/>
-            <a:tailEnd/>
           </a:ln>
         </p:spPr>
       </p:sp>
       <p:sp>
         <p:nvSpPr>
-          <p:cNvPr id="6150" name="Rectangle 3">
-            <a:extLst>
-              <a:ext uri="{FF2B5EF4-FFF2-40B4-BE49-F238E27FC236}">
-                <a16:creationId xmlns:a16="http://schemas.microsoft.com/office/drawing/2014/main" id="{3E528532-329A-4864-9D0A-64808B13A79B}"/>
-              </a:ext>
-            </a:extLst>
-          </p:cNvPr>
+          <p:cNvPr id="6150" name="Rectangle 3"/>
           <p:cNvSpPr>
             <a:spLocks noGrp="1" noChangeArrowheads="1"/>
           </p:cNvSpPr>
@@ -1532,16 +1382,10 @@
               <a:srgbClr val="000000"/>
             </a:solidFill>
             <a:miter lim="800000"/>
-            <a:headEnd/>
-            <a:tailEnd/>
           </a:ln>
         </p:spPr>
         <p:txBody>
-          <a:bodyPr wrap="square" numCol="1" anchor="t" anchorCtr="0" compatLnSpc="1">
-            <a:prstTxWarp prst="textNoShape">
-              <a:avLst/>
-            </a:prstTxWarp>
-          </a:bodyPr>
+          <a:bodyPr wrap="square" numCol="1" anchor="t" anchorCtr="0" compatLnSpc="1"/>
           <a:lstStyle/>
           <a:p>
             <a:pPr eaLnBrk="1" hangingPunct="1">
@@ -1553,6 +1397,7 @@
               <a:rPr lang="zh-CN" altLang="en-US"/>
               <a:t>重庆大学</a:t>
             </a:r>
+            <a:endParaRPr lang="zh-CN" altLang="en-US"/>
           </a:p>
         </p:txBody>
       </p:sp>
@@ -1583,13 +1428,7 @@
       </p:grpSpPr>
       <p:sp>
         <p:nvSpPr>
-          <p:cNvPr id="12290" name="Rectangle 2">
-            <a:extLst>
-              <a:ext uri="{FF2B5EF4-FFF2-40B4-BE49-F238E27FC236}">
-                <a16:creationId xmlns:a16="http://schemas.microsoft.com/office/drawing/2014/main" id="{DDD982A9-5E02-48A1-96E2-36AE38A9E7D5}"/>
-              </a:ext>
-            </a:extLst>
-          </p:cNvPr>
+          <p:cNvPr id="12290" name="Rectangle 2"/>
           <p:cNvSpPr>
             <a:spLocks noGrp="1" noChangeArrowheads="1"/>
           </p:cNvSpPr>
@@ -1620,13 +1459,9 @@
           </a:extLst>
         </p:spPr>
         <p:txBody>
-          <a:bodyPr wrap="square" numCol="1" anchor="t" anchorCtr="0" compatLnSpc="1">
-            <a:prstTxWarp prst="textNoShape">
-              <a:avLst/>
-            </a:prstTxWarp>
-          </a:bodyPr>
+          <a:bodyPr wrap="square" numCol="1" anchor="t" anchorCtr="0" compatLnSpc="1"/>
           <a:lstStyle>
-            <a:lvl1pPr defTabSz="973138">
+            <a:lvl1pPr defTabSz="973455">
               <a:spcBef>
                 <a:spcPct val="30000"/>
               </a:spcBef>
@@ -1638,7 +1473,7 @@
                 <a:ea typeface="宋体" panose="02010600030101010101" pitchFamily="2" charset="-122"/>
               </a:defRPr>
             </a:lvl1pPr>
-            <a:lvl2pPr marL="742950" indent="-285750" defTabSz="973138">
+            <a:lvl2pPr marL="742950" indent="-285750" defTabSz="973455">
               <a:spcBef>
                 <a:spcPct val="30000"/>
               </a:spcBef>
@@ -1650,7 +1485,7 @@
                 <a:ea typeface="宋体" panose="02010600030101010101" pitchFamily="2" charset="-122"/>
               </a:defRPr>
             </a:lvl2pPr>
-            <a:lvl3pPr marL="1143000" indent="-228600" defTabSz="973138">
+            <a:lvl3pPr marL="1143000" indent="-228600" defTabSz="973455">
               <a:spcBef>
                 <a:spcPct val="30000"/>
               </a:spcBef>
@@ -1662,7 +1497,7 @@
                 <a:ea typeface="宋体" panose="02010600030101010101" pitchFamily="2" charset="-122"/>
               </a:defRPr>
             </a:lvl3pPr>
-            <a:lvl4pPr marL="1600200" indent="-228600" defTabSz="973138">
+            <a:lvl4pPr marL="1600200" indent="-228600" defTabSz="973455">
               <a:spcBef>
                 <a:spcPct val="30000"/>
               </a:spcBef>
@@ -1674,7 +1509,7 @@
                 <a:ea typeface="宋体" panose="02010600030101010101" pitchFamily="2" charset="-122"/>
               </a:defRPr>
             </a:lvl4pPr>
-            <a:lvl5pPr marL="2057400" indent="-228600" defTabSz="973138">
+            <a:lvl5pPr marL="2057400" indent="-228600" defTabSz="973455">
               <a:spcBef>
                 <a:spcPct val="30000"/>
               </a:spcBef>
@@ -1686,7 +1521,7 @@
                 <a:ea typeface="宋体" panose="02010600030101010101" pitchFamily="2" charset="-122"/>
               </a:defRPr>
             </a:lvl5pPr>
-            <a:lvl6pPr marL="2514600" indent="-228600" defTabSz="973138" eaLnBrk="0" fontAlgn="base" hangingPunct="0">
+            <a:lvl6pPr marL="2514600" indent="-228600" defTabSz="973455" eaLnBrk="0" fontAlgn="base" hangingPunct="0">
               <a:spcBef>
                 <a:spcPct val="30000"/>
               </a:spcBef>
@@ -1701,7 +1536,7 @@
                 <a:ea typeface="宋体" panose="02010600030101010101" pitchFamily="2" charset="-122"/>
               </a:defRPr>
             </a:lvl6pPr>
-            <a:lvl7pPr marL="2971800" indent="-228600" defTabSz="973138" eaLnBrk="0" fontAlgn="base" hangingPunct="0">
+            <a:lvl7pPr marL="2971800" indent="-228600" defTabSz="973455" eaLnBrk="0" fontAlgn="base" hangingPunct="0">
               <a:spcBef>
                 <a:spcPct val="30000"/>
               </a:spcBef>
@@ -1716,7 +1551,7 @@
                 <a:ea typeface="宋体" panose="02010600030101010101" pitchFamily="2" charset="-122"/>
               </a:defRPr>
             </a:lvl7pPr>
-            <a:lvl8pPr marL="3429000" indent="-228600" defTabSz="973138" eaLnBrk="0" fontAlgn="base" hangingPunct="0">
+            <a:lvl8pPr marL="3429000" indent="-228600" defTabSz="973455" eaLnBrk="0" fontAlgn="base" hangingPunct="0">
               <a:spcBef>
                 <a:spcPct val="30000"/>
               </a:spcBef>
@@ -1731,7 +1566,7 @@
                 <a:ea typeface="宋体" panose="02010600030101010101" pitchFamily="2" charset="-122"/>
               </a:defRPr>
             </a:lvl8pPr>
-            <a:lvl9pPr marL="3886200" indent="-228600" defTabSz="973138" eaLnBrk="0" fontAlgn="base" hangingPunct="0">
+            <a:lvl9pPr marL="3886200" indent="-228600" defTabSz="973455" eaLnBrk="0" fontAlgn="base" hangingPunct="0">
               <a:spcBef>
                 <a:spcPct val="30000"/>
               </a:spcBef>
@@ -1762,18 +1597,15 @@
               </a:rPr>
               <a:t>高等代数</a:t>
             </a:r>
+            <a:endParaRPr kumimoji="1" lang="en-US" altLang="zh-CN" sz="1300">
+              <a:latin typeface="Times New Roman" panose="02020603050405020304" pitchFamily="18" charset="0"/>
+            </a:endParaRPr>
           </a:p>
         </p:txBody>
       </p:sp>
       <p:sp>
         <p:nvSpPr>
-          <p:cNvPr id="12291" name="Rectangle 3">
-            <a:extLst>
-              <a:ext uri="{FF2B5EF4-FFF2-40B4-BE49-F238E27FC236}">
-                <a16:creationId xmlns:a16="http://schemas.microsoft.com/office/drawing/2014/main" id="{BB2D036D-A015-497D-A941-6AA03F0068FE}"/>
-              </a:ext>
-            </a:extLst>
-          </p:cNvPr>
+          <p:cNvPr id="12291" name="Rectangle 3"/>
           <p:cNvSpPr>
             <a:spLocks noGrp="1" noChangeArrowheads="1"/>
           </p:cNvSpPr>
@@ -1804,13 +1636,9 @@
           </a:extLst>
         </p:spPr>
         <p:txBody>
-          <a:bodyPr wrap="square" numCol="1" anchor="t" anchorCtr="0" compatLnSpc="1">
-            <a:prstTxWarp prst="textNoShape">
-              <a:avLst/>
-            </a:prstTxWarp>
-          </a:bodyPr>
+          <a:bodyPr wrap="square" numCol="1" anchor="t" anchorCtr="0" compatLnSpc="1"/>
           <a:lstStyle>
-            <a:lvl1pPr defTabSz="973138">
+            <a:lvl1pPr defTabSz="973455">
               <a:spcBef>
                 <a:spcPct val="30000"/>
               </a:spcBef>
@@ -1822,7 +1650,7 @@
                 <a:ea typeface="宋体" panose="02010600030101010101" pitchFamily="2" charset="-122"/>
               </a:defRPr>
             </a:lvl1pPr>
-            <a:lvl2pPr marL="742950" indent="-285750" defTabSz="973138">
+            <a:lvl2pPr marL="742950" indent="-285750" defTabSz="973455">
               <a:spcBef>
                 <a:spcPct val="30000"/>
               </a:spcBef>
@@ -1834,7 +1662,7 @@
                 <a:ea typeface="宋体" panose="02010600030101010101" pitchFamily="2" charset="-122"/>
               </a:defRPr>
             </a:lvl2pPr>
-            <a:lvl3pPr marL="1143000" indent="-228600" defTabSz="973138">
+            <a:lvl3pPr marL="1143000" indent="-228600" defTabSz="973455">
               <a:spcBef>
                 <a:spcPct val="30000"/>
               </a:spcBef>
@@ -1846,7 +1674,7 @@
                 <a:ea typeface="宋体" panose="02010600030101010101" pitchFamily="2" charset="-122"/>
               </a:defRPr>
             </a:lvl3pPr>
-            <a:lvl4pPr marL="1600200" indent="-228600" defTabSz="973138">
+            <a:lvl4pPr marL="1600200" indent="-228600" defTabSz="973455">
               <a:spcBef>
                 <a:spcPct val="30000"/>
               </a:spcBef>
@@ -1858,7 +1686,7 @@
                 <a:ea typeface="宋体" panose="02010600030101010101" pitchFamily="2" charset="-122"/>
               </a:defRPr>
             </a:lvl4pPr>
-            <a:lvl5pPr marL="2057400" indent="-228600" defTabSz="973138">
+            <a:lvl5pPr marL="2057400" indent="-228600" defTabSz="973455">
               <a:spcBef>
                 <a:spcPct val="30000"/>
               </a:spcBef>
@@ -1870,7 +1698,7 @@
                 <a:ea typeface="宋体" panose="02010600030101010101" pitchFamily="2" charset="-122"/>
               </a:defRPr>
             </a:lvl5pPr>
-            <a:lvl6pPr marL="2514600" indent="-228600" defTabSz="973138" eaLnBrk="0" fontAlgn="base" hangingPunct="0">
+            <a:lvl6pPr marL="2514600" indent="-228600" defTabSz="973455" eaLnBrk="0" fontAlgn="base" hangingPunct="0">
               <a:spcBef>
                 <a:spcPct val="30000"/>
               </a:spcBef>
@@ -1885,7 +1713,7 @@
                 <a:ea typeface="宋体" panose="02010600030101010101" pitchFamily="2" charset="-122"/>
               </a:defRPr>
             </a:lvl6pPr>
-            <a:lvl7pPr marL="2971800" indent="-228600" defTabSz="973138" eaLnBrk="0" fontAlgn="base" hangingPunct="0">
+            <a:lvl7pPr marL="2971800" indent="-228600" defTabSz="973455" eaLnBrk="0" fontAlgn="base" hangingPunct="0">
               <a:spcBef>
                 <a:spcPct val="30000"/>
               </a:spcBef>
@@ -1900,7 +1728,7 @@
                 <a:ea typeface="宋体" panose="02010600030101010101" pitchFamily="2" charset="-122"/>
               </a:defRPr>
             </a:lvl7pPr>
-            <a:lvl8pPr marL="3429000" indent="-228600" defTabSz="973138" eaLnBrk="0" fontAlgn="base" hangingPunct="0">
+            <a:lvl8pPr marL="3429000" indent="-228600" defTabSz="973455" eaLnBrk="0" fontAlgn="base" hangingPunct="0">
               <a:spcBef>
                 <a:spcPct val="30000"/>
               </a:spcBef>
@@ -1915,7 +1743,7 @@
                 <a:ea typeface="宋体" panose="02010600030101010101" pitchFamily="2" charset="-122"/>
               </a:defRPr>
             </a:lvl8pPr>
-            <a:lvl9pPr marL="3886200" indent="-228600" defTabSz="973138" eaLnBrk="0" fontAlgn="base" hangingPunct="0">
+            <a:lvl9pPr marL="3886200" indent="-228600" defTabSz="973455" eaLnBrk="0" fontAlgn="base" hangingPunct="0">
               <a:spcBef>
                 <a:spcPct val="30000"/>
               </a:spcBef>
@@ -1944,15 +1772,6 @@
               <a:rPr kumimoji="1" lang="zh-CN" altLang="en-US" sz="1300" smtClean="0">
                 <a:latin typeface="Times New Roman" panose="02020603050405020304" pitchFamily="18" charset="0"/>
               </a:rPr>
-              <a:pPr fontAlgn="base">
-                <a:spcBef>
-                  <a:spcPct val="0"/>
-                </a:spcBef>
-                <a:spcAft>
-                  <a:spcPct val="0"/>
-                </a:spcAft>
-              </a:pPr>
-              <a:t>2026/6/2</a:t>
             </a:fld>
             <a:endParaRPr kumimoji="1" lang="en-US" altLang="zh-CN" sz="1300">
               <a:latin typeface="Times New Roman" panose="02020603050405020304" pitchFamily="18" charset="0"/>
@@ -1962,13 +1781,7 @@
       </p:sp>
       <p:sp>
         <p:nvSpPr>
-          <p:cNvPr id="12292" name="Rectangle 7">
-            <a:extLst>
-              <a:ext uri="{FF2B5EF4-FFF2-40B4-BE49-F238E27FC236}">
-                <a16:creationId xmlns:a16="http://schemas.microsoft.com/office/drawing/2014/main" id="{1F5A9F09-0D46-442C-B44C-6AFEEB24347F}"/>
-              </a:ext>
-            </a:extLst>
-          </p:cNvPr>
+          <p:cNvPr id="12292" name="Rectangle 7"/>
           <p:cNvSpPr>
             <a:spLocks noGrp="1" noChangeArrowheads="1"/>
           </p:cNvSpPr>
@@ -2001,7 +1814,7 @@
         <p:txBody>
           <a:bodyPr/>
           <a:lstStyle>
-            <a:lvl1pPr defTabSz="973138">
+            <a:lvl1pPr defTabSz="973455">
               <a:spcBef>
                 <a:spcPct val="30000"/>
               </a:spcBef>
@@ -2013,7 +1826,7 @@
                 <a:ea typeface="宋体" panose="02010600030101010101" pitchFamily="2" charset="-122"/>
               </a:defRPr>
             </a:lvl1pPr>
-            <a:lvl2pPr marL="742950" indent="-285750" defTabSz="973138">
+            <a:lvl2pPr marL="742950" indent="-285750" defTabSz="973455">
               <a:spcBef>
                 <a:spcPct val="30000"/>
               </a:spcBef>
@@ -2025,7 +1838,7 @@
                 <a:ea typeface="宋体" panose="02010600030101010101" pitchFamily="2" charset="-122"/>
               </a:defRPr>
             </a:lvl2pPr>
-            <a:lvl3pPr marL="1143000" indent="-228600" defTabSz="973138">
+            <a:lvl3pPr marL="1143000" indent="-228600" defTabSz="973455">
               <a:spcBef>
                 <a:spcPct val="30000"/>
               </a:spcBef>
@@ -2037,7 +1850,7 @@
                 <a:ea typeface="宋体" panose="02010600030101010101" pitchFamily="2" charset="-122"/>
               </a:defRPr>
             </a:lvl3pPr>
-            <a:lvl4pPr marL="1600200" indent="-228600" defTabSz="973138">
+            <a:lvl4pPr marL="1600200" indent="-228600" defTabSz="973455">
               <a:spcBef>
                 <a:spcPct val="30000"/>
               </a:spcBef>
@@ -2049,7 +1862,7 @@
                 <a:ea typeface="宋体" panose="02010600030101010101" pitchFamily="2" charset="-122"/>
               </a:defRPr>
             </a:lvl4pPr>
-            <a:lvl5pPr marL="2057400" indent="-228600" defTabSz="973138">
+            <a:lvl5pPr marL="2057400" indent="-228600" defTabSz="973455">
               <a:spcBef>
                 <a:spcPct val="30000"/>
               </a:spcBef>
@@ -2061,7 +1874,7 @@
                 <a:ea typeface="宋体" panose="02010600030101010101" pitchFamily="2" charset="-122"/>
               </a:defRPr>
             </a:lvl5pPr>
-            <a:lvl6pPr marL="2514600" indent="-228600" defTabSz="973138" eaLnBrk="0" fontAlgn="base" hangingPunct="0">
+            <a:lvl6pPr marL="2514600" indent="-228600" defTabSz="973455" eaLnBrk="0" fontAlgn="base" hangingPunct="0">
               <a:spcBef>
                 <a:spcPct val="30000"/>
               </a:spcBef>
@@ -2076,7 +1889,7 @@
                 <a:ea typeface="宋体" panose="02010600030101010101" pitchFamily="2" charset="-122"/>
               </a:defRPr>
             </a:lvl6pPr>
-            <a:lvl7pPr marL="2971800" indent="-228600" defTabSz="973138" eaLnBrk="0" fontAlgn="base" hangingPunct="0">
+            <a:lvl7pPr marL="2971800" indent="-228600" defTabSz="973455" eaLnBrk="0" fontAlgn="base" hangingPunct="0">
               <a:spcBef>
                 <a:spcPct val="30000"/>
               </a:spcBef>
@@ -2091,7 +1904,7 @@
                 <a:ea typeface="宋体" panose="02010600030101010101" pitchFamily="2" charset="-122"/>
               </a:defRPr>
             </a:lvl7pPr>
-            <a:lvl8pPr marL="3429000" indent="-228600" defTabSz="973138" eaLnBrk="0" fontAlgn="base" hangingPunct="0">
+            <a:lvl8pPr marL="3429000" indent="-228600" defTabSz="973455" eaLnBrk="0" fontAlgn="base" hangingPunct="0">
               <a:spcBef>
                 <a:spcPct val="30000"/>
               </a:spcBef>
@@ -2106,7 +1919,7 @@
                 <a:ea typeface="宋体" panose="02010600030101010101" pitchFamily="2" charset="-122"/>
               </a:defRPr>
             </a:lvl8pPr>
-            <a:lvl9pPr marL="3886200" indent="-228600" defTabSz="973138" eaLnBrk="0" fontAlgn="base" hangingPunct="0">
+            <a:lvl9pPr marL="3886200" indent="-228600" defTabSz="973455" eaLnBrk="0" fontAlgn="base" hangingPunct="0">
               <a:spcBef>
                 <a:spcPct val="30000"/>
               </a:spcBef>
@@ -2132,12 +1945,6 @@
               <a:rPr kumimoji="1" lang="en-US" altLang="zh-CN" sz="1300" smtClean="0">
                 <a:latin typeface="Times New Roman" panose="02020603050405020304" pitchFamily="18" charset="0"/>
               </a:rPr>
-              <a:pPr>
-                <a:spcBef>
-                  <a:spcPct val="0"/>
-                </a:spcBef>
-              </a:pPr>
-              <a:t>2</a:t>
             </a:fld>
             <a:endParaRPr kumimoji="1" lang="en-US" altLang="zh-CN" sz="1300">
               <a:latin typeface="Times New Roman" panose="02020603050405020304" pitchFamily="18" charset="0"/>
@@ -2147,13 +1954,7 @@
       </p:sp>
       <p:sp>
         <p:nvSpPr>
-          <p:cNvPr id="12293" name="Rectangle 2">
-            <a:extLst>
-              <a:ext uri="{FF2B5EF4-FFF2-40B4-BE49-F238E27FC236}">
-                <a16:creationId xmlns:a16="http://schemas.microsoft.com/office/drawing/2014/main" id="{7BD8AAAD-5528-4021-AC18-5931D989EBBD}"/>
-              </a:ext>
-            </a:extLst>
-          </p:cNvPr>
+          <p:cNvPr id="12293" name="Rectangle 2"/>
           <p:cNvSpPr>
             <a:spLocks noGrp="1" noRot="1" noChangeAspect="1" noChangeArrowheads="1" noTextEdit="1"/>
           </p:cNvSpPr>
@@ -2168,8 +1969,6 @@
               <a:srgbClr val="000000"/>
             </a:solidFill>
             <a:miter lim="800000"/>
-            <a:headEnd/>
-            <a:tailEnd/>
           </a:ln>
           <a:extLst>
             <a:ext uri="{909E8E84-426E-40DD-AFC4-6F175D3DCCD1}">
@@ -2184,13 +1983,7 @@
       </p:sp>
       <p:sp>
         <p:nvSpPr>
-          <p:cNvPr id="12294" name="Rectangle 3">
-            <a:extLst>
-              <a:ext uri="{FF2B5EF4-FFF2-40B4-BE49-F238E27FC236}">
-                <a16:creationId xmlns:a16="http://schemas.microsoft.com/office/drawing/2014/main" id="{790700FD-795C-4BC0-B86D-95C8F9544CA6}"/>
-              </a:ext>
-            </a:extLst>
-          </p:cNvPr>
+          <p:cNvPr id="12294" name="Rectangle 3"/>
           <p:cNvSpPr>
             <a:spLocks noGrp="1" noChangeArrowheads="1"/>
           </p:cNvSpPr>
@@ -2221,11 +2014,7 @@
           </a:extLst>
         </p:spPr>
         <p:txBody>
-          <a:bodyPr wrap="square" numCol="1" anchor="t" anchorCtr="0" compatLnSpc="1">
-            <a:prstTxWarp prst="textNoShape">
-              <a:avLst/>
-            </a:prstTxWarp>
-          </a:bodyPr>
+          <a:bodyPr wrap="square" numCol="1" anchor="t" anchorCtr="0" compatLnSpc="1"/>
           <a:lstStyle/>
           <a:p>
             <a:pPr eaLnBrk="1" hangingPunct="1">
@@ -2313,21 +2102,12 @@
             </a:pPr>
             <a:fld id="{E942E71B-E9B3-4820-B67A-F8BCFD290363}" type="slidenum">
               <a:rPr lang="zh-CN" altLang="en-US" smtClean="0"/>
-              <a:pPr>
-                <a:defRPr/>
-              </a:pPr>
-              <a:t>7</a:t>
             </a:fld>
             <a:endParaRPr lang="zh-CN" altLang="en-US"/>
           </a:p>
         </p:txBody>
       </p:sp>
     </p:spTree>
-    <p:extLst>
-      <p:ext uri="{BB962C8B-B14F-4D97-AF65-F5344CB8AC3E}">
-        <p14:creationId xmlns:p14="http://schemas.microsoft.com/office/powerpoint/2010/main" val="1294584971"/>
-      </p:ext>
-    </p:extLst>
   </p:cSld>
   <p:clrMapOvr>
     <a:masterClrMapping/>
@@ -2403,21 +2183,12 @@
             </a:pPr>
             <a:fld id="{E942E71B-E9B3-4820-B67A-F8BCFD290363}" type="slidenum">
               <a:rPr lang="zh-CN" altLang="en-US" smtClean="0"/>
-              <a:pPr>
-                <a:defRPr/>
-              </a:pPr>
-              <a:t>10</a:t>
             </a:fld>
             <a:endParaRPr lang="zh-CN" altLang="en-US"/>
           </a:p>
         </p:txBody>
       </p:sp>
     </p:spTree>
-    <p:extLst>
-      <p:ext uri="{BB962C8B-B14F-4D97-AF65-F5344CB8AC3E}">
-        <p14:creationId xmlns:p14="http://schemas.microsoft.com/office/powerpoint/2010/main" val="4292069539"/>
-      </p:ext>
-    </p:extLst>
   </p:cSld>
   <p:clrMapOvr>
     <a:masterClrMapping/>
@@ -2493,21 +2264,12 @@
             </a:pPr>
             <a:fld id="{E942E71B-E9B3-4820-B67A-F8BCFD290363}" type="slidenum">
               <a:rPr lang="zh-CN" altLang="en-US" smtClean="0"/>
-              <a:pPr>
-                <a:defRPr/>
-              </a:pPr>
-              <a:t>16</a:t>
             </a:fld>
             <a:endParaRPr lang="zh-CN" altLang="en-US"/>
           </a:p>
         </p:txBody>
       </p:sp>
     </p:spTree>
-    <p:extLst>
-      <p:ext uri="{BB962C8B-B14F-4D97-AF65-F5344CB8AC3E}">
-        <p14:creationId xmlns:p14="http://schemas.microsoft.com/office/powerpoint/2010/main" val="3651586397"/>
-      </p:ext>
-    </p:extLst>
   </p:cSld>
   <p:clrMapOvr>
     <a:masterClrMapping/>
@@ -2556,6 +2318,7 @@
               <a:rPr lang="zh-CN" altLang="en-US"/>
               <a:t>单击此处编辑母版标题样式</a:t>
             </a:r>
+            <a:endParaRPr lang="zh-CN" altLang="en-US"/>
           </a:p>
         </p:txBody>
       </p:sp>
@@ -2674,18 +2437,13 @@
               <a:rPr lang="zh-CN" altLang="en-US"/>
               <a:t>单击此处编辑母版副标题样式</a:t>
             </a:r>
+            <a:endParaRPr lang="zh-CN" altLang="en-US"/>
           </a:p>
         </p:txBody>
       </p:sp>
       <p:sp>
         <p:nvSpPr>
-          <p:cNvPr id="4" name="日期占位符 3">
-            <a:extLst>
-              <a:ext uri="{FF2B5EF4-FFF2-40B4-BE49-F238E27FC236}">
-                <a16:creationId xmlns:a16="http://schemas.microsoft.com/office/drawing/2014/main" id="{BA0259C8-C7EE-4156-9DC0-3109D38887C8}"/>
-              </a:ext>
-            </a:extLst>
-          </p:cNvPr>
+          <p:cNvPr id="4" name="日期占位符 3"/>
           <p:cNvSpPr>
             <a:spLocks noGrp="1"/>
           </p:cNvSpPr>
@@ -2707,10 +2465,6 @@
             </a:pPr>
             <a:fld id="{053C517D-F1EF-450D-A68B-03ED621FDC53}" type="datetimeFigureOut">
               <a:rPr lang="zh-CN" altLang="en-US"/>
-              <a:pPr>
-                <a:defRPr/>
-              </a:pPr>
-              <a:t>2026/6/2</a:t>
             </a:fld>
             <a:endParaRPr lang="zh-CN" altLang="en-US"/>
           </a:p>
@@ -2718,13 +2472,7 @@
       </p:sp>
       <p:sp>
         <p:nvSpPr>
-          <p:cNvPr id="5" name="页脚占位符 4">
-            <a:extLst>
-              <a:ext uri="{FF2B5EF4-FFF2-40B4-BE49-F238E27FC236}">
-                <a16:creationId xmlns:a16="http://schemas.microsoft.com/office/drawing/2014/main" id="{3C562696-FBBC-4EB8-9EBD-19EE2BB47515}"/>
-              </a:ext>
-            </a:extLst>
-          </p:cNvPr>
+          <p:cNvPr id="5" name="页脚占位符 4"/>
           <p:cNvSpPr>
             <a:spLocks noGrp="1"/>
           </p:cNvSpPr>
@@ -2750,13 +2498,7 @@
       </p:sp>
       <p:sp>
         <p:nvSpPr>
-          <p:cNvPr id="6" name="灯片编号占位符 5">
-            <a:extLst>
-              <a:ext uri="{FF2B5EF4-FFF2-40B4-BE49-F238E27FC236}">
-                <a16:creationId xmlns:a16="http://schemas.microsoft.com/office/drawing/2014/main" id="{5C0E1A01-6584-4619-AB08-FD6FEFF096AF}"/>
-              </a:ext>
-            </a:extLst>
-          </p:cNvPr>
+          <p:cNvPr id="6" name="灯片编号占位符 5"/>
           <p:cNvSpPr>
             <a:spLocks noGrp="1"/>
           </p:cNvSpPr>
@@ -2778,21 +2520,12 @@
             </a:pPr>
             <a:fld id="{F4094204-A637-4043-9CC7-987AF444C4F4}" type="slidenum">
               <a:rPr lang="zh-CN" altLang="en-US"/>
-              <a:pPr>
-                <a:defRPr/>
-              </a:pPr>
-              <a:t>‹#›</a:t>
             </a:fld>
             <a:endParaRPr lang="zh-CN" altLang="en-US"/>
           </a:p>
         </p:txBody>
       </p:sp>
     </p:spTree>
-    <p:extLst>
-      <p:ext uri="{BB962C8B-B14F-4D97-AF65-F5344CB8AC3E}">
-        <p14:creationId xmlns:p14="http://schemas.microsoft.com/office/powerpoint/2010/main" val="819006490"/>
-      </p:ext>
-    </p:extLst>
   </p:cSld>
   <p:clrMapOvr>
     <a:masterClrMapping/>
@@ -2836,6 +2569,7 @@
               <a:rPr lang="zh-CN" altLang="en-US"/>
               <a:t>单击此处编辑母版标题样式</a:t>
             </a:r>
+            <a:endParaRPr lang="zh-CN" altLang="en-US"/>
           </a:p>
         </p:txBody>
       </p:sp>
@@ -2859,6 +2593,7 @@
               <a:rPr lang="zh-CN" altLang="en-US"/>
               <a:t>单击此处编辑母版文本样式</a:t>
             </a:r>
+            <a:endParaRPr lang="zh-CN" altLang="en-US"/>
           </a:p>
           <a:p>
             <a:pPr lvl="1"/>
@@ -2866,6 +2601,7 @@
               <a:rPr lang="zh-CN" altLang="en-US"/>
               <a:t>第二级</a:t>
             </a:r>
+            <a:endParaRPr lang="zh-CN" altLang="en-US"/>
           </a:p>
           <a:p>
             <a:pPr lvl="2"/>
@@ -2873,6 +2609,7 @@
               <a:rPr lang="zh-CN" altLang="en-US"/>
               <a:t>第三级</a:t>
             </a:r>
+            <a:endParaRPr lang="zh-CN" altLang="en-US"/>
           </a:p>
           <a:p>
             <a:pPr lvl="3"/>
@@ -2880,6 +2617,7 @@
               <a:rPr lang="zh-CN" altLang="en-US"/>
               <a:t>第四级</a:t>
             </a:r>
+            <a:endParaRPr lang="zh-CN" altLang="en-US"/>
           </a:p>
           <a:p>
             <a:pPr lvl="4"/>
@@ -2887,18 +2625,13 @@
               <a:rPr lang="zh-CN" altLang="en-US"/>
               <a:t>第五级</a:t>
             </a:r>
+            <a:endParaRPr lang="zh-CN" altLang="en-US"/>
           </a:p>
         </p:txBody>
       </p:sp>
       <p:sp>
         <p:nvSpPr>
-          <p:cNvPr id="4" name="日期占位符 3">
-            <a:extLst>
-              <a:ext uri="{FF2B5EF4-FFF2-40B4-BE49-F238E27FC236}">
-                <a16:creationId xmlns:a16="http://schemas.microsoft.com/office/drawing/2014/main" id="{7AD7936C-15CE-4AAB-848B-6D270D7375DD}"/>
-              </a:ext>
-            </a:extLst>
-          </p:cNvPr>
+          <p:cNvPr id="4" name="日期占位符 3"/>
           <p:cNvSpPr>
             <a:spLocks noGrp="1"/>
           </p:cNvSpPr>
@@ -2920,10 +2653,6 @@
             </a:pPr>
             <a:fld id="{B5AC7AC8-BDAF-459E-A39D-6ECCEBA31388}" type="datetimeFigureOut">
               <a:rPr lang="zh-CN" altLang="en-US"/>
-              <a:pPr>
-                <a:defRPr/>
-              </a:pPr>
-              <a:t>2026/6/2</a:t>
             </a:fld>
             <a:endParaRPr lang="zh-CN" altLang="en-US"/>
           </a:p>
@@ -2931,13 +2660,7 @@
       </p:sp>
       <p:sp>
         <p:nvSpPr>
-          <p:cNvPr id="5" name="页脚占位符 4">
-            <a:extLst>
-              <a:ext uri="{FF2B5EF4-FFF2-40B4-BE49-F238E27FC236}">
-                <a16:creationId xmlns:a16="http://schemas.microsoft.com/office/drawing/2014/main" id="{EED9C6D5-B12F-401F-97BA-2B556388BCCF}"/>
-              </a:ext>
-            </a:extLst>
-          </p:cNvPr>
+          <p:cNvPr id="5" name="页脚占位符 4"/>
           <p:cNvSpPr>
             <a:spLocks noGrp="1"/>
           </p:cNvSpPr>
@@ -2963,13 +2686,7 @@
       </p:sp>
       <p:sp>
         <p:nvSpPr>
-          <p:cNvPr id="6" name="灯片编号占位符 5">
-            <a:extLst>
-              <a:ext uri="{FF2B5EF4-FFF2-40B4-BE49-F238E27FC236}">
-                <a16:creationId xmlns:a16="http://schemas.microsoft.com/office/drawing/2014/main" id="{22483FAA-5398-41B1-AE28-EE41BB0F15C3}"/>
-              </a:ext>
-            </a:extLst>
-          </p:cNvPr>
+          <p:cNvPr id="6" name="灯片编号占位符 5"/>
           <p:cNvSpPr>
             <a:spLocks noGrp="1"/>
           </p:cNvSpPr>
@@ -2991,21 +2708,12 @@
             </a:pPr>
             <a:fld id="{AA73592C-DF7F-4F25-95AD-A0D5EFEFC057}" type="slidenum">
               <a:rPr lang="zh-CN" altLang="en-US"/>
-              <a:pPr>
-                <a:defRPr/>
-              </a:pPr>
-              <a:t>‹#›</a:t>
             </a:fld>
             <a:endParaRPr lang="zh-CN" altLang="en-US"/>
           </a:p>
         </p:txBody>
       </p:sp>
     </p:spTree>
-    <p:extLst>
-      <p:ext uri="{BB962C8B-B14F-4D97-AF65-F5344CB8AC3E}">
-        <p14:creationId xmlns:p14="http://schemas.microsoft.com/office/powerpoint/2010/main" val="579073889"/>
-      </p:ext>
-    </p:extLst>
   </p:cSld>
   <p:clrMapOvr>
     <a:masterClrMapping/>
@@ -3054,6 +2762,7 @@
               <a:rPr lang="zh-CN" altLang="en-US"/>
               <a:t>单击此处编辑母版标题样式</a:t>
             </a:r>
+            <a:endParaRPr lang="zh-CN" altLang="en-US"/>
           </a:p>
         </p:txBody>
       </p:sp>
@@ -3082,6 +2791,7 @@
               <a:rPr lang="zh-CN" altLang="en-US"/>
               <a:t>单击此处编辑母版文本样式</a:t>
             </a:r>
+            <a:endParaRPr lang="zh-CN" altLang="en-US"/>
           </a:p>
           <a:p>
             <a:pPr lvl="1"/>
@@ -3089,6 +2799,7 @@
               <a:rPr lang="zh-CN" altLang="en-US"/>
               <a:t>第二级</a:t>
             </a:r>
+            <a:endParaRPr lang="zh-CN" altLang="en-US"/>
           </a:p>
           <a:p>
             <a:pPr lvl="2"/>
@@ -3096,6 +2807,7 @@
               <a:rPr lang="zh-CN" altLang="en-US"/>
               <a:t>第三级</a:t>
             </a:r>
+            <a:endParaRPr lang="zh-CN" altLang="en-US"/>
           </a:p>
           <a:p>
             <a:pPr lvl="3"/>
@@ -3103,6 +2815,7 @@
               <a:rPr lang="zh-CN" altLang="en-US"/>
               <a:t>第四级</a:t>
             </a:r>
+            <a:endParaRPr lang="zh-CN" altLang="en-US"/>
           </a:p>
           <a:p>
             <a:pPr lvl="4"/>
@@ -3110,18 +2823,13 @@
               <a:rPr lang="zh-CN" altLang="en-US"/>
               <a:t>第五级</a:t>
             </a:r>
+            <a:endParaRPr lang="zh-CN" altLang="en-US"/>
           </a:p>
         </p:txBody>
       </p:sp>
       <p:sp>
         <p:nvSpPr>
-          <p:cNvPr id="4" name="日期占位符 3">
-            <a:extLst>
-              <a:ext uri="{FF2B5EF4-FFF2-40B4-BE49-F238E27FC236}">
-                <a16:creationId xmlns:a16="http://schemas.microsoft.com/office/drawing/2014/main" id="{1894C623-0ADE-484A-BE33-E702B35822D4}"/>
-              </a:ext>
-            </a:extLst>
-          </p:cNvPr>
+          <p:cNvPr id="4" name="日期占位符 3"/>
           <p:cNvSpPr>
             <a:spLocks noGrp="1"/>
           </p:cNvSpPr>
@@ -3143,10 +2851,6 @@
             </a:pPr>
             <a:fld id="{57DA897F-8DA0-4D46-8DD8-2287ABC8EEC1}" type="datetimeFigureOut">
               <a:rPr lang="zh-CN" altLang="en-US"/>
-              <a:pPr>
-                <a:defRPr/>
-              </a:pPr>
-              <a:t>2026/6/2</a:t>
             </a:fld>
             <a:endParaRPr lang="zh-CN" altLang="en-US"/>
           </a:p>
@@ -3154,13 +2858,7 @@
       </p:sp>
       <p:sp>
         <p:nvSpPr>
-          <p:cNvPr id="5" name="页脚占位符 4">
-            <a:extLst>
-              <a:ext uri="{FF2B5EF4-FFF2-40B4-BE49-F238E27FC236}">
-                <a16:creationId xmlns:a16="http://schemas.microsoft.com/office/drawing/2014/main" id="{40C84BD7-9901-416C-95BF-36949573D301}"/>
-              </a:ext>
-            </a:extLst>
-          </p:cNvPr>
+          <p:cNvPr id="5" name="页脚占位符 4"/>
           <p:cNvSpPr>
             <a:spLocks noGrp="1"/>
           </p:cNvSpPr>
@@ -3186,13 +2884,7 @@
       </p:sp>
       <p:sp>
         <p:nvSpPr>
-          <p:cNvPr id="6" name="灯片编号占位符 5">
-            <a:extLst>
-              <a:ext uri="{FF2B5EF4-FFF2-40B4-BE49-F238E27FC236}">
-                <a16:creationId xmlns:a16="http://schemas.microsoft.com/office/drawing/2014/main" id="{FF5E8AF4-C2BC-4E32-9DB3-E8FB1A1C9C6C}"/>
-              </a:ext>
-            </a:extLst>
-          </p:cNvPr>
+          <p:cNvPr id="6" name="灯片编号占位符 5"/>
           <p:cNvSpPr>
             <a:spLocks noGrp="1"/>
           </p:cNvSpPr>
@@ -3214,21 +2906,12 @@
             </a:pPr>
             <a:fld id="{76D54C32-A54F-443A-900C-0AC299C29E82}" type="slidenum">
               <a:rPr lang="zh-CN" altLang="en-US"/>
-              <a:pPr>
-                <a:defRPr/>
-              </a:pPr>
-              <a:t>‹#›</a:t>
             </a:fld>
             <a:endParaRPr lang="zh-CN" altLang="en-US"/>
           </a:p>
         </p:txBody>
       </p:sp>
     </p:spTree>
-    <p:extLst>
-      <p:ext uri="{BB962C8B-B14F-4D97-AF65-F5344CB8AC3E}">
-        <p14:creationId xmlns:p14="http://schemas.microsoft.com/office/powerpoint/2010/main" val="4182868265"/>
-      </p:ext>
-    </p:extLst>
   </p:cSld>
   <p:clrMapOvr>
     <a:masterClrMapping/>
@@ -3278,6 +2961,7 @@
               <a:rPr lang="zh-CN" altLang="en-US"/>
               <a:t>单击此处编辑母版文本样式</a:t>
             </a:r>
+            <a:endParaRPr lang="zh-CN" altLang="en-US"/>
           </a:p>
           <a:p>
             <a:pPr lvl="1"/>
@@ -3285,6 +2969,7 @@
               <a:rPr lang="zh-CN" altLang="en-US"/>
               <a:t>第二级</a:t>
             </a:r>
+            <a:endParaRPr lang="zh-CN" altLang="en-US"/>
           </a:p>
           <a:p>
             <a:pPr lvl="2"/>
@@ -3292,6 +2977,7 @@
               <a:rPr lang="zh-CN" altLang="en-US"/>
               <a:t>第三级</a:t>
             </a:r>
+            <a:endParaRPr lang="zh-CN" altLang="en-US"/>
           </a:p>
           <a:p>
             <a:pPr lvl="3"/>
@@ -3299,6 +2985,7 @@
               <a:rPr lang="zh-CN" altLang="en-US"/>
               <a:t>第四级</a:t>
             </a:r>
+            <a:endParaRPr lang="zh-CN" altLang="en-US"/>
           </a:p>
           <a:p>
             <a:pPr lvl="4"/>
@@ -3306,18 +2993,13 @@
               <a:rPr lang="zh-CN" altLang="en-US"/>
               <a:t>第五级</a:t>
             </a:r>
+            <a:endParaRPr lang="zh-CN" altLang="en-US"/>
           </a:p>
         </p:txBody>
       </p:sp>
       <p:sp>
         <p:nvSpPr>
-          <p:cNvPr id="3" name="Rectangle 4">
-            <a:extLst>
-              <a:ext uri="{FF2B5EF4-FFF2-40B4-BE49-F238E27FC236}">
-                <a16:creationId xmlns:a16="http://schemas.microsoft.com/office/drawing/2014/main" id="{A4E221A7-0730-4633-B4BD-24B39355CC5D}"/>
-              </a:ext>
-            </a:extLst>
-          </p:cNvPr>
+          <p:cNvPr id="3" name="Rectangle 4"/>
           <p:cNvSpPr>
             <a:spLocks noGrp="1" noChangeArrowheads="1"/>
           </p:cNvSpPr>
@@ -3343,13 +3025,7 @@
       </p:sp>
       <p:sp>
         <p:nvSpPr>
-          <p:cNvPr id="4" name="Rectangle 5">
-            <a:extLst>
-              <a:ext uri="{FF2B5EF4-FFF2-40B4-BE49-F238E27FC236}">
-                <a16:creationId xmlns:a16="http://schemas.microsoft.com/office/drawing/2014/main" id="{78DCF6A7-B355-459E-B60A-77FF55BDCAAC}"/>
-              </a:ext>
-            </a:extLst>
-          </p:cNvPr>
+          <p:cNvPr id="4" name="Rectangle 5"/>
           <p:cNvSpPr>
             <a:spLocks noGrp="1" noChangeArrowheads="1"/>
           </p:cNvSpPr>
@@ -3375,13 +3051,7 @@
       </p:sp>
       <p:sp>
         <p:nvSpPr>
-          <p:cNvPr id="5" name="Rectangle 6">
-            <a:extLst>
-              <a:ext uri="{FF2B5EF4-FFF2-40B4-BE49-F238E27FC236}">
-                <a16:creationId xmlns:a16="http://schemas.microsoft.com/office/drawing/2014/main" id="{483CACA6-08B1-457A-9623-D84272E7D764}"/>
-              </a:ext>
-            </a:extLst>
-          </p:cNvPr>
+          <p:cNvPr id="5" name="Rectangle 6"/>
           <p:cNvSpPr>
             <a:spLocks noGrp="1" noChangeArrowheads="1"/>
           </p:cNvSpPr>
@@ -3403,21 +3073,12 @@
             </a:pPr>
             <a:fld id="{97C3CAD6-A1E2-4004-850D-629E47C74569}" type="slidenum">
               <a:rPr lang="en-US" altLang="zh-CN"/>
-              <a:pPr>
-                <a:defRPr/>
-              </a:pPr>
-              <a:t>‹#›</a:t>
             </a:fld>
             <a:endParaRPr lang="en-US" altLang="zh-CN"/>
           </a:p>
         </p:txBody>
       </p:sp>
     </p:spTree>
-    <p:extLst>
-      <p:ext uri="{BB962C8B-B14F-4D97-AF65-F5344CB8AC3E}">
-        <p14:creationId xmlns:p14="http://schemas.microsoft.com/office/powerpoint/2010/main" val="1648139582"/>
-      </p:ext>
-    </p:extLst>
   </p:cSld>
   <p:clrMapOvr>
     <a:masterClrMapping/>
@@ -3461,6 +3122,7 @@
               <a:rPr lang="zh-CN" altLang="en-US"/>
               <a:t>单击此处编辑母版标题样式</a:t>
             </a:r>
+            <a:endParaRPr lang="zh-CN" altLang="en-US"/>
           </a:p>
         </p:txBody>
       </p:sp>
@@ -3484,6 +3146,7 @@
               <a:rPr lang="zh-CN" altLang="en-US" dirty="0"/>
               <a:t>单击此处编辑母版文本样式</a:t>
             </a:r>
+            <a:endParaRPr lang="zh-CN" altLang="en-US" dirty="0"/>
           </a:p>
           <a:p>
             <a:pPr lvl="1"/>
@@ -3491,6 +3154,7 @@
               <a:rPr lang="zh-CN" altLang="en-US" dirty="0"/>
               <a:t>第二级</a:t>
             </a:r>
+            <a:endParaRPr lang="zh-CN" altLang="en-US" dirty="0"/>
           </a:p>
           <a:p>
             <a:pPr lvl="2"/>
@@ -3498,6 +3162,7 @@
               <a:rPr lang="zh-CN" altLang="en-US" dirty="0"/>
               <a:t>第三级</a:t>
             </a:r>
+            <a:endParaRPr lang="zh-CN" altLang="en-US" dirty="0"/>
           </a:p>
           <a:p>
             <a:pPr lvl="3"/>
@@ -3505,6 +3170,7 @@
               <a:rPr lang="zh-CN" altLang="en-US" dirty="0"/>
               <a:t>第四级</a:t>
             </a:r>
+            <a:endParaRPr lang="zh-CN" altLang="en-US" dirty="0"/>
           </a:p>
           <a:p>
             <a:pPr lvl="4"/>
@@ -3512,18 +3178,13 @@
               <a:rPr lang="zh-CN" altLang="en-US" dirty="0"/>
               <a:t>第五级</a:t>
             </a:r>
+            <a:endParaRPr lang="zh-CN" altLang="en-US" dirty="0"/>
           </a:p>
         </p:txBody>
       </p:sp>
       <p:sp>
         <p:nvSpPr>
-          <p:cNvPr id="4" name="日期占位符 3">
-            <a:extLst>
-              <a:ext uri="{FF2B5EF4-FFF2-40B4-BE49-F238E27FC236}">
-                <a16:creationId xmlns:a16="http://schemas.microsoft.com/office/drawing/2014/main" id="{64ECD5CD-4A9C-42BE-9B3F-0ABDA58F33AB}"/>
-              </a:ext>
-            </a:extLst>
-          </p:cNvPr>
+          <p:cNvPr id="4" name="日期占位符 3"/>
           <p:cNvSpPr>
             <a:spLocks noGrp="1"/>
           </p:cNvSpPr>
@@ -3545,10 +3206,6 @@
             </a:pPr>
             <a:fld id="{0C08AD0D-2896-4BF3-923E-FFF8221B046F}" type="datetimeFigureOut">
               <a:rPr lang="zh-CN" altLang="en-US"/>
-              <a:pPr>
-                <a:defRPr/>
-              </a:pPr>
-              <a:t>2026/6/2</a:t>
             </a:fld>
             <a:endParaRPr lang="zh-CN" altLang="en-US"/>
           </a:p>
@@ -3556,13 +3213,7 @@
       </p:sp>
       <p:sp>
         <p:nvSpPr>
-          <p:cNvPr id="5" name="页脚占位符 4">
-            <a:extLst>
-              <a:ext uri="{FF2B5EF4-FFF2-40B4-BE49-F238E27FC236}">
-                <a16:creationId xmlns:a16="http://schemas.microsoft.com/office/drawing/2014/main" id="{A3BE9E60-15CC-4A0A-B209-61423A3C2F39}"/>
-              </a:ext>
-            </a:extLst>
-          </p:cNvPr>
+          <p:cNvPr id="5" name="页脚占位符 4"/>
           <p:cNvSpPr>
             <a:spLocks noGrp="1"/>
           </p:cNvSpPr>
@@ -3588,13 +3239,7 @@
       </p:sp>
       <p:sp>
         <p:nvSpPr>
-          <p:cNvPr id="6" name="灯片编号占位符 5">
-            <a:extLst>
-              <a:ext uri="{FF2B5EF4-FFF2-40B4-BE49-F238E27FC236}">
-                <a16:creationId xmlns:a16="http://schemas.microsoft.com/office/drawing/2014/main" id="{1944ABA8-1820-4B9B-8398-8FE5EBFF2F45}"/>
-              </a:ext>
-            </a:extLst>
-          </p:cNvPr>
+          <p:cNvPr id="6" name="灯片编号占位符 5"/>
           <p:cNvSpPr>
             <a:spLocks noGrp="1"/>
           </p:cNvSpPr>
@@ -3616,21 +3261,12 @@
             </a:pPr>
             <a:fld id="{5C03C437-6D35-4DF2-9DDF-16D33DE3BB70}" type="slidenum">
               <a:rPr lang="zh-CN" altLang="en-US"/>
-              <a:pPr>
-                <a:defRPr/>
-              </a:pPr>
-              <a:t>‹#›</a:t>
             </a:fld>
             <a:endParaRPr lang="zh-CN" altLang="en-US"/>
           </a:p>
         </p:txBody>
       </p:sp>
     </p:spTree>
-    <p:extLst>
-      <p:ext uri="{BB962C8B-B14F-4D97-AF65-F5344CB8AC3E}">
-        <p14:creationId xmlns:p14="http://schemas.microsoft.com/office/powerpoint/2010/main" val="2487465138"/>
-      </p:ext>
-    </p:extLst>
   </p:cSld>
   <p:clrMapOvr>
     <a:masterClrMapping/>
@@ -3683,6 +3319,7 @@
               <a:rPr lang="zh-CN" altLang="en-US"/>
               <a:t>单击此处编辑母版标题样式</a:t>
             </a:r>
+            <a:endParaRPr lang="zh-CN" altLang="en-US"/>
           </a:p>
         </p:txBody>
       </p:sp>
@@ -3802,18 +3439,13 @@
               <a:rPr lang="zh-CN" altLang="en-US"/>
               <a:t>单击此处编辑母版文本样式</a:t>
             </a:r>
+            <a:endParaRPr lang="zh-CN" altLang="en-US"/>
           </a:p>
         </p:txBody>
       </p:sp>
       <p:sp>
         <p:nvSpPr>
-          <p:cNvPr id="4" name="日期占位符 3">
-            <a:extLst>
-              <a:ext uri="{FF2B5EF4-FFF2-40B4-BE49-F238E27FC236}">
-                <a16:creationId xmlns:a16="http://schemas.microsoft.com/office/drawing/2014/main" id="{3B513924-75A6-4FB4-87F0-175FBDEB6CD1}"/>
-              </a:ext>
-            </a:extLst>
-          </p:cNvPr>
+          <p:cNvPr id="4" name="日期占位符 3"/>
           <p:cNvSpPr>
             <a:spLocks noGrp="1"/>
           </p:cNvSpPr>
@@ -3835,10 +3467,6 @@
             </a:pPr>
             <a:fld id="{413F5F9B-25E3-46A1-98D1-D8DF1644CD11}" type="datetimeFigureOut">
               <a:rPr lang="zh-CN" altLang="en-US"/>
-              <a:pPr>
-                <a:defRPr/>
-              </a:pPr>
-              <a:t>2026/6/2</a:t>
             </a:fld>
             <a:endParaRPr lang="zh-CN" altLang="en-US"/>
           </a:p>
@@ -3846,13 +3474,7 @@
       </p:sp>
       <p:sp>
         <p:nvSpPr>
-          <p:cNvPr id="5" name="页脚占位符 4">
-            <a:extLst>
-              <a:ext uri="{FF2B5EF4-FFF2-40B4-BE49-F238E27FC236}">
-                <a16:creationId xmlns:a16="http://schemas.microsoft.com/office/drawing/2014/main" id="{A62A2985-7505-4F1A-88BD-AC95D4F9C358}"/>
-              </a:ext>
-            </a:extLst>
-          </p:cNvPr>
+          <p:cNvPr id="5" name="页脚占位符 4"/>
           <p:cNvSpPr>
             <a:spLocks noGrp="1"/>
           </p:cNvSpPr>
@@ -3878,13 +3500,7 @@
       </p:sp>
       <p:sp>
         <p:nvSpPr>
-          <p:cNvPr id="6" name="灯片编号占位符 5">
-            <a:extLst>
-              <a:ext uri="{FF2B5EF4-FFF2-40B4-BE49-F238E27FC236}">
-                <a16:creationId xmlns:a16="http://schemas.microsoft.com/office/drawing/2014/main" id="{2394F377-6737-4278-BE4F-1C7BE8311EE3}"/>
-              </a:ext>
-            </a:extLst>
-          </p:cNvPr>
+          <p:cNvPr id="6" name="灯片编号占位符 5"/>
           <p:cNvSpPr>
             <a:spLocks noGrp="1"/>
           </p:cNvSpPr>
@@ -3906,21 +3522,12 @@
             </a:pPr>
             <a:fld id="{6BCEA479-BF3B-473D-BBE0-F05445F3474A}" type="slidenum">
               <a:rPr lang="zh-CN" altLang="en-US"/>
-              <a:pPr>
-                <a:defRPr/>
-              </a:pPr>
-              <a:t>‹#›</a:t>
             </a:fld>
             <a:endParaRPr lang="zh-CN" altLang="en-US"/>
           </a:p>
         </p:txBody>
       </p:sp>
     </p:spTree>
-    <p:extLst>
-      <p:ext uri="{BB962C8B-B14F-4D97-AF65-F5344CB8AC3E}">
-        <p14:creationId xmlns:p14="http://schemas.microsoft.com/office/powerpoint/2010/main" val="2867425211"/>
-      </p:ext>
-    </p:extLst>
   </p:cSld>
   <p:clrMapOvr>
     <a:masterClrMapping/>
@@ -3964,6 +3571,7 @@
               <a:rPr lang="zh-CN" altLang="en-US"/>
               <a:t>单击此处编辑母版标题样式</a:t>
             </a:r>
+            <a:endParaRPr lang="zh-CN" altLang="en-US"/>
           </a:p>
         </p:txBody>
       </p:sp>
@@ -4020,6 +3628,7 @@
               <a:rPr lang="zh-CN" altLang="en-US"/>
               <a:t>单击此处编辑母版文本样式</a:t>
             </a:r>
+            <a:endParaRPr lang="zh-CN" altLang="en-US"/>
           </a:p>
           <a:p>
             <a:pPr lvl="1"/>
@@ -4027,6 +3636,7 @@
               <a:rPr lang="zh-CN" altLang="en-US"/>
               <a:t>第二级</a:t>
             </a:r>
+            <a:endParaRPr lang="zh-CN" altLang="en-US"/>
           </a:p>
           <a:p>
             <a:pPr lvl="2"/>
@@ -4034,6 +3644,7 @@
               <a:rPr lang="zh-CN" altLang="en-US"/>
               <a:t>第三级</a:t>
             </a:r>
+            <a:endParaRPr lang="zh-CN" altLang="en-US"/>
           </a:p>
           <a:p>
             <a:pPr lvl="3"/>
@@ -4041,6 +3652,7 @@
               <a:rPr lang="zh-CN" altLang="en-US"/>
               <a:t>第四级</a:t>
             </a:r>
+            <a:endParaRPr lang="zh-CN" altLang="en-US"/>
           </a:p>
           <a:p>
             <a:pPr lvl="4"/>
@@ -4048,6 +3660,7 @@
               <a:rPr lang="zh-CN" altLang="en-US"/>
               <a:t>第五级</a:t>
             </a:r>
+            <a:endParaRPr lang="zh-CN" altLang="en-US"/>
           </a:p>
         </p:txBody>
       </p:sp>
@@ -4104,6 +3717,7 @@
               <a:rPr lang="zh-CN" altLang="en-US"/>
               <a:t>单击此处编辑母版文本样式</a:t>
             </a:r>
+            <a:endParaRPr lang="zh-CN" altLang="en-US"/>
           </a:p>
           <a:p>
             <a:pPr lvl="1"/>
@@ -4111,6 +3725,7 @@
               <a:rPr lang="zh-CN" altLang="en-US"/>
               <a:t>第二级</a:t>
             </a:r>
+            <a:endParaRPr lang="zh-CN" altLang="en-US"/>
           </a:p>
           <a:p>
             <a:pPr lvl="2"/>
@@ -4118,6 +3733,7 @@
               <a:rPr lang="zh-CN" altLang="en-US"/>
               <a:t>第三级</a:t>
             </a:r>
+            <a:endParaRPr lang="zh-CN" altLang="en-US"/>
           </a:p>
           <a:p>
             <a:pPr lvl="3"/>
@@ -4125,6 +3741,7 @@
               <a:rPr lang="zh-CN" altLang="en-US"/>
               <a:t>第四级</a:t>
             </a:r>
+            <a:endParaRPr lang="zh-CN" altLang="en-US"/>
           </a:p>
           <a:p>
             <a:pPr lvl="4"/>
@@ -4132,18 +3749,13 @@
               <a:rPr lang="zh-CN" altLang="en-US"/>
               <a:t>第五级</a:t>
             </a:r>
+            <a:endParaRPr lang="zh-CN" altLang="en-US"/>
           </a:p>
         </p:txBody>
       </p:sp>
       <p:sp>
         <p:nvSpPr>
-          <p:cNvPr id="5" name="日期占位符 3">
-            <a:extLst>
-              <a:ext uri="{FF2B5EF4-FFF2-40B4-BE49-F238E27FC236}">
-                <a16:creationId xmlns:a16="http://schemas.microsoft.com/office/drawing/2014/main" id="{20880CC9-7971-4098-B87F-8480BDBD0DFD}"/>
-              </a:ext>
-            </a:extLst>
-          </p:cNvPr>
+          <p:cNvPr id="5" name="日期占位符 3"/>
           <p:cNvSpPr>
             <a:spLocks noGrp="1"/>
           </p:cNvSpPr>
@@ -4165,10 +3777,6 @@
             </a:pPr>
             <a:fld id="{B2CBB680-830C-4A88-AF9D-51D5BB13C0CE}" type="datetimeFigureOut">
               <a:rPr lang="zh-CN" altLang="en-US"/>
-              <a:pPr>
-                <a:defRPr/>
-              </a:pPr>
-              <a:t>2026/6/2</a:t>
             </a:fld>
             <a:endParaRPr lang="zh-CN" altLang="en-US"/>
           </a:p>
@@ -4176,13 +3784,7 @@
       </p:sp>
       <p:sp>
         <p:nvSpPr>
-          <p:cNvPr id="6" name="页脚占位符 4">
-            <a:extLst>
-              <a:ext uri="{FF2B5EF4-FFF2-40B4-BE49-F238E27FC236}">
-                <a16:creationId xmlns:a16="http://schemas.microsoft.com/office/drawing/2014/main" id="{2AE3D943-B121-407E-916D-9FAD9F38AE58}"/>
-              </a:ext>
-            </a:extLst>
-          </p:cNvPr>
+          <p:cNvPr id="6" name="页脚占位符 4"/>
           <p:cNvSpPr>
             <a:spLocks noGrp="1"/>
           </p:cNvSpPr>
@@ -4208,13 +3810,7 @@
       </p:sp>
       <p:sp>
         <p:nvSpPr>
-          <p:cNvPr id="7" name="灯片编号占位符 5">
-            <a:extLst>
-              <a:ext uri="{FF2B5EF4-FFF2-40B4-BE49-F238E27FC236}">
-                <a16:creationId xmlns:a16="http://schemas.microsoft.com/office/drawing/2014/main" id="{22CF24BB-C6B9-4C32-9E47-C86D43E7CCD0}"/>
-              </a:ext>
-            </a:extLst>
-          </p:cNvPr>
+          <p:cNvPr id="7" name="灯片编号占位符 5"/>
           <p:cNvSpPr>
             <a:spLocks noGrp="1"/>
           </p:cNvSpPr>
@@ -4236,21 +3832,12 @@
             </a:pPr>
             <a:fld id="{91F71099-1BE1-4EC4-99FA-0E8A4EF43A17}" type="slidenum">
               <a:rPr lang="zh-CN" altLang="en-US"/>
-              <a:pPr>
-                <a:defRPr/>
-              </a:pPr>
-              <a:t>‹#›</a:t>
             </a:fld>
             <a:endParaRPr lang="zh-CN" altLang="en-US"/>
           </a:p>
         </p:txBody>
       </p:sp>
     </p:spTree>
-    <p:extLst>
-      <p:ext uri="{BB962C8B-B14F-4D97-AF65-F5344CB8AC3E}">
-        <p14:creationId xmlns:p14="http://schemas.microsoft.com/office/powerpoint/2010/main" val="3343344951"/>
-      </p:ext>
-    </p:extLst>
   </p:cSld>
   <p:clrMapOvr>
     <a:masterClrMapping/>
@@ -4298,6 +3885,7 @@
               <a:rPr lang="zh-CN" altLang="en-US"/>
               <a:t>单击此处编辑母版标题样式</a:t>
             </a:r>
+            <a:endParaRPr lang="zh-CN" altLang="en-US"/>
           </a:p>
         </p:txBody>
       </p:sp>
@@ -4363,6 +3951,7 @@
               <a:rPr lang="zh-CN" altLang="en-US"/>
               <a:t>单击此处编辑母版文本样式</a:t>
             </a:r>
+            <a:endParaRPr lang="zh-CN" altLang="en-US"/>
           </a:p>
         </p:txBody>
       </p:sp>
@@ -4419,6 +4008,7 @@
               <a:rPr lang="zh-CN" altLang="en-US"/>
               <a:t>单击此处编辑母版文本样式</a:t>
             </a:r>
+            <a:endParaRPr lang="zh-CN" altLang="en-US"/>
           </a:p>
           <a:p>
             <a:pPr lvl="1"/>
@@ -4426,6 +4016,7 @@
               <a:rPr lang="zh-CN" altLang="en-US"/>
               <a:t>第二级</a:t>
             </a:r>
+            <a:endParaRPr lang="zh-CN" altLang="en-US"/>
           </a:p>
           <a:p>
             <a:pPr lvl="2"/>
@@ -4433,6 +4024,7 @@
               <a:rPr lang="zh-CN" altLang="en-US"/>
               <a:t>第三级</a:t>
             </a:r>
+            <a:endParaRPr lang="zh-CN" altLang="en-US"/>
           </a:p>
           <a:p>
             <a:pPr lvl="3"/>
@@ -4440,6 +4032,7 @@
               <a:rPr lang="zh-CN" altLang="en-US"/>
               <a:t>第四级</a:t>
             </a:r>
+            <a:endParaRPr lang="zh-CN" altLang="en-US"/>
           </a:p>
           <a:p>
             <a:pPr lvl="4"/>
@@ -4447,6 +4040,7 @@
               <a:rPr lang="zh-CN" altLang="en-US"/>
               <a:t>第五级</a:t>
             </a:r>
+            <a:endParaRPr lang="zh-CN" altLang="en-US"/>
           </a:p>
         </p:txBody>
       </p:sp>
@@ -4512,6 +4106,7 @@
               <a:rPr lang="zh-CN" altLang="en-US"/>
               <a:t>单击此处编辑母版文本样式</a:t>
             </a:r>
+            <a:endParaRPr lang="zh-CN" altLang="en-US"/>
           </a:p>
         </p:txBody>
       </p:sp>
@@ -4568,6 +4163,7 @@
               <a:rPr lang="zh-CN" altLang="en-US"/>
               <a:t>单击此处编辑母版文本样式</a:t>
             </a:r>
+            <a:endParaRPr lang="zh-CN" altLang="en-US"/>
           </a:p>
           <a:p>
             <a:pPr lvl="1"/>
@@ -4575,6 +4171,7 @@
               <a:rPr lang="zh-CN" altLang="en-US"/>
               <a:t>第二级</a:t>
             </a:r>
+            <a:endParaRPr lang="zh-CN" altLang="en-US"/>
           </a:p>
           <a:p>
             <a:pPr lvl="2"/>
@@ -4582,6 +4179,7 @@
               <a:rPr lang="zh-CN" altLang="en-US"/>
               <a:t>第三级</a:t>
             </a:r>
+            <a:endParaRPr lang="zh-CN" altLang="en-US"/>
           </a:p>
           <a:p>
             <a:pPr lvl="3"/>
@@ -4589,6 +4187,7 @@
               <a:rPr lang="zh-CN" altLang="en-US"/>
               <a:t>第四级</a:t>
             </a:r>
+            <a:endParaRPr lang="zh-CN" altLang="en-US"/>
           </a:p>
           <a:p>
             <a:pPr lvl="4"/>
@@ -4596,18 +4195,13 @@
               <a:rPr lang="zh-CN" altLang="en-US"/>
               <a:t>第五级</a:t>
             </a:r>
+            <a:endParaRPr lang="zh-CN" altLang="en-US"/>
           </a:p>
         </p:txBody>
       </p:sp>
       <p:sp>
         <p:nvSpPr>
-          <p:cNvPr id="7" name="日期占位符 3">
-            <a:extLst>
-              <a:ext uri="{FF2B5EF4-FFF2-40B4-BE49-F238E27FC236}">
-                <a16:creationId xmlns:a16="http://schemas.microsoft.com/office/drawing/2014/main" id="{8CE374B4-C9E2-4251-B199-E4EB7F5E42B1}"/>
-              </a:ext>
-            </a:extLst>
-          </p:cNvPr>
+          <p:cNvPr id="7" name="日期占位符 3"/>
           <p:cNvSpPr>
             <a:spLocks noGrp="1"/>
           </p:cNvSpPr>
@@ -4629,10 +4223,6 @@
             </a:pPr>
             <a:fld id="{0D29C6AF-5792-4C28-AF80-D5340AE435B0}" type="datetimeFigureOut">
               <a:rPr lang="zh-CN" altLang="en-US"/>
-              <a:pPr>
-                <a:defRPr/>
-              </a:pPr>
-              <a:t>2026/6/2</a:t>
             </a:fld>
             <a:endParaRPr lang="zh-CN" altLang="en-US"/>
           </a:p>
@@ -4640,13 +4230,7 @@
       </p:sp>
       <p:sp>
         <p:nvSpPr>
-          <p:cNvPr id="8" name="页脚占位符 4">
-            <a:extLst>
-              <a:ext uri="{FF2B5EF4-FFF2-40B4-BE49-F238E27FC236}">
-                <a16:creationId xmlns:a16="http://schemas.microsoft.com/office/drawing/2014/main" id="{E9B58D44-811D-4457-B664-5138E3841E88}"/>
-              </a:ext>
-            </a:extLst>
-          </p:cNvPr>
+          <p:cNvPr id="8" name="页脚占位符 4"/>
           <p:cNvSpPr>
             <a:spLocks noGrp="1"/>
           </p:cNvSpPr>
@@ -4672,13 +4256,7 @@
       </p:sp>
       <p:sp>
         <p:nvSpPr>
-          <p:cNvPr id="9" name="灯片编号占位符 5">
-            <a:extLst>
-              <a:ext uri="{FF2B5EF4-FFF2-40B4-BE49-F238E27FC236}">
-                <a16:creationId xmlns:a16="http://schemas.microsoft.com/office/drawing/2014/main" id="{0A1AC865-3AD2-427E-AFE6-3583B2CEC9B6}"/>
-              </a:ext>
-            </a:extLst>
-          </p:cNvPr>
+          <p:cNvPr id="9" name="灯片编号占位符 5"/>
           <p:cNvSpPr>
             <a:spLocks noGrp="1"/>
           </p:cNvSpPr>
@@ -4700,21 +4278,12 @@
             </a:pPr>
             <a:fld id="{DE48EC19-AA48-483B-9C69-7C29A53F1D62}" type="slidenum">
               <a:rPr lang="zh-CN" altLang="en-US"/>
-              <a:pPr>
-                <a:defRPr/>
-              </a:pPr>
-              <a:t>‹#›</a:t>
             </a:fld>
             <a:endParaRPr lang="zh-CN" altLang="en-US"/>
           </a:p>
         </p:txBody>
       </p:sp>
     </p:spTree>
-    <p:extLst>
-      <p:ext uri="{BB962C8B-B14F-4D97-AF65-F5344CB8AC3E}">
-        <p14:creationId xmlns:p14="http://schemas.microsoft.com/office/powerpoint/2010/main" val="3549895189"/>
-      </p:ext>
-    </p:extLst>
   </p:cSld>
   <p:clrMapOvr>
     <a:masterClrMapping/>
@@ -4758,18 +4327,13 @@
               <a:rPr lang="zh-CN" altLang="en-US"/>
               <a:t>单击此处编辑母版标题样式</a:t>
             </a:r>
+            <a:endParaRPr lang="zh-CN" altLang="en-US"/>
           </a:p>
         </p:txBody>
       </p:sp>
       <p:sp>
         <p:nvSpPr>
-          <p:cNvPr id="3" name="日期占位符 3">
-            <a:extLst>
-              <a:ext uri="{FF2B5EF4-FFF2-40B4-BE49-F238E27FC236}">
-                <a16:creationId xmlns:a16="http://schemas.microsoft.com/office/drawing/2014/main" id="{D4571941-D6AA-47A6-B45C-08C11357B850}"/>
-              </a:ext>
-            </a:extLst>
-          </p:cNvPr>
+          <p:cNvPr id="3" name="日期占位符 3"/>
           <p:cNvSpPr>
             <a:spLocks noGrp="1"/>
           </p:cNvSpPr>
@@ -4791,10 +4355,6 @@
             </a:pPr>
             <a:fld id="{38ACEB95-638D-4867-89C1-C84FCA55FD02}" type="datetimeFigureOut">
               <a:rPr lang="zh-CN" altLang="en-US"/>
-              <a:pPr>
-                <a:defRPr/>
-              </a:pPr>
-              <a:t>2026/6/2</a:t>
             </a:fld>
             <a:endParaRPr lang="zh-CN" altLang="en-US"/>
           </a:p>
@@ -4802,13 +4362,7 @@
       </p:sp>
       <p:sp>
         <p:nvSpPr>
-          <p:cNvPr id="4" name="页脚占位符 4">
-            <a:extLst>
-              <a:ext uri="{FF2B5EF4-FFF2-40B4-BE49-F238E27FC236}">
-                <a16:creationId xmlns:a16="http://schemas.microsoft.com/office/drawing/2014/main" id="{BE81DE41-E008-427E-A0EB-9D01D03BFCDB}"/>
-              </a:ext>
-            </a:extLst>
-          </p:cNvPr>
+          <p:cNvPr id="4" name="页脚占位符 4"/>
           <p:cNvSpPr>
             <a:spLocks noGrp="1"/>
           </p:cNvSpPr>
@@ -4834,13 +4388,7 @@
       </p:sp>
       <p:sp>
         <p:nvSpPr>
-          <p:cNvPr id="5" name="灯片编号占位符 5">
-            <a:extLst>
-              <a:ext uri="{FF2B5EF4-FFF2-40B4-BE49-F238E27FC236}">
-                <a16:creationId xmlns:a16="http://schemas.microsoft.com/office/drawing/2014/main" id="{894AE7B3-31F8-4E8C-BB75-7A3F0EC815D9}"/>
-              </a:ext>
-            </a:extLst>
-          </p:cNvPr>
+          <p:cNvPr id="5" name="灯片编号占位符 5"/>
           <p:cNvSpPr>
             <a:spLocks noGrp="1"/>
           </p:cNvSpPr>
@@ -4862,21 +4410,12 @@
             </a:pPr>
             <a:fld id="{3BD03AD1-CBA7-43A5-BDAB-D2A6671AEF2A}" type="slidenum">
               <a:rPr lang="zh-CN" altLang="en-US"/>
-              <a:pPr>
-                <a:defRPr/>
-              </a:pPr>
-              <a:t>‹#›</a:t>
             </a:fld>
             <a:endParaRPr lang="zh-CN" altLang="en-US"/>
           </a:p>
         </p:txBody>
       </p:sp>
     </p:spTree>
-    <p:extLst>
-      <p:ext uri="{BB962C8B-B14F-4D97-AF65-F5344CB8AC3E}">
-        <p14:creationId xmlns:p14="http://schemas.microsoft.com/office/powerpoint/2010/main" val="2816883384"/>
-      </p:ext>
-    </p:extLst>
   </p:cSld>
   <p:clrMapOvr>
     <a:masterClrMapping/>
@@ -4903,13 +4442,7 @@
       </p:grpSpPr>
       <p:sp>
         <p:nvSpPr>
-          <p:cNvPr id="2" name="日期占位符 3">
-            <a:extLst>
-              <a:ext uri="{FF2B5EF4-FFF2-40B4-BE49-F238E27FC236}">
-                <a16:creationId xmlns:a16="http://schemas.microsoft.com/office/drawing/2014/main" id="{0182AB05-0F02-4448-AA3F-1E48E8443E8A}"/>
-              </a:ext>
-            </a:extLst>
-          </p:cNvPr>
+          <p:cNvPr id="2" name="日期占位符 3"/>
           <p:cNvSpPr>
             <a:spLocks noGrp="1"/>
           </p:cNvSpPr>
@@ -4931,10 +4464,6 @@
             </a:pPr>
             <a:fld id="{B883964D-015F-45A6-BBB8-525A43BB96E4}" type="datetimeFigureOut">
               <a:rPr lang="zh-CN" altLang="en-US"/>
-              <a:pPr>
-                <a:defRPr/>
-              </a:pPr>
-              <a:t>2026/6/2</a:t>
             </a:fld>
             <a:endParaRPr lang="zh-CN" altLang="en-US"/>
           </a:p>
@@ -4942,13 +4471,7 @@
       </p:sp>
       <p:sp>
         <p:nvSpPr>
-          <p:cNvPr id="3" name="页脚占位符 4">
-            <a:extLst>
-              <a:ext uri="{FF2B5EF4-FFF2-40B4-BE49-F238E27FC236}">
-                <a16:creationId xmlns:a16="http://schemas.microsoft.com/office/drawing/2014/main" id="{CDEBB7F7-48E2-4D51-996D-99CFA564FDC1}"/>
-              </a:ext>
-            </a:extLst>
-          </p:cNvPr>
+          <p:cNvPr id="3" name="页脚占位符 4"/>
           <p:cNvSpPr>
             <a:spLocks noGrp="1"/>
           </p:cNvSpPr>
@@ -4974,13 +4497,7 @@
       </p:sp>
       <p:sp>
         <p:nvSpPr>
-          <p:cNvPr id="4" name="灯片编号占位符 5">
-            <a:extLst>
-              <a:ext uri="{FF2B5EF4-FFF2-40B4-BE49-F238E27FC236}">
-                <a16:creationId xmlns:a16="http://schemas.microsoft.com/office/drawing/2014/main" id="{4A9F14A0-6B8E-4251-9D5B-A21946D8CD22}"/>
-              </a:ext>
-            </a:extLst>
-          </p:cNvPr>
+          <p:cNvPr id="4" name="灯片编号占位符 5"/>
           <p:cNvSpPr>
             <a:spLocks noGrp="1"/>
           </p:cNvSpPr>
@@ -5002,21 +4519,12 @@
             </a:pPr>
             <a:fld id="{DDDA8CA2-A1CB-4473-A6CD-72E4CDDC229B}" type="slidenum">
               <a:rPr lang="zh-CN" altLang="en-US"/>
-              <a:pPr>
-                <a:defRPr/>
-              </a:pPr>
-              <a:t>‹#›</a:t>
             </a:fld>
             <a:endParaRPr lang="zh-CN" altLang="en-US"/>
           </a:p>
         </p:txBody>
       </p:sp>
     </p:spTree>
-    <p:extLst>
-      <p:ext uri="{BB962C8B-B14F-4D97-AF65-F5344CB8AC3E}">
-        <p14:creationId xmlns:p14="http://schemas.microsoft.com/office/powerpoint/2010/main" val="3325645518"/>
-      </p:ext>
-    </p:extLst>
   </p:cSld>
   <p:clrMapOvr>
     <a:masterClrMapping/>
@@ -5069,6 +4577,7 @@
               <a:rPr lang="zh-CN" altLang="en-US"/>
               <a:t>单击此处编辑母版标题样式</a:t>
             </a:r>
+            <a:endParaRPr lang="zh-CN" altLang="en-US"/>
           </a:p>
         </p:txBody>
       </p:sp>
@@ -5125,6 +4634,7 @@
               <a:rPr lang="zh-CN" altLang="en-US"/>
               <a:t>单击此处编辑母版文本样式</a:t>
             </a:r>
+            <a:endParaRPr lang="zh-CN" altLang="en-US"/>
           </a:p>
           <a:p>
             <a:pPr lvl="1"/>
@@ -5132,6 +4642,7 @@
               <a:rPr lang="zh-CN" altLang="en-US"/>
               <a:t>第二级</a:t>
             </a:r>
+            <a:endParaRPr lang="zh-CN" altLang="en-US"/>
           </a:p>
           <a:p>
             <a:pPr lvl="2"/>
@@ -5139,6 +4650,7 @@
               <a:rPr lang="zh-CN" altLang="en-US"/>
               <a:t>第三级</a:t>
             </a:r>
+            <a:endParaRPr lang="zh-CN" altLang="en-US"/>
           </a:p>
           <a:p>
             <a:pPr lvl="3"/>
@@ -5146,6 +4658,7 @@
               <a:rPr lang="zh-CN" altLang="en-US"/>
               <a:t>第四级</a:t>
             </a:r>
+            <a:endParaRPr lang="zh-CN" altLang="en-US"/>
           </a:p>
           <a:p>
             <a:pPr lvl="4"/>
@@ -5153,6 +4666,7 @@
               <a:rPr lang="zh-CN" altLang="en-US"/>
               <a:t>第五级</a:t>
             </a:r>
+            <a:endParaRPr lang="zh-CN" altLang="en-US"/>
           </a:p>
         </p:txBody>
       </p:sp>
@@ -5218,18 +4732,13 @@
               <a:rPr lang="zh-CN" altLang="en-US"/>
               <a:t>单击此处编辑母版文本样式</a:t>
             </a:r>
+            <a:endParaRPr lang="zh-CN" altLang="en-US"/>
           </a:p>
         </p:txBody>
       </p:sp>
       <p:sp>
         <p:nvSpPr>
-          <p:cNvPr id="5" name="日期占位符 3">
-            <a:extLst>
-              <a:ext uri="{FF2B5EF4-FFF2-40B4-BE49-F238E27FC236}">
-                <a16:creationId xmlns:a16="http://schemas.microsoft.com/office/drawing/2014/main" id="{87165CD9-A9F8-4E14-B869-E12DC6348616}"/>
-              </a:ext>
-            </a:extLst>
-          </p:cNvPr>
+          <p:cNvPr id="5" name="日期占位符 3"/>
           <p:cNvSpPr>
             <a:spLocks noGrp="1"/>
           </p:cNvSpPr>
@@ -5251,10 +4760,6 @@
             </a:pPr>
             <a:fld id="{B9E1E904-1879-477D-A111-3DA566B9A543}" type="datetimeFigureOut">
               <a:rPr lang="zh-CN" altLang="en-US"/>
-              <a:pPr>
-                <a:defRPr/>
-              </a:pPr>
-              <a:t>2026/6/2</a:t>
             </a:fld>
             <a:endParaRPr lang="zh-CN" altLang="en-US"/>
           </a:p>
@@ -5262,13 +4767,7 @@
       </p:sp>
       <p:sp>
         <p:nvSpPr>
-          <p:cNvPr id="6" name="页脚占位符 4">
-            <a:extLst>
-              <a:ext uri="{FF2B5EF4-FFF2-40B4-BE49-F238E27FC236}">
-                <a16:creationId xmlns:a16="http://schemas.microsoft.com/office/drawing/2014/main" id="{6FEB713F-8388-465C-A6A3-E3AF8B630C3F}"/>
-              </a:ext>
-            </a:extLst>
-          </p:cNvPr>
+          <p:cNvPr id="6" name="页脚占位符 4"/>
           <p:cNvSpPr>
             <a:spLocks noGrp="1"/>
           </p:cNvSpPr>
@@ -5294,13 +4793,7 @@
       </p:sp>
       <p:sp>
         <p:nvSpPr>
-          <p:cNvPr id="7" name="灯片编号占位符 5">
-            <a:extLst>
-              <a:ext uri="{FF2B5EF4-FFF2-40B4-BE49-F238E27FC236}">
-                <a16:creationId xmlns:a16="http://schemas.microsoft.com/office/drawing/2014/main" id="{BB7237E4-351C-408F-B400-C4ACC19C0794}"/>
-              </a:ext>
-            </a:extLst>
-          </p:cNvPr>
+          <p:cNvPr id="7" name="灯片编号占位符 5"/>
           <p:cNvSpPr>
             <a:spLocks noGrp="1"/>
           </p:cNvSpPr>
@@ -5322,21 +4815,12 @@
             </a:pPr>
             <a:fld id="{99DE49F4-97E0-4BE7-BD10-8E3DF8F88B7B}" type="slidenum">
               <a:rPr lang="zh-CN" altLang="en-US"/>
-              <a:pPr>
-                <a:defRPr/>
-              </a:pPr>
-              <a:t>‹#›</a:t>
             </a:fld>
             <a:endParaRPr lang="zh-CN" altLang="en-US"/>
           </a:p>
         </p:txBody>
       </p:sp>
     </p:spTree>
-    <p:extLst>
-      <p:ext uri="{BB962C8B-B14F-4D97-AF65-F5344CB8AC3E}">
-        <p14:creationId xmlns:p14="http://schemas.microsoft.com/office/powerpoint/2010/main" val="1179324734"/>
-      </p:ext>
-    </p:extLst>
   </p:cSld>
   <p:clrMapOvr>
     <a:masterClrMapping/>
@@ -5389,6 +4873,7 @@
               <a:rPr lang="zh-CN" altLang="en-US"/>
               <a:t>单击此处编辑母版标题样式</a:t>
             </a:r>
+            <a:endParaRPr lang="zh-CN" altLang="en-US"/>
           </a:p>
         </p:txBody>
       </p:sp>
@@ -5518,18 +5003,13 @@
               <a:rPr lang="zh-CN" altLang="en-US"/>
               <a:t>单击此处编辑母版文本样式</a:t>
             </a:r>
+            <a:endParaRPr lang="zh-CN" altLang="en-US"/>
           </a:p>
         </p:txBody>
       </p:sp>
       <p:sp>
         <p:nvSpPr>
-          <p:cNvPr id="5" name="日期占位符 3">
-            <a:extLst>
-              <a:ext uri="{FF2B5EF4-FFF2-40B4-BE49-F238E27FC236}">
-                <a16:creationId xmlns:a16="http://schemas.microsoft.com/office/drawing/2014/main" id="{ECA3C3AB-5D7A-472A-91E7-79B6F6C2D109}"/>
-              </a:ext>
-            </a:extLst>
-          </p:cNvPr>
+          <p:cNvPr id="5" name="日期占位符 3"/>
           <p:cNvSpPr>
             <a:spLocks noGrp="1"/>
           </p:cNvSpPr>
@@ -5551,10 +5031,6 @@
             </a:pPr>
             <a:fld id="{E2F26D2F-F923-4410-AEB6-AD53FFFD4FFF}" type="datetimeFigureOut">
               <a:rPr lang="zh-CN" altLang="en-US"/>
-              <a:pPr>
-                <a:defRPr/>
-              </a:pPr>
-              <a:t>2026/6/2</a:t>
             </a:fld>
             <a:endParaRPr lang="zh-CN" altLang="en-US"/>
           </a:p>
@@ -5562,13 +5038,7 @@
       </p:sp>
       <p:sp>
         <p:nvSpPr>
-          <p:cNvPr id="6" name="页脚占位符 4">
-            <a:extLst>
-              <a:ext uri="{FF2B5EF4-FFF2-40B4-BE49-F238E27FC236}">
-                <a16:creationId xmlns:a16="http://schemas.microsoft.com/office/drawing/2014/main" id="{5FABE7F1-1CC2-408E-B868-6C222099C0BD}"/>
-              </a:ext>
-            </a:extLst>
-          </p:cNvPr>
+          <p:cNvPr id="6" name="页脚占位符 4"/>
           <p:cNvSpPr>
             <a:spLocks noGrp="1"/>
           </p:cNvSpPr>
@@ -5594,13 +5064,7 @@
       </p:sp>
       <p:sp>
         <p:nvSpPr>
-          <p:cNvPr id="7" name="灯片编号占位符 5">
-            <a:extLst>
-              <a:ext uri="{FF2B5EF4-FFF2-40B4-BE49-F238E27FC236}">
-                <a16:creationId xmlns:a16="http://schemas.microsoft.com/office/drawing/2014/main" id="{E7347EC8-EAD4-4D9F-B832-88008A8D5C8D}"/>
-              </a:ext>
-            </a:extLst>
-          </p:cNvPr>
+          <p:cNvPr id="7" name="灯片编号占位符 5"/>
           <p:cNvSpPr>
             <a:spLocks noGrp="1"/>
           </p:cNvSpPr>
@@ -5622,21 +5086,12 @@
             </a:pPr>
             <a:fld id="{9C997849-179C-4BF5-8A5B-F91223F744E8}" type="slidenum">
               <a:rPr lang="zh-CN" altLang="en-US"/>
-              <a:pPr>
-                <a:defRPr/>
-              </a:pPr>
-              <a:t>‹#›</a:t>
             </a:fld>
             <a:endParaRPr lang="zh-CN" altLang="en-US"/>
           </a:p>
         </p:txBody>
       </p:sp>
     </p:spTree>
-    <p:extLst>
-      <p:ext uri="{BB962C8B-B14F-4D97-AF65-F5344CB8AC3E}">
-        <p14:creationId xmlns:p14="http://schemas.microsoft.com/office/powerpoint/2010/main" val="3757372752"/>
-      </p:ext>
-    </p:extLst>
   </p:cSld>
   <p:clrMapOvr>
     <a:masterClrMapping/>
@@ -5671,20 +5126,14 @@
       </p:grpSpPr>
       <p:pic>
         <p:nvPicPr>
-          <p:cNvPr id="1026" name="图片 6">
-            <a:extLst>
-              <a:ext uri="{FF2B5EF4-FFF2-40B4-BE49-F238E27FC236}">
-                <a16:creationId xmlns:a16="http://schemas.microsoft.com/office/drawing/2014/main" id="{C7E279F9-4D1D-41C2-B594-847DFD60A4AC}"/>
-              </a:ext>
-            </a:extLst>
-          </p:cNvPr>
+          <p:cNvPr id="1026" name="图片 6"/>
           <p:cNvPicPr>
             <a:picLocks noChangeAspect="1"/>
           </p:cNvPicPr>
           <p:nvPr userDrawn="1"/>
         </p:nvPicPr>
         <p:blipFill>
-          <a:blip r:embed="rId14">
+          <a:blip r:embed="rId13">
             <a:extLst>
               <a:ext uri="{28A0092B-C50C-407E-A947-70E740481C1C}">
                 <a14:useLocalDpi xmlns:a14="http://schemas.microsoft.com/office/drawing/2010/main" val="0"/>
@@ -5731,13 +5180,7 @@
       </p:pic>
       <p:sp>
         <p:nvSpPr>
-          <p:cNvPr id="1027" name="标题占位符 1">
-            <a:extLst>
-              <a:ext uri="{FF2B5EF4-FFF2-40B4-BE49-F238E27FC236}">
-                <a16:creationId xmlns:a16="http://schemas.microsoft.com/office/drawing/2014/main" id="{764418EE-8BFB-4E4C-AAF1-C4099A235923}"/>
-              </a:ext>
-            </a:extLst>
-          </p:cNvPr>
+          <p:cNvPr id="1027" name="标题占位符 1"/>
           <p:cNvSpPr>
             <a:spLocks noGrp="1"/>
           </p:cNvSpPr>
@@ -5778,11 +5221,7 @@
           </a:extLst>
         </p:spPr>
         <p:txBody>
-          <a:bodyPr vert="horz" wrap="square" lIns="91440" tIns="45720" rIns="91440" bIns="45720" numCol="1" anchor="ctr" anchorCtr="0" compatLnSpc="1">
-            <a:prstTxWarp prst="textNoShape">
-              <a:avLst/>
-            </a:prstTxWarp>
-          </a:bodyPr>
+          <a:bodyPr vert="horz" wrap="square" lIns="91440" tIns="45720" rIns="91440" bIns="45720" numCol="1" anchor="ctr" anchorCtr="0" compatLnSpc="1"/>
           <a:lstStyle/>
           <a:p>
             <a:pPr lvl="0"/>
@@ -5790,18 +5229,13 @@
               <a:rPr lang="zh-CN" altLang="en-US"/>
               <a:t>单击此处编辑母版标题样式</a:t>
             </a:r>
+            <a:endParaRPr lang="zh-CN" altLang="en-US"/>
           </a:p>
         </p:txBody>
       </p:sp>
       <p:sp>
         <p:nvSpPr>
-          <p:cNvPr id="1028" name="文本占位符 2">
-            <a:extLst>
-              <a:ext uri="{FF2B5EF4-FFF2-40B4-BE49-F238E27FC236}">
-                <a16:creationId xmlns:a16="http://schemas.microsoft.com/office/drawing/2014/main" id="{829A604F-10BF-4619-82BD-2A4750A6231C}"/>
-              </a:ext>
-            </a:extLst>
-          </p:cNvPr>
+          <p:cNvPr id="1028" name="文本占位符 2"/>
           <p:cNvSpPr>
             <a:spLocks noGrp="1"/>
           </p:cNvSpPr>
@@ -5842,11 +5276,7 @@
           </a:extLst>
         </p:spPr>
         <p:txBody>
-          <a:bodyPr vert="horz" wrap="square" lIns="91440" tIns="45720" rIns="91440" bIns="45720" numCol="1" anchor="t" anchorCtr="0" compatLnSpc="1">
-            <a:prstTxWarp prst="textNoShape">
-              <a:avLst/>
-            </a:prstTxWarp>
-          </a:bodyPr>
+          <a:bodyPr vert="horz" wrap="square" lIns="91440" tIns="45720" rIns="91440" bIns="45720" numCol="1" anchor="t" anchorCtr="0" compatLnSpc="1"/>
           <a:lstStyle/>
           <a:p>
             <a:pPr lvl="0"/>
@@ -5854,6 +5284,7 @@
               <a:rPr lang="zh-CN" altLang="en-US"/>
               <a:t>单击此处编辑母版文本样式</a:t>
             </a:r>
+            <a:endParaRPr lang="zh-CN" altLang="en-US"/>
           </a:p>
           <a:p>
             <a:pPr lvl="1"/>
@@ -5861,6 +5292,7 @@
               <a:rPr lang="zh-CN" altLang="en-US"/>
               <a:t>第二级</a:t>
             </a:r>
+            <a:endParaRPr lang="zh-CN" altLang="en-US"/>
           </a:p>
           <a:p>
             <a:pPr lvl="2"/>
@@ -5868,6 +5300,7 @@
               <a:rPr lang="zh-CN" altLang="en-US"/>
               <a:t>第三级</a:t>
             </a:r>
+            <a:endParaRPr lang="zh-CN" altLang="en-US"/>
           </a:p>
           <a:p>
             <a:pPr lvl="3"/>
@@ -5875,6 +5308,7 @@
               <a:rPr lang="zh-CN" altLang="en-US"/>
               <a:t>第四级</a:t>
             </a:r>
+            <a:endParaRPr lang="zh-CN" altLang="en-US"/>
           </a:p>
           <a:p>
             <a:pPr lvl="4"/>
@@ -5882,18 +5316,13 @@
               <a:rPr lang="zh-CN" altLang="en-US"/>
               <a:t>第五级</a:t>
             </a:r>
+            <a:endParaRPr lang="zh-CN" altLang="en-US"/>
           </a:p>
         </p:txBody>
       </p:sp>
       <p:sp>
         <p:nvSpPr>
-          <p:cNvPr id="4" name="日期占位符 3">
-            <a:extLst>
-              <a:ext uri="{FF2B5EF4-FFF2-40B4-BE49-F238E27FC236}">
-                <a16:creationId xmlns:a16="http://schemas.microsoft.com/office/drawing/2014/main" id="{5D1BEE02-6019-452C-A6F6-3A0A8D13C996}"/>
-              </a:ext>
-            </a:extLst>
-          </p:cNvPr>
+          <p:cNvPr id="4" name="日期占位符 3"/>
           <p:cNvSpPr>
             <a:spLocks noGrp="1"/>
           </p:cNvSpPr>
@@ -5937,10 +5366,6 @@
             </a:pPr>
             <a:fld id="{3B7BE501-E7B6-47ED-A922-6C02EB619C18}" type="datetimeFigureOut">
               <a:rPr lang="zh-CN" altLang="en-US"/>
-              <a:pPr>
-                <a:defRPr/>
-              </a:pPr>
-              <a:t>2026/6/2</a:t>
             </a:fld>
             <a:endParaRPr lang="zh-CN" altLang="en-US"/>
           </a:p>
@@ -5948,13 +5373,7 @@
       </p:sp>
       <p:sp>
         <p:nvSpPr>
-          <p:cNvPr id="5" name="页脚占位符 4">
-            <a:extLst>
-              <a:ext uri="{FF2B5EF4-FFF2-40B4-BE49-F238E27FC236}">
-                <a16:creationId xmlns:a16="http://schemas.microsoft.com/office/drawing/2014/main" id="{F7F54BB4-FEDF-41F9-BBFC-5687461F6767}"/>
-              </a:ext>
-            </a:extLst>
-          </p:cNvPr>
+          <p:cNvPr id="5" name="页脚占位符 4"/>
           <p:cNvSpPr>
             <a:spLocks noGrp="1"/>
           </p:cNvSpPr>
@@ -6002,13 +5421,7 @@
       </p:sp>
       <p:sp>
         <p:nvSpPr>
-          <p:cNvPr id="6" name="灯片编号占位符 5">
-            <a:extLst>
-              <a:ext uri="{FF2B5EF4-FFF2-40B4-BE49-F238E27FC236}">
-                <a16:creationId xmlns:a16="http://schemas.microsoft.com/office/drawing/2014/main" id="{A4F037EF-6145-49C6-93ED-FCFAE075395B}"/>
-              </a:ext>
-            </a:extLst>
-          </p:cNvPr>
+          <p:cNvPr id="6" name="灯片编号占位符 5"/>
           <p:cNvSpPr>
             <a:spLocks noGrp="1"/>
           </p:cNvSpPr>
@@ -6026,11 +5439,7 @@
           </a:prstGeom>
         </p:spPr>
         <p:txBody>
-          <a:bodyPr vert="horz" wrap="square" lIns="91440" tIns="45720" rIns="91440" bIns="45720" numCol="1" anchor="ctr" anchorCtr="0" compatLnSpc="1">
-            <a:prstTxWarp prst="textNoShape">
-              <a:avLst/>
-            </a:prstTxWarp>
-          </a:bodyPr>
+          <a:bodyPr vert="horz" wrap="square" lIns="91440" tIns="45720" rIns="91440" bIns="45720" numCol="1" anchor="ctr" anchorCtr="0" compatLnSpc="1"/>
           <a:lstStyle>
             <a:lvl1pPr algn="r" eaLnBrk="1" hangingPunct="1">
               <a:defRPr sz="1200">
@@ -6046,10 +5455,6 @@
             </a:pPr>
             <a:fld id="{5F1DB772-2744-4267-A0B6-7B9C40C910D0}" type="slidenum">
               <a:rPr lang="zh-CN" altLang="en-US"/>
-              <a:pPr>
-                <a:defRPr/>
-              </a:pPr>
-              <a:t>‹#›</a:t>
             </a:fld>
             <a:endParaRPr lang="zh-CN" altLang="en-US"/>
           </a:p>
@@ -6057,20 +5462,14 @@
       </p:sp>
       <p:pic>
         <p:nvPicPr>
-          <p:cNvPr id="1032" name="图片 7">
-            <a:extLst>
-              <a:ext uri="{FF2B5EF4-FFF2-40B4-BE49-F238E27FC236}">
-                <a16:creationId xmlns:a16="http://schemas.microsoft.com/office/drawing/2014/main" id="{C1A97169-7106-41F3-916B-B51B6D3967A5}"/>
-              </a:ext>
-            </a:extLst>
-          </p:cNvPr>
+          <p:cNvPr id="1032" name="图片 7"/>
           <p:cNvPicPr>
             <a:picLocks noChangeAspect="1"/>
           </p:cNvPicPr>
           <p:nvPr userDrawn="1"/>
         </p:nvPicPr>
         <p:blipFill>
-          <a:blip r:embed="rId15">
+          <a:blip r:embed="rId14">
             <a:extLst>
               <a:ext uri="{28A0092B-C50C-407E-A947-70E740481C1C}">
                 <a14:useLocalDpi xmlns:a14="http://schemas.microsoft.com/office/drawing/2010/main" val="0"/>
@@ -6119,18 +5518,18 @@
   </p:cSld>
   <p:clrMap bg1="lt1" tx1="dk1" bg2="lt2" tx2="dk2" accent1="accent1" accent2="accent2" accent3="accent3" accent4="accent4" accent5="accent5" accent6="accent6" hlink="hlink" folHlink="folHlink"/>
   <p:sldLayoutIdLst>
-    <p:sldLayoutId id="2147483936" r:id="rId1"/>
-    <p:sldLayoutId id="2147483937" r:id="rId2"/>
-    <p:sldLayoutId id="2147483938" r:id="rId3"/>
-    <p:sldLayoutId id="2147483939" r:id="rId4"/>
-    <p:sldLayoutId id="2147483940" r:id="rId5"/>
-    <p:sldLayoutId id="2147483941" r:id="rId6"/>
-    <p:sldLayoutId id="2147483942" r:id="rId7"/>
-    <p:sldLayoutId id="2147483943" r:id="rId8"/>
-    <p:sldLayoutId id="2147483944" r:id="rId9"/>
-    <p:sldLayoutId id="2147483945" r:id="rId10"/>
-    <p:sldLayoutId id="2147483946" r:id="rId11"/>
-    <p:sldLayoutId id="2147483947" r:id="rId12"/>
+    <p:sldLayoutId id="2147483649" r:id="rId1"/>
+    <p:sldLayoutId id="2147483650" r:id="rId2"/>
+    <p:sldLayoutId id="2147483651" r:id="rId3"/>
+    <p:sldLayoutId id="2147483652" r:id="rId4"/>
+    <p:sldLayoutId id="2147483653" r:id="rId5"/>
+    <p:sldLayoutId id="2147483654" r:id="rId6"/>
+    <p:sldLayoutId id="2147483655" r:id="rId7"/>
+    <p:sldLayoutId id="2147483656" r:id="rId8"/>
+    <p:sldLayoutId id="2147483657" r:id="rId9"/>
+    <p:sldLayoutId id="2147483658" r:id="rId10"/>
+    <p:sldLayoutId id="2147483659" r:id="rId11"/>
+    <p:sldLayoutId id="2147483660" r:id="rId12"/>
   </p:sldLayoutIdLst>
   <p:txStyles>
     <p:titleStyle>
@@ -6161,8 +5560,8 @@
           <a:solidFill>
             <a:schemeClr val="tx1"/>
           </a:solidFill>
-          <a:latin typeface="Calibri" pitchFamily="34" charset="0"/>
-          <a:ea typeface="宋体" pitchFamily="2" charset="-122"/>
+          <a:latin typeface="Calibri" panose="020F0502020204030204" pitchFamily="34" charset="0"/>
+          <a:ea typeface="宋体" panose="02010600030101010101" pitchFamily="2" charset="-122"/>
         </a:defRPr>
       </a:lvl2pPr>
       <a:lvl3pPr algn="ctr" rtl="0" eaLnBrk="0" fontAlgn="base" hangingPunct="0">
@@ -6176,8 +5575,8 @@
           <a:solidFill>
             <a:schemeClr val="tx1"/>
           </a:solidFill>
-          <a:latin typeface="Calibri" pitchFamily="34" charset="0"/>
-          <a:ea typeface="宋体" pitchFamily="2" charset="-122"/>
+          <a:latin typeface="Calibri" panose="020F0502020204030204" pitchFamily="34" charset="0"/>
+          <a:ea typeface="宋体" panose="02010600030101010101" pitchFamily="2" charset="-122"/>
         </a:defRPr>
       </a:lvl3pPr>
       <a:lvl4pPr algn="ctr" rtl="0" eaLnBrk="0" fontAlgn="base" hangingPunct="0">
@@ -6191,8 +5590,8 @@
           <a:solidFill>
             <a:schemeClr val="tx1"/>
           </a:solidFill>
-          <a:latin typeface="Calibri" pitchFamily="34" charset="0"/>
-          <a:ea typeface="宋体" pitchFamily="2" charset="-122"/>
+          <a:latin typeface="Calibri" panose="020F0502020204030204" pitchFamily="34" charset="0"/>
+          <a:ea typeface="宋体" panose="02010600030101010101" pitchFamily="2" charset="-122"/>
         </a:defRPr>
       </a:lvl4pPr>
       <a:lvl5pPr algn="ctr" rtl="0" eaLnBrk="0" fontAlgn="base" hangingPunct="0">
@@ -6206,8 +5605,8 @@
           <a:solidFill>
             <a:schemeClr val="tx1"/>
           </a:solidFill>
-          <a:latin typeface="Calibri" pitchFamily="34" charset="0"/>
-          <a:ea typeface="宋体" pitchFamily="2" charset="-122"/>
+          <a:latin typeface="Calibri" panose="020F0502020204030204" pitchFamily="34" charset="0"/>
+          <a:ea typeface="宋体" panose="02010600030101010101" pitchFamily="2" charset="-122"/>
         </a:defRPr>
       </a:lvl5pPr>
       <a:lvl6pPr marL="457200" algn="ctr" rtl="0" fontAlgn="base">
@@ -6221,8 +5620,8 @@
           <a:solidFill>
             <a:schemeClr val="tx1"/>
           </a:solidFill>
-          <a:latin typeface="Calibri" pitchFamily="34" charset="0"/>
-          <a:ea typeface="宋体" pitchFamily="2" charset="-122"/>
+          <a:latin typeface="Calibri" panose="020F0502020204030204" pitchFamily="34" charset="0"/>
+          <a:ea typeface="宋体" panose="02010600030101010101" pitchFamily="2" charset="-122"/>
         </a:defRPr>
       </a:lvl6pPr>
       <a:lvl7pPr marL="914400" algn="ctr" rtl="0" fontAlgn="base">
@@ -6236,8 +5635,8 @@
           <a:solidFill>
             <a:schemeClr val="tx1"/>
           </a:solidFill>
-          <a:latin typeface="Calibri" pitchFamily="34" charset="0"/>
-          <a:ea typeface="宋体" pitchFamily="2" charset="-122"/>
+          <a:latin typeface="Calibri" panose="020F0502020204030204" pitchFamily="34" charset="0"/>
+          <a:ea typeface="宋体" panose="02010600030101010101" pitchFamily="2" charset="-122"/>
         </a:defRPr>
       </a:lvl7pPr>
       <a:lvl8pPr marL="1371600" algn="ctr" rtl="0" fontAlgn="base">
@@ -6251,8 +5650,8 @@
           <a:solidFill>
             <a:schemeClr val="tx1"/>
           </a:solidFill>
-          <a:latin typeface="Calibri" pitchFamily="34" charset="0"/>
-          <a:ea typeface="宋体" pitchFamily="2" charset="-122"/>
+          <a:latin typeface="Calibri" panose="020F0502020204030204" pitchFamily="34" charset="0"/>
+          <a:ea typeface="宋体" panose="02010600030101010101" pitchFamily="2" charset="-122"/>
         </a:defRPr>
       </a:lvl8pPr>
       <a:lvl9pPr marL="1828800" algn="ctr" rtl="0" fontAlgn="base">
@@ -6266,8 +5665,8 @@
           <a:solidFill>
             <a:schemeClr val="tx1"/>
           </a:solidFill>
-          <a:latin typeface="Calibri" pitchFamily="34" charset="0"/>
-          <a:ea typeface="宋体" pitchFamily="2" charset="-122"/>
+          <a:latin typeface="Calibri" panose="020F0502020204030204" pitchFamily="34" charset="0"/>
+          <a:ea typeface="宋体" panose="02010600030101010101" pitchFamily="2" charset="-122"/>
         </a:defRPr>
       </a:lvl9pPr>
     </p:titleStyle>
@@ -6366,7 +5765,7 @@
         <a:spcBef>
           <a:spcPct val="20000"/>
         </a:spcBef>
-        <a:buFont typeface="Arial" pitchFamily="34" charset="0"/>
+        <a:buFont typeface="Arial" panose="020B0604020202020204" pitchFamily="34" charset="0"/>
         <a:buChar char="•"/>
         <a:defRPr sz="2000" kern="1200">
           <a:solidFill>
@@ -6381,7 +5780,7 @@
         <a:spcBef>
           <a:spcPct val="20000"/>
         </a:spcBef>
-        <a:buFont typeface="Arial" pitchFamily="34" charset="0"/>
+        <a:buFont typeface="Arial" panose="020B0604020202020204" pitchFamily="34" charset="0"/>
         <a:buChar char="•"/>
         <a:defRPr sz="2000" kern="1200">
           <a:solidFill>
@@ -6396,7 +5795,7 @@
         <a:spcBef>
           <a:spcPct val="20000"/>
         </a:spcBef>
-        <a:buFont typeface="Arial" pitchFamily="34" charset="0"/>
+        <a:buFont typeface="Arial" panose="020B0604020202020204" pitchFamily="34" charset="0"/>
         <a:buChar char="•"/>
         <a:defRPr sz="2000" kern="1200">
           <a:solidFill>
@@ -6411,7 +5810,7 @@
         <a:spcBef>
           <a:spcPct val="20000"/>
         </a:spcBef>
-        <a:buFont typeface="Arial" pitchFamily="34" charset="0"/>
+        <a:buFont typeface="Arial" panose="020B0604020202020204" pitchFamily="34" charset="0"/>
         <a:buChar char="•"/>
         <a:defRPr sz="2000" kern="1200">
           <a:solidFill>
@@ -6541,13 +5940,7 @@
       </p:grpSpPr>
       <p:sp>
         <p:nvSpPr>
-          <p:cNvPr id="5122" name="灯片编号占位符 3">
-            <a:extLst>
-              <a:ext uri="{FF2B5EF4-FFF2-40B4-BE49-F238E27FC236}">
-                <a16:creationId xmlns:a16="http://schemas.microsoft.com/office/drawing/2014/main" id="{010FA458-7200-4009-A108-DFB16957AE27}"/>
-              </a:ext>
-            </a:extLst>
-          </p:cNvPr>
+          <p:cNvPr id="5122" name="灯片编号占位符 3"/>
           <p:cNvSpPr>
             <a:spLocks noGrp="1"/>
           </p:cNvSpPr>
@@ -6735,14 +6128,6 @@
               <a:rPr kumimoji="1" lang="en-US" altLang="zh-CN" sz="1400" smtClean="0">
                 <a:latin typeface="Times New Roman" panose="02020603050405020304" pitchFamily="18" charset="0"/>
               </a:rPr>
-              <a:pPr>
-                <a:spcBef>
-                  <a:spcPct val="0"/>
-                </a:spcBef>
-                <a:buFontTx/>
-                <a:buNone/>
-              </a:pPr>
-              <a:t>1</a:t>
             </a:fld>
             <a:endParaRPr kumimoji="1" lang="en-US" altLang="zh-CN" sz="1400">
               <a:latin typeface="Times New Roman" panose="02020603050405020304" pitchFamily="18" charset="0"/>
@@ -6752,13 +6137,7 @@
       </p:sp>
       <p:sp>
         <p:nvSpPr>
-          <p:cNvPr id="94211" name="Text Box 3">
-            <a:extLst>
-              <a:ext uri="{FF2B5EF4-FFF2-40B4-BE49-F238E27FC236}">
-                <a16:creationId xmlns:a16="http://schemas.microsoft.com/office/drawing/2014/main" id="{1180118F-0F9B-44F4-8C1A-78D508EB7A89}"/>
-              </a:ext>
-            </a:extLst>
-          </p:cNvPr>
+          <p:cNvPr id="94211" name="Text Box 3"/>
           <p:cNvSpPr txBox="1">
             <a:spLocks noChangeArrowheads="1"/>
           </p:cNvSpPr>
@@ -6964,13 +6343,7 @@
       </p:sp>
       <p:sp>
         <p:nvSpPr>
-          <p:cNvPr id="5124" name="Text Box 4">
-            <a:extLst>
-              <a:ext uri="{FF2B5EF4-FFF2-40B4-BE49-F238E27FC236}">
-                <a16:creationId xmlns:a16="http://schemas.microsoft.com/office/drawing/2014/main" id="{84260868-6AAC-43C8-A32C-83B235E5F9F0}"/>
-              </a:ext>
-            </a:extLst>
-          </p:cNvPr>
+          <p:cNvPr id="5124" name="Text Box 4"/>
           <p:cNvSpPr txBox="1">
             <a:spLocks noChangeArrowheads="1"/>
           </p:cNvSpPr>
@@ -7189,18 +6562,15 @@
               </a:rPr>
               <a:t>Foundations of Machine Learning</a:t>
             </a:r>
+            <a:endParaRPr kumimoji="1" lang="en-US" altLang="zh-CN" sz="4400" b="1">
+              <a:latin typeface="Monotype Corsiva" panose="03010101010201010101" pitchFamily="66" charset="0"/>
+            </a:endParaRPr>
           </a:p>
         </p:txBody>
       </p:sp>
       <p:sp>
         <p:nvSpPr>
-          <p:cNvPr id="5125" name="Text Box 18">
-            <a:extLst>
-              <a:ext uri="{FF2B5EF4-FFF2-40B4-BE49-F238E27FC236}">
-                <a16:creationId xmlns:a16="http://schemas.microsoft.com/office/drawing/2014/main" id="{D2CB22B5-00BE-49EC-93A1-107A76F4713F}"/>
-              </a:ext>
-            </a:extLst>
-          </p:cNvPr>
+          <p:cNvPr id="5125" name="Text Box 18"/>
           <p:cNvSpPr txBox="1">
             <a:spLocks noChangeArrowheads="1"/>
           </p:cNvSpPr>
@@ -7420,13 +6790,13 @@
               <p:cTn id="2" dur="indefinite" nodeType="mainSeq">
                 <p:childTnLst>
                   <p:par>
-                    <p:cTn id="3" fill="hold" nodeType="clickPar">
+                    <p:cTn id="3" fill="hold">
                       <p:stCondLst>
                         <p:cond delay="indefinite"/>
                       </p:stCondLst>
                       <p:childTnLst>
                         <p:par>
-                          <p:cTn id="4" fill="hold" nodeType="withGroup">
+                          <p:cTn id="4" fill="hold">
                             <p:stCondLst>
                               <p:cond delay="0"/>
                             </p:stCondLst>
@@ -7519,13 +6889,7 @@
       </p:grpSpPr>
       <p:sp>
         <p:nvSpPr>
-          <p:cNvPr id="18434" name="灯片编号占位符 5">
-            <a:extLst>
-              <a:ext uri="{FF2B5EF4-FFF2-40B4-BE49-F238E27FC236}">
-                <a16:creationId xmlns:a16="http://schemas.microsoft.com/office/drawing/2014/main" id="{CBBD9809-2CC4-42C3-B564-FAC6896E7580}"/>
-              </a:ext>
-            </a:extLst>
-          </p:cNvPr>
+          <p:cNvPr id="18434" name="灯片编号占位符 5"/>
           <p:cNvSpPr>
             <a:spLocks noGrp="1"/>
           </p:cNvSpPr>
@@ -7709,14 +7073,6 @@
               <a:rPr kumimoji="1" lang="en-US" altLang="zh-CN" sz="1400" smtClean="0">
                 <a:latin typeface="Times New Roman" panose="02020603050405020304" pitchFamily="18" charset="0"/>
               </a:rPr>
-              <a:pPr>
-                <a:spcBef>
-                  <a:spcPct val="0"/>
-                </a:spcBef>
-                <a:buFontTx/>
-                <a:buNone/>
-              </a:pPr>
-              <a:t>10</a:t>
             </a:fld>
             <a:endParaRPr kumimoji="1" lang="en-US" altLang="zh-CN" sz="1400">
               <a:latin typeface="Times New Roman" panose="02020603050405020304" pitchFamily="18" charset="0"/>
@@ -7726,13 +7082,7 @@
       </p:sp>
       <p:sp>
         <p:nvSpPr>
-          <p:cNvPr id="887811" name="Rectangle 3">
-            <a:extLst>
-              <a:ext uri="{FF2B5EF4-FFF2-40B4-BE49-F238E27FC236}">
-                <a16:creationId xmlns:a16="http://schemas.microsoft.com/office/drawing/2014/main" id="{E67925BF-BD9D-4849-975B-B00461AA9122}"/>
-              </a:ext>
-            </a:extLst>
-          </p:cNvPr>
+          <p:cNvPr id="887811" name="Rectangle 3"/>
           <p:cNvSpPr>
             <a:spLocks noGrp="1"/>
           </p:cNvSpPr>
@@ -7795,6 +7145,11 @@
               </a:rPr>
               <a:t>多层前馈神经网络</a:t>
             </a:r>
+            <a:endParaRPr lang="zh-CN" altLang="en-US" sz="2800" b="1" dirty="0">
+              <a:latin typeface="Times New Roman" panose="02020603050405020304" pitchFamily="18" charset="0"/>
+              <a:ea typeface="楷体" panose="02010609060101010101" pitchFamily="49" charset="-122"/>
+              <a:cs typeface="Times New Roman" panose="02020603050405020304" pitchFamily="18" charset="0"/>
+            </a:endParaRPr>
           </a:p>
           <a:p>
             <a:pPr eaLnBrk="1" hangingPunct="1">
@@ -7856,6 +7211,11 @@
               </a:rPr>
               <a:t>BP</a:t>
             </a:r>
+            <a:endParaRPr lang="en-US" altLang="zh-CN" sz="2800" b="1" dirty="0">
+              <a:latin typeface="Times New Roman" panose="02020603050405020304" pitchFamily="18" charset="0"/>
+              <a:ea typeface="楷体" panose="02010609060101010101" pitchFamily="49" charset="-122"/>
+              <a:cs typeface="Times New Roman" panose="02020603050405020304" pitchFamily="18" charset="0"/>
+            </a:endParaRPr>
           </a:p>
           <a:p>
             <a:pPr eaLnBrk="1" hangingPunct="1">
@@ -8179,13 +7539,7 @@
       </p:sp>
       <p:sp>
         <p:nvSpPr>
-          <p:cNvPr id="18436" name="Text Box 4">
-            <a:extLst>
-              <a:ext uri="{FF2B5EF4-FFF2-40B4-BE49-F238E27FC236}">
-                <a16:creationId xmlns:a16="http://schemas.microsoft.com/office/drawing/2014/main" id="{EB81EA09-BA58-4C02-A7E1-E64004DF3351}"/>
-              </a:ext>
-            </a:extLst>
-          </p:cNvPr>
+          <p:cNvPr id="18436" name="Text Box 4"/>
           <p:cNvSpPr txBox="1">
             <a:spLocks noChangeArrowheads="1"/>
           </p:cNvSpPr>
@@ -8409,6 +7763,11 @@
               </a:rPr>
               <a:t>章：神经网络</a:t>
             </a:r>
+            <a:endParaRPr kumimoji="1" lang="zh-CN" altLang="en-US" b="1" dirty="0">
+              <a:latin typeface="黑体" panose="02010609060101010101" pitchFamily="49" charset="-122"/>
+              <a:ea typeface="黑体" panose="02010609060101010101" pitchFamily="49" charset="-122"/>
+              <a:cs typeface="楷体_GB2312"/>
+            </a:endParaRPr>
           </a:p>
         </p:txBody>
       </p:sp>
@@ -8418,13 +7777,7 @@
           <p:cNvGraphicFramePr>
             <a:graphicFrameLocks noChangeAspect="1"/>
           </p:cNvGraphicFramePr>
-          <p:nvPr>
-            <p:extLst>
-              <p:ext uri="{D42A27DB-BD31-4B8C-83A1-F6EECF244321}">
-                <p14:modId xmlns:p14="http://schemas.microsoft.com/office/powerpoint/2010/main" val="773565080"/>
-              </p:ext>
-            </p:extLst>
-          </p:nvPr>
+          <p:nvPr/>
         </p:nvGraphicFramePr>
         <p:xfrm>
           <a:off x="6300192" y="5995987"/>
@@ -8434,21 +7787,21 @@
           <a:graphicData uri="http://schemas.openxmlformats.org/presentationml/2006/ole">
             <mc:AlternateContent xmlns:mc="http://schemas.openxmlformats.org/markup-compatibility/2006">
               <mc:Choice xmlns:v="urn:schemas-microsoft-com:vml" Requires="v">
-                <p:oleObj name="Formula" r:id="rId3" imgW="1098720" imgH="176760" progId="Equation.Ribbit">
+                <p:oleObj spid="_x0000_s27941" name="Formula" r:id="rId1" imgW="8239125" imgH="1323975" progId="Equation.Ribbit">
                   <p:embed/>
                 </p:oleObj>
               </mc:Choice>
               <mc:Fallback>
-                <p:oleObj name="Formula" r:id="rId3" imgW="1098720" imgH="176760" progId="Equation.Ribbit">
+                <p:oleObj name="Formula" r:id="rId1" imgW="8239125" imgH="1323975" progId="Equation.Ribbit">
                   <p:embed/>
                   <p:pic>
                     <p:nvPicPr>
-                      <p:cNvPr id="5" name="对象 4"/>
+                      <p:cNvPr id="0" name="对象 4"/>
                       <p:cNvPicPr/>
                       <p:nvPr/>
                     </p:nvPicPr>
                     <p:blipFill>
-                      <a:blip r:embed="rId4"/>
+                      <a:blip r:embed="rId2"/>
                       <a:stretch>
                         <a:fillRect/>
                       </a:stretch>
@@ -8470,11 +7823,6 @@
         </a:graphic>
       </p:graphicFrame>
     </p:spTree>
-    <p:extLst>
-      <p:ext uri="{BB962C8B-B14F-4D97-AF65-F5344CB8AC3E}">
-        <p14:creationId xmlns:p14="http://schemas.microsoft.com/office/powerpoint/2010/main" val="3578388625"/>
-      </p:ext>
-    </p:extLst>
   </p:cSld>
   <p:clrMapOvr>
     <a:masterClrMapping/>
@@ -8733,13 +8081,13 @@
                     </p:cTn>
                   </p:par>
                   <p:par>
-                    <p:cTn id="23" fill="hold" nodeType="clickPar">
+                    <p:cTn id="23" fill="hold">
                       <p:stCondLst>
                         <p:cond delay="indefinite"/>
                       </p:stCondLst>
                       <p:childTnLst>
                         <p:par>
-                          <p:cTn id="24" fill="hold" nodeType="withGroup">
+                          <p:cTn id="24" fill="hold">
                             <p:stCondLst>
                               <p:cond delay="0"/>
                             </p:stCondLst>
@@ -9081,13 +8429,7 @@
       </p:grpSpPr>
       <p:sp>
         <p:nvSpPr>
-          <p:cNvPr id="5" name="文本框 4">
-            <a:extLst>
-              <a:ext uri="{FF2B5EF4-FFF2-40B4-BE49-F238E27FC236}">
-                <a16:creationId xmlns:a16="http://schemas.microsoft.com/office/drawing/2014/main" id="{A1E984C5-FC8E-4733-9E4F-3AA81FAE2DE6}"/>
-              </a:ext>
-            </a:extLst>
-          </p:cNvPr>
+          <p:cNvPr id="5" name="文本框 4"/>
           <p:cNvSpPr txBox="1"/>
           <p:nvPr/>
         </p:nvSpPr>
@@ -9120,6 +8462,10 @@
               </a:rPr>
               <a:t>step1:</a:t>
             </a:r>
+            <a:endParaRPr lang="en-US" altLang="zh-CN" sz="1800" b="1" dirty="0">
+              <a:latin typeface="黑体" panose="02010609060101010101" pitchFamily="49" charset="-122"/>
+              <a:ea typeface="黑体" panose="02010609060101010101" pitchFamily="49" charset="-122"/>
+            </a:endParaRPr>
           </a:p>
           <a:p>
             <a:pPr marL="0" indent="0">
@@ -9135,6 +8481,10 @@
               </a:rPr>
               <a:t> </a:t>
             </a:r>
+            <a:endParaRPr lang="en-US" altLang="zh-CN" sz="1800" b="1" dirty="0">
+              <a:latin typeface="黑体" panose="02010609060101010101" pitchFamily="49" charset="-122"/>
+              <a:ea typeface="黑体" panose="02010609060101010101" pitchFamily="49" charset="-122"/>
+            </a:endParaRPr>
           </a:p>
           <a:p>
             <a:pPr marL="0" indent="0">
@@ -9150,18 +8500,16 @@
               </a:rPr>
               <a:t>step2:</a:t>
             </a:r>
+            <a:endParaRPr lang="en-US" altLang="zh-CN" sz="1800" b="1" dirty="0">
+              <a:latin typeface="黑体" panose="02010609060101010101" pitchFamily="49" charset="-122"/>
+              <a:ea typeface="黑体" panose="02010609060101010101" pitchFamily="49" charset="-122"/>
+            </a:endParaRPr>
           </a:p>
         </p:txBody>
       </p:sp>
       <p:grpSp>
         <p:nvGrpSpPr>
-          <p:cNvPr id="6" name="组合 5">
-            <a:extLst>
-              <a:ext uri="{FF2B5EF4-FFF2-40B4-BE49-F238E27FC236}">
-                <a16:creationId xmlns:a16="http://schemas.microsoft.com/office/drawing/2014/main" id="{B05B5981-53D3-47BF-A784-C65E7BD5193A}"/>
-              </a:ext>
-            </a:extLst>
-          </p:cNvPr>
+          <p:cNvPr id="6" name="组合 5"/>
           <p:cNvGrpSpPr/>
           <p:nvPr/>
         </p:nvGrpSpPr>
@@ -9175,20 +8523,14 @@
         </p:grpSpPr>
         <p:pic>
           <p:nvPicPr>
-            <p:cNvPr id="7" name="内容占位符 4">
-              <a:extLst>
-                <a:ext uri="{FF2B5EF4-FFF2-40B4-BE49-F238E27FC236}">
-                  <a16:creationId xmlns:a16="http://schemas.microsoft.com/office/drawing/2014/main" id="{46E07B98-6F9B-424C-8323-6E51591F18B4}"/>
-                </a:ext>
-              </a:extLst>
-            </p:cNvPr>
+            <p:cNvPr id="7" name="内容占位符 4"/>
             <p:cNvPicPr>
               <a:picLocks noChangeAspect="1"/>
             </p:cNvPicPr>
             <p:nvPr/>
           </p:nvPicPr>
           <p:blipFill>
-            <a:blip r:embed="rId2"/>
+            <a:blip r:embed="rId1"/>
             <a:stretch>
               <a:fillRect/>
             </a:stretch>
@@ -9203,17 +8545,11 @@
             </a:prstGeom>
           </p:spPr>
         </p:pic>
-        <mc:AlternateContent xmlns:mc="http://schemas.openxmlformats.org/markup-compatibility/2006" xmlns:a14="http://schemas.microsoft.com/office/drawing/2010/main">
-          <mc:Choice Requires="a14">
+        <mc:AlternateContent xmlns:mc="http://schemas.openxmlformats.org/markup-compatibility/2006">
+          <mc:Choice xmlns:a14="http://schemas.microsoft.com/office/drawing/2010/main" Requires="a14">
             <p:sp>
               <p:nvSpPr>
-                <p:cNvPr id="8" name="文本框 7">
-                  <a:extLst>
-                    <a:ext uri="{FF2B5EF4-FFF2-40B4-BE49-F238E27FC236}">
-                      <a16:creationId xmlns:a16="http://schemas.microsoft.com/office/drawing/2014/main" id="{4B9DE688-7EA0-4F44-BDAD-26B2C6D5E593}"/>
-                    </a:ext>
-                  </a:extLst>
-                </p:cNvPr>
+                <p:cNvPr id="8" name="文本框 7"/>
                 <p:cNvSpPr txBox="1"/>
                 <p:nvPr/>
               </p:nvSpPr>
@@ -9235,7 +8571,6 @@
                 </a:bodyPr>
                 <a:lstStyle/>
                 <a:p>
-                  <a:pPr/>
                   <a14:m>
                     <m:oMathPara xmlns:m="http://schemas.openxmlformats.org/officeDocument/2006/math">
                       <m:oMathParaPr>
@@ -9272,7 +8607,7 @@
                                 </a:solidFill>
                                 <a:latin typeface="Cambria Math" panose="02040503050406030204" pitchFamily="18" charset="0"/>
                               </a:rPr>
-                              <m:t>h</m:t>
+                              <m:t>ℎ</m:t>
                             </m:r>
                           </m:sub>
                         </m:sSub>
@@ -9284,16 +8619,10 @@
               </p:txBody>
             </p:sp>
           </mc:Choice>
-          <mc:Fallback xmlns="">
+          <mc:Fallback>
             <p:sp>
               <p:nvSpPr>
-                <p:cNvPr id="16" name="文本框 15">
-                  <a:extLst>
-                    <a:ext uri="{FF2B5EF4-FFF2-40B4-BE49-F238E27FC236}">
-                      <a16:creationId xmlns:a16="http://schemas.microsoft.com/office/drawing/2014/main" id="{7B52B133-7052-4221-94ED-E689B3B9DD5E}"/>
-                    </a:ext>
-                  </a:extLst>
-                </p:cNvPr>
+                <p:cNvPr id="8" name="文本框 7"/>
                 <p:cNvSpPr txBox="1">
                   <a:spLocks noRot="1" noChangeAspect="1" noMove="1" noResize="1" noEditPoints="1" noAdjustHandles="1" noChangeArrowheads="1" noChangeShapeType="1" noTextEdit="1"/>
                 </p:cNvSpPr>
@@ -9307,11 +8636,8 @@
                 <a:prstGeom prst="rect">
                   <a:avLst/>
                 </a:prstGeom>
-                <a:blipFill>
-                  <a:blip r:embed="rId34"/>
-                  <a:stretch>
-                    <a:fillRect l="-4082" r="-2041" b="-25641"/>
-                  </a:stretch>
+                <a:blipFill rotWithShape="1">
+                  <a:blip r:embed="rId2"/>
                 </a:blipFill>
               </p:spPr>
               <p:txBody>
@@ -9329,17 +8655,11 @@
             </p:sp>
           </mc:Fallback>
         </mc:AlternateContent>
-        <mc:AlternateContent xmlns:mc="http://schemas.openxmlformats.org/markup-compatibility/2006" xmlns:a14="http://schemas.microsoft.com/office/drawing/2010/main">
-          <mc:Choice Requires="a14">
+        <mc:AlternateContent xmlns:mc="http://schemas.openxmlformats.org/markup-compatibility/2006">
+          <mc:Choice xmlns:a14="http://schemas.microsoft.com/office/drawing/2010/main" Requires="a14">
             <p:sp>
               <p:nvSpPr>
-                <p:cNvPr id="9" name="文本框 8">
-                  <a:extLst>
-                    <a:ext uri="{FF2B5EF4-FFF2-40B4-BE49-F238E27FC236}">
-                      <a16:creationId xmlns:a16="http://schemas.microsoft.com/office/drawing/2014/main" id="{3CAB6489-8B18-45E3-8E34-DE8C42F23A1F}"/>
-                    </a:ext>
-                  </a:extLst>
-                </p:cNvPr>
+                <p:cNvPr id="9" name="文本框 8"/>
                 <p:cNvSpPr txBox="1"/>
                 <p:nvPr/>
               </p:nvSpPr>
@@ -9361,7 +8681,6 @@
                 </a:bodyPr>
                 <a:lstStyle/>
                 <a:p>
-                  <a:pPr/>
                   <a14:m>
                     <m:oMathPara xmlns:m="http://schemas.openxmlformats.org/officeDocument/2006/math">
                       <m:oMathParaPr>
@@ -9410,16 +8729,10 @@
               </p:txBody>
             </p:sp>
           </mc:Choice>
-          <mc:Fallback xmlns="">
+          <mc:Fallback>
             <p:sp>
               <p:nvSpPr>
-                <p:cNvPr id="30" name="文本框 29">
-                  <a:extLst>
-                    <a:ext uri="{FF2B5EF4-FFF2-40B4-BE49-F238E27FC236}">
-                      <a16:creationId xmlns:a16="http://schemas.microsoft.com/office/drawing/2014/main" id="{0BBA0DFF-2E67-4C96-9F65-BC7A5D0B2C5E}"/>
-                    </a:ext>
-                  </a:extLst>
-                </p:cNvPr>
+                <p:cNvPr id="9" name="文本框 8"/>
                 <p:cNvSpPr txBox="1">
                   <a:spLocks noRot="1" noChangeAspect="1" noMove="1" noResize="1" noEditPoints="1" noAdjustHandles="1" noChangeArrowheads="1" noChangeShapeType="1" noTextEdit="1"/>
                 </p:cNvSpPr>
@@ -9433,11 +8746,8 @@
                 <a:prstGeom prst="rect">
                   <a:avLst/>
                 </a:prstGeom>
-                <a:blipFill>
-                  <a:blip r:embed="rId35"/>
-                  <a:stretch>
-                    <a:fillRect l="-12245" b="-30952"/>
-                  </a:stretch>
+                <a:blipFill rotWithShape="1">
+                  <a:blip r:embed="rId3"/>
                 </a:blipFill>
               </p:spPr>
               <p:txBody>
@@ -9458,13 +8768,7 @@
       </p:grpSp>
       <p:grpSp>
         <p:nvGrpSpPr>
-          <p:cNvPr id="10" name="组合 9">
-            <a:extLst>
-              <a:ext uri="{FF2B5EF4-FFF2-40B4-BE49-F238E27FC236}">
-                <a16:creationId xmlns:a16="http://schemas.microsoft.com/office/drawing/2014/main" id="{2198D79E-F43F-4581-813E-05EBDBCCD914}"/>
-              </a:ext>
-            </a:extLst>
-          </p:cNvPr>
+          <p:cNvPr id="10" name="组合 9"/>
           <p:cNvGrpSpPr/>
           <p:nvPr/>
         </p:nvGrpSpPr>
@@ -9476,143 +8780,62 @@
             <a:chExt cx="3779837" cy="371475"/>
           </a:xfrm>
         </p:grpSpPr>
-        <mc:AlternateContent xmlns:mc="http://schemas.openxmlformats.org/markup-compatibility/2006" xmlns:a14="http://schemas.microsoft.com/office/drawing/2010/main">
-          <mc:Choice Requires="a14">
-            <p:graphicFrame>
-              <p:nvGraphicFramePr>
-                <p:cNvPr id="11" name="对象 10">
-                  <a:extLst>
-                    <a:ext uri="{FF2B5EF4-FFF2-40B4-BE49-F238E27FC236}">
-                      <a16:creationId xmlns:a16="http://schemas.microsoft.com/office/drawing/2014/main" id="{2471456B-1D8D-4B61-A8C3-F6BA4A9B749A}"/>
-                    </a:ext>
-                  </a:extLst>
-                </p:cNvPr>
-                <p:cNvGraphicFramePr>
-                  <a:graphicFrameLocks noChangeAspect="1"/>
-                </p:cNvGraphicFramePr>
-                <p:nvPr>
-                  <p:extLst>
-                    <p:ext uri="{D42A27DB-BD31-4B8C-83A1-F6EECF244321}">
-                      <p14:modId xmlns:p14="http://schemas.microsoft.com/office/powerpoint/2010/main" val="2696915239"/>
-                    </p:ext>
-                  </p:extLst>
-                </p:nvPr>
-              </p:nvGraphicFramePr>
-              <p:xfrm>
-                <a:off x="1420894" y="1868744"/>
-                <a:ext cx="3779837" cy="371475"/>
-              </p:xfrm>
-              <a:graphic>
-                <a:graphicData uri="http://schemas.openxmlformats.org/presentationml/2006/ole">
-                  <mc:AlternateContent>
-                    <mc:Choice xmlns:v="urn:schemas-microsoft-com:vml" Requires="v">
-                      <p:oleObj name="Formula" r:id="rId36" imgW="2106000" imgH="208440" progId="Equation.Ribbit">
-                        <p:embed/>
-                      </p:oleObj>
-                    </mc:Choice>
-                    <mc:Fallback>
-                      <p:oleObj name="Formula" r:id="rId36" imgW="2106000" imgH="208440" progId="Equation.Ribbit">
-                        <p:embed/>
-                        <p:pic>
-                          <p:nvPicPr>
-                            <p:cNvPr id="12" name="对象 11"/>
-                            <p:cNvPicPr/>
-                            <p:nvPr/>
-                          </p:nvPicPr>
-                          <p:blipFill>
-                            <a:blip r:embed="rId37"/>
-                            <a:stretch>
-                              <a:fillRect/>
-                            </a:stretch>
-                          </p:blipFill>
-                          <p:spPr>
-                            <a:xfrm>
-                              <a:off x="1420894" y="1868744"/>
-                              <a:ext cx="3779837" cy="371475"/>
-                            </a:xfrm>
-                            <a:prstGeom prst="rect">
-                              <a:avLst/>
-                            </a:prstGeom>
-                          </p:spPr>
-                        </p:pic>
-                      </p:oleObj>
-                    </mc:Fallback>
-                  </mc:AlternateContent>
-                </a:graphicData>
-              </a:graphic>
-            </p:graphicFrame>
-          </mc:Choice>
-          <mc:Fallback xmlns="">
-            <p:graphicFrame>
-              <p:nvGraphicFramePr>
-                <p:cNvPr id="12" name="对象 11"/>
-                <p:cNvGraphicFramePr>
-                  <a:graphicFrameLocks noChangeAspect="1"/>
-                </p:cNvGraphicFramePr>
-                <p:nvPr>
-                  <p:extLst>
-                    <p:ext uri="{D42A27DB-BD31-4B8C-83A1-F6EECF244321}">
-                      <p14:modId xmlns:p14="http://schemas.microsoft.com/office/powerpoint/2010/main" val="427485303"/>
-                    </p:ext>
-                  </p:extLst>
-                </p:nvPr>
-              </p:nvGraphicFramePr>
-              <p:xfrm>
-                <a:off x="1420894" y="1868744"/>
-                <a:ext cx="3779837" cy="371475"/>
-              </p:xfrm>
-              <a:graphic>
-                <a:graphicData uri="http://schemas.openxmlformats.org/presentationml/2006/ole">
-                  <mc:AlternateContent>
-                    <mc:Choice xmlns:v="urn:schemas-microsoft-com:vml" Requires="v">
-                      <p:oleObj spid="_x0000_s24309" name="Formula" r:id="rId29" imgW="2106000" imgH="208440" progId="Equation.Ribbit">
-                        <p:embed/>
-                      </p:oleObj>
-                    </mc:Choice>
-                    <mc:Fallback>
-                      <p:oleObj name="Formula" r:id="rId29" imgW="2106000" imgH="208440" progId="Equation.Ribbit">
-                        <p:embed/>
-                        <p:pic>
-                          <p:nvPicPr>
-                            <p:cNvPr id="0" name=""/>
-                            <p:cNvPicPr/>
-                            <p:nvPr/>
-                          </p:nvPicPr>
-                          <p:blipFill>
-                            <a:blip r:embed="rId30"/>
-                            <a:stretch>
-                              <a:fillRect/>
-                            </a:stretch>
-                          </p:blipFill>
-                          <p:spPr>
-                            <a:xfrm>
-                              <a:off x="1420894" y="1868744"/>
-                              <a:ext cx="3779837" cy="371475"/>
-                            </a:xfrm>
-                            <a:prstGeom prst="rect">
-                              <a:avLst/>
-                            </a:prstGeom>
-                          </p:spPr>
-                        </p:pic>
-                      </p:oleObj>
-                    </mc:Fallback>
-                  </mc:AlternateContent>
-                </a:graphicData>
-              </a:graphic>
-            </p:graphicFrame>
-          </mc:Fallback>
-        </mc:AlternateContent>
-        <mc:AlternateContent xmlns:mc="http://schemas.openxmlformats.org/markup-compatibility/2006" xmlns:a14="http://schemas.microsoft.com/office/drawing/2010/main">
-          <mc:Choice Requires="a14">
+        <p:graphicFrame>
+          <p:nvGraphicFramePr>
+            <p:cNvPr id="11" name="对象 10"/>
+            <p:cNvGraphicFramePr>
+              <a:graphicFrameLocks noChangeAspect="1"/>
+            </p:cNvGraphicFramePr>
+            <p:nvPr/>
+          </p:nvGraphicFramePr>
+          <p:xfrm>
+            <a:off x="1420894" y="1868744"/>
+            <a:ext cx="3779837" cy="371475"/>
+          </p:xfrm>
+          <a:graphic>
+            <a:graphicData uri="http://schemas.openxmlformats.org/presentationml/2006/ole">
+              <mc:AlternateContent xmlns:mc="http://schemas.openxmlformats.org/markup-compatibility/2006">
+                <mc:Choice xmlns:v="urn:schemas-microsoft-com:vml" Requires="v">
+                  <p:oleObj spid="_x0000_s27941" name="Formula" r:id="rId4" imgW="15792450" imgH="1562100" progId="Equation.Ribbit">
+                    <p:embed/>
+                  </p:oleObj>
+                </mc:Choice>
+                <mc:Fallback>
+                  <p:oleObj name="Formula" r:id="rId4" imgW="15792450" imgH="1562100" progId="Equation.Ribbit">
+                    <p:embed/>
+                    <p:pic>
+                      <p:nvPicPr>
+                        <p:cNvPr id="0" name="对象 11"/>
+                        <p:cNvPicPr/>
+                        <p:nvPr/>
+                      </p:nvPicPr>
+                      <p:blipFill>
+                        <a:blip r:embed="rId5"/>
+                        <a:stretch>
+                          <a:fillRect/>
+                        </a:stretch>
+                      </p:blipFill>
+                      <p:spPr>
+                        <a:xfrm>
+                          <a:off x="1420894" y="1868744"/>
+                          <a:ext cx="3779837" cy="371475"/>
+                        </a:xfrm>
+                        <a:prstGeom prst="rect">
+                          <a:avLst/>
+                        </a:prstGeom>
+                      </p:spPr>
+                    </p:pic>
+                  </p:oleObj>
+                </mc:Fallback>
+              </mc:AlternateContent>
+            </a:graphicData>
+          </a:graphic>
+        </p:graphicFrame>
+        <mc:AlternateContent xmlns:mc="http://schemas.openxmlformats.org/markup-compatibility/2006">
+          <mc:Choice xmlns:a14="http://schemas.microsoft.com/office/drawing/2010/main" Requires="a14">
             <p:sp>
               <p:nvSpPr>
-                <p:cNvPr id="12" name="文本框 11">
-                  <a:extLst>
-                    <a:ext uri="{FF2B5EF4-FFF2-40B4-BE49-F238E27FC236}">
-                      <a16:creationId xmlns:a16="http://schemas.microsoft.com/office/drawing/2014/main" id="{0F7C284A-2ECB-40DC-A16B-1D9FF899DC27}"/>
-                    </a:ext>
-                  </a:extLst>
-                </p:cNvPr>
+                <p:cNvPr id="12" name="文本框 11"/>
                 <p:cNvSpPr txBox="1"/>
                 <p:nvPr/>
               </p:nvSpPr>
@@ -9648,7 +8871,6 @@
                     <a:buSzTx/>
                     <a:buFontTx/>
                     <a:buNone/>
-                    <a:tabLst/>
                     <a:defRPr/>
                   </a:pPr>
                   <a14:m>
@@ -9705,7 +8927,7 @@
                                 <a:uFillTx/>
                                 <a:latin typeface="Cambria Math" panose="02040503050406030204" pitchFamily="18" charset="0"/>
                               </a:rPr>
-                              <m:t>h</m:t>
+                              <m:t>ℎ</m:t>
                             </m:r>
                           </m:sub>
                         </m:sSub>
@@ -9722,23 +8944,17 @@
                     <a:effectLst/>
                     <a:uLnTx/>
                     <a:uFillTx/>
-                    <a:latin typeface="Verdana"/>
-                    <a:ea typeface="幼圆"/>
+                    <a:latin typeface="Verdana" panose="020B0604030504040204"/>
+                    <a:ea typeface="幼圆" panose="02010509060101010101" pitchFamily="49" charset="-122"/>
                   </a:endParaRPr>
                 </a:p>
               </p:txBody>
             </p:sp>
           </mc:Choice>
-          <mc:Fallback xmlns="">
+          <mc:Fallback>
             <p:sp>
               <p:nvSpPr>
-                <p:cNvPr id="13" name="文本框 12">
-                  <a:extLst>
-                    <a:ext uri="{FF2B5EF4-FFF2-40B4-BE49-F238E27FC236}">
-                      <a16:creationId xmlns:a16="http://schemas.microsoft.com/office/drawing/2014/main" id="{1B2896D3-9EB2-4176-84BE-9231717A921C}"/>
-                    </a:ext>
-                  </a:extLst>
-                </p:cNvPr>
+                <p:cNvPr id="12" name="文本框 11"/>
                 <p:cNvSpPr txBox="1">
                   <a:spLocks noRot="1" noChangeAspect="1" noMove="1" noResize="1" noEditPoints="1" noAdjustHandles="1" noChangeArrowheads="1" noChangeShapeType="1" noTextEdit="1"/>
                 </p:cNvSpPr>
@@ -9752,11 +8968,8 @@
                 <a:prstGeom prst="rect">
                   <a:avLst/>
                 </a:prstGeom>
-                <a:blipFill>
-                  <a:blip r:embed="rId31"/>
-                  <a:stretch>
-                    <a:fillRect l="-23913" r="-19565" b="-22000"/>
-                  </a:stretch>
+                <a:blipFill rotWithShape="1">
+                  <a:blip r:embed="rId6"/>
                 </a:blipFill>
               </p:spPr>
               <p:txBody>
@@ -9774,17 +8987,11 @@
             </p:sp>
           </mc:Fallback>
         </mc:AlternateContent>
-        <mc:AlternateContent xmlns:mc="http://schemas.openxmlformats.org/markup-compatibility/2006" xmlns:a14="http://schemas.microsoft.com/office/drawing/2010/main">
-          <mc:Choice Requires="a14">
+        <mc:AlternateContent xmlns:mc="http://schemas.openxmlformats.org/markup-compatibility/2006">
+          <mc:Choice xmlns:a14="http://schemas.microsoft.com/office/drawing/2010/main" Requires="a14">
             <p:sp>
               <p:nvSpPr>
-                <p:cNvPr id="13" name="文本框 12">
-                  <a:extLst>
-                    <a:ext uri="{FF2B5EF4-FFF2-40B4-BE49-F238E27FC236}">
-                      <a16:creationId xmlns:a16="http://schemas.microsoft.com/office/drawing/2014/main" id="{C74FC439-2274-458B-A7B7-E1021A25EFDD}"/>
-                    </a:ext>
-                  </a:extLst>
-                </p:cNvPr>
+                <p:cNvPr id="13" name="文本框 12"/>
                 <p:cNvSpPr txBox="1"/>
                 <p:nvPr/>
               </p:nvSpPr>
@@ -9820,7 +9027,6 @@
                     <a:buSzTx/>
                     <a:buFontTx/>
                     <a:buNone/>
-                    <a:tabLst/>
                     <a:defRPr/>
                   </a:pPr>
                   <a14:m>
@@ -9877,7 +9083,7 @@
                                 <a:uFillTx/>
                                 <a:latin typeface="Cambria Math" panose="02040503050406030204" pitchFamily="18" charset="0"/>
                               </a:rPr>
-                              <m:t>h</m:t>
+                              <m:t>ℎ</m:t>
                             </m:r>
                           </m:sub>
                         </m:sSub>
@@ -9894,23 +9100,17 @@
                     <a:effectLst/>
                     <a:uLnTx/>
                     <a:uFillTx/>
-                    <a:latin typeface="Verdana"/>
-                    <a:ea typeface="幼圆"/>
+                    <a:latin typeface="Verdana" panose="020B0604030504040204"/>
+                    <a:ea typeface="幼圆" panose="02010509060101010101" pitchFamily="49" charset="-122"/>
                   </a:endParaRPr>
                 </a:p>
               </p:txBody>
             </p:sp>
           </mc:Choice>
-          <mc:Fallback xmlns="">
+          <mc:Fallback>
             <p:sp>
               <p:nvSpPr>
-                <p:cNvPr id="14" name="文本框 13">
-                  <a:extLst>
-                    <a:ext uri="{FF2B5EF4-FFF2-40B4-BE49-F238E27FC236}">
-                      <a16:creationId xmlns:a16="http://schemas.microsoft.com/office/drawing/2014/main" id="{D1E556CC-9A5A-4C51-BED0-EE9144F0D6A0}"/>
-                    </a:ext>
-                  </a:extLst>
-                </p:cNvPr>
+                <p:cNvPr id="13" name="文本框 12"/>
                 <p:cNvSpPr txBox="1">
                   <a:spLocks noRot="1" noChangeAspect="1" noMove="1" noResize="1" noEditPoints="1" noAdjustHandles="1" noChangeArrowheads="1" noChangeShapeType="1" noTextEdit="1"/>
                 </p:cNvSpPr>
@@ -9924,11 +9124,8 @@
                 <a:prstGeom prst="rect">
                   <a:avLst/>
                 </a:prstGeom>
-                <a:blipFill>
-                  <a:blip r:embed="rId32"/>
-                  <a:stretch>
-                    <a:fillRect l="-21277" r="-17021" b="-22000"/>
-                  </a:stretch>
+                <a:blipFill rotWithShape="1">
+                  <a:blip r:embed="rId6"/>
                 </a:blipFill>
               </p:spPr>
               <p:txBody>
@@ -9949,20 +9146,14 @@
       </p:grpSp>
       <p:pic>
         <p:nvPicPr>
-          <p:cNvPr id="14" name="图片 13">
-            <a:extLst>
-              <a:ext uri="{FF2B5EF4-FFF2-40B4-BE49-F238E27FC236}">
-                <a16:creationId xmlns:a16="http://schemas.microsoft.com/office/drawing/2014/main" id="{E7C9C964-180F-4881-A9AA-2A3435CC2C04}"/>
-              </a:ext>
-            </a:extLst>
-          </p:cNvPr>
+          <p:cNvPr id="14" name="图片 13"/>
           <p:cNvPicPr>
             <a:picLocks noChangeAspect="1"/>
           </p:cNvPicPr>
           <p:nvPr/>
         </p:nvPicPr>
         <p:blipFill>
-          <a:blip r:embed="rId38"/>
+          <a:blip r:embed="rId7"/>
           <a:stretch>
             <a:fillRect/>
           </a:stretch>
@@ -9979,13 +9170,7 @@
       </p:pic>
       <p:sp>
         <p:nvSpPr>
-          <p:cNvPr id="16" name="文本框 15">
-            <a:extLst>
-              <a:ext uri="{FF2B5EF4-FFF2-40B4-BE49-F238E27FC236}">
-                <a16:creationId xmlns:a16="http://schemas.microsoft.com/office/drawing/2014/main" id="{24A66FBA-D0CB-4D11-8822-14B52854CF8C}"/>
-              </a:ext>
-            </a:extLst>
-          </p:cNvPr>
+          <p:cNvPr id="16" name="文本框 15"/>
           <p:cNvSpPr txBox="1"/>
           <p:nvPr/>
         </p:nvSpPr>
@@ -10039,28 +9224,20 @@
               </a:rPr>
               <a:t> 		</a:t>
             </a:r>
+            <a:endParaRPr lang="en-US" altLang="zh-CN" sz="1800" b="1" dirty="0">
+              <a:latin typeface="黑体" panose="02010609060101010101" pitchFamily="49" charset="-122"/>
+              <a:ea typeface="黑体" panose="02010609060101010101" pitchFamily="49" charset="-122"/>
+            </a:endParaRPr>
           </a:p>
         </p:txBody>
       </p:sp>
       <p:graphicFrame>
         <p:nvGraphicFramePr>
-          <p:cNvPr id="17" name="对象 16">
-            <a:extLst>
-              <a:ext uri="{FF2B5EF4-FFF2-40B4-BE49-F238E27FC236}">
-                <a16:creationId xmlns:a16="http://schemas.microsoft.com/office/drawing/2014/main" id="{EF4DBBB7-3120-477F-A000-3A32FC06EF1B}"/>
-              </a:ext>
-            </a:extLst>
-          </p:cNvPr>
+          <p:cNvPr id="17" name="对象 16"/>
           <p:cNvGraphicFramePr>
             <a:graphicFrameLocks noChangeAspect="1"/>
           </p:cNvGraphicFramePr>
-          <p:nvPr>
-            <p:extLst>
-              <p:ext uri="{D42A27DB-BD31-4B8C-83A1-F6EECF244321}">
-                <p14:modId xmlns:p14="http://schemas.microsoft.com/office/powerpoint/2010/main" val="2443801431"/>
-              </p:ext>
-            </p:extLst>
-          </p:nvPr>
+          <p:nvPr/>
         </p:nvGraphicFramePr>
         <p:xfrm>
           <a:off x="1403648" y="614068"/>
@@ -10070,21 +9247,21 @@
           <a:graphicData uri="http://schemas.openxmlformats.org/presentationml/2006/ole">
             <mc:AlternateContent xmlns:mc="http://schemas.openxmlformats.org/markup-compatibility/2006">
               <mc:Choice xmlns:v="urn:schemas-microsoft-com:vml" Requires="v">
-                <p:oleObj name="Formula" r:id="rId39" imgW="177840" imgH="119520" progId="Equation.Ribbit">
+                <p:oleObj spid="_x0000_s2" name="Formula" r:id="rId8" imgW="1333500" imgH="895350" progId="Equation.Ribbit">
                   <p:embed/>
                 </p:oleObj>
               </mc:Choice>
               <mc:Fallback>
-                <p:oleObj name="Formula" r:id="rId39" imgW="177840" imgH="119520" progId="Equation.Ribbit">
+                <p:oleObj name="Formula" r:id="rId8" imgW="1333500" imgH="895350" progId="Equation.Ribbit">
                   <p:embed/>
                   <p:pic>
                     <p:nvPicPr>
-                      <p:cNvPr id="17" name="对象 16"/>
+                      <p:cNvPr id="0" name="对象 16"/>
                       <p:cNvPicPr/>
                       <p:nvPr/>
                     </p:nvPicPr>
                     <p:blipFill>
-                      <a:blip r:embed="rId40"/>
+                      <a:blip r:embed="rId9"/>
                       <a:stretch>
                         <a:fillRect/>
                       </a:stretch>
@@ -10107,23 +9284,11 @@
       </p:graphicFrame>
       <p:graphicFrame>
         <p:nvGraphicFramePr>
-          <p:cNvPr id="18" name="对象 17">
-            <a:extLst>
-              <a:ext uri="{FF2B5EF4-FFF2-40B4-BE49-F238E27FC236}">
-                <a16:creationId xmlns:a16="http://schemas.microsoft.com/office/drawing/2014/main" id="{7780210C-26E5-4151-BCEF-5626D358747D}"/>
-              </a:ext>
-            </a:extLst>
-          </p:cNvPr>
+          <p:cNvPr id="18" name="对象 17"/>
           <p:cNvGraphicFramePr>
             <a:graphicFrameLocks noChangeAspect="1"/>
           </p:cNvGraphicFramePr>
-          <p:nvPr>
-            <p:extLst>
-              <p:ext uri="{D42A27DB-BD31-4B8C-83A1-F6EECF244321}">
-                <p14:modId xmlns:p14="http://schemas.microsoft.com/office/powerpoint/2010/main" val="2189219821"/>
-              </p:ext>
-            </p:extLst>
-          </p:nvPr>
+          <p:nvPr/>
         </p:nvGraphicFramePr>
         <p:xfrm>
           <a:off x="1954633" y="598403"/>
@@ -10133,21 +9298,21 @@
           <a:graphicData uri="http://schemas.openxmlformats.org/presentationml/2006/ole">
             <mc:AlternateContent xmlns:mc="http://schemas.openxmlformats.org/markup-compatibility/2006">
               <mc:Choice xmlns:v="urn:schemas-microsoft-com:vml" Requires="v">
-                <p:oleObj name="Formula" r:id="rId41" imgW="219960" imgH="133560" progId="Equation.Ribbit">
+                <p:oleObj spid="_x0000_s3" name="Formula" r:id="rId10" imgW="1647825" imgH="1000125" progId="Equation.Ribbit">
                   <p:embed/>
                 </p:oleObj>
               </mc:Choice>
               <mc:Fallback>
-                <p:oleObj name="Formula" r:id="rId41" imgW="219960" imgH="133560" progId="Equation.Ribbit">
+                <p:oleObj name="Formula" r:id="rId10" imgW="1647825" imgH="1000125" progId="Equation.Ribbit">
                   <p:embed/>
                   <p:pic>
                     <p:nvPicPr>
-                      <p:cNvPr id="20" name="对象 19"/>
+                      <p:cNvPr id="0" name="对象 19"/>
                       <p:cNvPicPr/>
                       <p:nvPr/>
                     </p:nvPicPr>
                     <p:blipFill>
-                      <a:blip r:embed="rId42"/>
+                      <a:blip r:embed="rId11"/>
                       <a:stretch>
                         <a:fillRect/>
                       </a:stretch>
@@ -10170,23 +9335,11 @@
       </p:graphicFrame>
       <p:graphicFrame>
         <p:nvGraphicFramePr>
-          <p:cNvPr id="19" name="对象 18">
-            <a:extLst>
-              <a:ext uri="{FF2B5EF4-FFF2-40B4-BE49-F238E27FC236}">
-                <a16:creationId xmlns:a16="http://schemas.microsoft.com/office/drawing/2014/main" id="{E9635BD2-BEA3-44EB-A7BE-532C3AD84412}"/>
-              </a:ext>
-            </a:extLst>
-          </p:cNvPr>
+          <p:cNvPr id="19" name="对象 18"/>
           <p:cNvGraphicFramePr>
             <a:graphicFrameLocks noChangeAspect="1"/>
           </p:cNvGraphicFramePr>
-          <p:nvPr>
-            <p:extLst>
-              <p:ext uri="{D42A27DB-BD31-4B8C-83A1-F6EECF244321}">
-                <p14:modId xmlns:p14="http://schemas.microsoft.com/office/powerpoint/2010/main" val="3765758827"/>
-              </p:ext>
-            </p:extLst>
-          </p:nvPr>
+          <p:nvPr/>
         </p:nvGraphicFramePr>
         <p:xfrm>
           <a:off x="3315570" y="585670"/>
@@ -10196,21 +9349,21 @@
           <a:graphicData uri="http://schemas.openxmlformats.org/presentationml/2006/ole">
             <mc:AlternateContent xmlns:mc="http://schemas.openxmlformats.org/markup-compatibility/2006">
               <mc:Choice xmlns:v="urn:schemas-microsoft-com:vml" Requires="v">
-                <p:oleObj name="Formula" r:id="rId43" imgW="119520" imgH="174240" progId="Equation.Ribbit">
+                <p:oleObj spid="_x0000_s4" name="Formula" r:id="rId12" imgW="895350" imgH="1304925" progId="Equation.Ribbit">
                   <p:embed/>
                 </p:oleObj>
               </mc:Choice>
               <mc:Fallback>
-                <p:oleObj name="Formula" r:id="rId43" imgW="119520" imgH="174240" progId="Equation.Ribbit">
+                <p:oleObj name="Formula" r:id="rId12" imgW="895350" imgH="1304925" progId="Equation.Ribbit">
                   <p:embed/>
                   <p:pic>
                     <p:nvPicPr>
-                      <p:cNvPr id="11" name="对象 10"/>
+                      <p:cNvPr id="0" name="对象 10"/>
                       <p:cNvPicPr/>
                       <p:nvPr/>
                     </p:nvPicPr>
                     <p:blipFill>
-                      <a:blip r:embed="rId44"/>
+                      <a:blip r:embed="rId13"/>
                       <a:stretch>
                         <a:fillRect/>
                       </a:stretch>
@@ -10233,23 +9386,11 @@
       </p:graphicFrame>
       <p:graphicFrame>
         <p:nvGraphicFramePr>
-          <p:cNvPr id="20" name="对象 19">
-            <a:extLst>
-              <a:ext uri="{FF2B5EF4-FFF2-40B4-BE49-F238E27FC236}">
-                <a16:creationId xmlns:a16="http://schemas.microsoft.com/office/drawing/2014/main" id="{D1F58B69-33ED-4EED-BADC-5D7A15F15066}"/>
-              </a:ext>
-            </a:extLst>
-          </p:cNvPr>
+          <p:cNvPr id="20" name="对象 19"/>
           <p:cNvGraphicFramePr>
             <a:graphicFrameLocks noChangeAspect="1"/>
           </p:cNvGraphicFramePr>
-          <p:nvPr>
-            <p:extLst>
-              <p:ext uri="{D42A27DB-BD31-4B8C-83A1-F6EECF244321}">
-                <p14:modId xmlns:p14="http://schemas.microsoft.com/office/powerpoint/2010/main" val="10631158"/>
-              </p:ext>
-            </p:extLst>
-          </p:nvPr>
+          <p:nvPr/>
         </p:nvGraphicFramePr>
         <p:xfrm>
           <a:off x="3740121" y="585670"/>
@@ -10259,21 +9400,21 @@
           <a:graphicData uri="http://schemas.openxmlformats.org/presentationml/2006/ole">
             <mc:AlternateContent xmlns:mc="http://schemas.openxmlformats.org/markup-compatibility/2006">
               <mc:Choice xmlns:v="urn:schemas-microsoft-com:vml" Requires="v">
-                <p:oleObj name="Formula" r:id="rId45" imgW="147600" imgH="122040" progId="Equation.Ribbit">
+                <p:oleObj spid="_x0000_s15" name="Formula" r:id="rId14" imgW="1104900" imgH="914400" progId="Equation.Ribbit">
                   <p:embed/>
                 </p:oleObj>
               </mc:Choice>
               <mc:Fallback>
-                <p:oleObj name="Formula" r:id="rId45" imgW="147600" imgH="122040" progId="Equation.Ribbit">
+                <p:oleObj name="Formula" r:id="rId14" imgW="1104900" imgH="914400" progId="Equation.Ribbit">
                   <p:embed/>
                   <p:pic>
                     <p:nvPicPr>
-                      <p:cNvPr id="15" name="对象 14"/>
+                      <p:cNvPr id="0" name="对象 14"/>
                       <p:cNvPicPr/>
                       <p:nvPr/>
                     </p:nvPicPr>
                     <p:blipFill>
-                      <a:blip r:embed="rId46"/>
+                      <a:blip r:embed="rId15"/>
                       <a:stretch>
                         <a:fillRect/>
                       </a:stretch>
@@ -10296,23 +9437,11 @@
       </p:graphicFrame>
       <p:graphicFrame>
         <p:nvGraphicFramePr>
-          <p:cNvPr id="21" name="对象 20">
-            <a:extLst>
-              <a:ext uri="{FF2B5EF4-FFF2-40B4-BE49-F238E27FC236}">
-                <a16:creationId xmlns:a16="http://schemas.microsoft.com/office/drawing/2014/main" id="{E2B7F0EE-6FDC-4062-B6C1-25F1FAF7B495}"/>
-              </a:ext>
-            </a:extLst>
-          </p:cNvPr>
+          <p:cNvPr id="21" name="对象 20"/>
           <p:cNvGraphicFramePr>
             <a:graphicFrameLocks noChangeAspect="1"/>
           </p:cNvGraphicFramePr>
-          <p:nvPr>
-            <p:extLst>
-              <p:ext uri="{D42A27DB-BD31-4B8C-83A1-F6EECF244321}">
-                <p14:modId xmlns:p14="http://schemas.microsoft.com/office/powerpoint/2010/main" val="2961829140"/>
-              </p:ext>
-            </p:extLst>
-          </p:nvPr>
+          <p:nvPr/>
         </p:nvGraphicFramePr>
         <p:xfrm>
           <a:off x="4247864" y="614068"/>
@@ -10322,21 +9451,21 @@
           <a:graphicData uri="http://schemas.openxmlformats.org/presentationml/2006/ole">
             <mc:AlternateContent xmlns:mc="http://schemas.openxmlformats.org/markup-compatibility/2006">
               <mc:Choice xmlns:v="urn:schemas-microsoft-com:vml" Requires="v">
-                <p:oleObj name="Formula" r:id="rId47" imgW="2608920" imgH="176760" progId="Equation.Ribbit">
+                <p:oleObj spid="_x0000_s22" name="Formula" r:id="rId16" imgW="19564350" imgH="1323975" progId="Equation.Ribbit">
                   <p:embed/>
                 </p:oleObj>
               </mc:Choice>
               <mc:Fallback>
-                <p:oleObj name="Formula" r:id="rId47" imgW="2608920" imgH="176760" progId="Equation.Ribbit">
+                <p:oleObj name="Formula" r:id="rId16" imgW="19564350" imgH="1323975" progId="Equation.Ribbit">
                   <p:embed/>
                   <p:pic>
                     <p:nvPicPr>
-                      <p:cNvPr id="22" name="对象 21"/>
+                      <p:cNvPr id="0" name="对象 21"/>
                       <p:cNvPicPr/>
                       <p:nvPr/>
                     </p:nvPicPr>
                     <p:blipFill>
-                      <a:blip r:embed="rId48"/>
+                      <a:blip r:embed="rId17"/>
                       <a:stretch>
                         <a:fillRect/>
                       </a:stretch>
@@ -10359,13 +9488,7 @@
       </p:graphicFrame>
       <p:sp>
         <p:nvSpPr>
-          <p:cNvPr id="23" name="文本框 22">
-            <a:extLst>
-              <a:ext uri="{FF2B5EF4-FFF2-40B4-BE49-F238E27FC236}">
-                <a16:creationId xmlns:a16="http://schemas.microsoft.com/office/drawing/2014/main" id="{3FFBB9B9-7717-43B1-B55F-21DCD3A14C71}"/>
-              </a:ext>
-            </a:extLst>
-          </p:cNvPr>
+          <p:cNvPr id="23" name="文本框 22"/>
           <p:cNvSpPr txBox="1"/>
           <p:nvPr/>
         </p:nvSpPr>
@@ -10398,23 +9521,11 @@
       </p:sp>
       <p:graphicFrame>
         <p:nvGraphicFramePr>
-          <p:cNvPr id="24" name="对象 23">
-            <a:extLst>
-              <a:ext uri="{FF2B5EF4-FFF2-40B4-BE49-F238E27FC236}">
-                <a16:creationId xmlns:a16="http://schemas.microsoft.com/office/drawing/2014/main" id="{AFB753A7-6141-4428-BF0B-6B4581F92F2D}"/>
-              </a:ext>
-            </a:extLst>
-          </p:cNvPr>
+          <p:cNvPr id="24" name="对象 23"/>
           <p:cNvGraphicFramePr>
             <a:graphicFrameLocks noChangeAspect="1"/>
           </p:cNvGraphicFramePr>
-          <p:nvPr>
-            <p:extLst>
-              <p:ext uri="{D42A27DB-BD31-4B8C-83A1-F6EECF244321}">
-                <p14:modId xmlns:p14="http://schemas.microsoft.com/office/powerpoint/2010/main" val="1923342896"/>
-              </p:ext>
-            </p:extLst>
-          </p:nvPr>
+          <p:nvPr/>
         </p:nvGraphicFramePr>
         <p:xfrm>
           <a:off x="2409002" y="5413889"/>
@@ -10424,21 +9535,21 @@
           <a:graphicData uri="http://schemas.openxmlformats.org/presentationml/2006/ole">
             <mc:AlternateContent xmlns:mc="http://schemas.openxmlformats.org/markup-compatibility/2006">
               <mc:Choice xmlns:v="urn:schemas-microsoft-com:vml" Requires="v">
-                <p:oleObj name="Formula" r:id="rId49" imgW="1482120" imgH="235080" progId="Equation.Ribbit">
+                <p:oleObj spid="_x0000_s25" name="Formula" r:id="rId18" imgW="11115675" imgH="1762125" progId="Equation.Ribbit">
                   <p:embed/>
                 </p:oleObj>
               </mc:Choice>
               <mc:Fallback>
-                <p:oleObj name="Formula" r:id="rId49" imgW="1482120" imgH="235080" progId="Equation.Ribbit">
+                <p:oleObj name="Formula" r:id="rId18" imgW="11115675" imgH="1762125" progId="Equation.Ribbit">
                   <p:embed/>
                   <p:pic>
                     <p:nvPicPr>
-                      <p:cNvPr id="21" name="对象 20"/>
+                      <p:cNvPr id="0" name="对象 20"/>
                       <p:cNvPicPr/>
                       <p:nvPr/>
                     </p:nvPicPr>
                     <p:blipFill>
-                      <a:blip r:embed="rId50"/>
+                      <a:blip r:embed="rId19"/>
                       <a:stretch>
                         <a:fillRect/>
                       </a:stretch>
@@ -10461,13 +9572,7 @@
       </p:graphicFrame>
       <p:grpSp>
         <p:nvGrpSpPr>
-          <p:cNvPr id="27" name="组合 26">
-            <a:extLst>
-              <a:ext uri="{FF2B5EF4-FFF2-40B4-BE49-F238E27FC236}">
-                <a16:creationId xmlns:a16="http://schemas.microsoft.com/office/drawing/2014/main" id="{F50344AC-4D6B-45A0-82E9-9D3B9B5B8BE5}"/>
-              </a:ext>
-            </a:extLst>
-          </p:cNvPr>
+          <p:cNvPr id="27" name="组合 26"/>
           <p:cNvGrpSpPr/>
           <p:nvPr/>
         </p:nvGrpSpPr>
@@ -10481,20 +9586,14 @@
         </p:grpSpPr>
         <p:pic>
           <p:nvPicPr>
-            <p:cNvPr id="25" name="图片 24">
-              <a:extLst>
-                <a:ext uri="{FF2B5EF4-FFF2-40B4-BE49-F238E27FC236}">
-                  <a16:creationId xmlns:a16="http://schemas.microsoft.com/office/drawing/2014/main" id="{E956A502-76B5-4234-AFE7-E569806D853A}"/>
-                </a:ext>
-              </a:extLst>
-            </p:cNvPr>
+            <p:cNvPr id="26" name="图片 25"/>
             <p:cNvPicPr>
               <a:picLocks noChangeAspect="1"/>
             </p:cNvPicPr>
             <p:nvPr/>
           </p:nvPicPr>
           <p:blipFill>
-            <a:blip r:embed="rId51"/>
+            <a:blip r:embed="rId20"/>
             <a:stretch>
               <a:fillRect/>
             </a:stretch>
@@ -10511,13 +9610,7 @@
         </p:pic>
         <p:sp>
           <p:nvSpPr>
-            <p:cNvPr id="26" name="文本框 25">
-              <a:extLst>
-                <a:ext uri="{FF2B5EF4-FFF2-40B4-BE49-F238E27FC236}">
-                  <a16:creationId xmlns:a16="http://schemas.microsoft.com/office/drawing/2014/main" id="{3897B4E1-1ED7-43D4-9DD6-F700F7CE6AE1}"/>
-                </a:ext>
-              </a:extLst>
-            </p:cNvPr>
+            <p:cNvPr id="28" name="文本框 27"/>
             <p:cNvSpPr txBox="1"/>
             <p:nvPr/>
           </p:nvSpPr>
@@ -10560,11 +9653,6 @@
         </p:sp>
       </p:grpSp>
     </p:spTree>
-    <p:extLst>
-      <p:ext uri="{BB962C8B-B14F-4D97-AF65-F5344CB8AC3E}">
-        <p14:creationId xmlns:p14="http://schemas.microsoft.com/office/powerpoint/2010/main" val="4218266056"/>
-      </p:ext>
-    </p:extLst>
   </p:cSld>
   <p:clrMapOvr>
     <a:masterClrMapping/>
@@ -10591,13 +9679,7 @@
       </p:grpSpPr>
       <p:sp>
         <p:nvSpPr>
-          <p:cNvPr id="18434" name="灯片编号占位符 5">
-            <a:extLst>
-              <a:ext uri="{FF2B5EF4-FFF2-40B4-BE49-F238E27FC236}">
-                <a16:creationId xmlns:a16="http://schemas.microsoft.com/office/drawing/2014/main" id="{CBBD9809-2CC4-42C3-B564-FAC6896E7580}"/>
-              </a:ext>
-            </a:extLst>
-          </p:cNvPr>
+          <p:cNvPr id="18434" name="灯片编号占位符 5"/>
           <p:cNvSpPr>
             <a:spLocks noGrp="1"/>
           </p:cNvSpPr>
@@ -10784,7 +9866,6 @@
               <a:buSzTx/>
               <a:buFontTx/>
               <a:buNone/>
-              <a:tabLst/>
               <a:defRPr/>
             </a:pPr>
             <a:fld id="{F12A9DEA-C3F6-4401-A5BF-3745117890AB}" type="slidenum">
@@ -10802,24 +9883,6 @@
                 <a:ea typeface="宋体" panose="02010600030101010101" pitchFamily="2" charset="-122"/>
                 <a:cs typeface="+mn-cs"/>
               </a:rPr>
-              <a:pPr marL="0" marR="0" lvl="0" indent="0" algn="r" defTabSz="914400" rtl="0" eaLnBrk="1" fontAlgn="base" latinLnBrk="0" hangingPunct="1">
-                <a:lnSpc>
-                  <a:spcPct val="100000"/>
-                </a:lnSpc>
-                <a:spcBef>
-                  <a:spcPct val="0"/>
-                </a:spcBef>
-                <a:spcAft>
-                  <a:spcPct val="0"/>
-                </a:spcAft>
-                <a:buClrTx/>
-                <a:buSzTx/>
-                <a:buFontTx/>
-                <a:buNone/>
-                <a:tabLst/>
-                <a:defRPr/>
-              </a:pPr>
-              <a:t>12</a:t>
             </a:fld>
             <a:endParaRPr kumimoji="1" lang="en-US" altLang="zh-CN" sz="1400" b="0" i="0" u="none" strike="noStrike" kern="1200" cap="none" spc="0" normalizeH="0" baseline="0" noProof="0">
               <a:ln>
@@ -10840,13 +9903,7 @@
       </p:sp>
       <p:sp>
         <p:nvSpPr>
-          <p:cNvPr id="887811" name="Rectangle 3">
-            <a:extLst>
-              <a:ext uri="{FF2B5EF4-FFF2-40B4-BE49-F238E27FC236}">
-                <a16:creationId xmlns:a16="http://schemas.microsoft.com/office/drawing/2014/main" id="{E67925BF-BD9D-4849-975B-B00461AA9122}"/>
-              </a:ext>
-            </a:extLst>
-          </p:cNvPr>
+          <p:cNvPr id="887811" name="Rectangle 3"/>
           <p:cNvSpPr>
             <a:spLocks noGrp="1"/>
           </p:cNvSpPr>
@@ -11240,13 +10297,7 @@
       </p:sp>
       <p:sp>
         <p:nvSpPr>
-          <p:cNvPr id="18436" name="Text Box 4">
-            <a:extLst>
-              <a:ext uri="{FF2B5EF4-FFF2-40B4-BE49-F238E27FC236}">
-                <a16:creationId xmlns:a16="http://schemas.microsoft.com/office/drawing/2014/main" id="{EB81EA09-BA58-4C02-A7E1-E64004DF3351}"/>
-              </a:ext>
-            </a:extLst>
-          </p:cNvPr>
+          <p:cNvPr id="18436" name="Text Box 4"/>
           <p:cNvSpPr txBox="1">
             <a:spLocks noChangeArrowheads="1"/>
           </p:cNvSpPr>
@@ -11453,7 +10504,6 @@
               <a:buSzTx/>
               <a:buFontTx/>
               <a:buNone/>
-              <a:tabLst/>
               <a:defRPr/>
             </a:pPr>
             <a:r>
@@ -11507,6 +10557,20 @@
               </a:rPr>
               <a:t>章：支持向量机</a:t>
             </a:r>
+            <a:endParaRPr kumimoji="1" lang="zh-CN" altLang="en-US" sz="3200" b="1" i="0" u="none" strike="noStrike" kern="1200" cap="none" spc="0" normalizeH="0" baseline="0" noProof="0" dirty="0">
+              <a:ln>
+                <a:noFill/>
+              </a:ln>
+              <a:solidFill>
+                <a:prstClr val="black"/>
+              </a:solidFill>
+              <a:effectLst/>
+              <a:uLnTx/>
+              <a:uFillTx/>
+              <a:latin typeface="黑体" panose="02010609060101010101" pitchFamily="49" charset="-122"/>
+              <a:ea typeface="黑体" panose="02010609060101010101" pitchFamily="49" charset="-122"/>
+              <a:cs typeface="楷体_GB2312"/>
+            </a:endParaRPr>
           </a:p>
         </p:txBody>
       </p:sp>
@@ -11519,7 +10583,7 @@
           <p:nvPr/>
         </p:nvPicPr>
         <p:blipFill>
-          <a:blip r:embed="rId2"/>
+          <a:blip r:embed="rId1"/>
           <a:stretch>
             <a:fillRect/>
           </a:stretch>
@@ -11543,7 +10607,7 @@
           <p:nvPr/>
         </p:nvPicPr>
         <p:blipFill>
-          <a:blip r:embed="rId3">
+          <a:blip r:embed="rId2">
             <a:extLst>
               <a:ext uri="{28A0092B-C50C-407E-A947-70E740481C1C}">
                 <a14:useLocalDpi xmlns:a14="http://schemas.microsoft.com/office/drawing/2010/main" val="0"/>
@@ -11565,11 +10629,6 @@
         </p:spPr>
       </p:pic>
     </p:spTree>
-    <p:extLst>
-      <p:ext uri="{BB962C8B-B14F-4D97-AF65-F5344CB8AC3E}">
-        <p14:creationId xmlns:p14="http://schemas.microsoft.com/office/powerpoint/2010/main" val="371217219"/>
-      </p:ext>
-    </p:extLst>
   </p:cSld>
   <p:clrMapOvr>
     <a:masterClrMapping/>
@@ -11584,13 +10643,13 @@
               <p:cTn id="2" dur="indefinite" nodeType="mainSeq">
                 <p:childTnLst>
                   <p:par>
-                    <p:cTn id="3" fill="hold" nodeType="clickPar">
+                    <p:cTn id="3" fill="hold">
                       <p:stCondLst>
                         <p:cond delay="indefinite"/>
                       </p:stCondLst>
                       <p:childTnLst>
                         <p:par>
-                          <p:cTn id="4" fill="hold" nodeType="withGroup">
+                          <p:cTn id="4" fill="hold">
                             <p:stCondLst>
                               <p:cond delay="0"/>
                             </p:stCondLst>
@@ -11691,13 +10750,7 @@
       </p:grpSpPr>
       <p:sp>
         <p:nvSpPr>
-          <p:cNvPr id="18434" name="灯片编号占位符 5">
-            <a:extLst>
-              <a:ext uri="{FF2B5EF4-FFF2-40B4-BE49-F238E27FC236}">
-                <a16:creationId xmlns:a16="http://schemas.microsoft.com/office/drawing/2014/main" id="{CBBD9809-2CC4-42C3-B564-FAC6896E7580}"/>
-              </a:ext>
-            </a:extLst>
-          </p:cNvPr>
+          <p:cNvPr id="18434" name="灯片编号占位符 5"/>
           <p:cNvSpPr>
             <a:spLocks noGrp="1"/>
           </p:cNvSpPr>
@@ -11884,7 +10937,6 @@
               <a:buSzTx/>
               <a:buFontTx/>
               <a:buNone/>
-              <a:tabLst/>
               <a:defRPr/>
             </a:pPr>
             <a:fld id="{F12A9DEA-C3F6-4401-A5BF-3745117890AB}" type="slidenum">
@@ -11902,24 +10954,6 @@
                 <a:ea typeface="宋体" panose="02010600030101010101" pitchFamily="2" charset="-122"/>
                 <a:cs typeface="+mn-cs"/>
               </a:rPr>
-              <a:pPr marL="0" marR="0" lvl="0" indent="0" algn="r" defTabSz="914400" rtl="0" eaLnBrk="1" fontAlgn="base" latinLnBrk="0" hangingPunct="1">
-                <a:lnSpc>
-                  <a:spcPct val="100000"/>
-                </a:lnSpc>
-                <a:spcBef>
-                  <a:spcPct val="0"/>
-                </a:spcBef>
-                <a:spcAft>
-                  <a:spcPct val="0"/>
-                </a:spcAft>
-                <a:buClrTx/>
-                <a:buSzTx/>
-                <a:buFontTx/>
-                <a:buNone/>
-                <a:tabLst/>
-                <a:defRPr/>
-              </a:pPr>
-              <a:t>13</a:t>
             </a:fld>
             <a:endParaRPr kumimoji="1" lang="en-US" altLang="zh-CN" sz="1400" b="0" i="0" u="none" strike="noStrike" kern="1200" cap="none" spc="0" normalizeH="0" baseline="0" noProof="0">
               <a:ln>
@@ -11940,13 +10974,7 @@
       </p:sp>
       <p:sp>
         <p:nvSpPr>
-          <p:cNvPr id="887811" name="Rectangle 3">
-            <a:extLst>
-              <a:ext uri="{FF2B5EF4-FFF2-40B4-BE49-F238E27FC236}">
-                <a16:creationId xmlns:a16="http://schemas.microsoft.com/office/drawing/2014/main" id="{E67925BF-BD9D-4849-975B-B00461AA9122}"/>
-              </a:ext>
-            </a:extLst>
-          </p:cNvPr>
+          <p:cNvPr id="887811" name="Rectangle 3"/>
           <p:cNvSpPr>
             <a:spLocks noGrp="1"/>
           </p:cNvSpPr>
@@ -12101,6 +11129,11 @@
               </a:rPr>
               <a:t>来预测</a:t>
             </a:r>
+            <a:endParaRPr lang="zh-CN" altLang="en-US" sz="2400" dirty="0">
+              <a:latin typeface="Times New Roman" panose="02020603050405020304" pitchFamily="18" charset="0"/>
+              <a:ea typeface="楷体" panose="02010609060101010101" pitchFamily="49" charset="-122"/>
+              <a:cs typeface="Times New Roman" panose="02020603050405020304" pitchFamily="18" charset="0"/>
+            </a:endParaRPr>
           </a:p>
           <a:p>
             <a:pPr eaLnBrk="1" hangingPunct="1">
@@ -12156,6 +11189,11 @@
               </a:rPr>
               <a:t>先对联合概率分布          建模，再由此获得</a:t>
             </a:r>
+            <a:endParaRPr lang="zh-CN" altLang="en-US" sz="2400" dirty="0">
+              <a:latin typeface="Times New Roman" panose="02020603050405020304" pitchFamily="18" charset="0"/>
+              <a:ea typeface="楷体" panose="02010609060101010101" pitchFamily="49" charset="-122"/>
+              <a:cs typeface="Times New Roman" panose="02020603050405020304" pitchFamily="18" charset="0"/>
+            </a:endParaRPr>
           </a:p>
           <a:p>
             <a:pPr eaLnBrk="1" hangingPunct="1">
@@ -12177,6 +11215,11 @@
               </a:rPr>
               <a:t>贝叶斯定理：</a:t>
             </a:r>
+            <a:endParaRPr lang="zh-CN" altLang="en-US" sz="2600" b="1" dirty="0">
+              <a:latin typeface="Times New Roman" panose="02020603050405020304" pitchFamily="18" charset="0"/>
+              <a:ea typeface="楷体" panose="02010609060101010101" pitchFamily="49" charset="-122"/>
+              <a:cs typeface="Times New Roman" panose="02020603050405020304" pitchFamily="18" charset="0"/>
+            </a:endParaRPr>
           </a:p>
           <a:p>
             <a:pPr eaLnBrk="1" hangingPunct="1">
@@ -12379,13 +11422,7 @@
       </p:sp>
       <p:sp>
         <p:nvSpPr>
-          <p:cNvPr id="18436" name="Text Box 4">
-            <a:extLst>
-              <a:ext uri="{FF2B5EF4-FFF2-40B4-BE49-F238E27FC236}">
-                <a16:creationId xmlns:a16="http://schemas.microsoft.com/office/drawing/2014/main" id="{EB81EA09-BA58-4C02-A7E1-E64004DF3351}"/>
-              </a:ext>
-            </a:extLst>
-          </p:cNvPr>
+          <p:cNvPr id="18436" name="Text Box 4"/>
           <p:cNvSpPr txBox="1">
             <a:spLocks noChangeArrowheads="1"/>
           </p:cNvSpPr>
@@ -12592,7 +11629,6 @@
               <a:buSzTx/>
               <a:buFontTx/>
               <a:buNone/>
-              <a:tabLst/>
               <a:defRPr/>
             </a:pPr>
             <a:r>
@@ -12646,28 +11682,30 @@
               </a:rPr>
               <a:t>章：贝叶斯分类器</a:t>
             </a:r>
+            <a:endParaRPr kumimoji="1" lang="zh-CN" altLang="en-US" sz="3200" b="1" i="0" u="none" strike="noStrike" kern="1200" cap="none" spc="0" normalizeH="0" baseline="0" noProof="0" dirty="0">
+              <a:ln>
+                <a:noFill/>
+              </a:ln>
+              <a:solidFill>
+                <a:prstClr val="black"/>
+              </a:solidFill>
+              <a:effectLst/>
+              <a:uLnTx/>
+              <a:uFillTx/>
+              <a:latin typeface="黑体" panose="02010609060101010101" pitchFamily="49" charset="-122"/>
+              <a:ea typeface="黑体" panose="02010609060101010101" pitchFamily="49" charset="-122"/>
+              <a:cs typeface="楷体_GB2312"/>
+            </a:endParaRPr>
           </a:p>
         </p:txBody>
       </p:sp>
       <p:graphicFrame>
         <p:nvGraphicFramePr>
-          <p:cNvPr id="5" name="对象 4">
-            <a:extLst>
-              <a:ext uri="{FF2B5EF4-FFF2-40B4-BE49-F238E27FC236}">
-                <a16:creationId xmlns:a16="http://schemas.microsoft.com/office/drawing/2014/main" id="{9BEB6148-F99D-4AD0-A85C-9C1995DCE3A1}"/>
-              </a:ext>
-            </a:extLst>
-          </p:cNvPr>
+          <p:cNvPr id="5" name="对象 4"/>
           <p:cNvGraphicFramePr>
             <a:graphicFrameLocks noChangeAspect="1"/>
           </p:cNvGraphicFramePr>
-          <p:nvPr>
-            <p:extLst>
-              <p:ext uri="{D42A27DB-BD31-4B8C-83A1-F6EECF244321}">
-                <p14:modId xmlns:p14="http://schemas.microsoft.com/office/powerpoint/2010/main" val="1223909205"/>
-              </p:ext>
-            </p:extLst>
-          </p:nvPr>
+          <p:nvPr/>
         </p:nvGraphicFramePr>
         <p:xfrm>
           <a:off x="2339752" y="2485082"/>
@@ -12677,21 +11715,21 @@
           <a:graphicData uri="http://schemas.openxmlformats.org/presentationml/2006/ole">
             <mc:AlternateContent xmlns:mc="http://schemas.openxmlformats.org/markup-compatibility/2006">
               <mc:Choice xmlns:v="urn:schemas-microsoft-com:vml" Requires="v">
-                <p:oleObj name="Formula" r:id="rId2" imgW="97920" imgH="120960" progId="Equation.Ribbit">
+                <p:oleObj spid="_x0000_s27941" name="Formula" r:id="rId1" imgW="733425" imgH="904875" progId="Equation.Ribbit">
                   <p:embed/>
                 </p:oleObj>
               </mc:Choice>
               <mc:Fallback>
-                <p:oleObj name="Formula" r:id="rId2" imgW="97920" imgH="120960" progId="Equation.Ribbit">
+                <p:oleObj name="Formula" r:id="rId1" imgW="733425" imgH="904875" progId="Equation.Ribbit">
                   <p:embed/>
                   <p:pic>
                     <p:nvPicPr>
-                      <p:cNvPr id="20" name="对象 19"/>
+                      <p:cNvPr id="0" name="对象 19"/>
                       <p:cNvPicPr/>
                       <p:nvPr/>
                     </p:nvPicPr>
                     <p:blipFill>
-                      <a:blip r:embed="rId3"/>
+                      <a:blip r:embed="rId2"/>
                       <a:stretch>
                         <a:fillRect/>
                       </a:stretch>
@@ -12714,23 +11752,11 @@
       </p:graphicFrame>
       <p:graphicFrame>
         <p:nvGraphicFramePr>
-          <p:cNvPr id="6" name="对象 5">
-            <a:extLst>
-              <a:ext uri="{FF2B5EF4-FFF2-40B4-BE49-F238E27FC236}">
-                <a16:creationId xmlns:a16="http://schemas.microsoft.com/office/drawing/2014/main" id="{C4CC4F8E-5A4D-45BF-AC23-B7843D1D1383}"/>
-              </a:ext>
-            </a:extLst>
-          </p:cNvPr>
+          <p:cNvPr id="6" name="对象 5"/>
           <p:cNvGraphicFramePr>
             <a:graphicFrameLocks noChangeAspect="1"/>
           </p:cNvGraphicFramePr>
-          <p:nvPr>
-            <p:extLst>
-              <p:ext uri="{D42A27DB-BD31-4B8C-83A1-F6EECF244321}">
-                <p14:modId xmlns:p14="http://schemas.microsoft.com/office/powerpoint/2010/main" val="1116031666"/>
-              </p:ext>
-            </p:extLst>
-          </p:nvPr>
+          <p:nvPr/>
         </p:nvGraphicFramePr>
         <p:xfrm>
           <a:off x="4751388" y="2420888"/>
@@ -12740,21 +11766,21 @@
           <a:graphicData uri="http://schemas.openxmlformats.org/presentationml/2006/ole">
             <mc:AlternateContent xmlns:mc="http://schemas.openxmlformats.org/markup-compatibility/2006">
               <mc:Choice xmlns:v="urn:schemas-microsoft-com:vml" Requires="v">
-                <p:oleObj name="Formula" r:id="rId4" imgW="505800" imgH="177840" progId="Equation.Ribbit">
+                <p:oleObj spid="_x0000_s2" name="Formula" r:id="rId3" imgW="3790950" imgH="1333500" progId="Equation.Ribbit">
                   <p:embed/>
                 </p:oleObj>
               </mc:Choice>
               <mc:Fallback>
-                <p:oleObj name="Formula" r:id="rId4" imgW="505800" imgH="177840" progId="Equation.Ribbit">
+                <p:oleObj name="Formula" r:id="rId3" imgW="3790950" imgH="1333500" progId="Equation.Ribbit">
                   <p:embed/>
                   <p:pic>
                     <p:nvPicPr>
-                      <p:cNvPr id="19" name="对象 18"/>
+                      <p:cNvPr id="0" name="对象 18"/>
                       <p:cNvPicPr/>
                       <p:nvPr/>
                     </p:nvPicPr>
                     <p:blipFill>
-                      <a:blip r:embed="rId5"/>
+                      <a:blip r:embed="rId4"/>
                       <a:stretch>
                         <a:fillRect/>
                       </a:stretch>
@@ -12777,23 +11803,11 @@
       </p:graphicFrame>
       <p:graphicFrame>
         <p:nvGraphicFramePr>
-          <p:cNvPr id="7" name="对象 6">
-            <a:extLst>
-              <a:ext uri="{FF2B5EF4-FFF2-40B4-BE49-F238E27FC236}">
-                <a16:creationId xmlns:a16="http://schemas.microsoft.com/office/drawing/2014/main" id="{0B0D8C4E-DDC4-4F7D-B916-19B13F95D747}"/>
-              </a:ext>
-            </a:extLst>
-          </p:cNvPr>
+          <p:cNvPr id="7" name="对象 6"/>
           <p:cNvGraphicFramePr>
             <a:graphicFrameLocks noChangeAspect="1"/>
           </p:cNvGraphicFramePr>
-          <p:nvPr>
-            <p:extLst>
-              <p:ext uri="{D42A27DB-BD31-4B8C-83A1-F6EECF244321}">
-                <p14:modId xmlns:p14="http://schemas.microsoft.com/office/powerpoint/2010/main" val="424410512"/>
-              </p:ext>
-            </p:extLst>
-          </p:nvPr>
+          <p:nvPr/>
         </p:nvGraphicFramePr>
         <p:xfrm>
           <a:off x="6732240" y="2503390"/>
@@ -12803,21 +11817,21 @@
           <a:graphicData uri="http://schemas.openxmlformats.org/presentationml/2006/ole">
             <mc:AlternateContent xmlns:mc="http://schemas.openxmlformats.org/markup-compatibility/2006">
               <mc:Choice xmlns:v="urn:schemas-microsoft-com:vml" Requires="v">
-                <p:oleObj name="Formula" r:id="rId6" imgW="71280" imgH="119520" progId="Equation.Ribbit">
+                <p:oleObj spid="_x0000_s3" name="Formula" r:id="rId5" imgW="533400" imgH="895350" progId="Equation.Ribbit">
                   <p:embed/>
                 </p:oleObj>
               </mc:Choice>
               <mc:Fallback>
-                <p:oleObj name="Formula" r:id="rId6" imgW="71280" imgH="119520" progId="Equation.Ribbit">
+                <p:oleObj name="Formula" r:id="rId5" imgW="533400" imgH="895350" progId="Equation.Ribbit">
                   <p:embed/>
                   <p:pic>
                     <p:nvPicPr>
-                      <p:cNvPr id="21" name="对象 20"/>
+                      <p:cNvPr id="0" name="对象 20"/>
                       <p:cNvPicPr/>
                       <p:nvPr/>
                     </p:nvPicPr>
                     <p:blipFill>
-                      <a:blip r:embed="rId7"/>
+                      <a:blip r:embed="rId6"/>
                       <a:stretch>
                         <a:fillRect/>
                       </a:stretch>
@@ -12840,23 +11854,11 @@
       </p:graphicFrame>
       <p:graphicFrame>
         <p:nvGraphicFramePr>
-          <p:cNvPr id="8" name="对象 7">
-            <a:extLst>
-              <a:ext uri="{FF2B5EF4-FFF2-40B4-BE49-F238E27FC236}">
-                <a16:creationId xmlns:a16="http://schemas.microsoft.com/office/drawing/2014/main" id="{EFE116A0-F2A1-4DE6-B85E-81F3C9035903}"/>
-              </a:ext>
-            </a:extLst>
-          </p:cNvPr>
+          <p:cNvPr id="8" name="对象 7"/>
           <p:cNvGraphicFramePr>
             <a:graphicFrameLocks noChangeAspect="1"/>
           </p:cNvGraphicFramePr>
-          <p:nvPr>
-            <p:extLst>
-              <p:ext uri="{D42A27DB-BD31-4B8C-83A1-F6EECF244321}">
-                <p14:modId xmlns:p14="http://schemas.microsoft.com/office/powerpoint/2010/main" val="1709188973"/>
-              </p:ext>
-            </p:extLst>
-          </p:nvPr>
+          <p:nvPr/>
         </p:nvGraphicFramePr>
         <p:xfrm>
           <a:off x="4118009" y="3501008"/>
@@ -12866,21 +11868,21 @@
           <a:graphicData uri="http://schemas.openxmlformats.org/presentationml/2006/ole">
             <mc:AlternateContent xmlns:mc="http://schemas.openxmlformats.org/markup-compatibility/2006">
               <mc:Choice xmlns:v="urn:schemas-microsoft-com:vml" Requires="v">
-                <p:oleObj name="Formula" r:id="rId8" imgW="444600" imgH="176760" progId="Equation.Ribbit">
+                <p:oleObj spid="_x0000_s4" name="Formula" r:id="rId7" imgW="3333750" imgH="1323975" progId="Equation.Ribbit">
                   <p:embed/>
                 </p:oleObj>
               </mc:Choice>
               <mc:Fallback>
-                <p:oleObj name="Formula" r:id="rId8" imgW="444600" imgH="176760" progId="Equation.Ribbit">
+                <p:oleObj name="Formula" r:id="rId7" imgW="3333750" imgH="1323975" progId="Equation.Ribbit">
                   <p:embed/>
                   <p:pic>
                     <p:nvPicPr>
-                      <p:cNvPr id="22" name="对象 21"/>
+                      <p:cNvPr id="0" name="对象 21"/>
                       <p:cNvPicPr/>
                       <p:nvPr/>
                     </p:nvPicPr>
                     <p:blipFill>
-                      <a:blip r:embed="rId9"/>
+                      <a:blip r:embed="rId8"/>
                       <a:stretch>
                         <a:fillRect/>
                       </a:stretch>
@@ -12903,23 +11905,11 @@
       </p:graphicFrame>
       <p:graphicFrame>
         <p:nvGraphicFramePr>
-          <p:cNvPr id="9" name="对象 8">
-            <a:extLst>
-              <a:ext uri="{FF2B5EF4-FFF2-40B4-BE49-F238E27FC236}">
-                <a16:creationId xmlns:a16="http://schemas.microsoft.com/office/drawing/2014/main" id="{D552B986-D18F-4D39-92B1-1D7EDB8887E2}"/>
-              </a:ext>
-            </a:extLst>
-          </p:cNvPr>
+          <p:cNvPr id="9" name="对象 8"/>
           <p:cNvGraphicFramePr>
             <a:graphicFrameLocks noChangeAspect="1"/>
           </p:cNvGraphicFramePr>
-          <p:nvPr>
-            <p:extLst>
-              <p:ext uri="{D42A27DB-BD31-4B8C-83A1-F6EECF244321}">
-                <p14:modId xmlns:p14="http://schemas.microsoft.com/office/powerpoint/2010/main" val="2823164089"/>
-              </p:ext>
-            </p:extLst>
-          </p:nvPr>
+          <p:nvPr/>
         </p:nvGraphicFramePr>
         <p:xfrm>
           <a:off x="7452320" y="3501008"/>
@@ -12929,21 +11919,21 @@
           <a:graphicData uri="http://schemas.openxmlformats.org/presentationml/2006/ole">
             <mc:AlternateContent xmlns:mc="http://schemas.openxmlformats.org/markup-compatibility/2006">
               <mc:Choice xmlns:v="urn:schemas-microsoft-com:vml" Requires="v">
-                <p:oleObj name="Formula" r:id="rId4" imgW="505800" imgH="177840" progId="Equation.Ribbit">
+                <p:oleObj spid="_x0000_s10" name="Formula" r:id="rId9" imgW="3790950" imgH="1333500" progId="Equation.Ribbit">
                   <p:embed/>
                 </p:oleObj>
               </mc:Choice>
               <mc:Fallback>
-                <p:oleObj name="Formula" r:id="rId4" imgW="505800" imgH="177840" progId="Equation.Ribbit">
+                <p:oleObj name="Formula" r:id="rId9" imgW="3790950" imgH="1333500" progId="Equation.Ribbit">
                   <p:embed/>
                   <p:pic>
                     <p:nvPicPr>
-                      <p:cNvPr id="23" name="对象 22"/>
+                      <p:cNvPr id="0" name="对象 22"/>
                       <p:cNvPicPr/>
                       <p:nvPr/>
                     </p:nvPicPr>
                     <p:blipFill>
-                      <a:blip r:embed="rId5"/>
+                      <a:blip r:embed="rId4"/>
                       <a:stretch>
                         <a:fillRect/>
                       </a:stretch>
@@ -12966,23 +11956,11 @@
       </p:graphicFrame>
       <p:graphicFrame>
         <p:nvGraphicFramePr>
-          <p:cNvPr id="10" name="对象 9">
-            <a:extLst>
-              <a:ext uri="{FF2B5EF4-FFF2-40B4-BE49-F238E27FC236}">
-                <a16:creationId xmlns:a16="http://schemas.microsoft.com/office/drawing/2014/main" id="{531842E4-5311-4E3F-A0E5-91D5ABDAD8B3}"/>
-              </a:ext>
-            </a:extLst>
-          </p:cNvPr>
+          <p:cNvPr id="11" name="对象 10"/>
           <p:cNvGraphicFramePr>
             <a:graphicFrameLocks noChangeAspect="1"/>
           </p:cNvGraphicFramePr>
-          <p:nvPr>
-            <p:extLst>
-              <p:ext uri="{D42A27DB-BD31-4B8C-83A1-F6EECF244321}">
-                <p14:modId xmlns:p14="http://schemas.microsoft.com/office/powerpoint/2010/main" val="3861568209"/>
-              </p:ext>
-            </p:extLst>
-          </p:nvPr>
+          <p:nvPr/>
         </p:nvGraphicFramePr>
         <p:xfrm>
           <a:off x="3635896" y="3936551"/>
@@ -12992,16 +11970,16 @@
           <a:graphicData uri="http://schemas.openxmlformats.org/presentationml/2006/ole">
             <mc:AlternateContent xmlns:mc="http://schemas.openxmlformats.org/markup-compatibility/2006">
               <mc:Choice xmlns:v="urn:schemas-microsoft-com:vml" Requires="v">
-                <p:oleObj name="Formula" r:id="rId10" imgW="1543320" imgH="382320" progId="Equation.Ribbit">
+                <p:oleObj spid="_x0000_s12" name="Formula" r:id="rId10" imgW="11572875" imgH="2867025" progId="Equation.Ribbit">
                   <p:embed/>
                 </p:oleObj>
               </mc:Choice>
               <mc:Fallback>
-                <p:oleObj name="Formula" r:id="rId10" imgW="1543320" imgH="382320" progId="Equation.Ribbit">
+                <p:oleObj name="Formula" r:id="rId10" imgW="11572875" imgH="2867025" progId="Equation.Ribbit">
                   <p:embed/>
                   <p:pic>
                     <p:nvPicPr>
-                      <p:cNvPr id="21" name="对象 20"/>
+                      <p:cNvPr id="0" name="对象 20"/>
                       <p:cNvPicPr/>
                       <p:nvPr/>
                     </p:nvPicPr>
@@ -13029,7 +12007,7 @@
       </p:graphicFrame>
       <p:pic>
         <p:nvPicPr>
-          <p:cNvPr id="2" name="图片 1"/>
+          <p:cNvPr id="13" name="图片 12"/>
           <p:cNvPicPr>
             <a:picLocks noChangeAspect="1"/>
           </p:cNvPicPr>
@@ -13052,11 +12030,6 @@
         </p:spPr>
       </p:pic>
     </p:spTree>
-    <p:extLst>
-      <p:ext uri="{BB962C8B-B14F-4D97-AF65-F5344CB8AC3E}">
-        <p14:creationId xmlns:p14="http://schemas.microsoft.com/office/powerpoint/2010/main" val="1275269740"/>
-      </p:ext>
-    </p:extLst>
   </p:cSld>
   <p:clrMapOvr>
     <a:masterClrMapping/>
@@ -13071,13 +12044,13 @@
               <p:cTn id="2" dur="indefinite" nodeType="mainSeq">
                 <p:childTnLst>
                   <p:par>
-                    <p:cTn id="3" fill="hold" nodeType="clickPar">
+                    <p:cTn id="3" fill="hold">
                       <p:stCondLst>
                         <p:cond delay="indefinite"/>
                       </p:stCondLst>
                       <p:childTnLst>
                         <p:par>
-                          <p:cTn id="4" fill="hold" nodeType="withGroup">
+                          <p:cTn id="4" fill="hold">
                             <p:stCondLst>
                               <p:cond delay="0"/>
                             </p:stCondLst>
@@ -13178,13 +12151,7 @@
       </p:grpSpPr>
       <p:sp>
         <p:nvSpPr>
-          <p:cNvPr id="3" name="内容占位符 2">
-            <a:extLst>
-              <a:ext uri="{FF2B5EF4-FFF2-40B4-BE49-F238E27FC236}">
-                <a16:creationId xmlns:a16="http://schemas.microsoft.com/office/drawing/2014/main" id="{A303477E-A237-4894-86ED-EA77CDD73745}"/>
-              </a:ext>
-            </a:extLst>
-          </p:cNvPr>
+          <p:cNvPr id="3" name="内容占位符 2"/>
           <p:cNvSpPr>
             <a:spLocks noGrp="1"/>
           </p:cNvSpPr>
@@ -13254,6 +12221,10 @@
               </a:rPr>
               <a:t>。假定来了一位新患者，其化验结果为阳性。利用贝叶斯法则计算该患者患此疾病的概率有多大？</a:t>
             </a:r>
+            <a:endParaRPr lang="zh-CN" altLang="en-US" sz="2400" dirty="0">
+              <a:latin typeface="楷体" panose="02010609060101010101" pitchFamily="49" charset="-122"/>
+              <a:ea typeface="楷体" panose="02010609060101010101" pitchFamily="49" charset="-122"/>
+            </a:endParaRPr>
           </a:p>
         </p:txBody>
       </p:sp>
@@ -13266,7 +12237,7 @@
           <p:nvPr/>
         </p:nvPicPr>
         <p:blipFill>
-          <a:blip r:embed="rId2"/>
+          <a:blip r:embed="rId1"/>
           <a:stretch>
             <a:fillRect/>
           </a:stretch>
@@ -13282,11 +12253,6 @@
         </p:spPr>
       </p:pic>
     </p:spTree>
-    <p:extLst>
-      <p:ext uri="{BB962C8B-B14F-4D97-AF65-F5344CB8AC3E}">
-        <p14:creationId xmlns:p14="http://schemas.microsoft.com/office/powerpoint/2010/main" val="826215254"/>
-      </p:ext>
-    </p:extLst>
   </p:cSld>
   <p:clrMapOvr>
     <a:masterClrMapping/>
@@ -13395,7 +12361,7 @@
           <p:nvPr/>
         </p:nvPicPr>
         <p:blipFill>
-          <a:blip r:embed="rId2"/>
+          <a:blip r:embed="rId1"/>
           <a:stretch>
             <a:fillRect/>
           </a:stretch>
@@ -13412,20 +12378,14 @@
       </p:pic>
       <p:pic>
         <p:nvPicPr>
-          <p:cNvPr id="6" name="图片 5">
-            <a:extLst>
-              <a:ext uri="{FF2B5EF4-FFF2-40B4-BE49-F238E27FC236}">
-                <a16:creationId xmlns:a16="http://schemas.microsoft.com/office/drawing/2014/main" id="{A719B10E-3693-46FD-BE07-C955AAC15438}"/>
-              </a:ext>
-            </a:extLst>
-          </p:cNvPr>
+          <p:cNvPr id="6" name="图片 5"/>
           <p:cNvPicPr>
             <a:picLocks noChangeAspect="1"/>
           </p:cNvPicPr>
           <p:nvPr/>
         </p:nvPicPr>
         <p:blipFill>
-          <a:blip r:embed="rId3"/>
+          <a:blip r:embed="rId2"/>
           <a:stretch>
             <a:fillRect/>
           </a:stretch>
@@ -13449,7 +12409,7 @@
           <p:nvPr/>
         </p:nvPicPr>
         <p:blipFill>
-          <a:blip r:embed="rId4"/>
+          <a:blip r:embed="rId3"/>
           <a:stretch>
             <a:fillRect/>
           </a:stretch>
@@ -13470,13 +12430,7 @@
           <p:cNvGraphicFramePr>
             <a:graphicFrameLocks noChangeAspect="1"/>
           </p:cNvGraphicFramePr>
-          <p:nvPr>
-            <p:extLst>
-              <p:ext uri="{D42A27DB-BD31-4B8C-83A1-F6EECF244321}">
-                <p14:modId xmlns:p14="http://schemas.microsoft.com/office/powerpoint/2010/main" val="3933501538"/>
-              </p:ext>
-            </p:extLst>
-          </p:nvPr>
+          <p:nvPr/>
         </p:nvGraphicFramePr>
         <p:xfrm>
           <a:off x="971600" y="4460395"/>
@@ -13486,21 +12440,21 @@
           <a:graphicData uri="http://schemas.openxmlformats.org/presentationml/2006/ole">
             <mc:AlternateContent xmlns:mc="http://schemas.openxmlformats.org/markup-compatibility/2006">
               <mc:Choice xmlns:v="urn:schemas-microsoft-com:vml" Requires="v">
-                <p:oleObj name="Formula" r:id="rId5" imgW="2173320" imgH="463680" progId="Equation.Ribbit">
+                <p:oleObj spid="_x0000_s27941" name="Formula" r:id="rId4" imgW="16297275" imgH="3476625" progId="Equation.Ribbit">
                   <p:embed/>
                 </p:oleObj>
               </mc:Choice>
               <mc:Fallback>
-                <p:oleObj name="Formula" r:id="rId5" imgW="2173320" imgH="463680" progId="Equation.Ribbit">
+                <p:oleObj name="Formula" r:id="rId4" imgW="16297275" imgH="3476625" progId="Equation.Ribbit">
                   <p:embed/>
                   <p:pic>
                     <p:nvPicPr>
-                      <p:cNvPr id="10" name="对象 9"/>
+                      <p:cNvPr id="0" name="对象 9"/>
                       <p:cNvPicPr/>
                       <p:nvPr/>
                     </p:nvPicPr>
                     <p:blipFill>
-                      <a:blip r:embed="rId6"/>
+                      <a:blip r:embed="rId5"/>
                       <a:stretch>
                         <a:fillRect/>
                       </a:stretch>
@@ -13530,9 +12484,11 @@
           <p:nvPr/>
         </p:nvPicPr>
         <p:blipFill rotWithShape="1">
-          <a:blip r:embed="rId7"/>
+          <a:blip r:embed="rId6"/>
           <a:srcRect t="1" b="45990"/>
-          <a:stretch/>
+          <a:stretch>
+            <a:fillRect/>
+          </a:stretch>
         </p:blipFill>
         <p:spPr>
           <a:xfrm>
@@ -13546,22 +12502,18 @@
       </p:pic>
       <p:pic>
         <p:nvPicPr>
-          <p:cNvPr id="10" name="图片 9">
-            <a:extLst>
-              <a:ext uri="{FF2B5EF4-FFF2-40B4-BE49-F238E27FC236}">
-                <a16:creationId xmlns:a16="http://schemas.microsoft.com/office/drawing/2014/main" id="{8C38D148-C6D1-421E-B652-168895F9FFB2}"/>
-              </a:ext>
-            </a:extLst>
-          </p:cNvPr>
+          <p:cNvPr id="10" name="图片 9"/>
           <p:cNvPicPr>
             <a:picLocks noChangeAspect="1"/>
           </p:cNvPicPr>
           <p:nvPr/>
         </p:nvPicPr>
         <p:blipFill rotWithShape="1">
-          <a:blip r:embed="rId7"/>
+          <a:blip r:embed="rId6"/>
           <a:srcRect t="54466"/>
-          <a:stretch/>
+          <a:stretch>
+            <a:fillRect/>
+          </a:stretch>
         </p:blipFill>
         <p:spPr>
           <a:xfrm>
@@ -13582,7 +12534,7 @@
           <p:nvPr/>
         </p:nvPicPr>
         <p:blipFill>
-          <a:blip r:embed="rId8"/>
+          <a:blip r:embed="rId7"/>
           <a:stretch>
             <a:fillRect/>
           </a:stretch>
@@ -13598,11 +12550,6 @@
         </p:spPr>
       </p:pic>
     </p:spTree>
-    <p:extLst>
-      <p:ext uri="{BB962C8B-B14F-4D97-AF65-F5344CB8AC3E}">
-        <p14:creationId xmlns:p14="http://schemas.microsoft.com/office/powerpoint/2010/main" val="3747657783"/>
-      </p:ext>
-    </p:extLst>
   </p:cSld>
   <p:clrMapOvr>
     <a:masterClrMapping/>
@@ -13839,13 +12786,7 @@
       </p:grpSpPr>
       <p:sp>
         <p:nvSpPr>
-          <p:cNvPr id="18434" name="灯片编号占位符 5">
-            <a:extLst>
-              <a:ext uri="{FF2B5EF4-FFF2-40B4-BE49-F238E27FC236}">
-                <a16:creationId xmlns:a16="http://schemas.microsoft.com/office/drawing/2014/main" id="{CBBD9809-2CC4-42C3-B564-FAC6896E7580}"/>
-              </a:ext>
-            </a:extLst>
-          </p:cNvPr>
+          <p:cNvPr id="18434" name="灯片编号占位符 5"/>
           <p:cNvSpPr>
             <a:spLocks noGrp="1"/>
           </p:cNvSpPr>
@@ -14032,7 +12973,6 @@
               <a:buSzTx/>
               <a:buFontTx/>
               <a:buNone/>
-              <a:tabLst/>
               <a:defRPr/>
             </a:pPr>
             <a:fld id="{F12A9DEA-C3F6-4401-A5BF-3745117890AB}" type="slidenum">
@@ -14050,24 +12990,6 @@
                 <a:ea typeface="宋体" panose="02010600030101010101" pitchFamily="2" charset="-122"/>
                 <a:cs typeface="+mn-cs"/>
               </a:rPr>
-              <a:pPr marL="0" marR="0" lvl="0" indent="0" algn="r" defTabSz="914400" rtl="0" eaLnBrk="1" fontAlgn="base" latinLnBrk="0" hangingPunct="1">
-                <a:lnSpc>
-                  <a:spcPct val="100000"/>
-                </a:lnSpc>
-                <a:spcBef>
-                  <a:spcPct val="0"/>
-                </a:spcBef>
-                <a:spcAft>
-                  <a:spcPct val="0"/>
-                </a:spcAft>
-                <a:buClrTx/>
-                <a:buSzTx/>
-                <a:buFontTx/>
-                <a:buNone/>
-                <a:tabLst/>
-                <a:defRPr/>
-              </a:pPr>
-              <a:t>16</a:t>
             </a:fld>
             <a:endParaRPr kumimoji="1" lang="en-US" altLang="zh-CN" sz="1400" b="0" i="0" u="none" strike="noStrike" kern="1200" cap="none" spc="0" normalizeH="0" baseline="0" noProof="0">
               <a:ln>
@@ -14088,13 +13010,7 @@
       </p:sp>
       <p:sp>
         <p:nvSpPr>
-          <p:cNvPr id="887811" name="Rectangle 3">
-            <a:extLst>
-              <a:ext uri="{FF2B5EF4-FFF2-40B4-BE49-F238E27FC236}">
-                <a16:creationId xmlns:a16="http://schemas.microsoft.com/office/drawing/2014/main" id="{E67925BF-BD9D-4849-975B-B00461AA9122}"/>
-              </a:ext>
-            </a:extLst>
-          </p:cNvPr>
+          <p:cNvPr id="887811" name="Rectangle 3"/>
           <p:cNvSpPr>
             <a:spLocks noGrp="1"/>
           </p:cNvSpPr>
@@ -14481,6 +13397,11 @@
               </a:rPr>
               <a:t>数据样本扰动、输入属性扰动、输出表示扰动、算法参数扰动</a:t>
             </a:r>
+            <a:endParaRPr lang="zh-CN" altLang="en-US" sz="2400" dirty="0">
+              <a:latin typeface="Times New Roman" panose="02020603050405020304" pitchFamily="18" charset="0"/>
+              <a:ea typeface="楷体" panose="02010609060101010101" pitchFamily="49" charset="-122"/>
+              <a:cs typeface="Times New Roman" panose="02020603050405020304" pitchFamily="18" charset="0"/>
+            </a:endParaRPr>
           </a:p>
           <a:p>
             <a:pPr marL="457200" lvl="1" indent="0" eaLnBrk="1" hangingPunct="1">
@@ -14563,13 +13484,7 @@
       </p:sp>
       <p:sp>
         <p:nvSpPr>
-          <p:cNvPr id="18436" name="Text Box 4">
-            <a:extLst>
-              <a:ext uri="{FF2B5EF4-FFF2-40B4-BE49-F238E27FC236}">
-                <a16:creationId xmlns:a16="http://schemas.microsoft.com/office/drawing/2014/main" id="{EB81EA09-BA58-4C02-A7E1-E64004DF3351}"/>
-              </a:ext>
-            </a:extLst>
-          </p:cNvPr>
+          <p:cNvPr id="18436" name="Text Box 4"/>
           <p:cNvSpPr txBox="1">
             <a:spLocks noChangeArrowheads="1"/>
           </p:cNvSpPr>
@@ -14776,7 +13691,6 @@
               <a:buSzTx/>
               <a:buFontTx/>
               <a:buNone/>
-              <a:tabLst/>
               <a:defRPr/>
             </a:pPr>
             <a:r>
@@ -14830,15 +13744,24 @@
               </a:rPr>
               <a:t>章：集成学习</a:t>
             </a:r>
+            <a:endParaRPr kumimoji="1" lang="zh-CN" altLang="en-US" sz="3200" b="1" i="0" u="none" strike="noStrike" kern="1200" cap="none" spc="0" normalizeH="0" baseline="0" noProof="0" dirty="0">
+              <a:ln>
+                <a:noFill/>
+              </a:ln>
+              <a:solidFill>
+                <a:prstClr val="black"/>
+              </a:solidFill>
+              <a:effectLst/>
+              <a:uLnTx/>
+              <a:uFillTx/>
+              <a:latin typeface="黑体" panose="02010609060101010101" pitchFamily="49" charset="-122"/>
+              <a:ea typeface="黑体" panose="02010609060101010101" pitchFamily="49" charset="-122"/>
+              <a:cs typeface="楷体_GB2312"/>
+            </a:endParaRPr>
           </a:p>
         </p:txBody>
       </p:sp>
     </p:spTree>
-    <p:extLst>
-      <p:ext uri="{BB962C8B-B14F-4D97-AF65-F5344CB8AC3E}">
-        <p14:creationId xmlns:p14="http://schemas.microsoft.com/office/powerpoint/2010/main" val="1561591582"/>
-      </p:ext>
-    </p:extLst>
   </p:cSld>
   <p:clrMapOvr>
     <a:masterClrMapping/>
@@ -14853,13 +13776,13 @@
               <p:cTn id="2" dur="indefinite" nodeType="mainSeq">
                 <p:childTnLst>
                   <p:par>
-                    <p:cTn id="3" fill="hold" nodeType="clickPar">
+                    <p:cTn id="3" fill="hold">
                       <p:stCondLst>
                         <p:cond delay="indefinite"/>
                       </p:stCondLst>
                       <p:childTnLst>
                         <p:par>
-                          <p:cTn id="4" fill="hold" nodeType="withGroup">
+                          <p:cTn id="4" fill="hold">
                             <p:stCondLst>
                               <p:cond delay="0"/>
                             </p:stCondLst>
@@ -14967,7 +13890,7 @@
           <p:nvPr/>
         </p:nvPicPr>
         <p:blipFill>
-          <a:blip r:embed="rId2"/>
+          <a:blip r:embed="rId1"/>
           <a:stretch>
             <a:fillRect/>
           </a:stretch>
@@ -15030,7 +13953,7 @@
           <p:nvPr/>
         </p:nvPicPr>
         <p:blipFill>
-          <a:blip r:embed="rId3"/>
+          <a:blip r:embed="rId2"/>
           <a:stretch>
             <a:fillRect/>
           </a:stretch>
@@ -15085,11 +14008,6 @@
         </p:txBody>
       </p:sp>
     </p:spTree>
-    <p:extLst>
-      <p:ext uri="{BB962C8B-B14F-4D97-AF65-F5344CB8AC3E}">
-        <p14:creationId xmlns:p14="http://schemas.microsoft.com/office/powerpoint/2010/main" val="1307462400"/>
-      </p:ext>
-    </p:extLst>
   </p:cSld>
   <p:clrMapOvr>
     <a:masterClrMapping/>
@@ -15116,13 +14034,7 @@
       </p:grpSpPr>
       <p:sp>
         <p:nvSpPr>
-          <p:cNvPr id="18434" name="灯片编号占位符 5">
-            <a:extLst>
-              <a:ext uri="{FF2B5EF4-FFF2-40B4-BE49-F238E27FC236}">
-                <a16:creationId xmlns:a16="http://schemas.microsoft.com/office/drawing/2014/main" id="{CBBD9809-2CC4-42C3-B564-FAC6896E7580}"/>
-              </a:ext>
-            </a:extLst>
-          </p:cNvPr>
+          <p:cNvPr id="18434" name="灯片编号占位符 5"/>
           <p:cNvSpPr>
             <a:spLocks noGrp="1"/>
           </p:cNvSpPr>
@@ -15309,7 +14221,6 @@
               <a:buSzTx/>
               <a:buFontTx/>
               <a:buNone/>
-              <a:tabLst/>
               <a:defRPr/>
             </a:pPr>
             <a:fld id="{F12A9DEA-C3F6-4401-A5BF-3745117890AB}" type="slidenum">
@@ -15327,24 +14238,6 @@
                 <a:ea typeface="宋体" panose="02010600030101010101" pitchFamily="2" charset="-122"/>
                 <a:cs typeface="+mn-cs"/>
               </a:rPr>
-              <a:pPr marL="0" marR="0" lvl="0" indent="0" algn="r" defTabSz="914400" rtl="0" eaLnBrk="1" fontAlgn="base" latinLnBrk="0" hangingPunct="1">
-                <a:lnSpc>
-                  <a:spcPct val="100000"/>
-                </a:lnSpc>
-                <a:spcBef>
-                  <a:spcPct val="0"/>
-                </a:spcBef>
-                <a:spcAft>
-                  <a:spcPct val="0"/>
-                </a:spcAft>
-                <a:buClrTx/>
-                <a:buSzTx/>
-                <a:buFontTx/>
-                <a:buNone/>
-                <a:tabLst/>
-                <a:defRPr/>
-              </a:pPr>
-              <a:t>18</a:t>
             </a:fld>
             <a:endParaRPr kumimoji="1" lang="en-US" altLang="zh-CN" sz="1400" b="0" i="0" u="none" strike="noStrike" kern="1200" cap="none" spc="0" normalizeH="0" baseline="0" noProof="0">
               <a:ln>
@@ -15365,13 +14258,7 @@
       </p:sp>
       <p:sp>
         <p:nvSpPr>
-          <p:cNvPr id="887811" name="Rectangle 3">
-            <a:extLst>
-              <a:ext uri="{FF2B5EF4-FFF2-40B4-BE49-F238E27FC236}">
-                <a16:creationId xmlns:a16="http://schemas.microsoft.com/office/drawing/2014/main" id="{E67925BF-BD9D-4849-975B-B00461AA9122}"/>
-              </a:ext>
-            </a:extLst>
-          </p:cNvPr>
+          <p:cNvPr id="887811" name="Rectangle 3"/>
           <p:cNvSpPr>
             <a:spLocks noGrp="1"/>
           </p:cNvSpPr>
@@ -15570,6 +14457,11 @@
               </a:rPr>
               <a:t>DBSCAN</a:t>
             </a:r>
+            <a:endParaRPr lang="en-US" altLang="zh-CN" sz="2800" dirty="0">
+              <a:latin typeface="Times New Roman" panose="02020603050405020304" pitchFamily="18" charset="0"/>
+              <a:ea typeface="楷体" panose="02010609060101010101" pitchFamily="49" charset="-122"/>
+              <a:cs typeface="Times New Roman" panose="02020603050405020304" pitchFamily="18" charset="0"/>
+            </a:endParaRPr>
           </a:p>
           <a:p>
             <a:pPr eaLnBrk="1" hangingPunct="1">
@@ -15729,13 +14621,7 @@
       </p:sp>
       <p:sp>
         <p:nvSpPr>
-          <p:cNvPr id="18436" name="Text Box 4">
-            <a:extLst>
-              <a:ext uri="{FF2B5EF4-FFF2-40B4-BE49-F238E27FC236}">
-                <a16:creationId xmlns:a16="http://schemas.microsoft.com/office/drawing/2014/main" id="{EB81EA09-BA58-4C02-A7E1-E64004DF3351}"/>
-              </a:ext>
-            </a:extLst>
-          </p:cNvPr>
+          <p:cNvPr id="18436" name="Text Box 4"/>
           <p:cNvSpPr txBox="1">
             <a:spLocks noChangeArrowheads="1"/>
           </p:cNvSpPr>
@@ -15942,7 +14828,6 @@
               <a:buSzTx/>
               <a:buFontTx/>
               <a:buNone/>
-              <a:tabLst/>
               <a:defRPr/>
             </a:pPr>
             <a:r>
@@ -15996,15 +14881,24 @@
               </a:rPr>
               <a:t>章：聚类</a:t>
             </a:r>
+            <a:endParaRPr kumimoji="1" lang="zh-CN" altLang="en-US" sz="3200" b="1" i="0" u="none" strike="noStrike" kern="1200" cap="none" spc="0" normalizeH="0" baseline="0" noProof="0" dirty="0">
+              <a:ln>
+                <a:noFill/>
+              </a:ln>
+              <a:solidFill>
+                <a:prstClr val="black"/>
+              </a:solidFill>
+              <a:effectLst/>
+              <a:uLnTx/>
+              <a:uFillTx/>
+              <a:latin typeface="黑体" panose="02010609060101010101" pitchFamily="49" charset="-122"/>
+              <a:ea typeface="黑体" panose="02010609060101010101" pitchFamily="49" charset="-122"/>
+              <a:cs typeface="楷体_GB2312"/>
+            </a:endParaRPr>
           </a:p>
         </p:txBody>
       </p:sp>
     </p:spTree>
-    <p:extLst>
-      <p:ext uri="{BB962C8B-B14F-4D97-AF65-F5344CB8AC3E}">
-        <p14:creationId xmlns:p14="http://schemas.microsoft.com/office/powerpoint/2010/main" val="1993512533"/>
-      </p:ext>
-    </p:extLst>
   </p:cSld>
   <p:clrMapOvr>
     <a:masterClrMapping/>
@@ -16019,13 +14913,13 @@
               <p:cTn id="2" dur="indefinite" nodeType="mainSeq">
                 <p:childTnLst>
                   <p:par>
-                    <p:cTn id="3" fill="hold" nodeType="clickPar">
+                    <p:cTn id="3" fill="hold">
                       <p:stCondLst>
                         <p:cond delay="indefinite"/>
                       </p:stCondLst>
                       <p:childTnLst>
                         <p:par>
-                          <p:cTn id="4" fill="hold" nodeType="withGroup">
+                          <p:cTn id="4" fill="hold">
                             <p:stCondLst>
                               <p:cond delay="0"/>
                             </p:stCondLst>
@@ -16133,7 +15027,7 @@
           <p:nvPr/>
         </p:nvPicPr>
         <p:blipFill>
-          <a:blip r:embed="rId2" cstate="print"/>
+          <a:blip r:embed="rId1" cstate="print"/>
           <a:srcRect/>
           <a:stretch>
             <a:fillRect/>
@@ -16151,11 +15045,6 @@
         </p:spPr>
       </p:pic>
     </p:spTree>
-    <p:extLst>
-      <p:ext uri="{BB962C8B-B14F-4D97-AF65-F5344CB8AC3E}">
-        <p14:creationId xmlns:p14="http://schemas.microsoft.com/office/powerpoint/2010/main" val="1034560743"/>
-      </p:ext>
-    </p:extLst>
   </p:cSld>
   <p:clrMapOvr>
     <a:masterClrMapping/>
@@ -16182,13 +15071,7 @@
       </p:grpSpPr>
       <p:sp>
         <p:nvSpPr>
-          <p:cNvPr id="11266" name="灯片编号占位符 4">
-            <a:extLst>
-              <a:ext uri="{FF2B5EF4-FFF2-40B4-BE49-F238E27FC236}">
-                <a16:creationId xmlns:a16="http://schemas.microsoft.com/office/drawing/2014/main" id="{D3A026C4-F7B3-455D-8409-EE800BAFF169}"/>
-              </a:ext>
-            </a:extLst>
-          </p:cNvPr>
+          <p:cNvPr id="11266" name="灯片编号占位符 4"/>
           <p:cNvSpPr>
             <a:spLocks noGrp="1"/>
           </p:cNvSpPr>
@@ -16372,14 +15255,6 @@
               <a:rPr kumimoji="1" lang="en-US" altLang="zh-CN" sz="1400" smtClean="0">
                 <a:latin typeface="Times New Roman" panose="02020603050405020304" pitchFamily="18" charset="0"/>
               </a:rPr>
-              <a:pPr>
-                <a:spcBef>
-                  <a:spcPct val="0"/>
-                </a:spcBef>
-                <a:buFontTx/>
-                <a:buNone/>
-              </a:pPr>
-              <a:t>2</a:t>
             </a:fld>
             <a:endParaRPr kumimoji="1" lang="en-US" altLang="zh-CN" sz="1400">
               <a:latin typeface="Times New Roman" panose="02020603050405020304" pitchFamily="18" charset="0"/>
@@ -16389,13 +15264,7 @@
       </p:sp>
       <p:sp>
         <p:nvSpPr>
-          <p:cNvPr id="11267" name="Text Box 3">
-            <a:extLst>
-              <a:ext uri="{FF2B5EF4-FFF2-40B4-BE49-F238E27FC236}">
-                <a16:creationId xmlns:a16="http://schemas.microsoft.com/office/drawing/2014/main" id="{A797628E-D641-41DC-8511-3686F1781188}"/>
-              </a:ext>
-            </a:extLst>
-          </p:cNvPr>
+          <p:cNvPr id="11267" name="Text Box 3"/>
           <p:cNvSpPr txBox="1">
             <a:spLocks noChangeArrowheads="1"/>
           </p:cNvSpPr>
@@ -16614,13 +15483,7 @@
       </p:sp>
       <p:sp>
         <p:nvSpPr>
-          <p:cNvPr id="11268" name="Text Box 4">
-            <a:extLst>
-              <a:ext uri="{FF2B5EF4-FFF2-40B4-BE49-F238E27FC236}">
-                <a16:creationId xmlns:a16="http://schemas.microsoft.com/office/drawing/2014/main" id="{DF0FB2B5-927B-4658-9A3C-3FAF765B2E43}"/>
-              </a:ext>
-            </a:extLst>
-          </p:cNvPr>
+          <p:cNvPr id="11268" name="Text Box 4"/>
           <p:cNvSpPr txBox="1">
             <a:spLocks noChangeArrowheads="1"/>
           </p:cNvSpPr>
@@ -16830,6 +15693,10 @@
               </a:rPr>
               <a:t>成绩构成</a:t>
             </a:r>
+            <a:endParaRPr kumimoji="1" lang="zh-CN" altLang="en-US" sz="2800" b="1" dirty="0">
+              <a:latin typeface="楷体" panose="02010609060101010101" pitchFamily="49" charset="-122"/>
+              <a:ea typeface="楷体" panose="02010609060101010101" pitchFamily="49" charset="-122"/>
+            </a:endParaRPr>
           </a:p>
           <a:p>
             <a:pPr eaLnBrk="1" hangingPunct="1">
@@ -17027,23 +15894,11 @@
       </p:sp>
       <p:graphicFrame>
         <p:nvGraphicFramePr>
-          <p:cNvPr id="2" name="表格 1">
-            <a:extLst>
-              <a:ext uri="{FF2B5EF4-FFF2-40B4-BE49-F238E27FC236}">
-                <a16:creationId xmlns:a16="http://schemas.microsoft.com/office/drawing/2014/main" id="{F6E6ABA9-571D-4985-BA5B-A623CC43F9E5}"/>
-              </a:ext>
-            </a:extLst>
-          </p:cNvPr>
+          <p:cNvPr id="2" name="表格 1"/>
           <p:cNvGraphicFramePr>
             <a:graphicFrameLocks noGrp="1"/>
           </p:cNvGraphicFramePr>
-          <p:nvPr>
-            <p:extLst>
-              <p:ext uri="{D42A27DB-BD31-4B8C-83A1-F6EECF244321}">
-                <p14:modId xmlns:p14="http://schemas.microsoft.com/office/powerpoint/2010/main" val="2576040134"/>
-              </p:ext>
-            </p:extLst>
-          </p:nvPr>
+          <p:nvPr/>
         </p:nvGraphicFramePr>
         <p:xfrm>
           <a:off x="930275" y="1924050"/>
@@ -17056,27 +15911,9 @@
                 <a:tableStyleId>{5C22544A-7EE6-4342-B048-85BDC9FD1C3A}</a:tableStyleId>
               </a:tblPr>
               <a:tblGrid>
-                <a:gridCol w="2547428">
-                  <a:extLst>
-                    <a:ext uri="{9D8B030D-6E8A-4147-A177-3AD203B41FA5}">
-                      <a16:colId xmlns:a16="http://schemas.microsoft.com/office/drawing/2014/main" val="20000"/>
-                    </a:ext>
-                  </a:extLst>
-                </a:gridCol>
-                <a:gridCol w="2925800">
-                  <a:extLst>
-                    <a:ext uri="{9D8B030D-6E8A-4147-A177-3AD203B41FA5}">
-                      <a16:colId xmlns:a16="http://schemas.microsoft.com/office/drawing/2014/main" val="20001"/>
-                    </a:ext>
-                  </a:extLst>
-                </a:gridCol>
-                <a:gridCol w="2170584">
-                  <a:extLst>
-                    <a:ext uri="{9D8B030D-6E8A-4147-A177-3AD203B41FA5}">
-                      <a16:colId xmlns:a16="http://schemas.microsoft.com/office/drawing/2014/main" val="20002"/>
-                    </a:ext>
-                  </a:extLst>
-                </a:gridCol>
+                <a:gridCol w="2547428"/>
+                <a:gridCol w="2925800"/>
+                <a:gridCol w="2170584"/>
               </a:tblGrid>
               <a:tr h="600221">
                 <a:tc>
@@ -17100,6 +15937,11 @@
                         </a:rPr>
                         <a:t>考核方式</a:t>
                       </a:r>
+                      <a:endParaRPr lang="zh-CN" sz="2200" kern="100" dirty="0">
+                        <a:effectLst/>
+                        <a:latin typeface="楷体" panose="02010609060101010101" pitchFamily="49" charset="-122"/>
+                        <a:ea typeface="楷体" panose="02010609060101010101" pitchFamily="49" charset="-122"/>
+                      </a:endParaRPr>
                     </a:p>
                   </a:txBody>
                   <a:tcPr marL="68594" marR="68594" marT="0" marB="0"/>
@@ -17125,6 +15967,11 @@
                         </a:rPr>
                         <a:t>总分</a:t>
                       </a:r>
+                      <a:endParaRPr lang="zh-CN" sz="2200" kern="100" dirty="0">
+                        <a:effectLst/>
+                        <a:latin typeface="楷体" panose="02010609060101010101" pitchFamily="49" charset="-122"/>
+                        <a:ea typeface="楷体" panose="02010609060101010101" pitchFamily="49" charset="-122"/>
+                      </a:endParaRPr>
                     </a:p>
                   </a:txBody>
                   <a:tcPr marL="68594" marR="68594" marT="0" marB="0"/>
@@ -17150,15 +15997,15 @@
                         </a:rPr>
                         <a:t>占总成绩的比例</a:t>
                       </a:r>
+                      <a:endParaRPr lang="zh-CN" sz="2200" kern="100" dirty="0">
+                        <a:effectLst/>
+                        <a:latin typeface="楷体" panose="02010609060101010101" pitchFamily="49" charset="-122"/>
+                        <a:ea typeface="楷体" panose="02010609060101010101" pitchFamily="49" charset="-122"/>
+                      </a:endParaRPr>
                     </a:p>
                   </a:txBody>
                   <a:tcPr marL="68594" marR="68594" marT="0" marB="0"/>
                 </a:tc>
-                <a:extLst>
-                  <a:ext uri="{0D108BD9-81ED-4DB2-BD59-A6C34878D82A}">
-                    <a16:rowId xmlns:a16="http://schemas.microsoft.com/office/drawing/2014/main" val="10000"/>
-                  </a:ext>
-                </a:extLst>
               </a:tr>
               <a:tr h="637736">
                 <a:tc>
@@ -17200,6 +16047,11 @@
                         </a:rPr>
                         <a:t>课堂教学</a:t>
                       </a:r>
+                      <a:endParaRPr lang="zh-CN" sz="2200" kern="100">
+                        <a:effectLst/>
+                        <a:latin typeface="楷体" panose="02010609060101010101" pitchFamily="49" charset="-122"/>
+                        <a:ea typeface="楷体" panose="02010609060101010101" pitchFamily="49" charset="-122"/>
+                      </a:endParaRPr>
                     </a:p>
                   </a:txBody>
                   <a:tcPr marL="68594" marR="68594" marT="0" marB="0"/>
@@ -17235,6 +16087,12 @@
                         </a:rPr>
                         <a:t>分</a:t>
                       </a:r>
+                      <a:endParaRPr lang="zh-CN" sz="2200" kern="100" dirty="0">
+                        <a:effectLst/>
+                        <a:latin typeface="Times New Roman" panose="02020603050405020304" pitchFamily="18" charset="0"/>
+                        <a:ea typeface="楷体" panose="02010609060101010101" pitchFamily="49" charset="-122"/>
+                        <a:cs typeface="Times New Roman" panose="02020603050405020304" pitchFamily="18" charset="0"/>
+                      </a:endParaRPr>
                     </a:p>
                   </a:txBody>
                   <a:tcPr marL="68594" marR="68594" marT="0" marB="0"/>
@@ -17271,11 +16129,6 @@
                   </a:txBody>
                   <a:tcPr marL="68594" marR="68594" marT="0" marB="0"/>
                 </a:tc>
-                <a:extLst>
-                  <a:ext uri="{0D108BD9-81ED-4DB2-BD59-A6C34878D82A}">
-                    <a16:rowId xmlns:a16="http://schemas.microsoft.com/office/drawing/2014/main" val="10001"/>
-                  </a:ext>
-                </a:extLst>
               </a:tr>
               <a:tr h="600221">
                 <a:tc>
@@ -17297,7 +16150,6 @@
                         <a:buSzTx/>
                         <a:buFontTx/>
                         <a:buNone/>
-                        <a:tabLst/>
                         <a:defRPr/>
                       </a:pPr>
                       <a:r>
@@ -17433,11 +16285,6 @@
                   </a:txBody>
                   <a:tcPr marL="68594" marR="68594" marT="0" marB="0"/>
                 </a:tc>
-                <a:extLst>
-                  <a:ext uri="{0D108BD9-81ED-4DB2-BD59-A6C34878D82A}">
-                    <a16:rowId xmlns:a16="http://schemas.microsoft.com/office/drawing/2014/main" val="10002"/>
-                  </a:ext>
-                </a:extLst>
               </a:tr>
             </a:tbl>
           </a:graphicData>
@@ -17470,13 +16317,7 @@
       </p:grpSpPr>
       <p:sp>
         <p:nvSpPr>
-          <p:cNvPr id="2" name="标题 1">
-            <a:extLst>
-              <a:ext uri="{FF2B5EF4-FFF2-40B4-BE49-F238E27FC236}">
-                <a16:creationId xmlns:a16="http://schemas.microsoft.com/office/drawing/2014/main" id="{0764E2C8-B25A-CA62-6AF3-8E1229BB4744}"/>
-              </a:ext>
-            </a:extLst>
-          </p:cNvPr>
+          <p:cNvPr id="2" name="标题 1"/>
           <p:cNvSpPr>
             <a:spLocks noGrp="1"/>
           </p:cNvSpPr>
@@ -17504,7 +16345,6 @@
               <a:spcAft>
                 <a:spcPct val="0"/>
               </a:spcAft>
-              <a:tabLst/>
               <a:defRPr/>
             </a:pPr>
             <a:r>
@@ -17580,13 +16420,7 @@
       </p:sp>
       <p:sp>
         <p:nvSpPr>
-          <p:cNvPr id="3" name="内容占位符 2">
-            <a:extLst>
-              <a:ext uri="{FF2B5EF4-FFF2-40B4-BE49-F238E27FC236}">
-                <a16:creationId xmlns:a16="http://schemas.microsoft.com/office/drawing/2014/main" id="{A75B9AD9-BAF5-AEF0-BD5B-7484DCFE1327}"/>
-              </a:ext>
-            </a:extLst>
-          </p:cNvPr>
+          <p:cNvPr id="3" name="内容占位符 2"/>
           <p:cNvSpPr>
             <a:spLocks noGrp="1"/>
           </p:cNvSpPr>
@@ -17765,25 +16599,24 @@
               </a:rPr>
               <a:t>最近重构性和最大可分性</a:t>
             </a:r>
+            <a:endParaRPr lang="zh-CN" altLang="en-US" sz="2800" dirty="0">
+              <a:latin typeface="Times New Roman" panose="02020603050405020304" pitchFamily="18" charset="0"/>
+              <a:ea typeface="楷体" panose="02010609060101010101" pitchFamily="49" charset="-122"/>
+              <a:cs typeface="Times New Roman" panose="02020603050405020304" pitchFamily="18" charset="0"/>
+            </a:endParaRPr>
           </a:p>
         </p:txBody>
       </p:sp>
       <p:pic>
         <p:nvPicPr>
-          <p:cNvPr id="4" name="Picture 7">
-            <a:extLst>
-              <a:ext uri="{FF2B5EF4-FFF2-40B4-BE49-F238E27FC236}">
-                <a16:creationId xmlns:a16="http://schemas.microsoft.com/office/drawing/2014/main" id="{7FFA5907-AC84-83E3-BF0E-6EDD7569CE09}"/>
-              </a:ext>
-            </a:extLst>
-          </p:cNvPr>
+          <p:cNvPr id="4" name="Picture 7"/>
           <p:cNvPicPr>
             <a:picLocks noChangeAspect="1"/>
           </p:cNvPicPr>
           <p:nvPr/>
         </p:nvPicPr>
         <p:blipFill>
-          <a:blip r:embed="rId2" cstate="print">
+          <a:blip r:embed="rId1" cstate="print">
             <a:extLst>
               <a:ext uri="{28A0092B-C50C-407E-A947-70E740481C1C}">
                 <a14:useLocalDpi xmlns:a14="http://schemas.microsoft.com/office/drawing/2010/main" val="0"/>
@@ -17805,11 +16638,6 @@
         </p:spPr>
       </p:pic>
     </p:spTree>
-    <p:extLst>
-      <p:ext uri="{BB962C8B-B14F-4D97-AF65-F5344CB8AC3E}">
-        <p14:creationId xmlns:p14="http://schemas.microsoft.com/office/powerpoint/2010/main" val="2051868394"/>
-      </p:ext>
-    </p:extLst>
   </p:cSld>
   <p:clrMapOvr>
     <a:masterClrMapping/>
@@ -17836,13 +16664,7 @@
       </p:grpSpPr>
       <p:sp>
         <p:nvSpPr>
-          <p:cNvPr id="25602" name="灯片编号占位符 4">
-            <a:extLst>
-              <a:ext uri="{FF2B5EF4-FFF2-40B4-BE49-F238E27FC236}">
-                <a16:creationId xmlns:a16="http://schemas.microsoft.com/office/drawing/2014/main" id="{17E635D5-556F-4781-A1B5-F34536FBE096}"/>
-              </a:ext>
-            </a:extLst>
-          </p:cNvPr>
+          <p:cNvPr id="25602" name="灯片编号占位符 4"/>
           <p:cNvSpPr>
             <a:spLocks noGrp="1"/>
           </p:cNvSpPr>
@@ -18026,14 +16848,6 @@
               <a:rPr kumimoji="1" lang="en-US" altLang="zh-CN" sz="1400">
                 <a:latin typeface="Times New Roman" panose="02020603050405020304" pitchFamily="18" charset="0"/>
               </a:rPr>
-              <a:pPr>
-                <a:spcBef>
-                  <a:spcPct val="0"/>
-                </a:spcBef>
-                <a:buFontTx/>
-                <a:buNone/>
-              </a:pPr>
-              <a:t>3</a:t>
             </a:fld>
             <a:endParaRPr kumimoji="1" lang="en-US" altLang="zh-CN" sz="1400">
               <a:latin typeface="Times New Roman" panose="02020603050405020304" pitchFamily="18" charset="0"/>
@@ -18043,13 +16857,7 @@
       </p:sp>
       <p:sp>
         <p:nvSpPr>
-          <p:cNvPr id="25604" name="Text Box 6">
-            <a:extLst>
-              <a:ext uri="{FF2B5EF4-FFF2-40B4-BE49-F238E27FC236}">
-                <a16:creationId xmlns:a16="http://schemas.microsoft.com/office/drawing/2014/main" id="{6E9DF6B3-7770-494F-9AB9-19E6CE2A1EE3}"/>
-              </a:ext>
-            </a:extLst>
-          </p:cNvPr>
+          <p:cNvPr id="25604" name="Text Box 6"/>
           <p:cNvSpPr txBox="1">
             <a:spLocks noChangeArrowheads="1"/>
           </p:cNvSpPr>
@@ -18257,18 +17065,17 @@
               </a:rPr>
               <a:t>本课程主要考试范围</a:t>
             </a:r>
+            <a:endParaRPr kumimoji="1" lang="zh-CN" altLang="en-US" b="1" dirty="0">
+              <a:latin typeface="黑体" panose="02010609060101010101" pitchFamily="49" charset="-122"/>
+              <a:ea typeface="黑体" panose="02010609060101010101" pitchFamily="49" charset="-122"/>
+              <a:cs typeface="楷体_GB2312"/>
+            </a:endParaRPr>
           </a:p>
         </p:txBody>
       </p:sp>
       <p:sp>
         <p:nvSpPr>
-          <p:cNvPr id="843783" name="Text Box 7">
-            <a:extLst>
-              <a:ext uri="{FF2B5EF4-FFF2-40B4-BE49-F238E27FC236}">
-                <a16:creationId xmlns:a16="http://schemas.microsoft.com/office/drawing/2014/main" id="{6DA05D3F-8AF1-4369-AAF6-DBCD6A2887F6}"/>
-              </a:ext>
-            </a:extLst>
-          </p:cNvPr>
+          <p:cNvPr id="843783" name="Text Box 7"/>
           <p:cNvSpPr txBox="1">
             <a:spLocks noChangeArrowheads="1"/>
           </p:cNvSpPr>
@@ -18325,70 +17132,70 @@
               <a:spcBef>
                 <a:spcPct val="20000"/>
               </a:spcBef>
-              <a:buFont typeface="Arial" pitchFamily="34" charset="0"/>
+              <a:buFont typeface="Arial" panose="020B0604020202020204" pitchFamily="34" charset="0"/>
               <a:buChar char="•"/>
               <a:defRPr sz="3200">
                 <a:solidFill>
                   <a:schemeClr val="tx1"/>
                 </a:solidFill>
-                <a:latin typeface="Calibri" pitchFamily="34" charset="0"/>
-                <a:ea typeface="宋体" pitchFamily="2" charset="-122"/>
+                <a:latin typeface="Calibri" panose="020F0502020204030204" pitchFamily="34" charset="0"/>
+                <a:ea typeface="宋体" panose="02010600030101010101" pitchFamily="2" charset="-122"/>
               </a:defRPr>
             </a:lvl1pPr>
             <a:lvl2pPr marL="742950" indent="-285750" eaLnBrk="0" hangingPunct="0">
               <a:spcBef>
                 <a:spcPct val="20000"/>
               </a:spcBef>
-              <a:buFont typeface="Arial" pitchFamily="34" charset="0"/>
+              <a:buFont typeface="Arial" panose="020B0604020202020204" pitchFamily="34" charset="0"/>
               <a:buChar char="–"/>
               <a:defRPr sz="2800">
                 <a:solidFill>
                   <a:schemeClr val="tx1"/>
                 </a:solidFill>
-                <a:latin typeface="Calibri" pitchFamily="34" charset="0"/>
-                <a:ea typeface="宋体" pitchFamily="2" charset="-122"/>
+                <a:latin typeface="Calibri" panose="020F0502020204030204" pitchFamily="34" charset="0"/>
+                <a:ea typeface="宋体" panose="02010600030101010101" pitchFamily="2" charset="-122"/>
               </a:defRPr>
             </a:lvl2pPr>
             <a:lvl3pPr marL="1143000" indent="-228600" eaLnBrk="0" hangingPunct="0">
               <a:spcBef>
                 <a:spcPct val="20000"/>
               </a:spcBef>
-              <a:buFont typeface="Arial" pitchFamily="34" charset="0"/>
+              <a:buFont typeface="Arial" panose="020B0604020202020204" pitchFamily="34" charset="0"/>
               <a:buChar char="•"/>
               <a:defRPr sz="2400">
                 <a:solidFill>
                   <a:schemeClr val="tx1"/>
                 </a:solidFill>
-                <a:latin typeface="Calibri" pitchFamily="34" charset="0"/>
-                <a:ea typeface="宋体" pitchFamily="2" charset="-122"/>
+                <a:latin typeface="Calibri" panose="020F0502020204030204" pitchFamily="34" charset="0"/>
+                <a:ea typeface="宋体" panose="02010600030101010101" pitchFamily="2" charset="-122"/>
               </a:defRPr>
             </a:lvl3pPr>
             <a:lvl4pPr marL="1600200" indent="-228600" eaLnBrk="0" hangingPunct="0">
               <a:spcBef>
                 <a:spcPct val="20000"/>
               </a:spcBef>
-              <a:buFont typeface="Arial" pitchFamily="34" charset="0"/>
+              <a:buFont typeface="Arial" panose="020B0604020202020204" pitchFamily="34" charset="0"/>
               <a:buChar char="–"/>
               <a:defRPr sz="2000">
                 <a:solidFill>
                   <a:schemeClr val="tx1"/>
                 </a:solidFill>
-                <a:latin typeface="Calibri" pitchFamily="34" charset="0"/>
-                <a:ea typeface="宋体" pitchFamily="2" charset="-122"/>
+                <a:latin typeface="Calibri" panose="020F0502020204030204" pitchFamily="34" charset="0"/>
+                <a:ea typeface="宋体" panose="02010600030101010101" pitchFamily="2" charset="-122"/>
               </a:defRPr>
             </a:lvl4pPr>
             <a:lvl5pPr marL="2057400" indent="-228600" eaLnBrk="0" hangingPunct="0">
               <a:spcBef>
                 <a:spcPct val="20000"/>
               </a:spcBef>
-              <a:buFont typeface="Arial" pitchFamily="34" charset="0"/>
+              <a:buFont typeface="Arial" panose="020B0604020202020204" pitchFamily="34" charset="0"/>
               <a:buChar char="»"/>
               <a:defRPr sz="2000">
                 <a:solidFill>
                   <a:schemeClr val="tx1"/>
                 </a:solidFill>
-                <a:latin typeface="Calibri" pitchFamily="34" charset="0"/>
-                <a:ea typeface="宋体" pitchFamily="2" charset="-122"/>
+                <a:latin typeface="Calibri" panose="020F0502020204030204" pitchFamily="34" charset="0"/>
+                <a:ea typeface="宋体" panose="02010600030101010101" pitchFamily="2" charset="-122"/>
               </a:defRPr>
             </a:lvl5pPr>
             <a:lvl6pPr marL="2514600" indent="-228600" eaLnBrk="0" fontAlgn="base" hangingPunct="0">
@@ -18398,14 +17205,14 @@
               <a:spcAft>
                 <a:spcPct val="0"/>
               </a:spcAft>
-              <a:buFont typeface="Arial" pitchFamily="34" charset="0"/>
+              <a:buFont typeface="Arial" panose="020B0604020202020204" pitchFamily="34" charset="0"/>
               <a:buChar char="»"/>
               <a:defRPr sz="2000">
                 <a:solidFill>
                   <a:schemeClr val="tx1"/>
                 </a:solidFill>
-                <a:latin typeface="Calibri" pitchFamily="34" charset="0"/>
-                <a:ea typeface="宋体" pitchFamily="2" charset="-122"/>
+                <a:latin typeface="Calibri" panose="020F0502020204030204" pitchFamily="34" charset="0"/>
+                <a:ea typeface="宋体" panose="02010600030101010101" pitchFamily="2" charset="-122"/>
               </a:defRPr>
             </a:lvl6pPr>
             <a:lvl7pPr marL="2971800" indent="-228600" eaLnBrk="0" fontAlgn="base" hangingPunct="0">
@@ -18415,14 +17222,14 @@
               <a:spcAft>
                 <a:spcPct val="0"/>
               </a:spcAft>
-              <a:buFont typeface="Arial" pitchFamily="34" charset="0"/>
+              <a:buFont typeface="Arial" panose="020B0604020202020204" pitchFamily="34" charset="0"/>
               <a:buChar char="»"/>
               <a:defRPr sz="2000">
                 <a:solidFill>
                   <a:schemeClr val="tx1"/>
                 </a:solidFill>
-                <a:latin typeface="Calibri" pitchFamily="34" charset="0"/>
-                <a:ea typeface="宋体" pitchFamily="2" charset="-122"/>
+                <a:latin typeface="Calibri" panose="020F0502020204030204" pitchFamily="34" charset="0"/>
+                <a:ea typeface="宋体" panose="02010600030101010101" pitchFamily="2" charset="-122"/>
               </a:defRPr>
             </a:lvl7pPr>
             <a:lvl8pPr marL="3429000" indent="-228600" eaLnBrk="0" fontAlgn="base" hangingPunct="0">
@@ -18432,14 +17239,14 @@
               <a:spcAft>
                 <a:spcPct val="0"/>
               </a:spcAft>
-              <a:buFont typeface="Arial" pitchFamily="34" charset="0"/>
+              <a:buFont typeface="Arial" panose="020B0604020202020204" pitchFamily="34" charset="0"/>
               <a:buChar char="»"/>
               <a:defRPr sz="2000">
                 <a:solidFill>
                   <a:schemeClr val="tx1"/>
                 </a:solidFill>
-                <a:latin typeface="Calibri" pitchFamily="34" charset="0"/>
-                <a:ea typeface="宋体" pitchFamily="2" charset="-122"/>
+                <a:latin typeface="Calibri" panose="020F0502020204030204" pitchFamily="34" charset="0"/>
+                <a:ea typeface="宋体" panose="02010600030101010101" pitchFamily="2" charset="-122"/>
               </a:defRPr>
             </a:lvl8pPr>
             <a:lvl9pPr marL="3886200" indent="-228600" eaLnBrk="0" fontAlgn="base" hangingPunct="0">
@@ -18449,14 +17256,14 @@
               <a:spcAft>
                 <a:spcPct val="0"/>
               </a:spcAft>
-              <a:buFont typeface="Arial" pitchFamily="34" charset="0"/>
+              <a:buFont typeface="Arial" panose="020B0604020202020204" pitchFamily="34" charset="0"/>
               <a:buChar char="»"/>
               <a:defRPr sz="2000">
                 <a:solidFill>
                   <a:schemeClr val="tx1"/>
                 </a:solidFill>
-                <a:latin typeface="Calibri" pitchFamily="34" charset="0"/>
-                <a:ea typeface="宋体" pitchFamily="2" charset="-122"/>
+                <a:latin typeface="Calibri" panose="020F0502020204030204" pitchFamily="34" charset="0"/>
+                <a:ea typeface="宋体" panose="02010600030101010101" pitchFamily="2" charset="-122"/>
               </a:defRPr>
             </a:lvl9pPr>
           </a:lstStyle>
@@ -18465,7 +17272,7 @@
               <a:spcBef>
                 <a:spcPct val="50000"/>
               </a:spcBef>
-              <a:buFont typeface="Arial" pitchFamily="34" charset="0"/>
+              <a:buFont typeface="Arial" panose="020B0604020202020204" pitchFamily="34" charset="0"/>
               <a:buNone/>
               <a:defRPr/>
             </a:pPr>
@@ -19071,11 +17878,6 @@
         </p:txBody>
       </p:sp>
     </p:spTree>
-    <p:extLst>
-      <p:ext uri="{BB962C8B-B14F-4D97-AF65-F5344CB8AC3E}">
-        <p14:creationId xmlns:p14="http://schemas.microsoft.com/office/powerpoint/2010/main" val="3095990895"/>
-      </p:ext>
-    </p:extLst>
   </p:cSld>
   <p:clrMapOvr>
     <a:masterClrMapping/>
@@ -19089,13 +17891,13 @@
               <p:cTn id="2" dur="indefinite" nodeType="mainSeq">
                 <p:childTnLst>
                   <p:par>
-                    <p:cTn id="3" fill="hold" nodeType="clickPar">
+                    <p:cTn id="3" fill="hold">
                       <p:stCondLst>
                         <p:cond delay="indefinite"/>
                       </p:stCondLst>
                       <p:childTnLst>
                         <p:par>
-                          <p:cTn id="4" fill="hold" nodeType="withGroup">
+                          <p:cTn id="4" fill="hold">
                             <p:stCondLst>
                               <p:cond delay="0"/>
                             </p:stCondLst>
@@ -19180,13 +17982,7 @@
       </p:grpSpPr>
       <p:sp>
         <p:nvSpPr>
-          <p:cNvPr id="18434" name="灯片编号占位符 5">
-            <a:extLst>
-              <a:ext uri="{FF2B5EF4-FFF2-40B4-BE49-F238E27FC236}">
-                <a16:creationId xmlns:a16="http://schemas.microsoft.com/office/drawing/2014/main" id="{CBBD9809-2CC4-42C3-B564-FAC6896E7580}"/>
-              </a:ext>
-            </a:extLst>
-          </p:cNvPr>
+          <p:cNvPr id="18434" name="灯片编号占位符 5"/>
           <p:cNvSpPr>
             <a:spLocks noGrp="1"/>
           </p:cNvSpPr>
@@ -19374,14 +18170,6 @@
               <a:rPr kumimoji="1" lang="en-US" altLang="zh-CN" sz="1400" smtClean="0">
                 <a:latin typeface="Times New Roman" panose="02020603050405020304" pitchFamily="18" charset="0"/>
               </a:rPr>
-              <a:pPr>
-                <a:spcBef>
-                  <a:spcPct val="0"/>
-                </a:spcBef>
-                <a:buFontTx/>
-                <a:buNone/>
-              </a:pPr>
-              <a:t>4</a:t>
             </a:fld>
             <a:endParaRPr kumimoji="1" lang="en-US" altLang="zh-CN" sz="1400">
               <a:latin typeface="Times New Roman" panose="02020603050405020304" pitchFamily="18" charset="0"/>
@@ -19391,13 +18179,7 @@
       </p:sp>
       <p:sp>
         <p:nvSpPr>
-          <p:cNvPr id="887811" name="Rectangle 3">
-            <a:extLst>
-              <a:ext uri="{FF2B5EF4-FFF2-40B4-BE49-F238E27FC236}">
-                <a16:creationId xmlns:a16="http://schemas.microsoft.com/office/drawing/2014/main" id="{E67925BF-BD9D-4849-975B-B00461AA9122}"/>
-              </a:ext>
-            </a:extLst>
-          </p:cNvPr>
+          <p:cNvPr id="887811" name="Rectangle 3"/>
           <p:cNvSpPr>
             <a:spLocks noGrp="1"/>
           </p:cNvSpPr>
@@ -19467,6 +18249,11 @@
               </a:rPr>
               <a:t>“假设用𝑃来评估计算机程序在某任务类𝑇上的性能，若一个程序通过利用经验𝐸在𝑇中任务上获得了性能改善，则我们就说关于𝑇和𝑃，该程序对𝐸进行了学习”</a:t>
             </a:r>
+            <a:endParaRPr lang="zh-CN" altLang="en-US" sz="2400" dirty="0">
+              <a:latin typeface="Times New Roman" panose="02020603050405020304" pitchFamily="18" charset="0"/>
+              <a:ea typeface="楷体" panose="02010609060101010101" pitchFamily="49" charset="-122"/>
+              <a:cs typeface="Times New Roman" panose="02020603050405020304" pitchFamily="18" charset="0"/>
+            </a:endParaRPr>
           </a:p>
           <a:p>
             <a:pPr eaLnBrk="1" hangingPunct="1">
@@ -19596,75 +18383,7 @@
                 <a:ea typeface="楷体" panose="02010609060101010101" pitchFamily="49" charset="-122"/>
                 <a:cs typeface="Times New Roman" panose="02020603050405020304" pitchFamily="18" charset="0"/>
               </a:rPr>
-              <a:t>泛化能力：假设样本独立同分布（</a:t>
-            </a:r>
-            <a:r>
-              <a:rPr lang="en-US" altLang="zh-CN" sz="2600" b="1" dirty="0" err="1">
-                <a:latin typeface="Times New Roman" panose="02020603050405020304" pitchFamily="18" charset="0"/>
-                <a:ea typeface="楷体" panose="02010609060101010101" pitchFamily="49" charset="-122"/>
-                <a:cs typeface="Times New Roman" panose="02020603050405020304" pitchFamily="18" charset="0"/>
-              </a:rPr>
-              <a:t>i.i.d</a:t>
-            </a:r>
-            <a:r>
-              <a:rPr lang="zh-CN" altLang="en-US" sz="2600" b="1" dirty="0">
-                <a:latin typeface="Times New Roman" panose="02020603050405020304" pitchFamily="18" charset="0"/>
-                <a:ea typeface="楷体" panose="02010609060101010101" pitchFamily="49" charset="-122"/>
-                <a:cs typeface="Times New Roman" panose="02020603050405020304" pitchFamily="18" charset="0"/>
-              </a:rPr>
-              <a:t>）</a:t>
-            </a:r>
-            <a:endParaRPr lang="en-US" altLang="zh-CN" sz="2600" b="1" dirty="0">
-              <a:latin typeface="Times New Roman" panose="02020603050405020304" pitchFamily="18" charset="0"/>
-              <a:ea typeface="楷体" panose="02010609060101010101" pitchFamily="49" charset="-122"/>
-              <a:cs typeface="Times New Roman" panose="02020603050405020304" pitchFamily="18" charset="0"/>
-            </a:endParaRPr>
-          </a:p>
-          <a:p>
-            <a:pPr eaLnBrk="1" hangingPunct="1">
-              <a:lnSpc>
-                <a:spcPct val="120000"/>
-              </a:lnSpc>
-              <a:buClr>
-                <a:srgbClr val="FF0000"/>
-              </a:buClr>
-              <a:buFont typeface="Wingdings" panose="05000000000000000000" pitchFamily="2" charset="2"/>
-              <a:buChar char="p"/>
-              <a:defRPr/>
-            </a:pPr>
-            <a:r>
-              <a:rPr lang="zh-CN" altLang="en-US" sz="2600" b="1" dirty="0">
-                <a:latin typeface="Times New Roman" panose="02020603050405020304" pitchFamily="18" charset="0"/>
-                <a:ea typeface="楷体" panose="02010609060101010101" pitchFamily="49" charset="-122"/>
-                <a:cs typeface="Times New Roman" panose="02020603050405020304" pitchFamily="18" charset="0"/>
-              </a:rPr>
-              <a:t>概念学习：假设空间和版本空间</a:t>
-            </a:r>
-            <a:endParaRPr lang="en-US" altLang="zh-CN" sz="2600" b="1" dirty="0">
-              <a:latin typeface="Times New Roman" panose="02020603050405020304" pitchFamily="18" charset="0"/>
-              <a:ea typeface="楷体" panose="02010609060101010101" pitchFamily="49" charset="-122"/>
-              <a:cs typeface="Times New Roman" panose="02020603050405020304" pitchFamily="18" charset="0"/>
-            </a:endParaRPr>
-          </a:p>
-          <a:p>
-            <a:pPr eaLnBrk="1" hangingPunct="1">
-              <a:lnSpc>
-                <a:spcPct val="120000"/>
-              </a:lnSpc>
-              <a:buClr>
-                <a:srgbClr val="FF0000"/>
-              </a:buClr>
-              <a:buFont typeface="Wingdings" panose="05000000000000000000" pitchFamily="2" charset="2"/>
-              <a:buChar char="p"/>
-              <a:defRPr/>
-            </a:pPr>
-            <a:r>
-              <a:rPr lang="zh-CN" altLang="en-US" sz="2600" b="1" dirty="0">
-                <a:latin typeface="Times New Roman" panose="02020603050405020304" pitchFamily="18" charset="0"/>
-                <a:ea typeface="楷体" panose="02010609060101010101" pitchFamily="49" charset="-122"/>
-                <a:cs typeface="Times New Roman" panose="02020603050405020304" pitchFamily="18" charset="0"/>
-              </a:rPr>
-              <a:t>归纳偏好（奥卡姆剃刀）和没有免费的午餐定理</a:t>
+              <a:t>泛化能力：假设样本独立同分布（归纳偏好（奥卡姆剃刀）和没有免费的午餐定理</a:t>
             </a:r>
             <a:endParaRPr lang="en-US" altLang="zh-CN" sz="2600" b="1" dirty="0">
               <a:latin typeface="Times New Roman" panose="02020603050405020304" pitchFamily="18" charset="0"/>
@@ -19848,13 +18567,7 @@
       </p:sp>
       <p:sp>
         <p:nvSpPr>
-          <p:cNvPr id="18436" name="Text Box 4">
-            <a:extLst>
-              <a:ext uri="{FF2B5EF4-FFF2-40B4-BE49-F238E27FC236}">
-                <a16:creationId xmlns:a16="http://schemas.microsoft.com/office/drawing/2014/main" id="{EB81EA09-BA58-4C02-A7E1-E64004DF3351}"/>
-              </a:ext>
-            </a:extLst>
-          </p:cNvPr>
+          <p:cNvPr id="18436" name="Text Box 4"/>
           <p:cNvSpPr txBox="1">
             <a:spLocks noChangeArrowheads="1"/>
           </p:cNvSpPr>
@@ -20078,1603 +18791,15 @@
               </a:rPr>
               <a:t>章：绪论</a:t>
             </a:r>
+            <a:endParaRPr kumimoji="1" lang="zh-CN" altLang="en-US" b="1" dirty="0">
+              <a:latin typeface="黑体" panose="02010609060101010101" pitchFamily="49" charset="-122"/>
+              <a:ea typeface="黑体" panose="02010609060101010101" pitchFamily="49" charset="-122"/>
+              <a:cs typeface="楷体_GB2312"/>
+            </a:endParaRPr>
           </a:p>
         </p:txBody>
       </p:sp>
     </p:spTree>
-    <p:extLst>
-      <p:ext uri="{BB962C8B-B14F-4D97-AF65-F5344CB8AC3E}">
-        <p14:creationId xmlns:p14="http://schemas.microsoft.com/office/powerpoint/2010/main" val="895409878"/>
-      </p:ext>
-    </p:extLst>
-  </p:cSld>
-  <p:clrMapOvr>
-    <a:masterClrMapping/>
-  </p:clrMapOvr>
-  <p:transition/>
-  <p:timing>
-    <p:tnLst>
-      <p:par>
-        <p:cTn id="1" dur="indefinite" restart="never" nodeType="tmRoot">
-          <p:childTnLst>
-            <p:seq concurrent="1" nextAc="seek">
-              <p:cTn id="2" dur="indefinite" nodeType="mainSeq">
-                <p:childTnLst>
-                  <p:par>
-                    <p:cTn id="3" fill="hold" nodeType="clickPar">
-                      <p:stCondLst>
-                        <p:cond delay="indefinite"/>
-                      </p:stCondLst>
-                      <p:childTnLst>
-                        <p:par>
-                          <p:cTn id="4" fill="hold" nodeType="withGroup">
-                            <p:stCondLst>
-                              <p:cond delay="0"/>
-                            </p:stCondLst>
-                            <p:childTnLst>
-                              <p:par>
-                                <p:cTn id="5" presetID="3" presetClass="entr" presetSubtype="10" fill="hold" grpId="0" nodeType="clickEffect">
-                                  <p:stCondLst>
-                                    <p:cond delay="0"/>
-                                  </p:stCondLst>
-                                  <p:childTnLst>
-                                    <p:set>
-                                      <p:cBhvr>
-                                        <p:cTn id="6" dur="1" fill="hold">
-                                          <p:stCondLst>
-                                            <p:cond delay="0"/>
-                                          </p:stCondLst>
-                                        </p:cTn>
-                                        <p:tgtEl>
-                                          <p:spTgt spid="887811">
-                                            <p:txEl>
-                                              <p:pRg st="0" end="0"/>
-                                            </p:txEl>
-                                          </p:spTgt>
-                                        </p:tgtEl>
-                                        <p:attrNameLst>
-                                          <p:attrName>style.visibility</p:attrName>
-                                        </p:attrNameLst>
-                                      </p:cBhvr>
-                                      <p:to>
-                                        <p:strVal val="visible"/>
-                                      </p:to>
-                                    </p:set>
-                                    <p:animEffect transition="in" filter="blinds(horizontal)">
-                                      <p:cBhvr>
-                                        <p:cTn id="7" dur="500"/>
-                                        <p:tgtEl>
-                                          <p:spTgt spid="887811">
-                                            <p:txEl>
-                                              <p:pRg st="0" end="0"/>
-                                            </p:txEl>
-                                          </p:spTgt>
-                                        </p:tgtEl>
-                                      </p:cBhvr>
-                                    </p:animEffect>
-                                  </p:childTnLst>
-                                </p:cTn>
-                              </p:par>
-                            </p:childTnLst>
-                          </p:cTn>
-                        </p:par>
-                      </p:childTnLst>
-                    </p:cTn>
-                  </p:par>
-                  <p:par>
-                    <p:cTn id="8" fill="hold">
-                      <p:stCondLst>
-                        <p:cond delay="indefinite"/>
-                      </p:stCondLst>
-                      <p:childTnLst>
-                        <p:par>
-                          <p:cTn id="9" fill="hold">
-                            <p:stCondLst>
-                              <p:cond delay="0"/>
-                            </p:stCondLst>
-                            <p:childTnLst>
-                              <p:par>
-                                <p:cTn id="10" presetID="3" presetClass="entr" presetSubtype="10" fill="hold" grpId="0" nodeType="clickEffect">
-                                  <p:stCondLst>
-                                    <p:cond delay="0"/>
-                                  </p:stCondLst>
-                                  <p:childTnLst>
-                                    <p:set>
-                                      <p:cBhvr>
-                                        <p:cTn id="11" dur="1" fill="hold">
-                                          <p:stCondLst>
-                                            <p:cond delay="0"/>
-                                          </p:stCondLst>
-                                        </p:cTn>
-                                        <p:tgtEl>
-                                          <p:spTgt spid="887811">
-                                            <p:txEl>
-                                              <p:pRg st="1" end="1"/>
-                                            </p:txEl>
-                                          </p:spTgt>
-                                        </p:tgtEl>
-                                        <p:attrNameLst>
-                                          <p:attrName>style.visibility</p:attrName>
-                                        </p:attrNameLst>
-                                      </p:cBhvr>
-                                      <p:to>
-                                        <p:strVal val="visible"/>
-                                      </p:to>
-                                    </p:set>
-                                    <p:animEffect transition="in" filter="blinds(horizontal)">
-                                      <p:cBhvr>
-                                        <p:cTn id="12" dur="500"/>
-                                        <p:tgtEl>
-                                          <p:spTgt spid="887811">
-                                            <p:txEl>
-                                              <p:pRg st="1" end="1"/>
-                                            </p:txEl>
-                                          </p:spTgt>
-                                        </p:tgtEl>
-                                      </p:cBhvr>
-                                    </p:animEffect>
-                                  </p:childTnLst>
-                                </p:cTn>
-                              </p:par>
-                            </p:childTnLst>
-                          </p:cTn>
-                        </p:par>
-                      </p:childTnLst>
-                    </p:cTn>
-                  </p:par>
-                  <p:par>
-                    <p:cTn id="13" fill="hold">
-                      <p:stCondLst>
-                        <p:cond delay="indefinite"/>
-                      </p:stCondLst>
-                      <p:childTnLst>
-                        <p:par>
-                          <p:cTn id="14" fill="hold">
-                            <p:stCondLst>
-                              <p:cond delay="0"/>
-                            </p:stCondLst>
-                            <p:childTnLst>
-                              <p:par>
-                                <p:cTn id="15" presetID="3" presetClass="entr" presetSubtype="10" fill="hold" grpId="0" nodeType="clickEffect">
-                                  <p:stCondLst>
-                                    <p:cond delay="0"/>
-                                  </p:stCondLst>
-                                  <p:childTnLst>
-                                    <p:set>
-                                      <p:cBhvr>
-                                        <p:cTn id="16" dur="1" fill="hold">
-                                          <p:stCondLst>
-                                            <p:cond delay="0"/>
-                                          </p:stCondLst>
-                                        </p:cTn>
-                                        <p:tgtEl>
-                                          <p:spTgt spid="887811">
-                                            <p:txEl>
-                                              <p:pRg st="2" end="2"/>
-                                            </p:txEl>
-                                          </p:spTgt>
-                                        </p:tgtEl>
-                                        <p:attrNameLst>
-                                          <p:attrName>style.visibility</p:attrName>
-                                        </p:attrNameLst>
-                                      </p:cBhvr>
-                                      <p:to>
-                                        <p:strVal val="visible"/>
-                                      </p:to>
-                                    </p:set>
-                                    <p:animEffect transition="in" filter="blinds(horizontal)">
-                                      <p:cBhvr>
-                                        <p:cTn id="17" dur="500"/>
-                                        <p:tgtEl>
-                                          <p:spTgt spid="887811">
-                                            <p:txEl>
-                                              <p:pRg st="2" end="2"/>
-                                            </p:txEl>
-                                          </p:spTgt>
-                                        </p:tgtEl>
-                                      </p:cBhvr>
-                                    </p:animEffect>
-                                  </p:childTnLst>
-                                </p:cTn>
-                              </p:par>
-                            </p:childTnLst>
-                          </p:cTn>
-                        </p:par>
-                      </p:childTnLst>
-                    </p:cTn>
-                  </p:par>
-                  <p:par>
-                    <p:cTn id="18" fill="hold" nodeType="clickPar">
-                      <p:stCondLst>
-                        <p:cond delay="indefinite"/>
-                      </p:stCondLst>
-                      <p:childTnLst>
-                        <p:par>
-                          <p:cTn id="19" fill="hold" nodeType="withGroup">
-                            <p:stCondLst>
-                              <p:cond delay="0"/>
-                            </p:stCondLst>
-                            <p:childTnLst>
-                              <p:par>
-                                <p:cTn id="20" presetID="3" presetClass="entr" presetSubtype="10" fill="hold" grpId="0" nodeType="clickEffect">
-                                  <p:stCondLst>
-                                    <p:cond delay="0"/>
-                                  </p:stCondLst>
-                                  <p:childTnLst>
-                                    <p:set>
-                                      <p:cBhvr>
-                                        <p:cTn id="21" dur="1" fill="hold">
-                                          <p:stCondLst>
-                                            <p:cond delay="0"/>
-                                          </p:stCondLst>
-                                        </p:cTn>
-                                        <p:tgtEl>
-                                          <p:spTgt spid="887811">
-                                            <p:txEl>
-                                              <p:pRg st="3" end="3"/>
-                                            </p:txEl>
-                                          </p:spTgt>
-                                        </p:tgtEl>
-                                        <p:attrNameLst>
-                                          <p:attrName>style.visibility</p:attrName>
-                                        </p:attrNameLst>
-                                      </p:cBhvr>
-                                      <p:to>
-                                        <p:strVal val="visible"/>
-                                      </p:to>
-                                    </p:set>
-                                    <p:animEffect transition="in" filter="blinds(horizontal)">
-                                      <p:cBhvr>
-                                        <p:cTn id="22" dur="500"/>
-                                        <p:tgtEl>
-                                          <p:spTgt spid="887811">
-                                            <p:txEl>
-                                              <p:pRg st="3" end="3"/>
-                                            </p:txEl>
-                                          </p:spTgt>
-                                        </p:tgtEl>
-                                      </p:cBhvr>
-                                    </p:animEffect>
-                                  </p:childTnLst>
-                                </p:cTn>
-                              </p:par>
-                            </p:childTnLst>
-                          </p:cTn>
-                        </p:par>
-                      </p:childTnLst>
-                    </p:cTn>
-                  </p:par>
-                  <p:par>
-                    <p:cTn id="23" fill="hold">
-                      <p:stCondLst>
-                        <p:cond delay="indefinite"/>
-                      </p:stCondLst>
-                      <p:childTnLst>
-                        <p:par>
-                          <p:cTn id="24" fill="hold">
-                            <p:stCondLst>
-                              <p:cond delay="0"/>
-                            </p:stCondLst>
-                            <p:childTnLst>
-                              <p:par>
-                                <p:cTn id="25" presetID="3" presetClass="entr" presetSubtype="10" fill="hold" grpId="0" nodeType="clickEffect">
-                                  <p:stCondLst>
-                                    <p:cond delay="0"/>
-                                  </p:stCondLst>
-                                  <p:childTnLst>
-                                    <p:set>
-                                      <p:cBhvr>
-                                        <p:cTn id="26" dur="1" fill="hold">
-                                          <p:stCondLst>
-                                            <p:cond delay="0"/>
-                                          </p:stCondLst>
-                                        </p:cTn>
-                                        <p:tgtEl>
-                                          <p:spTgt spid="887811">
-                                            <p:txEl>
-                                              <p:pRg st="4" end="4"/>
-                                            </p:txEl>
-                                          </p:spTgt>
-                                        </p:tgtEl>
-                                        <p:attrNameLst>
-                                          <p:attrName>style.visibility</p:attrName>
-                                        </p:attrNameLst>
-                                      </p:cBhvr>
-                                      <p:to>
-                                        <p:strVal val="visible"/>
-                                      </p:to>
-                                    </p:set>
-                                    <p:animEffect transition="in" filter="blinds(horizontal)">
-                                      <p:cBhvr>
-                                        <p:cTn id="27" dur="500"/>
-                                        <p:tgtEl>
-                                          <p:spTgt spid="887811">
-                                            <p:txEl>
-                                              <p:pRg st="4" end="4"/>
-                                            </p:txEl>
-                                          </p:spTgt>
-                                        </p:tgtEl>
-                                      </p:cBhvr>
-                                    </p:animEffect>
-                                  </p:childTnLst>
-                                </p:cTn>
-                              </p:par>
-                            </p:childTnLst>
-                          </p:cTn>
-                        </p:par>
-                      </p:childTnLst>
-                    </p:cTn>
-                  </p:par>
-                  <p:par>
-                    <p:cTn id="28" fill="hold">
-                      <p:stCondLst>
-                        <p:cond delay="indefinite"/>
-                      </p:stCondLst>
-                      <p:childTnLst>
-                        <p:par>
-                          <p:cTn id="29" fill="hold">
-                            <p:stCondLst>
-                              <p:cond delay="0"/>
-                            </p:stCondLst>
-                            <p:childTnLst>
-                              <p:par>
-                                <p:cTn id="30" presetID="3" presetClass="entr" presetSubtype="10" fill="hold" grpId="0" nodeType="clickEffect">
-                                  <p:stCondLst>
-                                    <p:cond delay="0"/>
-                                  </p:stCondLst>
-                                  <p:childTnLst>
-                                    <p:set>
-                                      <p:cBhvr>
-                                        <p:cTn id="31" dur="1" fill="hold">
-                                          <p:stCondLst>
-                                            <p:cond delay="0"/>
-                                          </p:stCondLst>
-                                        </p:cTn>
-                                        <p:tgtEl>
-                                          <p:spTgt spid="887811">
-                                            <p:txEl>
-                                              <p:pRg st="5" end="5"/>
-                                            </p:txEl>
-                                          </p:spTgt>
-                                        </p:tgtEl>
-                                        <p:attrNameLst>
-                                          <p:attrName>style.visibility</p:attrName>
-                                        </p:attrNameLst>
-                                      </p:cBhvr>
-                                      <p:to>
-                                        <p:strVal val="visible"/>
-                                      </p:to>
-                                    </p:set>
-                                    <p:animEffect transition="in" filter="blinds(horizontal)">
-                                      <p:cBhvr>
-                                        <p:cTn id="32" dur="500"/>
-                                        <p:tgtEl>
-                                          <p:spTgt spid="887811">
-                                            <p:txEl>
-                                              <p:pRg st="5" end="5"/>
-                                            </p:txEl>
-                                          </p:spTgt>
-                                        </p:tgtEl>
-                                      </p:cBhvr>
-                                    </p:animEffect>
-                                  </p:childTnLst>
-                                </p:cTn>
-                              </p:par>
-                            </p:childTnLst>
-                          </p:cTn>
-                        </p:par>
-                      </p:childTnLst>
-                    </p:cTn>
-                  </p:par>
-                  <p:par>
-                    <p:cTn id="33" fill="hold">
-                      <p:stCondLst>
-                        <p:cond delay="indefinite"/>
-                      </p:stCondLst>
-                      <p:childTnLst>
-                        <p:par>
-                          <p:cTn id="34" fill="hold">
-                            <p:stCondLst>
-                              <p:cond delay="0"/>
-                            </p:stCondLst>
-                            <p:childTnLst>
-                              <p:par>
-                                <p:cTn id="35" presetID="3" presetClass="entr" presetSubtype="10" fill="hold" grpId="0" nodeType="clickEffect">
-                                  <p:stCondLst>
-                                    <p:cond delay="0"/>
-                                  </p:stCondLst>
-                                  <p:childTnLst>
-                                    <p:set>
-                                      <p:cBhvr>
-                                        <p:cTn id="36" dur="1" fill="hold">
-                                          <p:stCondLst>
-                                            <p:cond delay="0"/>
-                                          </p:stCondLst>
-                                        </p:cTn>
-                                        <p:tgtEl>
-                                          <p:spTgt spid="887811">
-                                            <p:txEl>
-                                              <p:pRg st="6" end="6"/>
-                                            </p:txEl>
-                                          </p:spTgt>
-                                        </p:tgtEl>
-                                        <p:attrNameLst>
-                                          <p:attrName>style.visibility</p:attrName>
-                                        </p:attrNameLst>
-                                      </p:cBhvr>
-                                      <p:to>
-                                        <p:strVal val="visible"/>
-                                      </p:to>
-                                    </p:set>
-                                    <p:animEffect transition="in" filter="blinds(horizontal)">
-                                      <p:cBhvr>
-                                        <p:cTn id="37" dur="500"/>
-                                        <p:tgtEl>
-                                          <p:spTgt spid="887811">
-                                            <p:txEl>
-                                              <p:pRg st="6" end="6"/>
-                                            </p:txEl>
-                                          </p:spTgt>
-                                        </p:tgtEl>
-                                      </p:cBhvr>
-                                    </p:animEffect>
-                                  </p:childTnLst>
-                                </p:cTn>
-                              </p:par>
-                            </p:childTnLst>
-                          </p:cTn>
-                        </p:par>
-                      </p:childTnLst>
-                    </p:cTn>
-                  </p:par>
-                  <p:par>
-                    <p:cTn id="38" fill="hold">
-                      <p:stCondLst>
-                        <p:cond delay="indefinite"/>
-                      </p:stCondLst>
-                      <p:childTnLst>
-                        <p:par>
-                          <p:cTn id="39" fill="hold">
-                            <p:stCondLst>
-                              <p:cond delay="0"/>
-                            </p:stCondLst>
-                            <p:childTnLst>
-                              <p:par>
-                                <p:cTn id="40" presetID="3" presetClass="entr" presetSubtype="10" fill="hold" grpId="0" nodeType="clickEffect">
-                                  <p:stCondLst>
-                                    <p:cond delay="0"/>
-                                  </p:stCondLst>
-                                  <p:childTnLst>
-                                    <p:set>
-                                      <p:cBhvr>
-                                        <p:cTn id="41" dur="1" fill="hold">
-                                          <p:stCondLst>
-                                            <p:cond delay="0"/>
-                                          </p:stCondLst>
-                                        </p:cTn>
-                                        <p:tgtEl>
-                                          <p:spTgt spid="887811">
-                                            <p:txEl>
-                                              <p:pRg st="7" end="7"/>
-                                            </p:txEl>
-                                          </p:spTgt>
-                                        </p:tgtEl>
-                                        <p:attrNameLst>
-                                          <p:attrName>style.visibility</p:attrName>
-                                        </p:attrNameLst>
-                                      </p:cBhvr>
-                                      <p:to>
-                                        <p:strVal val="visible"/>
-                                      </p:to>
-                                    </p:set>
-                                    <p:animEffect transition="in" filter="blinds(horizontal)">
-                                      <p:cBhvr>
-                                        <p:cTn id="42" dur="500"/>
-                                        <p:tgtEl>
-                                          <p:spTgt spid="887811">
-                                            <p:txEl>
-                                              <p:pRg st="7" end="7"/>
-                                            </p:txEl>
-                                          </p:spTgt>
-                                        </p:tgtEl>
-                                      </p:cBhvr>
-                                    </p:animEffect>
-                                  </p:childTnLst>
-                                </p:cTn>
-                              </p:par>
-                            </p:childTnLst>
-                          </p:cTn>
-                        </p:par>
-                      </p:childTnLst>
-                    </p:cTn>
-                  </p:par>
-                  <p:par>
-                    <p:cTn id="43" fill="hold">
-                      <p:stCondLst>
-                        <p:cond delay="indefinite"/>
-                      </p:stCondLst>
-                      <p:childTnLst>
-                        <p:par>
-                          <p:cTn id="44" fill="hold">
-                            <p:stCondLst>
-                              <p:cond delay="0"/>
-                            </p:stCondLst>
-                            <p:childTnLst>
-                              <p:par>
-                                <p:cTn id="45" presetID="3" presetClass="entr" presetSubtype="10" fill="hold" grpId="0" nodeType="clickEffect">
-                                  <p:stCondLst>
-                                    <p:cond delay="0"/>
-                                  </p:stCondLst>
-                                  <p:childTnLst>
-                                    <p:set>
-                                      <p:cBhvr>
-                                        <p:cTn id="46" dur="1" fill="hold">
-                                          <p:stCondLst>
-                                            <p:cond delay="0"/>
-                                          </p:stCondLst>
-                                        </p:cTn>
-                                        <p:tgtEl>
-                                          <p:spTgt spid="887811">
-                                            <p:txEl>
-                                              <p:pRg st="8" end="8"/>
-                                            </p:txEl>
-                                          </p:spTgt>
-                                        </p:tgtEl>
-                                        <p:attrNameLst>
-                                          <p:attrName>style.visibility</p:attrName>
-                                        </p:attrNameLst>
-                                      </p:cBhvr>
-                                      <p:to>
-                                        <p:strVal val="visible"/>
-                                      </p:to>
-                                    </p:set>
-                                    <p:animEffect transition="in" filter="blinds(horizontal)">
-                                      <p:cBhvr>
-                                        <p:cTn id="47" dur="500"/>
-                                        <p:tgtEl>
-                                          <p:spTgt spid="887811">
-                                            <p:txEl>
-                                              <p:pRg st="8" end="8"/>
-                                            </p:txEl>
-                                          </p:spTgt>
-                                        </p:tgtEl>
-                                      </p:cBhvr>
-                                    </p:animEffect>
-                                  </p:childTnLst>
-                                </p:cTn>
-                              </p:par>
-                            </p:childTnLst>
-                          </p:cTn>
-                        </p:par>
-                      </p:childTnLst>
-                    </p:cTn>
-                  </p:par>
-                  <p:par>
-                    <p:cTn id="48" fill="hold" nodeType="clickPar">
-                      <p:stCondLst>
-                        <p:cond delay="indefinite"/>
-                      </p:stCondLst>
-                      <p:childTnLst>
-                        <p:par>
-                          <p:cTn id="49" fill="hold" nodeType="withGroup">
-                            <p:stCondLst>
-                              <p:cond delay="0"/>
-                            </p:stCondLst>
-                            <p:childTnLst>
-                              <p:par>
-                                <p:cTn id="50" presetID="3" presetClass="entr" presetSubtype="10" fill="hold" grpId="0" nodeType="clickEffect">
-                                  <p:stCondLst>
-                                    <p:cond delay="0"/>
-                                  </p:stCondLst>
-                                  <p:childTnLst>
-                                    <p:set>
-                                      <p:cBhvr>
-                                        <p:cTn id="51" dur="1" fill="hold">
-                                          <p:stCondLst>
-                                            <p:cond delay="0"/>
-                                          </p:stCondLst>
-                                        </p:cTn>
-                                        <p:tgtEl>
-                                          <p:spTgt spid="887811">
-                                            <p:txEl>
-                                              <p:pRg st="14" end="14"/>
-                                            </p:txEl>
-                                          </p:spTgt>
-                                        </p:tgtEl>
-                                        <p:attrNameLst>
-                                          <p:attrName>style.visibility</p:attrName>
-                                        </p:attrNameLst>
-                                      </p:cBhvr>
-                                      <p:to>
-                                        <p:strVal val="visible"/>
-                                      </p:to>
-                                    </p:set>
-                                    <p:animEffect transition="in" filter="blinds(horizontal)">
-                                      <p:cBhvr>
-                                        <p:cTn id="52" dur="500"/>
-                                        <p:tgtEl>
-                                          <p:spTgt spid="887811">
-                                            <p:txEl>
-                                              <p:pRg st="14" end="14"/>
-                                            </p:txEl>
-                                          </p:spTgt>
-                                        </p:tgtEl>
-                                      </p:cBhvr>
-                                    </p:animEffect>
-                                  </p:childTnLst>
-                                </p:cTn>
-                              </p:par>
-                            </p:childTnLst>
-                          </p:cTn>
-                        </p:par>
-                      </p:childTnLst>
-                    </p:cTn>
-                  </p:par>
-                </p:childTnLst>
-              </p:cTn>
-              <p:prevCondLst>
-                <p:cond evt="onPrev" delay="0">
-                  <p:tgtEl>
-                    <p:sldTgt/>
-                  </p:tgtEl>
-                </p:cond>
-              </p:prevCondLst>
-              <p:nextCondLst>
-                <p:cond evt="onNext" delay="0">
-                  <p:tgtEl>
-                    <p:sldTgt/>
-                  </p:tgtEl>
-                </p:cond>
-              </p:nextCondLst>
-            </p:seq>
-          </p:childTnLst>
-        </p:cTn>
-      </p:par>
-    </p:tnLst>
-    <p:bldLst>
-      <p:bldP spid="887811" grpId="0" build="p"/>
-    </p:bldLst>
-  </p:timing>
-</p:sld>
-</file>
-
-<file path=ppt/slides/slide5.xml><?xml version="1.0" encoding="utf-8"?>
-<p:sld xmlns:a="http://schemas.openxmlformats.org/drawingml/2006/main" xmlns:r="http://schemas.openxmlformats.org/officeDocument/2006/relationships" xmlns:p="http://schemas.openxmlformats.org/presentationml/2006/main">
-  <p:cSld>
-    <p:spTree>
-      <p:nvGrpSpPr>
-        <p:cNvPr id="1" name=""/>
-        <p:cNvGrpSpPr/>
-        <p:nvPr/>
-      </p:nvGrpSpPr>
-      <p:grpSpPr>
-        <a:xfrm>
-          <a:off x="0" y="0"/>
-          <a:ext cx="0" cy="0"/>
-          <a:chOff x="0" y="0"/>
-          <a:chExt cx="0" cy="0"/>
-        </a:xfrm>
-      </p:grpSpPr>
-      <p:sp>
-        <p:nvSpPr>
-          <p:cNvPr id="18434" name="灯片编号占位符 5">
-            <a:extLst>
-              <a:ext uri="{FF2B5EF4-FFF2-40B4-BE49-F238E27FC236}">
-                <a16:creationId xmlns:a16="http://schemas.microsoft.com/office/drawing/2014/main" id="{CBBD9809-2CC4-42C3-B564-FAC6896E7580}"/>
-              </a:ext>
-            </a:extLst>
-          </p:cNvPr>
-          <p:cNvSpPr>
-            <a:spLocks noGrp="1"/>
-          </p:cNvSpPr>
-          <p:nvPr>
-            <p:ph type="sldNum" sz="quarter" idx="12"/>
-          </p:nvPr>
-        </p:nvSpPr>
-        <p:spPr bwMode="auto">
-          <a:noFill/>
-          <a:extLst>
-            <a:ext uri="{909E8E84-426E-40DD-AFC4-6F175D3DCCD1}">
-              <a14:hiddenFill xmlns:a14="http://schemas.microsoft.com/office/drawing/2010/main">
-                <a:solidFill>
-                  <a:srgbClr val="FFFFFF"/>
-                </a:solidFill>
-              </a14:hiddenFill>
-            </a:ext>
-            <a:ext uri="{91240B29-F687-4F45-9708-019B960494DF}">
-              <a14:hiddenLine xmlns:a14="http://schemas.microsoft.com/office/drawing/2010/main" w="9525">
-                <a:solidFill>
-                  <a:srgbClr val="000000"/>
-                </a:solidFill>
-                <a:miter lim="800000"/>
-                <a:headEnd/>
-                <a:tailEnd/>
-              </a14:hiddenLine>
-            </a:ext>
-          </a:extLst>
-        </p:spPr>
-        <p:txBody>
-          <a:bodyPr/>
-          <a:lstStyle>
-            <a:lvl1pPr>
-              <a:spcBef>
-                <a:spcPct val="20000"/>
-              </a:spcBef>
-              <a:buFont typeface="Arial" panose="020B0604020202020204" pitchFamily="34" charset="0"/>
-              <a:buChar char="•"/>
-              <a:defRPr sz="3200">
-                <a:solidFill>
-                  <a:schemeClr val="tx1"/>
-                </a:solidFill>
-                <a:latin typeface="Calibri" panose="020F0502020204030204" pitchFamily="34" charset="0"/>
-                <a:ea typeface="宋体" panose="02010600030101010101" pitchFamily="2" charset="-122"/>
-              </a:defRPr>
-            </a:lvl1pPr>
-            <a:lvl2pPr marL="742950" indent="-285750">
-              <a:spcBef>
-                <a:spcPct val="20000"/>
-              </a:spcBef>
-              <a:buFont typeface="Arial" panose="020B0604020202020204" pitchFamily="34" charset="0"/>
-              <a:buChar char="–"/>
-              <a:defRPr sz="2800">
-                <a:solidFill>
-                  <a:schemeClr val="tx1"/>
-                </a:solidFill>
-                <a:latin typeface="Calibri" panose="020F0502020204030204" pitchFamily="34" charset="0"/>
-                <a:ea typeface="宋体" panose="02010600030101010101" pitchFamily="2" charset="-122"/>
-              </a:defRPr>
-            </a:lvl2pPr>
-            <a:lvl3pPr marL="1143000" indent="-228600">
-              <a:spcBef>
-                <a:spcPct val="20000"/>
-              </a:spcBef>
-              <a:buFont typeface="Arial" panose="020B0604020202020204" pitchFamily="34" charset="0"/>
-              <a:buChar char="•"/>
-              <a:defRPr sz="2400">
-                <a:solidFill>
-                  <a:schemeClr val="tx1"/>
-                </a:solidFill>
-                <a:latin typeface="Calibri" panose="020F0502020204030204" pitchFamily="34" charset="0"/>
-                <a:ea typeface="宋体" panose="02010600030101010101" pitchFamily="2" charset="-122"/>
-              </a:defRPr>
-            </a:lvl3pPr>
-            <a:lvl4pPr marL="1600200" indent="-228600">
-              <a:spcBef>
-                <a:spcPct val="20000"/>
-              </a:spcBef>
-              <a:buFont typeface="Arial" panose="020B0604020202020204" pitchFamily="34" charset="0"/>
-              <a:buChar char="–"/>
-              <a:defRPr sz="2000">
-                <a:solidFill>
-                  <a:schemeClr val="tx1"/>
-                </a:solidFill>
-                <a:latin typeface="Calibri" panose="020F0502020204030204" pitchFamily="34" charset="0"/>
-                <a:ea typeface="宋体" panose="02010600030101010101" pitchFamily="2" charset="-122"/>
-              </a:defRPr>
-            </a:lvl4pPr>
-            <a:lvl5pPr marL="2057400" indent="-228600">
-              <a:spcBef>
-                <a:spcPct val="20000"/>
-              </a:spcBef>
-              <a:buFont typeface="Arial" panose="020B0604020202020204" pitchFamily="34" charset="0"/>
-              <a:buChar char="»"/>
-              <a:defRPr sz="2000">
-                <a:solidFill>
-                  <a:schemeClr val="tx1"/>
-                </a:solidFill>
-                <a:latin typeface="Calibri" panose="020F0502020204030204" pitchFamily="34" charset="0"/>
-                <a:ea typeface="宋体" panose="02010600030101010101" pitchFamily="2" charset="-122"/>
-              </a:defRPr>
-            </a:lvl5pPr>
-            <a:lvl6pPr marL="2514600" indent="-228600" eaLnBrk="0" fontAlgn="base" hangingPunct="0">
-              <a:spcBef>
-                <a:spcPct val="20000"/>
-              </a:spcBef>
-              <a:spcAft>
-                <a:spcPct val="0"/>
-              </a:spcAft>
-              <a:buFont typeface="Arial" panose="020B0604020202020204" pitchFamily="34" charset="0"/>
-              <a:buChar char="»"/>
-              <a:defRPr sz="2000">
-                <a:solidFill>
-                  <a:schemeClr val="tx1"/>
-                </a:solidFill>
-                <a:latin typeface="Calibri" panose="020F0502020204030204" pitchFamily="34" charset="0"/>
-                <a:ea typeface="宋体" panose="02010600030101010101" pitchFamily="2" charset="-122"/>
-              </a:defRPr>
-            </a:lvl6pPr>
-            <a:lvl7pPr marL="2971800" indent="-228600" eaLnBrk="0" fontAlgn="base" hangingPunct="0">
-              <a:spcBef>
-                <a:spcPct val="20000"/>
-              </a:spcBef>
-              <a:spcAft>
-                <a:spcPct val="0"/>
-              </a:spcAft>
-              <a:buFont typeface="Arial" panose="020B0604020202020204" pitchFamily="34" charset="0"/>
-              <a:buChar char="»"/>
-              <a:defRPr sz="2000">
-                <a:solidFill>
-                  <a:schemeClr val="tx1"/>
-                </a:solidFill>
-                <a:latin typeface="Calibri" panose="020F0502020204030204" pitchFamily="34" charset="0"/>
-                <a:ea typeface="宋体" panose="02010600030101010101" pitchFamily="2" charset="-122"/>
-              </a:defRPr>
-            </a:lvl7pPr>
-            <a:lvl8pPr marL="3429000" indent="-228600" eaLnBrk="0" fontAlgn="base" hangingPunct="0">
-              <a:spcBef>
-                <a:spcPct val="20000"/>
-              </a:spcBef>
-              <a:spcAft>
-                <a:spcPct val="0"/>
-              </a:spcAft>
-              <a:buFont typeface="Arial" panose="020B0604020202020204" pitchFamily="34" charset="0"/>
-              <a:buChar char="»"/>
-              <a:defRPr sz="2000">
-                <a:solidFill>
-                  <a:schemeClr val="tx1"/>
-                </a:solidFill>
-                <a:latin typeface="Calibri" panose="020F0502020204030204" pitchFamily="34" charset="0"/>
-                <a:ea typeface="宋体" panose="02010600030101010101" pitchFamily="2" charset="-122"/>
-              </a:defRPr>
-            </a:lvl8pPr>
-            <a:lvl9pPr marL="3886200" indent="-228600" eaLnBrk="0" fontAlgn="base" hangingPunct="0">
-              <a:spcBef>
-                <a:spcPct val="20000"/>
-              </a:spcBef>
-              <a:spcAft>
-                <a:spcPct val="0"/>
-              </a:spcAft>
-              <a:buFont typeface="Arial" panose="020B0604020202020204" pitchFamily="34" charset="0"/>
-              <a:buChar char="»"/>
-              <a:defRPr sz="2000">
-                <a:solidFill>
-                  <a:schemeClr val="tx1"/>
-                </a:solidFill>
-                <a:latin typeface="Calibri" panose="020F0502020204030204" pitchFamily="34" charset="0"/>
-                <a:ea typeface="宋体" panose="02010600030101010101" pitchFamily="2" charset="-122"/>
-              </a:defRPr>
-            </a:lvl9pPr>
-          </a:lstStyle>
-          <a:p>
-            <a:pPr>
-              <a:spcBef>
-                <a:spcPct val="0"/>
-              </a:spcBef>
-              <a:buFontTx/>
-              <a:buNone/>
-            </a:pPr>
-            <a:fld id="{F12A9DEA-C3F6-4401-A5BF-3745117890AB}" type="slidenum">
-              <a:rPr kumimoji="1" lang="en-US" altLang="zh-CN" sz="1400" smtClean="0">
-                <a:latin typeface="Times New Roman" panose="02020603050405020304" pitchFamily="18" charset="0"/>
-              </a:rPr>
-              <a:pPr>
-                <a:spcBef>
-                  <a:spcPct val="0"/>
-                </a:spcBef>
-                <a:buFontTx/>
-                <a:buNone/>
-              </a:pPr>
-              <a:t>5</a:t>
-            </a:fld>
-            <a:endParaRPr kumimoji="1" lang="en-US" altLang="zh-CN" sz="1400">
-              <a:latin typeface="Times New Roman" panose="02020603050405020304" pitchFamily="18" charset="0"/>
-            </a:endParaRPr>
-          </a:p>
-        </p:txBody>
-      </p:sp>
-      <p:sp>
-        <p:nvSpPr>
-          <p:cNvPr id="887811" name="Rectangle 3">
-            <a:extLst>
-              <a:ext uri="{FF2B5EF4-FFF2-40B4-BE49-F238E27FC236}">
-                <a16:creationId xmlns:a16="http://schemas.microsoft.com/office/drawing/2014/main" id="{E67925BF-BD9D-4849-975B-B00461AA9122}"/>
-              </a:ext>
-            </a:extLst>
-          </p:cNvPr>
-          <p:cNvSpPr>
-            <a:spLocks noGrp="1"/>
-          </p:cNvSpPr>
-          <p:nvPr>
-            <p:ph type="body" idx="1"/>
-          </p:nvPr>
-        </p:nvSpPr>
-        <p:spPr>
-          <a:xfrm>
-            <a:off x="755576" y="1340768"/>
-            <a:ext cx="7416800" cy="1231900"/>
-          </a:xfrm>
-        </p:spPr>
-        <p:txBody>
-          <a:bodyPr/>
-          <a:lstStyle/>
-          <a:p>
-            <a:pPr eaLnBrk="1" hangingPunct="1">
-              <a:lnSpc>
-                <a:spcPct val="120000"/>
-              </a:lnSpc>
-              <a:buClr>
-                <a:srgbClr val="FF0000"/>
-              </a:buClr>
-              <a:buFont typeface="Wingdings" panose="05000000000000000000" pitchFamily="2" charset="2"/>
-              <a:buChar char="p"/>
-              <a:defRPr/>
-            </a:pPr>
-            <a:r>
-              <a:rPr lang="zh-CN" altLang="en-US" sz="2800" dirty="0">
-                <a:latin typeface="Times New Roman" panose="02020603050405020304" pitchFamily="18" charset="0"/>
-                <a:ea typeface="楷体" panose="02010609060101010101" pitchFamily="49" charset="-122"/>
-                <a:cs typeface="Times New Roman" panose="02020603050405020304" pitchFamily="18" charset="0"/>
-              </a:rPr>
-              <a:t> </a:t>
-            </a:r>
-            <a:r>
-              <a:rPr lang="zh-CN" altLang="en-US" sz="2800" b="1" dirty="0">
-                <a:latin typeface="Times New Roman" panose="02020603050405020304" pitchFamily="18" charset="0"/>
-                <a:ea typeface="楷体" panose="02010609060101010101" pitchFamily="49" charset="-122"/>
-                <a:cs typeface="Times New Roman" panose="02020603050405020304" pitchFamily="18" charset="0"/>
-              </a:rPr>
-              <a:t>过拟合和欠拟合以及相应的解决方案</a:t>
-            </a:r>
-            <a:endParaRPr lang="en-US" altLang="zh-CN" sz="2800" b="1" dirty="0">
-              <a:latin typeface="Times New Roman" panose="02020603050405020304" pitchFamily="18" charset="0"/>
-              <a:ea typeface="楷体" panose="02010609060101010101" pitchFamily="49" charset="-122"/>
-              <a:cs typeface="Times New Roman" panose="02020603050405020304" pitchFamily="18" charset="0"/>
-            </a:endParaRPr>
-          </a:p>
-          <a:p>
-            <a:pPr eaLnBrk="1" hangingPunct="1">
-              <a:lnSpc>
-                <a:spcPct val="120000"/>
-              </a:lnSpc>
-              <a:buClr>
-                <a:srgbClr val="FF0000"/>
-              </a:buClr>
-              <a:buFont typeface="Wingdings" panose="05000000000000000000" pitchFamily="2" charset="2"/>
-              <a:buChar char="p"/>
-              <a:defRPr/>
-            </a:pPr>
-            <a:r>
-              <a:rPr lang="zh-CN" altLang="en-US" sz="2800" b="1" dirty="0">
-                <a:latin typeface="Times New Roman" panose="02020603050405020304" pitchFamily="18" charset="0"/>
-                <a:ea typeface="楷体" panose="02010609060101010101" pitchFamily="49" charset="-122"/>
-                <a:cs typeface="Times New Roman" panose="02020603050405020304" pitchFamily="18" charset="0"/>
-              </a:rPr>
-              <a:t> 评估方法：泛化性能</a:t>
-            </a:r>
-            <a:endParaRPr lang="en-US" altLang="zh-CN" sz="2800" b="1" dirty="0">
-              <a:latin typeface="Times New Roman" panose="02020603050405020304" pitchFamily="18" charset="0"/>
-              <a:ea typeface="楷体" panose="02010609060101010101" pitchFamily="49" charset="-122"/>
-              <a:cs typeface="Times New Roman" panose="02020603050405020304" pitchFamily="18" charset="0"/>
-            </a:endParaRPr>
-          </a:p>
-          <a:p>
-            <a:pPr marL="0" indent="0" eaLnBrk="1" hangingPunct="1">
-              <a:lnSpc>
-                <a:spcPct val="120000"/>
-              </a:lnSpc>
-              <a:buClr>
-                <a:srgbClr val="FF0000"/>
-              </a:buClr>
-              <a:buNone/>
-              <a:defRPr/>
-            </a:pPr>
-            <a:r>
-              <a:rPr lang="zh-CN" altLang="en-US" sz="2400" dirty="0">
-                <a:latin typeface="Times New Roman" panose="02020603050405020304" pitchFamily="18" charset="0"/>
-                <a:ea typeface="楷体" panose="02010609060101010101" pitchFamily="49" charset="-122"/>
-                <a:cs typeface="Times New Roman" panose="02020603050405020304" pitchFamily="18" charset="0"/>
-              </a:rPr>
-              <a:t>（</a:t>
-            </a:r>
-            <a:r>
-              <a:rPr lang="en-US" altLang="zh-CN" sz="2400" dirty="0">
-                <a:latin typeface="Times New Roman" panose="02020603050405020304" pitchFamily="18" charset="0"/>
-                <a:ea typeface="楷体" panose="02010609060101010101" pitchFamily="49" charset="-122"/>
-                <a:cs typeface="Times New Roman" panose="02020603050405020304" pitchFamily="18" charset="0"/>
-              </a:rPr>
-              <a:t>1</a:t>
-            </a:r>
-            <a:r>
-              <a:rPr lang="zh-CN" altLang="en-US" sz="2400" dirty="0">
-                <a:latin typeface="Times New Roman" panose="02020603050405020304" pitchFamily="18" charset="0"/>
-                <a:ea typeface="楷体" panose="02010609060101010101" pitchFamily="49" charset="-122"/>
-                <a:cs typeface="Times New Roman" panose="02020603050405020304" pitchFamily="18" charset="0"/>
-              </a:rPr>
-              <a:t>）留出法（</a:t>
-            </a:r>
-            <a:r>
-              <a:rPr lang="en-US" altLang="zh-CN" sz="2400" dirty="0">
-                <a:latin typeface="Times New Roman" panose="02020603050405020304" pitchFamily="18" charset="0"/>
-                <a:ea typeface="楷体" panose="02010609060101010101" pitchFamily="49" charset="-122"/>
-                <a:cs typeface="Times New Roman" panose="02020603050405020304" pitchFamily="18" charset="0"/>
-              </a:rPr>
-              <a:t>2</a:t>
-            </a:r>
-            <a:r>
-              <a:rPr lang="zh-CN" altLang="en-US" sz="2400" dirty="0">
-                <a:latin typeface="Times New Roman" panose="02020603050405020304" pitchFamily="18" charset="0"/>
-                <a:ea typeface="楷体" panose="02010609060101010101" pitchFamily="49" charset="-122"/>
-                <a:cs typeface="Times New Roman" panose="02020603050405020304" pitchFamily="18" charset="0"/>
-              </a:rPr>
-              <a:t>）交叉验证法</a:t>
-            </a:r>
-            <a:endParaRPr lang="en-US" altLang="zh-CN" sz="2400" dirty="0">
-              <a:latin typeface="Times New Roman" panose="02020603050405020304" pitchFamily="18" charset="0"/>
-              <a:ea typeface="楷体" panose="02010609060101010101" pitchFamily="49" charset="-122"/>
-              <a:cs typeface="Times New Roman" panose="02020603050405020304" pitchFamily="18" charset="0"/>
-            </a:endParaRPr>
-          </a:p>
-          <a:p>
-            <a:pPr marL="0" indent="0" eaLnBrk="1" hangingPunct="1">
-              <a:lnSpc>
-                <a:spcPct val="120000"/>
-              </a:lnSpc>
-              <a:buClr>
-                <a:srgbClr val="FF0000"/>
-              </a:buClr>
-              <a:buNone/>
-              <a:defRPr/>
-            </a:pPr>
-            <a:r>
-              <a:rPr lang="zh-CN" altLang="en-US" sz="2400" dirty="0">
-                <a:latin typeface="Times New Roman" panose="02020603050405020304" pitchFamily="18" charset="0"/>
-                <a:ea typeface="楷体" panose="02010609060101010101" pitchFamily="49" charset="-122"/>
-                <a:cs typeface="Times New Roman" panose="02020603050405020304" pitchFamily="18" charset="0"/>
-              </a:rPr>
-              <a:t>（</a:t>
-            </a:r>
-            <a:r>
-              <a:rPr lang="en-US" altLang="zh-CN" sz="2400" dirty="0">
-                <a:latin typeface="Times New Roman" panose="02020603050405020304" pitchFamily="18" charset="0"/>
-                <a:ea typeface="楷体" panose="02010609060101010101" pitchFamily="49" charset="-122"/>
-                <a:cs typeface="Times New Roman" panose="02020603050405020304" pitchFamily="18" charset="0"/>
-              </a:rPr>
-              <a:t>3</a:t>
-            </a:r>
-            <a:r>
-              <a:rPr lang="zh-CN" altLang="en-US" sz="2400" dirty="0">
-                <a:latin typeface="Times New Roman" panose="02020603050405020304" pitchFamily="18" charset="0"/>
-                <a:ea typeface="楷体" panose="02010609060101010101" pitchFamily="49" charset="-122"/>
-                <a:cs typeface="Times New Roman" panose="02020603050405020304" pitchFamily="18" charset="0"/>
-              </a:rPr>
-              <a:t>）自助法（</a:t>
-            </a:r>
-            <a:r>
-              <a:rPr lang="en-US" altLang="zh-CN" sz="2400" dirty="0">
-                <a:latin typeface="Times New Roman" panose="02020603050405020304" pitchFamily="18" charset="0"/>
-                <a:ea typeface="楷体" panose="02010609060101010101" pitchFamily="49" charset="-122"/>
-                <a:cs typeface="Times New Roman" panose="02020603050405020304" pitchFamily="18" charset="0"/>
-              </a:rPr>
-              <a:t>4</a:t>
-            </a:r>
-            <a:r>
-              <a:rPr lang="zh-CN" altLang="en-US" sz="2400" dirty="0">
-                <a:latin typeface="Times New Roman" panose="02020603050405020304" pitchFamily="18" charset="0"/>
-                <a:ea typeface="楷体" panose="02010609060101010101" pitchFamily="49" charset="-122"/>
-                <a:cs typeface="Times New Roman" panose="02020603050405020304" pitchFamily="18" charset="0"/>
-              </a:rPr>
-              <a:t>）调参与最终模型</a:t>
-            </a:r>
-            <a:endParaRPr lang="en-US" altLang="zh-CN" sz="2400" dirty="0">
-              <a:latin typeface="Times New Roman" panose="02020603050405020304" pitchFamily="18" charset="0"/>
-              <a:ea typeface="楷体" panose="02010609060101010101" pitchFamily="49" charset="-122"/>
-              <a:cs typeface="Times New Roman" panose="02020603050405020304" pitchFamily="18" charset="0"/>
-            </a:endParaRPr>
-          </a:p>
-          <a:p>
-            <a:pPr eaLnBrk="1" hangingPunct="1">
-              <a:lnSpc>
-                <a:spcPct val="120000"/>
-              </a:lnSpc>
-              <a:buClr>
-                <a:srgbClr val="FF0000"/>
-              </a:buClr>
-              <a:buFont typeface="Wingdings" panose="05000000000000000000" pitchFamily="2" charset="2"/>
-              <a:buChar char="p"/>
-              <a:defRPr/>
-            </a:pPr>
-            <a:r>
-              <a:rPr lang="zh-CN" altLang="en-US" sz="2800" b="1" dirty="0">
-                <a:latin typeface="Times New Roman" panose="02020603050405020304" pitchFamily="18" charset="0"/>
-                <a:ea typeface="楷体" panose="02010609060101010101" pitchFamily="49" charset="-122"/>
-                <a:cs typeface="Times New Roman" panose="02020603050405020304" pitchFamily="18" charset="0"/>
-              </a:rPr>
-              <a:t>性能度量</a:t>
-            </a:r>
-            <a:endParaRPr lang="en-US" altLang="zh-CN" sz="2800" b="1" dirty="0">
-              <a:latin typeface="Times New Roman" panose="02020603050405020304" pitchFamily="18" charset="0"/>
-              <a:ea typeface="楷体" panose="02010609060101010101" pitchFamily="49" charset="-122"/>
-              <a:cs typeface="Times New Roman" panose="02020603050405020304" pitchFamily="18" charset="0"/>
-            </a:endParaRPr>
-          </a:p>
-          <a:p>
-            <a:pPr eaLnBrk="1" hangingPunct="1">
-              <a:lnSpc>
-                <a:spcPct val="120000"/>
-              </a:lnSpc>
-              <a:buClr>
-                <a:srgbClr val="FF0000"/>
-              </a:buClr>
-              <a:buFont typeface="Wingdings" panose="05000000000000000000" pitchFamily="2" charset="2"/>
-              <a:buChar char="p"/>
-              <a:defRPr/>
-            </a:pPr>
-            <a:r>
-              <a:rPr lang="zh-CN" altLang="en-US" sz="2800" b="1" dirty="0">
-                <a:latin typeface="Times New Roman" panose="02020603050405020304" pitchFamily="18" charset="0"/>
-                <a:ea typeface="楷体" panose="02010609060101010101" pitchFamily="49" charset="-122"/>
-                <a:cs typeface="Times New Roman" panose="02020603050405020304" pitchFamily="18" charset="0"/>
-              </a:rPr>
-              <a:t>比较检验</a:t>
-            </a:r>
-            <a:endParaRPr lang="en-US" altLang="zh-CN" sz="2800" b="1" dirty="0">
-              <a:latin typeface="Times New Roman" panose="02020603050405020304" pitchFamily="18" charset="0"/>
-              <a:ea typeface="楷体" panose="02010609060101010101" pitchFamily="49" charset="-122"/>
-              <a:cs typeface="Times New Roman" panose="02020603050405020304" pitchFamily="18" charset="0"/>
-            </a:endParaRPr>
-          </a:p>
-          <a:p>
-            <a:pPr eaLnBrk="1" hangingPunct="1">
-              <a:lnSpc>
-                <a:spcPct val="120000"/>
-              </a:lnSpc>
-              <a:buClr>
-                <a:srgbClr val="FF0000"/>
-              </a:buClr>
-              <a:buFont typeface="Wingdings" panose="05000000000000000000" pitchFamily="2" charset="2"/>
-              <a:buChar char="p"/>
-              <a:defRPr/>
-            </a:pPr>
-            <a:r>
-              <a:rPr lang="zh-CN" altLang="en-US" sz="2800" b="1" dirty="0">
-                <a:latin typeface="Times New Roman" panose="02020603050405020304" pitchFamily="18" charset="0"/>
-                <a:ea typeface="楷体" panose="02010609060101010101" pitchFamily="49" charset="-122"/>
-                <a:cs typeface="Times New Roman" panose="02020603050405020304" pitchFamily="18" charset="0"/>
-              </a:rPr>
-              <a:t>偏差与方差：偏差、方差和噪声解释；偏差</a:t>
-            </a:r>
-            <a:r>
-              <a:rPr lang="en-US" altLang="zh-CN" sz="2800" b="1" dirty="0">
-                <a:latin typeface="Times New Roman" panose="02020603050405020304" pitchFamily="18" charset="0"/>
-                <a:ea typeface="楷体" panose="02010609060101010101" pitchFamily="49" charset="-122"/>
-                <a:cs typeface="Times New Roman" panose="02020603050405020304" pitchFamily="18" charset="0"/>
-              </a:rPr>
-              <a:t>-</a:t>
-            </a:r>
-            <a:r>
-              <a:rPr lang="zh-CN" altLang="en-US" sz="2800" b="1" dirty="0">
-                <a:latin typeface="Times New Roman" panose="02020603050405020304" pitchFamily="18" charset="0"/>
-                <a:ea typeface="楷体" panose="02010609060101010101" pitchFamily="49" charset="-122"/>
-                <a:cs typeface="Times New Roman" panose="02020603050405020304" pitchFamily="18" charset="0"/>
-              </a:rPr>
-              <a:t>方差窘境（与泛化误差的关系）</a:t>
-            </a:r>
-            <a:endParaRPr lang="en-US" altLang="zh-CN" sz="2800" b="1" dirty="0">
-              <a:latin typeface="Times New Roman" panose="02020603050405020304" pitchFamily="18" charset="0"/>
-              <a:ea typeface="楷体" panose="02010609060101010101" pitchFamily="49" charset="-122"/>
-              <a:cs typeface="Times New Roman" panose="02020603050405020304" pitchFamily="18" charset="0"/>
-            </a:endParaRPr>
-          </a:p>
-          <a:p>
-            <a:pPr marL="0" indent="0" eaLnBrk="1" hangingPunct="1">
-              <a:lnSpc>
-                <a:spcPct val="120000"/>
-              </a:lnSpc>
-              <a:buClr>
-                <a:srgbClr val="FF0000"/>
-              </a:buClr>
-              <a:buNone/>
-              <a:defRPr/>
-            </a:pPr>
-            <a:endParaRPr lang="en-US" altLang="zh-CN" sz="2800" dirty="0">
-              <a:latin typeface="Times New Roman" panose="02020603050405020304" pitchFamily="18" charset="0"/>
-              <a:ea typeface="楷体" panose="02010609060101010101" pitchFamily="49" charset="-122"/>
-              <a:cs typeface="Times New Roman" panose="02020603050405020304" pitchFamily="18" charset="0"/>
-            </a:endParaRPr>
-          </a:p>
-          <a:p>
-            <a:pPr eaLnBrk="1" hangingPunct="1">
-              <a:lnSpc>
-                <a:spcPct val="120000"/>
-              </a:lnSpc>
-              <a:buClr>
-                <a:srgbClr val="FF0000"/>
-              </a:buClr>
-              <a:buFont typeface="Wingdings" panose="05000000000000000000" pitchFamily="2" charset="2"/>
-              <a:buChar char="p"/>
-              <a:defRPr/>
-            </a:pPr>
-            <a:endParaRPr lang="en-US" altLang="zh-CN" sz="2800" dirty="0">
-              <a:latin typeface="Times New Roman" panose="02020603050405020304" pitchFamily="18" charset="0"/>
-              <a:ea typeface="楷体" panose="02010609060101010101" pitchFamily="49" charset="-122"/>
-              <a:cs typeface="Times New Roman" panose="02020603050405020304" pitchFamily="18" charset="0"/>
-            </a:endParaRPr>
-          </a:p>
-          <a:p>
-            <a:pPr eaLnBrk="1" hangingPunct="1">
-              <a:lnSpc>
-                <a:spcPct val="120000"/>
-              </a:lnSpc>
-              <a:buClr>
-                <a:srgbClr val="FF0000"/>
-              </a:buClr>
-              <a:buFont typeface="Wingdings" panose="05000000000000000000" pitchFamily="2" charset="2"/>
-              <a:buChar char="p"/>
-              <a:defRPr/>
-            </a:pPr>
-            <a:endParaRPr lang="en-US" altLang="zh-CN" sz="2800" dirty="0">
-              <a:latin typeface="Times New Roman" panose="02020603050405020304" pitchFamily="18" charset="0"/>
-              <a:ea typeface="楷体" panose="02010609060101010101" pitchFamily="49" charset="-122"/>
-              <a:cs typeface="Times New Roman" panose="02020603050405020304" pitchFamily="18" charset="0"/>
-            </a:endParaRPr>
-          </a:p>
-          <a:p>
-            <a:pPr marL="0" indent="0" eaLnBrk="1" hangingPunct="1">
-              <a:lnSpc>
-                <a:spcPct val="120000"/>
-              </a:lnSpc>
-              <a:buClr>
-                <a:srgbClr val="FF0000"/>
-              </a:buClr>
-              <a:buNone/>
-              <a:defRPr/>
-            </a:pPr>
-            <a:endParaRPr lang="en-US" altLang="zh-CN" sz="2800" dirty="0">
-              <a:latin typeface="Times New Roman" panose="02020603050405020304" pitchFamily="18" charset="0"/>
-              <a:ea typeface="楷体" panose="02010609060101010101" pitchFamily="49" charset="-122"/>
-              <a:cs typeface="Times New Roman" panose="02020603050405020304" pitchFamily="18" charset="0"/>
-            </a:endParaRPr>
-          </a:p>
-          <a:p>
-            <a:pPr eaLnBrk="1" hangingPunct="1">
-              <a:lnSpc>
-                <a:spcPct val="120000"/>
-              </a:lnSpc>
-              <a:buClr>
-                <a:srgbClr val="FF0000"/>
-              </a:buClr>
-              <a:buFont typeface="Wingdings" panose="05000000000000000000" pitchFamily="2" charset="2"/>
-              <a:buChar char="p"/>
-              <a:defRPr/>
-            </a:pPr>
-            <a:endParaRPr lang="en-US" altLang="zh-CN" sz="2800" dirty="0">
-              <a:latin typeface="Times New Roman" panose="02020603050405020304" pitchFamily="18" charset="0"/>
-              <a:ea typeface="楷体" panose="02010609060101010101" pitchFamily="49" charset="-122"/>
-              <a:cs typeface="Times New Roman" panose="02020603050405020304" pitchFamily="18" charset="0"/>
-            </a:endParaRPr>
-          </a:p>
-          <a:p>
-            <a:pPr marL="0" indent="0" eaLnBrk="1" hangingPunct="1">
-              <a:lnSpc>
-                <a:spcPct val="120000"/>
-              </a:lnSpc>
-              <a:buClr>
-                <a:srgbClr val="FF0000"/>
-              </a:buClr>
-              <a:buFont typeface="Arial" panose="020B0604020202020204" pitchFamily="34" charset="0"/>
-              <a:buNone/>
-              <a:defRPr/>
-            </a:pPr>
-            <a:r>
-              <a:rPr kumimoji="1" lang="en-US" altLang="zh-CN" sz="2800" dirty="0">
-                <a:latin typeface="Times New Roman" panose="02020603050405020304" pitchFamily="18" charset="0"/>
-                <a:ea typeface="楷体" panose="02010609060101010101" pitchFamily="49" charset="-122"/>
-                <a:cs typeface="Times New Roman" panose="02020603050405020304" pitchFamily="18" charset="0"/>
-              </a:rPr>
-              <a:t>      </a:t>
-            </a:r>
-            <a:endParaRPr kumimoji="1" lang="en-US" altLang="zh-CN" sz="2400" dirty="0">
-              <a:latin typeface="楷体" panose="02010609060101010101" pitchFamily="49" charset="-122"/>
-              <a:ea typeface="楷体" panose="02010609060101010101" pitchFamily="49" charset="-122"/>
-            </a:endParaRPr>
-          </a:p>
-        </p:txBody>
-      </p:sp>
-      <p:sp>
-        <p:nvSpPr>
-          <p:cNvPr id="18436" name="Text Box 4">
-            <a:extLst>
-              <a:ext uri="{FF2B5EF4-FFF2-40B4-BE49-F238E27FC236}">
-                <a16:creationId xmlns:a16="http://schemas.microsoft.com/office/drawing/2014/main" id="{EB81EA09-BA58-4C02-A7E1-E64004DF3351}"/>
-              </a:ext>
-            </a:extLst>
-          </p:cNvPr>
-          <p:cNvSpPr txBox="1">
-            <a:spLocks noChangeArrowheads="1"/>
-          </p:cNvSpPr>
-          <p:nvPr/>
-        </p:nvSpPr>
-        <p:spPr bwMode="auto">
-          <a:xfrm>
-            <a:off x="684213" y="620713"/>
-            <a:ext cx="8134350" cy="579437"/>
-          </a:xfrm>
-          <a:prstGeom prst="rect">
-            <a:avLst/>
-          </a:prstGeom>
-          <a:noFill/>
-          <a:ln>
-            <a:noFill/>
-          </a:ln>
-          <a:effectLst/>
-          <a:extLst>
-            <a:ext uri="{909E8E84-426E-40DD-AFC4-6F175D3DCCD1}">
-              <a14:hiddenFill xmlns:a14="http://schemas.microsoft.com/office/drawing/2010/main">
-                <a:solidFill>
-                  <a:schemeClr val="hlink"/>
-                </a:solidFill>
-              </a14:hiddenFill>
-            </a:ext>
-            <a:ext uri="{91240B29-F687-4F45-9708-019B960494DF}">
-              <a14:hiddenLine xmlns:a14="http://schemas.microsoft.com/office/drawing/2010/main" w="9525">
-                <a:solidFill>
-                  <a:schemeClr val="tx1"/>
-                </a:solidFill>
-                <a:miter lim="800000"/>
-                <a:headEnd/>
-                <a:tailEnd/>
-              </a14:hiddenLine>
-            </a:ext>
-            <a:ext uri="{AF507438-7753-43E0-B8FC-AC1667EBCBE1}">
-              <a14:hiddenEffects xmlns:a14="http://schemas.microsoft.com/office/drawing/2010/main">
-                <a:effectLst>
-                  <a:outerShdw dist="35921" dir="2700000" algn="ctr" rotWithShape="0">
-                    <a:schemeClr val="bg2"/>
-                  </a:outerShdw>
-                </a:effectLst>
-              </a14:hiddenEffects>
-            </a:ext>
-          </a:extLst>
-        </p:spPr>
-        <p:txBody>
-          <a:bodyPr>
-            <a:spAutoFit/>
-          </a:bodyPr>
-          <a:lstStyle>
-            <a:lvl1pPr marL="457200" indent="-457200">
-              <a:spcBef>
-                <a:spcPct val="20000"/>
-              </a:spcBef>
-              <a:buFont typeface="Arial" panose="020B0604020202020204" pitchFamily="34" charset="0"/>
-              <a:buChar char="•"/>
-              <a:defRPr sz="3200">
-                <a:solidFill>
-                  <a:schemeClr val="tx1"/>
-                </a:solidFill>
-                <a:latin typeface="Calibri" panose="020F0502020204030204" pitchFamily="34" charset="0"/>
-                <a:ea typeface="宋体" panose="02010600030101010101" pitchFamily="2" charset="-122"/>
-              </a:defRPr>
-            </a:lvl1pPr>
-            <a:lvl2pPr marL="742950" indent="-285750">
-              <a:spcBef>
-                <a:spcPct val="20000"/>
-              </a:spcBef>
-              <a:buFont typeface="Arial" panose="020B0604020202020204" pitchFamily="34" charset="0"/>
-              <a:buChar char="–"/>
-              <a:defRPr sz="2800">
-                <a:solidFill>
-                  <a:schemeClr val="tx1"/>
-                </a:solidFill>
-                <a:latin typeface="Calibri" panose="020F0502020204030204" pitchFamily="34" charset="0"/>
-                <a:ea typeface="宋体" panose="02010600030101010101" pitchFamily="2" charset="-122"/>
-              </a:defRPr>
-            </a:lvl2pPr>
-            <a:lvl3pPr marL="1143000" indent="-228600">
-              <a:spcBef>
-                <a:spcPct val="20000"/>
-              </a:spcBef>
-              <a:buFont typeface="Arial" panose="020B0604020202020204" pitchFamily="34" charset="0"/>
-              <a:buChar char="•"/>
-              <a:defRPr sz="2400">
-                <a:solidFill>
-                  <a:schemeClr val="tx1"/>
-                </a:solidFill>
-                <a:latin typeface="Calibri" panose="020F0502020204030204" pitchFamily="34" charset="0"/>
-                <a:ea typeface="宋体" panose="02010600030101010101" pitchFamily="2" charset="-122"/>
-              </a:defRPr>
-            </a:lvl3pPr>
-            <a:lvl4pPr marL="1600200" indent="-228600">
-              <a:spcBef>
-                <a:spcPct val="20000"/>
-              </a:spcBef>
-              <a:buFont typeface="Arial" panose="020B0604020202020204" pitchFamily="34" charset="0"/>
-              <a:buChar char="–"/>
-              <a:defRPr sz="2000">
-                <a:solidFill>
-                  <a:schemeClr val="tx1"/>
-                </a:solidFill>
-                <a:latin typeface="Calibri" panose="020F0502020204030204" pitchFamily="34" charset="0"/>
-                <a:ea typeface="宋体" panose="02010600030101010101" pitchFamily="2" charset="-122"/>
-              </a:defRPr>
-            </a:lvl4pPr>
-            <a:lvl5pPr marL="2057400" indent="-228600">
-              <a:spcBef>
-                <a:spcPct val="20000"/>
-              </a:spcBef>
-              <a:buFont typeface="Arial" panose="020B0604020202020204" pitchFamily="34" charset="0"/>
-              <a:buChar char="»"/>
-              <a:defRPr sz="2000">
-                <a:solidFill>
-                  <a:schemeClr val="tx1"/>
-                </a:solidFill>
-                <a:latin typeface="Calibri" panose="020F0502020204030204" pitchFamily="34" charset="0"/>
-                <a:ea typeface="宋体" panose="02010600030101010101" pitchFamily="2" charset="-122"/>
-              </a:defRPr>
-            </a:lvl5pPr>
-            <a:lvl6pPr marL="2514600" indent="-228600" eaLnBrk="0" fontAlgn="base" hangingPunct="0">
-              <a:spcBef>
-                <a:spcPct val="20000"/>
-              </a:spcBef>
-              <a:spcAft>
-                <a:spcPct val="0"/>
-              </a:spcAft>
-              <a:buFont typeface="Arial" panose="020B0604020202020204" pitchFamily="34" charset="0"/>
-              <a:buChar char="»"/>
-              <a:defRPr sz="2000">
-                <a:solidFill>
-                  <a:schemeClr val="tx1"/>
-                </a:solidFill>
-                <a:latin typeface="Calibri" panose="020F0502020204030204" pitchFamily="34" charset="0"/>
-                <a:ea typeface="宋体" panose="02010600030101010101" pitchFamily="2" charset="-122"/>
-              </a:defRPr>
-            </a:lvl6pPr>
-            <a:lvl7pPr marL="2971800" indent="-228600" eaLnBrk="0" fontAlgn="base" hangingPunct="0">
-              <a:spcBef>
-                <a:spcPct val="20000"/>
-              </a:spcBef>
-              <a:spcAft>
-                <a:spcPct val="0"/>
-              </a:spcAft>
-              <a:buFont typeface="Arial" panose="020B0604020202020204" pitchFamily="34" charset="0"/>
-              <a:buChar char="»"/>
-              <a:defRPr sz="2000">
-                <a:solidFill>
-                  <a:schemeClr val="tx1"/>
-                </a:solidFill>
-                <a:latin typeface="Calibri" panose="020F0502020204030204" pitchFamily="34" charset="0"/>
-                <a:ea typeface="宋体" panose="02010600030101010101" pitchFamily="2" charset="-122"/>
-              </a:defRPr>
-            </a:lvl7pPr>
-            <a:lvl8pPr marL="3429000" indent="-228600" eaLnBrk="0" fontAlgn="base" hangingPunct="0">
-              <a:spcBef>
-                <a:spcPct val="20000"/>
-              </a:spcBef>
-              <a:spcAft>
-                <a:spcPct val="0"/>
-              </a:spcAft>
-              <a:buFont typeface="Arial" panose="020B0604020202020204" pitchFamily="34" charset="0"/>
-              <a:buChar char="»"/>
-              <a:defRPr sz="2000">
-                <a:solidFill>
-                  <a:schemeClr val="tx1"/>
-                </a:solidFill>
-                <a:latin typeface="Calibri" panose="020F0502020204030204" pitchFamily="34" charset="0"/>
-                <a:ea typeface="宋体" panose="02010600030101010101" pitchFamily="2" charset="-122"/>
-              </a:defRPr>
-            </a:lvl8pPr>
-            <a:lvl9pPr marL="3886200" indent="-228600" eaLnBrk="0" fontAlgn="base" hangingPunct="0">
-              <a:spcBef>
-                <a:spcPct val="20000"/>
-              </a:spcBef>
-              <a:spcAft>
-                <a:spcPct val="0"/>
-              </a:spcAft>
-              <a:buFont typeface="Arial" panose="020B0604020202020204" pitchFamily="34" charset="0"/>
-              <a:buChar char="»"/>
-              <a:defRPr sz="2000">
-                <a:solidFill>
-                  <a:schemeClr val="tx1"/>
-                </a:solidFill>
-                <a:latin typeface="Calibri" panose="020F0502020204030204" pitchFamily="34" charset="0"/>
-                <a:ea typeface="宋体" panose="02010600030101010101" pitchFamily="2" charset="-122"/>
-              </a:defRPr>
-            </a:lvl9pPr>
-          </a:lstStyle>
-          <a:p>
-            <a:pPr eaLnBrk="1" hangingPunct="1">
-              <a:spcBef>
-                <a:spcPct val="50000"/>
-              </a:spcBef>
-              <a:buFontTx/>
-              <a:buNone/>
-            </a:pPr>
-            <a:r>
-              <a:rPr kumimoji="1" lang="zh-CN" altLang="en-US" b="1" dirty="0">
-                <a:latin typeface="黑体" panose="02010609060101010101" pitchFamily="49" charset="-122"/>
-                <a:ea typeface="黑体" panose="02010609060101010101" pitchFamily="49" charset="-122"/>
-                <a:cs typeface="楷体_GB2312"/>
-              </a:rPr>
-              <a:t>第</a:t>
-            </a:r>
-            <a:r>
-              <a:rPr kumimoji="1" lang="en-US" altLang="zh-CN" b="1" dirty="0">
-                <a:latin typeface="黑体" panose="02010609060101010101" pitchFamily="49" charset="-122"/>
-                <a:ea typeface="黑体" panose="02010609060101010101" pitchFamily="49" charset="-122"/>
-                <a:cs typeface="楷体_GB2312"/>
-              </a:rPr>
-              <a:t>2</a:t>
-            </a:r>
-            <a:r>
-              <a:rPr kumimoji="1" lang="zh-CN" altLang="en-US" b="1" dirty="0">
-                <a:latin typeface="黑体" panose="02010609060101010101" pitchFamily="49" charset="-122"/>
-                <a:ea typeface="黑体" panose="02010609060101010101" pitchFamily="49" charset="-122"/>
-                <a:cs typeface="楷体_GB2312"/>
-              </a:rPr>
-              <a:t>章：模型评估与选择</a:t>
-            </a:r>
-          </a:p>
-        </p:txBody>
-      </p:sp>
-      <p:pic>
-        <p:nvPicPr>
-          <p:cNvPr id="5" name="Picture 2"/>
-          <p:cNvPicPr>
-            <a:picLocks noChangeAspect="1" noChangeArrowheads="1"/>
-          </p:cNvPicPr>
-          <p:nvPr/>
-        </p:nvPicPr>
-        <p:blipFill>
-          <a:blip r:embed="rId2">
-            <a:extLst>
-              <a:ext uri="{28A0092B-C50C-407E-A947-70E740481C1C}">
-                <a14:useLocalDpi xmlns:a14="http://schemas.microsoft.com/office/drawing/2010/main" val="0"/>
-              </a:ext>
-            </a:extLst>
-          </a:blip>
-          <a:srcRect/>
-          <a:stretch>
-            <a:fillRect/>
-          </a:stretch>
-        </p:blipFill>
-        <p:spPr bwMode="auto">
-          <a:xfrm>
-            <a:off x="5292080" y="2132856"/>
-            <a:ext cx="3616849" cy="2664296"/>
-          </a:xfrm>
-          <a:prstGeom prst="rect">
-            <a:avLst/>
-          </a:prstGeom>
-          <a:noFill/>
-          <a:ln>
-            <a:noFill/>
-          </a:ln>
-          <a:effectLst/>
-          <a:extLst>
-            <a:ext uri="{909E8E84-426E-40DD-AFC4-6F175D3DCCD1}">
-              <a14:hiddenFill xmlns:a14="http://schemas.microsoft.com/office/drawing/2010/main">
-                <a:solidFill>
-                  <a:schemeClr val="accent1"/>
-                </a:solidFill>
-              </a14:hiddenFill>
-            </a:ext>
-            <a:ext uri="{91240B29-F687-4F45-9708-019B960494DF}">
-              <a14:hiddenLine xmlns:a14="http://schemas.microsoft.com/office/drawing/2010/main" w="9525">
-                <a:solidFill>
-                  <a:schemeClr val="tx1"/>
-                </a:solidFill>
-                <a:miter lim="800000"/>
-                <a:headEnd/>
-                <a:tailEnd/>
-              </a14:hiddenLine>
-            </a:ext>
-            <a:ext uri="{AF507438-7753-43E0-B8FC-AC1667EBCBE1}">
-              <a14:hiddenEffects xmlns:a14="http://schemas.microsoft.com/office/drawing/2010/main">
-                <a:effectLst>
-                  <a:outerShdw dist="35921" dir="2700000" algn="ctr" rotWithShape="0">
-                    <a:schemeClr val="bg2"/>
-                  </a:outerShdw>
-                </a:effectLst>
-              </a14:hiddenEffects>
-            </a:ext>
-          </a:extLst>
-        </p:spPr>
-      </p:pic>
-    </p:spTree>
-    <p:extLst>
-      <p:ext uri="{BB962C8B-B14F-4D97-AF65-F5344CB8AC3E}">
-        <p14:creationId xmlns:p14="http://schemas.microsoft.com/office/powerpoint/2010/main" val="3305225567"/>
-      </p:ext>
-    </p:extLst>
   </p:cSld>
   <p:clrMapOvr>
     <a:masterClrMapping/>
@@ -22116,13 +19241,1453 @@
                     </p:cTn>
                   </p:par>
                   <p:par>
-                    <p:cTn id="38" fill="hold" nodeType="clickPar">
+                    <p:cTn id="38" fill="hold">
                       <p:stCondLst>
                         <p:cond delay="indefinite"/>
                       </p:stCondLst>
                       <p:childTnLst>
                         <p:par>
-                          <p:cTn id="39" fill="hold" nodeType="withGroup">
+                          <p:cTn id="39" fill="hold">
+                            <p:stCondLst>
+                              <p:cond delay="0"/>
+                            </p:stCondLst>
+                            <p:childTnLst>
+                              <p:par>
+                                <p:cTn id="40" presetID="3" presetClass="entr" presetSubtype="10" fill="hold" grpId="0" nodeType="clickEffect">
+                                  <p:stCondLst>
+                                    <p:cond delay="0"/>
+                                  </p:stCondLst>
+                                  <p:childTnLst>
+                                    <p:set>
+                                      <p:cBhvr>
+                                        <p:cTn id="41" dur="1" fill="hold">
+                                          <p:stCondLst>
+                                            <p:cond delay="0"/>
+                                          </p:stCondLst>
+                                        </p:cTn>
+                                        <p:tgtEl>
+                                          <p:spTgt spid="887811">
+                                            <p:txEl>
+                                              <p:pRg st="12" end="12"/>
+                                            </p:txEl>
+                                          </p:spTgt>
+                                        </p:tgtEl>
+                                        <p:attrNameLst>
+                                          <p:attrName>style.visibility</p:attrName>
+                                        </p:attrNameLst>
+                                      </p:cBhvr>
+                                      <p:to>
+                                        <p:strVal val="visible"/>
+                                      </p:to>
+                                    </p:set>
+                                    <p:animEffect transition="in" filter="blinds(horizontal)">
+                                      <p:cBhvr>
+                                        <p:cTn id="42" dur="500"/>
+                                        <p:tgtEl>
+                                          <p:spTgt spid="887811">
+                                            <p:txEl>
+                                              <p:pRg st="12" end="12"/>
+                                            </p:txEl>
+                                          </p:spTgt>
+                                        </p:tgtEl>
+                                      </p:cBhvr>
+                                    </p:animEffect>
+                                  </p:childTnLst>
+                                </p:cTn>
+                              </p:par>
+                            </p:childTnLst>
+                          </p:cTn>
+                        </p:par>
+                      </p:childTnLst>
+                    </p:cTn>
+                  </p:par>
+                </p:childTnLst>
+              </p:cTn>
+              <p:prevCondLst>
+                <p:cond evt="onPrev" delay="0">
+                  <p:tgtEl>
+                    <p:sldTgt/>
+                  </p:tgtEl>
+                </p:cond>
+              </p:prevCondLst>
+              <p:nextCondLst>
+                <p:cond evt="onNext" delay="0">
+                  <p:tgtEl>
+                    <p:sldTgt/>
+                  </p:tgtEl>
+                </p:cond>
+              </p:nextCondLst>
+            </p:seq>
+          </p:childTnLst>
+        </p:cTn>
+      </p:par>
+    </p:tnLst>
+    <p:bldLst>
+      <p:bldP spid="887811" grpId="0" build="p"/>
+    </p:bldLst>
+  </p:timing>
+</p:sld>
+</file>
+
+<file path=ppt/slides/slide5.xml><?xml version="1.0" encoding="utf-8"?>
+<p:sld xmlns:a="http://schemas.openxmlformats.org/drawingml/2006/main" xmlns:r="http://schemas.openxmlformats.org/officeDocument/2006/relationships" xmlns:p="http://schemas.openxmlformats.org/presentationml/2006/main">
+  <p:cSld>
+    <p:spTree>
+      <p:nvGrpSpPr>
+        <p:cNvPr id="1" name=""/>
+        <p:cNvGrpSpPr/>
+        <p:nvPr/>
+      </p:nvGrpSpPr>
+      <p:grpSpPr>
+        <a:xfrm>
+          <a:off x="0" y="0"/>
+          <a:ext cx="0" cy="0"/>
+          <a:chOff x="0" y="0"/>
+          <a:chExt cx="0" cy="0"/>
+        </a:xfrm>
+      </p:grpSpPr>
+      <p:sp>
+        <p:nvSpPr>
+          <p:cNvPr id="18434" name="灯片编号占位符 5"/>
+          <p:cNvSpPr>
+            <a:spLocks noGrp="1"/>
+          </p:cNvSpPr>
+          <p:nvPr>
+            <p:ph type="sldNum" sz="quarter" idx="12"/>
+          </p:nvPr>
+        </p:nvSpPr>
+        <p:spPr bwMode="auto">
+          <a:noFill/>
+          <a:extLst>
+            <a:ext uri="{909E8E84-426E-40DD-AFC4-6F175D3DCCD1}">
+              <a14:hiddenFill xmlns:a14="http://schemas.microsoft.com/office/drawing/2010/main">
+                <a:solidFill>
+                  <a:srgbClr val="FFFFFF"/>
+                </a:solidFill>
+              </a14:hiddenFill>
+            </a:ext>
+            <a:ext uri="{91240B29-F687-4F45-9708-019B960494DF}">
+              <a14:hiddenLine xmlns:a14="http://schemas.microsoft.com/office/drawing/2010/main" w="9525">
+                <a:solidFill>
+                  <a:srgbClr val="000000"/>
+                </a:solidFill>
+                <a:miter lim="800000"/>
+                <a:headEnd/>
+                <a:tailEnd/>
+              </a14:hiddenLine>
+            </a:ext>
+          </a:extLst>
+        </p:spPr>
+        <p:txBody>
+          <a:bodyPr/>
+          <a:lstStyle>
+            <a:lvl1pPr>
+              <a:spcBef>
+                <a:spcPct val="20000"/>
+              </a:spcBef>
+              <a:buFont typeface="Arial" panose="020B0604020202020204" pitchFamily="34" charset="0"/>
+              <a:buChar char="•"/>
+              <a:defRPr sz="3200">
+                <a:solidFill>
+                  <a:schemeClr val="tx1"/>
+                </a:solidFill>
+                <a:latin typeface="Calibri" panose="020F0502020204030204" pitchFamily="34" charset="0"/>
+                <a:ea typeface="宋体" panose="02010600030101010101" pitchFamily="2" charset="-122"/>
+              </a:defRPr>
+            </a:lvl1pPr>
+            <a:lvl2pPr marL="742950" indent="-285750">
+              <a:spcBef>
+                <a:spcPct val="20000"/>
+              </a:spcBef>
+              <a:buFont typeface="Arial" panose="020B0604020202020204" pitchFamily="34" charset="0"/>
+              <a:buChar char="–"/>
+              <a:defRPr sz="2800">
+                <a:solidFill>
+                  <a:schemeClr val="tx1"/>
+                </a:solidFill>
+                <a:latin typeface="Calibri" panose="020F0502020204030204" pitchFamily="34" charset="0"/>
+                <a:ea typeface="宋体" panose="02010600030101010101" pitchFamily="2" charset="-122"/>
+              </a:defRPr>
+            </a:lvl2pPr>
+            <a:lvl3pPr marL="1143000" indent="-228600">
+              <a:spcBef>
+                <a:spcPct val="20000"/>
+              </a:spcBef>
+              <a:buFont typeface="Arial" panose="020B0604020202020204" pitchFamily="34" charset="0"/>
+              <a:buChar char="•"/>
+              <a:defRPr sz="2400">
+                <a:solidFill>
+                  <a:schemeClr val="tx1"/>
+                </a:solidFill>
+                <a:latin typeface="Calibri" panose="020F0502020204030204" pitchFamily="34" charset="0"/>
+                <a:ea typeface="宋体" panose="02010600030101010101" pitchFamily="2" charset="-122"/>
+              </a:defRPr>
+            </a:lvl3pPr>
+            <a:lvl4pPr marL="1600200" indent="-228600">
+              <a:spcBef>
+                <a:spcPct val="20000"/>
+              </a:spcBef>
+              <a:buFont typeface="Arial" panose="020B0604020202020204" pitchFamily="34" charset="0"/>
+              <a:buChar char="–"/>
+              <a:defRPr sz="2000">
+                <a:solidFill>
+                  <a:schemeClr val="tx1"/>
+                </a:solidFill>
+                <a:latin typeface="Calibri" panose="020F0502020204030204" pitchFamily="34" charset="0"/>
+                <a:ea typeface="宋体" panose="02010600030101010101" pitchFamily="2" charset="-122"/>
+              </a:defRPr>
+            </a:lvl4pPr>
+            <a:lvl5pPr marL="2057400" indent="-228600">
+              <a:spcBef>
+                <a:spcPct val="20000"/>
+              </a:spcBef>
+              <a:buFont typeface="Arial" panose="020B0604020202020204" pitchFamily="34" charset="0"/>
+              <a:buChar char="»"/>
+              <a:defRPr sz="2000">
+                <a:solidFill>
+                  <a:schemeClr val="tx1"/>
+                </a:solidFill>
+                <a:latin typeface="Calibri" panose="020F0502020204030204" pitchFamily="34" charset="0"/>
+                <a:ea typeface="宋体" panose="02010600030101010101" pitchFamily="2" charset="-122"/>
+              </a:defRPr>
+            </a:lvl5pPr>
+            <a:lvl6pPr marL="2514600" indent="-228600" eaLnBrk="0" fontAlgn="base" hangingPunct="0">
+              <a:spcBef>
+                <a:spcPct val="20000"/>
+              </a:spcBef>
+              <a:spcAft>
+                <a:spcPct val="0"/>
+              </a:spcAft>
+              <a:buFont typeface="Arial" panose="020B0604020202020204" pitchFamily="34" charset="0"/>
+              <a:buChar char="»"/>
+              <a:defRPr sz="2000">
+                <a:solidFill>
+                  <a:schemeClr val="tx1"/>
+                </a:solidFill>
+                <a:latin typeface="Calibri" panose="020F0502020204030204" pitchFamily="34" charset="0"/>
+                <a:ea typeface="宋体" panose="02010600030101010101" pitchFamily="2" charset="-122"/>
+              </a:defRPr>
+            </a:lvl6pPr>
+            <a:lvl7pPr marL="2971800" indent="-228600" eaLnBrk="0" fontAlgn="base" hangingPunct="0">
+              <a:spcBef>
+                <a:spcPct val="20000"/>
+              </a:spcBef>
+              <a:spcAft>
+                <a:spcPct val="0"/>
+              </a:spcAft>
+              <a:buFont typeface="Arial" panose="020B0604020202020204" pitchFamily="34" charset="0"/>
+              <a:buChar char="»"/>
+              <a:defRPr sz="2000">
+                <a:solidFill>
+                  <a:schemeClr val="tx1"/>
+                </a:solidFill>
+                <a:latin typeface="Calibri" panose="020F0502020204030204" pitchFamily="34" charset="0"/>
+                <a:ea typeface="宋体" panose="02010600030101010101" pitchFamily="2" charset="-122"/>
+              </a:defRPr>
+            </a:lvl7pPr>
+            <a:lvl8pPr marL="3429000" indent="-228600" eaLnBrk="0" fontAlgn="base" hangingPunct="0">
+              <a:spcBef>
+                <a:spcPct val="20000"/>
+              </a:spcBef>
+              <a:spcAft>
+                <a:spcPct val="0"/>
+              </a:spcAft>
+              <a:buFont typeface="Arial" panose="020B0604020202020204" pitchFamily="34" charset="0"/>
+              <a:buChar char="»"/>
+              <a:defRPr sz="2000">
+                <a:solidFill>
+                  <a:schemeClr val="tx1"/>
+                </a:solidFill>
+                <a:latin typeface="Calibri" panose="020F0502020204030204" pitchFamily="34" charset="0"/>
+                <a:ea typeface="宋体" panose="02010600030101010101" pitchFamily="2" charset="-122"/>
+              </a:defRPr>
+            </a:lvl8pPr>
+            <a:lvl9pPr marL="3886200" indent="-228600" eaLnBrk="0" fontAlgn="base" hangingPunct="0">
+              <a:spcBef>
+                <a:spcPct val="20000"/>
+              </a:spcBef>
+              <a:spcAft>
+                <a:spcPct val="0"/>
+              </a:spcAft>
+              <a:buFont typeface="Arial" panose="020B0604020202020204" pitchFamily="34" charset="0"/>
+              <a:buChar char="»"/>
+              <a:defRPr sz="2000">
+                <a:solidFill>
+                  <a:schemeClr val="tx1"/>
+                </a:solidFill>
+                <a:latin typeface="Calibri" panose="020F0502020204030204" pitchFamily="34" charset="0"/>
+                <a:ea typeface="宋体" panose="02010600030101010101" pitchFamily="2" charset="-122"/>
+              </a:defRPr>
+            </a:lvl9pPr>
+          </a:lstStyle>
+          <a:p>
+            <a:pPr>
+              <a:spcBef>
+                <a:spcPct val="0"/>
+              </a:spcBef>
+              <a:buFontTx/>
+              <a:buNone/>
+            </a:pPr>
+            <a:fld id="{F12A9DEA-C3F6-4401-A5BF-3745117890AB}" type="slidenum">
+              <a:rPr kumimoji="1" lang="en-US" altLang="zh-CN" sz="1400" smtClean="0">
+                <a:latin typeface="Times New Roman" panose="02020603050405020304" pitchFamily="18" charset="0"/>
+              </a:rPr>
+            </a:fld>
+            <a:endParaRPr kumimoji="1" lang="en-US" altLang="zh-CN" sz="1400">
+              <a:latin typeface="Times New Roman" panose="02020603050405020304" pitchFamily="18" charset="0"/>
+            </a:endParaRPr>
+          </a:p>
+        </p:txBody>
+      </p:sp>
+      <p:sp>
+        <p:nvSpPr>
+          <p:cNvPr id="887811" name="Rectangle 3"/>
+          <p:cNvSpPr>
+            <a:spLocks noGrp="1"/>
+          </p:cNvSpPr>
+          <p:nvPr>
+            <p:ph type="body" idx="1"/>
+          </p:nvPr>
+        </p:nvSpPr>
+        <p:spPr>
+          <a:xfrm>
+            <a:off x="755576" y="1340768"/>
+            <a:ext cx="7416800" cy="1231900"/>
+          </a:xfrm>
+        </p:spPr>
+        <p:txBody>
+          <a:bodyPr/>
+          <a:lstStyle/>
+          <a:p>
+            <a:pPr eaLnBrk="1" hangingPunct="1">
+              <a:lnSpc>
+                <a:spcPct val="120000"/>
+              </a:lnSpc>
+              <a:buClr>
+                <a:srgbClr val="FF0000"/>
+              </a:buClr>
+              <a:buFont typeface="Wingdings" panose="05000000000000000000" pitchFamily="2" charset="2"/>
+              <a:buChar char="p"/>
+              <a:defRPr/>
+            </a:pPr>
+            <a:r>
+              <a:rPr lang="zh-CN" altLang="en-US" sz="2800" dirty="0">
+                <a:latin typeface="Times New Roman" panose="02020603050405020304" pitchFamily="18" charset="0"/>
+                <a:ea typeface="楷体" panose="02010609060101010101" pitchFamily="49" charset="-122"/>
+                <a:cs typeface="Times New Roman" panose="02020603050405020304" pitchFamily="18" charset="0"/>
+              </a:rPr>
+              <a:t> </a:t>
+            </a:r>
+            <a:r>
+              <a:rPr lang="zh-CN" altLang="en-US" sz="2800" b="1" dirty="0">
+                <a:latin typeface="Times New Roman" panose="02020603050405020304" pitchFamily="18" charset="0"/>
+                <a:ea typeface="楷体" panose="02010609060101010101" pitchFamily="49" charset="-122"/>
+                <a:cs typeface="Times New Roman" panose="02020603050405020304" pitchFamily="18" charset="0"/>
+              </a:rPr>
+              <a:t>过拟合和欠拟合以及相应的解决方案</a:t>
+            </a:r>
+            <a:endParaRPr lang="en-US" altLang="zh-CN" sz="2800" b="1" dirty="0">
+              <a:latin typeface="Times New Roman" panose="02020603050405020304" pitchFamily="18" charset="0"/>
+              <a:ea typeface="楷体" panose="02010609060101010101" pitchFamily="49" charset="-122"/>
+              <a:cs typeface="Times New Roman" panose="02020603050405020304" pitchFamily="18" charset="0"/>
+            </a:endParaRPr>
+          </a:p>
+          <a:p>
+            <a:pPr eaLnBrk="1" hangingPunct="1">
+              <a:lnSpc>
+                <a:spcPct val="120000"/>
+              </a:lnSpc>
+              <a:buClr>
+                <a:srgbClr val="FF0000"/>
+              </a:buClr>
+              <a:buFont typeface="Wingdings" panose="05000000000000000000" pitchFamily="2" charset="2"/>
+              <a:buChar char="p"/>
+              <a:defRPr/>
+            </a:pPr>
+            <a:r>
+              <a:rPr lang="zh-CN" altLang="en-US" sz="2800" b="1" dirty="0">
+                <a:latin typeface="Times New Roman" panose="02020603050405020304" pitchFamily="18" charset="0"/>
+                <a:ea typeface="楷体" panose="02010609060101010101" pitchFamily="49" charset="-122"/>
+                <a:cs typeface="Times New Roman" panose="02020603050405020304" pitchFamily="18" charset="0"/>
+              </a:rPr>
+              <a:t> 评估方法：泛化性能</a:t>
+            </a:r>
+            <a:endParaRPr lang="en-US" altLang="zh-CN" sz="2800" b="1" dirty="0">
+              <a:latin typeface="Times New Roman" panose="02020603050405020304" pitchFamily="18" charset="0"/>
+              <a:ea typeface="楷体" panose="02010609060101010101" pitchFamily="49" charset="-122"/>
+              <a:cs typeface="Times New Roman" panose="02020603050405020304" pitchFamily="18" charset="0"/>
+            </a:endParaRPr>
+          </a:p>
+          <a:p>
+            <a:pPr marL="0" indent="0" eaLnBrk="1" hangingPunct="1">
+              <a:lnSpc>
+                <a:spcPct val="120000"/>
+              </a:lnSpc>
+              <a:buClr>
+                <a:srgbClr val="FF0000"/>
+              </a:buClr>
+              <a:buNone/>
+              <a:defRPr/>
+            </a:pPr>
+            <a:r>
+              <a:rPr lang="zh-CN" altLang="en-US" sz="2400" dirty="0">
+                <a:latin typeface="Times New Roman" panose="02020603050405020304" pitchFamily="18" charset="0"/>
+                <a:ea typeface="楷体" panose="02010609060101010101" pitchFamily="49" charset="-122"/>
+                <a:cs typeface="Times New Roman" panose="02020603050405020304" pitchFamily="18" charset="0"/>
+              </a:rPr>
+              <a:t>（</a:t>
+            </a:r>
+            <a:r>
+              <a:rPr lang="en-US" altLang="zh-CN" sz="2400" dirty="0">
+                <a:latin typeface="Times New Roman" panose="02020603050405020304" pitchFamily="18" charset="0"/>
+                <a:ea typeface="楷体" panose="02010609060101010101" pitchFamily="49" charset="-122"/>
+                <a:cs typeface="Times New Roman" panose="02020603050405020304" pitchFamily="18" charset="0"/>
+              </a:rPr>
+              <a:t>1</a:t>
+            </a:r>
+            <a:r>
+              <a:rPr lang="zh-CN" altLang="en-US" sz="2400" dirty="0">
+                <a:latin typeface="Times New Roman" panose="02020603050405020304" pitchFamily="18" charset="0"/>
+                <a:ea typeface="楷体" panose="02010609060101010101" pitchFamily="49" charset="-122"/>
+                <a:cs typeface="Times New Roman" panose="02020603050405020304" pitchFamily="18" charset="0"/>
+              </a:rPr>
+              <a:t>）留出法（</a:t>
+            </a:r>
+            <a:r>
+              <a:rPr lang="en-US" altLang="zh-CN" sz="2400" dirty="0">
+                <a:latin typeface="Times New Roman" panose="02020603050405020304" pitchFamily="18" charset="0"/>
+                <a:ea typeface="楷体" panose="02010609060101010101" pitchFamily="49" charset="-122"/>
+                <a:cs typeface="Times New Roman" panose="02020603050405020304" pitchFamily="18" charset="0"/>
+              </a:rPr>
+              <a:t>2</a:t>
+            </a:r>
+            <a:r>
+              <a:rPr lang="zh-CN" altLang="en-US" sz="2400" dirty="0">
+                <a:latin typeface="Times New Roman" panose="02020603050405020304" pitchFamily="18" charset="0"/>
+                <a:ea typeface="楷体" panose="02010609060101010101" pitchFamily="49" charset="-122"/>
+                <a:cs typeface="Times New Roman" panose="02020603050405020304" pitchFamily="18" charset="0"/>
+              </a:rPr>
+              <a:t>）交叉验证法</a:t>
+            </a:r>
+            <a:endParaRPr lang="en-US" altLang="zh-CN" sz="2400" dirty="0">
+              <a:latin typeface="Times New Roman" panose="02020603050405020304" pitchFamily="18" charset="0"/>
+              <a:ea typeface="楷体" panose="02010609060101010101" pitchFamily="49" charset="-122"/>
+              <a:cs typeface="Times New Roman" panose="02020603050405020304" pitchFamily="18" charset="0"/>
+            </a:endParaRPr>
+          </a:p>
+          <a:p>
+            <a:pPr marL="0" indent="0" eaLnBrk="1" hangingPunct="1">
+              <a:lnSpc>
+                <a:spcPct val="120000"/>
+              </a:lnSpc>
+              <a:buClr>
+                <a:srgbClr val="FF0000"/>
+              </a:buClr>
+              <a:buNone/>
+              <a:defRPr/>
+            </a:pPr>
+            <a:r>
+              <a:rPr lang="zh-CN" altLang="en-US" sz="2400" dirty="0">
+                <a:latin typeface="Times New Roman" panose="02020603050405020304" pitchFamily="18" charset="0"/>
+                <a:ea typeface="楷体" panose="02010609060101010101" pitchFamily="49" charset="-122"/>
+                <a:cs typeface="Times New Roman" panose="02020603050405020304" pitchFamily="18" charset="0"/>
+              </a:rPr>
+              <a:t>（</a:t>
+            </a:r>
+            <a:r>
+              <a:rPr lang="en-US" altLang="zh-CN" sz="2400" dirty="0">
+                <a:latin typeface="Times New Roman" panose="02020603050405020304" pitchFamily="18" charset="0"/>
+                <a:ea typeface="楷体" panose="02010609060101010101" pitchFamily="49" charset="-122"/>
+                <a:cs typeface="Times New Roman" panose="02020603050405020304" pitchFamily="18" charset="0"/>
+              </a:rPr>
+              <a:t>3</a:t>
+            </a:r>
+            <a:r>
+              <a:rPr lang="zh-CN" altLang="en-US" sz="2400" dirty="0">
+                <a:latin typeface="Times New Roman" panose="02020603050405020304" pitchFamily="18" charset="0"/>
+                <a:ea typeface="楷体" panose="02010609060101010101" pitchFamily="49" charset="-122"/>
+                <a:cs typeface="Times New Roman" panose="02020603050405020304" pitchFamily="18" charset="0"/>
+              </a:rPr>
+              <a:t>）自助法（</a:t>
+            </a:r>
+            <a:r>
+              <a:rPr lang="en-US" altLang="zh-CN" sz="2400" dirty="0">
+                <a:latin typeface="Times New Roman" panose="02020603050405020304" pitchFamily="18" charset="0"/>
+                <a:ea typeface="楷体" panose="02010609060101010101" pitchFamily="49" charset="-122"/>
+                <a:cs typeface="Times New Roman" panose="02020603050405020304" pitchFamily="18" charset="0"/>
+              </a:rPr>
+              <a:t>4</a:t>
+            </a:r>
+            <a:r>
+              <a:rPr lang="zh-CN" altLang="en-US" sz="2400" dirty="0">
+                <a:latin typeface="Times New Roman" panose="02020603050405020304" pitchFamily="18" charset="0"/>
+                <a:ea typeface="楷体" panose="02010609060101010101" pitchFamily="49" charset="-122"/>
+                <a:cs typeface="Times New Roman" panose="02020603050405020304" pitchFamily="18" charset="0"/>
+              </a:rPr>
+              <a:t>）调参与最终模型</a:t>
+            </a:r>
+            <a:endParaRPr lang="en-US" altLang="zh-CN" sz="2400" dirty="0">
+              <a:latin typeface="Times New Roman" panose="02020603050405020304" pitchFamily="18" charset="0"/>
+              <a:ea typeface="楷体" panose="02010609060101010101" pitchFamily="49" charset="-122"/>
+              <a:cs typeface="Times New Roman" panose="02020603050405020304" pitchFamily="18" charset="0"/>
+            </a:endParaRPr>
+          </a:p>
+          <a:p>
+            <a:pPr eaLnBrk="1" hangingPunct="1">
+              <a:lnSpc>
+                <a:spcPct val="120000"/>
+              </a:lnSpc>
+              <a:buClr>
+                <a:srgbClr val="FF0000"/>
+              </a:buClr>
+              <a:buFont typeface="Wingdings" panose="05000000000000000000" pitchFamily="2" charset="2"/>
+              <a:buChar char="p"/>
+              <a:defRPr/>
+            </a:pPr>
+            <a:r>
+              <a:rPr lang="zh-CN" altLang="en-US" sz="2800" b="1" dirty="0">
+                <a:latin typeface="Times New Roman" panose="02020603050405020304" pitchFamily="18" charset="0"/>
+                <a:ea typeface="楷体" panose="02010609060101010101" pitchFamily="49" charset="-122"/>
+                <a:cs typeface="Times New Roman" panose="02020603050405020304" pitchFamily="18" charset="0"/>
+              </a:rPr>
+              <a:t>性能度量</a:t>
+            </a:r>
+            <a:endParaRPr lang="en-US" altLang="zh-CN" sz="2800" b="1" dirty="0">
+              <a:latin typeface="Times New Roman" panose="02020603050405020304" pitchFamily="18" charset="0"/>
+              <a:ea typeface="楷体" panose="02010609060101010101" pitchFamily="49" charset="-122"/>
+              <a:cs typeface="Times New Roman" panose="02020603050405020304" pitchFamily="18" charset="0"/>
+            </a:endParaRPr>
+          </a:p>
+          <a:p>
+            <a:pPr eaLnBrk="1" hangingPunct="1">
+              <a:lnSpc>
+                <a:spcPct val="120000"/>
+              </a:lnSpc>
+              <a:buClr>
+                <a:srgbClr val="FF0000"/>
+              </a:buClr>
+              <a:buFont typeface="Wingdings" panose="05000000000000000000" pitchFamily="2" charset="2"/>
+              <a:buChar char="p"/>
+              <a:defRPr/>
+            </a:pPr>
+            <a:r>
+              <a:rPr lang="zh-CN" altLang="en-US" sz="2800" b="1" dirty="0">
+                <a:latin typeface="Times New Roman" panose="02020603050405020304" pitchFamily="18" charset="0"/>
+                <a:ea typeface="楷体" panose="02010609060101010101" pitchFamily="49" charset="-122"/>
+                <a:cs typeface="Times New Roman" panose="02020603050405020304" pitchFamily="18" charset="0"/>
+              </a:rPr>
+              <a:t>比较检验</a:t>
+            </a:r>
+            <a:endParaRPr lang="en-US" altLang="zh-CN" sz="2800" b="1" dirty="0">
+              <a:latin typeface="Times New Roman" panose="02020603050405020304" pitchFamily="18" charset="0"/>
+              <a:ea typeface="楷体" panose="02010609060101010101" pitchFamily="49" charset="-122"/>
+              <a:cs typeface="Times New Roman" panose="02020603050405020304" pitchFamily="18" charset="0"/>
+            </a:endParaRPr>
+          </a:p>
+          <a:p>
+            <a:pPr eaLnBrk="1" hangingPunct="1">
+              <a:lnSpc>
+                <a:spcPct val="120000"/>
+              </a:lnSpc>
+              <a:buClr>
+                <a:srgbClr val="FF0000"/>
+              </a:buClr>
+              <a:buFont typeface="Wingdings" panose="05000000000000000000" pitchFamily="2" charset="2"/>
+              <a:buChar char="p"/>
+              <a:defRPr/>
+            </a:pPr>
+            <a:r>
+              <a:rPr lang="zh-CN" altLang="en-US" sz="2800" b="1" dirty="0">
+                <a:latin typeface="Times New Roman" panose="02020603050405020304" pitchFamily="18" charset="0"/>
+                <a:ea typeface="楷体" panose="02010609060101010101" pitchFamily="49" charset="-122"/>
+                <a:cs typeface="Times New Roman" panose="02020603050405020304" pitchFamily="18" charset="0"/>
+              </a:rPr>
+              <a:t>偏差与方差：偏差、方差和噪声解释；偏差</a:t>
+            </a:r>
+            <a:r>
+              <a:rPr lang="en-US" altLang="zh-CN" sz="2800" b="1" dirty="0">
+                <a:latin typeface="Times New Roman" panose="02020603050405020304" pitchFamily="18" charset="0"/>
+                <a:ea typeface="楷体" panose="02010609060101010101" pitchFamily="49" charset="-122"/>
+                <a:cs typeface="Times New Roman" panose="02020603050405020304" pitchFamily="18" charset="0"/>
+              </a:rPr>
+              <a:t>-</a:t>
+            </a:r>
+            <a:r>
+              <a:rPr lang="zh-CN" altLang="en-US" sz="2800" b="1" dirty="0">
+                <a:latin typeface="Times New Roman" panose="02020603050405020304" pitchFamily="18" charset="0"/>
+                <a:ea typeface="楷体" panose="02010609060101010101" pitchFamily="49" charset="-122"/>
+                <a:cs typeface="Times New Roman" panose="02020603050405020304" pitchFamily="18" charset="0"/>
+              </a:rPr>
+              <a:t>方差窘境（与泛化误差的关系）</a:t>
+            </a:r>
+            <a:endParaRPr lang="en-US" altLang="zh-CN" sz="2800" b="1" dirty="0">
+              <a:latin typeface="Times New Roman" panose="02020603050405020304" pitchFamily="18" charset="0"/>
+              <a:ea typeface="楷体" panose="02010609060101010101" pitchFamily="49" charset="-122"/>
+              <a:cs typeface="Times New Roman" panose="02020603050405020304" pitchFamily="18" charset="0"/>
+            </a:endParaRPr>
+          </a:p>
+          <a:p>
+            <a:pPr marL="0" indent="0" eaLnBrk="1" hangingPunct="1">
+              <a:lnSpc>
+                <a:spcPct val="120000"/>
+              </a:lnSpc>
+              <a:buClr>
+                <a:srgbClr val="FF0000"/>
+              </a:buClr>
+              <a:buNone/>
+              <a:defRPr/>
+            </a:pPr>
+            <a:endParaRPr lang="en-US" altLang="zh-CN" sz="2800" dirty="0">
+              <a:latin typeface="Times New Roman" panose="02020603050405020304" pitchFamily="18" charset="0"/>
+              <a:ea typeface="楷体" panose="02010609060101010101" pitchFamily="49" charset="-122"/>
+              <a:cs typeface="Times New Roman" panose="02020603050405020304" pitchFamily="18" charset="0"/>
+            </a:endParaRPr>
+          </a:p>
+          <a:p>
+            <a:pPr eaLnBrk="1" hangingPunct="1">
+              <a:lnSpc>
+                <a:spcPct val="120000"/>
+              </a:lnSpc>
+              <a:buClr>
+                <a:srgbClr val="FF0000"/>
+              </a:buClr>
+              <a:buFont typeface="Wingdings" panose="05000000000000000000" pitchFamily="2" charset="2"/>
+              <a:buChar char="p"/>
+              <a:defRPr/>
+            </a:pPr>
+            <a:endParaRPr lang="en-US" altLang="zh-CN" sz="2800" dirty="0">
+              <a:latin typeface="Times New Roman" panose="02020603050405020304" pitchFamily="18" charset="0"/>
+              <a:ea typeface="楷体" panose="02010609060101010101" pitchFamily="49" charset="-122"/>
+              <a:cs typeface="Times New Roman" panose="02020603050405020304" pitchFamily="18" charset="0"/>
+            </a:endParaRPr>
+          </a:p>
+          <a:p>
+            <a:pPr eaLnBrk="1" hangingPunct="1">
+              <a:lnSpc>
+                <a:spcPct val="120000"/>
+              </a:lnSpc>
+              <a:buClr>
+                <a:srgbClr val="FF0000"/>
+              </a:buClr>
+              <a:buFont typeface="Wingdings" panose="05000000000000000000" pitchFamily="2" charset="2"/>
+              <a:buChar char="p"/>
+              <a:defRPr/>
+            </a:pPr>
+            <a:endParaRPr lang="en-US" altLang="zh-CN" sz="2800" dirty="0">
+              <a:latin typeface="Times New Roman" panose="02020603050405020304" pitchFamily="18" charset="0"/>
+              <a:ea typeface="楷体" panose="02010609060101010101" pitchFamily="49" charset="-122"/>
+              <a:cs typeface="Times New Roman" panose="02020603050405020304" pitchFamily="18" charset="0"/>
+            </a:endParaRPr>
+          </a:p>
+          <a:p>
+            <a:pPr marL="0" indent="0" eaLnBrk="1" hangingPunct="1">
+              <a:lnSpc>
+                <a:spcPct val="120000"/>
+              </a:lnSpc>
+              <a:buClr>
+                <a:srgbClr val="FF0000"/>
+              </a:buClr>
+              <a:buNone/>
+              <a:defRPr/>
+            </a:pPr>
+            <a:endParaRPr lang="en-US" altLang="zh-CN" sz="2800" dirty="0">
+              <a:latin typeface="Times New Roman" panose="02020603050405020304" pitchFamily="18" charset="0"/>
+              <a:ea typeface="楷体" panose="02010609060101010101" pitchFamily="49" charset="-122"/>
+              <a:cs typeface="Times New Roman" panose="02020603050405020304" pitchFamily="18" charset="0"/>
+            </a:endParaRPr>
+          </a:p>
+          <a:p>
+            <a:pPr eaLnBrk="1" hangingPunct="1">
+              <a:lnSpc>
+                <a:spcPct val="120000"/>
+              </a:lnSpc>
+              <a:buClr>
+                <a:srgbClr val="FF0000"/>
+              </a:buClr>
+              <a:buFont typeface="Wingdings" panose="05000000000000000000" pitchFamily="2" charset="2"/>
+              <a:buChar char="p"/>
+              <a:defRPr/>
+            </a:pPr>
+            <a:endParaRPr lang="en-US" altLang="zh-CN" sz="2800" dirty="0">
+              <a:latin typeface="Times New Roman" panose="02020603050405020304" pitchFamily="18" charset="0"/>
+              <a:ea typeface="楷体" panose="02010609060101010101" pitchFamily="49" charset="-122"/>
+              <a:cs typeface="Times New Roman" panose="02020603050405020304" pitchFamily="18" charset="0"/>
+            </a:endParaRPr>
+          </a:p>
+          <a:p>
+            <a:pPr marL="0" indent="0" eaLnBrk="1" hangingPunct="1">
+              <a:lnSpc>
+                <a:spcPct val="120000"/>
+              </a:lnSpc>
+              <a:buClr>
+                <a:srgbClr val="FF0000"/>
+              </a:buClr>
+              <a:buFont typeface="Arial" panose="020B0604020202020204" pitchFamily="34" charset="0"/>
+              <a:buNone/>
+              <a:defRPr/>
+            </a:pPr>
+            <a:r>
+              <a:rPr kumimoji="1" lang="en-US" altLang="zh-CN" sz="2800" dirty="0">
+                <a:latin typeface="Times New Roman" panose="02020603050405020304" pitchFamily="18" charset="0"/>
+                <a:ea typeface="楷体" panose="02010609060101010101" pitchFamily="49" charset="-122"/>
+                <a:cs typeface="Times New Roman" panose="02020603050405020304" pitchFamily="18" charset="0"/>
+              </a:rPr>
+              <a:t>      </a:t>
+            </a:r>
+            <a:endParaRPr kumimoji="1" lang="en-US" altLang="zh-CN" sz="2400" dirty="0">
+              <a:latin typeface="楷体" panose="02010609060101010101" pitchFamily="49" charset="-122"/>
+              <a:ea typeface="楷体" panose="02010609060101010101" pitchFamily="49" charset="-122"/>
+            </a:endParaRPr>
+          </a:p>
+        </p:txBody>
+      </p:sp>
+      <p:sp>
+        <p:nvSpPr>
+          <p:cNvPr id="18436" name="Text Box 4"/>
+          <p:cNvSpPr txBox="1">
+            <a:spLocks noChangeArrowheads="1"/>
+          </p:cNvSpPr>
+          <p:nvPr/>
+        </p:nvSpPr>
+        <p:spPr bwMode="auto">
+          <a:xfrm>
+            <a:off x="684213" y="620713"/>
+            <a:ext cx="8134350" cy="579437"/>
+          </a:xfrm>
+          <a:prstGeom prst="rect">
+            <a:avLst/>
+          </a:prstGeom>
+          <a:noFill/>
+          <a:ln>
+            <a:noFill/>
+          </a:ln>
+          <a:effectLst/>
+          <a:extLst>
+            <a:ext uri="{909E8E84-426E-40DD-AFC4-6F175D3DCCD1}">
+              <a14:hiddenFill xmlns:a14="http://schemas.microsoft.com/office/drawing/2010/main">
+                <a:solidFill>
+                  <a:schemeClr val="hlink"/>
+                </a:solidFill>
+              </a14:hiddenFill>
+            </a:ext>
+            <a:ext uri="{91240B29-F687-4F45-9708-019B960494DF}">
+              <a14:hiddenLine xmlns:a14="http://schemas.microsoft.com/office/drawing/2010/main" w="9525">
+                <a:solidFill>
+                  <a:schemeClr val="tx1"/>
+                </a:solidFill>
+                <a:miter lim="800000"/>
+                <a:headEnd/>
+                <a:tailEnd/>
+              </a14:hiddenLine>
+            </a:ext>
+            <a:ext uri="{AF507438-7753-43E0-B8FC-AC1667EBCBE1}">
+              <a14:hiddenEffects xmlns:a14="http://schemas.microsoft.com/office/drawing/2010/main">
+                <a:effectLst>
+                  <a:outerShdw dist="35921" dir="2700000" algn="ctr" rotWithShape="0">
+                    <a:schemeClr val="bg2"/>
+                  </a:outerShdw>
+                </a:effectLst>
+              </a14:hiddenEffects>
+            </a:ext>
+          </a:extLst>
+        </p:spPr>
+        <p:txBody>
+          <a:bodyPr>
+            <a:spAutoFit/>
+          </a:bodyPr>
+          <a:lstStyle>
+            <a:lvl1pPr marL="457200" indent="-457200">
+              <a:spcBef>
+                <a:spcPct val="20000"/>
+              </a:spcBef>
+              <a:buFont typeface="Arial" panose="020B0604020202020204" pitchFamily="34" charset="0"/>
+              <a:buChar char="•"/>
+              <a:defRPr sz="3200">
+                <a:solidFill>
+                  <a:schemeClr val="tx1"/>
+                </a:solidFill>
+                <a:latin typeface="Calibri" panose="020F0502020204030204" pitchFamily="34" charset="0"/>
+                <a:ea typeface="宋体" panose="02010600030101010101" pitchFamily="2" charset="-122"/>
+              </a:defRPr>
+            </a:lvl1pPr>
+            <a:lvl2pPr marL="742950" indent="-285750">
+              <a:spcBef>
+                <a:spcPct val="20000"/>
+              </a:spcBef>
+              <a:buFont typeface="Arial" panose="020B0604020202020204" pitchFamily="34" charset="0"/>
+              <a:buChar char="–"/>
+              <a:defRPr sz="2800">
+                <a:solidFill>
+                  <a:schemeClr val="tx1"/>
+                </a:solidFill>
+                <a:latin typeface="Calibri" panose="020F0502020204030204" pitchFamily="34" charset="0"/>
+                <a:ea typeface="宋体" panose="02010600030101010101" pitchFamily="2" charset="-122"/>
+              </a:defRPr>
+            </a:lvl2pPr>
+            <a:lvl3pPr marL="1143000" indent="-228600">
+              <a:spcBef>
+                <a:spcPct val="20000"/>
+              </a:spcBef>
+              <a:buFont typeface="Arial" panose="020B0604020202020204" pitchFamily="34" charset="0"/>
+              <a:buChar char="•"/>
+              <a:defRPr sz="2400">
+                <a:solidFill>
+                  <a:schemeClr val="tx1"/>
+                </a:solidFill>
+                <a:latin typeface="Calibri" panose="020F0502020204030204" pitchFamily="34" charset="0"/>
+                <a:ea typeface="宋体" panose="02010600030101010101" pitchFamily="2" charset="-122"/>
+              </a:defRPr>
+            </a:lvl3pPr>
+            <a:lvl4pPr marL="1600200" indent="-228600">
+              <a:spcBef>
+                <a:spcPct val="20000"/>
+              </a:spcBef>
+              <a:buFont typeface="Arial" panose="020B0604020202020204" pitchFamily="34" charset="0"/>
+              <a:buChar char="–"/>
+              <a:defRPr sz="2000">
+                <a:solidFill>
+                  <a:schemeClr val="tx1"/>
+                </a:solidFill>
+                <a:latin typeface="Calibri" panose="020F0502020204030204" pitchFamily="34" charset="0"/>
+                <a:ea typeface="宋体" panose="02010600030101010101" pitchFamily="2" charset="-122"/>
+              </a:defRPr>
+            </a:lvl4pPr>
+            <a:lvl5pPr marL="2057400" indent="-228600">
+              <a:spcBef>
+                <a:spcPct val="20000"/>
+              </a:spcBef>
+              <a:buFont typeface="Arial" panose="020B0604020202020204" pitchFamily="34" charset="0"/>
+              <a:buChar char="»"/>
+              <a:defRPr sz="2000">
+                <a:solidFill>
+                  <a:schemeClr val="tx1"/>
+                </a:solidFill>
+                <a:latin typeface="Calibri" panose="020F0502020204030204" pitchFamily="34" charset="0"/>
+                <a:ea typeface="宋体" panose="02010600030101010101" pitchFamily="2" charset="-122"/>
+              </a:defRPr>
+            </a:lvl5pPr>
+            <a:lvl6pPr marL="2514600" indent="-228600" eaLnBrk="0" fontAlgn="base" hangingPunct="0">
+              <a:spcBef>
+                <a:spcPct val="20000"/>
+              </a:spcBef>
+              <a:spcAft>
+                <a:spcPct val="0"/>
+              </a:spcAft>
+              <a:buFont typeface="Arial" panose="020B0604020202020204" pitchFamily="34" charset="0"/>
+              <a:buChar char="»"/>
+              <a:defRPr sz="2000">
+                <a:solidFill>
+                  <a:schemeClr val="tx1"/>
+                </a:solidFill>
+                <a:latin typeface="Calibri" panose="020F0502020204030204" pitchFamily="34" charset="0"/>
+                <a:ea typeface="宋体" panose="02010600030101010101" pitchFamily="2" charset="-122"/>
+              </a:defRPr>
+            </a:lvl6pPr>
+            <a:lvl7pPr marL="2971800" indent="-228600" eaLnBrk="0" fontAlgn="base" hangingPunct="0">
+              <a:spcBef>
+                <a:spcPct val="20000"/>
+              </a:spcBef>
+              <a:spcAft>
+                <a:spcPct val="0"/>
+              </a:spcAft>
+              <a:buFont typeface="Arial" panose="020B0604020202020204" pitchFamily="34" charset="0"/>
+              <a:buChar char="»"/>
+              <a:defRPr sz="2000">
+                <a:solidFill>
+                  <a:schemeClr val="tx1"/>
+                </a:solidFill>
+                <a:latin typeface="Calibri" panose="020F0502020204030204" pitchFamily="34" charset="0"/>
+                <a:ea typeface="宋体" panose="02010600030101010101" pitchFamily="2" charset="-122"/>
+              </a:defRPr>
+            </a:lvl7pPr>
+            <a:lvl8pPr marL="3429000" indent="-228600" eaLnBrk="0" fontAlgn="base" hangingPunct="0">
+              <a:spcBef>
+                <a:spcPct val="20000"/>
+              </a:spcBef>
+              <a:spcAft>
+                <a:spcPct val="0"/>
+              </a:spcAft>
+              <a:buFont typeface="Arial" panose="020B0604020202020204" pitchFamily="34" charset="0"/>
+              <a:buChar char="»"/>
+              <a:defRPr sz="2000">
+                <a:solidFill>
+                  <a:schemeClr val="tx1"/>
+                </a:solidFill>
+                <a:latin typeface="Calibri" panose="020F0502020204030204" pitchFamily="34" charset="0"/>
+                <a:ea typeface="宋体" panose="02010600030101010101" pitchFamily="2" charset="-122"/>
+              </a:defRPr>
+            </a:lvl8pPr>
+            <a:lvl9pPr marL="3886200" indent="-228600" eaLnBrk="0" fontAlgn="base" hangingPunct="0">
+              <a:spcBef>
+                <a:spcPct val="20000"/>
+              </a:spcBef>
+              <a:spcAft>
+                <a:spcPct val="0"/>
+              </a:spcAft>
+              <a:buFont typeface="Arial" panose="020B0604020202020204" pitchFamily="34" charset="0"/>
+              <a:buChar char="»"/>
+              <a:defRPr sz="2000">
+                <a:solidFill>
+                  <a:schemeClr val="tx1"/>
+                </a:solidFill>
+                <a:latin typeface="Calibri" panose="020F0502020204030204" pitchFamily="34" charset="0"/>
+                <a:ea typeface="宋体" panose="02010600030101010101" pitchFamily="2" charset="-122"/>
+              </a:defRPr>
+            </a:lvl9pPr>
+          </a:lstStyle>
+          <a:p>
+            <a:pPr eaLnBrk="1" hangingPunct="1">
+              <a:spcBef>
+                <a:spcPct val="50000"/>
+              </a:spcBef>
+              <a:buFontTx/>
+              <a:buNone/>
+            </a:pPr>
+            <a:r>
+              <a:rPr kumimoji="1" lang="zh-CN" altLang="en-US" b="1" dirty="0">
+                <a:latin typeface="黑体" panose="02010609060101010101" pitchFamily="49" charset="-122"/>
+                <a:ea typeface="黑体" panose="02010609060101010101" pitchFamily="49" charset="-122"/>
+                <a:cs typeface="楷体_GB2312"/>
+              </a:rPr>
+              <a:t>第</a:t>
+            </a:r>
+            <a:r>
+              <a:rPr kumimoji="1" lang="en-US" altLang="zh-CN" b="1" dirty="0">
+                <a:latin typeface="黑体" panose="02010609060101010101" pitchFamily="49" charset="-122"/>
+                <a:ea typeface="黑体" panose="02010609060101010101" pitchFamily="49" charset="-122"/>
+                <a:cs typeface="楷体_GB2312"/>
+              </a:rPr>
+              <a:t>2</a:t>
+            </a:r>
+            <a:r>
+              <a:rPr kumimoji="1" lang="zh-CN" altLang="en-US" b="1" dirty="0">
+                <a:latin typeface="黑体" panose="02010609060101010101" pitchFamily="49" charset="-122"/>
+                <a:ea typeface="黑体" panose="02010609060101010101" pitchFamily="49" charset="-122"/>
+                <a:cs typeface="楷体_GB2312"/>
+              </a:rPr>
+              <a:t>章：模型评估与选择</a:t>
+            </a:r>
+            <a:endParaRPr kumimoji="1" lang="zh-CN" altLang="en-US" b="1" dirty="0">
+              <a:latin typeface="黑体" panose="02010609060101010101" pitchFamily="49" charset="-122"/>
+              <a:ea typeface="黑体" panose="02010609060101010101" pitchFamily="49" charset="-122"/>
+              <a:cs typeface="楷体_GB2312"/>
+            </a:endParaRPr>
+          </a:p>
+        </p:txBody>
+      </p:sp>
+      <p:pic>
+        <p:nvPicPr>
+          <p:cNvPr id="5" name="Picture 2"/>
+          <p:cNvPicPr>
+            <a:picLocks noChangeAspect="1" noChangeArrowheads="1"/>
+          </p:cNvPicPr>
+          <p:nvPr/>
+        </p:nvPicPr>
+        <p:blipFill>
+          <a:blip r:embed="rId1">
+            <a:extLst>
+              <a:ext uri="{28A0092B-C50C-407E-A947-70E740481C1C}">
+                <a14:useLocalDpi xmlns:a14="http://schemas.microsoft.com/office/drawing/2010/main" val="0"/>
+              </a:ext>
+            </a:extLst>
+          </a:blip>
+          <a:srcRect/>
+          <a:stretch>
+            <a:fillRect/>
+          </a:stretch>
+        </p:blipFill>
+        <p:spPr bwMode="auto">
+          <a:xfrm>
+            <a:off x="5292080" y="2132856"/>
+            <a:ext cx="3616849" cy="2664296"/>
+          </a:xfrm>
+          <a:prstGeom prst="rect">
+            <a:avLst/>
+          </a:prstGeom>
+          <a:noFill/>
+          <a:ln>
+            <a:noFill/>
+          </a:ln>
+          <a:effectLst/>
+          <a:extLst>
+            <a:ext uri="{909E8E84-426E-40DD-AFC4-6F175D3DCCD1}">
+              <a14:hiddenFill xmlns:a14="http://schemas.microsoft.com/office/drawing/2010/main">
+                <a:solidFill>
+                  <a:schemeClr val="accent1"/>
+                </a:solidFill>
+              </a14:hiddenFill>
+            </a:ext>
+            <a:ext uri="{91240B29-F687-4F45-9708-019B960494DF}">
+              <a14:hiddenLine xmlns:a14="http://schemas.microsoft.com/office/drawing/2010/main" w="9525">
+                <a:solidFill>
+                  <a:schemeClr val="tx1"/>
+                </a:solidFill>
+                <a:miter lim="800000"/>
+                <a:headEnd/>
+                <a:tailEnd/>
+              </a14:hiddenLine>
+            </a:ext>
+            <a:ext uri="{AF507438-7753-43E0-B8FC-AC1667EBCBE1}">
+              <a14:hiddenEffects xmlns:a14="http://schemas.microsoft.com/office/drawing/2010/main">
+                <a:effectLst>
+                  <a:outerShdw dist="35921" dir="2700000" algn="ctr" rotWithShape="0">
+                    <a:schemeClr val="bg2"/>
+                  </a:outerShdw>
+                </a:effectLst>
+              </a14:hiddenEffects>
+            </a:ext>
+          </a:extLst>
+        </p:spPr>
+      </p:pic>
+    </p:spTree>
+  </p:cSld>
+  <p:clrMapOvr>
+    <a:masterClrMapping/>
+  </p:clrMapOvr>
+  <p:transition/>
+  <p:timing>
+    <p:tnLst>
+      <p:par>
+        <p:cTn id="1" dur="indefinite" restart="never" nodeType="tmRoot">
+          <p:childTnLst>
+            <p:seq concurrent="1" nextAc="seek">
+              <p:cTn id="2" dur="indefinite" nodeType="mainSeq">
+                <p:childTnLst>
+                  <p:par>
+                    <p:cTn id="3" fill="hold">
+                      <p:stCondLst>
+                        <p:cond delay="indefinite"/>
+                      </p:stCondLst>
+                      <p:childTnLst>
+                        <p:par>
+                          <p:cTn id="4" fill="hold">
+                            <p:stCondLst>
+                              <p:cond delay="0"/>
+                            </p:stCondLst>
+                            <p:childTnLst>
+                              <p:par>
+                                <p:cTn id="5" presetID="3" presetClass="entr" presetSubtype="10" fill="hold" grpId="0" nodeType="clickEffect">
+                                  <p:stCondLst>
+                                    <p:cond delay="0"/>
+                                  </p:stCondLst>
+                                  <p:childTnLst>
+                                    <p:set>
+                                      <p:cBhvr>
+                                        <p:cTn id="6" dur="1" fill="hold">
+                                          <p:stCondLst>
+                                            <p:cond delay="0"/>
+                                          </p:stCondLst>
+                                        </p:cTn>
+                                        <p:tgtEl>
+                                          <p:spTgt spid="887811">
+                                            <p:txEl>
+                                              <p:pRg st="0" end="0"/>
+                                            </p:txEl>
+                                          </p:spTgt>
+                                        </p:tgtEl>
+                                        <p:attrNameLst>
+                                          <p:attrName>style.visibility</p:attrName>
+                                        </p:attrNameLst>
+                                      </p:cBhvr>
+                                      <p:to>
+                                        <p:strVal val="visible"/>
+                                      </p:to>
+                                    </p:set>
+                                    <p:animEffect transition="in" filter="blinds(horizontal)">
+                                      <p:cBhvr>
+                                        <p:cTn id="7" dur="500"/>
+                                        <p:tgtEl>
+                                          <p:spTgt spid="887811">
+                                            <p:txEl>
+                                              <p:pRg st="0" end="0"/>
+                                            </p:txEl>
+                                          </p:spTgt>
+                                        </p:tgtEl>
+                                      </p:cBhvr>
+                                    </p:animEffect>
+                                  </p:childTnLst>
+                                </p:cTn>
+                              </p:par>
+                            </p:childTnLst>
+                          </p:cTn>
+                        </p:par>
+                      </p:childTnLst>
+                    </p:cTn>
+                  </p:par>
+                  <p:par>
+                    <p:cTn id="8" fill="hold">
+                      <p:stCondLst>
+                        <p:cond delay="indefinite"/>
+                      </p:stCondLst>
+                      <p:childTnLst>
+                        <p:par>
+                          <p:cTn id="9" fill="hold">
+                            <p:stCondLst>
+                              <p:cond delay="0"/>
+                            </p:stCondLst>
+                            <p:childTnLst>
+                              <p:par>
+                                <p:cTn id="10" presetID="3" presetClass="entr" presetSubtype="10" fill="hold" grpId="0" nodeType="clickEffect">
+                                  <p:stCondLst>
+                                    <p:cond delay="0"/>
+                                  </p:stCondLst>
+                                  <p:childTnLst>
+                                    <p:set>
+                                      <p:cBhvr>
+                                        <p:cTn id="11" dur="1" fill="hold">
+                                          <p:stCondLst>
+                                            <p:cond delay="0"/>
+                                          </p:stCondLst>
+                                        </p:cTn>
+                                        <p:tgtEl>
+                                          <p:spTgt spid="887811">
+                                            <p:txEl>
+                                              <p:pRg st="1" end="1"/>
+                                            </p:txEl>
+                                          </p:spTgt>
+                                        </p:tgtEl>
+                                        <p:attrNameLst>
+                                          <p:attrName>style.visibility</p:attrName>
+                                        </p:attrNameLst>
+                                      </p:cBhvr>
+                                      <p:to>
+                                        <p:strVal val="visible"/>
+                                      </p:to>
+                                    </p:set>
+                                    <p:animEffect transition="in" filter="blinds(horizontal)">
+                                      <p:cBhvr>
+                                        <p:cTn id="12" dur="500"/>
+                                        <p:tgtEl>
+                                          <p:spTgt spid="887811">
+                                            <p:txEl>
+                                              <p:pRg st="1" end="1"/>
+                                            </p:txEl>
+                                          </p:spTgt>
+                                        </p:tgtEl>
+                                      </p:cBhvr>
+                                    </p:animEffect>
+                                  </p:childTnLst>
+                                </p:cTn>
+                              </p:par>
+                            </p:childTnLst>
+                          </p:cTn>
+                        </p:par>
+                      </p:childTnLst>
+                    </p:cTn>
+                  </p:par>
+                  <p:par>
+                    <p:cTn id="13" fill="hold">
+                      <p:stCondLst>
+                        <p:cond delay="indefinite"/>
+                      </p:stCondLst>
+                      <p:childTnLst>
+                        <p:par>
+                          <p:cTn id="14" fill="hold">
+                            <p:stCondLst>
+                              <p:cond delay="0"/>
+                            </p:stCondLst>
+                            <p:childTnLst>
+                              <p:par>
+                                <p:cTn id="15" presetID="3" presetClass="entr" presetSubtype="10" fill="hold" grpId="0" nodeType="clickEffect">
+                                  <p:stCondLst>
+                                    <p:cond delay="0"/>
+                                  </p:stCondLst>
+                                  <p:childTnLst>
+                                    <p:set>
+                                      <p:cBhvr>
+                                        <p:cTn id="16" dur="1" fill="hold">
+                                          <p:stCondLst>
+                                            <p:cond delay="0"/>
+                                          </p:stCondLst>
+                                        </p:cTn>
+                                        <p:tgtEl>
+                                          <p:spTgt spid="887811">
+                                            <p:txEl>
+                                              <p:pRg st="2" end="2"/>
+                                            </p:txEl>
+                                          </p:spTgt>
+                                        </p:tgtEl>
+                                        <p:attrNameLst>
+                                          <p:attrName>style.visibility</p:attrName>
+                                        </p:attrNameLst>
+                                      </p:cBhvr>
+                                      <p:to>
+                                        <p:strVal val="visible"/>
+                                      </p:to>
+                                    </p:set>
+                                    <p:animEffect transition="in" filter="blinds(horizontal)">
+                                      <p:cBhvr>
+                                        <p:cTn id="17" dur="500"/>
+                                        <p:tgtEl>
+                                          <p:spTgt spid="887811">
+                                            <p:txEl>
+                                              <p:pRg st="2" end="2"/>
+                                            </p:txEl>
+                                          </p:spTgt>
+                                        </p:tgtEl>
+                                      </p:cBhvr>
+                                    </p:animEffect>
+                                  </p:childTnLst>
+                                </p:cTn>
+                              </p:par>
+                            </p:childTnLst>
+                          </p:cTn>
+                        </p:par>
+                      </p:childTnLst>
+                    </p:cTn>
+                  </p:par>
+                  <p:par>
+                    <p:cTn id="18" fill="hold">
+                      <p:stCondLst>
+                        <p:cond delay="indefinite"/>
+                      </p:stCondLst>
+                      <p:childTnLst>
+                        <p:par>
+                          <p:cTn id="19" fill="hold">
+                            <p:stCondLst>
+                              <p:cond delay="0"/>
+                            </p:stCondLst>
+                            <p:childTnLst>
+                              <p:par>
+                                <p:cTn id="20" presetID="3" presetClass="entr" presetSubtype="10" fill="hold" grpId="0" nodeType="clickEffect">
+                                  <p:stCondLst>
+                                    <p:cond delay="0"/>
+                                  </p:stCondLst>
+                                  <p:childTnLst>
+                                    <p:set>
+                                      <p:cBhvr>
+                                        <p:cTn id="21" dur="1" fill="hold">
+                                          <p:stCondLst>
+                                            <p:cond delay="0"/>
+                                          </p:stCondLst>
+                                        </p:cTn>
+                                        <p:tgtEl>
+                                          <p:spTgt spid="887811">
+                                            <p:txEl>
+                                              <p:pRg st="3" end="3"/>
+                                            </p:txEl>
+                                          </p:spTgt>
+                                        </p:tgtEl>
+                                        <p:attrNameLst>
+                                          <p:attrName>style.visibility</p:attrName>
+                                        </p:attrNameLst>
+                                      </p:cBhvr>
+                                      <p:to>
+                                        <p:strVal val="visible"/>
+                                      </p:to>
+                                    </p:set>
+                                    <p:animEffect transition="in" filter="blinds(horizontal)">
+                                      <p:cBhvr>
+                                        <p:cTn id="22" dur="500"/>
+                                        <p:tgtEl>
+                                          <p:spTgt spid="887811">
+                                            <p:txEl>
+                                              <p:pRg st="3" end="3"/>
+                                            </p:txEl>
+                                          </p:spTgt>
+                                        </p:tgtEl>
+                                      </p:cBhvr>
+                                    </p:animEffect>
+                                  </p:childTnLst>
+                                </p:cTn>
+                              </p:par>
+                            </p:childTnLst>
+                          </p:cTn>
+                        </p:par>
+                      </p:childTnLst>
+                    </p:cTn>
+                  </p:par>
+                  <p:par>
+                    <p:cTn id="23" fill="hold">
+                      <p:stCondLst>
+                        <p:cond delay="indefinite"/>
+                      </p:stCondLst>
+                      <p:childTnLst>
+                        <p:par>
+                          <p:cTn id="24" fill="hold">
+                            <p:stCondLst>
+                              <p:cond delay="0"/>
+                            </p:stCondLst>
+                            <p:childTnLst>
+                              <p:par>
+                                <p:cTn id="25" presetID="3" presetClass="entr" presetSubtype="10" fill="hold" grpId="0" nodeType="clickEffect">
+                                  <p:stCondLst>
+                                    <p:cond delay="0"/>
+                                  </p:stCondLst>
+                                  <p:childTnLst>
+                                    <p:set>
+                                      <p:cBhvr>
+                                        <p:cTn id="26" dur="1" fill="hold">
+                                          <p:stCondLst>
+                                            <p:cond delay="0"/>
+                                          </p:stCondLst>
+                                        </p:cTn>
+                                        <p:tgtEl>
+                                          <p:spTgt spid="887811">
+                                            <p:txEl>
+                                              <p:pRg st="4" end="4"/>
+                                            </p:txEl>
+                                          </p:spTgt>
+                                        </p:tgtEl>
+                                        <p:attrNameLst>
+                                          <p:attrName>style.visibility</p:attrName>
+                                        </p:attrNameLst>
+                                      </p:cBhvr>
+                                      <p:to>
+                                        <p:strVal val="visible"/>
+                                      </p:to>
+                                    </p:set>
+                                    <p:animEffect transition="in" filter="blinds(horizontal)">
+                                      <p:cBhvr>
+                                        <p:cTn id="27" dur="500"/>
+                                        <p:tgtEl>
+                                          <p:spTgt spid="887811">
+                                            <p:txEl>
+                                              <p:pRg st="4" end="4"/>
+                                            </p:txEl>
+                                          </p:spTgt>
+                                        </p:tgtEl>
+                                      </p:cBhvr>
+                                    </p:animEffect>
+                                  </p:childTnLst>
+                                </p:cTn>
+                              </p:par>
+                            </p:childTnLst>
+                          </p:cTn>
+                        </p:par>
+                      </p:childTnLst>
+                    </p:cTn>
+                  </p:par>
+                  <p:par>
+                    <p:cTn id="28" fill="hold">
+                      <p:stCondLst>
+                        <p:cond delay="indefinite"/>
+                      </p:stCondLst>
+                      <p:childTnLst>
+                        <p:par>
+                          <p:cTn id="29" fill="hold">
+                            <p:stCondLst>
+                              <p:cond delay="0"/>
+                            </p:stCondLst>
+                            <p:childTnLst>
+                              <p:par>
+                                <p:cTn id="30" presetID="3" presetClass="entr" presetSubtype="10" fill="hold" grpId="0" nodeType="clickEffect">
+                                  <p:stCondLst>
+                                    <p:cond delay="0"/>
+                                  </p:stCondLst>
+                                  <p:childTnLst>
+                                    <p:set>
+                                      <p:cBhvr>
+                                        <p:cTn id="31" dur="1" fill="hold">
+                                          <p:stCondLst>
+                                            <p:cond delay="0"/>
+                                          </p:stCondLst>
+                                        </p:cTn>
+                                        <p:tgtEl>
+                                          <p:spTgt spid="887811">
+                                            <p:txEl>
+                                              <p:pRg st="5" end="5"/>
+                                            </p:txEl>
+                                          </p:spTgt>
+                                        </p:tgtEl>
+                                        <p:attrNameLst>
+                                          <p:attrName>style.visibility</p:attrName>
+                                        </p:attrNameLst>
+                                      </p:cBhvr>
+                                      <p:to>
+                                        <p:strVal val="visible"/>
+                                      </p:to>
+                                    </p:set>
+                                    <p:animEffect transition="in" filter="blinds(horizontal)">
+                                      <p:cBhvr>
+                                        <p:cTn id="32" dur="500"/>
+                                        <p:tgtEl>
+                                          <p:spTgt spid="887811">
+                                            <p:txEl>
+                                              <p:pRg st="5" end="5"/>
+                                            </p:txEl>
+                                          </p:spTgt>
+                                        </p:tgtEl>
+                                      </p:cBhvr>
+                                    </p:animEffect>
+                                  </p:childTnLst>
+                                </p:cTn>
+                              </p:par>
+                            </p:childTnLst>
+                          </p:cTn>
+                        </p:par>
+                      </p:childTnLst>
+                    </p:cTn>
+                  </p:par>
+                  <p:par>
+                    <p:cTn id="33" fill="hold">
+                      <p:stCondLst>
+                        <p:cond delay="indefinite"/>
+                      </p:stCondLst>
+                      <p:childTnLst>
+                        <p:par>
+                          <p:cTn id="34" fill="hold">
+                            <p:stCondLst>
+                              <p:cond delay="0"/>
+                            </p:stCondLst>
+                            <p:childTnLst>
+                              <p:par>
+                                <p:cTn id="35" presetID="3" presetClass="entr" presetSubtype="10" fill="hold" grpId="0" nodeType="clickEffect">
+                                  <p:stCondLst>
+                                    <p:cond delay="0"/>
+                                  </p:stCondLst>
+                                  <p:childTnLst>
+                                    <p:set>
+                                      <p:cBhvr>
+                                        <p:cTn id="36" dur="1" fill="hold">
+                                          <p:stCondLst>
+                                            <p:cond delay="0"/>
+                                          </p:stCondLst>
+                                        </p:cTn>
+                                        <p:tgtEl>
+                                          <p:spTgt spid="887811">
+                                            <p:txEl>
+                                              <p:pRg st="6" end="6"/>
+                                            </p:txEl>
+                                          </p:spTgt>
+                                        </p:tgtEl>
+                                        <p:attrNameLst>
+                                          <p:attrName>style.visibility</p:attrName>
+                                        </p:attrNameLst>
+                                      </p:cBhvr>
+                                      <p:to>
+                                        <p:strVal val="visible"/>
+                                      </p:to>
+                                    </p:set>
+                                    <p:animEffect transition="in" filter="blinds(horizontal)">
+                                      <p:cBhvr>
+                                        <p:cTn id="37" dur="500"/>
+                                        <p:tgtEl>
+                                          <p:spTgt spid="887811">
+                                            <p:txEl>
+                                              <p:pRg st="6" end="6"/>
+                                            </p:txEl>
+                                          </p:spTgt>
+                                        </p:tgtEl>
+                                      </p:cBhvr>
+                                    </p:animEffect>
+                                  </p:childTnLst>
+                                </p:cTn>
+                              </p:par>
+                            </p:childTnLst>
+                          </p:cTn>
+                        </p:par>
+                      </p:childTnLst>
+                    </p:cTn>
+                  </p:par>
+                  <p:par>
+                    <p:cTn id="38" fill="hold">
+                      <p:stCondLst>
+                        <p:cond delay="indefinite"/>
+                      </p:stCondLst>
+                      <p:childTnLst>
+                        <p:par>
+                          <p:cTn id="39" fill="hold">
                             <p:stCondLst>
                               <p:cond delay="0"/>
                             </p:stCondLst>
@@ -22512,6 +21077,11 @@
               </a:rPr>
               <a:t>AUC</a:t>
             </a:r>
+            <a:endParaRPr lang="en-US" altLang="zh-CN" sz="2400" b="1" dirty="0">
+              <a:latin typeface="Times New Roman" panose="02020603050405020304" pitchFamily="18" charset="0"/>
+              <a:ea typeface="楷体" panose="02010609060101010101" pitchFamily="49" charset="-122"/>
+              <a:cs typeface="Times New Roman" panose="02020603050405020304" pitchFamily="18" charset="0"/>
+            </a:endParaRPr>
           </a:p>
         </p:txBody>
       </p:sp>
@@ -22524,7 +21094,7 @@
           <p:nvPr/>
         </p:nvPicPr>
         <p:blipFill>
-          <a:blip r:embed="rId2" cstate="print">
+          <a:blip r:embed="rId1" cstate="print">
             <a:extLst>
               <a:ext uri="{28A0092B-C50C-407E-A947-70E740481C1C}">
                 <a14:useLocalDpi xmlns:a14="http://schemas.microsoft.com/office/drawing/2010/main" val="0"/>
@@ -22580,11 +21150,6 @@
         </p:spPr>
       </p:pic>
     </p:spTree>
-    <p:extLst>
-      <p:ext uri="{BB962C8B-B14F-4D97-AF65-F5344CB8AC3E}">
-        <p14:creationId xmlns:p14="http://schemas.microsoft.com/office/powerpoint/2010/main" val="3273693375"/>
-      </p:ext>
-    </p:extLst>
   </p:cSld>
   <p:clrMapOvr>
     <a:masterClrMapping/>
@@ -22686,13 +21251,7 @@
       </p:grpSpPr>
       <p:sp>
         <p:nvSpPr>
-          <p:cNvPr id="18434" name="灯片编号占位符 5">
-            <a:extLst>
-              <a:ext uri="{FF2B5EF4-FFF2-40B4-BE49-F238E27FC236}">
-                <a16:creationId xmlns:a16="http://schemas.microsoft.com/office/drawing/2014/main" id="{CBBD9809-2CC4-42C3-B564-FAC6896E7580}"/>
-              </a:ext>
-            </a:extLst>
-          </p:cNvPr>
+          <p:cNvPr id="18434" name="灯片编号占位符 5"/>
           <p:cNvSpPr>
             <a:spLocks noGrp="1"/>
           </p:cNvSpPr>
@@ -22876,14 +21435,6 @@
               <a:rPr kumimoji="1" lang="en-US" altLang="zh-CN" sz="1400" smtClean="0">
                 <a:latin typeface="Times New Roman" panose="02020603050405020304" pitchFamily="18" charset="0"/>
               </a:rPr>
-              <a:pPr>
-                <a:spcBef>
-                  <a:spcPct val="0"/>
-                </a:spcBef>
-                <a:buFontTx/>
-                <a:buNone/>
-              </a:pPr>
-              <a:t>7</a:t>
             </a:fld>
             <a:endParaRPr kumimoji="1" lang="en-US" altLang="zh-CN" sz="1400">
               <a:latin typeface="Times New Roman" panose="02020603050405020304" pitchFamily="18" charset="0"/>
@@ -22893,13 +21444,7 @@
       </p:sp>
       <p:sp>
         <p:nvSpPr>
-          <p:cNvPr id="887811" name="Rectangle 3">
-            <a:extLst>
-              <a:ext uri="{FF2B5EF4-FFF2-40B4-BE49-F238E27FC236}">
-                <a16:creationId xmlns:a16="http://schemas.microsoft.com/office/drawing/2014/main" id="{E67925BF-BD9D-4849-975B-B00461AA9122}"/>
-              </a:ext>
-            </a:extLst>
-          </p:cNvPr>
+          <p:cNvPr id="887811" name="Rectangle 3"/>
           <p:cNvSpPr>
             <a:spLocks noGrp="1"/>
           </p:cNvSpPr>
@@ -22996,6 +21541,11 @@
               </a:rPr>
               <a:t>对数几率回归（极大似然法）</a:t>
             </a:r>
+            <a:endParaRPr lang="zh-CN" altLang="en-US" sz="2400" dirty="0">
+              <a:latin typeface="Times New Roman" panose="02020603050405020304" pitchFamily="18" charset="0"/>
+              <a:ea typeface="楷体" panose="02010609060101010101" pitchFamily="49" charset="-122"/>
+              <a:cs typeface="Times New Roman" panose="02020603050405020304" pitchFamily="18" charset="0"/>
+            </a:endParaRPr>
           </a:p>
           <a:p>
             <a:pPr lvl="1" eaLnBrk="1" hangingPunct="1">
@@ -23085,6 +21635,11 @@
               </a:rPr>
               <a:t>一对一</a:t>
             </a:r>
+            <a:endParaRPr lang="zh-CN" altLang="en-US" sz="2400" dirty="0">
+              <a:latin typeface="Times New Roman" panose="02020603050405020304" pitchFamily="18" charset="0"/>
+              <a:ea typeface="楷体" panose="02010609060101010101" pitchFamily="49" charset="-122"/>
+              <a:cs typeface="Times New Roman" panose="02020603050405020304" pitchFamily="18" charset="0"/>
+            </a:endParaRPr>
           </a:p>
           <a:p>
             <a:pPr lvl="1" eaLnBrk="1" hangingPunct="1">
@@ -23106,6 +21661,11 @@
               </a:rPr>
               <a:t>一对其余</a:t>
             </a:r>
+            <a:endParaRPr lang="zh-CN" altLang="en-US" sz="2400" dirty="0">
+              <a:latin typeface="Times New Roman" panose="02020603050405020304" pitchFamily="18" charset="0"/>
+              <a:ea typeface="楷体" panose="02010609060101010101" pitchFamily="49" charset="-122"/>
+              <a:cs typeface="Times New Roman" panose="02020603050405020304" pitchFamily="18" charset="0"/>
+            </a:endParaRPr>
           </a:p>
           <a:p>
             <a:pPr lvl="1" eaLnBrk="1" hangingPunct="1">
@@ -23143,6 +21703,11 @@
               </a:rPr>
               <a:t>）</a:t>
             </a:r>
+            <a:endParaRPr lang="zh-CN" altLang="en-US" sz="2400" dirty="0">
+              <a:latin typeface="Times New Roman" panose="02020603050405020304" pitchFamily="18" charset="0"/>
+              <a:ea typeface="楷体" panose="02010609060101010101" pitchFamily="49" charset="-122"/>
+              <a:cs typeface="Times New Roman" panose="02020603050405020304" pitchFamily="18" charset="0"/>
+            </a:endParaRPr>
           </a:p>
           <a:p>
             <a:pPr eaLnBrk="1" hangingPunct="1">
@@ -23288,13 +21853,7 @@
       </p:sp>
       <p:sp>
         <p:nvSpPr>
-          <p:cNvPr id="18436" name="Text Box 4">
-            <a:extLst>
-              <a:ext uri="{FF2B5EF4-FFF2-40B4-BE49-F238E27FC236}">
-                <a16:creationId xmlns:a16="http://schemas.microsoft.com/office/drawing/2014/main" id="{EB81EA09-BA58-4C02-A7E1-E64004DF3351}"/>
-              </a:ext>
-            </a:extLst>
-          </p:cNvPr>
+          <p:cNvPr id="18436" name="Text Box 4"/>
           <p:cNvSpPr txBox="1">
             <a:spLocks noChangeArrowheads="1"/>
           </p:cNvSpPr>
@@ -23518,6 +22077,11 @@
               </a:rPr>
               <a:t>章：线性模型</a:t>
             </a:r>
+            <a:endParaRPr kumimoji="1" lang="zh-CN" altLang="en-US" b="1" dirty="0">
+              <a:latin typeface="黑体" panose="02010609060101010101" pitchFamily="49" charset="-122"/>
+              <a:ea typeface="黑体" panose="02010609060101010101" pitchFamily="49" charset="-122"/>
+              <a:cs typeface="楷体_GB2312"/>
+            </a:endParaRPr>
           </a:p>
         </p:txBody>
       </p:sp>
@@ -23527,13 +22091,7 @@
           <p:cNvGraphicFramePr>
             <a:graphicFrameLocks noChangeAspect="1"/>
           </p:cNvGraphicFramePr>
-          <p:nvPr>
-            <p:extLst>
-              <p:ext uri="{D42A27DB-BD31-4B8C-83A1-F6EECF244321}">
-                <p14:modId xmlns:p14="http://schemas.microsoft.com/office/powerpoint/2010/main" val="1011501050"/>
-              </p:ext>
-            </p:extLst>
-          </p:nvPr>
+          <p:nvPr/>
         </p:nvGraphicFramePr>
         <p:xfrm>
           <a:off x="4211960" y="726281"/>
@@ -23543,23 +22101,23 @@
           <a:graphicData uri="http://schemas.openxmlformats.org/presentationml/2006/ole">
             <mc:AlternateContent xmlns:mc="http://schemas.openxmlformats.org/markup-compatibility/2006">
               <mc:Choice xmlns:v="urn:schemas-microsoft-com:vml" Requires="v">
-                <p:oleObj name="Formula" r:id="rId3" imgW="1096200" imgH="186840" progId="Equation.Ribbit">
+                <p:oleObj spid="_x0000_s27941" name="Formula" r:id="rId1" imgW="1096010" imgH="186690" progId="Equation.Ribbit">
                   <p:embed/>
                 </p:oleObj>
               </mc:Choice>
               <mc:Fallback>
-                <p:oleObj name="Formula" r:id="rId3" imgW="1096200" imgH="186840" progId="Equation.Ribbit">
+                <p:oleObj name="Formula" r:id="rId1" imgW="1096010" imgH="186690" progId="Equation.Ribbit">
                   <p:embed/>
                   <p:pic>
                     <p:nvPicPr>
-                      <p:cNvPr id="6" name="对象 5"/>
+                      <p:cNvPr id="0" name="对象 5"/>
                       <p:cNvPicPr>
                         <a:picLocks noChangeAspect="1" noChangeArrowheads="1"/>
                       </p:cNvPicPr>
                       <p:nvPr/>
                     </p:nvPicPr>
                     <p:blipFill>
-                      <a:blip r:embed="rId4">
+                      <a:blip r:embed="rId2">
                         <a:extLst>
                           <a:ext uri="{28A0092B-C50C-407E-A947-70E740481C1C}">
                             <a14:useLocalDpi xmlns:a14="http://schemas.microsoft.com/office/drawing/2010/main" val="0"/>
@@ -23619,7 +22177,7 @@
           <p:nvPr/>
         </p:nvPicPr>
         <p:blipFill>
-          <a:blip r:embed="rId5"/>
+          <a:blip r:embed="rId3"/>
           <a:stretch>
             <a:fillRect/>
           </a:stretch>
@@ -23640,13 +22198,7 @@
           <p:cNvGraphicFramePr>
             <a:graphicFrameLocks noChangeAspect="1"/>
           </p:cNvGraphicFramePr>
-          <p:nvPr>
-            <p:extLst>
-              <p:ext uri="{D42A27DB-BD31-4B8C-83A1-F6EECF244321}">
-                <p14:modId xmlns:p14="http://schemas.microsoft.com/office/powerpoint/2010/main" val="1885593413"/>
-              </p:ext>
-            </p:extLst>
-          </p:nvPr>
+          <p:nvPr/>
         </p:nvGraphicFramePr>
         <p:xfrm>
           <a:off x="7264021" y="2895020"/>
@@ -23656,23 +22208,23 @@
           <a:graphicData uri="http://schemas.openxmlformats.org/presentationml/2006/ole">
             <mc:AlternateContent xmlns:mc="http://schemas.openxmlformats.org/markup-compatibility/2006">
               <mc:Choice xmlns:v="urn:schemas-microsoft-com:vml" Requires="v">
-                <p:oleObj name="Formula" r:id="rId6" imgW="839520" imgH="379800" progId="Equation.Ribbit">
+                <p:oleObj spid="_x0000_s3" name="Formula" r:id="rId4" imgW="839470" imgH="379730" progId="Equation.Ribbit">
                   <p:embed/>
                 </p:oleObj>
               </mc:Choice>
               <mc:Fallback>
-                <p:oleObj name="Formula" r:id="rId6" imgW="839520" imgH="379800" progId="Equation.Ribbit">
+                <p:oleObj name="Formula" r:id="rId4" imgW="839470" imgH="379730" progId="Equation.Ribbit">
                   <p:embed/>
                   <p:pic>
                     <p:nvPicPr>
-                      <p:cNvPr id="5" name="对象 4"/>
+                      <p:cNvPr id="0" name="对象 4"/>
                       <p:cNvPicPr>
                         <a:picLocks noChangeAspect="1" noChangeArrowheads="1"/>
                       </p:cNvPicPr>
                       <p:nvPr/>
                     </p:nvPicPr>
                     <p:blipFill>
-                      <a:blip r:embed="rId7">
+                      <a:blip r:embed="rId5">
                         <a:extLst>
                           <a:ext uri="{28A0092B-C50C-407E-A947-70E740481C1C}">
                             <a14:useLocalDpi xmlns:a14="http://schemas.microsoft.com/office/drawing/2010/main" val="0"/>
@@ -23710,13 +22262,7 @@
           <p:cNvGraphicFramePr>
             <a:graphicFrameLocks noChangeAspect="1"/>
           </p:cNvGraphicFramePr>
-          <p:nvPr>
-            <p:extLst>
-              <p:ext uri="{D42A27DB-BD31-4B8C-83A1-F6EECF244321}">
-                <p14:modId xmlns:p14="http://schemas.microsoft.com/office/powerpoint/2010/main" val="620882007"/>
-              </p:ext>
-            </p:extLst>
-          </p:nvPr>
+          <p:nvPr/>
         </p:nvGraphicFramePr>
         <p:xfrm>
           <a:off x="5673535" y="1618580"/>
@@ -23726,23 +22272,23 @@
           <a:graphicData uri="http://schemas.openxmlformats.org/presentationml/2006/ole">
             <mc:AlternateContent xmlns:mc="http://schemas.openxmlformats.org/markup-compatibility/2006">
               <mc:Choice xmlns:v="urn:schemas-microsoft-com:vml" Requires="v">
-                <p:oleObj name="Formula" r:id="rId8" imgW="1158480" imgH="344520" progId="Equation.Ribbit">
+                <p:oleObj spid="_x0000_s4" name="Formula" r:id="rId6" imgW="1158240" imgH="344170" progId="Equation.Ribbit">
                   <p:embed/>
                 </p:oleObj>
               </mc:Choice>
               <mc:Fallback>
-                <p:oleObj name="Formula" r:id="rId8" imgW="1158480" imgH="344520" progId="Equation.Ribbit">
+                <p:oleObj name="Formula" r:id="rId6" imgW="1158240" imgH="344170" progId="Equation.Ribbit">
                   <p:embed/>
                   <p:pic>
                     <p:nvPicPr>
-                      <p:cNvPr id="5" name="对象 4"/>
+                      <p:cNvPr id="0" name="对象 4"/>
                       <p:cNvPicPr>
                         <a:picLocks noChangeAspect="1" noChangeArrowheads="1"/>
                       </p:cNvPicPr>
                       <p:nvPr/>
                     </p:nvPicPr>
                     <p:blipFill>
-                      <a:blip r:embed="rId9">
+                      <a:blip r:embed="rId7">
                         <a:extLst>
                           <a:ext uri="{28A0092B-C50C-407E-A947-70E740481C1C}">
                             <a14:useLocalDpi xmlns:a14="http://schemas.microsoft.com/office/drawing/2010/main" val="0"/>
@@ -23794,11 +22340,6 @@
         </a:graphic>
       </p:graphicFrame>
     </p:spTree>
-    <p:extLst>
-      <p:ext uri="{BB962C8B-B14F-4D97-AF65-F5344CB8AC3E}">
-        <p14:creationId xmlns:p14="http://schemas.microsoft.com/office/powerpoint/2010/main" val="99380758"/>
-      </p:ext>
-    </p:extLst>
   </p:cSld>
   <p:clrMapOvr>
     <a:masterClrMapping/>
@@ -24514,13 +23055,7 @@
       </p:grpSpPr>
       <p:sp>
         <p:nvSpPr>
-          <p:cNvPr id="18434" name="灯片编号占位符 5">
-            <a:extLst>
-              <a:ext uri="{FF2B5EF4-FFF2-40B4-BE49-F238E27FC236}">
-                <a16:creationId xmlns:a16="http://schemas.microsoft.com/office/drawing/2014/main" id="{CBBD9809-2CC4-42C3-B564-FAC6896E7580}"/>
-              </a:ext>
-            </a:extLst>
-          </p:cNvPr>
+          <p:cNvPr id="18434" name="灯片编号占位符 5"/>
           <p:cNvSpPr>
             <a:spLocks noGrp="1"/>
           </p:cNvSpPr>
@@ -24704,14 +23239,6 @@
               <a:rPr kumimoji="1" lang="en-US" altLang="zh-CN" sz="1400" smtClean="0">
                 <a:latin typeface="Times New Roman" panose="02020603050405020304" pitchFamily="18" charset="0"/>
               </a:rPr>
-              <a:pPr>
-                <a:spcBef>
-                  <a:spcPct val="0"/>
-                </a:spcBef>
-                <a:buFontTx/>
-                <a:buNone/>
-              </a:pPr>
-              <a:t>8</a:t>
             </a:fld>
             <a:endParaRPr kumimoji="1" lang="en-US" altLang="zh-CN" sz="1400">
               <a:latin typeface="Times New Roman" panose="02020603050405020304" pitchFamily="18" charset="0"/>
@@ -24721,13 +23248,7 @@
       </p:sp>
       <p:sp>
         <p:nvSpPr>
-          <p:cNvPr id="887811" name="Rectangle 3">
-            <a:extLst>
-              <a:ext uri="{FF2B5EF4-FFF2-40B4-BE49-F238E27FC236}">
-                <a16:creationId xmlns:a16="http://schemas.microsoft.com/office/drawing/2014/main" id="{E67925BF-BD9D-4849-975B-B00461AA9122}"/>
-              </a:ext>
-            </a:extLst>
-          </p:cNvPr>
+          <p:cNvPr id="887811" name="Rectangle 3"/>
           <p:cNvSpPr>
             <a:spLocks noGrp="1"/>
           </p:cNvSpPr>
@@ -24764,6 +23285,11 @@
               </a:rPr>
               <a:t>经典的属性划分方法：</a:t>
             </a:r>
+            <a:endParaRPr lang="zh-CN" altLang="en-US" sz="2800" b="1" dirty="0">
+              <a:latin typeface="Times New Roman" panose="02020603050405020304" pitchFamily="18" charset="0"/>
+              <a:ea typeface="楷体" panose="02010609060101010101" pitchFamily="49" charset="-122"/>
+              <a:cs typeface="Times New Roman" panose="02020603050405020304" pitchFamily="18" charset="0"/>
+            </a:endParaRPr>
           </a:p>
           <a:p>
             <a:pPr lvl="1" eaLnBrk="1" hangingPunct="1">
@@ -24793,6 +23319,11 @@
               </a:rPr>
               <a:t>ID3</a:t>
             </a:r>
+            <a:endParaRPr lang="en-US" altLang="zh-CN" sz="2400" dirty="0">
+              <a:latin typeface="Times New Roman" panose="02020603050405020304" pitchFamily="18" charset="0"/>
+              <a:ea typeface="楷体" panose="02010609060101010101" pitchFamily="49" charset="-122"/>
+              <a:cs typeface="Times New Roman" panose="02020603050405020304" pitchFamily="18" charset="0"/>
+            </a:endParaRPr>
           </a:p>
           <a:p>
             <a:pPr lvl="1" eaLnBrk="1" hangingPunct="1">
@@ -24822,6 +23353,11 @@
               </a:rPr>
               <a:t>C4.5</a:t>
             </a:r>
+            <a:endParaRPr lang="en-US" altLang="zh-CN" sz="2400" dirty="0">
+              <a:latin typeface="Times New Roman" panose="02020603050405020304" pitchFamily="18" charset="0"/>
+              <a:ea typeface="楷体" panose="02010609060101010101" pitchFamily="49" charset="-122"/>
+              <a:cs typeface="Times New Roman" panose="02020603050405020304" pitchFamily="18" charset="0"/>
+            </a:endParaRPr>
           </a:p>
           <a:p>
             <a:pPr lvl="1" eaLnBrk="1" hangingPunct="1">
@@ -24851,6 +23387,11 @@
               </a:rPr>
               <a:t>CART</a:t>
             </a:r>
+            <a:endParaRPr lang="en-US" altLang="zh-CN" sz="2400" dirty="0">
+              <a:latin typeface="Times New Roman" panose="02020603050405020304" pitchFamily="18" charset="0"/>
+              <a:ea typeface="楷体" panose="02010609060101010101" pitchFamily="49" charset="-122"/>
+              <a:cs typeface="Times New Roman" panose="02020603050405020304" pitchFamily="18" charset="0"/>
+            </a:endParaRPr>
           </a:p>
           <a:p>
             <a:pPr eaLnBrk="1" hangingPunct="1">
@@ -24872,6 +23413,11 @@
               </a:rPr>
               <a:t>剪枝处理：“过拟合”的解决手段</a:t>
             </a:r>
+            <a:endParaRPr lang="zh-CN" altLang="en-US" sz="2800" b="1" dirty="0">
+              <a:latin typeface="Times New Roman" panose="02020603050405020304" pitchFamily="18" charset="0"/>
+              <a:ea typeface="楷体" panose="02010609060101010101" pitchFamily="49" charset="-122"/>
+              <a:cs typeface="Times New Roman" panose="02020603050405020304" pitchFamily="18" charset="0"/>
+            </a:endParaRPr>
           </a:p>
           <a:p>
             <a:pPr lvl="1" eaLnBrk="1" hangingPunct="1">
@@ -24893,6 +23439,11 @@
               </a:rPr>
               <a:t>预剪枝（优缺点）</a:t>
             </a:r>
+            <a:endParaRPr lang="zh-CN" altLang="en-US" sz="2400" dirty="0">
+              <a:latin typeface="Times New Roman" panose="02020603050405020304" pitchFamily="18" charset="0"/>
+              <a:ea typeface="楷体" panose="02010609060101010101" pitchFamily="49" charset="-122"/>
+              <a:cs typeface="Times New Roman" panose="02020603050405020304" pitchFamily="18" charset="0"/>
+            </a:endParaRPr>
           </a:p>
           <a:p>
             <a:pPr lvl="1" eaLnBrk="1" hangingPunct="1">
@@ -24914,6 +23465,11 @@
               </a:rPr>
               <a:t>后剪枝（优缺点）</a:t>
             </a:r>
+            <a:endParaRPr lang="zh-CN" altLang="en-US" sz="2400" dirty="0">
+              <a:latin typeface="Times New Roman" panose="02020603050405020304" pitchFamily="18" charset="0"/>
+              <a:ea typeface="楷体" panose="02010609060101010101" pitchFamily="49" charset="-122"/>
+              <a:cs typeface="Times New Roman" panose="02020603050405020304" pitchFamily="18" charset="0"/>
+            </a:endParaRPr>
           </a:p>
           <a:p>
             <a:pPr eaLnBrk="1" hangingPunct="1">
@@ -24987,6 +23543,11 @@
               </a:rPr>
               <a:t>回归树</a:t>
             </a:r>
+            <a:endParaRPr lang="zh-CN" altLang="en-US" sz="2800" b="1" dirty="0">
+              <a:latin typeface="Times New Roman" panose="02020603050405020304" pitchFamily="18" charset="0"/>
+              <a:ea typeface="楷体" panose="02010609060101010101" pitchFamily="49" charset="-122"/>
+              <a:cs typeface="Times New Roman" panose="02020603050405020304" pitchFamily="18" charset="0"/>
+            </a:endParaRPr>
           </a:p>
           <a:p>
             <a:pPr marL="0" indent="0" eaLnBrk="1" hangingPunct="1">
@@ -25122,13 +23683,7 @@
       </p:sp>
       <p:sp>
         <p:nvSpPr>
-          <p:cNvPr id="18436" name="Text Box 4">
-            <a:extLst>
-              <a:ext uri="{FF2B5EF4-FFF2-40B4-BE49-F238E27FC236}">
-                <a16:creationId xmlns:a16="http://schemas.microsoft.com/office/drawing/2014/main" id="{EB81EA09-BA58-4C02-A7E1-E64004DF3351}"/>
-              </a:ext>
-            </a:extLst>
-          </p:cNvPr>
+          <p:cNvPr id="18436" name="Text Box 4"/>
           <p:cNvSpPr txBox="1">
             <a:spLocks noChangeArrowheads="1"/>
           </p:cNvSpPr>
@@ -25352,15 +23907,15 @@
               </a:rPr>
               <a:t>章：决策树</a:t>
             </a:r>
+            <a:endParaRPr kumimoji="1" lang="zh-CN" altLang="en-US" b="1" dirty="0">
+              <a:latin typeface="黑体" panose="02010609060101010101" pitchFamily="49" charset="-122"/>
+              <a:ea typeface="黑体" panose="02010609060101010101" pitchFamily="49" charset="-122"/>
+              <a:cs typeface="楷体_GB2312"/>
+            </a:endParaRPr>
           </a:p>
         </p:txBody>
       </p:sp>
     </p:spTree>
-    <p:extLst>
-      <p:ext uri="{BB962C8B-B14F-4D97-AF65-F5344CB8AC3E}">
-        <p14:creationId xmlns:p14="http://schemas.microsoft.com/office/powerpoint/2010/main" val="2249180221"/>
-      </p:ext>
-    </p:extLst>
   </p:cSld>
   <p:clrMapOvr>
     <a:masterClrMapping/>
@@ -25712,13 +24267,13 @@
                     </p:cTn>
                   </p:par>
                   <p:par>
-                    <p:cTn id="28" fill="hold" nodeType="clickPar">
+                    <p:cTn id="28" fill="hold">
                       <p:stCondLst>
                         <p:cond delay="indefinite"/>
                       </p:stCondLst>
                       <p:childTnLst>
                         <p:par>
-                          <p:cTn id="29" fill="hold" nodeType="withGroup">
+                          <p:cTn id="29" fill="hold">
                             <p:stCondLst>
                               <p:cond delay="0"/>
                             </p:stCondLst>
@@ -25973,7 +24528,7 @@
           <p:nvPr/>
         </p:nvPicPr>
         <p:blipFill>
-          <a:blip r:embed="rId2">
+          <a:blip r:embed="rId1">
             <a:extLst>
               <a:ext uri="{28A0092B-C50C-407E-A947-70E740481C1C}">
                 <a14:useLocalDpi xmlns:a14="http://schemas.microsoft.com/office/drawing/2010/main" val="0"/>
@@ -26019,11 +24574,6 @@
         </p:spPr>
       </p:pic>
     </p:spTree>
-    <p:extLst>
-      <p:ext uri="{BB962C8B-B14F-4D97-AF65-F5344CB8AC3E}">
-        <p14:creationId xmlns:p14="http://schemas.microsoft.com/office/powerpoint/2010/main" val="31295996"/>
-      </p:ext>
-    </p:extLst>
   </p:cSld>
   <p:clrMapOvr>
     <a:masterClrMapping/>
@@ -26309,8 +24859,11 @@
       </a:bgFillStyleLst>
     </a:fmtScheme>
   </a:themeElements>
-  <a:objectDefaults/>
-  <a:extraClrSchemeLst/>
+  <a:extLst>
+    <a:ext uri="{05A4C25C-085E-4340-85A3-A5531E510DB2}">
+      <thm15:themeFamily xmlns:thm15="http://schemas.microsoft.com/office/thememl/2012/main" name="Office Theme" id="{62F939B6-93AF-4DB8-9C6B-D6C7DFDC589F}" vid="{4A3C46E8-61CC-4603-A589-7422A47A8E4A}"/>
+    </a:ext>
+  </a:extLst>
 </a:theme>
 </file>
 
@@ -26594,8 +25147,11 @@
       </a:bgFillStyleLst>
     </a:fmtScheme>
   </a:themeElements>
-  <a:objectDefaults/>
-  <a:extraClrSchemeLst/>
+  <a:extLst>
+    <a:ext uri="{05A4C25C-085E-4340-85A3-A5531E510DB2}">
+      <thm15:themeFamily xmlns:thm15="http://schemas.microsoft.com/office/thememl/2012/main" name="Office Theme" id="{62F939B6-93AF-4DB8-9C6B-D6C7DFDC589F}" vid="{4A3C46E8-61CC-4603-A589-7422A47A8E4A}"/>
+    </a:ext>
+  </a:extLst>
 </a:theme>
 </file>
 
@@ -26879,7 +25435,10 @@
       </a:bgFillStyleLst>
     </a:fmtScheme>
   </a:themeElements>
-  <a:objectDefaults/>
-  <a:extraClrSchemeLst/>
+  <a:extLst>
+    <a:ext uri="{05A4C25C-085E-4340-85A3-A5531E510DB2}">
+      <thm15:themeFamily xmlns:thm15="http://schemas.microsoft.com/office/thememl/2012/main" name="Office Theme" id="{62F939B6-93AF-4DB8-9C6B-D6C7DFDC589F}" vid="{4A3C46E8-61CC-4603-A589-7422A47A8E4A}"/>
+    </a:ext>
+  </a:extLst>
 </a:theme>
 </file>